--- a/slides/TP558_1_Introdução_ao_curso.pptx
+++ b/slides/TP558_1_Introdução_ao_curso.pptx
@@ -298,7 +298,7 @@
           <a:p>
             <a:fld id="{144F1436-6906-4D93-B7A2-786C327BFA14}" type="datetimeFigureOut">
               <a:rPr lang="nl-BE" smtClean="0"/>
-              <a:t>28/06/2024</a:t>
+              <a:t>8/08/2025</a:t>
             </a:fld>
             <a:endParaRPr lang="nl-BE"/>
           </a:p>
@@ -463,7 +463,7 @@
           <a:p>
             <a:fld id="{AA8CD09E-2914-4F47-B6C1-51B2C31814C9}" type="datetimeFigureOut">
               <a:rPr lang="pt-BR" smtClean="0"/>
-              <a:t>28/06/2024</a:t>
+              <a:t>08/08/2025</a:t>
             </a:fld>
             <a:endParaRPr lang="pt-BR"/>
           </a:p>
@@ -1124,7 +1124,7 @@
           <p:cNvPr id="2" name="Título 1">
             <a:extLst>
               <a:ext uri="{FF2B5EF4-FFF2-40B4-BE49-F238E27FC236}">
-                <a16:creationId xmlns:a16="http://schemas.microsoft.com/office/drawing/2014/main" id="{1DB9B4FF-B06E-403C-A326-BDC64D8FF94E}"/>
+                <a16:creationId xmlns:a16="http://schemas.microsoft.com/office/drawing/2014/main" xmlns="" id="{1DB9B4FF-B06E-403C-A326-BDC64D8FF94E}"/>
               </a:ext>
             </a:extLst>
           </p:cNvPr>
@@ -1161,7 +1161,7 @@
           <p:cNvPr id="3" name="Subtítulo 2">
             <a:extLst>
               <a:ext uri="{FF2B5EF4-FFF2-40B4-BE49-F238E27FC236}">
-                <a16:creationId xmlns:a16="http://schemas.microsoft.com/office/drawing/2014/main" id="{247BDFCE-746E-45BF-A319-4733D58D1632}"/>
+                <a16:creationId xmlns:a16="http://schemas.microsoft.com/office/drawing/2014/main" xmlns="" id="{247BDFCE-746E-45BF-A319-4733D58D1632}"/>
               </a:ext>
             </a:extLst>
           </p:cNvPr>
@@ -1231,7 +1231,7 @@
           <p:cNvPr id="4" name="Espaço Reservado para Data 3">
             <a:extLst>
               <a:ext uri="{FF2B5EF4-FFF2-40B4-BE49-F238E27FC236}">
-                <a16:creationId xmlns:a16="http://schemas.microsoft.com/office/drawing/2014/main" id="{9EDE2778-5372-4104-B96D-968184DA8288}"/>
+                <a16:creationId xmlns:a16="http://schemas.microsoft.com/office/drawing/2014/main" xmlns="" id="{9EDE2778-5372-4104-B96D-968184DA8288}"/>
               </a:ext>
             </a:extLst>
           </p:cNvPr>
@@ -1249,7 +1249,7 @@
           <a:p>
             <a:fld id="{63289F7E-B80B-496E-81B4-D396C37C9454}" type="datetimeFigureOut">
               <a:rPr lang="pt-BR" smtClean="0"/>
-              <a:t>28/06/2024</a:t>
+              <a:t>08/08/2025</a:t>
             </a:fld>
             <a:endParaRPr lang="pt-BR"/>
           </a:p>
@@ -1260,7 +1260,7 @@
           <p:cNvPr id="5" name="Espaço Reservado para Rodapé 4">
             <a:extLst>
               <a:ext uri="{FF2B5EF4-FFF2-40B4-BE49-F238E27FC236}">
-                <a16:creationId xmlns:a16="http://schemas.microsoft.com/office/drawing/2014/main" id="{C1DD0F41-C861-4051-988D-3024A37A4B93}"/>
+                <a16:creationId xmlns:a16="http://schemas.microsoft.com/office/drawing/2014/main" xmlns="" id="{C1DD0F41-C861-4051-988D-3024A37A4B93}"/>
               </a:ext>
             </a:extLst>
           </p:cNvPr>
@@ -1285,7 +1285,7 @@
           <p:cNvPr id="6" name="Espaço Reservado para Número de Slide 5">
             <a:extLst>
               <a:ext uri="{FF2B5EF4-FFF2-40B4-BE49-F238E27FC236}">
-                <a16:creationId xmlns:a16="http://schemas.microsoft.com/office/drawing/2014/main" id="{07E5967E-D980-431A-A5DB-3F0C5030A81E}"/>
+                <a16:creationId xmlns:a16="http://schemas.microsoft.com/office/drawing/2014/main" xmlns="" id="{07E5967E-D980-431A-A5DB-3F0C5030A81E}"/>
               </a:ext>
             </a:extLst>
           </p:cNvPr>
@@ -1344,7 +1344,7 @@
           <p:cNvPr id="2" name="Título 1">
             <a:extLst>
               <a:ext uri="{FF2B5EF4-FFF2-40B4-BE49-F238E27FC236}">
-                <a16:creationId xmlns:a16="http://schemas.microsoft.com/office/drawing/2014/main" id="{9036C49F-3E68-4175-81BA-3C3FEE44308A}"/>
+                <a16:creationId xmlns:a16="http://schemas.microsoft.com/office/drawing/2014/main" xmlns="" id="{9036C49F-3E68-4175-81BA-3C3FEE44308A}"/>
               </a:ext>
             </a:extLst>
           </p:cNvPr>
@@ -1372,7 +1372,7 @@
           <p:cNvPr id="3" name="Espaço Reservado para Texto Vertical 2">
             <a:extLst>
               <a:ext uri="{FF2B5EF4-FFF2-40B4-BE49-F238E27FC236}">
-                <a16:creationId xmlns:a16="http://schemas.microsoft.com/office/drawing/2014/main" id="{426FA736-3DD3-4D4E-B57B-BBE1D8F7D424}"/>
+                <a16:creationId xmlns:a16="http://schemas.microsoft.com/office/drawing/2014/main" xmlns="" id="{426FA736-3DD3-4D4E-B57B-BBE1D8F7D424}"/>
               </a:ext>
             </a:extLst>
           </p:cNvPr>
@@ -1429,7 +1429,7 @@
           <p:cNvPr id="4" name="Espaço Reservado para Data 3">
             <a:extLst>
               <a:ext uri="{FF2B5EF4-FFF2-40B4-BE49-F238E27FC236}">
-                <a16:creationId xmlns:a16="http://schemas.microsoft.com/office/drawing/2014/main" id="{99E8855C-D8FD-48F6-B14E-861E0DE4D915}"/>
+                <a16:creationId xmlns:a16="http://schemas.microsoft.com/office/drawing/2014/main" xmlns="" id="{99E8855C-D8FD-48F6-B14E-861E0DE4D915}"/>
               </a:ext>
             </a:extLst>
           </p:cNvPr>
@@ -1447,7 +1447,7 @@
           <a:p>
             <a:fld id="{63289F7E-B80B-496E-81B4-D396C37C9454}" type="datetimeFigureOut">
               <a:rPr lang="pt-BR" smtClean="0"/>
-              <a:t>28/06/2024</a:t>
+              <a:t>08/08/2025</a:t>
             </a:fld>
             <a:endParaRPr lang="pt-BR"/>
           </a:p>
@@ -1458,7 +1458,7 @@
           <p:cNvPr id="5" name="Espaço Reservado para Rodapé 4">
             <a:extLst>
               <a:ext uri="{FF2B5EF4-FFF2-40B4-BE49-F238E27FC236}">
-                <a16:creationId xmlns:a16="http://schemas.microsoft.com/office/drawing/2014/main" id="{97C0BB88-2F21-42A5-ACFF-83DA47F2D340}"/>
+                <a16:creationId xmlns:a16="http://schemas.microsoft.com/office/drawing/2014/main" xmlns="" id="{97C0BB88-2F21-42A5-ACFF-83DA47F2D340}"/>
               </a:ext>
             </a:extLst>
           </p:cNvPr>
@@ -1483,7 +1483,7 @@
           <p:cNvPr id="6" name="Espaço Reservado para Número de Slide 5">
             <a:extLst>
               <a:ext uri="{FF2B5EF4-FFF2-40B4-BE49-F238E27FC236}">
-                <a16:creationId xmlns:a16="http://schemas.microsoft.com/office/drawing/2014/main" id="{6CB462B3-1F22-4C05-B4B8-7A279FB7D5E9}"/>
+                <a16:creationId xmlns:a16="http://schemas.microsoft.com/office/drawing/2014/main" xmlns="" id="{6CB462B3-1F22-4C05-B4B8-7A279FB7D5E9}"/>
               </a:ext>
             </a:extLst>
           </p:cNvPr>
@@ -1542,7 +1542,7 @@
           <p:cNvPr id="2" name="Título Vertical 1">
             <a:extLst>
               <a:ext uri="{FF2B5EF4-FFF2-40B4-BE49-F238E27FC236}">
-                <a16:creationId xmlns:a16="http://schemas.microsoft.com/office/drawing/2014/main" id="{EAEAB728-701C-4207-A9D5-23FF45C60502}"/>
+                <a16:creationId xmlns:a16="http://schemas.microsoft.com/office/drawing/2014/main" xmlns="" id="{EAEAB728-701C-4207-A9D5-23FF45C60502}"/>
               </a:ext>
             </a:extLst>
           </p:cNvPr>
@@ -1575,7 +1575,7 @@
           <p:cNvPr id="3" name="Espaço Reservado para Texto Vertical 2">
             <a:extLst>
               <a:ext uri="{FF2B5EF4-FFF2-40B4-BE49-F238E27FC236}">
-                <a16:creationId xmlns:a16="http://schemas.microsoft.com/office/drawing/2014/main" id="{BA8C8CCF-7823-480A-9A19-0F664DD17E3B}"/>
+                <a16:creationId xmlns:a16="http://schemas.microsoft.com/office/drawing/2014/main" xmlns="" id="{BA8C8CCF-7823-480A-9A19-0F664DD17E3B}"/>
               </a:ext>
             </a:extLst>
           </p:cNvPr>
@@ -1637,7 +1637,7 @@
           <p:cNvPr id="4" name="Espaço Reservado para Data 3">
             <a:extLst>
               <a:ext uri="{FF2B5EF4-FFF2-40B4-BE49-F238E27FC236}">
-                <a16:creationId xmlns:a16="http://schemas.microsoft.com/office/drawing/2014/main" id="{721D5734-7B1F-425D-942F-6EB73344027C}"/>
+                <a16:creationId xmlns:a16="http://schemas.microsoft.com/office/drawing/2014/main" xmlns="" id="{721D5734-7B1F-425D-942F-6EB73344027C}"/>
               </a:ext>
             </a:extLst>
           </p:cNvPr>
@@ -1655,7 +1655,7 @@
           <a:p>
             <a:fld id="{63289F7E-B80B-496E-81B4-D396C37C9454}" type="datetimeFigureOut">
               <a:rPr lang="pt-BR" smtClean="0"/>
-              <a:t>28/06/2024</a:t>
+              <a:t>08/08/2025</a:t>
             </a:fld>
             <a:endParaRPr lang="pt-BR"/>
           </a:p>
@@ -1666,7 +1666,7 @@
           <p:cNvPr id="5" name="Espaço Reservado para Rodapé 4">
             <a:extLst>
               <a:ext uri="{FF2B5EF4-FFF2-40B4-BE49-F238E27FC236}">
-                <a16:creationId xmlns:a16="http://schemas.microsoft.com/office/drawing/2014/main" id="{1E1AAEAC-F08D-45FE-89EC-B1B349A868C9}"/>
+                <a16:creationId xmlns:a16="http://schemas.microsoft.com/office/drawing/2014/main" xmlns="" id="{1E1AAEAC-F08D-45FE-89EC-B1B349A868C9}"/>
               </a:ext>
             </a:extLst>
           </p:cNvPr>
@@ -1691,7 +1691,7 @@
           <p:cNvPr id="6" name="Espaço Reservado para Número de Slide 5">
             <a:extLst>
               <a:ext uri="{FF2B5EF4-FFF2-40B4-BE49-F238E27FC236}">
-                <a16:creationId xmlns:a16="http://schemas.microsoft.com/office/drawing/2014/main" id="{BAA44493-9911-47B2-87A6-C2141A972BC8}"/>
+                <a16:creationId xmlns:a16="http://schemas.microsoft.com/office/drawing/2014/main" xmlns="" id="{BAA44493-9911-47B2-87A6-C2141A972BC8}"/>
               </a:ext>
             </a:extLst>
           </p:cNvPr>
@@ -1750,7 +1750,7 @@
           <p:cNvPr id="2" name="Título 1">
             <a:extLst>
               <a:ext uri="{FF2B5EF4-FFF2-40B4-BE49-F238E27FC236}">
-                <a16:creationId xmlns:a16="http://schemas.microsoft.com/office/drawing/2014/main" id="{71BD44A5-8F21-4626-A01D-48A1C874B1D5}"/>
+                <a16:creationId xmlns:a16="http://schemas.microsoft.com/office/drawing/2014/main" xmlns="" id="{71BD44A5-8F21-4626-A01D-48A1C874B1D5}"/>
               </a:ext>
             </a:extLst>
           </p:cNvPr>
@@ -1778,7 +1778,7 @@
           <p:cNvPr id="3" name="Espaço Reservado para Conteúdo 2">
             <a:extLst>
               <a:ext uri="{FF2B5EF4-FFF2-40B4-BE49-F238E27FC236}">
-                <a16:creationId xmlns:a16="http://schemas.microsoft.com/office/drawing/2014/main" id="{B79E8085-65A9-48AA-951D-71D978BFF4ED}"/>
+                <a16:creationId xmlns:a16="http://schemas.microsoft.com/office/drawing/2014/main" xmlns="" id="{B79E8085-65A9-48AA-951D-71D978BFF4ED}"/>
               </a:ext>
             </a:extLst>
           </p:cNvPr>
@@ -1835,7 +1835,7 @@
           <p:cNvPr id="4" name="Espaço Reservado para Data 3">
             <a:extLst>
               <a:ext uri="{FF2B5EF4-FFF2-40B4-BE49-F238E27FC236}">
-                <a16:creationId xmlns:a16="http://schemas.microsoft.com/office/drawing/2014/main" id="{F05BE1AF-51EA-425D-B188-DE7BD675009F}"/>
+                <a16:creationId xmlns:a16="http://schemas.microsoft.com/office/drawing/2014/main" xmlns="" id="{F05BE1AF-51EA-425D-B188-DE7BD675009F}"/>
               </a:ext>
             </a:extLst>
           </p:cNvPr>
@@ -1853,7 +1853,7 @@
           <a:p>
             <a:fld id="{63289F7E-B80B-496E-81B4-D396C37C9454}" type="datetimeFigureOut">
               <a:rPr lang="pt-BR" smtClean="0"/>
-              <a:t>28/06/2024</a:t>
+              <a:t>08/08/2025</a:t>
             </a:fld>
             <a:endParaRPr lang="pt-BR"/>
           </a:p>
@@ -1864,7 +1864,7 @@
           <p:cNvPr id="5" name="Espaço Reservado para Rodapé 4">
             <a:extLst>
               <a:ext uri="{FF2B5EF4-FFF2-40B4-BE49-F238E27FC236}">
-                <a16:creationId xmlns:a16="http://schemas.microsoft.com/office/drawing/2014/main" id="{121BE632-29CF-4CB9-B365-C9EF38F89BE6}"/>
+                <a16:creationId xmlns:a16="http://schemas.microsoft.com/office/drawing/2014/main" xmlns="" id="{121BE632-29CF-4CB9-B365-C9EF38F89BE6}"/>
               </a:ext>
             </a:extLst>
           </p:cNvPr>
@@ -1889,7 +1889,7 @@
           <p:cNvPr id="6" name="Espaço Reservado para Número de Slide 5">
             <a:extLst>
               <a:ext uri="{FF2B5EF4-FFF2-40B4-BE49-F238E27FC236}">
-                <a16:creationId xmlns:a16="http://schemas.microsoft.com/office/drawing/2014/main" id="{60CF3DD1-9AEC-4A57-B461-4E4DD86FAC18}"/>
+                <a16:creationId xmlns:a16="http://schemas.microsoft.com/office/drawing/2014/main" xmlns="" id="{60CF3DD1-9AEC-4A57-B461-4E4DD86FAC18}"/>
               </a:ext>
             </a:extLst>
           </p:cNvPr>
@@ -1948,7 +1948,7 @@
           <p:cNvPr id="2" name="Título 1">
             <a:extLst>
               <a:ext uri="{FF2B5EF4-FFF2-40B4-BE49-F238E27FC236}">
-                <a16:creationId xmlns:a16="http://schemas.microsoft.com/office/drawing/2014/main" id="{34AB2FF0-A4D7-4E28-991D-FF26140D5988}"/>
+                <a16:creationId xmlns:a16="http://schemas.microsoft.com/office/drawing/2014/main" xmlns="" id="{34AB2FF0-A4D7-4E28-991D-FF26140D5988}"/>
               </a:ext>
             </a:extLst>
           </p:cNvPr>
@@ -1985,7 +1985,7 @@
           <p:cNvPr id="3" name="Espaço Reservado para Texto 2">
             <a:extLst>
               <a:ext uri="{FF2B5EF4-FFF2-40B4-BE49-F238E27FC236}">
-                <a16:creationId xmlns:a16="http://schemas.microsoft.com/office/drawing/2014/main" id="{E2AC45B0-4145-40DB-8E61-105461170604}"/>
+                <a16:creationId xmlns:a16="http://schemas.microsoft.com/office/drawing/2014/main" xmlns="" id="{E2AC45B0-4145-40DB-8E61-105461170604}"/>
               </a:ext>
             </a:extLst>
           </p:cNvPr>
@@ -2110,7 +2110,7 @@
           <p:cNvPr id="4" name="Espaço Reservado para Data 3">
             <a:extLst>
               <a:ext uri="{FF2B5EF4-FFF2-40B4-BE49-F238E27FC236}">
-                <a16:creationId xmlns:a16="http://schemas.microsoft.com/office/drawing/2014/main" id="{50F1D3FB-740A-4EBA-A309-2CE71D12ECFB}"/>
+                <a16:creationId xmlns:a16="http://schemas.microsoft.com/office/drawing/2014/main" xmlns="" id="{50F1D3FB-740A-4EBA-A309-2CE71D12ECFB}"/>
               </a:ext>
             </a:extLst>
           </p:cNvPr>
@@ -2128,7 +2128,7 @@
           <a:p>
             <a:fld id="{63289F7E-B80B-496E-81B4-D396C37C9454}" type="datetimeFigureOut">
               <a:rPr lang="pt-BR" smtClean="0"/>
-              <a:t>28/06/2024</a:t>
+              <a:t>08/08/2025</a:t>
             </a:fld>
             <a:endParaRPr lang="pt-BR"/>
           </a:p>
@@ -2139,7 +2139,7 @@
           <p:cNvPr id="5" name="Espaço Reservado para Rodapé 4">
             <a:extLst>
               <a:ext uri="{FF2B5EF4-FFF2-40B4-BE49-F238E27FC236}">
-                <a16:creationId xmlns:a16="http://schemas.microsoft.com/office/drawing/2014/main" id="{BDCAB18F-8715-4465-A940-F9C193A2ACE9}"/>
+                <a16:creationId xmlns:a16="http://schemas.microsoft.com/office/drawing/2014/main" xmlns="" id="{BDCAB18F-8715-4465-A940-F9C193A2ACE9}"/>
               </a:ext>
             </a:extLst>
           </p:cNvPr>
@@ -2164,7 +2164,7 @@
           <p:cNvPr id="6" name="Espaço Reservado para Número de Slide 5">
             <a:extLst>
               <a:ext uri="{FF2B5EF4-FFF2-40B4-BE49-F238E27FC236}">
-                <a16:creationId xmlns:a16="http://schemas.microsoft.com/office/drawing/2014/main" id="{353466C6-8248-429F-8056-FF040BF509EB}"/>
+                <a16:creationId xmlns:a16="http://schemas.microsoft.com/office/drawing/2014/main" xmlns="" id="{353466C6-8248-429F-8056-FF040BF509EB}"/>
               </a:ext>
             </a:extLst>
           </p:cNvPr>
@@ -2223,7 +2223,7 @@
           <p:cNvPr id="2" name="Título 1">
             <a:extLst>
               <a:ext uri="{FF2B5EF4-FFF2-40B4-BE49-F238E27FC236}">
-                <a16:creationId xmlns:a16="http://schemas.microsoft.com/office/drawing/2014/main" id="{BC7BB9F0-F14B-4A91-B2B7-35BC47FE4DE7}"/>
+                <a16:creationId xmlns:a16="http://schemas.microsoft.com/office/drawing/2014/main" xmlns="" id="{BC7BB9F0-F14B-4A91-B2B7-35BC47FE4DE7}"/>
               </a:ext>
             </a:extLst>
           </p:cNvPr>
@@ -2251,7 +2251,7 @@
           <p:cNvPr id="3" name="Espaço Reservado para Conteúdo 2">
             <a:extLst>
               <a:ext uri="{FF2B5EF4-FFF2-40B4-BE49-F238E27FC236}">
-                <a16:creationId xmlns:a16="http://schemas.microsoft.com/office/drawing/2014/main" id="{EC1FC1C4-73DA-47A6-8496-B0B457F7D39A}"/>
+                <a16:creationId xmlns:a16="http://schemas.microsoft.com/office/drawing/2014/main" xmlns="" id="{EC1FC1C4-73DA-47A6-8496-B0B457F7D39A}"/>
               </a:ext>
             </a:extLst>
           </p:cNvPr>
@@ -2313,7 +2313,7 @@
           <p:cNvPr id="4" name="Espaço Reservado para Conteúdo 3">
             <a:extLst>
               <a:ext uri="{FF2B5EF4-FFF2-40B4-BE49-F238E27FC236}">
-                <a16:creationId xmlns:a16="http://schemas.microsoft.com/office/drawing/2014/main" id="{E92F06A8-A449-4D92-9912-76873E529B38}"/>
+                <a16:creationId xmlns:a16="http://schemas.microsoft.com/office/drawing/2014/main" xmlns="" id="{E92F06A8-A449-4D92-9912-76873E529B38}"/>
               </a:ext>
             </a:extLst>
           </p:cNvPr>
@@ -2375,7 +2375,7 @@
           <p:cNvPr id="5" name="Espaço Reservado para Data 4">
             <a:extLst>
               <a:ext uri="{FF2B5EF4-FFF2-40B4-BE49-F238E27FC236}">
-                <a16:creationId xmlns:a16="http://schemas.microsoft.com/office/drawing/2014/main" id="{938070A4-BC2F-4D55-BD8D-DEAF11BB9EE9}"/>
+                <a16:creationId xmlns:a16="http://schemas.microsoft.com/office/drawing/2014/main" xmlns="" id="{938070A4-BC2F-4D55-BD8D-DEAF11BB9EE9}"/>
               </a:ext>
             </a:extLst>
           </p:cNvPr>
@@ -2393,7 +2393,7 @@
           <a:p>
             <a:fld id="{63289F7E-B80B-496E-81B4-D396C37C9454}" type="datetimeFigureOut">
               <a:rPr lang="pt-BR" smtClean="0"/>
-              <a:t>28/06/2024</a:t>
+              <a:t>08/08/2025</a:t>
             </a:fld>
             <a:endParaRPr lang="pt-BR"/>
           </a:p>
@@ -2404,7 +2404,7 @@
           <p:cNvPr id="6" name="Espaço Reservado para Rodapé 5">
             <a:extLst>
               <a:ext uri="{FF2B5EF4-FFF2-40B4-BE49-F238E27FC236}">
-                <a16:creationId xmlns:a16="http://schemas.microsoft.com/office/drawing/2014/main" id="{45CC2DB8-844A-465F-BA9A-7734C80C7F43}"/>
+                <a16:creationId xmlns:a16="http://schemas.microsoft.com/office/drawing/2014/main" xmlns="" id="{45CC2DB8-844A-465F-BA9A-7734C80C7F43}"/>
               </a:ext>
             </a:extLst>
           </p:cNvPr>
@@ -2429,7 +2429,7 @@
           <p:cNvPr id="7" name="Espaço Reservado para Número de Slide 6">
             <a:extLst>
               <a:ext uri="{FF2B5EF4-FFF2-40B4-BE49-F238E27FC236}">
-                <a16:creationId xmlns:a16="http://schemas.microsoft.com/office/drawing/2014/main" id="{4CC606A8-097B-4040-94E0-CD8C88280D8F}"/>
+                <a16:creationId xmlns:a16="http://schemas.microsoft.com/office/drawing/2014/main" xmlns="" id="{4CC606A8-097B-4040-94E0-CD8C88280D8F}"/>
               </a:ext>
             </a:extLst>
           </p:cNvPr>
@@ -2488,7 +2488,7 @@
           <p:cNvPr id="2" name="Título 1">
             <a:extLst>
               <a:ext uri="{FF2B5EF4-FFF2-40B4-BE49-F238E27FC236}">
-                <a16:creationId xmlns:a16="http://schemas.microsoft.com/office/drawing/2014/main" id="{76D66686-0143-4CB6-8C09-BA326F1E7ACA}"/>
+                <a16:creationId xmlns:a16="http://schemas.microsoft.com/office/drawing/2014/main" xmlns="" id="{76D66686-0143-4CB6-8C09-BA326F1E7ACA}"/>
               </a:ext>
             </a:extLst>
           </p:cNvPr>
@@ -2521,7 +2521,7 @@
           <p:cNvPr id="3" name="Espaço Reservado para Texto 2">
             <a:extLst>
               <a:ext uri="{FF2B5EF4-FFF2-40B4-BE49-F238E27FC236}">
-                <a16:creationId xmlns:a16="http://schemas.microsoft.com/office/drawing/2014/main" id="{0227AB85-F59E-4BCE-B846-4FA0992C2F23}"/>
+                <a16:creationId xmlns:a16="http://schemas.microsoft.com/office/drawing/2014/main" xmlns="" id="{0227AB85-F59E-4BCE-B846-4FA0992C2F23}"/>
               </a:ext>
             </a:extLst>
           </p:cNvPr>
@@ -2592,7 +2592,7 @@
           <p:cNvPr id="4" name="Espaço Reservado para Conteúdo 3">
             <a:extLst>
               <a:ext uri="{FF2B5EF4-FFF2-40B4-BE49-F238E27FC236}">
-                <a16:creationId xmlns:a16="http://schemas.microsoft.com/office/drawing/2014/main" id="{3373456C-7319-4D0A-827D-D29F6B083F5D}"/>
+                <a16:creationId xmlns:a16="http://schemas.microsoft.com/office/drawing/2014/main" xmlns="" id="{3373456C-7319-4D0A-827D-D29F6B083F5D}"/>
               </a:ext>
             </a:extLst>
           </p:cNvPr>
@@ -2654,7 +2654,7 @@
           <p:cNvPr id="5" name="Espaço Reservado para Texto 4">
             <a:extLst>
               <a:ext uri="{FF2B5EF4-FFF2-40B4-BE49-F238E27FC236}">
-                <a16:creationId xmlns:a16="http://schemas.microsoft.com/office/drawing/2014/main" id="{4CD109D0-2E83-4262-8029-A871CEC47406}"/>
+                <a16:creationId xmlns:a16="http://schemas.microsoft.com/office/drawing/2014/main" xmlns="" id="{4CD109D0-2E83-4262-8029-A871CEC47406}"/>
               </a:ext>
             </a:extLst>
           </p:cNvPr>
@@ -2725,7 +2725,7 @@
           <p:cNvPr id="6" name="Espaço Reservado para Conteúdo 5">
             <a:extLst>
               <a:ext uri="{FF2B5EF4-FFF2-40B4-BE49-F238E27FC236}">
-                <a16:creationId xmlns:a16="http://schemas.microsoft.com/office/drawing/2014/main" id="{AD706E3A-CFBB-4A6C-A65F-D0360A9E74FE}"/>
+                <a16:creationId xmlns:a16="http://schemas.microsoft.com/office/drawing/2014/main" xmlns="" id="{AD706E3A-CFBB-4A6C-A65F-D0360A9E74FE}"/>
               </a:ext>
             </a:extLst>
           </p:cNvPr>
@@ -2787,7 +2787,7 @@
           <p:cNvPr id="7" name="Espaço Reservado para Data 6">
             <a:extLst>
               <a:ext uri="{FF2B5EF4-FFF2-40B4-BE49-F238E27FC236}">
-                <a16:creationId xmlns:a16="http://schemas.microsoft.com/office/drawing/2014/main" id="{4172C0E5-5AF0-4805-BB51-443733CD2BD5}"/>
+                <a16:creationId xmlns:a16="http://schemas.microsoft.com/office/drawing/2014/main" xmlns="" id="{4172C0E5-5AF0-4805-BB51-443733CD2BD5}"/>
               </a:ext>
             </a:extLst>
           </p:cNvPr>
@@ -2805,7 +2805,7 @@
           <a:p>
             <a:fld id="{63289F7E-B80B-496E-81B4-D396C37C9454}" type="datetimeFigureOut">
               <a:rPr lang="pt-BR" smtClean="0"/>
-              <a:t>28/06/2024</a:t>
+              <a:t>08/08/2025</a:t>
             </a:fld>
             <a:endParaRPr lang="pt-BR"/>
           </a:p>
@@ -2816,7 +2816,7 @@
           <p:cNvPr id="8" name="Espaço Reservado para Rodapé 7">
             <a:extLst>
               <a:ext uri="{FF2B5EF4-FFF2-40B4-BE49-F238E27FC236}">
-                <a16:creationId xmlns:a16="http://schemas.microsoft.com/office/drawing/2014/main" id="{0E801648-156F-497E-99CF-797DF48051E1}"/>
+                <a16:creationId xmlns:a16="http://schemas.microsoft.com/office/drawing/2014/main" xmlns="" id="{0E801648-156F-497E-99CF-797DF48051E1}"/>
               </a:ext>
             </a:extLst>
           </p:cNvPr>
@@ -2841,7 +2841,7 @@
           <p:cNvPr id="9" name="Espaço Reservado para Número de Slide 8">
             <a:extLst>
               <a:ext uri="{FF2B5EF4-FFF2-40B4-BE49-F238E27FC236}">
-                <a16:creationId xmlns:a16="http://schemas.microsoft.com/office/drawing/2014/main" id="{EEE23D32-80E7-4796-A137-66BF842E4B53}"/>
+                <a16:creationId xmlns:a16="http://schemas.microsoft.com/office/drawing/2014/main" xmlns="" id="{EEE23D32-80E7-4796-A137-66BF842E4B53}"/>
               </a:ext>
             </a:extLst>
           </p:cNvPr>
@@ -2900,7 +2900,7 @@
           <p:cNvPr id="2" name="Título 1">
             <a:extLst>
               <a:ext uri="{FF2B5EF4-FFF2-40B4-BE49-F238E27FC236}">
-                <a16:creationId xmlns:a16="http://schemas.microsoft.com/office/drawing/2014/main" id="{2BCE2379-C78F-47E1-8CFC-B846E7AF148D}"/>
+                <a16:creationId xmlns:a16="http://schemas.microsoft.com/office/drawing/2014/main" xmlns="" id="{2BCE2379-C78F-47E1-8CFC-B846E7AF148D}"/>
               </a:ext>
             </a:extLst>
           </p:cNvPr>
@@ -2928,7 +2928,7 @@
           <p:cNvPr id="3" name="Espaço Reservado para Data 2">
             <a:extLst>
               <a:ext uri="{FF2B5EF4-FFF2-40B4-BE49-F238E27FC236}">
-                <a16:creationId xmlns:a16="http://schemas.microsoft.com/office/drawing/2014/main" id="{342600A9-7F92-4E22-9D94-E4717252A817}"/>
+                <a16:creationId xmlns:a16="http://schemas.microsoft.com/office/drawing/2014/main" xmlns="" id="{342600A9-7F92-4E22-9D94-E4717252A817}"/>
               </a:ext>
             </a:extLst>
           </p:cNvPr>
@@ -2946,7 +2946,7 @@
           <a:p>
             <a:fld id="{63289F7E-B80B-496E-81B4-D396C37C9454}" type="datetimeFigureOut">
               <a:rPr lang="pt-BR" smtClean="0"/>
-              <a:t>28/06/2024</a:t>
+              <a:t>08/08/2025</a:t>
             </a:fld>
             <a:endParaRPr lang="pt-BR"/>
           </a:p>
@@ -2957,7 +2957,7 @@
           <p:cNvPr id="4" name="Espaço Reservado para Rodapé 3">
             <a:extLst>
               <a:ext uri="{FF2B5EF4-FFF2-40B4-BE49-F238E27FC236}">
-                <a16:creationId xmlns:a16="http://schemas.microsoft.com/office/drawing/2014/main" id="{192E6BED-F546-40CC-A2DF-99CBA853654E}"/>
+                <a16:creationId xmlns:a16="http://schemas.microsoft.com/office/drawing/2014/main" xmlns="" id="{192E6BED-F546-40CC-A2DF-99CBA853654E}"/>
               </a:ext>
             </a:extLst>
           </p:cNvPr>
@@ -2982,7 +2982,7 @@
           <p:cNvPr id="5" name="Espaço Reservado para Número de Slide 4">
             <a:extLst>
               <a:ext uri="{FF2B5EF4-FFF2-40B4-BE49-F238E27FC236}">
-                <a16:creationId xmlns:a16="http://schemas.microsoft.com/office/drawing/2014/main" id="{6091CC40-A8C4-4063-80EB-CC5099621678}"/>
+                <a16:creationId xmlns:a16="http://schemas.microsoft.com/office/drawing/2014/main" xmlns="" id="{6091CC40-A8C4-4063-80EB-CC5099621678}"/>
               </a:ext>
             </a:extLst>
           </p:cNvPr>
@@ -3041,7 +3041,7 @@
           <p:cNvPr id="2" name="Espaço Reservado para Data 1">
             <a:extLst>
               <a:ext uri="{FF2B5EF4-FFF2-40B4-BE49-F238E27FC236}">
-                <a16:creationId xmlns:a16="http://schemas.microsoft.com/office/drawing/2014/main" id="{DD19515C-212C-4EAE-84A3-8FF4BC844F1B}"/>
+                <a16:creationId xmlns:a16="http://schemas.microsoft.com/office/drawing/2014/main" xmlns="" id="{DD19515C-212C-4EAE-84A3-8FF4BC844F1B}"/>
               </a:ext>
             </a:extLst>
           </p:cNvPr>
@@ -3059,7 +3059,7 @@
           <a:p>
             <a:fld id="{63289F7E-B80B-496E-81B4-D396C37C9454}" type="datetimeFigureOut">
               <a:rPr lang="pt-BR" smtClean="0"/>
-              <a:t>28/06/2024</a:t>
+              <a:t>08/08/2025</a:t>
             </a:fld>
             <a:endParaRPr lang="pt-BR"/>
           </a:p>
@@ -3070,7 +3070,7 @@
           <p:cNvPr id="3" name="Espaço Reservado para Rodapé 2">
             <a:extLst>
               <a:ext uri="{FF2B5EF4-FFF2-40B4-BE49-F238E27FC236}">
-                <a16:creationId xmlns:a16="http://schemas.microsoft.com/office/drawing/2014/main" id="{94D3D120-B3E8-4C96-861D-7A4F12F49B3A}"/>
+                <a16:creationId xmlns:a16="http://schemas.microsoft.com/office/drawing/2014/main" xmlns="" id="{94D3D120-B3E8-4C96-861D-7A4F12F49B3A}"/>
               </a:ext>
             </a:extLst>
           </p:cNvPr>
@@ -3095,7 +3095,7 @@
           <p:cNvPr id="4" name="Espaço Reservado para Número de Slide 3">
             <a:extLst>
               <a:ext uri="{FF2B5EF4-FFF2-40B4-BE49-F238E27FC236}">
-                <a16:creationId xmlns:a16="http://schemas.microsoft.com/office/drawing/2014/main" id="{42E49B68-FA1B-468B-9F17-D5C09243D454}"/>
+                <a16:creationId xmlns:a16="http://schemas.microsoft.com/office/drawing/2014/main" xmlns="" id="{42E49B68-FA1B-468B-9F17-D5C09243D454}"/>
               </a:ext>
             </a:extLst>
           </p:cNvPr>
@@ -3154,7 +3154,7 @@
           <p:cNvPr id="2" name="Título 1">
             <a:extLst>
               <a:ext uri="{FF2B5EF4-FFF2-40B4-BE49-F238E27FC236}">
-                <a16:creationId xmlns:a16="http://schemas.microsoft.com/office/drawing/2014/main" id="{1C17BCBE-A897-4319-85EC-D87909C24980}"/>
+                <a16:creationId xmlns:a16="http://schemas.microsoft.com/office/drawing/2014/main" xmlns="" id="{1C17BCBE-A897-4319-85EC-D87909C24980}"/>
               </a:ext>
             </a:extLst>
           </p:cNvPr>
@@ -3191,7 +3191,7 @@
           <p:cNvPr id="3" name="Espaço Reservado para Conteúdo 2">
             <a:extLst>
               <a:ext uri="{FF2B5EF4-FFF2-40B4-BE49-F238E27FC236}">
-                <a16:creationId xmlns:a16="http://schemas.microsoft.com/office/drawing/2014/main" id="{4226F885-0204-4913-868B-4B8B82576F17}"/>
+                <a16:creationId xmlns:a16="http://schemas.microsoft.com/office/drawing/2014/main" xmlns="" id="{4226F885-0204-4913-868B-4B8B82576F17}"/>
               </a:ext>
             </a:extLst>
           </p:cNvPr>
@@ -3281,7 +3281,7 @@
           <p:cNvPr id="4" name="Espaço Reservado para Texto 3">
             <a:extLst>
               <a:ext uri="{FF2B5EF4-FFF2-40B4-BE49-F238E27FC236}">
-                <a16:creationId xmlns:a16="http://schemas.microsoft.com/office/drawing/2014/main" id="{00F9F784-A858-441B-8AB5-697098141751}"/>
+                <a16:creationId xmlns:a16="http://schemas.microsoft.com/office/drawing/2014/main" xmlns="" id="{00F9F784-A858-441B-8AB5-697098141751}"/>
               </a:ext>
             </a:extLst>
           </p:cNvPr>
@@ -3352,7 +3352,7 @@
           <p:cNvPr id="5" name="Espaço Reservado para Data 4">
             <a:extLst>
               <a:ext uri="{FF2B5EF4-FFF2-40B4-BE49-F238E27FC236}">
-                <a16:creationId xmlns:a16="http://schemas.microsoft.com/office/drawing/2014/main" id="{A4DC363A-5000-472E-8B17-02E7DCB8840A}"/>
+                <a16:creationId xmlns:a16="http://schemas.microsoft.com/office/drawing/2014/main" xmlns="" id="{A4DC363A-5000-472E-8B17-02E7DCB8840A}"/>
               </a:ext>
             </a:extLst>
           </p:cNvPr>
@@ -3370,7 +3370,7 @@
           <a:p>
             <a:fld id="{63289F7E-B80B-496E-81B4-D396C37C9454}" type="datetimeFigureOut">
               <a:rPr lang="pt-BR" smtClean="0"/>
-              <a:t>28/06/2024</a:t>
+              <a:t>08/08/2025</a:t>
             </a:fld>
             <a:endParaRPr lang="pt-BR"/>
           </a:p>
@@ -3381,7 +3381,7 @@
           <p:cNvPr id="6" name="Espaço Reservado para Rodapé 5">
             <a:extLst>
               <a:ext uri="{FF2B5EF4-FFF2-40B4-BE49-F238E27FC236}">
-                <a16:creationId xmlns:a16="http://schemas.microsoft.com/office/drawing/2014/main" id="{5548425D-2C21-4C56-BAD4-662978775C28}"/>
+                <a16:creationId xmlns:a16="http://schemas.microsoft.com/office/drawing/2014/main" xmlns="" id="{5548425D-2C21-4C56-BAD4-662978775C28}"/>
               </a:ext>
             </a:extLst>
           </p:cNvPr>
@@ -3406,7 +3406,7 @@
           <p:cNvPr id="7" name="Espaço Reservado para Número de Slide 6">
             <a:extLst>
               <a:ext uri="{FF2B5EF4-FFF2-40B4-BE49-F238E27FC236}">
-                <a16:creationId xmlns:a16="http://schemas.microsoft.com/office/drawing/2014/main" id="{C63E9726-E64C-42B2-AE8A-8C235A956B48}"/>
+                <a16:creationId xmlns:a16="http://schemas.microsoft.com/office/drawing/2014/main" xmlns="" id="{C63E9726-E64C-42B2-AE8A-8C235A956B48}"/>
               </a:ext>
             </a:extLst>
           </p:cNvPr>
@@ -3465,7 +3465,7 @@
           <p:cNvPr id="2" name="Título 1">
             <a:extLst>
               <a:ext uri="{FF2B5EF4-FFF2-40B4-BE49-F238E27FC236}">
-                <a16:creationId xmlns:a16="http://schemas.microsoft.com/office/drawing/2014/main" id="{11086A78-3E74-450C-96A6-CA8AC37AF772}"/>
+                <a16:creationId xmlns:a16="http://schemas.microsoft.com/office/drawing/2014/main" xmlns="" id="{11086A78-3E74-450C-96A6-CA8AC37AF772}"/>
               </a:ext>
             </a:extLst>
           </p:cNvPr>
@@ -3502,7 +3502,7 @@
           <p:cNvPr id="3" name="Espaço Reservado para Imagem 2">
             <a:extLst>
               <a:ext uri="{FF2B5EF4-FFF2-40B4-BE49-F238E27FC236}">
-                <a16:creationId xmlns:a16="http://schemas.microsoft.com/office/drawing/2014/main" id="{5F5B7312-975A-4DBC-9B2F-3652ADA006FD}"/>
+                <a16:creationId xmlns:a16="http://schemas.microsoft.com/office/drawing/2014/main" xmlns="" id="{5F5B7312-975A-4DBC-9B2F-3652ADA006FD}"/>
               </a:ext>
             </a:extLst>
           </p:cNvPr>
@@ -3569,7 +3569,7 @@
           <p:cNvPr id="4" name="Espaço Reservado para Texto 3">
             <a:extLst>
               <a:ext uri="{FF2B5EF4-FFF2-40B4-BE49-F238E27FC236}">
-                <a16:creationId xmlns:a16="http://schemas.microsoft.com/office/drawing/2014/main" id="{AAF805F5-1DFF-41C6-944C-7D79FE0D0963}"/>
+                <a16:creationId xmlns:a16="http://schemas.microsoft.com/office/drawing/2014/main" xmlns="" id="{AAF805F5-1DFF-41C6-944C-7D79FE0D0963}"/>
               </a:ext>
             </a:extLst>
           </p:cNvPr>
@@ -3640,7 +3640,7 @@
           <p:cNvPr id="5" name="Espaço Reservado para Data 4">
             <a:extLst>
               <a:ext uri="{FF2B5EF4-FFF2-40B4-BE49-F238E27FC236}">
-                <a16:creationId xmlns:a16="http://schemas.microsoft.com/office/drawing/2014/main" id="{02113D81-8665-4516-BD81-C6A1F254EECD}"/>
+                <a16:creationId xmlns:a16="http://schemas.microsoft.com/office/drawing/2014/main" xmlns="" id="{02113D81-8665-4516-BD81-C6A1F254EECD}"/>
               </a:ext>
             </a:extLst>
           </p:cNvPr>
@@ -3658,7 +3658,7 @@
           <a:p>
             <a:fld id="{63289F7E-B80B-496E-81B4-D396C37C9454}" type="datetimeFigureOut">
               <a:rPr lang="pt-BR" smtClean="0"/>
-              <a:t>28/06/2024</a:t>
+              <a:t>08/08/2025</a:t>
             </a:fld>
             <a:endParaRPr lang="pt-BR"/>
           </a:p>
@@ -3669,7 +3669,7 @@
           <p:cNvPr id="6" name="Espaço Reservado para Rodapé 5">
             <a:extLst>
               <a:ext uri="{FF2B5EF4-FFF2-40B4-BE49-F238E27FC236}">
-                <a16:creationId xmlns:a16="http://schemas.microsoft.com/office/drawing/2014/main" id="{2B00C88B-FF32-40AA-A187-727D96FD7862}"/>
+                <a16:creationId xmlns:a16="http://schemas.microsoft.com/office/drawing/2014/main" xmlns="" id="{2B00C88B-FF32-40AA-A187-727D96FD7862}"/>
               </a:ext>
             </a:extLst>
           </p:cNvPr>
@@ -3694,7 +3694,7 @@
           <p:cNvPr id="7" name="Espaço Reservado para Número de Slide 6">
             <a:extLst>
               <a:ext uri="{FF2B5EF4-FFF2-40B4-BE49-F238E27FC236}">
-                <a16:creationId xmlns:a16="http://schemas.microsoft.com/office/drawing/2014/main" id="{A04D1A2D-69F7-4B8F-A730-BC26DC340BA6}"/>
+                <a16:creationId xmlns:a16="http://schemas.microsoft.com/office/drawing/2014/main" xmlns="" id="{A04D1A2D-69F7-4B8F-A730-BC26DC340BA6}"/>
               </a:ext>
             </a:extLst>
           </p:cNvPr>
@@ -3758,7 +3758,7 @@
           <p:cNvPr id="2" name="Espaço Reservado para Título 1">
             <a:extLst>
               <a:ext uri="{FF2B5EF4-FFF2-40B4-BE49-F238E27FC236}">
-                <a16:creationId xmlns:a16="http://schemas.microsoft.com/office/drawing/2014/main" id="{E69A0273-1966-4A1B-9370-4C1CE5036371}"/>
+                <a16:creationId xmlns:a16="http://schemas.microsoft.com/office/drawing/2014/main" xmlns="" id="{E69A0273-1966-4A1B-9370-4C1CE5036371}"/>
               </a:ext>
             </a:extLst>
           </p:cNvPr>
@@ -3796,7 +3796,7 @@
           <p:cNvPr id="3" name="Espaço Reservado para Texto 2">
             <a:extLst>
               <a:ext uri="{FF2B5EF4-FFF2-40B4-BE49-F238E27FC236}">
-                <a16:creationId xmlns:a16="http://schemas.microsoft.com/office/drawing/2014/main" id="{3B9CF87A-0448-49A7-AB25-EBC1D56A40EF}"/>
+                <a16:creationId xmlns:a16="http://schemas.microsoft.com/office/drawing/2014/main" xmlns="" id="{3B9CF87A-0448-49A7-AB25-EBC1D56A40EF}"/>
               </a:ext>
             </a:extLst>
           </p:cNvPr>
@@ -3863,7 +3863,7 @@
           <p:cNvPr id="4" name="Espaço Reservado para Data 3">
             <a:extLst>
               <a:ext uri="{FF2B5EF4-FFF2-40B4-BE49-F238E27FC236}">
-                <a16:creationId xmlns:a16="http://schemas.microsoft.com/office/drawing/2014/main" id="{2EF7B1F2-BB5A-44D0-816D-16AD2C71430E}"/>
+                <a16:creationId xmlns:a16="http://schemas.microsoft.com/office/drawing/2014/main" xmlns="" id="{2EF7B1F2-BB5A-44D0-816D-16AD2C71430E}"/>
               </a:ext>
             </a:extLst>
           </p:cNvPr>
@@ -3899,7 +3899,7 @@
           <a:p>
             <a:fld id="{63289F7E-B80B-496E-81B4-D396C37C9454}" type="datetimeFigureOut">
               <a:rPr lang="pt-BR" smtClean="0"/>
-              <a:t>28/06/2024</a:t>
+              <a:t>08/08/2025</a:t>
             </a:fld>
             <a:endParaRPr lang="pt-BR"/>
           </a:p>
@@ -3910,7 +3910,7 @@
           <p:cNvPr id="5" name="Espaço Reservado para Rodapé 4">
             <a:extLst>
               <a:ext uri="{FF2B5EF4-FFF2-40B4-BE49-F238E27FC236}">
-                <a16:creationId xmlns:a16="http://schemas.microsoft.com/office/drawing/2014/main" id="{C703F94C-2CC8-4DAA-BC35-14FC3E841DCD}"/>
+                <a16:creationId xmlns:a16="http://schemas.microsoft.com/office/drawing/2014/main" xmlns="" id="{C703F94C-2CC8-4DAA-BC35-14FC3E841DCD}"/>
               </a:ext>
             </a:extLst>
           </p:cNvPr>
@@ -3953,7 +3953,7 @@
           <p:cNvPr id="6" name="Espaço Reservado para Número de Slide 5">
             <a:extLst>
               <a:ext uri="{FF2B5EF4-FFF2-40B4-BE49-F238E27FC236}">
-                <a16:creationId xmlns:a16="http://schemas.microsoft.com/office/drawing/2014/main" id="{64051336-7048-457A-8B61-D94291D71648}"/>
+                <a16:creationId xmlns:a16="http://schemas.microsoft.com/office/drawing/2014/main" xmlns="" id="{64051336-7048-457A-8B61-D94291D71648}"/>
               </a:ext>
             </a:extLst>
           </p:cNvPr>
@@ -4321,7 +4321,7 @@
           <p:cNvPr id="2" name="Título 1">
             <a:extLst>
               <a:ext uri="{FF2B5EF4-FFF2-40B4-BE49-F238E27FC236}">
-                <a16:creationId xmlns:a16="http://schemas.microsoft.com/office/drawing/2014/main" id="{32666AC8-2E17-4DB4-B0F5-60C640CCFD2E}"/>
+                <a16:creationId xmlns:a16="http://schemas.microsoft.com/office/drawing/2014/main" xmlns="" id="{32666AC8-2E17-4DB4-B0F5-60C640CCFD2E}"/>
               </a:ext>
             </a:extLst>
           </p:cNvPr>
@@ -4348,6 +4348,10 @@
               <a:rPr lang="pt-BR" sz="5400" dirty="0"/>
               <a:t>TP558 - Tópicos avançados em Machine Learning:</a:t>
             </a:r>
+            <a:r>
+              <a:rPr lang="pt-BR" dirty="0"/>
+              <a:t/>
+            </a:r>
             <a:br>
               <a:rPr lang="pt-BR" dirty="0"/>
             </a:br>
@@ -4363,7 +4367,7 @@
           <p:cNvPr id="4" name="CaixaDeTexto 3">
             <a:extLst>
               <a:ext uri="{FF2B5EF4-FFF2-40B4-BE49-F238E27FC236}">
-                <a16:creationId xmlns:a16="http://schemas.microsoft.com/office/drawing/2014/main" id="{430EB894-B7D4-434C-9D1A-A14094D9BEEC}"/>
+                <a16:creationId xmlns:a16="http://schemas.microsoft.com/office/drawing/2014/main" xmlns="" id="{430EB894-B7D4-434C-9D1A-A14094D9BEEC}"/>
               </a:ext>
             </a:extLst>
           </p:cNvPr>
@@ -4404,7 +4408,7 @@
           <p:cNvPr id="1026" name="Picture 2" descr="Logo">
             <a:extLst>
               <a:ext uri="{FF2B5EF4-FFF2-40B4-BE49-F238E27FC236}">
-                <a16:creationId xmlns:a16="http://schemas.microsoft.com/office/drawing/2014/main" id="{3F2642E0-4F6A-4196-8F58-E77D36E9A33F}"/>
+                <a16:creationId xmlns:a16="http://schemas.microsoft.com/office/drawing/2014/main" xmlns="" id="{3F2642E0-4F6A-4196-8F58-E77D36E9A33F}"/>
               </a:ext>
             </a:extLst>
           </p:cNvPr>
@@ -4449,7 +4453,7 @@
           <p:cNvPr id="5122" name="Picture 2" descr="Image result for machine learning">
             <a:extLst>
               <a:ext uri="{FF2B5EF4-FFF2-40B4-BE49-F238E27FC236}">
-                <a16:creationId xmlns:a16="http://schemas.microsoft.com/office/drawing/2014/main" id="{810CE0A2-4102-44A6-A370-175E7896CDCB}"/>
+                <a16:creationId xmlns:a16="http://schemas.microsoft.com/office/drawing/2014/main" xmlns="" id="{810CE0A2-4102-44A6-A370-175E7896CDCB}"/>
               </a:ext>
             </a:extLst>
           </p:cNvPr>
@@ -4510,7 +4514,7 @@
         <p:cNvPr id="1" name="">
           <a:extLst>
             <a:ext uri="{FF2B5EF4-FFF2-40B4-BE49-F238E27FC236}">
-              <a16:creationId xmlns:a16="http://schemas.microsoft.com/office/drawing/2014/main" id="{7617B87B-9451-26E5-143E-DFEF71434E9F}"/>
+              <a16:creationId xmlns:a16="http://schemas.microsoft.com/office/drawing/2014/main" xmlns="" id="{7617B87B-9451-26E5-143E-DFEF71434E9F}"/>
             </a:ext>
           </a:extLst>
         </p:cNvPr>
@@ -4530,7 +4534,7 @@
           <p:cNvPr id="2" name="Título 1">
             <a:extLst>
               <a:ext uri="{FF2B5EF4-FFF2-40B4-BE49-F238E27FC236}">
-                <a16:creationId xmlns:a16="http://schemas.microsoft.com/office/drawing/2014/main" id="{530D8C5D-85CB-1EC5-46EE-3E9C5D6E11D6}"/>
+                <a16:creationId xmlns:a16="http://schemas.microsoft.com/office/drawing/2014/main" xmlns="" id="{530D8C5D-85CB-1EC5-46EE-3E9C5D6E11D6}"/>
               </a:ext>
             </a:extLst>
           </p:cNvPr>
@@ -4558,7 +4562,7 @@
           <p:cNvPr id="3" name="Espaço Reservado para Conteúdo 2">
             <a:extLst>
               <a:ext uri="{FF2B5EF4-FFF2-40B4-BE49-F238E27FC236}">
-                <a16:creationId xmlns:a16="http://schemas.microsoft.com/office/drawing/2014/main" id="{4C11FF3E-C7A6-AE98-273A-28F266ADBFC3}"/>
+                <a16:creationId xmlns:a16="http://schemas.microsoft.com/office/drawing/2014/main" xmlns="" id="{4C11FF3E-C7A6-AE98-273A-28F266ADBFC3}"/>
               </a:ext>
             </a:extLst>
           </p:cNvPr>
@@ -4807,7 +4811,7 @@
         <p:cNvPr id="1" name="">
           <a:extLst>
             <a:ext uri="{FF2B5EF4-FFF2-40B4-BE49-F238E27FC236}">
-              <a16:creationId xmlns:a16="http://schemas.microsoft.com/office/drawing/2014/main" id="{C27B3849-BF4B-F30A-23EA-9FE30E20CBCA}"/>
+              <a16:creationId xmlns:a16="http://schemas.microsoft.com/office/drawing/2014/main" xmlns="" id="{C27B3849-BF4B-F30A-23EA-9FE30E20CBCA}"/>
             </a:ext>
           </a:extLst>
         </p:cNvPr>
@@ -4827,7 +4831,7 @@
           <p:cNvPr id="2" name="Título 1">
             <a:extLst>
               <a:ext uri="{FF2B5EF4-FFF2-40B4-BE49-F238E27FC236}">
-                <a16:creationId xmlns:a16="http://schemas.microsoft.com/office/drawing/2014/main" id="{249A0E92-603C-2FF8-F119-2A802B939AA2}"/>
+                <a16:creationId xmlns:a16="http://schemas.microsoft.com/office/drawing/2014/main" xmlns="" id="{249A0E92-603C-2FF8-F119-2A802B939AA2}"/>
               </a:ext>
             </a:extLst>
           </p:cNvPr>
@@ -4855,7 +4859,7 @@
           <p:cNvPr id="3" name="Espaço Reservado para Conteúdo 2">
             <a:extLst>
               <a:ext uri="{FF2B5EF4-FFF2-40B4-BE49-F238E27FC236}">
-                <a16:creationId xmlns:a16="http://schemas.microsoft.com/office/drawing/2014/main" id="{09015E3D-F27D-5C4C-AFAE-8A3141CD4684}"/>
+                <a16:creationId xmlns:a16="http://schemas.microsoft.com/office/drawing/2014/main" xmlns="" id="{09015E3D-F27D-5C4C-AFAE-8A3141CD4684}"/>
               </a:ext>
             </a:extLst>
           </p:cNvPr>
@@ -5030,7 +5034,7 @@
         <p:cNvPr id="1" name="">
           <a:extLst>
             <a:ext uri="{FF2B5EF4-FFF2-40B4-BE49-F238E27FC236}">
-              <a16:creationId xmlns:a16="http://schemas.microsoft.com/office/drawing/2014/main" id="{6E3AB78C-4A70-ED33-6088-7D978AFBD15F}"/>
+              <a16:creationId xmlns:a16="http://schemas.microsoft.com/office/drawing/2014/main" xmlns="" id="{6E3AB78C-4A70-ED33-6088-7D978AFBD15F}"/>
             </a:ext>
           </a:extLst>
         </p:cNvPr>
@@ -5050,7 +5054,7 @@
           <p:cNvPr id="2" name="Título 1">
             <a:extLst>
               <a:ext uri="{FF2B5EF4-FFF2-40B4-BE49-F238E27FC236}">
-                <a16:creationId xmlns:a16="http://schemas.microsoft.com/office/drawing/2014/main" id="{20C0DDF2-0E52-0740-004B-2209C15740BF}"/>
+                <a16:creationId xmlns:a16="http://schemas.microsoft.com/office/drawing/2014/main" xmlns="" id="{20C0DDF2-0E52-0740-004B-2209C15740BF}"/>
               </a:ext>
             </a:extLst>
           </p:cNvPr>
@@ -5078,7 +5082,7 @@
           <p:cNvPr id="3" name="Espaço Reservado para Conteúdo 2">
             <a:extLst>
               <a:ext uri="{FF2B5EF4-FFF2-40B4-BE49-F238E27FC236}">
-                <a16:creationId xmlns:a16="http://schemas.microsoft.com/office/drawing/2014/main" id="{CAA14ED1-BBC4-3217-0C26-BBA0501ACF3D}"/>
+                <a16:creationId xmlns:a16="http://schemas.microsoft.com/office/drawing/2014/main" xmlns="" id="{CAA14ED1-BBC4-3217-0C26-BBA0501ACF3D}"/>
               </a:ext>
             </a:extLst>
           </p:cNvPr>
@@ -5315,7 +5319,7 @@
         <p:cNvPr id="1" name="">
           <a:extLst>
             <a:ext uri="{FF2B5EF4-FFF2-40B4-BE49-F238E27FC236}">
-              <a16:creationId xmlns:a16="http://schemas.microsoft.com/office/drawing/2014/main" id="{6E3AB78C-4A70-ED33-6088-7D978AFBD15F}"/>
+              <a16:creationId xmlns:a16="http://schemas.microsoft.com/office/drawing/2014/main" xmlns="" id="{6E3AB78C-4A70-ED33-6088-7D978AFBD15F}"/>
             </a:ext>
           </a:extLst>
         </p:cNvPr>
@@ -5335,7 +5339,7 @@
           <p:cNvPr id="2" name="Título 1">
             <a:extLst>
               <a:ext uri="{FF2B5EF4-FFF2-40B4-BE49-F238E27FC236}">
-                <a16:creationId xmlns:a16="http://schemas.microsoft.com/office/drawing/2014/main" id="{20C0DDF2-0E52-0740-004B-2209C15740BF}"/>
+                <a16:creationId xmlns:a16="http://schemas.microsoft.com/office/drawing/2014/main" xmlns="" id="{20C0DDF2-0E52-0740-004B-2209C15740BF}"/>
               </a:ext>
             </a:extLst>
           </p:cNvPr>
@@ -5363,7 +5367,7 @@
           <p:cNvPr id="3" name="Espaço Reservado para Conteúdo 2">
             <a:extLst>
               <a:ext uri="{FF2B5EF4-FFF2-40B4-BE49-F238E27FC236}">
-                <a16:creationId xmlns:a16="http://schemas.microsoft.com/office/drawing/2014/main" id="{CAA14ED1-BBC4-3217-0C26-BBA0501ACF3D}"/>
+                <a16:creationId xmlns:a16="http://schemas.microsoft.com/office/drawing/2014/main" xmlns="" id="{CAA14ED1-BBC4-3217-0C26-BBA0501ACF3D}"/>
               </a:ext>
             </a:extLst>
           </p:cNvPr>
@@ -5601,7 +5605,7 @@
           <p:cNvPr id="2" name="Título 1">
             <a:extLst>
               <a:ext uri="{FF2B5EF4-FFF2-40B4-BE49-F238E27FC236}">
-                <a16:creationId xmlns:a16="http://schemas.microsoft.com/office/drawing/2014/main" id="{F70C7E2D-5398-4F5E-7000-BA72FF1C6228}"/>
+                <a16:creationId xmlns:a16="http://schemas.microsoft.com/office/drawing/2014/main" xmlns="" id="{F70C7E2D-5398-4F5E-7000-BA72FF1C6228}"/>
               </a:ext>
             </a:extLst>
           </p:cNvPr>
@@ -5629,7 +5633,7 @@
           <p:cNvPr id="3" name="Espaço Reservado para Conteúdo 2">
             <a:extLst>
               <a:ext uri="{FF2B5EF4-FFF2-40B4-BE49-F238E27FC236}">
-                <a16:creationId xmlns:a16="http://schemas.microsoft.com/office/drawing/2014/main" id="{BA790209-FBBD-71F4-6F9F-502DB6462A33}"/>
+                <a16:creationId xmlns:a16="http://schemas.microsoft.com/office/drawing/2014/main" xmlns="" id="{BA790209-FBBD-71F4-6F9F-502DB6462A33}"/>
               </a:ext>
             </a:extLst>
           </p:cNvPr>
@@ -5832,7 +5836,7 @@
           <p:cNvPr id="2" name="Título 1">
             <a:extLst>
               <a:ext uri="{FF2B5EF4-FFF2-40B4-BE49-F238E27FC236}">
-                <a16:creationId xmlns:a16="http://schemas.microsoft.com/office/drawing/2014/main" id="{F70C7E2D-5398-4F5E-7000-BA72FF1C6228}"/>
+                <a16:creationId xmlns:a16="http://schemas.microsoft.com/office/drawing/2014/main" xmlns="" id="{F70C7E2D-5398-4F5E-7000-BA72FF1C6228}"/>
               </a:ext>
             </a:extLst>
           </p:cNvPr>
@@ -5860,7 +5864,7 @@
           <p:cNvPr id="3" name="Espaço Reservado para Conteúdo 2">
             <a:extLst>
               <a:ext uri="{FF2B5EF4-FFF2-40B4-BE49-F238E27FC236}">
-                <a16:creationId xmlns:a16="http://schemas.microsoft.com/office/drawing/2014/main" id="{BA790209-FBBD-71F4-6F9F-502DB6462A33}"/>
+                <a16:creationId xmlns:a16="http://schemas.microsoft.com/office/drawing/2014/main" xmlns="" id="{BA790209-FBBD-71F4-6F9F-502DB6462A33}"/>
               </a:ext>
             </a:extLst>
           </p:cNvPr>
@@ -6022,7 +6026,7 @@
         <p:cNvPr id="1" name="">
           <a:extLst>
             <a:ext uri="{FF2B5EF4-FFF2-40B4-BE49-F238E27FC236}">
-              <a16:creationId xmlns:a16="http://schemas.microsoft.com/office/drawing/2014/main" id="{F2050D32-3E32-0E68-EE2F-10DEBF5F9E34}"/>
+              <a16:creationId xmlns:a16="http://schemas.microsoft.com/office/drawing/2014/main" xmlns="" id="{F2050D32-3E32-0E68-EE2F-10DEBF5F9E34}"/>
             </a:ext>
           </a:extLst>
         </p:cNvPr>
@@ -6042,7 +6046,7 @@
           <p:cNvPr id="2" name="Título 1">
             <a:extLst>
               <a:ext uri="{FF2B5EF4-FFF2-40B4-BE49-F238E27FC236}">
-                <a16:creationId xmlns:a16="http://schemas.microsoft.com/office/drawing/2014/main" id="{06C9BF47-FE25-64EB-E7D8-257F36BF0637}"/>
+                <a16:creationId xmlns:a16="http://schemas.microsoft.com/office/drawing/2014/main" xmlns="" id="{06C9BF47-FE25-64EB-E7D8-257F36BF0637}"/>
               </a:ext>
             </a:extLst>
           </p:cNvPr>
@@ -6070,7 +6074,7 @@
           <p:cNvPr id="3" name="Espaço Reservado para Conteúdo 2">
             <a:extLst>
               <a:ext uri="{FF2B5EF4-FFF2-40B4-BE49-F238E27FC236}">
-                <a16:creationId xmlns:a16="http://schemas.microsoft.com/office/drawing/2014/main" id="{85CD2A47-67FC-5F78-FB47-48CDDDA1C93F}"/>
+                <a16:creationId xmlns:a16="http://schemas.microsoft.com/office/drawing/2014/main" xmlns="" id="{85CD2A47-67FC-5F78-FB47-48CDDDA1C93F}"/>
               </a:ext>
             </a:extLst>
           </p:cNvPr>
@@ -6313,7 +6317,7 @@
         <p:cNvPr id="1" name="">
           <a:extLst>
             <a:ext uri="{FF2B5EF4-FFF2-40B4-BE49-F238E27FC236}">
-              <a16:creationId xmlns:a16="http://schemas.microsoft.com/office/drawing/2014/main" id="{4059CF8C-A5CA-D922-15C9-90E83F41C16F}"/>
+              <a16:creationId xmlns:a16="http://schemas.microsoft.com/office/drawing/2014/main" xmlns="" id="{4059CF8C-A5CA-D922-15C9-90E83F41C16F}"/>
             </a:ext>
           </a:extLst>
         </p:cNvPr>
@@ -6333,7 +6337,7 @@
           <p:cNvPr id="2" name="Título 1">
             <a:extLst>
               <a:ext uri="{FF2B5EF4-FFF2-40B4-BE49-F238E27FC236}">
-                <a16:creationId xmlns:a16="http://schemas.microsoft.com/office/drawing/2014/main" id="{F0E0D2C5-2C7F-FF98-F6E4-6A6D35AE3301}"/>
+                <a16:creationId xmlns:a16="http://schemas.microsoft.com/office/drawing/2014/main" xmlns="" id="{F0E0D2C5-2C7F-FF98-F6E4-6A6D35AE3301}"/>
               </a:ext>
             </a:extLst>
           </p:cNvPr>
@@ -6361,7 +6365,7 @@
           <p:cNvPr id="3" name="Espaço Reservado para Conteúdo 2">
             <a:extLst>
               <a:ext uri="{FF2B5EF4-FFF2-40B4-BE49-F238E27FC236}">
-                <a16:creationId xmlns:a16="http://schemas.microsoft.com/office/drawing/2014/main" id="{164D262D-D1D5-2FFA-8E32-3025F99BDE7F}"/>
+                <a16:creationId xmlns:a16="http://schemas.microsoft.com/office/drawing/2014/main" xmlns="" id="{164D262D-D1D5-2FFA-8E32-3025F99BDE7F}"/>
               </a:ext>
             </a:extLst>
           </p:cNvPr>
@@ -6644,7 +6648,7 @@
                 <a:hlinkClick r:id="rId6">
                   <a:extLst>
                     <a:ext uri="{A12FA001-AC4F-418D-AE19-62706E023703}">
-                      <ahyp:hlinkClr xmlns:ahyp="http://schemas.microsoft.com/office/drawing/2018/hyperlinkcolor" val="tx"/>
+                      <ahyp:hlinkClr xmlns:ahyp="http://schemas.microsoft.com/office/drawing/2018/hyperlinkcolor" xmlns="" val="tx"/>
                     </a:ext>
                   </a:extLst>
                 </a:hlinkClick>
@@ -6666,7 +6670,7 @@
                 <a:hlinkClick r:id="rId7">
                   <a:extLst>
                     <a:ext uri="{A12FA001-AC4F-418D-AE19-62706E023703}">
-                      <ahyp:hlinkClr xmlns:ahyp="http://schemas.microsoft.com/office/drawing/2018/hyperlinkcolor" val="tx"/>
+                      <ahyp:hlinkClr xmlns:ahyp="http://schemas.microsoft.com/office/drawing/2018/hyperlinkcolor" xmlns="" val="tx"/>
                     </a:ext>
                   </a:extLst>
                 </a:hlinkClick>
@@ -6698,7 +6702,7 @@
         <p:cNvPr id="1" name="">
           <a:extLst>
             <a:ext uri="{FF2B5EF4-FFF2-40B4-BE49-F238E27FC236}">
-              <a16:creationId xmlns:a16="http://schemas.microsoft.com/office/drawing/2014/main" id="{4059CF8C-A5CA-D922-15C9-90E83F41C16F}"/>
+              <a16:creationId xmlns:a16="http://schemas.microsoft.com/office/drawing/2014/main" xmlns="" id="{4059CF8C-A5CA-D922-15C9-90E83F41C16F}"/>
             </a:ext>
           </a:extLst>
         </p:cNvPr>
@@ -6718,7 +6722,7 @@
           <p:cNvPr id="2" name="Título 1">
             <a:extLst>
               <a:ext uri="{FF2B5EF4-FFF2-40B4-BE49-F238E27FC236}">
-                <a16:creationId xmlns:a16="http://schemas.microsoft.com/office/drawing/2014/main" id="{F0E0D2C5-2C7F-FF98-F6E4-6A6D35AE3301}"/>
+                <a16:creationId xmlns:a16="http://schemas.microsoft.com/office/drawing/2014/main" xmlns="" id="{F0E0D2C5-2C7F-FF98-F6E4-6A6D35AE3301}"/>
               </a:ext>
             </a:extLst>
           </p:cNvPr>
@@ -6746,7 +6750,7 @@
           <p:cNvPr id="3" name="Espaço Reservado para Conteúdo 2">
             <a:extLst>
               <a:ext uri="{FF2B5EF4-FFF2-40B4-BE49-F238E27FC236}">
-                <a16:creationId xmlns:a16="http://schemas.microsoft.com/office/drawing/2014/main" id="{164D262D-D1D5-2FFA-8E32-3025F99BDE7F}"/>
+                <a16:creationId xmlns:a16="http://schemas.microsoft.com/office/drawing/2014/main" xmlns="" id="{164D262D-D1D5-2FFA-8E32-3025F99BDE7F}"/>
               </a:ext>
             </a:extLst>
           </p:cNvPr>
@@ -6953,7 +6957,7 @@
         <p:cNvPr id="1" name="">
           <a:extLst>
             <a:ext uri="{FF2B5EF4-FFF2-40B4-BE49-F238E27FC236}">
-              <a16:creationId xmlns:a16="http://schemas.microsoft.com/office/drawing/2014/main" id="{4059CF8C-A5CA-D922-15C9-90E83F41C16F}"/>
+              <a16:creationId xmlns:a16="http://schemas.microsoft.com/office/drawing/2014/main" xmlns="" id="{4059CF8C-A5CA-D922-15C9-90E83F41C16F}"/>
             </a:ext>
           </a:extLst>
         </p:cNvPr>
@@ -6973,7 +6977,7 @@
           <p:cNvPr id="2" name="Título 1">
             <a:extLst>
               <a:ext uri="{FF2B5EF4-FFF2-40B4-BE49-F238E27FC236}">
-                <a16:creationId xmlns:a16="http://schemas.microsoft.com/office/drawing/2014/main" id="{F0E0D2C5-2C7F-FF98-F6E4-6A6D35AE3301}"/>
+                <a16:creationId xmlns:a16="http://schemas.microsoft.com/office/drawing/2014/main" xmlns="" id="{F0E0D2C5-2C7F-FF98-F6E4-6A6D35AE3301}"/>
               </a:ext>
             </a:extLst>
           </p:cNvPr>
@@ -7001,7 +7005,7 @@
           <p:cNvPr id="3" name="Espaço Reservado para Conteúdo 2">
             <a:extLst>
               <a:ext uri="{FF2B5EF4-FFF2-40B4-BE49-F238E27FC236}">
-                <a16:creationId xmlns:a16="http://schemas.microsoft.com/office/drawing/2014/main" id="{164D262D-D1D5-2FFA-8E32-3025F99BDE7F}"/>
+                <a16:creationId xmlns:a16="http://schemas.microsoft.com/office/drawing/2014/main" xmlns="" id="{164D262D-D1D5-2FFA-8E32-3025F99BDE7F}"/>
               </a:ext>
             </a:extLst>
           </p:cNvPr>
@@ -7229,7 +7233,7 @@
           <p:cNvPr id="2" name="Título 1">
             <a:extLst>
               <a:ext uri="{FF2B5EF4-FFF2-40B4-BE49-F238E27FC236}">
-                <a16:creationId xmlns:a16="http://schemas.microsoft.com/office/drawing/2014/main" id="{59E7398B-A900-61B5-8621-DCCF26C6973A}"/>
+                <a16:creationId xmlns:a16="http://schemas.microsoft.com/office/drawing/2014/main" xmlns="" id="{59E7398B-A900-61B5-8621-DCCF26C6973A}"/>
               </a:ext>
             </a:extLst>
           </p:cNvPr>
@@ -7257,7 +7261,7 @@
           <p:cNvPr id="3" name="Espaço Reservado para Conteúdo 2">
             <a:extLst>
               <a:ext uri="{FF2B5EF4-FFF2-40B4-BE49-F238E27FC236}">
-                <a16:creationId xmlns:a16="http://schemas.microsoft.com/office/drawing/2014/main" id="{5954F27A-CDF9-6E72-139C-41301C4C48BE}"/>
+                <a16:creationId xmlns:a16="http://schemas.microsoft.com/office/drawing/2014/main" xmlns="" id="{5954F27A-CDF9-6E72-139C-41301C4C48BE}"/>
               </a:ext>
             </a:extLst>
           </p:cNvPr>
@@ -7409,7 +7413,7 @@
         <p:cNvPr id="1" name="">
           <a:extLst>
             <a:ext uri="{FF2B5EF4-FFF2-40B4-BE49-F238E27FC236}">
-              <a16:creationId xmlns:a16="http://schemas.microsoft.com/office/drawing/2014/main" id="{4059CF8C-A5CA-D922-15C9-90E83F41C16F}"/>
+              <a16:creationId xmlns:a16="http://schemas.microsoft.com/office/drawing/2014/main" xmlns="" id="{4059CF8C-A5CA-D922-15C9-90E83F41C16F}"/>
             </a:ext>
           </a:extLst>
         </p:cNvPr>
@@ -7429,7 +7433,7 @@
           <p:cNvPr id="2" name="Título 1">
             <a:extLst>
               <a:ext uri="{FF2B5EF4-FFF2-40B4-BE49-F238E27FC236}">
-                <a16:creationId xmlns:a16="http://schemas.microsoft.com/office/drawing/2014/main" id="{F0E0D2C5-2C7F-FF98-F6E4-6A6D35AE3301}"/>
+                <a16:creationId xmlns:a16="http://schemas.microsoft.com/office/drawing/2014/main" xmlns="" id="{F0E0D2C5-2C7F-FF98-F6E4-6A6D35AE3301}"/>
               </a:ext>
             </a:extLst>
           </p:cNvPr>
@@ -7457,7 +7461,7 @@
           <p:cNvPr id="3" name="Espaço Reservado para Conteúdo 2">
             <a:extLst>
               <a:ext uri="{FF2B5EF4-FFF2-40B4-BE49-F238E27FC236}">
-                <a16:creationId xmlns:a16="http://schemas.microsoft.com/office/drawing/2014/main" id="{164D262D-D1D5-2FFA-8E32-3025F99BDE7F}"/>
+                <a16:creationId xmlns:a16="http://schemas.microsoft.com/office/drawing/2014/main" xmlns="" id="{164D262D-D1D5-2FFA-8E32-3025F99BDE7F}"/>
               </a:ext>
             </a:extLst>
           </p:cNvPr>
@@ -7660,6 +7664,10 @@
             <a:pPr marL="914400" lvl="2" indent="0">
               <a:buNone/>
             </a:pPr>
+            <a:r>
+              <a:rPr lang="pt-BR" dirty="0"/>
+              <a:t/>
+            </a:r>
             <a:br>
               <a:rPr lang="pt-BR" dirty="0"/>
             </a:br>
@@ -7705,7 +7713,7 @@
           <p:cNvPr id="2" name="Título 1">
             <a:extLst>
               <a:ext uri="{FF2B5EF4-FFF2-40B4-BE49-F238E27FC236}">
-                <a16:creationId xmlns:a16="http://schemas.microsoft.com/office/drawing/2014/main" id="{A2A4684C-1159-4F88-A2B1-6BABEDE38C4D}"/>
+                <a16:creationId xmlns:a16="http://schemas.microsoft.com/office/drawing/2014/main" xmlns="" id="{A2A4684C-1159-4F88-A2B1-6BABEDE38C4D}"/>
               </a:ext>
             </a:extLst>
           </p:cNvPr>
@@ -7733,7 +7741,7 @@
           <p:cNvPr id="3" name="Espaço Reservado para Conteúdo 2">
             <a:extLst>
               <a:ext uri="{FF2B5EF4-FFF2-40B4-BE49-F238E27FC236}">
-                <a16:creationId xmlns:a16="http://schemas.microsoft.com/office/drawing/2014/main" id="{EC432B31-D382-41FF-BB6B-2ABDD322424B}"/>
+                <a16:creationId xmlns:a16="http://schemas.microsoft.com/office/drawing/2014/main" xmlns="" id="{EC432B31-D382-41FF-BB6B-2ABDD322424B}"/>
               </a:ext>
             </a:extLst>
           </p:cNvPr>
@@ -8112,6 +8120,14 @@
                 </a:solidFill>
               </a:rPr>
               <a:t>, 2019.</a:t>
+            </a:r>
+            <a:r>
+              <a:rPr lang="en-US" sz="2400" dirty="0">
+                <a:solidFill>
+                  <a:srgbClr val="000000"/>
+                </a:solidFill>
+              </a:rPr>
+              <a:t/>
             </a:r>
             <a:br>
               <a:rPr lang="en-US" sz="2400" dirty="0">
@@ -8787,7 +8803,7 @@
           <p:cNvPr id="4" name="Título 1">
             <a:extLst>
               <a:ext uri="{FF2B5EF4-FFF2-40B4-BE49-F238E27FC236}">
-                <a16:creationId xmlns:a16="http://schemas.microsoft.com/office/drawing/2014/main" id="{32666AC8-2E17-4DB4-B0F5-60C640CCFD2E}"/>
+                <a16:creationId xmlns:a16="http://schemas.microsoft.com/office/drawing/2014/main" xmlns="" id="{32666AC8-2E17-4DB4-B0F5-60C640CCFD2E}"/>
               </a:ext>
             </a:extLst>
           </p:cNvPr>
@@ -8873,7 +8889,7 @@
           <p:cNvPr id="4" name="Título 1">
             <a:extLst>
               <a:ext uri="{FF2B5EF4-FFF2-40B4-BE49-F238E27FC236}">
-                <a16:creationId xmlns:a16="http://schemas.microsoft.com/office/drawing/2014/main" id="{32666AC8-2E17-4DB4-B0F5-60C640CCFD2E}"/>
+                <a16:creationId xmlns:a16="http://schemas.microsoft.com/office/drawing/2014/main" xmlns="" id="{32666AC8-2E17-4DB4-B0F5-60C640CCFD2E}"/>
               </a:ext>
             </a:extLst>
           </p:cNvPr>
@@ -8959,7 +8975,7 @@
           <p:cNvPr id="2" name="Título 1">
             <a:extLst>
               <a:ext uri="{FF2B5EF4-FFF2-40B4-BE49-F238E27FC236}">
-                <a16:creationId xmlns:a16="http://schemas.microsoft.com/office/drawing/2014/main" id="{9BB4C24F-F8C2-513B-ABC6-F41F972D298C}"/>
+                <a16:creationId xmlns:a16="http://schemas.microsoft.com/office/drawing/2014/main" xmlns="" id="{9BB4C24F-F8C2-513B-ABC6-F41F972D298C}"/>
               </a:ext>
             </a:extLst>
           </p:cNvPr>
@@ -8987,7 +9003,7 @@
           <p:cNvPr id="3" name="Espaço Reservado para Conteúdo 2">
             <a:extLst>
               <a:ext uri="{FF2B5EF4-FFF2-40B4-BE49-F238E27FC236}">
-                <a16:creationId xmlns:a16="http://schemas.microsoft.com/office/drawing/2014/main" id="{39EC605B-82E1-C664-EB15-E7D9A6DF0D17}"/>
+                <a16:creationId xmlns:a16="http://schemas.microsoft.com/office/drawing/2014/main" xmlns="" id="{39EC605B-82E1-C664-EB15-E7D9A6DF0D17}"/>
               </a:ext>
             </a:extLst>
           </p:cNvPr>
@@ -9187,7 +9203,7 @@
           <p:cNvPr id="2" name="Título 1">
             <a:extLst>
               <a:ext uri="{FF2B5EF4-FFF2-40B4-BE49-F238E27FC236}">
-                <a16:creationId xmlns:a16="http://schemas.microsoft.com/office/drawing/2014/main" id="{9A265F83-0504-EFF3-ACD5-719CAEB5BA41}"/>
+                <a16:creationId xmlns:a16="http://schemas.microsoft.com/office/drawing/2014/main" xmlns="" id="{9A265F83-0504-EFF3-ACD5-719CAEB5BA41}"/>
               </a:ext>
             </a:extLst>
           </p:cNvPr>
@@ -9215,7 +9231,7 @@
           <p:cNvPr id="3" name="Espaço Reservado para Conteúdo 2">
             <a:extLst>
               <a:ext uri="{FF2B5EF4-FFF2-40B4-BE49-F238E27FC236}">
-                <a16:creationId xmlns:a16="http://schemas.microsoft.com/office/drawing/2014/main" id="{7E37BEAB-D924-8E11-EA13-C019C32409D7}"/>
+                <a16:creationId xmlns:a16="http://schemas.microsoft.com/office/drawing/2014/main" xmlns="" id="{7E37BEAB-D924-8E11-EA13-C019C32409D7}"/>
               </a:ext>
             </a:extLst>
           </p:cNvPr>
@@ -9406,7 +9422,7 @@
         <p:cNvPr id="1" name="">
           <a:extLst>
             <a:ext uri="{FF2B5EF4-FFF2-40B4-BE49-F238E27FC236}">
-              <a16:creationId xmlns:a16="http://schemas.microsoft.com/office/drawing/2014/main" id="{AF4399CC-3894-D100-1945-D7D23AA96EB1}"/>
+              <a16:creationId xmlns:a16="http://schemas.microsoft.com/office/drawing/2014/main" xmlns="" id="{AF4399CC-3894-D100-1945-D7D23AA96EB1}"/>
             </a:ext>
           </a:extLst>
         </p:cNvPr>
@@ -9426,7 +9442,7 @@
           <p:cNvPr id="2" name="Título 1">
             <a:extLst>
               <a:ext uri="{FF2B5EF4-FFF2-40B4-BE49-F238E27FC236}">
-                <a16:creationId xmlns:a16="http://schemas.microsoft.com/office/drawing/2014/main" id="{424E490C-8C95-5D8F-8A93-456C393F644A}"/>
+                <a16:creationId xmlns:a16="http://schemas.microsoft.com/office/drawing/2014/main" xmlns="" id="{424E490C-8C95-5D8F-8A93-456C393F644A}"/>
               </a:ext>
             </a:extLst>
           </p:cNvPr>
@@ -9454,7 +9470,7 @@
           <p:cNvPr id="3" name="Espaço Reservado para Conteúdo 2">
             <a:extLst>
               <a:ext uri="{FF2B5EF4-FFF2-40B4-BE49-F238E27FC236}">
-                <a16:creationId xmlns:a16="http://schemas.microsoft.com/office/drawing/2014/main" id="{D99B10BC-34CB-F110-CB4D-6CF6043930ED}"/>
+                <a16:creationId xmlns:a16="http://schemas.microsoft.com/office/drawing/2014/main" xmlns="" id="{D99B10BC-34CB-F110-CB4D-6CF6043930ED}"/>
               </a:ext>
             </a:extLst>
           </p:cNvPr>
@@ -9577,7 +9593,7 @@
           <p:cNvPr id="2" name="Título 1">
             <a:extLst>
               <a:ext uri="{FF2B5EF4-FFF2-40B4-BE49-F238E27FC236}">
-                <a16:creationId xmlns:a16="http://schemas.microsoft.com/office/drawing/2014/main" id="{40B200E8-E489-1374-DAE1-A01E9DFC93EA}"/>
+                <a16:creationId xmlns:a16="http://schemas.microsoft.com/office/drawing/2014/main" xmlns="" id="{40B200E8-E489-1374-DAE1-A01E9DFC93EA}"/>
               </a:ext>
             </a:extLst>
           </p:cNvPr>
@@ -9605,7 +9621,7 @@
           <p:cNvPr id="3" name="Espaço Reservado para Conteúdo 2">
             <a:extLst>
               <a:ext uri="{FF2B5EF4-FFF2-40B4-BE49-F238E27FC236}">
-                <a16:creationId xmlns:a16="http://schemas.microsoft.com/office/drawing/2014/main" id="{AC84DA0A-C3B3-CCCB-BBDF-CF88E7D56E0D}"/>
+                <a16:creationId xmlns:a16="http://schemas.microsoft.com/office/drawing/2014/main" xmlns="" id="{AC84DA0A-C3B3-CCCB-BBDF-CF88E7D56E0D}"/>
               </a:ext>
             </a:extLst>
           </p:cNvPr>
@@ -9827,7 +9843,7 @@
           <p:cNvPr id="4" name="Picture 3">
             <a:extLst>
               <a:ext uri="{FF2B5EF4-FFF2-40B4-BE49-F238E27FC236}">
-                <a16:creationId xmlns:a16="http://schemas.microsoft.com/office/drawing/2014/main" id="{63A98931-D4DA-A8C6-E70B-6223235637D2}"/>
+                <a16:creationId xmlns:a16="http://schemas.microsoft.com/office/drawing/2014/main" xmlns="" id="{63A98931-D4DA-A8C6-E70B-6223235637D2}"/>
               </a:ext>
             </a:extLst>
           </p:cNvPr>
@@ -9857,7 +9873,7 @@
           <p:cNvPr id="5" name="Picture 4">
             <a:extLst>
               <a:ext uri="{FF2B5EF4-FFF2-40B4-BE49-F238E27FC236}">
-                <a16:creationId xmlns:a16="http://schemas.microsoft.com/office/drawing/2014/main" id="{0E171FC1-ABD1-9A30-24B9-3B431D21D315}"/>
+                <a16:creationId xmlns:a16="http://schemas.microsoft.com/office/drawing/2014/main" xmlns="" id="{0E171FC1-ABD1-9A30-24B9-3B431D21D315}"/>
               </a:ext>
             </a:extLst>
           </p:cNvPr>
@@ -9887,7 +9903,7 @@
           <p:cNvPr id="6" name="Picture 5">
             <a:extLst>
               <a:ext uri="{FF2B5EF4-FFF2-40B4-BE49-F238E27FC236}">
-                <a16:creationId xmlns:a16="http://schemas.microsoft.com/office/drawing/2014/main" id="{4A00239B-9DE4-3C62-31EF-097283BCD829}"/>
+                <a16:creationId xmlns:a16="http://schemas.microsoft.com/office/drawing/2014/main" xmlns="" id="{4A00239B-9DE4-3C62-31EF-097283BCD829}"/>
               </a:ext>
             </a:extLst>
           </p:cNvPr>
@@ -9947,7 +9963,7 @@
           <p:cNvPr id="2" name="Título 1">
             <a:extLst>
               <a:ext uri="{FF2B5EF4-FFF2-40B4-BE49-F238E27FC236}">
-                <a16:creationId xmlns:a16="http://schemas.microsoft.com/office/drawing/2014/main" id="{81B87840-628C-E82C-47FA-C888AB409B21}"/>
+                <a16:creationId xmlns:a16="http://schemas.microsoft.com/office/drawing/2014/main" xmlns="" id="{81B87840-628C-E82C-47FA-C888AB409B21}"/>
               </a:ext>
             </a:extLst>
           </p:cNvPr>
@@ -9975,7 +9991,7 @@
           <p:cNvPr id="3" name="Espaço Reservado para Conteúdo 2">
             <a:extLst>
               <a:ext uri="{FF2B5EF4-FFF2-40B4-BE49-F238E27FC236}">
-                <a16:creationId xmlns:a16="http://schemas.microsoft.com/office/drawing/2014/main" id="{60B96892-6767-8A98-62CA-E3A197F37080}"/>
+                <a16:creationId xmlns:a16="http://schemas.microsoft.com/office/drawing/2014/main" xmlns="" id="{60B96892-6767-8A98-62CA-E3A197F37080}"/>
               </a:ext>
             </a:extLst>
           </p:cNvPr>
@@ -10095,7 +10111,7 @@
           <p:cNvPr id="2" name="Título 1">
             <a:extLst>
               <a:ext uri="{FF2B5EF4-FFF2-40B4-BE49-F238E27FC236}">
-                <a16:creationId xmlns:a16="http://schemas.microsoft.com/office/drawing/2014/main" id="{11BC2EE5-C8A9-A5C4-E79F-7ACA60564BF4}"/>
+                <a16:creationId xmlns:a16="http://schemas.microsoft.com/office/drawing/2014/main" xmlns="" id="{11BC2EE5-C8A9-A5C4-E79F-7ACA60564BF4}"/>
               </a:ext>
             </a:extLst>
           </p:cNvPr>
@@ -10123,7 +10139,7 @@
           <p:cNvPr id="3" name="Espaço Reservado para Conteúdo 2">
             <a:extLst>
               <a:ext uri="{FF2B5EF4-FFF2-40B4-BE49-F238E27FC236}">
-                <a16:creationId xmlns:a16="http://schemas.microsoft.com/office/drawing/2014/main" id="{F34E1E4B-4890-7308-FDD9-BCFBF68A4D2F}"/>
+                <a16:creationId xmlns:a16="http://schemas.microsoft.com/office/drawing/2014/main" xmlns="" id="{F34E1E4B-4890-7308-FDD9-BCFBF68A4D2F}"/>
               </a:ext>
             </a:extLst>
           </p:cNvPr>
@@ -10396,7 +10412,7 @@
           <p:cNvPr id="2" name="Título 1">
             <a:extLst>
               <a:ext uri="{FF2B5EF4-FFF2-40B4-BE49-F238E27FC236}">
-                <a16:creationId xmlns:a16="http://schemas.microsoft.com/office/drawing/2014/main" id="{11BC2EE5-C8A9-A5C4-E79F-7ACA60564BF4}"/>
+                <a16:creationId xmlns:a16="http://schemas.microsoft.com/office/drawing/2014/main" xmlns="" id="{11BC2EE5-C8A9-A5C4-E79F-7ACA60564BF4}"/>
               </a:ext>
             </a:extLst>
           </p:cNvPr>
@@ -10424,7 +10440,7 @@
           <p:cNvPr id="3" name="Espaço Reservado para Conteúdo 2">
             <a:extLst>
               <a:ext uri="{FF2B5EF4-FFF2-40B4-BE49-F238E27FC236}">
-                <a16:creationId xmlns:a16="http://schemas.microsoft.com/office/drawing/2014/main" id="{F34E1E4B-4890-7308-FDD9-BCFBF68A4D2F}"/>
+                <a16:creationId xmlns:a16="http://schemas.microsoft.com/office/drawing/2014/main" xmlns="" id="{F34E1E4B-4890-7308-FDD9-BCFBF68A4D2F}"/>
               </a:ext>
             </a:extLst>
           </p:cNvPr>

--- a/slides/TP558_1_Introdução_ao_curso.pptx
+++ b/slides/TP558_1_Introdução_ao_curso.pptx
@@ -298,7 +298,7 @@
           <a:p>
             <a:fld id="{144F1436-6906-4D93-B7A2-786C327BFA14}" type="datetimeFigureOut">
               <a:rPr lang="nl-BE" smtClean="0"/>
-              <a:t>8/08/2025</a:t>
+              <a:t>14/08/2025</a:t>
             </a:fld>
             <a:endParaRPr lang="nl-BE"/>
           </a:p>
@@ -463,7 +463,7 @@
           <a:p>
             <a:fld id="{AA8CD09E-2914-4F47-B6C1-51B2C31814C9}" type="datetimeFigureOut">
               <a:rPr lang="pt-BR" smtClean="0"/>
-              <a:t>08/08/2025</a:t>
+              <a:t>14/08/2025</a:t>
             </a:fld>
             <a:endParaRPr lang="pt-BR"/>
           </a:p>
@@ -1124,7 +1124,7 @@
           <p:cNvPr id="2" name="Título 1">
             <a:extLst>
               <a:ext uri="{FF2B5EF4-FFF2-40B4-BE49-F238E27FC236}">
-                <a16:creationId xmlns:a16="http://schemas.microsoft.com/office/drawing/2014/main" xmlns="" id="{1DB9B4FF-B06E-403C-A326-BDC64D8FF94E}"/>
+                <a16:creationId xmlns:a16="http://schemas.microsoft.com/office/drawing/2014/main" id="{1DB9B4FF-B06E-403C-A326-BDC64D8FF94E}"/>
               </a:ext>
             </a:extLst>
           </p:cNvPr>
@@ -1161,7 +1161,7 @@
           <p:cNvPr id="3" name="Subtítulo 2">
             <a:extLst>
               <a:ext uri="{FF2B5EF4-FFF2-40B4-BE49-F238E27FC236}">
-                <a16:creationId xmlns:a16="http://schemas.microsoft.com/office/drawing/2014/main" xmlns="" id="{247BDFCE-746E-45BF-A319-4733D58D1632}"/>
+                <a16:creationId xmlns:a16="http://schemas.microsoft.com/office/drawing/2014/main" id="{247BDFCE-746E-45BF-A319-4733D58D1632}"/>
               </a:ext>
             </a:extLst>
           </p:cNvPr>
@@ -1231,7 +1231,7 @@
           <p:cNvPr id="4" name="Espaço Reservado para Data 3">
             <a:extLst>
               <a:ext uri="{FF2B5EF4-FFF2-40B4-BE49-F238E27FC236}">
-                <a16:creationId xmlns:a16="http://schemas.microsoft.com/office/drawing/2014/main" xmlns="" id="{9EDE2778-5372-4104-B96D-968184DA8288}"/>
+                <a16:creationId xmlns:a16="http://schemas.microsoft.com/office/drawing/2014/main" id="{9EDE2778-5372-4104-B96D-968184DA8288}"/>
               </a:ext>
             </a:extLst>
           </p:cNvPr>
@@ -1249,7 +1249,7 @@
           <a:p>
             <a:fld id="{63289F7E-B80B-496E-81B4-D396C37C9454}" type="datetimeFigureOut">
               <a:rPr lang="pt-BR" smtClean="0"/>
-              <a:t>08/08/2025</a:t>
+              <a:t>14/08/2025</a:t>
             </a:fld>
             <a:endParaRPr lang="pt-BR"/>
           </a:p>
@@ -1260,7 +1260,7 @@
           <p:cNvPr id="5" name="Espaço Reservado para Rodapé 4">
             <a:extLst>
               <a:ext uri="{FF2B5EF4-FFF2-40B4-BE49-F238E27FC236}">
-                <a16:creationId xmlns:a16="http://schemas.microsoft.com/office/drawing/2014/main" xmlns="" id="{C1DD0F41-C861-4051-988D-3024A37A4B93}"/>
+                <a16:creationId xmlns:a16="http://schemas.microsoft.com/office/drawing/2014/main" id="{C1DD0F41-C861-4051-988D-3024A37A4B93}"/>
               </a:ext>
             </a:extLst>
           </p:cNvPr>
@@ -1285,7 +1285,7 @@
           <p:cNvPr id="6" name="Espaço Reservado para Número de Slide 5">
             <a:extLst>
               <a:ext uri="{FF2B5EF4-FFF2-40B4-BE49-F238E27FC236}">
-                <a16:creationId xmlns:a16="http://schemas.microsoft.com/office/drawing/2014/main" xmlns="" id="{07E5967E-D980-431A-A5DB-3F0C5030A81E}"/>
+                <a16:creationId xmlns:a16="http://schemas.microsoft.com/office/drawing/2014/main" id="{07E5967E-D980-431A-A5DB-3F0C5030A81E}"/>
               </a:ext>
             </a:extLst>
           </p:cNvPr>
@@ -1344,7 +1344,7 @@
           <p:cNvPr id="2" name="Título 1">
             <a:extLst>
               <a:ext uri="{FF2B5EF4-FFF2-40B4-BE49-F238E27FC236}">
-                <a16:creationId xmlns:a16="http://schemas.microsoft.com/office/drawing/2014/main" xmlns="" id="{9036C49F-3E68-4175-81BA-3C3FEE44308A}"/>
+                <a16:creationId xmlns:a16="http://schemas.microsoft.com/office/drawing/2014/main" id="{9036C49F-3E68-4175-81BA-3C3FEE44308A}"/>
               </a:ext>
             </a:extLst>
           </p:cNvPr>
@@ -1372,7 +1372,7 @@
           <p:cNvPr id="3" name="Espaço Reservado para Texto Vertical 2">
             <a:extLst>
               <a:ext uri="{FF2B5EF4-FFF2-40B4-BE49-F238E27FC236}">
-                <a16:creationId xmlns:a16="http://schemas.microsoft.com/office/drawing/2014/main" xmlns="" id="{426FA736-3DD3-4D4E-B57B-BBE1D8F7D424}"/>
+                <a16:creationId xmlns:a16="http://schemas.microsoft.com/office/drawing/2014/main" id="{426FA736-3DD3-4D4E-B57B-BBE1D8F7D424}"/>
               </a:ext>
             </a:extLst>
           </p:cNvPr>
@@ -1429,7 +1429,7 @@
           <p:cNvPr id="4" name="Espaço Reservado para Data 3">
             <a:extLst>
               <a:ext uri="{FF2B5EF4-FFF2-40B4-BE49-F238E27FC236}">
-                <a16:creationId xmlns:a16="http://schemas.microsoft.com/office/drawing/2014/main" xmlns="" id="{99E8855C-D8FD-48F6-B14E-861E0DE4D915}"/>
+                <a16:creationId xmlns:a16="http://schemas.microsoft.com/office/drawing/2014/main" id="{99E8855C-D8FD-48F6-B14E-861E0DE4D915}"/>
               </a:ext>
             </a:extLst>
           </p:cNvPr>
@@ -1447,7 +1447,7 @@
           <a:p>
             <a:fld id="{63289F7E-B80B-496E-81B4-D396C37C9454}" type="datetimeFigureOut">
               <a:rPr lang="pt-BR" smtClean="0"/>
-              <a:t>08/08/2025</a:t>
+              <a:t>14/08/2025</a:t>
             </a:fld>
             <a:endParaRPr lang="pt-BR"/>
           </a:p>
@@ -1458,7 +1458,7 @@
           <p:cNvPr id="5" name="Espaço Reservado para Rodapé 4">
             <a:extLst>
               <a:ext uri="{FF2B5EF4-FFF2-40B4-BE49-F238E27FC236}">
-                <a16:creationId xmlns:a16="http://schemas.microsoft.com/office/drawing/2014/main" xmlns="" id="{97C0BB88-2F21-42A5-ACFF-83DA47F2D340}"/>
+                <a16:creationId xmlns:a16="http://schemas.microsoft.com/office/drawing/2014/main" id="{97C0BB88-2F21-42A5-ACFF-83DA47F2D340}"/>
               </a:ext>
             </a:extLst>
           </p:cNvPr>
@@ -1483,7 +1483,7 @@
           <p:cNvPr id="6" name="Espaço Reservado para Número de Slide 5">
             <a:extLst>
               <a:ext uri="{FF2B5EF4-FFF2-40B4-BE49-F238E27FC236}">
-                <a16:creationId xmlns:a16="http://schemas.microsoft.com/office/drawing/2014/main" xmlns="" id="{6CB462B3-1F22-4C05-B4B8-7A279FB7D5E9}"/>
+                <a16:creationId xmlns:a16="http://schemas.microsoft.com/office/drawing/2014/main" id="{6CB462B3-1F22-4C05-B4B8-7A279FB7D5E9}"/>
               </a:ext>
             </a:extLst>
           </p:cNvPr>
@@ -1542,7 +1542,7 @@
           <p:cNvPr id="2" name="Título Vertical 1">
             <a:extLst>
               <a:ext uri="{FF2B5EF4-FFF2-40B4-BE49-F238E27FC236}">
-                <a16:creationId xmlns:a16="http://schemas.microsoft.com/office/drawing/2014/main" xmlns="" id="{EAEAB728-701C-4207-A9D5-23FF45C60502}"/>
+                <a16:creationId xmlns:a16="http://schemas.microsoft.com/office/drawing/2014/main" id="{EAEAB728-701C-4207-A9D5-23FF45C60502}"/>
               </a:ext>
             </a:extLst>
           </p:cNvPr>
@@ -1575,7 +1575,7 @@
           <p:cNvPr id="3" name="Espaço Reservado para Texto Vertical 2">
             <a:extLst>
               <a:ext uri="{FF2B5EF4-FFF2-40B4-BE49-F238E27FC236}">
-                <a16:creationId xmlns:a16="http://schemas.microsoft.com/office/drawing/2014/main" xmlns="" id="{BA8C8CCF-7823-480A-9A19-0F664DD17E3B}"/>
+                <a16:creationId xmlns:a16="http://schemas.microsoft.com/office/drawing/2014/main" id="{BA8C8CCF-7823-480A-9A19-0F664DD17E3B}"/>
               </a:ext>
             </a:extLst>
           </p:cNvPr>
@@ -1637,7 +1637,7 @@
           <p:cNvPr id="4" name="Espaço Reservado para Data 3">
             <a:extLst>
               <a:ext uri="{FF2B5EF4-FFF2-40B4-BE49-F238E27FC236}">
-                <a16:creationId xmlns:a16="http://schemas.microsoft.com/office/drawing/2014/main" xmlns="" id="{721D5734-7B1F-425D-942F-6EB73344027C}"/>
+                <a16:creationId xmlns:a16="http://schemas.microsoft.com/office/drawing/2014/main" id="{721D5734-7B1F-425D-942F-6EB73344027C}"/>
               </a:ext>
             </a:extLst>
           </p:cNvPr>
@@ -1655,7 +1655,7 @@
           <a:p>
             <a:fld id="{63289F7E-B80B-496E-81B4-D396C37C9454}" type="datetimeFigureOut">
               <a:rPr lang="pt-BR" smtClean="0"/>
-              <a:t>08/08/2025</a:t>
+              <a:t>14/08/2025</a:t>
             </a:fld>
             <a:endParaRPr lang="pt-BR"/>
           </a:p>
@@ -1666,7 +1666,7 @@
           <p:cNvPr id="5" name="Espaço Reservado para Rodapé 4">
             <a:extLst>
               <a:ext uri="{FF2B5EF4-FFF2-40B4-BE49-F238E27FC236}">
-                <a16:creationId xmlns:a16="http://schemas.microsoft.com/office/drawing/2014/main" xmlns="" id="{1E1AAEAC-F08D-45FE-89EC-B1B349A868C9}"/>
+                <a16:creationId xmlns:a16="http://schemas.microsoft.com/office/drawing/2014/main" id="{1E1AAEAC-F08D-45FE-89EC-B1B349A868C9}"/>
               </a:ext>
             </a:extLst>
           </p:cNvPr>
@@ -1691,7 +1691,7 @@
           <p:cNvPr id="6" name="Espaço Reservado para Número de Slide 5">
             <a:extLst>
               <a:ext uri="{FF2B5EF4-FFF2-40B4-BE49-F238E27FC236}">
-                <a16:creationId xmlns:a16="http://schemas.microsoft.com/office/drawing/2014/main" xmlns="" id="{BAA44493-9911-47B2-87A6-C2141A972BC8}"/>
+                <a16:creationId xmlns:a16="http://schemas.microsoft.com/office/drawing/2014/main" id="{BAA44493-9911-47B2-87A6-C2141A972BC8}"/>
               </a:ext>
             </a:extLst>
           </p:cNvPr>
@@ -1750,7 +1750,7 @@
           <p:cNvPr id="2" name="Título 1">
             <a:extLst>
               <a:ext uri="{FF2B5EF4-FFF2-40B4-BE49-F238E27FC236}">
-                <a16:creationId xmlns:a16="http://schemas.microsoft.com/office/drawing/2014/main" xmlns="" id="{71BD44A5-8F21-4626-A01D-48A1C874B1D5}"/>
+                <a16:creationId xmlns:a16="http://schemas.microsoft.com/office/drawing/2014/main" id="{71BD44A5-8F21-4626-A01D-48A1C874B1D5}"/>
               </a:ext>
             </a:extLst>
           </p:cNvPr>
@@ -1778,7 +1778,7 @@
           <p:cNvPr id="3" name="Espaço Reservado para Conteúdo 2">
             <a:extLst>
               <a:ext uri="{FF2B5EF4-FFF2-40B4-BE49-F238E27FC236}">
-                <a16:creationId xmlns:a16="http://schemas.microsoft.com/office/drawing/2014/main" xmlns="" id="{B79E8085-65A9-48AA-951D-71D978BFF4ED}"/>
+                <a16:creationId xmlns:a16="http://schemas.microsoft.com/office/drawing/2014/main" id="{B79E8085-65A9-48AA-951D-71D978BFF4ED}"/>
               </a:ext>
             </a:extLst>
           </p:cNvPr>
@@ -1835,7 +1835,7 @@
           <p:cNvPr id="4" name="Espaço Reservado para Data 3">
             <a:extLst>
               <a:ext uri="{FF2B5EF4-FFF2-40B4-BE49-F238E27FC236}">
-                <a16:creationId xmlns:a16="http://schemas.microsoft.com/office/drawing/2014/main" xmlns="" id="{F05BE1AF-51EA-425D-B188-DE7BD675009F}"/>
+                <a16:creationId xmlns:a16="http://schemas.microsoft.com/office/drawing/2014/main" id="{F05BE1AF-51EA-425D-B188-DE7BD675009F}"/>
               </a:ext>
             </a:extLst>
           </p:cNvPr>
@@ -1853,7 +1853,7 @@
           <a:p>
             <a:fld id="{63289F7E-B80B-496E-81B4-D396C37C9454}" type="datetimeFigureOut">
               <a:rPr lang="pt-BR" smtClean="0"/>
-              <a:t>08/08/2025</a:t>
+              <a:t>14/08/2025</a:t>
             </a:fld>
             <a:endParaRPr lang="pt-BR"/>
           </a:p>
@@ -1864,7 +1864,7 @@
           <p:cNvPr id="5" name="Espaço Reservado para Rodapé 4">
             <a:extLst>
               <a:ext uri="{FF2B5EF4-FFF2-40B4-BE49-F238E27FC236}">
-                <a16:creationId xmlns:a16="http://schemas.microsoft.com/office/drawing/2014/main" xmlns="" id="{121BE632-29CF-4CB9-B365-C9EF38F89BE6}"/>
+                <a16:creationId xmlns:a16="http://schemas.microsoft.com/office/drawing/2014/main" id="{121BE632-29CF-4CB9-B365-C9EF38F89BE6}"/>
               </a:ext>
             </a:extLst>
           </p:cNvPr>
@@ -1889,7 +1889,7 @@
           <p:cNvPr id="6" name="Espaço Reservado para Número de Slide 5">
             <a:extLst>
               <a:ext uri="{FF2B5EF4-FFF2-40B4-BE49-F238E27FC236}">
-                <a16:creationId xmlns:a16="http://schemas.microsoft.com/office/drawing/2014/main" xmlns="" id="{60CF3DD1-9AEC-4A57-B461-4E4DD86FAC18}"/>
+                <a16:creationId xmlns:a16="http://schemas.microsoft.com/office/drawing/2014/main" id="{60CF3DD1-9AEC-4A57-B461-4E4DD86FAC18}"/>
               </a:ext>
             </a:extLst>
           </p:cNvPr>
@@ -1948,7 +1948,7 @@
           <p:cNvPr id="2" name="Título 1">
             <a:extLst>
               <a:ext uri="{FF2B5EF4-FFF2-40B4-BE49-F238E27FC236}">
-                <a16:creationId xmlns:a16="http://schemas.microsoft.com/office/drawing/2014/main" xmlns="" id="{34AB2FF0-A4D7-4E28-991D-FF26140D5988}"/>
+                <a16:creationId xmlns:a16="http://schemas.microsoft.com/office/drawing/2014/main" id="{34AB2FF0-A4D7-4E28-991D-FF26140D5988}"/>
               </a:ext>
             </a:extLst>
           </p:cNvPr>
@@ -1985,7 +1985,7 @@
           <p:cNvPr id="3" name="Espaço Reservado para Texto 2">
             <a:extLst>
               <a:ext uri="{FF2B5EF4-FFF2-40B4-BE49-F238E27FC236}">
-                <a16:creationId xmlns:a16="http://schemas.microsoft.com/office/drawing/2014/main" xmlns="" id="{E2AC45B0-4145-40DB-8E61-105461170604}"/>
+                <a16:creationId xmlns:a16="http://schemas.microsoft.com/office/drawing/2014/main" id="{E2AC45B0-4145-40DB-8E61-105461170604}"/>
               </a:ext>
             </a:extLst>
           </p:cNvPr>
@@ -2110,7 +2110,7 @@
           <p:cNvPr id="4" name="Espaço Reservado para Data 3">
             <a:extLst>
               <a:ext uri="{FF2B5EF4-FFF2-40B4-BE49-F238E27FC236}">
-                <a16:creationId xmlns:a16="http://schemas.microsoft.com/office/drawing/2014/main" xmlns="" id="{50F1D3FB-740A-4EBA-A309-2CE71D12ECFB}"/>
+                <a16:creationId xmlns:a16="http://schemas.microsoft.com/office/drawing/2014/main" id="{50F1D3FB-740A-4EBA-A309-2CE71D12ECFB}"/>
               </a:ext>
             </a:extLst>
           </p:cNvPr>
@@ -2128,7 +2128,7 @@
           <a:p>
             <a:fld id="{63289F7E-B80B-496E-81B4-D396C37C9454}" type="datetimeFigureOut">
               <a:rPr lang="pt-BR" smtClean="0"/>
-              <a:t>08/08/2025</a:t>
+              <a:t>14/08/2025</a:t>
             </a:fld>
             <a:endParaRPr lang="pt-BR"/>
           </a:p>
@@ -2139,7 +2139,7 @@
           <p:cNvPr id="5" name="Espaço Reservado para Rodapé 4">
             <a:extLst>
               <a:ext uri="{FF2B5EF4-FFF2-40B4-BE49-F238E27FC236}">
-                <a16:creationId xmlns:a16="http://schemas.microsoft.com/office/drawing/2014/main" xmlns="" id="{BDCAB18F-8715-4465-A940-F9C193A2ACE9}"/>
+                <a16:creationId xmlns:a16="http://schemas.microsoft.com/office/drawing/2014/main" id="{BDCAB18F-8715-4465-A940-F9C193A2ACE9}"/>
               </a:ext>
             </a:extLst>
           </p:cNvPr>
@@ -2164,7 +2164,7 @@
           <p:cNvPr id="6" name="Espaço Reservado para Número de Slide 5">
             <a:extLst>
               <a:ext uri="{FF2B5EF4-FFF2-40B4-BE49-F238E27FC236}">
-                <a16:creationId xmlns:a16="http://schemas.microsoft.com/office/drawing/2014/main" xmlns="" id="{353466C6-8248-429F-8056-FF040BF509EB}"/>
+                <a16:creationId xmlns:a16="http://schemas.microsoft.com/office/drawing/2014/main" id="{353466C6-8248-429F-8056-FF040BF509EB}"/>
               </a:ext>
             </a:extLst>
           </p:cNvPr>
@@ -2223,7 +2223,7 @@
           <p:cNvPr id="2" name="Título 1">
             <a:extLst>
               <a:ext uri="{FF2B5EF4-FFF2-40B4-BE49-F238E27FC236}">
-                <a16:creationId xmlns:a16="http://schemas.microsoft.com/office/drawing/2014/main" xmlns="" id="{BC7BB9F0-F14B-4A91-B2B7-35BC47FE4DE7}"/>
+                <a16:creationId xmlns:a16="http://schemas.microsoft.com/office/drawing/2014/main" id="{BC7BB9F0-F14B-4A91-B2B7-35BC47FE4DE7}"/>
               </a:ext>
             </a:extLst>
           </p:cNvPr>
@@ -2251,7 +2251,7 @@
           <p:cNvPr id="3" name="Espaço Reservado para Conteúdo 2">
             <a:extLst>
               <a:ext uri="{FF2B5EF4-FFF2-40B4-BE49-F238E27FC236}">
-                <a16:creationId xmlns:a16="http://schemas.microsoft.com/office/drawing/2014/main" xmlns="" id="{EC1FC1C4-73DA-47A6-8496-B0B457F7D39A}"/>
+                <a16:creationId xmlns:a16="http://schemas.microsoft.com/office/drawing/2014/main" id="{EC1FC1C4-73DA-47A6-8496-B0B457F7D39A}"/>
               </a:ext>
             </a:extLst>
           </p:cNvPr>
@@ -2313,7 +2313,7 @@
           <p:cNvPr id="4" name="Espaço Reservado para Conteúdo 3">
             <a:extLst>
               <a:ext uri="{FF2B5EF4-FFF2-40B4-BE49-F238E27FC236}">
-                <a16:creationId xmlns:a16="http://schemas.microsoft.com/office/drawing/2014/main" xmlns="" id="{E92F06A8-A449-4D92-9912-76873E529B38}"/>
+                <a16:creationId xmlns:a16="http://schemas.microsoft.com/office/drawing/2014/main" id="{E92F06A8-A449-4D92-9912-76873E529B38}"/>
               </a:ext>
             </a:extLst>
           </p:cNvPr>
@@ -2375,7 +2375,7 @@
           <p:cNvPr id="5" name="Espaço Reservado para Data 4">
             <a:extLst>
               <a:ext uri="{FF2B5EF4-FFF2-40B4-BE49-F238E27FC236}">
-                <a16:creationId xmlns:a16="http://schemas.microsoft.com/office/drawing/2014/main" xmlns="" id="{938070A4-BC2F-4D55-BD8D-DEAF11BB9EE9}"/>
+                <a16:creationId xmlns:a16="http://schemas.microsoft.com/office/drawing/2014/main" id="{938070A4-BC2F-4D55-BD8D-DEAF11BB9EE9}"/>
               </a:ext>
             </a:extLst>
           </p:cNvPr>
@@ -2393,7 +2393,7 @@
           <a:p>
             <a:fld id="{63289F7E-B80B-496E-81B4-D396C37C9454}" type="datetimeFigureOut">
               <a:rPr lang="pt-BR" smtClean="0"/>
-              <a:t>08/08/2025</a:t>
+              <a:t>14/08/2025</a:t>
             </a:fld>
             <a:endParaRPr lang="pt-BR"/>
           </a:p>
@@ -2404,7 +2404,7 @@
           <p:cNvPr id="6" name="Espaço Reservado para Rodapé 5">
             <a:extLst>
               <a:ext uri="{FF2B5EF4-FFF2-40B4-BE49-F238E27FC236}">
-                <a16:creationId xmlns:a16="http://schemas.microsoft.com/office/drawing/2014/main" xmlns="" id="{45CC2DB8-844A-465F-BA9A-7734C80C7F43}"/>
+                <a16:creationId xmlns:a16="http://schemas.microsoft.com/office/drawing/2014/main" id="{45CC2DB8-844A-465F-BA9A-7734C80C7F43}"/>
               </a:ext>
             </a:extLst>
           </p:cNvPr>
@@ -2429,7 +2429,7 @@
           <p:cNvPr id="7" name="Espaço Reservado para Número de Slide 6">
             <a:extLst>
               <a:ext uri="{FF2B5EF4-FFF2-40B4-BE49-F238E27FC236}">
-                <a16:creationId xmlns:a16="http://schemas.microsoft.com/office/drawing/2014/main" xmlns="" id="{4CC606A8-097B-4040-94E0-CD8C88280D8F}"/>
+                <a16:creationId xmlns:a16="http://schemas.microsoft.com/office/drawing/2014/main" id="{4CC606A8-097B-4040-94E0-CD8C88280D8F}"/>
               </a:ext>
             </a:extLst>
           </p:cNvPr>
@@ -2488,7 +2488,7 @@
           <p:cNvPr id="2" name="Título 1">
             <a:extLst>
               <a:ext uri="{FF2B5EF4-FFF2-40B4-BE49-F238E27FC236}">
-                <a16:creationId xmlns:a16="http://schemas.microsoft.com/office/drawing/2014/main" xmlns="" id="{76D66686-0143-4CB6-8C09-BA326F1E7ACA}"/>
+                <a16:creationId xmlns:a16="http://schemas.microsoft.com/office/drawing/2014/main" id="{76D66686-0143-4CB6-8C09-BA326F1E7ACA}"/>
               </a:ext>
             </a:extLst>
           </p:cNvPr>
@@ -2521,7 +2521,7 @@
           <p:cNvPr id="3" name="Espaço Reservado para Texto 2">
             <a:extLst>
               <a:ext uri="{FF2B5EF4-FFF2-40B4-BE49-F238E27FC236}">
-                <a16:creationId xmlns:a16="http://schemas.microsoft.com/office/drawing/2014/main" xmlns="" id="{0227AB85-F59E-4BCE-B846-4FA0992C2F23}"/>
+                <a16:creationId xmlns:a16="http://schemas.microsoft.com/office/drawing/2014/main" id="{0227AB85-F59E-4BCE-B846-4FA0992C2F23}"/>
               </a:ext>
             </a:extLst>
           </p:cNvPr>
@@ -2592,7 +2592,7 @@
           <p:cNvPr id="4" name="Espaço Reservado para Conteúdo 3">
             <a:extLst>
               <a:ext uri="{FF2B5EF4-FFF2-40B4-BE49-F238E27FC236}">
-                <a16:creationId xmlns:a16="http://schemas.microsoft.com/office/drawing/2014/main" xmlns="" id="{3373456C-7319-4D0A-827D-D29F6B083F5D}"/>
+                <a16:creationId xmlns:a16="http://schemas.microsoft.com/office/drawing/2014/main" id="{3373456C-7319-4D0A-827D-D29F6B083F5D}"/>
               </a:ext>
             </a:extLst>
           </p:cNvPr>
@@ -2654,7 +2654,7 @@
           <p:cNvPr id="5" name="Espaço Reservado para Texto 4">
             <a:extLst>
               <a:ext uri="{FF2B5EF4-FFF2-40B4-BE49-F238E27FC236}">
-                <a16:creationId xmlns:a16="http://schemas.microsoft.com/office/drawing/2014/main" xmlns="" id="{4CD109D0-2E83-4262-8029-A871CEC47406}"/>
+                <a16:creationId xmlns:a16="http://schemas.microsoft.com/office/drawing/2014/main" id="{4CD109D0-2E83-4262-8029-A871CEC47406}"/>
               </a:ext>
             </a:extLst>
           </p:cNvPr>
@@ -2725,7 +2725,7 @@
           <p:cNvPr id="6" name="Espaço Reservado para Conteúdo 5">
             <a:extLst>
               <a:ext uri="{FF2B5EF4-FFF2-40B4-BE49-F238E27FC236}">
-                <a16:creationId xmlns:a16="http://schemas.microsoft.com/office/drawing/2014/main" xmlns="" id="{AD706E3A-CFBB-4A6C-A65F-D0360A9E74FE}"/>
+                <a16:creationId xmlns:a16="http://schemas.microsoft.com/office/drawing/2014/main" id="{AD706E3A-CFBB-4A6C-A65F-D0360A9E74FE}"/>
               </a:ext>
             </a:extLst>
           </p:cNvPr>
@@ -2787,7 +2787,7 @@
           <p:cNvPr id="7" name="Espaço Reservado para Data 6">
             <a:extLst>
               <a:ext uri="{FF2B5EF4-FFF2-40B4-BE49-F238E27FC236}">
-                <a16:creationId xmlns:a16="http://schemas.microsoft.com/office/drawing/2014/main" xmlns="" id="{4172C0E5-5AF0-4805-BB51-443733CD2BD5}"/>
+                <a16:creationId xmlns:a16="http://schemas.microsoft.com/office/drawing/2014/main" id="{4172C0E5-5AF0-4805-BB51-443733CD2BD5}"/>
               </a:ext>
             </a:extLst>
           </p:cNvPr>
@@ -2805,7 +2805,7 @@
           <a:p>
             <a:fld id="{63289F7E-B80B-496E-81B4-D396C37C9454}" type="datetimeFigureOut">
               <a:rPr lang="pt-BR" smtClean="0"/>
-              <a:t>08/08/2025</a:t>
+              <a:t>14/08/2025</a:t>
             </a:fld>
             <a:endParaRPr lang="pt-BR"/>
           </a:p>
@@ -2816,7 +2816,7 @@
           <p:cNvPr id="8" name="Espaço Reservado para Rodapé 7">
             <a:extLst>
               <a:ext uri="{FF2B5EF4-FFF2-40B4-BE49-F238E27FC236}">
-                <a16:creationId xmlns:a16="http://schemas.microsoft.com/office/drawing/2014/main" xmlns="" id="{0E801648-156F-497E-99CF-797DF48051E1}"/>
+                <a16:creationId xmlns:a16="http://schemas.microsoft.com/office/drawing/2014/main" id="{0E801648-156F-497E-99CF-797DF48051E1}"/>
               </a:ext>
             </a:extLst>
           </p:cNvPr>
@@ -2841,7 +2841,7 @@
           <p:cNvPr id="9" name="Espaço Reservado para Número de Slide 8">
             <a:extLst>
               <a:ext uri="{FF2B5EF4-FFF2-40B4-BE49-F238E27FC236}">
-                <a16:creationId xmlns:a16="http://schemas.microsoft.com/office/drawing/2014/main" xmlns="" id="{EEE23D32-80E7-4796-A137-66BF842E4B53}"/>
+                <a16:creationId xmlns:a16="http://schemas.microsoft.com/office/drawing/2014/main" id="{EEE23D32-80E7-4796-A137-66BF842E4B53}"/>
               </a:ext>
             </a:extLst>
           </p:cNvPr>
@@ -2900,7 +2900,7 @@
           <p:cNvPr id="2" name="Título 1">
             <a:extLst>
               <a:ext uri="{FF2B5EF4-FFF2-40B4-BE49-F238E27FC236}">
-                <a16:creationId xmlns:a16="http://schemas.microsoft.com/office/drawing/2014/main" xmlns="" id="{2BCE2379-C78F-47E1-8CFC-B846E7AF148D}"/>
+                <a16:creationId xmlns:a16="http://schemas.microsoft.com/office/drawing/2014/main" id="{2BCE2379-C78F-47E1-8CFC-B846E7AF148D}"/>
               </a:ext>
             </a:extLst>
           </p:cNvPr>
@@ -2928,7 +2928,7 @@
           <p:cNvPr id="3" name="Espaço Reservado para Data 2">
             <a:extLst>
               <a:ext uri="{FF2B5EF4-FFF2-40B4-BE49-F238E27FC236}">
-                <a16:creationId xmlns:a16="http://schemas.microsoft.com/office/drawing/2014/main" xmlns="" id="{342600A9-7F92-4E22-9D94-E4717252A817}"/>
+                <a16:creationId xmlns:a16="http://schemas.microsoft.com/office/drawing/2014/main" id="{342600A9-7F92-4E22-9D94-E4717252A817}"/>
               </a:ext>
             </a:extLst>
           </p:cNvPr>
@@ -2946,7 +2946,7 @@
           <a:p>
             <a:fld id="{63289F7E-B80B-496E-81B4-D396C37C9454}" type="datetimeFigureOut">
               <a:rPr lang="pt-BR" smtClean="0"/>
-              <a:t>08/08/2025</a:t>
+              <a:t>14/08/2025</a:t>
             </a:fld>
             <a:endParaRPr lang="pt-BR"/>
           </a:p>
@@ -2957,7 +2957,7 @@
           <p:cNvPr id="4" name="Espaço Reservado para Rodapé 3">
             <a:extLst>
               <a:ext uri="{FF2B5EF4-FFF2-40B4-BE49-F238E27FC236}">
-                <a16:creationId xmlns:a16="http://schemas.microsoft.com/office/drawing/2014/main" xmlns="" id="{192E6BED-F546-40CC-A2DF-99CBA853654E}"/>
+                <a16:creationId xmlns:a16="http://schemas.microsoft.com/office/drawing/2014/main" id="{192E6BED-F546-40CC-A2DF-99CBA853654E}"/>
               </a:ext>
             </a:extLst>
           </p:cNvPr>
@@ -2982,7 +2982,7 @@
           <p:cNvPr id="5" name="Espaço Reservado para Número de Slide 4">
             <a:extLst>
               <a:ext uri="{FF2B5EF4-FFF2-40B4-BE49-F238E27FC236}">
-                <a16:creationId xmlns:a16="http://schemas.microsoft.com/office/drawing/2014/main" xmlns="" id="{6091CC40-A8C4-4063-80EB-CC5099621678}"/>
+                <a16:creationId xmlns:a16="http://schemas.microsoft.com/office/drawing/2014/main" id="{6091CC40-A8C4-4063-80EB-CC5099621678}"/>
               </a:ext>
             </a:extLst>
           </p:cNvPr>
@@ -3041,7 +3041,7 @@
           <p:cNvPr id="2" name="Espaço Reservado para Data 1">
             <a:extLst>
               <a:ext uri="{FF2B5EF4-FFF2-40B4-BE49-F238E27FC236}">
-                <a16:creationId xmlns:a16="http://schemas.microsoft.com/office/drawing/2014/main" xmlns="" id="{DD19515C-212C-4EAE-84A3-8FF4BC844F1B}"/>
+                <a16:creationId xmlns:a16="http://schemas.microsoft.com/office/drawing/2014/main" id="{DD19515C-212C-4EAE-84A3-8FF4BC844F1B}"/>
               </a:ext>
             </a:extLst>
           </p:cNvPr>
@@ -3059,7 +3059,7 @@
           <a:p>
             <a:fld id="{63289F7E-B80B-496E-81B4-D396C37C9454}" type="datetimeFigureOut">
               <a:rPr lang="pt-BR" smtClean="0"/>
-              <a:t>08/08/2025</a:t>
+              <a:t>14/08/2025</a:t>
             </a:fld>
             <a:endParaRPr lang="pt-BR"/>
           </a:p>
@@ -3070,7 +3070,7 @@
           <p:cNvPr id="3" name="Espaço Reservado para Rodapé 2">
             <a:extLst>
               <a:ext uri="{FF2B5EF4-FFF2-40B4-BE49-F238E27FC236}">
-                <a16:creationId xmlns:a16="http://schemas.microsoft.com/office/drawing/2014/main" xmlns="" id="{94D3D120-B3E8-4C96-861D-7A4F12F49B3A}"/>
+                <a16:creationId xmlns:a16="http://schemas.microsoft.com/office/drawing/2014/main" id="{94D3D120-B3E8-4C96-861D-7A4F12F49B3A}"/>
               </a:ext>
             </a:extLst>
           </p:cNvPr>
@@ -3095,7 +3095,7 @@
           <p:cNvPr id="4" name="Espaço Reservado para Número de Slide 3">
             <a:extLst>
               <a:ext uri="{FF2B5EF4-FFF2-40B4-BE49-F238E27FC236}">
-                <a16:creationId xmlns:a16="http://schemas.microsoft.com/office/drawing/2014/main" xmlns="" id="{42E49B68-FA1B-468B-9F17-D5C09243D454}"/>
+                <a16:creationId xmlns:a16="http://schemas.microsoft.com/office/drawing/2014/main" id="{42E49B68-FA1B-468B-9F17-D5C09243D454}"/>
               </a:ext>
             </a:extLst>
           </p:cNvPr>
@@ -3154,7 +3154,7 @@
           <p:cNvPr id="2" name="Título 1">
             <a:extLst>
               <a:ext uri="{FF2B5EF4-FFF2-40B4-BE49-F238E27FC236}">
-                <a16:creationId xmlns:a16="http://schemas.microsoft.com/office/drawing/2014/main" xmlns="" id="{1C17BCBE-A897-4319-85EC-D87909C24980}"/>
+                <a16:creationId xmlns:a16="http://schemas.microsoft.com/office/drawing/2014/main" id="{1C17BCBE-A897-4319-85EC-D87909C24980}"/>
               </a:ext>
             </a:extLst>
           </p:cNvPr>
@@ -3191,7 +3191,7 @@
           <p:cNvPr id="3" name="Espaço Reservado para Conteúdo 2">
             <a:extLst>
               <a:ext uri="{FF2B5EF4-FFF2-40B4-BE49-F238E27FC236}">
-                <a16:creationId xmlns:a16="http://schemas.microsoft.com/office/drawing/2014/main" xmlns="" id="{4226F885-0204-4913-868B-4B8B82576F17}"/>
+                <a16:creationId xmlns:a16="http://schemas.microsoft.com/office/drawing/2014/main" id="{4226F885-0204-4913-868B-4B8B82576F17}"/>
               </a:ext>
             </a:extLst>
           </p:cNvPr>
@@ -3281,7 +3281,7 @@
           <p:cNvPr id="4" name="Espaço Reservado para Texto 3">
             <a:extLst>
               <a:ext uri="{FF2B5EF4-FFF2-40B4-BE49-F238E27FC236}">
-                <a16:creationId xmlns:a16="http://schemas.microsoft.com/office/drawing/2014/main" xmlns="" id="{00F9F784-A858-441B-8AB5-697098141751}"/>
+                <a16:creationId xmlns:a16="http://schemas.microsoft.com/office/drawing/2014/main" id="{00F9F784-A858-441B-8AB5-697098141751}"/>
               </a:ext>
             </a:extLst>
           </p:cNvPr>
@@ -3352,7 +3352,7 @@
           <p:cNvPr id="5" name="Espaço Reservado para Data 4">
             <a:extLst>
               <a:ext uri="{FF2B5EF4-FFF2-40B4-BE49-F238E27FC236}">
-                <a16:creationId xmlns:a16="http://schemas.microsoft.com/office/drawing/2014/main" xmlns="" id="{A4DC363A-5000-472E-8B17-02E7DCB8840A}"/>
+                <a16:creationId xmlns:a16="http://schemas.microsoft.com/office/drawing/2014/main" id="{A4DC363A-5000-472E-8B17-02E7DCB8840A}"/>
               </a:ext>
             </a:extLst>
           </p:cNvPr>
@@ -3370,7 +3370,7 @@
           <a:p>
             <a:fld id="{63289F7E-B80B-496E-81B4-D396C37C9454}" type="datetimeFigureOut">
               <a:rPr lang="pt-BR" smtClean="0"/>
-              <a:t>08/08/2025</a:t>
+              <a:t>14/08/2025</a:t>
             </a:fld>
             <a:endParaRPr lang="pt-BR"/>
           </a:p>
@@ -3381,7 +3381,7 @@
           <p:cNvPr id="6" name="Espaço Reservado para Rodapé 5">
             <a:extLst>
               <a:ext uri="{FF2B5EF4-FFF2-40B4-BE49-F238E27FC236}">
-                <a16:creationId xmlns:a16="http://schemas.microsoft.com/office/drawing/2014/main" xmlns="" id="{5548425D-2C21-4C56-BAD4-662978775C28}"/>
+                <a16:creationId xmlns:a16="http://schemas.microsoft.com/office/drawing/2014/main" id="{5548425D-2C21-4C56-BAD4-662978775C28}"/>
               </a:ext>
             </a:extLst>
           </p:cNvPr>
@@ -3406,7 +3406,7 @@
           <p:cNvPr id="7" name="Espaço Reservado para Número de Slide 6">
             <a:extLst>
               <a:ext uri="{FF2B5EF4-FFF2-40B4-BE49-F238E27FC236}">
-                <a16:creationId xmlns:a16="http://schemas.microsoft.com/office/drawing/2014/main" xmlns="" id="{C63E9726-E64C-42B2-AE8A-8C235A956B48}"/>
+                <a16:creationId xmlns:a16="http://schemas.microsoft.com/office/drawing/2014/main" id="{C63E9726-E64C-42B2-AE8A-8C235A956B48}"/>
               </a:ext>
             </a:extLst>
           </p:cNvPr>
@@ -3465,7 +3465,7 @@
           <p:cNvPr id="2" name="Título 1">
             <a:extLst>
               <a:ext uri="{FF2B5EF4-FFF2-40B4-BE49-F238E27FC236}">
-                <a16:creationId xmlns:a16="http://schemas.microsoft.com/office/drawing/2014/main" xmlns="" id="{11086A78-3E74-450C-96A6-CA8AC37AF772}"/>
+                <a16:creationId xmlns:a16="http://schemas.microsoft.com/office/drawing/2014/main" id="{11086A78-3E74-450C-96A6-CA8AC37AF772}"/>
               </a:ext>
             </a:extLst>
           </p:cNvPr>
@@ -3502,7 +3502,7 @@
           <p:cNvPr id="3" name="Espaço Reservado para Imagem 2">
             <a:extLst>
               <a:ext uri="{FF2B5EF4-FFF2-40B4-BE49-F238E27FC236}">
-                <a16:creationId xmlns:a16="http://schemas.microsoft.com/office/drawing/2014/main" xmlns="" id="{5F5B7312-975A-4DBC-9B2F-3652ADA006FD}"/>
+                <a16:creationId xmlns:a16="http://schemas.microsoft.com/office/drawing/2014/main" id="{5F5B7312-975A-4DBC-9B2F-3652ADA006FD}"/>
               </a:ext>
             </a:extLst>
           </p:cNvPr>
@@ -3569,7 +3569,7 @@
           <p:cNvPr id="4" name="Espaço Reservado para Texto 3">
             <a:extLst>
               <a:ext uri="{FF2B5EF4-FFF2-40B4-BE49-F238E27FC236}">
-                <a16:creationId xmlns:a16="http://schemas.microsoft.com/office/drawing/2014/main" xmlns="" id="{AAF805F5-1DFF-41C6-944C-7D79FE0D0963}"/>
+                <a16:creationId xmlns:a16="http://schemas.microsoft.com/office/drawing/2014/main" id="{AAF805F5-1DFF-41C6-944C-7D79FE0D0963}"/>
               </a:ext>
             </a:extLst>
           </p:cNvPr>
@@ -3640,7 +3640,7 @@
           <p:cNvPr id="5" name="Espaço Reservado para Data 4">
             <a:extLst>
               <a:ext uri="{FF2B5EF4-FFF2-40B4-BE49-F238E27FC236}">
-                <a16:creationId xmlns:a16="http://schemas.microsoft.com/office/drawing/2014/main" xmlns="" id="{02113D81-8665-4516-BD81-C6A1F254EECD}"/>
+                <a16:creationId xmlns:a16="http://schemas.microsoft.com/office/drawing/2014/main" id="{02113D81-8665-4516-BD81-C6A1F254EECD}"/>
               </a:ext>
             </a:extLst>
           </p:cNvPr>
@@ -3658,7 +3658,7 @@
           <a:p>
             <a:fld id="{63289F7E-B80B-496E-81B4-D396C37C9454}" type="datetimeFigureOut">
               <a:rPr lang="pt-BR" smtClean="0"/>
-              <a:t>08/08/2025</a:t>
+              <a:t>14/08/2025</a:t>
             </a:fld>
             <a:endParaRPr lang="pt-BR"/>
           </a:p>
@@ -3669,7 +3669,7 @@
           <p:cNvPr id="6" name="Espaço Reservado para Rodapé 5">
             <a:extLst>
               <a:ext uri="{FF2B5EF4-FFF2-40B4-BE49-F238E27FC236}">
-                <a16:creationId xmlns:a16="http://schemas.microsoft.com/office/drawing/2014/main" xmlns="" id="{2B00C88B-FF32-40AA-A187-727D96FD7862}"/>
+                <a16:creationId xmlns:a16="http://schemas.microsoft.com/office/drawing/2014/main" id="{2B00C88B-FF32-40AA-A187-727D96FD7862}"/>
               </a:ext>
             </a:extLst>
           </p:cNvPr>
@@ -3694,7 +3694,7 @@
           <p:cNvPr id="7" name="Espaço Reservado para Número de Slide 6">
             <a:extLst>
               <a:ext uri="{FF2B5EF4-FFF2-40B4-BE49-F238E27FC236}">
-                <a16:creationId xmlns:a16="http://schemas.microsoft.com/office/drawing/2014/main" xmlns="" id="{A04D1A2D-69F7-4B8F-A730-BC26DC340BA6}"/>
+                <a16:creationId xmlns:a16="http://schemas.microsoft.com/office/drawing/2014/main" id="{A04D1A2D-69F7-4B8F-A730-BC26DC340BA6}"/>
               </a:ext>
             </a:extLst>
           </p:cNvPr>
@@ -3758,7 +3758,7 @@
           <p:cNvPr id="2" name="Espaço Reservado para Título 1">
             <a:extLst>
               <a:ext uri="{FF2B5EF4-FFF2-40B4-BE49-F238E27FC236}">
-                <a16:creationId xmlns:a16="http://schemas.microsoft.com/office/drawing/2014/main" xmlns="" id="{E69A0273-1966-4A1B-9370-4C1CE5036371}"/>
+                <a16:creationId xmlns:a16="http://schemas.microsoft.com/office/drawing/2014/main" id="{E69A0273-1966-4A1B-9370-4C1CE5036371}"/>
               </a:ext>
             </a:extLst>
           </p:cNvPr>
@@ -3796,7 +3796,7 @@
           <p:cNvPr id="3" name="Espaço Reservado para Texto 2">
             <a:extLst>
               <a:ext uri="{FF2B5EF4-FFF2-40B4-BE49-F238E27FC236}">
-                <a16:creationId xmlns:a16="http://schemas.microsoft.com/office/drawing/2014/main" xmlns="" id="{3B9CF87A-0448-49A7-AB25-EBC1D56A40EF}"/>
+                <a16:creationId xmlns:a16="http://schemas.microsoft.com/office/drawing/2014/main" id="{3B9CF87A-0448-49A7-AB25-EBC1D56A40EF}"/>
               </a:ext>
             </a:extLst>
           </p:cNvPr>
@@ -3863,7 +3863,7 @@
           <p:cNvPr id="4" name="Espaço Reservado para Data 3">
             <a:extLst>
               <a:ext uri="{FF2B5EF4-FFF2-40B4-BE49-F238E27FC236}">
-                <a16:creationId xmlns:a16="http://schemas.microsoft.com/office/drawing/2014/main" xmlns="" id="{2EF7B1F2-BB5A-44D0-816D-16AD2C71430E}"/>
+                <a16:creationId xmlns:a16="http://schemas.microsoft.com/office/drawing/2014/main" id="{2EF7B1F2-BB5A-44D0-816D-16AD2C71430E}"/>
               </a:ext>
             </a:extLst>
           </p:cNvPr>
@@ -3899,7 +3899,7 @@
           <a:p>
             <a:fld id="{63289F7E-B80B-496E-81B4-D396C37C9454}" type="datetimeFigureOut">
               <a:rPr lang="pt-BR" smtClean="0"/>
-              <a:t>08/08/2025</a:t>
+              <a:t>14/08/2025</a:t>
             </a:fld>
             <a:endParaRPr lang="pt-BR"/>
           </a:p>
@@ -3910,7 +3910,7 @@
           <p:cNvPr id="5" name="Espaço Reservado para Rodapé 4">
             <a:extLst>
               <a:ext uri="{FF2B5EF4-FFF2-40B4-BE49-F238E27FC236}">
-                <a16:creationId xmlns:a16="http://schemas.microsoft.com/office/drawing/2014/main" xmlns="" id="{C703F94C-2CC8-4DAA-BC35-14FC3E841DCD}"/>
+                <a16:creationId xmlns:a16="http://schemas.microsoft.com/office/drawing/2014/main" id="{C703F94C-2CC8-4DAA-BC35-14FC3E841DCD}"/>
               </a:ext>
             </a:extLst>
           </p:cNvPr>
@@ -3953,7 +3953,7 @@
           <p:cNvPr id="6" name="Espaço Reservado para Número de Slide 5">
             <a:extLst>
               <a:ext uri="{FF2B5EF4-FFF2-40B4-BE49-F238E27FC236}">
-                <a16:creationId xmlns:a16="http://schemas.microsoft.com/office/drawing/2014/main" xmlns="" id="{64051336-7048-457A-8B61-D94291D71648}"/>
+                <a16:creationId xmlns:a16="http://schemas.microsoft.com/office/drawing/2014/main" id="{64051336-7048-457A-8B61-D94291D71648}"/>
               </a:ext>
             </a:extLst>
           </p:cNvPr>
@@ -4321,7 +4321,7 @@
           <p:cNvPr id="2" name="Título 1">
             <a:extLst>
               <a:ext uri="{FF2B5EF4-FFF2-40B4-BE49-F238E27FC236}">
-                <a16:creationId xmlns:a16="http://schemas.microsoft.com/office/drawing/2014/main" xmlns="" id="{32666AC8-2E17-4DB4-B0F5-60C640CCFD2E}"/>
+                <a16:creationId xmlns:a16="http://schemas.microsoft.com/office/drawing/2014/main" id="{32666AC8-2E17-4DB4-B0F5-60C640CCFD2E}"/>
               </a:ext>
             </a:extLst>
           </p:cNvPr>
@@ -4348,10 +4348,6 @@
               <a:rPr lang="pt-BR" sz="5400" dirty="0"/>
               <a:t>TP558 - Tópicos avançados em Machine Learning:</a:t>
             </a:r>
-            <a:r>
-              <a:rPr lang="pt-BR" dirty="0"/>
-              <a:t/>
-            </a:r>
             <a:br>
               <a:rPr lang="pt-BR" dirty="0"/>
             </a:br>
@@ -4367,7 +4363,7 @@
           <p:cNvPr id="4" name="CaixaDeTexto 3">
             <a:extLst>
               <a:ext uri="{FF2B5EF4-FFF2-40B4-BE49-F238E27FC236}">
-                <a16:creationId xmlns:a16="http://schemas.microsoft.com/office/drawing/2014/main" xmlns="" id="{430EB894-B7D4-434C-9D1A-A14094D9BEEC}"/>
+                <a16:creationId xmlns:a16="http://schemas.microsoft.com/office/drawing/2014/main" id="{430EB894-B7D4-434C-9D1A-A14094D9BEEC}"/>
               </a:ext>
             </a:extLst>
           </p:cNvPr>
@@ -4408,7 +4404,7 @@
           <p:cNvPr id="1026" name="Picture 2" descr="Logo">
             <a:extLst>
               <a:ext uri="{FF2B5EF4-FFF2-40B4-BE49-F238E27FC236}">
-                <a16:creationId xmlns:a16="http://schemas.microsoft.com/office/drawing/2014/main" xmlns="" id="{3F2642E0-4F6A-4196-8F58-E77D36E9A33F}"/>
+                <a16:creationId xmlns:a16="http://schemas.microsoft.com/office/drawing/2014/main" id="{3F2642E0-4F6A-4196-8F58-E77D36E9A33F}"/>
               </a:ext>
             </a:extLst>
           </p:cNvPr>
@@ -4453,7 +4449,7 @@
           <p:cNvPr id="5122" name="Picture 2" descr="Image result for machine learning">
             <a:extLst>
               <a:ext uri="{FF2B5EF4-FFF2-40B4-BE49-F238E27FC236}">
-                <a16:creationId xmlns:a16="http://schemas.microsoft.com/office/drawing/2014/main" xmlns="" id="{810CE0A2-4102-44A6-A370-175E7896CDCB}"/>
+                <a16:creationId xmlns:a16="http://schemas.microsoft.com/office/drawing/2014/main" id="{810CE0A2-4102-44A6-A370-175E7896CDCB}"/>
               </a:ext>
             </a:extLst>
           </p:cNvPr>
@@ -4514,7 +4510,7 @@
         <p:cNvPr id="1" name="">
           <a:extLst>
             <a:ext uri="{FF2B5EF4-FFF2-40B4-BE49-F238E27FC236}">
-              <a16:creationId xmlns:a16="http://schemas.microsoft.com/office/drawing/2014/main" xmlns="" id="{7617B87B-9451-26E5-143E-DFEF71434E9F}"/>
+              <a16:creationId xmlns:a16="http://schemas.microsoft.com/office/drawing/2014/main" id="{7617B87B-9451-26E5-143E-DFEF71434E9F}"/>
             </a:ext>
           </a:extLst>
         </p:cNvPr>
@@ -4534,7 +4530,7 @@
           <p:cNvPr id="2" name="Título 1">
             <a:extLst>
               <a:ext uri="{FF2B5EF4-FFF2-40B4-BE49-F238E27FC236}">
-                <a16:creationId xmlns:a16="http://schemas.microsoft.com/office/drawing/2014/main" xmlns="" id="{530D8C5D-85CB-1EC5-46EE-3E9C5D6E11D6}"/>
+                <a16:creationId xmlns:a16="http://schemas.microsoft.com/office/drawing/2014/main" id="{530D8C5D-85CB-1EC5-46EE-3E9C5D6E11D6}"/>
               </a:ext>
             </a:extLst>
           </p:cNvPr>
@@ -4562,7 +4558,7 @@
           <p:cNvPr id="3" name="Espaço Reservado para Conteúdo 2">
             <a:extLst>
               <a:ext uri="{FF2B5EF4-FFF2-40B4-BE49-F238E27FC236}">
-                <a16:creationId xmlns:a16="http://schemas.microsoft.com/office/drawing/2014/main" xmlns="" id="{4C11FF3E-C7A6-AE98-273A-28F266ADBFC3}"/>
+                <a16:creationId xmlns:a16="http://schemas.microsoft.com/office/drawing/2014/main" id="{4C11FF3E-C7A6-AE98-273A-28F266ADBFC3}"/>
               </a:ext>
             </a:extLst>
           </p:cNvPr>
@@ -4811,7 +4807,7 @@
         <p:cNvPr id="1" name="">
           <a:extLst>
             <a:ext uri="{FF2B5EF4-FFF2-40B4-BE49-F238E27FC236}">
-              <a16:creationId xmlns:a16="http://schemas.microsoft.com/office/drawing/2014/main" xmlns="" id="{C27B3849-BF4B-F30A-23EA-9FE30E20CBCA}"/>
+              <a16:creationId xmlns:a16="http://schemas.microsoft.com/office/drawing/2014/main" id="{C27B3849-BF4B-F30A-23EA-9FE30E20CBCA}"/>
             </a:ext>
           </a:extLst>
         </p:cNvPr>
@@ -4831,7 +4827,7 @@
           <p:cNvPr id="2" name="Título 1">
             <a:extLst>
               <a:ext uri="{FF2B5EF4-FFF2-40B4-BE49-F238E27FC236}">
-                <a16:creationId xmlns:a16="http://schemas.microsoft.com/office/drawing/2014/main" xmlns="" id="{249A0E92-603C-2FF8-F119-2A802B939AA2}"/>
+                <a16:creationId xmlns:a16="http://schemas.microsoft.com/office/drawing/2014/main" id="{249A0E92-603C-2FF8-F119-2A802B939AA2}"/>
               </a:ext>
             </a:extLst>
           </p:cNvPr>
@@ -4859,7 +4855,7 @@
           <p:cNvPr id="3" name="Espaço Reservado para Conteúdo 2">
             <a:extLst>
               <a:ext uri="{FF2B5EF4-FFF2-40B4-BE49-F238E27FC236}">
-                <a16:creationId xmlns:a16="http://schemas.microsoft.com/office/drawing/2014/main" xmlns="" id="{09015E3D-F27D-5C4C-AFAE-8A3141CD4684}"/>
+                <a16:creationId xmlns:a16="http://schemas.microsoft.com/office/drawing/2014/main" id="{09015E3D-F27D-5C4C-AFAE-8A3141CD4684}"/>
               </a:ext>
             </a:extLst>
           </p:cNvPr>
@@ -5034,7 +5030,7 @@
         <p:cNvPr id="1" name="">
           <a:extLst>
             <a:ext uri="{FF2B5EF4-FFF2-40B4-BE49-F238E27FC236}">
-              <a16:creationId xmlns:a16="http://schemas.microsoft.com/office/drawing/2014/main" xmlns="" id="{6E3AB78C-4A70-ED33-6088-7D978AFBD15F}"/>
+              <a16:creationId xmlns:a16="http://schemas.microsoft.com/office/drawing/2014/main" id="{6E3AB78C-4A70-ED33-6088-7D978AFBD15F}"/>
             </a:ext>
           </a:extLst>
         </p:cNvPr>
@@ -5054,7 +5050,7 @@
           <p:cNvPr id="2" name="Título 1">
             <a:extLst>
               <a:ext uri="{FF2B5EF4-FFF2-40B4-BE49-F238E27FC236}">
-                <a16:creationId xmlns:a16="http://schemas.microsoft.com/office/drawing/2014/main" xmlns="" id="{20C0DDF2-0E52-0740-004B-2209C15740BF}"/>
+                <a16:creationId xmlns:a16="http://schemas.microsoft.com/office/drawing/2014/main" id="{20C0DDF2-0E52-0740-004B-2209C15740BF}"/>
               </a:ext>
             </a:extLst>
           </p:cNvPr>
@@ -5082,7 +5078,7 @@
           <p:cNvPr id="3" name="Espaço Reservado para Conteúdo 2">
             <a:extLst>
               <a:ext uri="{FF2B5EF4-FFF2-40B4-BE49-F238E27FC236}">
-                <a16:creationId xmlns:a16="http://schemas.microsoft.com/office/drawing/2014/main" xmlns="" id="{CAA14ED1-BBC4-3217-0C26-BBA0501ACF3D}"/>
+                <a16:creationId xmlns:a16="http://schemas.microsoft.com/office/drawing/2014/main" id="{CAA14ED1-BBC4-3217-0C26-BBA0501ACF3D}"/>
               </a:ext>
             </a:extLst>
           </p:cNvPr>
@@ -5319,7 +5315,7 @@
         <p:cNvPr id="1" name="">
           <a:extLst>
             <a:ext uri="{FF2B5EF4-FFF2-40B4-BE49-F238E27FC236}">
-              <a16:creationId xmlns:a16="http://schemas.microsoft.com/office/drawing/2014/main" xmlns="" id="{6E3AB78C-4A70-ED33-6088-7D978AFBD15F}"/>
+              <a16:creationId xmlns:a16="http://schemas.microsoft.com/office/drawing/2014/main" id="{6E3AB78C-4A70-ED33-6088-7D978AFBD15F}"/>
             </a:ext>
           </a:extLst>
         </p:cNvPr>
@@ -5339,7 +5335,7 @@
           <p:cNvPr id="2" name="Título 1">
             <a:extLst>
               <a:ext uri="{FF2B5EF4-FFF2-40B4-BE49-F238E27FC236}">
-                <a16:creationId xmlns:a16="http://schemas.microsoft.com/office/drawing/2014/main" xmlns="" id="{20C0DDF2-0E52-0740-004B-2209C15740BF}"/>
+                <a16:creationId xmlns:a16="http://schemas.microsoft.com/office/drawing/2014/main" id="{20C0DDF2-0E52-0740-004B-2209C15740BF}"/>
               </a:ext>
             </a:extLst>
           </p:cNvPr>
@@ -5367,7 +5363,7 @@
           <p:cNvPr id="3" name="Espaço Reservado para Conteúdo 2">
             <a:extLst>
               <a:ext uri="{FF2B5EF4-FFF2-40B4-BE49-F238E27FC236}">
-                <a16:creationId xmlns:a16="http://schemas.microsoft.com/office/drawing/2014/main" xmlns="" id="{CAA14ED1-BBC4-3217-0C26-BBA0501ACF3D}"/>
+                <a16:creationId xmlns:a16="http://schemas.microsoft.com/office/drawing/2014/main" id="{CAA14ED1-BBC4-3217-0C26-BBA0501ACF3D}"/>
               </a:ext>
             </a:extLst>
           </p:cNvPr>
@@ -5605,7 +5601,7 @@
           <p:cNvPr id="2" name="Título 1">
             <a:extLst>
               <a:ext uri="{FF2B5EF4-FFF2-40B4-BE49-F238E27FC236}">
-                <a16:creationId xmlns:a16="http://schemas.microsoft.com/office/drawing/2014/main" xmlns="" id="{F70C7E2D-5398-4F5E-7000-BA72FF1C6228}"/>
+                <a16:creationId xmlns:a16="http://schemas.microsoft.com/office/drawing/2014/main" id="{F70C7E2D-5398-4F5E-7000-BA72FF1C6228}"/>
               </a:ext>
             </a:extLst>
           </p:cNvPr>
@@ -5633,7 +5629,7 @@
           <p:cNvPr id="3" name="Espaço Reservado para Conteúdo 2">
             <a:extLst>
               <a:ext uri="{FF2B5EF4-FFF2-40B4-BE49-F238E27FC236}">
-                <a16:creationId xmlns:a16="http://schemas.microsoft.com/office/drawing/2014/main" xmlns="" id="{BA790209-FBBD-71F4-6F9F-502DB6462A33}"/>
+                <a16:creationId xmlns:a16="http://schemas.microsoft.com/office/drawing/2014/main" id="{BA790209-FBBD-71F4-6F9F-502DB6462A33}"/>
               </a:ext>
             </a:extLst>
           </p:cNvPr>
@@ -5836,7 +5832,7 @@
           <p:cNvPr id="2" name="Título 1">
             <a:extLst>
               <a:ext uri="{FF2B5EF4-FFF2-40B4-BE49-F238E27FC236}">
-                <a16:creationId xmlns:a16="http://schemas.microsoft.com/office/drawing/2014/main" xmlns="" id="{F70C7E2D-5398-4F5E-7000-BA72FF1C6228}"/>
+                <a16:creationId xmlns:a16="http://schemas.microsoft.com/office/drawing/2014/main" id="{F70C7E2D-5398-4F5E-7000-BA72FF1C6228}"/>
               </a:ext>
             </a:extLst>
           </p:cNvPr>
@@ -5864,7 +5860,7 @@
           <p:cNvPr id="3" name="Espaço Reservado para Conteúdo 2">
             <a:extLst>
               <a:ext uri="{FF2B5EF4-FFF2-40B4-BE49-F238E27FC236}">
-                <a16:creationId xmlns:a16="http://schemas.microsoft.com/office/drawing/2014/main" xmlns="" id="{BA790209-FBBD-71F4-6F9F-502DB6462A33}"/>
+                <a16:creationId xmlns:a16="http://schemas.microsoft.com/office/drawing/2014/main" id="{BA790209-FBBD-71F4-6F9F-502DB6462A33}"/>
               </a:ext>
             </a:extLst>
           </p:cNvPr>
@@ -6026,7 +6022,7 @@
         <p:cNvPr id="1" name="">
           <a:extLst>
             <a:ext uri="{FF2B5EF4-FFF2-40B4-BE49-F238E27FC236}">
-              <a16:creationId xmlns:a16="http://schemas.microsoft.com/office/drawing/2014/main" xmlns="" id="{F2050D32-3E32-0E68-EE2F-10DEBF5F9E34}"/>
+              <a16:creationId xmlns:a16="http://schemas.microsoft.com/office/drawing/2014/main" id="{F2050D32-3E32-0E68-EE2F-10DEBF5F9E34}"/>
             </a:ext>
           </a:extLst>
         </p:cNvPr>
@@ -6046,7 +6042,7 @@
           <p:cNvPr id="2" name="Título 1">
             <a:extLst>
               <a:ext uri="{FF2B5EF4-FFF2-40B4-BE49-F238E27FC236}">
-                <a16:creationId xmlns:a16="http://schemas.microsoft.com/office/drawing/2014/main" xmlns="" id="{06C9BF47-FE25-64EB-E7D8-257F36BF0637}"/>
+                <a16:creationId xmlns:a16="http://schemas.microsoft.com/office/drawing/2014/main" id="{06C9BF47-FE25-64EB-E7D8-257F36BF0637}"/>
               </a:ext>
             </a:extLst>
           </p:cNvPr>
@@ -6074,7 +6070,7 @@
           <p:cNvPr id="3" name="Espaço Reservado para Conteúdo 2">
             <a:extLst>
               <a:ext uri="{FF2B5EF4-FFF2-40B4-BE49-F238E27FC236}">
-                <a16:creationId xmlns:a16="http://schemas.microsoft.com/office/drawing/2014/main" xmlns="" id="{85CD2A47-67FC-5F78-FB47-48CDDDA1C93F}"/>
+                <a16:creationId xmlns:a16="http://schemas.microsoft.com/office/drawing/2014/main" id="{85CD2A47-67FC-5F78-FB47-48CDDDA1C93F}"/>
               </a:ext>
             </a:extLst>
           </p:cNvPr>
@@ -6317,7 +6313,7 @@
         <p:cNvPr id="1" name="">
           <a:extLst>
             <a:ext uri="{FF2B5EF4-FFF2-40B4-BE49-F238E27FC236}">
-              <a16:creationId xmlns:a16="http://schemas.microsoft.com/office/drawing/2014/main" xmlns="" id="{4059CF8C-A5CA-D922-15C9-90E83F41C16F}"/>
+              <a16:creationId xmlns:a16="http://schemas.microsoft.com/office/drawing/2014/main" id="{4059CF8C-A5CA-D922-15C9-90E83F41C16F}"/>
             </a:ext>
           </a:extLst>
         </p:cNvPr>
@@ -6337,7 +6333,7 @@
           <p:cNvPr id="2" name="Título 1">
             <a:extLst>
               <a:ext uri="{FF2B5EF4-FFF2-40B4-BE49-F238E27FC236}">
-                <a16:creationId xmlns:a16="http://schemas.microsoft.com/office/drawing/2014/main" xmlns="" id="{F0E0D2C5-2C7F-FF98-F6E4-6A6D35AE3301}"/>
+                <a16:creationId xmlns:a16="http://schemas.microsoft.com/office/drawing/2014/main" id="{F0E0D2C5-2C7F-FF98-F6E4-6A6D35AE3301}"/>
               </a:ext>
             </a:extLst>
           </p:cNvPr>
@@ -6365,7 +6361,7 @@
           <p:cNvPr id="3" name="Espaço Reservado para Conteúdo 2">
             <a:extLst>
               <a:ext uri="{FF2B5EF4-FFF2-40B4-BE49-F238E27FC236}">
-                <a16:creationId xmlns:a16="http://schemas.microsoft.com/office/drawing/2014/main" xmlns="" id="{164D262D-D1D5-2FFA-8E32-3025F99BDE7F}"/>
+                <a16:creationId xmlns:a16="http://schemas.microsoft.com/office/drawing/2014/main" id="{164D262D-D1D5-2FFA-8E32-3025F99BDE7F}"/>
               </a:ext>
             </a:extLst>
           </p:cNvPr>
@@ -6648,7 +6644,7 @@
                 <a:hlinkClick r:id="rId6">
                   <a:extLst>
                     <a:ext uri="{A12FA001-AC4F-418D-AE19-62706E023703}">
-                      <ahyp:hlinkClr xmlns:ahyp="http://schemas.microsoft.com/office/drawing/2018/hyperlinkcolor" xmlns="" val="tx"/>
+                      <ahyp:hlinkClr xmlns:ahyp="http://schemas.microsoft.com/office/drawing/2018/hyperlinkcolor" val="tx"/>
                     </a:ext>
                   </a:extLst>
                 </a:hlinkClick>
@@ -6670,7 +6666,7 @@
                 <a:hlinkClick r:id="rId7">
                   <a:extLst>
                     <a:ext uri="{A12FA001-AC4F-418D-AE19-62706E023703}">
-                      <ahyp:hlinkClr xmlns:ahyp="http://schemas.microsoft.com/office/drawing/2018/hyperlinkcolor" xmlns="" val="tx"/>
+                      <ahyp:hlinkClr xmlns:ahyp="http://schemas.microsoft.com/office/drawing/2018/hyperlinkcolor" val="tx"/>
                     </a:ext>
                   </a:extLst>
                 </a:hlinkClick>
@@ -6702,7 +6698,7 @@
         <p:cNvPr id="1" name="">
           <a:extLst>
             <a:ext uri="{FF2B5EF4-FFF2-40B4-BE49-F238E27FC236}">
-              <a16:creationId xmlns:a16="http://schemas.microsoft.com/office/drawing/2014/main" xmlns="" id="{4059CF8C-A5CA-D922-15C9-90E83F41C16F}"/>
+              <a16:creationId xmlns:a16="http://schemas.microsoft.com/office/drawing/2014/main" id="{4059CF8C-A5CA-D922-15C9-90E83F41C16F}"/>
             </a:ext>
           </a:extLst>
         </p:cNvPr>
@@ -6722,7 +6718,7 @@
           <p:cNvPr id="2" name="Título 1">
             <a:extLst>
               <a:ext uri="{FF2B5EF4-FFF2-40B4-BE49-F238E27FC236}">
-                <a16:creationId xmlns:a16="http://schemas.microsoft.com/office/drawing/2014/main" xmlns="" id="{F0E0D2C5-2C7F-FF98-F6E4-6A6D35AE3301}"/>
+                <a16:creationId xmlns:a16="http://schemas.microsoft.com/office/drawing/2014/main" id="{F0E0D2C5-2C7F-FF98-F6E4-6A6D35AE3301}"/>
               </a:ext>
             </a:extLst>
           </p:cNvPr>
@@ -6750,7 +6746,7 @@
           <p:cNvPr id="3" name="Espaço Reservado para Conteúdo 2">
             <a:extLst>
               <a:ext uri="{FF2B5EF4-FFF2-40B4-BE49-F238E27FC236}">
-                <a16:creationId xmlns:a16="http://schemas.microsoft.com/office/drawing/2014/main" xmlns="" id="{164D262D-D1D5-2FFA-8E32-3025F99BDE7F}"/>
+                <a16:creationId xmlns:a16="http://schemas.microsoft.com/office/drawing/2014/main" id="{164D262D-D1D5-2FFA-8E32-3025F99BDE7F}"/>
               </a:ext>
             </a:extLst>
           </p:cNvPr>
@@ -6957,7 +6953,7 @@
         <p:cNvPr id="1" name="">
           <a:extLst>
             <a:ext uri="{FF2B5EF4-FFF2-40B4-BE49-F238E27FC236}">
-              <a16:creationId xmlns:a16="http://schemas.microsoft.com/office/drawing/2014/main" xmlns="" id="{4059CF8C-A5CA-D922-15C9-90E83F41C16F}"/>
+              <a16:creationId xmlns:a16="http://schemas.microsoft.com/office/drawing/2014/main" id="{4059CF8C-A5CA-D922-15C9-90E83F41C16F}"/>
             </a:ext>
           </a:extLst>
         </p:cNvPr>
@@ -6977,7 +6973,7 @@
           <p:cNvPr id="2" name="Título 1">
             <a:extLst>
               <a:ext uri="{FF2B5EF4-FFF2-40B4-BE49-F238E27FC236}">
-                <a16:creationId xmlns:a16="http://schemas.microsoft.com/office/drawing/2014/main" xmlns="" id="{F0E0D2C5-2C7F-FF98-F6E4-6A6D35AE3301}"/>
+                <a16:creationId xmlns:a16="http://schemas.microsoft.com/office/drawing/2014/main" id="{F0E0D2C5-2C7F-FF98-F6E4-6A6D35AE3301}"/>
               </a:ext>
             </a:extLst>
           </p:cNvPr>
@@ -7005,7 +7001,7 @@
           <p:cNvPr id="3" name="Espaço Reservado para Conteúdo 2">
             <a:extLst>
               <a:ext uri="{FF2B5EF4-FFF2-40B4-BE49-F238E27FC236}">
-                <a16:creationId xmlns:a16="http://schemas.microsoft.com/office/drawing/2014/main" xmlns="" id="{164D262D-D1D5-2FFA-8E32-3025F99BDE7F}"/>
+                <a16:creationId xmlns:a16="http://schemas.microsoft.com/office/drawing/2014/main" id="{164D262D-D1D5-2FFA-8E32-3025F99BDE7F}"/>
               </a:ext>
             </a:extLst>
           </p:cNvPr>
@@ -7233,7 +7229,7 @@
           <p:cNvPr id="2" name="Título 1">
             <a:extLst>
               <a:ext uri="{FF2B5EF4-FFF2-40B4-BE49-F238E27FC236}">
-                <a16:creationId xmlns:a16="http://schemas.microsoft.com/office/drawing/2014/main" xmlns="" id="{59E7398B-A900-61B5-8621-DCCF26C6973A}"/>
+                <a16:creationId xmlns:a16="http://schemas.microsoft.com/office/drawing/2014/main" id="{59E7398B-A900-61B5-8621-DCCF26C6973A}"/>
               </a:ext>
             </a:extLst>
           </p:cNvPr>
@@ -7261,7 +7257,7 @@
           <p:cNvPr id="3" name="Espaço Reservado para Conteúdo 2">
             <a:extLst>
               <a:ext uri="{FF2B5EF4-FFF2-40B4-BE49-F238E27FC236}">
-                <a16:creationId xmlns:a16="http://schemas.microsoft.com/office/drawing/2014/main" xmlns="" id="{5954F27A-CDF9-6E72-139C-41301C4C48BE}"/>
+                <a16:creationId xmlns:a16="http://schemas.microsoft.com/office/drawing/2014/main" id="{5954F27A-CDF9-6E72-139C-41301C4C48BE}"/>
               </a:ext>
             </a:extLst>
           </p:cNvPr>
@@ -7347,7 +7343,7 @@
             </a:pPr>
             <a:r>
               <a:rPr lang="pt-BR" dirty="0"/>
-              <a:t>Aprendizado por reforço profundo, </a:t>
+              <a:t>Aprendizado por reforço (profundo), </a:t>
             </a:r>
           </a:p>
           <a:p>
@@ -7413,7 +7409,7 @@
         <p:cNvPr id="1" name="">
           <a:extLst>
             <a:ext uri="{FF2B5EF4-FFF2-40B4-BE49-F238E27FC236}">
-              <a16:creationId xmlns:a16="http://schemas.microsoft.com/office/drawing/2014/main" xmlns="" id="{4059CF8C-A5CA-D922-15C9-90E83F41C16F}"/>
+              <a16:creationId xmlns:a16="http://schemas.microsoft.com/office/drawing/2014/main" id="{4059CF8C-A5CA-D922-15C9-90E83F41C16F}"/>
             </a:ext>
           </a:extLst>
         </p:cNvPr>
@@ -7433,7 +7429,7 @@
           <p:cNvPr id="2" name="Título 1">
             <a:extLst>
               <a:ext uri="{FF2B5EF4-FFF2-40B4-BE49-F238E27FC236}">
-                <a16:creationId xmlns:a16="http://schemas.microsoft.com/office/drawing/2014/main" xmlns="" id="{F0E0D2C5-2C7F-FF98-F6E4-6A6D35AE3301}"/>
+                <a16:creationId xmlns:a16="http://schemas.microsoft.com/office/drawing/2014/main" id="{F0E0D2C5-2C7F-FF98-F6E4-6A6D35AE3301}"/>
               </a:ext>
             </a:extLst>
           </p:cNvPr>
@@ -7461,7 +7457,7 @@
           <p:cNvPr id="3" name="Espaço Reservado para Conteúdo 2">
             <a:extLst>
               <a:ext uri="{FF2B5EF4-FFF2-40B4-BE49-F238E27FC236}">
-                <a16:creationId xmlns:a16="http://schemas.microsoft.com/office/drawing/2014/main" xmlns="" id="{164D262D-D1D5-2FFA-8E32-3025F99BDE7F}"/>
+                <a16:creationId xmlns:a16="http://schemas.microsoft.com/office/drawing/2014/main" id="{164D262D-D1D5-2FFA-8E32-3025F99BDE7F}"/>
               </a:ext>
             </a:extLst>
           </p:cNvPr>
@@ -7664,10 +7660,6 @@
             <a:pPr marL="914400" lvl="2" indent="0">
               <a:buNone/>
             </a:pPr>
-            <a:r>
-              <a:rPr lang="pt-BR" dirty="0"/>
-              <a:t/>
-            </a:r>
             <a:br>
               <a:rPr lang="pt-BR" dirty="0"/>
             </a:br>
@@ -7713,7 +7705,7 @@
           <p:cNvPr id="2" name="Título 1">
             <a:extLst>
               <a:ext uri="{FF2B5EF4-FFF2-40B4-BE49-F238E27FC236}">
-                <a16:creationId xmlns:a16="http://schemas.microsoft.com/office/drawing/2014/main" xmlns="" id="{A2A4684C-1159-4F88-A2B1-6BABEDE38C4D}"/>
+                <a16:creationId xmlns:a16="http://schemas.microsoft.com/office/drawing/2014/main" id="{A2A4684C-1159-4F88-A2B1-6BABEDE38C4D}"/>
               </a:ext>
             </a:extLst>
           </p:cNvPr>
@@ -7741,7 +7733,7 @@
           <p:cNvPr id="3" name="Espaço Reservado para Conteúdo 2">
             <a:extLst>
               <a:ext uri="{FF2B5EF4-FFF2-40B4-BE49-F238E27FC236}">
-                <a16:creationId xmlns:a16="http://schemas.microsoft.com/office/drawing/2014/main" xmlns="" id="{EC432B31-D382-41FF-BB6B-2ABDD322424B}"/>
+                <a16:creationId xmlns:a16="http://schemas.microsoft.com/office/drawing/2014/main" id="{EC432B31-D382-41FF-BB6B-2ABDD322424B}"/>
               </a:ext>
             </a:extLst>
           </p:cNvPr>
@@ -8120,14 +8112,6 @@
                 </a:solidFill>
               </a:rPr>
               <a:t>, 2019.</a:t>
-            </a:r>
-            <a:r>
-              <a:rPr lang="en-US" sz="2400" dirty="0">
-                <a:solidFill>
-                  <a:srgbClr val="000000"/>
-                </a:solidFill>
-              </a:rPr>
-              <a:t/>
             </a:r>
             <a:br>
               <a:rPr lang="en-US" sz="2400" dirty="0">
@@ -8803,7 +8787,7 @@
           <p:cNvPr id="4" name="Título 1">
             <a:extLst>
               <a:ext uri="{FF2B5EF4-FFF2-40B4-BE49-F238E27FC236}">
-                <a16:creationId xmlns:a16="http://schemas.microsoft.com/office/drawing/2014/main" xmlns="" id="{32666AC8-2E17-4DB4-B0F5-60C640CCFD2E}"/>
+                <a16:creationId xmlns:a16="http://schemas.microsoft.com/office/drawing/2014/main" id="{32666AC8-2E17-4DB4-B0F5-60C640CCFD2E}"/>
               </a:ext>
             </a:extLst>
           </p:cNvPr>
@@ -8889,7 +8873,7 @@
           <p:cNvPr id="4" name="Título 1">
             <a:extLst>
               <a:ext uri="{FF2B5EF4-FFF2-40B4-BE49-F238E27FC236}">
-                <a16:creationId xmlns:a16="http://schemas.microsoft.com/office/drawing/2014/main" xmlns="" id="{32666AC8-2E17-4DB4-B0F5-60C640CCFD2E}"/>
+                <a16:creationId xmlns:a16="http://schemas.microsoft.com/office/drawing/2014/main" id="{32666AC8-2E17-4DB4-B0F5-60C640CCFD2E}"/>
               </a:ext>
             </a:extLst>
           </p:cNvPr>
@@ -8975,7 +8959,7 @@
           <p:cNvPr id="2" name="Título 1">
             <a:extLst>
               <a:ext uri="{FF2B5EF4-FFF2-40B4-BE49-F238E27FC236}">
-                <a16:creationId xmlns:a16="http://schemas.microsoft.com/office/drawing/2014/main" xmlns="" id="{9BB4C24F-F8C2-513B-ABC6-F41F972D298C}"/>
+                <a16:creationId xmlns:a16="http://schemas.microsoft.com/office/drawing/2014/main" id="{9BB4C24F-F8C2-513B-ABC6-F41F972D298C}"/>
               </a:ext>
             </a:extLst>
           </p:cNvPr>
@@ -9003,7 +8987,7 @@
           <p:cNvPr id="3" name="Espaço Reservado para Conteúdo 2">
             <a:extLst>
               <a:ext uri="{FF2B5EF4-FFF2-40B4-BE49-F238E27FC236}">
-                <a16:creationId xmlns:a16="http://schemas.microsoft.com/office/drawing/2014/main" xmlns="" id="{39EC605B-82E1-C664-EB15-E7D9A6DF0D17}"/>
+                <a16:creationId xmlns:a16="http://schemas.microsoft.com/office/drawing/2014/main" id="{39EC605B-82E1-C664-EB15-E7D9A6DF0D17}"/>
               </a:ext>
             </a:extLst>
           </p:cNvPr>
@@ -9203,7 +9187,7 @@
           <p:cNvPr id="2" name="Título 1">
             <a:extLst>
               <a:ext uri="{FF2B5EF4-FFF2-40B4-BE49-F238E27FC236}">
-                <a16:creationId xmlns:a16="http://schemas.microsoft.com/office/drawing/2014/main" xmlns="" id="{9A265F83-0504-EFF3-ACD5-719CAEB5BA41}"/>
+                <a16:creationId xmlns:a16="http://schemas.microsoft.com/office/drawing/2014/main" id="{9A265F83-0504-EFF3-ACD5-719CAEB5BA41}"/>
               </a:ext>
             </a:extLst>
           </p:cNvPr>
@@ -9231,7 +9215,7 @@
           <p:cNvPr id="3" name="Espaço Reservado para Conteúdo 2">
             <a:extLst>
               <a:ext uri="{FF2B5EF4-FFF2-40B4-BE49-F238E27FC236}">
-                <a16:creationId xmlns:a16="http://schemas.microsoft.com/office/drawing/2014/main" xmlns="" id="{7E37BEAB-D924-8E11-EA13-C019C32409D7}"/>
+                <a16:creationId xmlns:a16="http://schemas.microsoft.com/office/drawing/2014/main" id="{7E37BEAB-D924-8E11-EA13-C019C32409D7}"/>
               </a:ext>
             </a:extLst>
           </p:cNvPr>
@@ -9422,7 +9406,7 @@
         <p:cNvPr id="1" name="">
           <a:extLst>
             <a:ext uri="{FF2B5EF4-FFF2-40B4-BE49-F238E27FC236}">
-              <a16:creationId xmlns:a16="http://schemas.microsoft.com/office/drawing/2014/main" xmlns="" id="{AF4399CC-3894-D100-1945-D7D23AA96EB1}"/>
+              <a16:creationId xmlns:a16="http://schemas.microsoft.com/office/drawing/2014/main" id="{AF4399CC-3894-D100-1945-D7D23AA96EB1}"/>
             </a:ext>
           </a:extLst>
         </p:cNvPr>
@@ -9442,7 +9426,7 @@
           <p:cNvPr id="2" name="Título 1">
             <a:extLst>
               <a:ext uri="{FF2B5EF4-FFF2-40B4-BE49-F238E27FC236}">
-                <a16:creationId xmlns:a16="http://schemas.microsoft.com/office/drawing/2014/main" xmlns="" id="{424E490C-8C95-5D8F-8A93-456C393F644A}"/>
+                <a16:creationId xmlns:a16="http://schemas.microsoft.com/office/drawing/2014/main" id="{424E490C-8C95-5D8F-8A93-456C393F644A}"/>
               </a:ext>
             </a:extLst>
           </p:cNvPr>
@@ -9470,7 +9454,7 @@
           <p:cNvPr id="3" name="Espaço Reservado para Conteúdo 2">
             <a:extLst>
               <a:ext uri="{FF2B5EF4-FFF2-40B4-BE49-F238E27FC236}">
-                <a16:creationId xmlns:a16="http://schemas.microsoft.com/office/drawing/2014/main" xmlns="" id="{D99B10BC-34CB-F110-CB4D-6CF6043930ED}"/>
+                <a16:creationId xmlns:a16="http://schemas.microsoft.com/office/drawing/2014/main" id="{D99B10BC-34CB-F110-CB4D-6CF6043930ED}"/>
               </a:ext>
             </a:extLst>
           </p:cNvPr>
@@ -9511,11 +9495,7 @@
             </a:pPr>
             <a:r>
               <a:rPr lang="pt-BR" dirty="0"/>
-              <a:t>Criem um </a:t>
-            </a:r>
-            <a:r>
-              <a:rPr lang="pt-BR"/>
-              <a:t>repositório público no </a:t>
+              <a:t>Criem um repositório público no </a:t>
             </a:r>
             <a:r>
               <a:rPr lang="pt-BR" dirty="0" err="1"/>
@@ -9534,7 +9514,19 @@
             </a:pPr>
             <a:r>
               <a:rPr lang="pt-BR" dirty="0"/>
-              <a:t>Criem pastas distintas para cada seminário, para o projeto final e qualquer outro material que seja gerado durante o curso.</a:t>
+              <a:t>Criem </a:t>
+            </a:r>
+            <a:r>
+              <a:rPr lang="pt-BR" b="1" i="1" dirty="0">
+                <a:solidFill>
+                  <a:srgbClr val="7030A0"/>
+                </a:solidFill>
+              </a:rPr>
+              <a:t>pastas distintas para cada seminário</a:t>
+            </a:r>
+            <a:r>
+              <a:rPr lang="pt-BR" dirty="0"/>
+              <a:t>, para o projeto final e qualquer outro material que seja gerado durante o curso.</a:t>
             </a:r>
           </a:p>
           <a:p>
@@ -9593,7 +9585,7 @@
           <p:cNvPr id="2" name="Título 1">
             <a:extLst>
               <a:ext uri="{FF2B5EF4-FFF2-40B4-BE49-F238E27FC236}">
-                <a16:creationId xmlns:a16="http://schemas.microsoft.com/office/drawing/2014/main" xmlns="" id="{40B200E8-E489-1374-DAE1-A01E9DFC93EA}"/>
+                <a16:creationId xmlns:a16="http://schemas.microsoft.com/office/drawing/2014/main" id="{40B200E8-E489-1374-DAE1-A01E9DFC93EA}"/>
               </a:ext>
             </a:extLst>
           </p:cNvPr>
@@ -9621,7 +9613,7 @@
           <p:cNvPr id="3" name="Espaço Reservado para Conteúdo 2">
             <a:extLst>
               <a:ext uri="{FF2B5EF4-FFF2-40B4-BE49-F238E27FC236}">
-                <a16:creationId xmlns:a16="http://schemas.microsoft.com/office/drawing/2014/main" xmlns="" id="{AC84DA0A-C3B3-CCCB-BBDF-CF88E7D56E0D}"/>
+                <a16:creationId xmlns:a16="http://schemas.microsoft.com/office/drawing/2014/main" id="{AC84DA0A-C3B3-CCCB-BBDF-CF88E7D56E0D}"/>
               </a:ext>
             </a:extLst>
           </p:cNvPr>
@@ -9775,7 +9767,15 @@
             </a:pPr>
             <a:r>
               <a:rPr lang="pt-BR" dirty="0"/>
-              <a:t>Deve ser entregue na metade do segundo mês.</a:t>
+              <a:t>Prazo de entrega no </a:t>
+            </a:r>
+            <a:r>
+              <a:rPr lang="pt-BR" dirty="0" err="1"/>
+              <a:t>Teams</a:t>
+            </a:r>
+            <a:r>
+              <a:rPr lang="pt-BR" dirty="0"/>
+              <a:t>.</a:t>
             </a:r>
           </a:p>
           <a:p>
@@ -9843,7 +9843,7 @@
           <p:cNvPr id="4" name="Picture 3">
             <a:extLst>
               <a:ext uri="{FF2B5EF4-FFF2-40B4-BE49-F238E27FC236}">
-                <a16:creationId xmlns:a16="http://schemas.microsoft.com/office/drawing/2014/main" xmlns="" id="{63A98931-D4DA-A8C6-E70B-6223235637D2}"/>
+                <a16:creationId xmlns:a16="http://schemas.microsoft.com/office/drawing/2014/main" id="{63A98931-D4DA-A8C6-E70B-6223235637D2}"/>
               </a:ext>
             </a:extLst>
           </p:cNvPr>
@@ -9873,7 +9873,7 @@
           <p:cNvPr id="5" name="Picture 4">
             <a:extLst>
               <a:ext uri="{FF2B5EF4-FFF2-40B4-BE49-F238E27FC236}">
-                <a16:creationId xmlns:a16="http://schemas.microsoft.com/office/drawing/2014/main" xmlns="" id="{0E171FC1-ABD1-9A30-24B9-3B431D21D315}"/>
+                <a16:creationId xmlns:a16="http://schemas.microsoft.com/office/drawing/2014/main" id="{0E171FC1-ABD1-9A30-24B9-3B431D21D315}"/>
               </a:ext>
             </a:extLst>
           </p:cNvPr>
@@ -9903,7 +9903,7 @@
           <p:cNvPr id="6" name="Picture 5">
             <a:extLst>
               <a:ext uri="{FF2B5EF4-FFF2-40B4-BE49-F238E27FC236}">
-                <a16:creationId xmlns:a16="http://schemas.microsoft.com/office/drawing/2014/main" xmlns="" id="{4A00239B-9DE4-3C62-31EF-097283BCD829}"/>
+                <a16:creationId xmlns:a16="http://schemas.microsoft.com/office/drawing/2014/main" id="{4A00239B-9DE4-3C62-31EF-097283BCD829}"/>
               </a:ext>
             </a:extLst>
           </p:cNvPr>
@@ -9963,7 +9963,7 @@
           <p:cNvPr id="2" name="Título 1">
             <a:extLst>
               <a:ext uri="{FF2B5EF4-FFF2-40B4-BE49-F238E27FC236}">
-                <a16:creationId xmlns:a16="http://schemas.microsoft.com/office/drawing/2014/main" xmlns="" id="{81B87840-628C-E82C-47FA-C888AB409B21}"/>
+                <a16:creationId xmlns:a16="http://schemas.microsoft.com/office/drawing/2014/main" id="{81B87840-628C-E82C-47FA-C888AB409B21}"/>
               </a:ext>
             </a:extLst>
           </p:cNvPr>
@@ -9991,7 +9991,7 @@
           <p:cNvPr id="3" name="Espaço Reservado para Conteúdo 2">
             <a:extLst>
               <a:ext uri="{FF2B5EF4-FFF2-40B4-BE49-F238E27FC236}">
-                <a16:creationId xmlns:a16="http://schemas.microsoft.com/office/drawing/2014/main" xmlns="" id="{60B96892-6767-8A98-62CA-E3A197F37080}"/>
+                <a16:creationId xmlns:a16="http://schemas.microsoft.com/office/drawing/2014/main" id="{60B96892-6767-8A98-62CA-E3A197F37080}"/>
               </a:ext>
             </a:extLst>
           </p:cNvPr>
@@ -10111,7 +10111,7 @@
           <p:cNvPr id="2" name="Título 1">
             <a:extLst>
               <a:ext uri="{FF2B5EF4-FFF2-40B4-BE49-F238E27FC236}">
-                <a16:creationId xmlns:a16="http://schemas.microsoft.com/office/drawing/2014/main" xmlns="" id="{11BC2EE5-C8A9-A5C4-E79F-7ACA60564BF4}"/>
+                <a16:creationId xmlns:a16="http://schemas.microsoft.com/office/drawing/2014/main" id="{11BC2EE5-C8A9-A5C4-E79F-7ACA60564BF4}"/>
               </a:ext>
             </a:extLst>
           </p:cNvPr>
@@ -10139,7 +10139,7 @@
           <p:cNvPr id="3" name="Espaço Reservado para Conteúdo 2">
             <a:extLst>
               <a:ext uri="{FF2B5EF4-FFF2-40B4-BE49-F238E27FC236}">
-                <a16:creationId xmlns:a16="http://schemas.microsoft.com/office/drawing/2014/main" xmlns="" id="{F34E1E4B-4890-7308-FDD9-BCFBF68A4D2F}"/>
+                <a16:creationId xmlns:a16="http://schemas.microsoft.com/office/drawing/2014/main" id="{F34E1E4B-4890-7308-FDD9-BCFBF68A4D2F}"/>
               </a:ext>
             </a:extLst>
           </p:cNvPr>
@@ -10412,7 +10412,7 @@
           <p:cNvPr id="2" name="Título 1">
             <a:extLst>
               <a:ext uri="{FF2B5EF4-FFF2-40B4-BE49-F238E27FC236}">
-                <a16:creationId xmlns:a16="http://schemas.microsoft.com/office/drawing/2014/main" xmlns="" id="{11BC2EE5-C8A9-A5C4-E79F-7ACA60564BF4}"/>
+                <a16:creationId xmlns:a16="http://schemas.microsoft.com/office/drawing/2014/main" id="{11BC2EE5-C8A9-A5C4-E79F-7ACA60564BF4}"/>
               </a:ext>
             </a:extLst>
           </p:cNvPr>
@@ -10440,7 +10440,7 @@
           <p:cNvPr id="3" name="Espaço Reservado para Conteúdo 2">
             <a:extLst>
               <a:ext uri="{FF2B5EF4-FFF2-40B4-BE49-F238E27FC236}">
-                <a16:creationId xmlns:a16="http://schemas.microsoft.com/office/drawing/2014/main" xmlns="" id="{F34E1E4B-4890-7308-FDD9-BCFBF68A4D2F}"/>
+                <a16:creationId xmlns:a16="http://schemas.microsoft.com/office/drawing/2014/main" id="{F34E1E4B-4890-7308-FDD9-BCFBF68A4D2F}"/>
               </a:ext>
             </a:extLst>
           </p:cNvPr>

--- a/slides/TP558_1_Introdução_ao_curso.pptx
+++ b/slides/TP558_1_Introdução_ao_curso.pptx
@@ -1057,6 +1057,294 @@
           <a:lstStyle/>
           <a:p>
             <a:r>
+              <a:rPr lang="pt-BR" sz="1200" b="0" i="0" kern="1200" dirty="0" smtClean="0">
+                <a:solidFill>
+                  <a:schemeClr val="tx1"/>
+                </a:solidFill>
+                <a:effectLst/>
+                <a:latin typeface="+mn-lt"/>
+                <a:ea typeface="+mn-ea"/>
+                <a:cs typeface="+mn-cs"/>
+              </a:rPr>
+              <a:t>são modelos computacionais inspirados no funcionamento do cérebro biológico. Elas processam informações usando </a:t>
+            </a:r>
+            <a:r>
+              <a:rPr lang="pt-BR" sz="1200" b="1" i="0" kern="1200" dirty="0" smtClean="0">
+                <a:solidFill>
+                  <a:schemeClr val="tx1"/>
+                </a:solidFill>
+                <a:effectLst/>
+                <a:latin typeface="+mn-lt"/>
+                <a:ea typeface="+mn-ea"/>
+                <a:cs typeface="+mn-cs"/>
+              </a:rPr>
+              <a:t>pulsos discretos no tempo</a:t>
+            </a:r>
+            <a:r>
+              <a:rPr lang="pt-BR" sz="1200" b="0" i="0" kern="1200" dirty="0" smtClean="0">
+                <a:solidFill>
+                  <a:schemeClr val="tx1"/>
+                </a:solidFill>
+                <a:effectLst/>
+                <a:latin typeface="+mn-lt"/>
+                <a:ea typeface="+mn-ea"/>
+                <a:cs typeface="+mn-cs"/>
+              </a:rPr>
+              <a:t> (</a:t>
+            </a:r>
+            <a:r>
+              <a:rPr lang="pt-BR" sz="1200" b="0" i="0" kern="1200" dirty="0" err="1" smtClean="0">
+                <a:solidFill>
+                  <a:schemeClr val="tx1"/>
+                </a:solidFill>
+                <a:effectLst/>
+                <a:latin typeface="+mn-lt"/>
+                <a:ea typeface="+mn-ea"/>
+                <a:cs typeface="+mn-cs"/>
+              </a:rPr>
+              <a:t>spikes</a:t>
+            </a:r>
+            <a:r>
+              <a:rPr lang="pt-BR" sz="1200" b="0" i="0" kern="1200" dirty="0" smtClean="0">
+                <a:solidFill>
+                  <a:schemeClr val="tx1"/>
+                </a:solidFill>
+                <a:effectLst/>
+                <a:latin typeface="+mn-lt"/>
+                <a:ea typeface="+mn-ea"/>
+                <a:cs typeface="+mn-cs"/>
+              </a:rPr>
+              <a:t>), imitando a comunicação entre neurônios reais. Sua principal utilidade está em cenários que exigem </a:t>
+            </a:r>
+            <a:r>
+              <a:rPr lang="pt-BR" sz="1200" b="1" i="0" kern="1200" dirty="0" smtClean="0">
+                <a:solidFill>
+                  <a:schemeClr val="tx1"/>
+                </a:solidFill>
+                <a:effectLst/>
+                <a:latin typeface="+mn-lt"/>
+                <a:ea typeface="+mn-ea"/>
+                <a:cs typeface="+mn-cs"/>
+              </a:rPr>
+              <a:t>eficiência energética extrema</a:t>
+            </a:r>
+            <a:r>
+              <a:rPr lang="pt-BR" sz="1200" b="0" i="0" kern="1200" dirty="0" smtClean="0">
+                <a:solidFill>
+                  <a:schemeClr val="tx1"/>
+                </a:solidFill>
+                <a:effectLst/>
+                <a:latin typeface="+mn-lt"/>
+                <a:ea typeface="+mn-ea"/>
+                <a:cs typeface="+mn-cs"/>
+              </a:rPr>
+              <a:t>, processamento de dados temporais e integração com hardware </a:t>
+            </a:r>
+            <a:r>
+              <a:rPr lang="pt-BR" sz="1200" b="0" i="0" kern="1200" dirty="0" err="1" smtClean="0">
+                <a:solidFill>
+                  <a:schemeClr val="tx1"/>
+                </a:solidFill>
+                <a:effectLst/>
+                <a:latin typeface="+mn-lt"/>
+                <a:ea typeface="+mn-ea"/>
+                <a:cs typeface="+mn-cs"/>
+              </a:rPr>
+              <a:t>neuromórfico</a:t>
+            </a:r>
+            <a:r>
+              <a:rPr lang="pt-BR" sz="1200" b="0" i="0" kern="1200" dirty="0" smtClean="0">
+                <a:solidFill>
+                  <a:schemeClr val="tx1"/>
+                </a:solidFill>
+                <a:effectLst/>
+                <a:latin typeface="+mn-lt"/>
+                <a:ea typeface="+mn-ea"/>
+                <a:cs typeface="+mn-cs"/>
+              </a:rPr>
+              <a:t>.</a:t>
+            </a:r>
+            <a:endParaRPr lang="pt-BR" dirty="0"/>
+          </a:p>
+        </p:txBody>
+      </p:sp>
+      <p:sp>
+        <p:nvSpPr>
+          <p:cNvPr id="4" name="Espaço Reservado para Número de Slide 3"/>
+          <p:cNvSpPr>
+            <a:spLocks noGrp="1"/>
+          </p:cNvSpPr>
+          <p:nvPr>
+            <p:ph type="sldNum" sz="quarter" idx="10"/>
+          </p:nvPr>
+        </p:nvSpPr>
+        <p:spPr/>
+        <p:txBody>
+          <a:bodyPr/>
+          <a:lstStyle/>
+          <a:p>
+            <a:fld id="{6FC8D850-966F-45A6-8DE7-15B891E7D40D}" type="slidenum">
+              <a:rPr lang="pt-BR" smtClean="0"/>
+              <a:t>18</a:t>
+            </a:fld>
+            <a:endParaRPr lang="pt-BR"/>
+          </a:p>
+        </p:txBody>
+      </p:sp>
+    </p:spTree>
+    <p:extLst>
+      <p:ext uri="{BB962C8B-B14F-4D97-AF65-F5344CB8AC3E}">
+        <p14:creationId xmlns:p14="http://schemas.microsoft.com/office/powerpoint/2010/main" val="876737819"/>
+      </p:ext>
+    </p:extLst>
+  </p:cSld>
+  <p:clrMapOvr>
+    <a:masterClrMapping/>
+  </p:clrMapOvr>
+</p:notes>
+</file>
+
+<file path=ppt/notesSlides/notesSlide5.xml><?xml version="1.0" encoding="utf-8"?>
+<p:notes xmlns:a="http://schemas.openxmlformats.org/drawingml/2006/main" xmlns:r="http://schemas.openxmlformats.org/officeDocument/2006/relationships" xmlns:p="http://schemas.openxmlformats.org/presentationml/2006/main">
+  <p:cSld>
+    <p:spTree>
+      <p:nvGrpSpPr>
+        <p:cNvPr id="1" name=""/>
+        <p:cNvGrpSpPr/>
+        <p:nvPr/>
+      </p:nvGrpSpPr>
+      <p:grpSpPr>
+        <a:xfrm>
+          <a:off x="0" y="0"/>
+          <a:ext cx="0" cy="0"/>
+          <a:chOff x="0" y="0"/>
+          <a:chExt cx="0" cy="0"/>
+        </a:xfrm>
+      </p:grpSpPr>
+      <p:sp>
+        <p:nvSpPr>
+          <p:cNvPr id="2" name="Espaço Reservado para Imagem de Slide 1"/>
+          <p:cNvSpPr>
+            <a:spLocks noGrp="1" noRot="1" noChangeAspect="1"/>
+          </p:cNvSpPr>
+          <p:nvPr>
+            <p:ph type="sldImg"/>
+          </p:nvPr>
+        </p:nvSpPr>
+        <p:spPr/>
+      </p:sp>
+      <p:sp>
+        <p:nvSpPr>
+          <p:cNvPr id="3" name="Espaço Reservado para Anotações 2"/>
+          <p:cNvSpPr>
+            <a:spLocks noGrp="1"/>
+          </p:cNvSpPr>
+          <p:nvPr>
+            <p:ph type="body" idx="1"/>
+          </p:nvPr>
+        </p:nvSpPr>
+        <p:spPr/>
+        <p:txBody>
+          <a:bodyPr/>
+          <a:lstStyle/>
+          <a:p>
+            <a:r>
+              <a:rPr lang="en-US" sz="1200" b="0" i="0" kern="1200" dirty="0" smtClean="0">
+                <a:solidFill>
+                  <a:schemeClr val="tx1"/>
+                </a:solidFill>
+                <a:effectLst/>
+                <a:latin typeface="+mn-lt"/>
+                <a:ea typeface="+mn-ea"/>
+                <a:cs typeface="+mn-cs"/>
+              </a:rPr>
+              <a:t>Gradient Centralization can both speedup training process and improve the final generalization performance of DNNs.</a:t>
+            </a:r>
+            <a:endParaRPr lang="pt-BR" dirty="0"/>
+          </a:p>
+        </p:txBody>
+      </p:sp>
+      <p:sp>
+        <p:nvSpPr>
+          <p:cNvPr id="4" name="Espaço Reservado para Número de Slide 3"/>
+          <p:cNvSpPr>
+            <a:spLocks noGrp="1"/>
+          </p:cNvSpPr>
+          <p:nvPr>
+            <p:ph type="sldNum" sz="quarter" idx="10"/>
+          </p:nvPr>
+        </p:nvSpPr>
+        <p:spPr/>
+        <p:txBody>
+          <a:bodyPr/>
+          <a:lstStyle/>
+          <a:p>
+            <a:fld id="{6FC8D850-966F-45A6-8DE7-15B891E7D40D}" type="slidenum">
+              <a:rPr lang="pt-BR" smtClean="0"/>
+              <a:t>20</a:t>
+            </a:fld>
+            <a:endParaRPr lang="pt-BR"/>
+          </a:p>
+        </p:txBody>
+      </p:sp>
+    </p:spTree>
+    <p:extLst>
+      <p:ext uri="{BB962C8B-B14F-4D97-AF65-F5344CB8AC3E}">
+        <p14:creationId xmlns:p14="http://schemas.microsoft.com/office/powerpoint/2010/main" val="1726693837"/>
+      </p:ext>
+    </p:extLst>
+  </p:cSld>
+  <p:clrMapOvr>
+    <a:masterClrMapping/>
+  </p:clrMapOvr>
+</p:notes>
+</file>
+
+<file path=ppt/notesSlides/notesSlide6.xml><?xml version="1.0" encoding="utf-8"?>
+<p:notes xmlns:a="http://schemas.openxmlformats.org/drawingml/2006/main" xmlns:r="http://schemas.openxmlformats.org/officeDocument/2006/relationships" xmlns:p="http://schemas.openxmlformats.org/presentationml/2006/main">
+  <p:cSld>
+    <p:spTree>
+      <p:nvGrpSpPr>
+        <p:cNvPr id="1" name=""/>
+        <p:cNvGrpSpPr/>
+        <p:nvPr/>
+      </p:nvGrpSpPr>
+      <p:grpSpPr>
+        <a:xfrm>
+          <a:off x="0" y="0"/>
+          <a:ext cx="0" cy="0"/>
+          <a:chOff x="0" y="0"/>
+          <a:chExt cx="0" cy="0"/>
+        </a:xfrm>
+      </p:grpSpPr>
+      <p:sp>
+        <p:nvSpPr>
+          <p:cNvPr id="2" name="Espaço Reservado para Imagem de Slide 1"/>
+          <p:cNvSpPr>
+            <a:spLocks noGrp="1" noRot="1" noChangeAspect="1"/>
+          </p:cNvSpPr>
+          <p:nvPr>
+            <p:ph type="sldImg"/>
+          </p:nvPr>
+        </p:nvSpPr>
+        <p:spPr/>
+      </p:sp>
+      <p:sp>
+        <p:nvSpPr>
+          <p:cNvPr id="3" name="Espaço Reservado para Anotações 2"/>
+          <p:cNvSpPr>
+            <a:spLocks noGrp="1"/>
+          </p:cNvSpPr>
+          <p:nvPr>
+            <p:ph type="body" idx="1"/>
+          </p:nvPr>
+        </p:nvSpPr>
+        <p:spPr/>
+        <p:txBody>
+          <a:bodyPr/>
+          <a:lstStyle/>
+          <a:p>
+            <a:r>
               <a:rPr lang="pt-BR" dirty="0">
                 <a:hlinkClick r:id="rId3"/>
               </a:rPr>
@@ -1124,7 +1412,7 @@
           <p:cNvPr id="2" name="Título 1">
             <a:extLst>
               <a:ext uri="{FF2B5EF4-FFF2-40B4-BE49-F238E27FC236}">
-                <a16:creationId xmlns:a16="http://schemas.microsoft.com/office/drawing/2014/main" id="{1DB9B4FF-B06E-403C-A326-BDC64D8FF94E}"/>
+                <a16:creationId xmlns:a16="http://schemas.microsoft.com/office/drawing/2014/main" xmlns="" id="{1DB9B4FF-B06E-403C-A326-BDC64D8FF94E}"/>
               </a:ext>
             </a:extLst>
           </p:cNvPr>
@@ -1161,7 +1449,7 @@
           <p:cNvPr id="3" name="Subtítulo 2">
             <a:extLst>
               <a:ext uri="{FF2B5EF4-FFF2-40B4-BE49-F238E27FC236}">
-                <a16:creationId xmlns:a16="http://schemas.microsoft.com/office/drawing/2014/main" id="{247BDFCE-746E-45BF-A319-4733D58D1632}"/>
+                <a16:creationId xmlns:a16="http://schemas.microsoft.com/office/drawing/2014/main" xmlns="" id="{247BDFCE-746E-45BF-A319-4733D58D1632}"/>
               </a:ext>
             </a:extLst>
           </p:cNvPr>
@@ -1231,7 +1519,7 @@
           <p:cNvPr id="4" name="Espaço Reservado para Data 3">
             <a:extLst>
               <a:ext uri="{FF2B5EF4-FFF2-40B4-BE49-F238E27FC236}">
-                <a16:creationId xmlns:a16="http://schemas.microsoft.com/office/drawing/2014/main" id="{9EDE2778-5372-4104-B96D-968184DA8288}"/>
+                <a16:creationId xmlns:a16="http://schemas.microsoft.com/office/drawing/2014/main" xmlns="" id="{9EDE2778-5372-4104-B96D-968184DA8288}"/>
               </a:ext>
             </a:extLst>
           </p:cNvPr>
@@ -1260,7 +1548,7 @@
           <p:cNvPr id="5" name="Espaço Reservado para Rodapé 4">
             <a:extLst>
               <a:ext uri="{FF2B5EF4-FFF2-40B4-BE49-F238E27FC236}">
-                <a16:creationId xmlns:a16="http://schemas.microsoft.com/office/drawing/2014/main" id="{C1DD0F41-C861-4051-988D-3024A37A4B93}"/>
+                <a16:creationId xmlns:a16="http://schemas.microsoft.com/office/drawing/2014/main" xmlns="" id="{C1DD0F41-C861-4051-988D-3024A37A4B93}"/>
               </a:ext>
             </a:extLst>
           </p:cNvPr>
@@ -1285,7 +1573,7 @@
           <p:cNvPr id="6" name="Espaço Reservado para Número de Slide 5">
             <a:extLst>
               <a:ext uri="{FF2B5EF4-FFF2-40B4-BE49-F238E27FC236}">
-                <a16:creationId xmlns:a16="http://schemas.microsoft.com/office/drawing/2014/main" id="{07E5967E-D980-431A-A5DB-3F0C5030A81E}"/>
+                <a16:creationId xmlns:a16="http://schemas.microsoft.com/office/drawing/2014/main" xmlns="" id="{07E5967E-D980-431A-A5DB-3F0C5030A81E}"/>
               </a:ext>
             </a:extLst>
           </p:cNvPr>
@@ -1344,7 +1632,7 @@
           <p:cNvPr id="2" name="Título 1">
             <a:extLst>
               <a:ext uri="{FF2B5EF4-FFF2-40B4-BE49-F238E27FC236}">
-                <a16:creationId xmlns:a16="http://schemas.microsoft.com/office/drawing/2014/main" id="{9036C49F-3E68-4175-81BA-3C3FEE44308A}"/>
+                <a16:creationId xmlns:a16="http://schemas.microsoft.com/office/drawing/2014/main" xmlns="" id="{9036C49F-3E68-4175-81BA-3C3FEE44308A}"/>
               </a:ext>
             </a:extLst>
           </p:cNvPr>
@@ -1372,7 +1660,7 @@
           <p:cNvPr id="3" name="Espaço Reservado para Texto Vertical 2">
             <a:extLst>
               <a:ext uri="{FF2B5EF4-FFF2-40B4-BE49-F238E27FC236}">
-                <a16:creationId xmlns:a16="http://schemas.microsoft.com/office/drawing/2014/main" id="{426FA736-3DD3-4D4E-B57B-BBE1D8F7D424}"/>
+                <a16:creationId xmlns:a16="http://schemas.microsoft.com/office/drawing/2014/main" xmlns="" id="{426FA736-3DD3-4D4E-B57B-BBE1D8F7D424}"/>
               </a:ext>
             </a:extLst>
           </p:cNvPr>
@@ -1429,7 +1717,7 @@
           <p:cNvPr id="4" name="Espaço Reservado para Data 3">
             <a:extLst>
               <a:ext uri="{FF2B5EF4-FFF2-40B4-BE49-F238E27FC236}">
-                <a16:creationId xmlns:a16="http://schemas.microsoft.com/office/drawing/2014/main" id="{99E8855C-D8FD-48F6-B14E-861E0DE4D915}"/>
+                <a16:creationId xmlns:a16="http://schemas.microsoft.com/office/drawing/2014/main" xmlns="" id="{99E8855C-D8FD-48F6-B14E-861E0DE4D915}"/>
               </a:ext>
             </a:extLst>
           </p:cNvPr>
@@ -1458,7 +1746,7 @@
           <p:cNvPr id="5" name="Espaço Reservado para Rodapé 4">
             <a:extLst>
               <a:ext uri="{FF2B5EF4-FFF2-40B4-BE49-F238E27FC236}">
-                <a16:creationId xmlns:a16="http://schemas.microsoft.com/office/drawing/2014/main" id="{97C0BB88-2F21-42A5-ACFF-83DA47F2D340}"/>
+                <a16:creationId xmlns:a16="http://schemas.microsoft.com/office/drawing/2014/main" xmlns="" id="{97C0BB88-2F21-42A5-ACFF-83DA47F2D340}"/>
               </a:ext>
             </a:extLst>
           </p:cNvPr>
@@ -1483,7 +1771,7 @@
           <p:cNvPr id="6" name="Espaço Reservado para Número de Slide 5">
             <a:extLst>
               <a:ext uri="{FF2B5EF4-FFF2-40B4-BE49-F238E27FC236}">
-                <a16:creationId xmlns:a16="http://schemas.microsoft.com/office/drawing/2014/main" id="{6CB462B3-1F22-4C05-B4B8-7A279FB7D5E9}"/>
+                <a16:creationId xmlns:a16="http://schemas.microsoft.com/office/drawing/2014/main" xmlns="" id="{6CB462B3-1F22-4C05-B4B8-7A279FB7D5E9}"/>
               </a:ext>
             </a:extLst>
           </p:cNvPr>
@@ -1542,7 +1830,7 @@
           <p:cNvPr id="2" name="Título Vertical 1">
             <a:extLst>
               <a:ext uri="{FF2B5EF4-FFF2-40B4-BE49-F238E27FC236}">
-                <a16:creationId xmlns:a16="http://schemas.microsoft.com/office/drawing/2014/main" id="{EAEAB728-701C-4207-A9D5-23FF45C60502}"/>
+                <a16:creationId xmlns:a16="http://schemas.microsoft.com/office/drawing/2014/main" xmlns="" id="{EAEAB728-701C-4207-A9D5-23FF45C60502}"/>
               </a:ext>
             </a:extLst>
           </p:cNvPr>
@@ -1575,7 +1863,7 @@
           <p:cNvPr id="3" name="Espaço Reservado para Texto Vertical 2">
             <a:extLst>
               <a:ext uri="{FF2B5EF4-FFF2-40B4-BE49-F238E27FC236}">
-                <a16:creationId xmlns:a16="http://schemas.microsoft.com/office/drawing/2014/main" id="{BA8C8CCF-7823-480A-9A19-0F664DD17E3B}"/>
+                <a16:creationId xmlns:a16="http://schemas.microsoft.com/office/drawing/2014/main" xmlns="" id="{BA8C8CCF-7823-480A-9A19-0F664DD17E3B}"/>
               </a:ext>
             </a:extLst>
           </p:cNvPr>
@@ -1637,7 +1925,7 @@
           <p:cNvPr id="4" name="Espaço Reservado para Data 3">
             <a:extLst>
               <a:ext uri="{FF2B5EF4-FFF2-40B4-BE49-F238E27FC236}">
-                <a16:creationId xmlns:a16="http://schemas.microsoft.com/office/drawing/2014/main" id="{721D5734-7B1F-425D-942F-6EB73344027C}"/>
+                <a16:creationId xmlns:a16="http://schemas.microsoft.com/office/drawing/2014/main" xmlns="" id="{721D5734-7B1F-425D-942F-6EB73344027C}"/>
               </a:ext>
             </a:extLst>
           </p:cNvPr>
@@ -1666,7 +1954,7 @@
           <p:cNvPr id="5" name="Espaço Reservado para Rodapé 4">
             <a:extLst>
               <a:ext uri="{FF2B5EF4-FFF2-40B4-BE49-F238E27FC236}">
-                <a16:creationId xmlns:a16="http://schemas.microsoft.com/office/drawing/2014/main" id="{1E1AAEAC-F08D-45FE-89EC-B1B349A868C9}"/>
+                <a16:creationId xmlns:a16="http://schemas.microsoft.com/office/drawing/2014/main" xmlns="" id="{1E1AAEAC-F08D-45FE-89EC-B1B349A868C9}"/>
               </a:ext>
             </a:extLst>
           </p:cNvPr>
@@ -1691,7 +1979,7 @@
           <p:cNvPr id="6" name="Espaço Reservado para Número de Slide 5">
             <a:extLst>
               <a:ext uri="{FF2B5EF4-FFF2-40B4-BE49-F238E27FC236}">
-                <a16:creationId xmlns:a16="http://schemas.microsoft.com/office/drawing/2014/main" id="{BAA44493-9911-47B2-87A6-C2141A972BC8}"/>
+                <a16:creationId xmlns:a16="http://schemas.microsoft.com/office/drawing/2014/main" xmlns="" id="{BAA44493-9911-47B2-87A6-C2141A972BC8}"/>
               </a:ext>
             </a:extLst>
           </p:cNvPr>
@@ -1750,7 +2038,7 @@
           <p:cNvPr id="2" name="Título 1">
             <a:extLst>
               <a:ext uri="{FF2B5EF4-FFF2-40B4-BE49-F238E27FC236}">
-                <a16:creationId xmlns:a16="http://schemas.microsoft.com/office/drawing/2014/main" id="{71BD44A5-8F21-4626-A01D-48A1C874B1D5}"/>
+                <a16:creationId xmlns:a16="http://schemas.microsoft.com/office/drawing/2014/main" xmlns="" id="{71BD44A5-8F21-4626-A01D-48A1C874B1D5}"/>
               </a:ext>
             </a:extLst>
           </p:cNvPr>
@@ -1778,7 +2066,7 @@
           <p:cNvPr id="3" name="Espaço Reservado para Conteúdo 2">
             <a:extLst>
               <a:ext uri="{FF2B5EF4-FFF2-40B4-BE49-F238E27FC236}">
-                <a16:creationId xmlns:a16="http://schemas.microsoft.com/office/drawing/2014/main" id="{B79E8085-65A9-48AA-951D-71D978BFF4ED}"/>
+                <a16:creationId xmlns:a16="http://schemas.microsoft.com/office/drawing/2014/main" xmlns="" id="{B79E8085-65A9-48AA-951D-71D978BFF4ED}"/>
               </a:ext>
             </a:extLst>
           </p:cNvPr>
@@ -1835,7 +2123,7 @@
           <p:cNvPr id="4" name="Espaço Reservado para Data 3">
             <a:extLst>
               <a:ext uri="{FF2B5EF4-FFF2-40B4-BE49-F238E27FC236}">
-                <a16:creationId xmlns:a16="http://schemas.microsoft.com/office/drawing/2014/main" id="{F05BE1AF-51EA-425D-B188-DE7BD675009F}"/>
+                <a16:creationId xmlns:a16="http://schemas.microsoft.com/office/drawing/2014/main" xmlns="" id="{F05BE1AF-51EA-425D-B188-DE7BD675009F}"/>
               </a:ext>
             </a:extLst>
           </p:cNvPr>
@@ -1864,7 +2152,7 @@
           <p:cNvPr id="5" name="Espaço Reservado para Rodapé 4">
             <a:extLst>
               <a:ext uri="{FF2B5EF4-FFF2-40B4-BE49-F238E27FC236}">
-                <a16:creationId xmlns:a16="http://schemas.microsoft.com/office/drawing/2014/main" id="{121BE632-29CF-4CB9-B365-C9EF38F89BE6}"/>
+                <a16:creationId xmlns:a16="http://schemas.microsoft.com/office/drawing/2014/main" xmlns="" id="{121BE632-29CF-4CB9-B365-C9EF38F89BE6}"/>
               </a:ext>
             </a:extLst>
           </p:cNvPr>
@@ -1889,7 +2177,7 @@
           <p:cNvPr id="6" name="Espaço Reservado para Número de Slide 5">
             <a:extLst>
               <a:ext uri="{FF2B5EF4-FFF2-40B4-BE49-F238E27FC236}">
-                <a16:creationId xmlns:a16="http://schemas.microsoft.com/office/drawing/2014/main" id="{60CF3DD1-9AEC-4A57-B461-4E4DD86FAC18}"/>
+                <a16:creationId xmlns:a16="http://schemas.microsoft.com/office/drawing/2014/main" xmlns="" id="{60CF3DD1-9AEC-4A57-B461-4E4DD86FAC18}"/>
               </a:ext>
             </a:extLst>
           </p:cNvPr>
@@ -1948,7 +2236,7 @@
           <p:cNvPr id="2" name="Título 1">
             <a:extLst>
               <a:ext uri="{FF2B5EF4-FFF2-40B4-BE49-F238E27FC236}">
-                <a16:creationId xmlns:a16="http://schemas.microsoft.com/office/drawing/2014/main" id="{34AB2FF0-A4D7-4E28-991D-FF26140D5988}"/>
+                <a16:creationId xmlns:a16="http://schemas.microsoft.com/office/drawing/2014/main" xmlns="" id="{34AB2FF0-A4D7-4E28-991D-FF26140D5988}"/>
               </a:ext>
             </a:extLst>
           </p:cNvPr>
@@ -1985,7 +2273,7 @@
           <p:cNvPr id="3" name="Espaço Reservado para Texto 2">
             <a:extLst>
               <a:ext uri="{FF2B5EF4-FFF2-40B4-BE49-F238E27FC236}">
-                <a16:creationId xmlns:a16="http://schemas.microsoft.com/office/drawing/2014/main" id="{E2AC45B0-4145-40DB-8E61-105461170604}"/>
+                <a16:creationId xmlns:a16="http://schemas.microsoft.com/office/drawing/2014/main" xmlns="" id="{E2AC45B0-4145-40DB-8E61-105461170604}"/>
               </a:ext>
             </a:extLst>
           </p:cNvPr>
@@ -2110,7 +2398,7 @@
           <p:cNvPr id="4" name="Espaço Reservado para Data 3">
             <a:extLst>
               <a:ext uri="{FF2B5EF4-FFF2-40B4-BE49-F238E27FC236}">
-                <a16:creationId xmlns:a16="http://schemas.microsoft.com/office/drawing/2014/main" id="{50F1D3FB-740A-4EBA-A309-2CE71D12ECFB}"/>
+                <a16:creationId xmlns:a16="http://schemas.microsoft.com/office/drawing/2014/main" xmlns="" id="{50F1D3FB-740A-4EBA-A309-2CE71D12ECFB}"/>
               </a:ext>
             </a:extLst>
           </p:cNvPr>
@@ -2139,7 +2427,7 @@
           <p:cNvPr id="5" name="Espaço Reservado para Rodapé 4">
             <a:extLst>
               <a:ext uri="{FF2B5EF4-FFF2-40B4-BE49-F238E27FC236}">
-                <a16:creationId xmlns:a16="http://schemas.microsoft.com/office/drawing/2014/main" id="{BDCAB18F-8715-4465-A940-F9C193A2ACE9}"/>
+                <a16:creationId xmlns:a16="http://schemas.microsoft.com/office/drawing/2014/main" xmlns="" id="{BDCAB18F-8715-4465-A940-F9C193A2ACE9}"/>
               </a:ext>
             </a:extLst>
           </p:cNvPr>
@@ -2164,7 +2452,7 @@
           <p:cNvPr id="6" name="Espaço Reservado para Número de Slide 5">
             <a:extLst>
               <a:ext uri="{FF2B5EF4-FFF2-40B4-BE49-F238E27FC236}">
-                <a16:creationId xmlns:a16="http://schemas.microsoft.com/office/drawing/2014/main" id="{353466C6-8248-429F-8056-FF040BF509EB}"/>
+                <a16:creationId xmlns:a16="http://schemas.microsoft.com/office/drawing/2014/main" xmlns="" id="{353466C6-8248-429F-8056-FF040BF509EB}"/>
               </a:ext>
             </a:extLst>
           </p:cNvPr>
@@ -2223,7 +2511,7 @@
           <p:cNvPr id="2" name="Título 1">
             <a:extLst>
               <a:ext uri="{FF2B5EF4-FFF2-40B4-BE49-F238E27FC236}">
-                <a16:creationId xmlns:a16="http://schemas.microsoft.com/office/drawing/2014/main" id="{BC7BB9F0-F14B-4A91-B2B7-35BC47FE4DE7}"/>
+                <a16:creationId xmlns:a16="http://schemas.microsoft.com/office/drawing/2014/main" xmlns="" id="{BC7BB9F0-F14B-4A91-B2B7-35BC47FE4DE7}"/>
               </a:ext>
             </a:extLst>
           </p:cNvPr>
@@ -2251,7 +2539,7 @@
           <p:cNvPr id="3" name="Espaço Reservado para Conteúdo 2">
             <a:extLst>
               <a:ext uri="{FF2B5EF4-FFF2-40B4-BE49-F238E27FC236}">
-                <a16:creationId xmlns:a16="http://schemas.microsoft.com/office/drawing/2014/main" id="{EC1FC1C4-73DA-47A6-8496-B0B457F7D39A}"/>
+                <a16:creationId xmlns:a16="http://schemas.microsoft.com/office/drawing/2014/main" xmlns="" id="{EC1FC1C4-73DA-47A6-8496-B0B457F7D39A}"/>
               </a:ext>
             </a:extLst>
           </p:cNvPr>
@@ -2313,7 +2601,7 @@
           <p:cNvPr id="4" name="Espaço Reservado para Conteúdo 3">
             <a:extLst>
               <a:ext uri="{FF2B5EF4-FFF2-40B4-BE49-F238E27FC236}">
-                <a16:creationId xmlns:a16="http://schemas.microsoft.com/office/drawing/2014/main" id="{E92F06A8-A449-4D92-9912-76873E529B38}"/>
+                <a16:creationId xmlns:a16="http://schemas.microsoft.com/office/drawing/2014/main" xmlns="" id="{E92F06A8-A449-4D92-9912-76873E529B38}"/>
               </a:ext>
             </a:extLst>
           </p:cNvPr>
@@ -2375,7 +2663,7 @@
           <p:cNvPr id="5" name="Espaço Reservado para Data 4">
             <a:extLst>
               <a:ext uri="{FF2B5EF4-FFF2-40B4-BE49-F238E27FC236}">
-                <a16:creationId xmlns:a16="http://schemas.microsoft.com/office/drawing/2014/main" id="{938070A4-BC2F-4D55-BD8D-DEAF11BB9EE9}"/>
+                <a16:creationId xmlns:a16="http://schemas.microsoft.com/office/drawing/2014/main" xmlns="" id="{938070A4-BC2F-4D55-BD8D-DEAF11BB9EE9}"/>
               </a:ext>
             </a:extLst>
           </p:cNvPr>
@@ -2404,7 +2692,7 @@
           <p:cNvPr id="6" name="Espaço Reservado para Rodapé 5">
             <a:extLst>
               <a:ext uri="{FF2B5EF4-FFF2-40B4-BE49-F238E27FC236}">
-                <a16:creationId xmlns:a16="http://schemas.microsoft.com/office/drawing/2014/main" id="{45CC2DB8-844A-465F-BA9A-7734C80C7F43}"/>
+                <a16:creationId xmlns:a16="http://schemas.microsoft.com/office/drawing/2014/main" xmlns="" id="{45CC2DB8-844A-465F-BA9A-7734C80C7F43}"/>
               </a:ext>
             </a:extLst>
           </p:cNvPr>
@@ -2429,7 +2717,7 @@
           <p:cNvPr id="7" name="Espaço Reservado para Número de Slide 6">
             <a:extLst>
               <a:ext uri="{FF2B5EF4-FFF2-40B4-BE49-F238E27FC236}">
-                <a16:creationId xmlns:a16="http://schemas.microsoft.com/office/drawing/2014/main" id="{4CC606A8-097B-4040-94E0-CD8C88280D8F}"/>
+                <a16:creationId xmlns:a16="http://schemas.microsoft.com/office/drawing/2014/main" xmlns="" id="{4CC606A8-097B-4040-94E0-CD8C88280D8F}"/>
               </a:ext>
             </a:extLst>
           </p:cNvPr>
@@ -2488,7 +2776,7 @@
           <p:cNvPr id="2" name="Título 1">
             <a:extLst>
               <a:ext uri="{FF2B5EF4-FFF2-40B4-BE49-F238E27FC236}">
-                <a16:creationId xmlns:a16="http://schemas.microsoft.com/office/drawing/2014/main" id="{76D66686-0143-4CB6-8C09-BA326F1E7ACA}"/>
+                <a16:creationId xmlns:a16="http://schemas.microsoft.com/office/drawing/2014/main" xmlns="" id="{76D66686-0143-4CB6-8C09-BA326F1E7ACA}"/>
               </a:ext>
             </a:extLst>
           </p:cNvPr>
@@ -2521,7 +2809,7 @@
           <p:cNvPr id="3" name="Espaço Reservado para Texto 2">
             <a:extLst>
               <a:ext uri="{FF2B5EF4-FFF2-40B4-BE49-F238E27FC236}">
-                <a16:creationId xmlns:a16="http://schemas.microsoft.com/office/drawing/2014/main" id="{0227AB85-F59E-4BCE-B846-4FA0992C2F23}"/>
+                <a16:creationId xmlns:a16="http://schemas.microsoft.com/office/drawing/2014/main" xmlns="" id="{0227AB85-F59E-4BCE-B846-4FA0992C2F23}"/>
               </a:ext>
             </a:extLst>
           </p:cNvPr>
@@ -2592,7 +2880,7 @@
           <p:cNvPr id="4" name="Espaço Reservado para Conteúdo 3">
             <a:extLst>
               <a:ext uri="{FF2B5EF4-FFF2-40B4-BE49-F238E27FC236}">
-                <a16:creationId xmlns:a16="http://schemas.microsoft.com/office/drawing/2014/main" id="{3373456C-7319-4D0A-827D-D29F6B083F5D}"/>
+                <a16:creationId xmlns:a16="http://schemas.microsoft.com/office/drawing/2014/main" xmlns="" id="{3373456C-7319-4D0A-827D-D29F6B083F5D}"/>
               </a:ext>
             </a:extLst>
           </p:cNvPr>
@@ -2654,7 +2942,7 @@
           <p:cNvPr id="5" name="Espaço Reservado para Texto 4">
             <a:extLst>
               <a:ext uri="{FF2B5EF4-FFF2-40B4-BE49-F238E27FC236}">
-                <a16:creationId xmlns:a16="http://schemas.microsoft.com/office/drawing/2014/main" id="{4CD109D0-2E83-4262-8029-A871CEC47406}"/>
+                <a16:creationId xmlns:a16="http://schemas.microsoft.com/office/drawing/2014/main" xmlns="" id="{4CD109D0-2E83-4262-8029-A871CEC47406}"/>
               </a:ext>
             </a:extLst>
           </p:cNvPr>
@@ -2725,7 +3013,7 @@
           <p:cNvPr id="6" name="Espaço Reservado para Conteúdo 5">
             <a:extLst>
               <a:ext uri="{FF2B5EF4-FFF2-40B4-BE49-F238E27FC236}">
-                <a16:creationId xmlns:a16="http://schemas.microsoft.com/office/drawing/2014/main" id="{AD706E3A-CFBB-4A6C-A65F-D0360A9E74FE}"/>
+                <a16:creationId xmlns:a16="http://schemas.microsoft.com/office/drawing/2014/main" xmlns="" id="{AD706E3A-CFBB-4A6C-A65F-D0360A9E74FE}"/>
               </a:ext>
             </a:extLst>
           </p:cNvPr>
@@ -2787,7 +3075,7 @@
           <p:cNvPr id="7" name="Espaço Reservado para Data 6">
             <a:extLst>
               <a:ext uri="{FF2B5EF4-FFF2-40B4-BE49-F238E27FC236}">
-                <a16:creationId xmlns:a16="http://schemas.microsoft.com/office/drawing/2014/main" id="{4172C0E5-5AF0-4805-BB51-443733CD2BD5}"/>
+                <a16:creationId xmlns:a16="http://schemas.microsoft.com/office/drawing/2014/main" xmlns="" id="{4172C0E5-5AF0-4805-BB51-443733CD2BD5}"/>
               </a:ext>
             </a:extLst>
           </p:cNvPr>
@@ -2816,7 +3104,7 @@
           <p:cNvPr id="8" name="Espaço Reservado para Rodapé 7">
             <a:extLst>
               <a:ext uri="{FF2B5EF4-FFF2-40B4-BE49-F238E27FC236}">
-                <a16:creationId xmlns:a16="http://schemas.microsoft.com/office/drawing/2014/main" id="{0E801648-156F-497E-99CF-797DF48051E1}"/>
+                <a16:creationId xmlns:a16="http://schemas.microsoft.com/office/drawing/2014/main" xmlns="" id="{0E801648-156F-497E-99CF-797DF48051E1}"/>
               </a:ext>
             </a:extLst>
           </p:cNvPr>
@@ -2841,7 +3129,7 @@
           <p:cNvPr id="9" name="Espaço Reservado para Número de Slide 8">
             <a:extLst>
               <a:ext uri="{FF2B5EF4-FFF2-40B4-BE49-F238E27FC236}">
-                <a16:creationId xmlns:a16="http://schemas.microsoft.com/office/drawing/2014/main" id="{EEE23D32-80E7-4796-A137-66BF842E4B53}"/>
+                <a16:creationId xmlns:a16="http://schemas.microsoft.com/office/drawing/2014/main" xmlns="" id="{EEE23D32-80E7-4796-A137-66BF842E4B53}"/>
               </a:ext>
             </a:extLst>
           </p:cNvPr>
@@ -2900,7 +3188,7 @@
           <p:cNvPr id="2" name="Título 1">
             <a:extLst>
               <a:ext uri="{FF2B5EF4-FFF2-40B4-BE49-F238E27FC236}">
-                <a16:creationId xmlns:a16="http://schemas.microsoft.com/office/drawing/2014/main" id="{2BCE2379-C78F-47E1-8CFC-B846E7AF148D}"/>
+                <a16:creationId xmlns:a16="http://schemas.microsoft.com/office/drawing/2014/main" xmlns="" id="{2BCE2379-C78F-47E1-8CFC-B846E7AF148D}"/>
               </a:ext>
             </a:extLst>
           </p:cNvPr>
@@ -2928,7 +3216,7 @@
           <p:cNvPr id="3" name="Espaço Reservado para Data 2">
             <a:extLst>
               <a:ext uri="{FF2B5EF4-FFF2-40B4-BE49-F238E27FC236}">
-                <a16:creationId xmlns:a16="http://schemas.microsoft.com/office/drawing/2014/main" id="{342600A9-7F92-4E22-9D94-E4717252A817}"/>
+                <a16:creationId xmlns:a16="http://schemas.microsoft.com/office/drawing/2014/main" xmlns="" id="{342600A9-7F92-4E22-9D94-E4717252A817}"/>
               </a:ext>
             </a:extLst>
           </p:cNvPr>
@@ -2957,7 +3245,7 @@
           <p:cNvPr id="4" name="Espaço Reservado para Rodapé 3">
             <a:extLst>
               <a:ext uri="{FF2B5EF4-FFF2-40B4-BE49-F238E27FC236}">
-                <a16:creationId xmlns:a16="http://schemas.microsoft.com/office/drawing/2014/main" id="{192E6BED-F546-40CC-A2DF-99CBA853654E}"/>
+                <a16:creationId xmlns:a16="http://schemas.microsoft.com/office/drawing/2014/main" xmlns="" id="{192E6BED-F546-40CC-A2DF-99CBA853654E}"/>
               </a:ext>
             </a:extLst>
           </p:cNvPr>
@@ -2982,7 +3270,7 @@
           <p:cNvPr id="5" name="Espaço Reservado para Número de Slide 4">
             <a:extLst>
               <a:ext uri="{FF2B5EF4-FFF2-40B4-BE49-F238E27FC236}">
-                <a16:creationId xmlns:a16="http://schemas.microsoft.com/office/drawing/2014/main" id="{6091CC40-A8C4-4063-80EB-CC5099621678}"/>
+                <a16:creationId xmlns:a16="http://schemas.microsoft.com/office/drawing/2014/main" xmlns="" id="{6091CC40-A8C4-4063-80EB-CC5099621678}"/>
               </a:ext>
             </a:extLst>
           </p:cNvPr>
@@ -3041,7 +3329,7 @@
           <p:cNvPr id="2" name="Espaço Reservado para Data 1">
             <a:extLst>
               <a:ext uri="{FF2B5EF4-FFF2-40B4-BE49-F238E27FC236}">
-                <a16:creationId xmlns:a16="http://schemas.microsoft.com/office/drawing/2014/main" id="{DD19515C-212C-4EAE-84A3-8FF4BC844F1B}"/>
+                <a16:creationId xmlns:a16="http://schemas.microsoft.com/office/drawing/2014/main" xmlns="" id="{DD19515C-212C-4EAE-84A3-8FF4BC844F1B}"/>
               </a:ext>
             </a:extLst>
           </p:cNvPr>
@@ -3070,7 +3358,7 @@
           <p:cNvPr id="3" name="Espaço Reservado para Rodapé 2">
             <a:extLst>
               <a:ext uri="{FF2B5EF4-FFF2-40B4-BE49-F238E27FC236}">
-                <a16:creationId xmlns:a16="http://schemas.microsoft.com/office/drawing/2014/main" id="{94D3D120-B3E8-4C96-861D-7A4F12F49B3A}"/>
+                <a16:creationId xmlns:a16="http://schemas.microsoft.com/office/drawing/2014/main" xmlns="" id="{94D3D120-B3E8-4C96-861D-7A4F12F49B3A}"/>
               </a:ext>
             </a:extLst>
           </p:cNvPr>
@@ -3095,7 +3383,7 @@
           <p:cNvPr id="4" name="Espaço Reservado para Número de Slide 3">
             <a:extLst>
               <a:ext uri="{FF2B5EF4-FFF2-40B4-BE49-F238E27FC236}">
-                <a16:creationId xmlns:a16="http://schemas.microsoft.com/office/drawing/2014/main" id="{42E49B68-FA1B-468B-9F17-D5C09243D454}"/>
+                <a16:creationId xmlns:a16="http://schemas.microsoft.com/office/drawing/2014/main" xmlns="" id="{42E49B68-FA1B-468B-9F17-D5C09243D454}"/>
               </a:ext>
             </a:extLst>
           </p:cNvPr>
@@ -3154,7 +3442,7 @@
           <p:cNvPr id="2" name="Título 1">
             <a:extLst>
               <a:ext uri="{FF2B5EF4-FFF2-40B4-BE49-F238E27FC236}">
-                <a16:creationId xmlns:a16="http://schemas.microsoft.com/office/drawing/2014/main" id="{1C17BCBE-A897-4319-85EC-D87909C24980}"/>
+                <a16:creationId xmlns:a16="http://schemas.microsoft.com/office/drawing/2014/main" xmlns="" id="{1C17BCBE-A897-4319-85EC-D87909C24980}"/>
               </a:ext>
             </a:extLst>
           </p:cNvPr>
@@ -3191,7 +3479,7 @@
           <p:cNvPr id="3" name="Espaço Reservado para Conteúdo 2">
             <a:extLst>
               <a:ext uri="{FF2B5EF4-FFF2-40B4-BE49-F238E27FC236}">
-                <a16:creationId xmlns:a16="http://schemas.microsoft.com/office/drawing/2014/main" id="{4226F885-0204-4913-868B-4B8B82576F17}"/>
+                <a16:creationId xmlns:a16="http://schemas.microsoft.com/office/drawing/2014/main" xmlns="" id="{4226F885-0204-4913-868B-4B8B82576F17}"/>
               </a:ext>
             </a:extLst>
           </p:cNvPr>
@@ -3281,7 +3569,7 @@
           <p:cNvPr id="4" name="Espaço Reservado para Texto 3">
             <a:extLst>
               <a:ext uri="{FF2B5EF4-FFF2-40B4-BE49-F238E27FC236}">
-                <a16:creationId xmlns:a16="http://schemas.microsoft.com/office/drawing/2014/main" id="{00F9F784-A858-441B-8AB5-697098141751}"/>
+                <a16:creationId xmlns:a16="http://schemas.microsoft.com/office/drawing/2014/main" xmlns="" id="{00F9F784-A858-441B-8AB5-697098141751}"/>
               </a:ext>
             </a:extLst>
           </p:cNvPr>
@@ -3352,7 +3640,7 @@
           <p:cNvPr id="5" name="Espaço Reservado para Data 4">
             <a:extLst>
               <a:ext uri="{FF2B5EF4-FFF2-40B4-BE49-F238E27FC236}">
-                <a16:creationId xmlns:a16="http://schemas.microsoft.com/office/drawing/2014/main" id="{A4DC363A-5000-472E-8B17-02E7DCB8840A}"/>
+                <a16:creationId xmlns:a16="http://schemas.microsoft.com/office/drawing/2014/main" xmlns="" id="{A4DC363A-5000-472E-8B17-02E7DCB8840A}"/>
               </a:ext>
             </a:extLst>
           </p:cNvPr>
@@ -3381,7 +3669,7 @@
           <p:cNvPr id="6" name="Espaço Reservado para Rodapé 5">
             <a:extLst>
               <a:ext uri="{FF2B5EF4-FFF2-40B4-BE49-F238E27FC236}">
-                <a16:creationId xmlns:a16="http://schemas.microsoft.com/office/drawing/2014/main" id="{5548425D-2C21-4C56-BAD4-662978775C28}"/>
+                <a16:creationId xmlns:a16="http://schemas.microsoft.com/office/drawing/2014/main" xmlns="" id="{5548425D-2C21-4C56-BAD4-662978775C28}"/>
               </a:ext>
             </a:extLst>
           </p:cNvPr>
@@ -3406,7 +3694,7 @@
           <p:cNvPr id="7" name="Espaço Reservado para Número de Slide 6">
             <a:extLst>
               <a:ext uri="{FF2B5EF4-FFF2-40B4-BE49-F238E27FC236}">
-                <a16:creationId xmlns:a16="http://schemas.microsoft.com/office/drawing/2014/main" id="{C63E9726-E64C-42B2-AE8A-8C235A956B48}"/>
+                <a16:creationId xmlns:a16="http://schemas.microsoft.com/office/drawing/2014/main" xmlns="" id="{C63E9726-E64C-42B2-AE8A-8C235A956B48}"/>
               </a:ext>
             </a:extLst>
           </p:cNvPr>
@@ -3465,7 +3753,7 @@
           <p:cNvPr id="2" name="Título 1">
             <a:extLst>
               <a:ext uri="{FF2B5EF4-FFF2-40B4-BE49-F238E27FC236}">
-                <a16:creationId xmlns:a16="http://schemas.microsoft.com/office/drawing/2014/main" id="{11086A78-3E74-450C-96A6-CA8AC37AF772}"/>
+                <a16:creationId xmlns:a16="http://schemas.microsoft.com/office/drawing/2014/main" xmlns="" id="{11086A78-3E74-450C-96A6-CA8AC37AF772}"/>
               </a:ext>
             </a:extLst>
           </p:cNvPr>
@@ -3502,7 +3790,7 @@
           <p:cNvPr id="3" name="Espaço Reservado para Imagem 2">
             <a:extLst>
               <a:ext uri="{FF2B5EF4-FFF2-40B4-BE49-F238E27FC236}">
-                <a16:creationId xmlns:a16="http://schemas.microsoft.com/office/drawing/2014/main" id="{5F5B7312-975A-4DBC-9B2F-3652ADA006FD}"/>
+                <a16:creationId xmlns:a16="http://schemas.microsoft.com/office/drawing/2014/main" xmlns="" id="{5F5B7312-975A-4DBC-9B2F-3652ADA006FD}"/>
               </a:ext>
             </a:extLst>
           </p:cNvPr>
@@ -3569,7 +3857,7 @@
           <p:cNvPr id="4" name="Espaço Reservado para Texto 3">
             <a:extLst>
               <a:ext uri="{FF2B5EF4-FFF2-40B4-BE49-F238E27FC236}">
-                <a16:creationId xmlns:a16="http://schemas.microsoft.com/office/drawing/2014/main" id="{AAF805F5-1DFF-41C6-944C-7D79FE0D0963}"/>
+                <a16:creationId xmlns:a16="http://schemas.microsoft.com/office/drawing/2014/main" xmlns="" id="{AAF805F5-1DFF-41C6-944C-7D79FE0D0963}"/>
               </a:ext>
             </a:extLst>
           </p:cNvPr>
@@ -3640,7 +3928,7 @@
           <p:cNvPr id="5" name="Espaço Reservado para Data 4">
             <a:extLst>
               <a:ext uri="{FF2B5EF4-FFF2-40B4-BE49-F238E27FC236}">
-                <a16:creationId xmlns:a16="http://schemas.microsoft.com/office/drawing/2014/main" id="{02113D81-8665-4516-BD81-C6A1F254EECD}"/>
+                <a16:creationId xmlns:a16="http://schemas.microsoft.com/office/drawing/2014/main" xmlns="" id="{02113D81-8665-4516-BD81-C6A1F254EECD}"/>
               </a:ext>
             </a:extLst>
           </p:cNvPr>
@@ -3669,7 +3957,7 @@
           <p:cNvPr id="6" name="Espaço Reservado para Rodapé 5">
             <a:extLst>
               <a:ext uri="{FF2B5EF4-FFF2-40B4-BE49-F238E27FC236}">
-                <a16:creationId xmlns:a16="http://schemas.microsoft.com/office/drawing/2014/main" id="{2B00C88B-FF32-40AA-A187-727D96FD7862}"/>
+                <a16:creationId xmlns:a16="http://schemas.microsoft.com/office/drawing/2014/main" xmlns="" id="{2B00C88B-FF32-40AA-A187-727D96FD7862}"/>
               </a:ext>
             </a:extLst>
           </p:cNvPr>
@@ -3694,7 +3982,7 @@
           <p:cNvPr id="7" name="Espaço Reservado para Número de Slide 6">
             <a:extLst>
               <a:ext uri="{FF2B5EF4-FFF2-40B4-BE49-F238E27FC236}">
-                <a16:creationId xmlns:a16="http://schemas.microsoft.com/office/drawing/2014/main" id="{A04D1A2D-69F7-4B8F-A730-BC26DC340BA6}"/>
+                <a16:creationId xmlns:a16="http://schemas.microsoft.com/office/drawing/2014/main" xmlns="" id="{A04D1A2D-69F7-4B8F-A730-BC26DC340BA6}"/>
               </a:ext>
             </a:extLst>
           </p:cNvPr>
@@ -3758,7 +4046,7 @@
           <p:cNvPr id="2" name="Espaço Reservado para Título 1">
             <a:extLst>
               <a:ext uri="{FF2B5EF4-FFF2-40B4-BE49-F238E27FC236}">
-                <a16:creationId xmlns:a16="http://schemas.microsoft.com/office/drawing/2014/main" id="{E69A0273-1966-4A1B-9370-4C1CE5036371}"/>
+                <a16:creationId xmlns:a16="http://schemas.microsoft.com/office/drawing/2014/main" xmlns="" id="{E69A0273-1966-4A1B-9370-4C1CE5036371}"/>
               </a:ext>
             </a:extLst>
           </p:cNvPr>
@@ -3796,7 +4084,7 @@
           <p:cNvPr id="3" name="Espaço Reservado para Texto 2">
             <a:extLst>
               <a:ext uri="{FF2B5EF4-FFF2-40B4-BE49-F238E27FC236}">
-                <a16:creationId xmlns:a16="http://schemas.microsoft.com/office/drawing/2014/main" id="{3B9CF87A-0448-49A7-AB25-EBC1D56A40EF}"/>
+                <a16:creationId xmlns:a16="http://schemas.microsoft.com/office/drawing/2014/main" xmlns="" id="{3B9CF87A-0448-49A7-AB25-EBC1D56A40EF}"/>
               </a:ext>
             </a:extLst>
           </p:cNvPr>
@@ -3863,7 +4151,7 @@
           <p:cNvPr id="4" name="Espaço Reservado para Data 3">
             <a:extLst>
               <a:ext uri="{FF2B5EF4-FFF2-40B4-BE49-F238E27FC236}">
-                <a16:creationId xmlns:a16="http://schemas.microsoft.com/office/drawing/2014/main" id="{2EF7B1F2-BB5A-44D0-816D-16AD2C71430E}"/>
+                <a16:creationId xmlns:a16="http://schemas.microsoft.com/office/drawing/2014/main" xmlns="" id="{2EF7B1F2-BB5A-44D0-816D-16AD2C71430E}"/>
               </a:ext>
             </a:extLst>
           </p:cNvPr>
@@ -3910,7 +4198,7 @@
           <p:cNvPr id="5" name="Espaço Reservado para Rodapé 4">
             <a:extLst>
               <a:ext uri="{FF2B5EF4-FFF2-40B4-BE49-F238E27FC236}">
-                <a16:creationId xmlns:a16="http://schemas.microsoft.com/office/drawing/2014/main" id="{C703F94C-2CC8-4DAA-BC35-14FC3E841DCD}"/>
+                <a16:creationId xmlns:a16="http://schemas.microsoft.com/office/drawing/2014/main" xmlns="" id="{C703F94C-2CC8-4DAA-BC35-14FC3E841DCD}"/>
               </a:ext>
             </a:extLst>
           </p:cNvPr>
@@ -3953,7 +4241,7 @@
           <p:cNvPr id="6" name="Espaço Reservado para Número de Slide 5">
             <a:extLst>
               <a:ext uri="{FF2B5EF4-FFF2-40B4-BE49-F238E27FC236}">
-                <a16:creationId xmlns:a16="http://schemas.microsoft.com/office/drawing/2014/main" id="{64051336-7048-457A-8B61-D94291D71648}"/>
+                <a16:creationId xmlns:a16="http://schemas.microsoft.com/office/drawing/2014/main" xmlns="" id="{64051336-7048-457A-8B61-D94291D71648}"/>
               </a:ext>
             </a:extLst>
           </p:cNvPr>
@@ -4321,7 +4609,7 @@
           <p:cNvPr id="2" name="Título 1">
             <a:extLst>
               <a:ext uri="{FF2B5EF4-FFF2-40B4-BE49-F238E27FC236}">
-                <a16:creationId xmlns:a16="http://schemas.microsoft.com/office/drawing/2014/main" id="{32666AC8-2E17-4DB4-B0F5-60C640CCFD2E}"/>
+                <a16:creationId xmlns:a16="http://schemas.microsoft.com/office/drawing/2014/main" xmlns="" id="{32666AC8-2E17-4DB4-B0F5-60C640CCFD2E}"/>
               </a:ext>
             </a:extLst>
           </p:cNvPr>
@@ -4348,6 +4636,10 @@
               <a:rPr lang="pt-BR" sz="5400" dirty="0"/>
               <a:t>TP558 - Tópicos avançados em Machine Learning:</a:t>
             </a:r>
+            <a:r>
+              <a:rPr lang="pt-BR" dirty="0"/>
+              <a:t/>
+            </a:r>
             <a:br>
               <a:rPr lang="pt-BR" dirty="0"/>
             </a:br>
@@ -4363,7 +4655,7 @@
           <p:cNvPr id="4" name="CaixaDeTexto 3">
             <a:extLst>
               <a:ext uri="{FF2B5EF4-FFF2-40B4-BE49-F238E27FC236}">
-                <a16:creationId xmlns:a16="http://schemas.microsoft.com/office/drawing/2014/main" id="{430EB894-B7D4-434C-9D1A-A14094D9BEEC}"/>
+                <a16:creationId xmlns:a16="http://schemas.microsoft.com/office/drawing/2014/main" xmlns="" id="{430EB894-B7D4-434C-9D1A-A14094D9BEEC}"/>
               </a:ext>
             </a:extLst>
           </p:cNvPr>
@@ -4404,7 +4696,7 @@
           <p:cNvPr id="1026" name="Picture 2" descr="Logo">
             <a:extLst>
               <a:ext uri="{FF2B5EF4-FFF2-40B4-BE49-F238E27FC236}">
-                <a16:creationId xmlns:a16="http://schemas.microsoft.com/office/drawing/2014/main" id="{3F2642E0-4F6A-4196-8F58-E77D36E9A33F}"/>
+                <a16:creationId xmlns:a16="http://schemas.microsoft.com/office/drawing/2014/main" xmlns="" id="{3F2642E0-4F6A-4196-8F58-E77D36E9A33F}"/>
               </a:ext>
             </a:extLst>
           </p:cNvPr>
@@ -4449,7 +4741,7 @@
           <p:cNvPr id="5122" name="Picture 2" descr="Image result for machine learning">
             <a:extLst>
               <a:ext uri="{FF2B5EF4-FFF2-40B4-BE49-F238E27FC236}">
-                <a16:creationId xmlns:a16="http://schemas.microsoft.com/office/drawing/2014/main" id="{810CE0A2-4102-44A6-A370-175E7896CDCB}"/>
+                <a16:creationId xmlns:a16="http://schemas.microsoft.com/office/drawing/2014/main" xmlns="" id="{810CE0A2-4102-44A6-A370-175E7896CDCB}"/>
               </a:ext>
             </a:extLst>
           </p:cNvPr>
@@ -4510,7 +4802,7 @@
         <p:cNvPr id="1" name="">
           <a:extLst>
             <a:ext uri="{FF2B5EF4-FFF2-40B4-BE49-F238E27FC236}">
-              <a16:creationId xmlns:a16="http://schemas.microsoft.com/office/drawing/2014/main" id="{7617B87B-9451-26E5-143E-DFEF71434E9F}"/>
+              <a16:creationId xmlns:a16="http://schemas.microsoft.com/office/drawing/2014/main" xmlns="" id="{7617B87B-9451-26E5-143E-DFEF71434E9F}"/>
             </a:ext>
           </a:extLst>
         </p:cNvPr>
@@ -4530,7 +4822,7 @@
           <p:cNvPr id="2" name="Título 1">
             <a:extLst>
               <a:ext uri="{FF2B5EF4-FFF2-40B4-BE49-F238E27FC236}">
-                <a16:creationId xmlns:a16="http://schemas.microsoft.com/office/drawing/2014/main" id="{530D8C5D-85CB-1EC5-46EE-3E9C5D6E11D6}"/>
+                <a16:creationId xmlns:a16="http://schemas.microsoft.com/office/drawing/2014/main" xmlns="" id="{530D8C5D-85CB-1EC5-46EE-3E9C5D6E11D6}"/>
               </a:ext>
             </a:extLst>
           </p:cNvPr>
@@ -4558,7 +4850,7 @@
           <p:cNvPr id="3" name="Espaço Reservado para Conteúdo 2">
             <a:extLst>
               <a:ext uri="{FF2B5EF4-FFF2-40B4-BE49-F238E27FC236}">
-                <a16:creationId xmlns:a16="http://schemas.microsoft.com/office/drawing/2014/main" id="{4C11FF3E-C7A6-AE98-273A-28F266ADBFC3}"/>
+                <a16:creationId xmlns:a16="http://schemas.microsoft.com/office/drawing/2014/main" xmlns="" id="{4C11FF3E-C7A6-AE98-273A-28F266ADBFC3}"/>
               </a:ext>
             </a:extLst>
           </p:cNvPr>
@@ -4807,7 +5099,7 @@
         <p:cNvPr id="1" name="">
           <a:extLst>
             <a:ext uri="{FF2B5EF4-FFF2-40B4-BE49-F238E27FC236}">
-              <a16:creationId xmlns:a16="http://schemas.microsoft.com/office/drawing/2014/main" id="{C27B3849-BF4B-F30A-23EA-9FE30E20CBCA}"/>
+              <a16:creationId xmlns:a16="http://schemas.microsoft.com/office/drawing/2014/main" xmlns="" id="{C27B3849-BF4B-F30A-23EA-9FE30E20CBCA}"/>
             </a:ext>
           </a:extLst>
         </p:cNvPr>
@@ -4827,7 +5119,7 @@
           <p:cNvPr id="2" name="Título 1">
             <a:extLst>
               <a:ext uri="{FF2B5EF4-FFF2-40B4-BE49-F238E27FC236}">
-                <a16:creationId xmlns:a16="http://schemas.microsoft.com/office/drawing/2014/main" id="{249A0E92-603C-2FF8-F119-2A802B939AA2}"/>
+                <a16:creationId xmlns:a16="http://schemas.microsoft.com/office/drawing/2014/main" xmlns="" id="{249A0E92-603C-2FF8-F119-2A802B939AA2}"/>
               </a:ext>
             </a:extLst>
           </p:cNvPr>
@@ -4855,7 +5147,7 @@
           <p:cNvPr id="3" name="Espaço Reservado para Conteúdo 2">
             <a:extLst>
               <a:ext uri="{FF2B5EF4-FFF2-40B4-BE49-F238E27FC236}">
-                <a16:creationId xmlns:a16="http://schemas.microsoft.com/office/drawing/2014/main" id="{09015E3D-F27D-5C4C-AFAE-8A3141CD4684}"/>
+                <a16:creationId xmlns:a16="http://schemas.microsoft.com/office/drawing/2014/main" xmlns="" id="{09015E3D-F27D-5C4C-AFAE-8A3141CD4684}"/>
               </a:ext>
             </a:extLst>
           </p:cNvPr>
@@ -5030,7 +5322,7 @@
         <p:cNvPr id="1" name="">
           <a:extLst>
             <a:ext uri="{FF2B5EF4-FFF2-40B4-BE49-F238E27FC236}">
-              <a16:creationId xmlns:a16="http://schemas.microsoft.com/office/drawing/2014/main" id="{6E3AB78C-4A70-ED33-6088-7D978AFBD15F}"/>
+              <a16:creationId xmlns:a16="http://schemas.microsoft.com/office/drawing/2014/main" xmlns="" id="{6E3AB78C-4A70-ED33-6088-7D978AFBD15F}"/>
             </a:ext>
           </a:extLst>
         </p:cNvPr>
@@ -5050,7 +5342,7 @@
           <p:cNvPr id="2" name="Título 1">
             <a:extLst>
               <a:ext uri="{FF2B5EF4-FFF2-40B4-BE49-F238E27FC236}">
-                <a16:creationId xmlns:a16="http://schemas.microsoft.com/office/drawing/2014/main" id="{20C0DDF2-0E52-0740-004B-2209C15740BF}"/>
+                <a16:creationId xmlns:a16="http://schemas.microsoft.com/office/drawing/2014/main" xmlns="" id="{20C0DDF2-0E52-0740-004B-2209C15740BF}"/>
               </a:ext>
             </a:extLst>
           </p:cNvPr>
@@ -5078,7 +5370,7 @@
           <p:cNvPr id="3" name="Espaço Reservado para Conteúdo 2">
             <a:extLst>
               <a:ext uri="{FF2B5EF4-FFF2-40B4-BE49-F238E27FC236}">
-                <a16:creationId xmlns:a16="http://schemas.microsoft.com/office/drawing/2014/main" id="{CAA14ED1-BBC4-3217-0C26-BBA0501ACF3D}"/>
+                <a16:creationId xmlns:a16="http://schemas.microsoft.com/office/drawing/2014/main" xmlns="" id="{CAA14ED1-BBC4-3217-0C26-BBA0501ACF3D}"/>
               </a:ext>
             </a:extLst>
           </p:cNvPr>
@@ -5315,7 +5607,7 @@
         <p:cNvPr id="1" name="">
           <a:extLst>
             <a:ext uri="{FF2B5EF4-FFF2-40B4-BE49-F238E27FC236}">
-              <a16:creationId xmlns:a16="http://schemas.microsoft.com/office/drawing/2014/main" id="{6E3AB78C-4A70-ED33-6088-7D978AFBD15F}"/>
+              <a16:creationId xmlns:a16="http://schemas.microsoft.com/office/drawing/2014/main" xmlns="" id="{6E3AB78C-4A70-ED33-6088-7D978AFBD15F}"/>
             </a:ext>
           </a:extLst>
         </p:cNvPr>
@@ -5335,7 +5627,7 @@
           <p:cNvPr id="2" name="Título 1">
             <a:extLst>
               <a:ext uri="{FF2B5EF4-FFF2-40B4-BE49-F238E27FC236}">
-                <a16:creationId xmlns:a16="http://schemas.microsoft.com/office/drawing/2014/main" id="{20C0DDF2-0E52-0740-004B-2209C15740BF}"/>
+                <a16:creationId xmlns:a16="http://schemas.microsoft.com/office/drawing/2014/main" xmlns="" id="{20C0DDF2-0E52-0740-004B-2209C15740BF}"/>
               </a:ext>
             </a:extLst>
           </p:cNvPr>
@@ -5363,7 +5655,7 @@
           <p:cNvPr id="3" name="Espaço Reservado para Conteúdo 2">
             <a:extLst>
               <a:ext uri="{FF2B5EF4-FFF2-40B4-BE49-F238E27FC236}">
-                <a16:creationId xmlns:a16="http://schemas.microsoft.com/office/drawing/2014/main" id="{CAA14ED1-BBC4-3217-0C26-BBA0501ACF3D}"/>
+                <a16:creationId xmlns:a16="http://schemas.microsoft.com/office/drawing/2014/main" xmlns="" id="{CAA14ED1-BBC4-3217-0C26-BBA0501ACF3D}"/>
               </a:ext>
             </a:extLst>
           </p:cNvPr>
@@ -5601,7 +5893,7 @@
           <p:cNvPr id="2" name="Título 1">
             <a:extLst>
               <a:ext uri="{FF2B5EF4-FFF2-40B4-BE49-F238E27FC236}">
-                <a16:creationId xmlns:a16="http://schemas.microsoft.com/office/drawing/2014/main" id="{F70C7E2D-5398-4F5E-7000-BA72FF1C6228}"/>
+                <a16:creationId xmlns:a16="http://schemas.microsoft.com/office/drawing/2014/main" xmlns="" id="{F70C7E2D-5398-4F5E-7000-BA72FF1C6228}"/>
               </a:ext>
             </a:extLst>
           </p:cNvPr>
@@ -5629,7 +5921,7 @@
           <p:cNvPr id="3" name="Espaço Reservado para Conteúdo 2">
             <a:extLst>
               <a:ext uri="{FF2B5EF4-FFF2-40B4-BE49-F238E27FC236}">
-                <a16:creationId xmlns:a16="http://schemas.microsoft.com/office/drawing/2014/main" id="{BA790209-FBBD-71F4-6F9F-502DB6462A33}"/>
+                <a16:creationId xmlns:a16="http://schemas.microsoft.com/office/drawing/2014/main" xmlns="" id="{BA790209-FBBD-71F4-6F9F-502DB6462A33}"/>
               </a:ext>
             </a:extLst>
           </p:cNvPr>
@@ -5832,7 +6124,7 @@
           <p:cNvPr id="2" name="Título 1">
             <a:extLst>
               <a:ext uri="{FF2B5EF4-FFF2-40B4-BE49-F238E27FC236}">
-                <a16:creationId xmlns:a16="http://schemas.microsoft.com/office/drawing/2014/main" id="{F70C7E2D-5398-4F5E-7000-BA72FF1C6228}"/>
+                <a16:creationId xmlns:a16="http://schemas.microsoft.com/office/drawing/2014/main" xmlns="" id="{F70C7E2D-5398-4F5E-7000-BA72FF1C6228}"/>
               </a:ext>
             </a:extLst>
           </p:cNvPr>
@@ -5860,7 +6152,7 @@
           <p:cNvPr id="3" name="Espaço Reservado para Conteúdo 2">
             <a:extLst>
               <a:ext uri="{FF2B5EF4-FFF2-40B4-BE49-F238E27FC236}">
-                <a16:creationId xmlns:a16="http://schemas.microsoft.com/office/drawing/2014/main" id="{BA790209-FBBD-71F4-6F9F-502DB6462A33}"/>
+                <a16:creationId xmlns:a16="http://schemas.microsoft.com/office/drawing/2014/main" xmlns="" id="{BA790209-FBBD-71F4-6F9F-502DB6462A33}"/>
               </a:ext>
             </a:extLst>
           </p:cNvPr>
@@ -6022,7 +6314,7 @@
         <p:cNvPr id="1" name="">
           <a:extLst>
             <a:ext uri="{FF2B5EF4-FFF2-40B4-BE49-F238E27FC236}">
-              <a16:creationId xmlns:a16="http://schemas.microsoft.com/office/drawing/2014/main" id="{F2050D32-3E32-0E68-EE2F-10DEBF5F9E34}"/>
+              <a16:creationId xmlns:a16="http://schemas.microsoft.com/office/drawing/2014/main" xmlns="" id="{F2050D32-3E32-0E68-EE2F-10DEBF5F9E34}"/>
             </a:ext>
           </a:extLst>
         </p:cNvPr>
@@ -6042,7 +6334,7 @@
           <p:cNvPr id="2" name="Título 1">
             <a:extLst>
               <a:ext uri="{FF2B5EF4-FFF2-40B4-BE49-F238E27FC236}">
-                <a16:creationId xmlns:a16="http://schemas.microsoft.com/office/drawing/2014/main" id="{06C9BF47-FE25-64EB-E7D8-257F36BF0637}"/>
+                <a16:creationId xmlns:a16="http://schemas.microsoft.com/office/drawing/2014/main" xmlns="" id="{06C9BF47-FE25-64EB-E7D8-257F36BF0637}"/>
               </a:ext>
             </a:extLst>
           </p:cNvPr>
@@ -6070,7 +6362,7 @@
           <p:cNvPr id="3" name="Espaço Reservado para Conteúdo 2">
             <a:extLst>
               <a:ext uri="{FF2B5EF4-FFF2-40B4-BE49-F238E27FC236}">
-                <a16:creationId xmlns:a16="http://schemas.microsoft.com/office/drawing/2014/main" id="{85CD2A47-67FC-5F78-FB47-48CDDDA1C93F}"/>
+                <a16:creationId xmlns:a16="http://schemas.microsoft.com/office/drawing/2014/main" xmlns="" id="{85CD2A47-67FC-5F78-FB47-48CDDDA1C93F}"/>
               </a:ext>
             </a:extLst>
           </p:cNvPr>
@@ -6302,6 +6594,13 @@
   <p:clrMapOvr>
     <a:masterClrMapping/>
   </p:clrMapOvr>
+  <p:timing>
+    <p:tnLst>
+      <p:par>
+        <p:cTn id="1" dur="indefinite" restart="never" nodeType="tmRoot"/>
+      </p:par>
+    </p:tnLst>
+  </p:timing>
 </p:sld>
 </file>
 
@@ -6313,7 +6612,7 @@
         <p:cNvPr id="1" name="">
           <a:extLst>
             <a:ext uri="{FF2B5EF4-FFF2-40B4-BE49-F238E27FC236}">
-              <a16:creationId xmlns:a16="http://schemas.microsoft.com/office/drawing/2014/main" id="{4059CF8C-A5CA-D922-15C9-90E83F41C16F}"/>
+              <a16:creationId xmlns:a16="http://schemas.microsoft.com/office/drawing/2014/main" xmlns="" id="{4059CF8C-A5CA-D922-15C9-90E83F41C16F}"/>
             </a:ext>
           </a:extLst>
         </p:cNvPr>
@@ -6333,7 +6632,7 @@
           <p:cNvPr id="2" name="Título 1">
             <a:extLst>
               <a:ext uri="{FF2B5EF4-FFF2-40B4-BE49-F238E27FC236}">
-                <a16:creationId xmlns:a16="http://schemas.microsoft.com/office/drawing/2014/main" id="{F0E0D2C5-2C7F-FF98-F6E4-6A6D35AE3301}"/>
+                <a16:creationId xmlns:a16="http://schemas.microsoft.com/office/drawing/2014/main" xmlns="" id="{F0E0D2C5-2C7F-FF98-F6E4-6A6D35AE3301}"/>
               </a:ext>
             </a:extLst>
           </p:cNvPr>
@@ -6361,7 +6660,7 @@
           <p:cNvPr id="3" name="Espaço Reservado para Conteúdo 2">
             <a:extLst>
               <a:ext uri="{FF2B5EF4-FFF2-40B4-BE49-F238E27FC236}">
-                <a16:creationId xmlns:a16="http://schemas.microsoft.com/office/drawing/2014/main" id="{164D262D-D1D5-2FFA-8E32-3025F99BDE7F}"/>
+                <a16:creationId xmlns:a16="http://schemas.microsoft.com/office/drawing/2014/main" xmlns="" id="{164D262D-D1D5-2FFA-8E32-3025F99BDE7F}"/>
               </a:ext>
             </a:extLst>
           </p:cNvPr>
@@ -6644,36 +6943,29 @@
                 <a:hlinkClick r:id="rId6">
                   <a:extLst>
                     <a:ext uri="{A12FA001-AC4F-418D-AE19-62706E023703}">
-                      <ahyp:hlinkClr xmlns:ahyp="http://schemas.microsoft.com/office/drawing/2018/hyperlinkcolor" val="tx"/>
+                      <ahyp:hlinkClr xmlns:ahyp="http://schemas.microsoft.com/office/drawing/2018/hyperlinkcolor" xmlns="" val="tx"/>
                     </a:ext>
                   </a:extLst>
                 </a:hlinkClick>
               </a:rPr>
-              <a:t>https://arxiv.org/abs/1609.03499</a:t>
+              <a:t>https://</a:t>
+            </a:r>
+            <a:r>
+              <a:rPr lang="pt-BR" b="0" i="0" dirty="0" smtClean="0">
+                <a:effectLst/>
+                <a:hlinkClick r:id="rId6">
+                  <a:extLst>
+                    <a:ext uri="{A12FA001-AC4F-418D-AE19-62706E023703}">
+                      <ahyp:hlinkClr xmlns:ahyp="http://schemas.microsoft.com/office/drawing/2018/hyperlinkcolor" xmlns="" val="tx"/>
+                    </a:ext>
+                  </a:extLst>
+                </a:hlinkClick>
+              </a:rPr>
+              <a:t>arxiv.org/abs/1609.03499</a:t>
             </a:r>
             <a:endParaRPr lang="pt-BR" b="0" i="0" dirty="0">
               <a:effectLst/>
             </a:endParaRPr>
-          </a:p>
-          <a:p>
-            <a:pPr lvl="2">
-              <a:buFont typeface="Wingdings" panose="05000000000000000000" pitchFamily="2" charset="2"/>
-              <a:buChar char="ü"/>
-            </a:pPr>
-            <a:r>
-              <a:rPr lang="pt-BR" b="0" i="0" dirty="0">
-                <a:effectLst/>
-                <a:hlinkClick r:id="rId7">
-                  <a:extLst>
-                    <a:ext uri="{A12FA001-AC4F-418D-AE19-62706E023703}">
-                      <ahyp:hlinkClr xmlns:ahyp="http://schemas.microsoft.com/office/drawing/2018/hyperlinkcolor" val="tx"/>
-                    </a:ext>
-                  </a:extLst>
-                </a:hlinkClick>
-              </a:rPr>
-              <a:t>https://paperswithcode.com/paper/wavenet-a-generative-model-for-raw-audio</a:t>
-            </a:r>
-            <a:endParaRPr lang="pt-BR" dirty="0"/>
           </a:p>
         </p:txBody>
       </p:sp>
@@ -6687,6 +6979,13 @@
   <p:clrMapOvr>
     <a:masterClrMapping/>
   </p:clrMapOvr>
+  <p:timing>
+    <p:tnLst>
+      <p:par>
+        <p:cTn id="1" dur="indefinite" restart="never" nodeType="tmRoot"/>
+      </p:par>
+    </p:tnLst>
+  </p:timing>
 </p:sld>
 </file>
 
@@ -6698,7 +6997,7 @@
         <p:cNvPr id="1" name="">
           <a:extLst>
             <a:ext uri="{FF2B5EF4-FFF2-40B4-BE49-F238E27FC236}">
-              <a16:creationId xmlns:a16="http://schemas.microsoft.com/office/drawing/2014/main" id="{4059CF8C-A5CA-D922-15C9-90E83F41C16F}"/>
+              <a16:creationId xmlns:a16="http://schemas.microsoft.com/office/drawing/2014/main" xmlns="" id="{4059CF8C-A5CA-D922-15C9-90E83F41C16F}"/>
             </a:ext>
           </a:extLst>
         </p:cNvPr>
@@ -6718,7 +7017,7 @@
           <p:cNvPr id="2" name="Título 1">
             <a:extLst>
               <a:ext uri="{FF2B5EF4-FFF2-40B4-BE49-F238E27FC236}">
-                <a16:creationId xmlns:a16="http://schemas.microsoft.com/office/drawing/2014/main" id="{F0E0D2C5-2C7F-FF98-F6E4-6A6D35AE3301}"/>
+                <a16:creationId xmlns:a16="http://schemas.microsoft.com/office/drawing/2014/main" xmlns="" id="{F0E0D2C5-2C7F-FF98-F6E4-6A6D35AE3301}"/>
               </a:ext>
             </a:extLst>
           </p:cNvPr>
@@ -6746,7 +7045,7 @@
           <p:cNvPr id="3" name="Espaço Reservado para Conteúdo 2">
             <a:extLst>
               <a:ext uri="{FF2B5EF4-FFF2-40B4-BE49-F238E27FC236}">
-                <a16:creationId xmlns:a16="http://schemas.microsoft.com/office/drawing/2014/main" id="{164D262D-D1D5-2FFA-8E32-3025F99BDE7F}"/>
+                <a16:creationId xmlns:a16="http://schemas.microsoft.com/office/drawing/2014/main" xmlns="" id="{164D262D-D1D5-2FFA-8E32-3025F99BDE7F}"/>
               </a:ext>
             </a:extLst>
           </p:cNvPr>
@@ -6789,7 +7088,7 @@
             </a:pPr>
             <a:r>
               <a:rPr lang="pt-BR" dirty="0">
-                <a:hlinkClick r:id="rId2"/>
+                <a:hlinkClick r:id="rId3"/>
               </a:rPr>
               <a:t>https://arxiv.org/abs/2101.11174</a:t>
             </a:r>
@@ -6802,7 +7101,7 @@
             </a:pPr>
             <a:r>
               <a:rPr lang="pt-BR" dirty="0">
-                <a:hlinkClick r:id="rId3"/>
+                <a:hlinkClick r:id="rId4"/>
               </a:rPr>
               <a:t>https://paperswithcode.com/paper/graph-neural-network-for-traffic-forecasting</a:t>
             </a:r>
@@ -6825,7 +7124,7 @@
             </a:pPr>
             <a:r>
               <a:rPr lang="pt-BR" dirty="0">
-                <a:hlinkClick r:id="rId4"/>
+                <a:hlinkClick r:id="rId5"/>
               </a:rPr>
               <a:t>https://arxiv.org/abs/2109.12894</a:t>
             </a:r>
@@ -6836,36 +7135,11 @@
               <a:buFont typeface="Wingdings" panose="05000000000000000000" pitchFamily="2" charset="2"/>
               <a:buChar char="ü"/>
             </a:pPr>
-            <a:r>
-              <a:rPr lang="pt-BR" dirty="0">
-                <a:hlinkClick r:id="rId5"/>
-              </a:rPr>
-              <a:t>https://analyticsindiamag.com/</a:t>
-            </a:r>
-            <a:r>
-              <a:rPr lang="pt-BR">
-                <a:hlinkClick r:id="rId5"/>
-              </a:rPr>
-              <a:t>a-tutorial-on-spiking-neural-networks-for-beginners/</a:t>
-            </a:r>
-            <a:endParaRPr lang="pt-BR" dirty="0"/>
-          </a:p>
-          <a:p>
-            <a:pPr lvl="1">
-              <a:buFont typeface="Wingdings" panose="05000000000000000000" pitchFamily="2" charset="2"/>
-              <a:buChar char="ü"/>
-            </a:pPr>
-            <a:r>
-              <a:rPr lang="pt-BR">
-                <a:hlinkClick r:id="rId6"/>
-              </a:rPr>
-              <a:t>https</a:t>
-            </a:r>
             <a:r>
               <a:rPr lang="pt-BR" dirty="0">
                 <a:hlinkClick r:id="rId6"/>
               </a:rPr>
-              <a:t>://guillaume-chevalier.com/spiking-neural-network-snn-with-pytorch-where-backpropagation-engenders-stdp-hebbian-learning/</a:t>
+              <a:t>https://analyticsindiamag.com/a-tutorial-on-spiking-neural-networks-for-beginners/</a:t>
             </a:r>
             <a:endParaRPr lang="pt-BR" dirty="0"/>
           </a:p>
@@ -6877,6 +7151,19 @@
             <a:r>
               <a:rPr lang="pt-BR" dirty="0">
                 <a:hlinkClick r:id="rId7"/>
+              </a:rPr>
+              <a:t>https://guillaume-chevalier.com/spiking-neural-network-snn-with-pytorch-where-backpropagation-engenders-stdp-hebbian-learning/</a:t>
+            </a:r>
+            <a:endParaRPr lang="pt-BR" dirty="0"/>
+          </a:p>
+          <a:p>
+            <a:pPr lvl="1">
+              <a:buFont typeface="Wingdings" panose="05000000000000000000" pitchFamily="2" charset="2"/>
+              <a:buChar char="ü"/>
+            </a:pPr>
+            <a:r>
+              <a:rPr lang="pt-BR" dirty="0">
+                <a:hlinkClick r:id="rId8"/>
               </a:rPr>
               <a:t>https://snntorch.readthedocs.io/en/latest/tutorials/index.html</a:t>
             </a:r>
@@ -6942,6 +7229,13 @@
   <p:clrMapOvr>
     <a:masterClrMapping/>
   </p:clrMapOvr>
+  <p:timing>
+    <p:tnLst>
+      <p:par>
+        <p:cTn id="1" dur="indefinite" restart="never" nodeType="tmRoot"/>
+      </p:par>
+    </p:tnLst>
+  </p:timing>
 </p:sld>
 </file>
 
@@ -6953,7 +7247,7 @@
         <p:cNvPr id="1" name="">
           <a:extLst>
             <a:ext uri="{FF2B5EF4-FFF2-40B4-BE49-F238E27FC236}">
-              <a16:creationId xmlns:a16="http://schemas.microsoft.com/office/drawing/2014/main" id="{4059CF8C-A5CA-D922-15C9-90E83F41C16F}"/>
+              <a16:creationId xmlns:a16="http://schemas.microsoft.com/office/drawing/2014/main" xmlns="" id="{4059CF8C-A5CA-D922-15C9-90E83F41C16F}"/>
             </a:ext>
           </a:extLst>
         </p:cNvPr>
@@ -6973,7 +7267,7 @@
           <p:cNvPr id="2" name="Título 1">
             <a:extLst>
               <a:ext uri="{FF2B5EF4-FFF2-40B4-BE49-F238E27FC236}">
-                <a16:creationId xmlns:a16="http://schemas.microsoft.com/office/drawing/2014/main" id="{F0E0D2C5-2C7F-FF98-F6E4-6A6D35AE3301}"/>
+                <a16:creationId xmlns:a16="http://schemas.microsoft.com/office/drawing/2014/main" xmlns="" id="{F0E0D2C5-2C7F-FF98-F6E4-6A6D35AE3301}"/>
               </a:ext>
             </a:extLst>
           </p:cNvPr>
@@ -7001,7 +7295,7 @@
           <p:cNvPr id="3" name="Espaço Reservado para Conteúdo 2">
             <a:extLst>
               <a:ext uri="{FF2B5EF4-FFF2-40B4-BE49-F238E27FC236}">
-                <a16:creationId xmlns:a16="http://schemas.microsoft.com/office/drawing/2014/main" id="{164D262D-D1D5-2FFA-8E32-3025F99BDE7F}"/>
+                <a16:creationId xmlns:a16="http://schemas.microsoft.com/office/drawing/2014/main" xmlns="" id="{164D262D-D1D5-2FFA-8E32-3025F99BDE7F}"/>
               </a:ext>
             </a:extLst>
           </p:cNvPr>
@@ -7229,7 +7523,7 @@
           <p:cNvPr id="2" name="Título 1">
             <a:extLst>
               <a:ext uri="{FF2B5EF4-FFF2-40B4-BE49-F238E27FC236}">
-                <a16:creationId xmlns:a16="http://schemas.microsoft.com/office/drawing/2014/main" id="{59E7398B-A900-61B5-8621-DCCF26C6973A}"/>
+                <a16:creationId xmlns:a16="http://schemas.microsoft.com/office/drawing/2014/main" xmlns="" id="{59E7398B-A900-61B5-8621-DCCF26C6973A}"/>
               </a:ext>
             </a:extLst>
           </p:cNvPr>
@@ -7257,7 +7551,7 @@
           <p:cNvPr id="3" name="Espaço Reservado para Conteúdo 2">
             <a:extLst>
               <a:ext uri="{FF2B5EF4-FFF2-40B4-BE49-F238E27FC236}">
-                <a16:creationId xmlns:a16="http://schemas.microsoft.com/office/drawing/2014/main" id="{5954F27A-CDF9-6E72-139C-41301C4C48BE}"/>
+                <a16:creationId xmlns:a16="http://schemas.microsoft.com/office/drawing/2014/main" xmlns="" id="{5954F27A-CDF9-6E72-139C-41301C4C48BE}"/>
               </a:ext>
             </a:extLst>
           </p:cNvPr>
@@ -7409,7 +7703,7 @@
         <p:cNvPr id="1" name="">
           <a:extLst>
             <a:ext uri="{FF2B5EF4-FFF2-40B4-BE49-F238E27FC236}">
-              <a16:creationId xmlns:a16="http://schemas.microsoft.com/office/drawing/2014/main" id="{4059CF8C-A5CA-D922-15C9-90E83F41C16F}"/>
+              <a16:creationId xmlns:a16="http://schemas.microsoft.com/office/drawing/2014/main" xmlns="" id="{4059CF8C-A5CA-D922-15C9-90E83F41C16F}"/>
             </a:ext>
           </a:extLst>
         </p:cNvPr>
@@ -7429,7 +7723,7 @@
           <p:cNvPr id="2" name="Título 1">
             <a:extLst>
               <a:ext uri="{FF2B5EF4-FFF2-40B4-BE49-F238E27FC236}">
-                <a16:creationId xmlns:a16="http://schemas.microsoft.com/office/drawing/2014/main" id="{F0E0D2C5-2C7F-FF98-F6E4-6A6D35AE3301}"/>
+                <a16:creationId xmlns:a16="http://schemas.microsoft.com/office/drawing/2014/main" xmlns="" id="{F0E0D2C5-2C7F-FF98-F6E4-6A6D35AE3301}"/>
               </a:ext>
             </a:extLst>
           </p:cNvPr>
@@ -7457,7 +7751,7 @@
           <p:cNvPr id="3" name="Espaço Reservado para Conteúdo 2">
             <a:extLst>
               <a:ext uri="{FF2B5EF4-FFF2-40B4-BE49-F238E27FC236}">
-                <a16:creationId xmlns:a16="http://schemas.microsoft.com/office/drawing/2014/main" id="{164D262D-D1D5-2FFA-8E32-3025F99BDE7F}"/>
+                <a16:creationId xmlns:a16="http://schemas.microsoft.com/office/drawing/2014/main" xmlns="" id="{164D262D-D1D5-2FFA-8E32-3025F99BDE7F}"/>
               </a:ext>
             </a:extLst>
           </p:cNvPr>
@@ -7535,7 +7829,7 @@
                   <a:srgbClr val="212529"/>
                 </a:solidFill>
                 <a:effectLst/>
-                <a:hlinkClick r:id="rId2"/>
+                <a:hlinkClick r:id="rId3"/>
               </a:rPr>
               <a:t>https://arxiv.org/abs/1503.02531</a:t>
             </a:r>
@@ -7556,7 +7850,7 @@
                   <a:srgbClr val="212529"/>
                 </a:solidFill>
                 <a:effectLst/>
-                <a:hlinkClick r:id="rId3"/>
+                <a:hlinkClick r:id="rId4"/>
               </a:rPr>
               <a:t>https://keras.io/examples/vision/knowledge_distillation/</a:t>
             </a:r>
@@ -7593,7 +7887,7 @@
             </a:pPr>
             <a:r>
               <a:rPr lang="pt-BR" dirty="0">
-                <a:hlinkClick r:id="rId4"/>
+                <a:hlinkClick r:id="rId5"/>
               </a:rPr>
               <a:t>https://arxiv.org/abs/2004.01461</a:t>
             </a:r>
@@ -7606,7 +7900,7 @@
             </a:pPr>
             <a:r>
               <a:rPr lang="pt-BR" dirty="0">
-                <a:hlinkClick r:id="rId5"/>
+                <a:hlinkClick r:id="rId6"/>
               </a:rPr>
               <a:t>https://keras.io/examples/vision/gradient_centralization/</a:t>
             </a:r>
@@ -7637,7 +7931,7 @@
             </a:pPr>
             <a:r>
               <a:rPr lang="pt-BR" dirty="0">
-                <a:hlinkClick r:id="rId6"/>
+                <a:hlinkClick r:id="rId7"/>
               </a:rPr>
               <a:t>https://arxiv.org/pdf/2211.09760</a:t>
             </a:r>
@@ -7649,17 +7943,21 @@
               <a:buChar char="ü"/>
             </a:pPr>
             <a:r>
-              <a:rPr lang="pt-BR">
-                <a:hlinkClick r:id="rId7"/>
+              <a:rPr lang="pt-BR" dirty="0">
+                <a:hlinkClick r:id="rId8"/>
               </a:rPr>
               <a:t>https://velo-code.github.io/</a:t>
             </a:r>
-            <a:endParaRPr lang="pt-BR"/>
+            <a:endParaRPr lang="pt-BR" dirty="0"/>
           </a:p>
           <a:p>
             <a:pPr marL="914400" lvl="2" indent="0">
               <a:buNone/>
             </a:pPr>
+            <a:r>
+              <a:rPr lang="pt-BR" dirty="0"/>
+              <a:t/>
+            </a:r>
             <a:br>
               <a:rPr lang="pt-BR" dirty="0"/>
             </a:br>
@@ -7705,7 +8003,7 @@
           <p:cNvPr id="2" name="Título 1">
             <a:extLst>
               <a:ext uri="{FF2B5EF4-FFF2-40B4-BE49-F238E27FC236}">
-                <a16:creationId xmlns:a16="http://schemas.microsoft.com/office/drawing/2014/main" id="{A2A4684C-1159-4F88-A2B1-6BABEDE38C4D}"/>
+                <a16:creationId xmlns:a16="http://schemas.microsoft.com/office/drawing/2014/main" xmlns="" id="{A2A4684C-1159-4F88-A2B1-6BABEDE38C4D}"/>
               </a:ext>
             </a:extLst>
           </p:cNvPr>
@@ -7733,7 +8031,7 @@
           <p:cNvPr id="3" name="Espaço Reservado para Conteúdo 2">
             <a:extLst>
               <a:ext uri="{FF2B5EF4-FFF2-40B4-BE49-F238E27FC236}">
-                <a16:creationId xmlns:a16="http://schemas.microsoft.com/office/drawing/2014/main" id="{EC432B31-D382-41FF-BB6B-2ABDD322424B}"/>
+                <a16:creationId xmlns:a16="http://schemas.microsoft.com/office/drawing/2014/main" xmlns="" id="{EC432B31-D382-41FF-BB6B-2ABDD322424B}"/>
               </a:ext>
             </a:extLst>
           </p:cNvPr>
@@ -8112,6 +8410,14 @@
                 </a:solidFill>
               </a:rPr>
               <a:t>, 2019.</a:t>
+            </a:r>
+            <a:r>
+              <a:rPr lang="en-US" sz="2400" dirty="0">
+                <a:solidFill>
+                  <a:srgbClr val="000000"/>
+                </a:solidFill>
+              </a:rPr>
+              <a:t/>
             </a:r>
             <a:br>
               <a:rPr lang="en-US" sz="2400" dirty="0">
@@ -8787,7 +9093,7 @@
           <p:cNvPr id="4" name="Título 1">
             <a:extLst>
               <a:ext uri="{FF2B5EF4-FFF2-40B4-BE49-F238E27FC236}">
-                <a16:creationId xmlns:a16="http://schemas.microsoft.com/office/drawing/2014/main" id="{32666AC8-2E17-4DB4-B0F5-60C640CCFD2E}"/>
+                <a16:creationId xmlns:a16="http://schemas.microsoft.com/office/drawing/2014/main" xmlns="" id="{32666AC8-2E17-4DB4-B0F5-60C640CCFD2E}"/>
               </a:ext>
             </a:extLst>
           </p:cNvPr>
@@ -8873,7 +9179,7 @@
           <p:cNvPr id="4" name="Título 1">
             <a:extLst>
               <a:ext uri="{FF2B5EF4-FFF2-40B4-BE49-F238E27FC236}">
-                <a16:creationId xmlns:a16="http://schemas.microsoft.com/office/drawing/2014/main" id="{32666AC8-2E17-4DB4-B0F5-60C640CCFD2E}"/>
+                <a16:creationId xmlns:a16="http://schemas.microsoft.com/office/drawing/2014/main" xmlns="" id="{32666AC8-2E17-4DB4-B0F5-60C640CCFD2E}"/>
               </a:ext>
             </a:extLst>
           </p:cNvPr>
@@ -8959,7 +9265,7 @@
           <p:cNvPr id="2" name="Título 1">
             <a:extLst>
               <a:ext uri="{FF2B5EF4-FFF2-40B4-BE49-F238E27FC236}">
-                <a16:creationId xmlns:a16="http://schemas.microsoft.com/office/drawing/2014/main" id="{9BB4C24F-F8C2-513B-ABC6-F41F972D298C}"/>
+                <a16:creationId xmlns:a16="http://schemas.microsoft.com/office/drawing/2014/main" xmlns="" id="{9BB4C24F-F8C2-513B-ABC6-F41F972D298C}"/>
               </a:ext>
             </a:extLst>
           </p:cNvPr>
@@ -8987,7 +9293,7 @@
           <p:cNvPr id="3" name="Espaço Reservado para Conteúdo 2">
             <a:extLst>
               <a:ext uri="{FF2B5EF4-FFF2-40B4-BE49-F238E27FC236}">
-                <a16:creationId xmlns:a16="http://schemas.microsoft.com/office/drawing/2014/main" id="{39EC605B-82E1-C664-EB15-E7D9A6DF0D17}"/>
+                <a16:creationId xmlns:a16="http://schemas.microsoft.com/office/drawing/2014/main" xmlns="" id="{39EC605B-82E1-C664-EB15-E7D9A6DF0D17}"/>
               </a:ext>
             </a:extLst>
           </p:cNvPr>
@@ -9187,7 +9493,7 @@
           <p:cNvPr id="2" name="Título 1">
             <a:extLst>
               <a:ext uri="{FF2B5EF4-FFF2-40B4-BE49-F238E27FC236}">
-                <a16:creationId xmlns:a16="http://schemas.microsoft.com/office/drawing/2014/main" id="{9A265F83-0504-EFF3-ACD5-719CAEB5BA41}"/>
+                <a16:creationId xmlns:a16="http://schemas.microsoft.com/office/drawing/2014/main" xmlns="" id="{9A265F83-0504-EFF3-ACD5-719CAEB5BA41}"/>
               </a:ext>
             </a:extLst>
           </p:cNvPr>
@@ -9215,7 +9521,7 @@
           <p:cNvPr id="3" name="Espaço Reservado para Conteúdo 2">
             <a:extLst>
               <a:ext uri="{FF2B5EF4-FFF2-40B4-BE49-F238E27FC236}">
-                <a16:creationId xmlns:a16="http://schemas.microsoft.com/office/drawing/2014/main" id="{7E37BEAB-D924-8E11-EA13-C019C32409D7}"/>
+                <a16:creationId xmlns:a16="http://schemas.microsoft.com/office/drawing/2014/main" xmlns="" id="{7E37BEAB-D924-8E11-EA13-C019C32409D7}"/>
               </a:ext>
             </a:extLst>
           </p:cNvPr>
@@ -9406,7 +9712,7 @@
         <p:cNvPr id="1" name="">
           <a:extLst>
             <a:ext uri="{FF2B5EF4-FFF2-40B4-BE49-F238E27FC236}">
-              <a16:creationId xmlns:a16="http://schemas.microsoft.com/office/drawing/2014/main" id="{AF4399CC-3894-D100-1945-D7D23AA96EB1}"/>
+              <a16:creationId xmlns:a16="http://schemas.microsoft.com/office/drawing/2014/main" xmlns="" id="{AF4399CC-3894-D100-1945-D7D23AA96EB1}"/>
             </a:ext>
           </a:extLst>
         </p:cNvPr>
@@ -9426,7 +9732,7 @@
           <p:cNvPr id="2" name="Título 1">
             <a:extLst>
               <a:ext uri="{FF2B5EF4-FFF2-40B4-BE49-F238E27FC236}">
-                <a16:creationId xmlns:a16="http://schemas.microsoft.com/office/drawing/2014/main" id="{424E490C-8C95-5D8F-8A93-456C393F644A}"/>
+                <a16:creationId xmlns:a16="http://schemas.microsoft.com/office/drawing/2014/main" xmlns="" id="{424E490C-8C95-5D8F-8A93-456C393F644A}"/>
               </a:ext>
             </a:extLst>
           </p:cNvPr>
@@ -9454,7 +9760,7 @@
           <p:cNvPr id="3" name="Espaço Reservado para Conteúdo 2">
             <a:extLst>
               <a:ext uri="{FF2B5EF4-FFF2-40B4-BE49-F238E27FC236}">
-                <a16:creationId xmlns:a16="http://schemas.microsoft.com/office/drawing/2014/main" id="{D99B10BC-34CB-F110-CB4D-6CF6043930ED}"/>
+                <a16:creationId xmlns:a16="http://schemas.microsoft.com/office/drawing/2014/main" xmlns="" id="{D99B10BC-34CB-F110-CB4D-6CF6043930ED}"/>
               </a:ext>
             </a:extLst>
           </p:cNvPr>
@@ -9585,7 +9891,7 @@
           <p:cNvPr id="2" name="Título 1">
             <a:extLst>
               <a:ext uri="{FF2B5EF4-FFF2-40B4-BE49-F238E27FC236}">
-                <a16:creationId xmlns:a16="http://schemas.microsoft.com/office/drawing/2014/main" id="{40B200E8-E489-1374-DAE1-A01E9DFC93EA}"/>
+                <a16:creationId xmlns:a16="http://schemas.microsoft.com/office/drawing/2014/main" xmlns="" id="{40B200E8-E489-1374-DAE1-A01E9DFC93EA}"/>
               </a:ext>
             </a:extLst>
           </p:cNvPr>
@@ -9613,7 +9919,7 @@
           <p:cNvPr id="3" name="Espaço Reservado para Conteúdo 2">
             <a:extLst>
               <a:ext uri="{FF2B5EF4-FFF2-40B4-BE49-F238E27FC236}">
-                <a16:creationId xmlns:a16="http://schemas.microsoft.com/office/drawing/2014/main" id="{AC84DA0A-C3B3-CCCB-BBDF-CF88E7D56E0D}"/>
+                <a16:creationId xmlns:a16="http://schemas.microsoft.com/office/drawing/2014/main" xmlns="" id="{AC84DA0A-C3B3-CCCB-BBDF-CF88E7D56E0D}"/>
               </a:ext>
             </a:extLst>
           </p:cNvPr>
@@ -9843,7 +10149,7 @@
           <p:cNvPr id="4" name="Picture 3">
             <a:extLst>
               <a:ext uri="{FF2B5EF4-FFF2-40B4-BE49-F238E27FC236}">
-                <a16:creationId xmlns:a16="http://schemas.microsoft.com/office/drawing/2014/main" id="{63A98931-D4DA-A8C6-E70B-6223235637D2}"/>
+                <a16:creationId xmlns:a16="http://schemas.microsoft.com/office/drawing/2014/main" xmlns="" id="{63A98931-D4DA-A8C6-E70B-6223235637D2}"/>
               </a:ext>
             </a:extLst>
           </p:cNvPr>
@@ -9873,7 +10179,7 @@
           <p:cNvPr id="5" name="Picture 4">
             <a:extLst>
               <a:ext uri="{FF2B5EF4-FFF2-40B4-BE49-F238E27FC236}">
-                <a16:creationId xmlns:a16="http://schemas.microsoft.com/office/drawing/2014/main" id="{0E171FC1-ABD1-9A30-24B9-3B431D21D315}"/>
+                <a16:creationId xmlns:a16="http://schemas.microsoft.com/office/drawing/2014/main" xmlns="" id="{0E171FC1-ABD1-9A30-24B9-3B431D21D315}"/>
               </a:ext>
             </a:extLst>
           </p:cNvPr>
@@ -9903,7 +10209,7 @@
           <p:cNvPr id="6" name="Picture 5">
             <a:extLst>
               <a:ext uri="{FF2B5EF4-FFF2-40B4-BE49-F238E27FC236}">
-                <a16:creationId xmlns:a16="http://schemas.microsoft.com/office/drawing/2014/main" id="{4A00239B-9DE4-3C62-31EF-097283BCD829}"/>
+                <a16:creationId xmlns:a16="http://schemas.microsoft.com/office/drawing/2014/main" xmlns="" id="{4A00239B-9DE4-3C62-31EF-097283BCD829}"/>
               </a:ext>
             </a:extLst>
           </p:cNvPr>
@@ -9963,7 +10269,7 @@
           <p:cNvPr id="2" name="Título 1">
             <a:extLst>
               <a:ext uri="{FF2B5EF4-FFF2-40B4-BE49-F238E27FC236}">
-                <a16:creationId xmlns:a16="http://schemas.microsoft.com/office/drawing/2014/main" id="{81B87840-628C-E82C-47FA-C888AB409B21}"/>
+                <a16:creationId xmlns:a16="http://schemas.microsoft.com/office/drawing/2014/main" xmlns="" id="{81B87840-628C-E82C-47FA-C888AB409B21}"/>
               </a:ext>
             </a:extLst>
           </p:cNvPr>
@@ -9991,7 +10297,7 @@
           <p:cNvPr id="3" name="Espaço Reservado para Conteúdo 2">
             <a:extLst>
               <a:ext uri="{FF2B5EF4-FFF2-40B4-BE49-F238E27FC236}">
-                <a16:creationId xmlns:a16="http://schemas.microsoft.com/office/drawing/2014/main" id="{60B96892-6767-8A98-62CA-E3A197F37080}"/>
+                <a16:creationId xmlns:a16="http://schemas.microsoft.com/office/drawing/2014/main" xmlns="" id="{60B96892-6767-8A98-62CA-E3A197F37080}"/>
               </a:ext>
             </a:extLst>
           </p:cNvPr>
@@ -10111,7 +10417,7 @@
           <p:cNvPr id="2" name="Título 1">
             <a:extLst>
               <a:ext uri="{FF2B5EF4-FFF2-40B4-BE49-F238E27FC236}">
-                <a16:creationId xmlns:a16="http://schemas.microsoft.com/office/drawing/2014/main" id="{11BC2EE5-C8A9-A5C4-E79F-7ACA60564BF4}"/>
+                <a16:creationId xmlns:a16="http://schemas.microsoft.com/office/drawing/2014/main" xmlns="" id="{11BC2EE5-C8A9-A5C4-E79F-7ACA60564BF4}"/>
               </a:ext>
             </a:extLst>
           </p:cNvPr>
@@ -10139,7 +10445,7 @@
           <p:cNvPr id="3" name="Espaço Reservado para Conteúdo 2">
             <a:extLst>
               <a:ext uri="{FF2B5EF4-FFF2-40B4-BE49-F238E27FC236}">
-                <a16:creationId xmlns:a16="http://schemas.microsoft.com/office/drawing/2014/main" id="{F34E1E4B-4890-7308-FDD9-BCFBF68A4D2F}"/>
+                <a16:creationId xmlns:a16="http://schemas.microsoft.com/office/drawing/2014/main" xmlns="" id="{F34E1E4B-4890-7308-FDD9-BCFBF68A4D2F}"/>
               </a:ext>
             </a:extLst>
           </p:cNvPr>
@@ -10412,7 +10718,7 @@
           <p:cNvPr id="2" name="Título 1">
             <a:extLst>
               <a:ext uri="{FF2B5EF4-FFF2-40B4-BE49-F238E27FC236}">
-                <a16:creationId xmlns:a16="http://schemas.microsoft.com/office/drawing/2014/main" id="{11BC2EE5-C8A9-A5C4-E79F-7ACA60564BF4}"/>
+                <a16:creationId xmlns:a16="http://schemas.microsoft.com/office/drawing/2014/main" xmlns="" id="{11BC2EE5-C8A9-A5C4-E79F-7ACA60564BF4}"/>
               </a:ext>
             </a:extLst>
           </p:cNvPr>
@@ -10440,7 +10746,7 @@
           <p:cNvPr id="3" name="Espaço Reservado para Conteúdo 2">
             <a:extLst>
               <a:ext uri="{FF2B5EF4-FFF2-40B4-BE49-F238E27FC236}">
-                <a16:creationId xmlns:a16="http://schemas.microsoft.com/office/drawing/2014/main" id="{F34E1E4B-4890-7308-FDD9-BCFBF68A4D2F}"/>
+                <a16:creationId xmlns:a16="http://schemas.microsoft.com/office/drawing/2014/main" xmlns="" id="{F34E1E4B-4890-7308-FDD9-BCFBF68A4D2F}"/>
               </a:ext>
             </a:extLst>
           </p:cNvPr>

--- a/slides/TP558_1_Introdução_ao_curso.pptx
+++ b/slides/TP558_1_Introdução_ao_curso.pptx
@@ -5,36 +5,38 @@
     <p:sldMasterId id="2147483648" r:id="rId1"/>
   </p:sldMasterIdLst>
   <p:notesMasterIdLst>
-    <p:notesMasterId r:id="rId26"/>
+    <p:notesMasterId r:id="rId28"/>
   </p:notesMasterIdLst>
   <p:handoutMasterIdLst>
-    <p:handoutMasterId r:id="rId27"/>
+    <p:handoutMasterId r:id="rId29"/>
   </p:handoutMasterIdLst>
   <p:sldIdLst>
     <p:sldId id="256" r:id="rId2"/>
     <p:sldId id="395" r:id="rId3"/>
     <p:sldId id="423" r:id="rId4"/>
     <p:sldId id="422" r:id="rId5"/>
-    <p:sldId id="425" r:id="rId6"/>
-    <p:sldId id="398" r:id="rId7"/>
-    <p:sldId id="424" r:id="rId8"/>
-    <p:sldId id="426" r:id="rId9"/>
-    <p:sldId id="437" r:id="rId10"/>
-    <p:sldId id="427" r:id="rId11"/>
-    <p:sldId id="428" r:id="rId12"/>
-    <p:sldId id="429" r:id="rId13"/>
-    <p:sldId id="438" r:id="rId14"/>
-    <p:sldId id="431" r:id="rId15"/>
-    <p:sldId id="436" r:id="rId16"/>
-    <p:sldId id="432" r:id="rId17"/>
-    <p:sldId id="430" r:id="rId18"/>
-    <p:sldId id="434" r:id="rId19"/>
-    <p:sldId id="435" r:id="rId20"/>
-    <p:sldId id="433" r:id="rId21"/>
-    <p:sldId id="263" r:id="rId22"/>
-    <p:sldId id="298" r:id="rId23"/>
-    <p:sldId id="293" r:id="rId24"/>
-    <p:sldId id="306" r:id="rId25"/>
+    <p:sldId id="439" r:id="rId6"/>
+    <p:sldId id="425" r:id="rId7"/>
+    <p:sldId id="398" r:id="rId8"/>
+    <p:sldId id="424" r:id="rId9"/>
+    <p:sldId id="453" r:id="rId10"/>
+    <p:sldId id="263" r:id="rId11"/>
+    <p:sldId id="298" r:id="rId12"/>
+    <p:sldId id="293" r:id="rId13"/>
+    <p:sldId id="306" r:id="rId14"/>
+    <p:sldId id="440" r:id="rId15"/>
+    <p:sldId id="441" r:id="rId16"/>
+    <p:sldId id="442" r:id="rId17"/>
+    <p:sldId id="443" r:id="rId18"/>
+    <p:sldId id="444" r:id="rId19"/>
+    <p:sldId id="445" r:id="rId20"/>
+    <p:sldId id="446" r:id="rId21"/>
+    <p:sldId id="447" r:id="rId22"/>
+    <p:sldId id="448" r:id="rId23"/>
+    <p:sldId id="449" r:id="rId24"/>
+    <p:sldId id="450" r:id="rId25"/>
+    <p:sldId id="451" r:id="rId26"/>
+    <p:sldId id="452" r:id="rId27"/>
   </p:sldIdLst>
   <p:sldSz cx="12192000" cy="6858000"/>
   <p:notesSz cx="7315200" cy="9601200"/>
@@ -298,7 +300,7 @@
           <a:p>
             <a:fld id="{144F1436-6906-4D93-B7A2-786C327BFA14}" type="datetimeFigureOut">
               <a:rPr lang="nl-BE" smtClean="0"/>
-              <a:t>14/08/2025</a:t>
+              <a:t>28/02/2026</a:t>
             </a:fld>
             <a:endParaRPr lang="nl-BE"/>
           </a:p>
@@ -463,7 +465,7 @@
           <a:p>
             <a:fld id="{AA8CD09E-2914-4F47-B6C1-51B2C31814C9}" type="datetimeFigureOut">
               <a:rPr lang="pt-BR" smtClean="0"/>
-              <a:t>14/08/2025</a:t>
+              <a:t>28/02/2026</a:t>
             </a:fld>
             <a:endParaRPr lang="pt-BR"/>
           </a:p>
@@ -993,7 +995,7 @@
           <a:p>
             <a:fld id="{6FC8D850-966F-45A6-8DE7-15B891E7D40D}" type="slidenum">
               <a:rPr lang="pt-BR" smtClean="0"/>
-              <a:t>6</a:t>
+              <a:t>7</a:t>
             </a:fld>
             <a:endParaRPr lang="pt-BR"/>
           </a:p>
@@ -1057,112 +1059,10 @@
           <a:lstStyle/>
           <a:p>
             <a:r>
-              <a:rPr lang="pt-BR" sz="1200" b="0" i="0" kern="1200" dirty="0" smtClean="0">
-                <a:solidFill>
-                  <a:schemeClr val="tx1"/>
-                </a:solidFill>
-                <a:effectLst/>
-                <a:latin typeface="+mn-lt"/>
-                <a:ea typeface="+mn-ea"/>
-                <a:cs typeface="+mn-cs"/>
-              </a:rPr>
-              <a:t>são modelos computacionais inspirados no funcionamento do cérebro biológico. Elas processam informações usando </a:t>
-            </a:r>
-            <a:r>
-              <a:rPr lang="pt-BR" sz="1200" b="1" i="0" kern="1200" dirty="0" smtClean="0">
-                <a:solidFill>
-                  <a:schemeClr val="tx1"/>
-                </a:solidFill>
-                <a:effectLst/>
-                <a:latin typeface="+mn-lt"/>
-                <a:ea typeface="+mn-ea"/>
-                <a:cs typeface="+mn-cs"/>
-              </a:rPr>
-              <a:t>pulsos discretos no tempo</a:t>
-            </a:r>
-            <a:r>
-              <a:rPr lang="pt-BR" sz="1200" b="0" i="0" kern="1200" dirty="0" smtClean="0">
-                <a:solidFill>
-                  <a:schemeClr val="tx1"/>
-                </a:solidFill>
-                <a:effectLst/>
-                <a:latin typeface="+mn-lt"/>
-                <a:ea typeface="+mn-ea"/>
-                <a:cs typeface="+mn-cs"/>
-              </a:rPr>
-              <a:t> (</a:t>
-            </a:r>
-            <a:r>
-              <a:rPr lang="pt-BR" sz="1200" b="0" i="0" kern="1200" dirty="0" err="1" smtClean="0">
-                <a:solidFill>
-                  <a:schemeClr val="tx1"/>
-                </a:solidFill>
-                <a:effectLst/>
-                <a:latin typeface="+mn-lt"/>
-                <a:ea typeface="+mn-ea"/>
-                <a:cs typeface="+mn-cs"/>
-              </a:rPr>
-              <a:t>spikes</a:t>
-            </a:r>
-            <a:r>
-              <a:rPr lang="pt-BR" sz="1200" b="0" i="0" kern="1200" dirty="0" smtClean="0">
-                <a:solidFill>
-                  <a:schemeClr val="tx1"/>
-                </a:solidFill>
-                <a:effectLst/>
-                <a:latin typeface="+mn-lt"/>
-                <a:ea typeface="+mn-ea"/>
-                <a:cs typeface="+mn-cs"/>
-              </a:rPr>
-              <a:t>), imitando a comunicação entre neurônios reais. Sua principal utilidade está em cenários que exigem </a:t>
-            </a:r>
-            <a:r>
-              <a:rPr lang="pt-BR" sz="1200" b="1" i="0" kern="1200" dirty="0" smtClean="0">
-                <a:solidFill>
-                  <a:schemeClr val="tx1"/>
-                </a:solidFill>
-                <a:effectLst/>
-                <a:latin typeface="+mn-lt"/>
-                <a:ea typeface="+mn-ea"/>
-                <a:cs typeface="+mn-cs"/>
-              </a:rPr>
-              <a:t>eficiência energética extrema</a:t>
-            </a:r>
-            <a:r>
-              <a:rPr lang="pt-BR" sz="1200" b="0" i="0" kern="1200" dirty="0" smtClean="0">
-                <a:solidFill>
-                  <a:schemeClr val="tx1"/>
-                </a:solidFill>
-                <a:effectLst/>
-                <a:latin typeface="+mn-lt"/>
-                <a:ea typeface="+mn-ea"/>
-                <a:cs typeface="+mn-cs"/>
-              </a:rPr>
-              <a:t>, processamento de dados temporais e integração com hardware </a:t>
-            </a:r>
-            <a:r>
-              <a:rPr lang="pt-BR" sz="1200" b="0" i="0" kern="1200" dirty="0" err="1" smtClean="0">
-                <a:solidFill>
-                  <a:schemeClr val="tx1"/>
-                </a:solidFill>
-                <a:effectLst/>
-                <a:latin typeface="+mn-lt"/>
-                <a:ea typeface="+mn-ea"/>
-                <a:cs typeface="+mn-cs"/>
-              </a:rPr>
-              <a:t>neuromórfico</a:t>
-            </a:r>
-            <a:r>
-              <a:rPr lang="pt-BR" sz="1200" b="0" i="0" kern="1200" dirty="0" smtClean="0">
-                <a:solidFill>
-                  <a:schemeClr val="tx1"/>
-                </a:solidFill>
-                <a:effectLst/>
-                <a:latin typeface="+mn-lt"/>
-                <a:ea typeface="+mn-ea"/>
-                <a:cs typeface="+mn-cs"/>
-              </a:rPr>
-              <a:t>.</a:t>
+              <a:rPr lang="pt-BR" dirty="0">
+                <a:hlinkClick r:id="rId3"/>
+              </a:rPr>
+              <a:t>books</a:t>
             </a:r>
             <a:endParaRPr lang="pt-BR" dirty="0"/>
           </a:p>
@@ -1175,7 +1075,7 @@
             <a:spLocks noGrp="1"/>
           </p:cNvSpPr>
           <p:nvPr>
-            <p:ph type="sldNum" sz="quarter" idx="10"/>
+            <p:ph type="sldNum" sz="quarter" idx="5"/>
           </p:nvPr>
         </p:nvSpPr>
         <p:spPr/>
@@ -1185,7 +1085,7 @@
           <a:p>
             <a:fld id="{6FC8D850-966F-45A6-8DE7-15B891E7D40D}" type="slidenum">
               <a:rPr lang="pt-BR" smtClean="0"/>
-              <a:t>18</a:t>
+              <a:t>10</a:t>
             </a:fld>
             <a:endParaRPr lang="pt-BR"/>
           </a:p>
@@ -1194,7 +1094,7 @@
     </p:spTree>
     <p:extLst>
       <p:ext uri="{BB962C8B-B14F-4D97-AF65-F5344CB8AC3E}">
-        <p14:creationId xmlns:p14="http://schemas.microsoft.com/office/powerpoint/2010/main" val="876737819"/>
+        <p14:creationId xmlns:p14="http://schemas.microsoft.com/office/powerpoint/2010/main" val="928934584"/>
       </p:ext>
     </p:extLst>
   </p:cSld>
@@ -1249,7 +1149,7 @@
           <a:lstStyle/>
           <a:p>
             <a:r>
-              <a:rPr lang="en-US" sz="1200" b="0" i="0" kern="1200" dirty="0" smtClean="0">
+              <a:rPr lang="pt-BR" sz="1200" b="0" i="0" kern="1200" dirty="0" smtClean="0">
                 <a:solidFill>
                   <a:schemeClr val="tx1"/>
                 </a:solidFill>
@@ -1258,7 +1158,103 @@
                 <a:ea typeface="+mn-ea"/>
                 <a:cs typeface="+mn-cs"/>
               </a:rPr>
-              <a:t>Gradient Centralization can both speedup training process and improve the final generalization performance of DNNs.</a:t>
+              <a:t>são modelos computacionais inspirados no funcionamento do cérebro biológico. Elas processam informações usando </a:t>
+            </a:r>
+            <a:r>
+              <a:rPr lang="pt-BR" sz="1200" b="1" i="0" kern="1200" dirty="0" smtClean="0">
+                <a:solidFill>
+                  <a:schemeClr val="tx1"/>
+                </a:solidFill>
+                <a:effectLst/>
+                <a:latin typeface="+mn-lt"/>
+                <a:ea typeface="+mn-ea"/>
+                <a:cs typeface="+mn-cs"/>
+              </a:rPr>
+              <a:t>pulsos discretos no tempo</a:t>
+            </a:r>
+            <a:r>
+              <a:rPr lang="pt-BR" sz="1200" b="0" i="0" kern="1200" dirty="0" smtClean="0">
+                <a:solidFill>
+                  <a:schemeClr val="tx1"/>
+                </a:solidFill>
+                <a:effectLst/>
+                <a:latin typeface="+mn-lt"/>
+                <a:ea typeface="+mn-ea"/>
+                <a:cs typeface="+mn-cs"/>
+              </a:rPr>
+              <a:t> (</a:t>
+            </a:r>
+            <a:r>
+              <a:rPr lang="pt-BR" sz="1200" b="0" i="0" kern="1200" dirty="0" err="1" smtClean="0">
+                <a:solidFill>
+                  <a:schemeClr val="tx1"/>
+                </a:solidFill>
+                <a:effectLst/>
+                <a:latin typeface="+mn-lt"/>
+                <a:ea typeface="+mn-ea"/>
+                <a:cs typeface="+mn-cs"/>
+              </a:rPr>
+              <a:t>spikes</a:t>
+            </a:r>
+            <a:r>
+              <a:rPr lang="pt-BR" sz="1200" b="0" i="0" kern="1200" dirty="0" smtClean="0">
+                <a:solidFill>
+                  <a:schemeClr val="tx1"/>
+                </a:solidFill>
+                <a:effectLst/>
+                <a:latin typeface="+mn-lt"/>
+                <a:ea typeface="+mn-ea"/>
+                <a:cs typeface="+mn-cs"/>
+              </a:rPr>
+              <a:t>), imitando a comunicação entre neurônios reais. Sua principal utilidade está em cenários que exigem </a:t>
+            </a:r>
+            <a:r>
+              <a:rPr lang="pt-BR" sz="1200" b="1" i="0" kern="1200" dirty="0" smtClean="0">
+                <a:solidFill>
+                  <a:schemeClr val="tx1"/>
+                </a:solidFill>
+                <a:effectLst/>
+                <a:latin typeface="+mn-lt"/>
+                <a:ea typeface="+mn-ea"/>
+                <a:cs typeface="+mn-cs"/>
+              </a:rPr>
+              <a:t>eficiência energética extrema</a:t>
+            </a:r>
+            <a:r>
+              <a:rPr lang="pt-BR" sz="1200" b="0" i="0" kern="1200" dirty="0" smtClean="0">
+                <a:solidFill>
+                  <a:schemeClr val="tx1"/>
+                </a:solidFill>
+                <a:effectLst/>
+                <a:latin typeface="+mn-lt"/>
+                <a:ea typeface="+mn-ea"/>
+                <a:cs typeface="+mn-cs"/>
+              </a:rPr>
+              <a:t>, processamento de dados temporais e integração com hardware </a:t>
+            </a:r>
+            <a:r>
+              <a:rPr lang="pt-BR" sz="1200" b="0" i="0" kern="1200" dirty="0" err="1" smtClean="0">
+                <a:solidFill>
+                  <a:schemeClr val="tx1"/>
+                </a:solidFill>
+                <a:effectLst/>
+                <a:latin typeface="+mn-lt"/>
+                <a:ea typeface="+mn-ea"/>
+                <a:cs typeface="+mn-cs"/>
+              </a:rPr>
+              <a:t>neuromórfico</a:t>
+            </a:r>
+            <a:r>
+              <a:rPr lang="pt-BR" sz="1200" b="0" i="0" kern="1200" dirty="0" smtClean="0">
+                <a:solidFill>
+                  <a:schemeClr val="tx1"/>
+                </a:solidFill>
+                <a:effectLst/>
+                <a:latin typeface="+mn-lt"/>
+                <a:ea typeface="+mn-ea"/>
+                <a:cs typeface="+mn-cs"/>
+              </a:rPr>
+              <a:t>.</a:t>
             </a:r>
             <a:endParaRPr lang="pt-BR" dirty="0"/>
           </a:p>
@@ -1281,7 +1277,7 @@
           <a:p>
             <a:fld id="{6FC8D850-966F-45A6-8DE7-15B891E7D40D}" type="slidenum">
               <a:rPr lang="pt-BR" smtClean="0"/>
-              <a:t>20</a:t>
+              <a:t>24</a:t>
             </a:fld>
             <a:endParaRPr lang="pt-BR"/>
           </a:p>
@@ -1290,7 +1286,7 @@
     </p:spTree>
     <p:extLst>
       <p:ext uri="{BB962C8B-B14F-4D97-AF65-F5344CB8AC3E}">
-        <p14:creationId xmlns:p14="http://schemas.microsoft.com/office/powerpoint/2010/main" val="1726693837"/>
+        <p14:creationId xmlns:p14="http://schemas.microsoft.com/office/powerpoint/2010/main" val="1107676866"/>
       </p:ext>
     </p:extLst>
   </p:cSld>
@@ -1345,10 +1341,16 @@
           <a:lstStyle/>
           <a:p>
             <a:r>
-              <a:rPr lang="pt-BR" dirty="0">
-                <a:hlinkClick r:id="rId3"/>
-              </a:rPr>
-              <a:t>books</a:t>
+              <a:rPr lang="en-US" sz="1200" b="0" i="0" kern="1200" dirty="0" smtClean="0">
+                <a:solidFill>
+                  <a:schemeClr val="tx1"/>
+                </a:solidFill>
+                <a:effectLst/>
+                <a:latin typeface="+mn-lt"/>
+                <a:ea typeface="+mn-ea"/>
+                <a:cs typeface="+mn-cs"/>
+              </a:rPr>
+              <a:t>Gradient Centralization can both speedup training process and improve the final generalization performance of DNNs.</a:t>
             </a:r>
             <a:endParaRPr lang="pt-BR" dirty="0"/>
           </a:p>
@@ -1361,7 +1363,7 @@
             <a:spLocks noGrp="1"/>
           </p:cNvSpPr>
           <p:nvPr>
-            <p:ph type="sldNum" sz="quarter" idx="5"/>
+            <p:ph type="sldNum" sz="quarter" idx="10"/>
           </p:nvPr>
         </p:nvSpPr>
         <p:spPr/>
@@ -1371,7 +1373,7 @@
           <a:p>
             <a:fld id="{6FC8D850-966F-45A6-8DE7-15B891E7D40D}" type="slidenum">
               <a:rPr lang="pt-BR" smtClean="0"/>
-              <a:t>21</a:t>
+              <a:t>26</a:t>
             </a:fld>
             <a:endParaRPr lang="pt-BR"/>
           </a:p>
@@ -1380,7 +1382,7 @@
     </p:spTree>
     <p:extLst>
       <p:ext uri="{BB962C8B-B14F-4D97-AF65-F5344CB8AC3E}">
-        <p14:creationId xmlns:p14="http://schemas.microsoft.com/office/powerpoint/2010/main" val="928934584"/>
+        <p14:creationId xmlns:p14="http://schemas.microsoft.com/office/powerpoint/2010/main" val="3514141550"/>
       </p:ext>
     </p:extLst>
   </p:cSld>
@@ -1412,7 +1414,7 @@
           <p:cNvPr id="2" name="Título 1">
             <a:extLst>
               <a:ext uri="{FF2B5EF4-FFF2-40B4-BE49-F238E27FC236}">
-                <a16:creationId xmlns:a16="http://schemas.microsoft.com/office/drawing/2014/main" xmlns="" id="{1DB9B4FF-B06E-403C-A326-BDC64D8FF94E}"/>
+                <a16:creationId xmlns="" xmlns:a16="http://schemas.microsoft.com/office/drawing/2014/main" id="{1DB9B4FF-B06E-403C-A326-BDC64D8FF94E}"/>
               </a:ext>
             </a:extLst>
           </p:cNvPr>
@@ -1449,7 +1451,7 @@
           <p:cNvPr id="3" name="Subtítulo 2">
             <a:extLst>
               <a:ext uri="{FF2B5EF4-FFF2-40B4-BE49-F238E27FC236}">
-                <a16:creationId xmlns:a16="http://schemas.microsoft.com/office/drawing/2014/main" xmlns="" id="{247BDFCE-746E-45BF-A319-4733D58D1632}"/>
+                <a16:creationId xmlns="" xmlns:a16="http://schemas.microsoft.com/office/drawing/2014/main" id="{247BDFCE-746E-45BF-A319-4733D58D1632}"/>
               </a:ext>
             </a:extLst>
           </p:cNvPr>
@@ -1519,7 +1521,7 @@
           <p:cNvPr id="4" name="Espaço Reservado para Data 3">
             <a:extLst>
               <a:ext uri="{FF2B5EF4-FFF2-40B4-BE49-F238E27FC236}">
-                <a16:creationId xmlns:a16="http://schemas.microsoft.com/office/drawing/2014/main" xmlns="" id="{9EDE2778-5372-4104-B96D-968184DA8288}"/>
+                <a16:creationId xmlns="" xmlns:a16="http://schemas.microsoft.com/office/drawing/2014/main" id="{9EDE2778-5372-4104-B96D-968184DA8288}"/>
               </a:ext>
             </a:extLst>
           </p:cNvPr>
@@ -1537,7 +1539,7 @@
           <a:p>
             <a:fld id="{63289F7E-B80B-496E-81B4-D396C37C9454}" type="datetimeFigureOut">
               <a:rPr lang="pt-BR" smtClean="0"/>
-              <a:t>14/08/2025</a:t>
+              <a:t>28/02/2026</a:t>
             </a:fld>
             <a:endParaRPr lang="pt-BR"/>
           </a:p>
@@ -1548,7 +1550,7 @@
           <p:cNvPr id="5" name="Espaço Reservado para Rodapé 4">
             <a:extLst>
               <a:ext uri="{FF2B5EF4-FFF2-40B4-BE49-F238E27FC236}">
-                <a16:creationId xmlns:a16="http://schemas.microsoft.com/office/drawing/2014/main" xmlns="" id="{C1DD0F41-C861-4051-988D-3024A37A4B93}"/>
+                <a16:creationId xmlns="" xmlns:a16="http://schemas.microsoft.com/office/drawing/2014/main" id="{C1DD0F41-C861-4051-988D-3024A37A4B93}"/>
               </a:ext>
             </a:extLst>
           </p:cNvPr>
@@ -1573,7 +1575,7 @@
           <p:cNvPr id="6" name="Espaço Reservado para Número de Slide 5">
             <a:extLst>
               <a:ext uri="{FF2B5EF4-FFF2-40B4-BE49-F238E27FC236}">
-                <a16:creationId xmlns:a16="http://schemas.microsoft.com/office/drawing/2014/main" xmlns="" id="{07E5967E-D980-431A-A5DB-3F0C5030A81E}"/>
+                <a16:creationId xmlns="" xmlns:a16="http://schemas.microsoft.com/office/drawing/2014/main" id="{07E5967E-D980-431A-A5DB-3F0C5030A81E}"/>
               </a:ext>
             </a:extLst>
           </p:cNvPr>
@@ -1632,7 +1634,7 @@
           <p:cNvPr id="2" name="Título 1">
             <a:extLst>
               <a:ext uri="{FF2B5EF4-FFF2-40B4-BE49-F238E27FC236}">
-                <a16:creationId xmlns:a16="http://schemas.microsoft.com/office/drawing/2014/main" xmlns="" id="{9036C49F-3E68-4175-81BA-3C3FEE44308A}"/>
+                <a16:creationId xmlns="" xmlns:a16="http://schemas.microsoft.com/office/drawing/2014/main" id="{9036C49F-3E68-4175-81BA-3C3FEE44308A}"/>
               </a:ext>
             </a:extLst>
           </p:cNvPr>
@@ -1660,7 +1662,7 @@
           <p:cNvPr id="3" name="Espaço Reservado para Texto Vertical 2">
             <a:extLst>
               <a:ext uri="{FF2B5EF4-FFF2-40B4-BE49-F238E27FC236}">
-                <a16:creationId xmlns:a16="http://schemas.microsoft.com/office/drawing/2014/main" xmlns="" id="{426FA736-3DD3-4D4E-B57B-BBE1D8F7D424}"/>
+                <a16:creationId xmlns="" xmlns:a16="http://schemas.microsoft.com/office/drawing/2014/main" id="{426FA736-3DD3-4D4E-B57B-BBE1D8F7D424}"/>
               </a:ext>
             </a:extLst>
           </p:cNvPr>
@@ -1717,7 +1719,7 @@
           <p:cNvPr id="4" name="Espaço Reservado para Data 3">
             <a:extLst>
               <a:ext uri="{FF2B5EF4-FFF2-40B4-BE49-F238E27FC236}">
-                <a16:creationId xmlns:a16="http://schemas.microsoft.com/office/drawing/2014/main" xmlns="" id="{99E8855C-D8FD-48F6-B14E-861E0DE4D915}"/>
+                <a16:creationId xmlns="" xmlns:a16="http://schemas.microsoft.com/office/drawing/2014/main" id="{99E8855C-D8FD-48F6-B14E-861E0DE4D915}"/>
               </a:ext>
             </a:extLst>
           </p:cNvPr>
@@ -1735,7 +1737,7 @@
           <a:p>
             <a:fld id="{63289F7E-B80B-496E-81B4-D396C37C9454}" type="datetimeFigureOut">
               <a:rPr lang="pt-BR" smtClean="0"/>
-              <a:t>14/08/2025</a:t>
+              <a:t>28/02/2026</a:t>
             </a:fld>
             <a:endParaRPr lang="pt-BR"/>
           </a:p>
@@ -1746,7 +1748,7 @@
           <p:cNvPr id="5" name="Espaço Reservado para Rodapé 4">
             <a:extLst>
               <a:ext uri="{FF2B5EF4-FFF2-40B4-BE49-F238E27FC236}">
-                <a16:creationId xmlns:a16="http://schemas.microsoft.com/office/drawing/2014/main" xmlns="" id="{97C0BB88-2F21-42A5-ACFF-83DA47F2D340}"/>
+                <a16:creationId xmlns="" xmlns:a16="http://schemas.microsoft.com/office/drawing/2014/main" id="{97C0BB88-2F21-42A5-ACFF-83DA47F2D340}"/>
               </a:ext>
             </a:extLst>
           </p:cNvPr>
@@ -1771,7 +1773,7 @@
           <p:cNvPr id="6" name="Espaço Reservado para Número de Slide 5">
             <a:extLst>
               <a:ext uri="{FF2B5EF4-FFF2-40B4-BE49-F238E27FC236}">
-                <a16:creationId xmlns:a16="http://schemas.microsoft.com/office/drawing/2014/main" xmlns="" id="{6CB462B3-1F22-4C05-B4B8-7A279FB7D5E9}"/>
+                <a16:creationId xmlns="" xmlns:a16="http://schemas.microsoft.com/office/drawing/2014/main" id="{6CB462B3-1F22-4C05-B4B8-7A279FB7D5E9}"/>
               </a:ext>
             </a:extLst>
           </p:cNvPr>
@@ -1830,7 +1832,7 @@
           <p:cNvPr id="2" name="Título Vertical 1">
             <a:extLst>
               <a:ext uri="{FF2B5EF4-FFF2-40B4-BE49-F238E27FC236}">
-                <a16:creationId xmlns:a16="http://schemas.microsoft.com/office/drawing/2014/main" xmlns="" id="{EAEAB728-701C-4207-A9D5-23FF45C60502}"/>
+                <a16:creationId xmlns="" xmlns:a16="http://schemas.microsoft.com/office/drawing/2014/main" id="{EAEAB728-701C-4207-A9D5-23FF45C60502}"/>
               </a:ext>
             </a:extLst>
           </p:cNvPr>
@@ -1863,7 +1865,7 @@
           <p:cNvPr id="3" name="Espaço Reservado para Texto Vertical 2">
             <a:extLst>
               <a:ext uri="{FF2B5EF4-FFF2-40B4-BE49-F238E27FC236}">
-                <a16:creationId xmlns:a16="http://schemas.microsoft.com/office/drawing/2014/main" xmlns="" id="{BA8C8CCF-7823-480A-9A19-0F664DD17E3B}"/>
+                <a16:creationId xmlns="" xmlns:a16="http://schemas.microsoft.com/office/drawing/2014/main" id="{BA8C8CCF-7823-480A-9A19-0F664DD17E3B}"/>
               </a:ext>
             </a:extLst>
           </p:cNvPr>
@@ -1925,7 +1927,7 @@
           <p:cNvPr id="4" name="Espaço Reservado para Data 3">
             <a:extLst>
               <a:ext uri="{FF2B5EF4-FFF2-40B4-BE49-F238E27FC236}">
-                <a16:creationId xmlns:a16="http://schemas.microsoft.com/office/drawing/2014/main" xmlns="" id="{721D5734-7B1F-425D-942F-6EB73344027C}"/>
+                <a16:creationId xmlns="" xmlns:a16="http://schemas.microsoft.com/office/drawing/2014/main" id="{721D5734-7B1F-425D-942F-6EB73344027C}"/>
               </a:ext>
             </a:extLst>
           </p:cNvPr>
@@ -1943,7 +1945,7 @@
           <a:p>
             <a:fld id="{63289F7E-B80B-496E-81B4-D396C37C9454}" type="datetimeFigureOut">
               <a:rPr lang="pt-BR" smtClean="0"/>
-              <a:t>14/08/2025</a:t>
+              <a:t>28/02/2026</a:t>
             </a:fld>
             <a:endParaRPr lang="pt-BR"/>
           </a:p>
@@ -1954,7 +1956,7 @@
           <p:cNvPr id="5" name="Espaço Reservado para Rodapé 4">
             <a:extLst>
               <a:ext uri="{FF2B5EF4-FFF2-40B4-BE49-F238E27FC236}">
-                <a16:creationId xmlns:a16="http://schemas.microsoft.com/office/drawing/2014/main" xmlns="" id="{1E1AAEAC-F08D-45FE-89EC-B1B349A868C9}"/>
+                <a16:creationId xmlns="" xmlns:a16="http://schemas.microsoft.com/office/drawing/2014/main" id="{1E1AAEAC-F08D-45FE-89EC-B1B349A868C9}"/>
               </a:ext>
             </a:extLst>
           </p:cNvPr>
@@ -1979,7 +1981,7 @@
           <p:cNvPr id="6" name="Espaço Reservado para Número de Slide 5">
             <a:extLst>
               <a:ext uri="{FF2B5EF4-FFF2-40B4-BE49-F238E27FC236}">
-                <a16:creationId xmlns:a16="http://schemas.microsoft.com/office/drawing/2014/main" xmlns="" id="{BAA44493-9911-47B2-87A6-C2141A972BC8}"/>
+                <a16:creationId xmlns="" xmlns:a16="http://schemas.microsoft.com/office/drawing/2014/main" id="{BAA44493-9911-47B2-87A6-C2141A972BC8}"/>
               </a:ext>
             </a:extLst>
           </p:cNvPr>
@@ -2038,7 +2040,7 @@
           <p:cNvPr id="2" name="Título 1">
             <a:extLst>
               <a:ext uri="{FF2B5EF4-FFF2-40B4-BE49-F238E27FC236}">
-                <a16:creationId xmlns:a16="http://schemas.microsoft.com/office/drawing/2014/main" xmlns="" id="{71BD44A5-8F21-4626-A01D-48A1C874B1D5}"/>
+                <a16:creationId xmlns="" xmlns:a16="http://schemas.microsoft.com/office/drawing/2014/main" id="{71BD44A5-8F21-4626-A01D-48A1C874B1D5}"/>
               </a:ext>
             </a:extLst>
           </p:cNvPr>
@@ -2066,7 +2068,7 @@
           <p:cNvPr id="3" name="Espaço Reservado para Conteúdo 2">
             <a:extLst>
               <a:ext uri="{FF2B5EF4-FFF2-40B4-BE49-F238E27FC236}">
-                <a16:creationId xmlns:a16="http://schemas.microsoft.com/office/drawing/2014/main" xmlns="" id="{B79E8085-65A9-48AA-951D-71D978BFF4ED}"/>
+                <a16:creationId xmlns="" xmlns:a16="http://schemas.microsoft.com/office/drawing/2014/main" id="{B79E8085-65A9-48AA-951D-71D978BFF4ED}"/>
               </a:ext>
             </a:extLst>
           </p:cNvPr>
@@ -2123,7 +2125,7 @@
           <p:cNvPr id="4" name="Espaço Reservado para Data 3">
             <a:extLst>
               <a:ext uri="{FF2B5EF4-FFF2-40B4-BE49-F238E27FC236}">
-                <a16:creationId xmlns:a16="http://schemas.microsoft.com/office/drawing/2014/main" xmlns="" id="{F05BE1AF-51EA-425D-B188-DE7BD675009F}"/>
+                <a16:creationId xmlns="" xmlns:a16="http://schemas.microsoft.com/office/drawing/2014/main" id="{F05BE1AF-51EA-425D-B188-DE7BD675009F}"/>
               </a:ext>
             </a:extLst>
           </p:cNvPr>
@@ -2141,7 +2143,7 @@
           <a:p>
             <a:fld id="{63289F7E-B80B-496E-81B4-D396C37C9454}" type="datetimeFigureOut">
               <a:rPr lang="pt-BR" smtClean="0"/>
-              <a:t>14/08/2025</a:t>
+              <a:t>28/02/2026</a:t>
             </a:fld>
             <a:endParaRPr lang="pt-BR"/>
           </a:p>
@@ -2152,7 +2154,7 @@
           <p:cNvPr id="5" name="Espaço Reservado para Rodapé 4">
             <a:extLst>
               <a:ext uri="{FF2B5EF4-FFF2-40B4-BE49-F238E27FC236}">
-                <a16:creationId xmlns:a16="http://schemas.microsoft.com/office/drawing/2014/main" xmlns="" id="{121BE632-29CF-4CB9-B365-C9EF38F89BE6}"/>
+                <a16:creationId xmlns="" xmlns:a16="http://schemas.microsoft.com/office/drawing/2014/main" id="{121BE632-29CF-4CB9-B365-C9EF38F89BE6}"/>
               </a:ext>
             </a:extLst>
           </p:cNvPr>
@@ -2177,7 +2179,7 @@
           <p:cNvPr id="6" name="Espaço Reservado para Número de Slide 5">
             <a:extLst>
               <a:ext uri="{FF2B5EF4-FFF2-40B4-BE49-F238E27FC236}">
-                <a16:creationId xmlns:a16="http://schemas.microsoft.com/office/drawing/2014/main" xmlns="" id="{60CF3DD1-9AEC-4A57-B461-4E4DD86FAC18}"/>
+                <a16:creationId xmlns="" xmlns:a16="http://schemas.microsoft.com/office/drawing/2014/main" id="{60CF3DD1-9AEC-4A57-B461-4E4DD86FAC18}"/>
               </a:ext>
             </a:extLst>
           </p:cNvPr>
@@ -2236,7 +2238,7 @@
           <p:cNvPr id="2" name="Título 1">
             <a:extLst>
               <a:ext uri="{FF2B5EF4-FFF2-40B4-BE49-F238E27FC236}">
-                <a16:creationId xmlns:a16="http://schemas.microsoft.com/office/drawing/2014/main" xmlns="" id="{34AB2FF0-A4D7-4E28-991D-FF26140D5988}"/>
+                <a16:creationId xmlns="" xmlns:a16="http://schemas.microsoft.com/office/drawing/2014/main" id="{34AB2FF0-A4D7-4E28-991D-FF26140D5988}"/>
               </a:ext>
             </a:extLst>
           </p:cNvPr>
@@ -2273,7 +2275,7 @@
           <p:cNvPr id="3" name="Espaço Reservado para Texto 2">
             <a:extLst>
               <a:ext uri="{FF2B5EF4-FFF2-40B4-BE49-F238E27FC236}">
-                <a16:creationId xmlns:a16="http://schemas.microsoft.com/office/drawing/2014/main" xmlns="" id="{E2AC45B0-4145-40DB-8E61-105461170604}"/>
+                <a16:creationId xmlns="" xmlns:a16="http://schemas.microsoft.com/office/drawing/2014/main" id="{E2AC45B0-4145-40DB-8E61-105461170604}"/>
               </a:ext>
             </a:extLst>
           </p:cNvPr>
@@ -2398,7 +2400,7 @@
           <p:cNvPr id="4" name="Espaço Reservado para Data 3">
             <a:extLst>
               <a:ext uri="{FF2B5EF4-FFF2-40B4-BE49-F238E27FC236}">
-                <a16:creationId xmlns:a16="http://schemas.microsoft.com/office/drawing/2014/main" xmlns="" id="{50F1D3FB-740A-4EBA-A309-2CE71D12ECFB}"/>
+                <a16:creationId xmlns="" xmlns:a16="http://schemas.microsoft.com/office/drawing/2014/main" id="{50F1D3FB-740A-4EBA-A309-2CE71D12ECFB}"/>
               </a:ext>
             </a:extLst>
           </p:cNvPr>
@@ -2416,7 +2418,7 @@
           <a:p>
             <a:fld id="{63289F7E-B80B-496E-81B4-D396C37C9454}" type="datetimeFigureOut">
               <a:rPr lang="pt-BR" smtClean="0"/>
-              <a:t>14/08/2025</a:t>
+              <a:t>28/02/2026</a:t>
             </a:fld>
             <a:endParaRPr lang="pt-BR"/>
           </a:p>
@@ -2427,7 +2429,7 @@
           <p:cNvPr id="5" name="Espaço Reservado para Rodapé 4">
             <a:extLst>
               <a:ext uri="{FF2B5EF4-FFF2-40B4-BE49-F238E27FC236}">
-                <a16:creationId xmlns:a16="http://schemas.microsoft.com/office/drawing/2014/main" xmlns="" id="{BDCAB18F-8715-4465-A940-F9C193A2ACE9}"/>
+                <a16:creationId xmlns="" xmlns:a16="http://schemas.microsoft.com/office/drawing/2014/main" id="{BDCAB18F-8715-4465-A940-F9C193A2ACE9}"/>
               </a:ext>
             </a:extLst>
           </p:cNvPr>
@@ -2452,7 +2454,7 @@
           <p:cNvPr id="6" name="Espaço Reservado para Número de Slide 5">
             <a:extLst>
               <a:ext uri="{FF2B5EF4-FFF2-40B4-BE49-F238E27FC236}">
-                <a16:creationId xmlns:a16="http://schemas.microsoft.com/office/drawing/2014/main" xmlns="" id="{353466C6-8248-429F-8056-FF040BF509EB}"/>
+                <a16:creationId xmlns="" xmlns:a16="http://schemas.microsoft.com/office/drawing/2014/main" id="{353466C6-8248-429F-8056-FF040BF509EB}"/>
               </a:ext>
             </a:extLst>
           </p:cNvPr>
@@ -2511,7 +2513,7 @@
           <p:cNvPr id="2" name="Título 1">
             <a:extLst>
               <a:ext uri="{FF2B5EF4-FFF2-40B4-BE49-F238E27FC236}">
-                <a16:creationId xmlns:a16="http://schemas.microsoft.com/office/drawing/2014/main" xmlns="" id="{BC7BB9F0-F14B-4A91-B2B7-35BC47FE4DE7}"/>
+                <a16:creationId xmlns="" xmlns:a16="http://schemas.microsoft.com/office/drawing/2014/main" id="{BC7BB9F0-F14B-4A91-B2B7-35BC47FE4DE7}"/>
               </a:ext>
             </a:extLst>
           </p:cNvPr>
@@ -2539,7 +2541,7 @@
           <p:cNvPr id="3" name="Espaço Reservado para Conteúdo 2">
             <a:extLst>
               <a:ext uri="{FF2B5EF4-FFF2-40B4-BE49-F238E27FC236}">
-                <a16:creationId xmlns:a16="http://schemas.microsoft.com/office/drawing/2014/main" xmlns="" id="{EC1FC1C4-73DA-47A6-8496-B0B457F7D39A}"/>
+                <a16:creationId xmlns="" xmlns:a16="http://schemas.microsoft.com/office/drawing/2014/main" id="{EC1FC1C4-73DA-47A6-8496-B0B457F7D39A}"/>
               </a:ext>
             </a:extLst>
           </p:cNvPr>
@@ -2601,7 +2603,7 @@
           <p:cNvPr id="4" name="Espaço Reservado para Conteúdo 3">
             <a:extLst>
               <a:ext uri="{FF2B5EF4-FFF2-40B4-BE49-F238E27FC236}">
-                <a16:creationId xmlns:a16="http://schemas.microsoft.com/office/drawing/2014/main" xmlns="" id="{E92F06A8-A449-4D92-9912-76873E529B38}"/>
+                <a16:creationId xmlns="" xmlns:a16="http://schemas.microsoft.com/office/drawing/2014/main" id="{E92F06A8-A449-4D92-9912-76873E529B38}"/>
               </a:ext>
             </a:extLst>
           </p:cNvPr>
@@ -2663,7 +2665,7 @@
           <p:cNvPr id="5" name="Espaço Reservado para Data 4">
             <a:extLst>
               <a:ext uri="{FF2B5EF4-FFF2-40B4-BE49-F238E27FC236}">
-                <a16:creationId xmlns:a16="http://schemas.microsoft.com/office/drawing/2014/main" xmlns="" id="{938070A4-BC2F-4D55-BD8D-DEAF11BB9EE9}"/>
+                <a16:creationId xmlns="" xmlns:a16="http://schemas.microsoft.com/office/drawing/2014/main" id="{938070A4-BC2F-4D55-BD8D-DEAF11BB9EE9}"/>
               </a:ext>
             </a:extLst>
           </p:cNvPr>
@@ -2681,7 +2683,7 @@
           <a:p>
             <a:fld id="{63289F7E-B80B-496E-81B4-D396C37C9454}" type="datetimeFigureOut">
               <a:rPr lang="pt-BR" smtClean="0"/>
-              <a:t>14/08/2025</a:t>
+              <a:t>28/02/2026</a:t>
             </a:fld>
             <a:endParaRPr lang="pt-BR"/>
           </a:p>
@@ -2692,7 +2694,7 @@
           <p:cNvPr id="6" name="Espaço Reservado para Rodapé 5">
             <a:extLst>
               <a:ext uri="{FF2B5EF4-FFF2-40B4-BE49-F238E27FC236}">
-                <a16:creationId xmlns:a16="http://schemas.microsoft.com/office/drawing/2014/main" xmlns="" id="{45CC2DB8-844A-465F-BA9A-7734C80C7F43}"/>
+                <a16:creationId xmlns="" xmlns:a16="http://schemas.microsoft.com/office/drawing/2014/main" id="{45CC2DB8-844A-465F-BA9A-7734C80C7F43}"/>
               </a:ext>
             </a:extLst>
           </p:cNvPr>
@@ -2717,7 +2719,7 @@
           <p:cNvPr id="7" name="Espaço Reservado para Número de Slide 6">
             <a:extLst>
               <a:ext uri="{FF2B5EF4-FFF2-40B4-BE49-F238E27FC236}">
-                <a16:creationId xmlns:a16="http://schemas.microsoft.com/office/drawing/2014/main" xmlns="" id="{4CC606A8-097B-4040-94E0-CD8C88280D8F}"/>
+                <a16:creationId xmlns="" xmlns:a16="http://schemas.microsoft.com/office/drawing/2014/main" id="{4CC606A8-097B-4040-94E0-CD8C88280D8F}"/>
               </a:ext>
             </a:extLst>
           </p:cNvPr>
@@ -2776,7 +2778,7 @@
           <p:cNvPr id="2" name="Título 1">
             <a:extLst>
               <a:ext uri="{FF2B5EF4-FFF2-40B4-BE49-F238E27FC236}">
-                <a16:creationId xmlns:a16="http://schemas.microsoft.com/office/drawing/2014/main" xmlns="" id="{76D66686-0143-4CB6-8C09-BA326F1E7ACA}"/>
+                <a16:creationId xmlns="" xmlns:a16="http://schemas.microsoft.com/office/drawing/2014/main" id="{76D66686-0143-4CB6-8C09-BA326F1E7ACA}"/>
               </a:ext>
             </a:extLst>
           </p:cNvPr>
@@ -2809,7 +2811,7 @@
           <p:cNvPr id="3" name="Espaço Reservado para Texto 2">
             <a:extLst>
               <a:ext uri="{FF2B5EF4-FFF2-40B4-BE49-F238E27FC236}">
-                <a16:creationId xmlns:a16="http://schemas.microsoft.com/office/drawing/2014/main" xmlns="" id="{0227AB85-F59E-4BCE-B846-4FA0992C2F23}"/>
+                <a16:creationId xmlns="" xmlns:a16="http://schemas.microsoft.com/office/drawing/2014/main" id="{0227AB85-F59E-4BCE-B846-4FA0992C2F23}"/>
               </a:ext>
             </a:extLst>
           </p:cNvPr>
@@ -2880,7 +2882,7 @@
           <p:cNvPr id="4" name="Espaço Reservado para Conteúdo 3">
             <a:extLst>
               <a:ext uri="{FF2B5EF4-FFF2-40B4-BE49-F238E27FC236}">
-                <a16:creationId xmlns:a16="http://schemas.microsoft.com/office/drawing/2014/main" xmlns="" id="{3373456C-7319-4D0A-827D-D29F6B083F5D}"/>
+                <a16:creationId xmlns="" xmlns:a16="http://schemas.microsoft.com/office/drawing/2014/main" id="{3373456C-7319-4D0A-827D-D29F6B083F5D}"/>
               </a:ext>
             </a:extLst>
           </p:cNvPr>
@@ -2942,7 +2944,7 @@
           <p:cNvPr id="5" name="Espaço Reservado para Texto 4">
             <a:extLst>
               <a:ext uri="{FF2B5EF4-FFF2-40B4-BE49-F238E27FC236}">
-                <a16:creationId xmlns:a16="http://schemas.microsoft.com/office/drawing/2014/main" xmlns="" id="{4CD109D0-2E83-4262-8029-A871CEC47406}"/>
+                <a16:creationId xmlns="" xmlns:a16="http://schemas.microsoft.com/office/drawing/2014/main" id="{4CD109D0-2E83-4262-8029-A871CEC47406}"/>
               </a:ext>
             </a:extLst>
           </p:cNvPr>
@@ -3013,7 +3015,7 @@
           <p:cNvPr id="6" name="Espaço Reservado para Conteúdo 5">
             <a:extLst>
               <a:ext uri="{FF2B5EF4-FFF2-40B4-BE49-F238E27FC236}">
-                <a16:creationId xmlns:a16="http://schemas.microsoft.com/office/drawing/2014/main" xmlns="" id="{AD706E3A-CFBB-4A6C-A65F-D0360A9E74FE}"/>
+                <a16:creationId xmlns="" xmlns:a16="http://schemas.microsoft.com/office/drawing/2014/main" id="{AD706E3A-CFBB-4A6C-A65F-D0360A9E74FE}"/>
               </a:ext>
             </a:extLst>
           </p:cNvPr>
@@ -3075,7 +3077,7 @@
           <p:cNvPr id="7" name="Espaço Reservado para Data 6">
             <a:extLst>
               <a:ext uri="{FF2B5EF4-FFF2-40B4-BE49-F238E27FC236}">
-                <a16:creationId xmlns:a16="http://schemas.microsoft.com/office/drawing/2014/main" xmlns="" id="{4172C0E5-5AF0-4805-BB51-443733CD2BD5}"/>
+                <a16:creationId xmlns="" xmlns:a16="http://schemas.microsoft.com/office/drawing/2014/main" id="{4172C0E5-5AF0-4805-BB51-443733CD2BD5}"/>
               </a:ext>
             </a:extLst>
           </p:cNvPr>
@@ -3093,7 +3095,7 @@
           <a:p>
             <a:fld id="{63289F7E-B80B-496E-81B4-D396C37C9454}" type="datetimeFigureOut">
               <a:rPr lang="pt-BR" smtClean="0"/>
-              <a:t>14/08/2025</a:t>
+              <a:t>28/02/2026</a:t>
             </a:fld>
             <a:endParaRPr lang="pt-BR"/>
           </a:p>
@@ -3104,7 +3106,7 @@
           <p:cNvPr id="8" name="Espaço Reservado para Rodapé 7">
             <a:extLst>
               <a:ext uri="{FF2B5EF4-FFF2-40B4-BE49-F238E27FC236}">
-                <a16:creationId xmlns:a16="http://schemas.microsoft.com/office/drawing/2014/main" xmlns="" id="{0E801648-156F-497E-99CF-797DF48051E1}"/>
+                <a16:creationId xmlns="" xmlns:a16="http://schemas.microsoft.com/office/drawing/2014/main" id="{0E801648-156F-497E-99CF-797DF48051E1}"/>
               </a:ext>
             </a:extLst>
           </p:cNvPr>
@@ -3129,7 +3131,7 @@
           <p:cNvPr id="9" name="Espaço Reservado para Número de Slide 8">
             <a:extLst>
               <a:ext uri="{FF2B5EF4-FFF2-40B4-BE49-F238E27FC236}">
-                <a16:creationId xmlns:a16="http://schemas.microsoft.com/office/drawing/2014/main" xmlns="" id="{EEE23D32-80E7-4796-A137-66BF842E4B53}"/>
+                <a16:creationId xmlns="" xmlns:a16="http://schemas.microsoft.com/office/drawing/2014/main" id="{EEE23D32-80E7-4796-A137-66BF842E4B53}"/>
               </a:ext>
             </a:extLst>
           </p:cNvPr>
@@ -3188,7 +3190,7 @@
           <p:cNvPr id="2" name="Título 1">
             <a:extLst>
               <a:ext uri="{FF2B5EF4-FFF2-40B4-BE49-F238E27FC236}">
-                <a16:creationId xmlns:a16="http://schemas.microsoft.com/office/drawing/2014/main" xmlns="" id="{2BCE2379-C78F-47E1-8CFC-B846E7AF148D}"/>
+                <a16:creationId xmlns="" xmlns:a16="http://schemas.microsoft.com/office/drawing/2014/main" id="{2BCE2379-C78F-47E1-8CFC-B846E7AF148D}"/>
               </a:ext>
             </a:extLst>
           </p:cNvPr>
@@ -3216,7 +3218,7 @@
           <p:cNvPr id="3" name="Espaço Reservado para Data 2">
             <a:extLst>
               <a:ext uri="{FF2B5EF4-FFF2-40B4-BE49-F238E27FC236}">
-                <a16:creationId xmlns:a16="http://schemas.microsoft.com/office/drawing/2014/main" xmlns="" id="{342600A9-7F92-4E22-9D94-E4717252A817}"/>
+                <a16:creationId xmlns="" xmlns:a16="http://schemas.microsoft.com/office/drawing/2014/main" id="{342600A9-7F92-4E22-9D94-E4717252A817}"/>
               </a:ext>
             </a:extLst>
           </p:cNvPr>
@@ -3234,7 +3236,7 @@
           <a:p>
             <a:fld id="{63289F7E-B80B-496E-81B4-D396C37C9454}" type="datetimeFigureOut">
               <a:rPr lang="pt-BR" smtClean="0"/>
-              <a:t>14/08/2025</a:t>
+              <a:t>28/02/2026</a:t>
             </a:fld>
             <a:endParaRPr lang="pt-BR"/>
           </a:p>
@@ -3245,7 +3247,7 @@
           <p:cNvPr id="4" name="Espaço Reservado para Rodapé 3">
             <a:extLst>
               <a:ext uri="{FF2B5EF4-FFF2-40B4-BE49-F238E27FC236}">
-                <a16:creationId xmlns:a16="http://schemas.microsoft.com/office/drawing/2014/main" xmlns="" id="{192E6BED-F546-40CC-A2DF-99CBA853654E}"/>
+                <a16:creationId xmlns="" xmlns:a16="http://schemas.microsoft.com/office/drawing/2014/main" id="{192E6BED-F546-40CC-A2DF-99CBA853654E}"/>
               </a:ext>
             </a:extLst>
           </p:cNvPr>
@@ -3270,7 +3272,7 @@
           <p:cNvPr id="5" name="Espaço Reservado para Número de Slide 4">
             <a:extLst>
               <a:ext uri="{FF2B5EF4-FFF2-40B4-BE49-F238E27FC236}">
-                <a16:creationId xmlns:a16="http://schemas.microsoft.com/office/drawing/2014/main" xmlns="" id="{6091CC40-A8C4-4063-80EB-CC5099621678}"/>
+                <a16:creationId xmlns="" xmlns:a16="http://schemas.microsoft.com/office/drawing/2014/main" id="{6091CC40-A8C4-4063-80EB-CC5099621678}"/>
               </a:ext>
             </a:extLst>
           </p:cNvPr>
@@ -3329,7 +3331,7 @@
           <p:cNvPr id="2" name="Espaço Reservado para Data 1">
             <a:extLst>
               <a:ext uri="{FF2B5EF4-FFF2-40B4-BE49-F238E27FC236}">
-                <a16:creationId xmlns:a16="http://schemas.microsoft.com/office/drawing/2014/main" xmlns="" id="{DD19515C-212C-4EAE-84A3-8FF4BC844F1B}"/>
+                <a16:creationId xmlns="" xmlns:a16="http://schemas.microsoft.com/office/drawing/2014/main" id="{DD19515C-212C-4EAE-84A3-8FF4BC844F1B}"/>
               </a:ext>
             </a:extLst>
           </p:cNvPr>
@@ -3347,7 +3349,7 @@
           <a:p>
             <a:fld id="{63289F7E-B80B-496E-81B4-D396C37C9454}" type="datetimeFigureOut">
               <a:rPr lang="pt-BR" smtClean="0"/>
-              <a:t>14/08/2025</a:t>
+              <a:t>28/02/2026</a:t>
             </a:fld>
             <a:endParaRPr lang="pt-BR"/>
           </a:p>
@@ -3358,7 +3360,7 @@
           <p:cNvPr id="3" name="Espaço Reservado para Rodapé 2">
             <a:extLst>
               <a:ext uri="{FF2B5EF4-FFF2-40B4-BE49-F238E27FC236}">
-                <a16:creationId xmlns:a16="http://schemas.microsoft.com/office/drawing/2014/main" xmlns="" id="{94D3D120-B3E8-4C96-861D-7A4F12F49B3A}"/>
+                <a16:creationId xmlns="" xmlns:a16="http://schemas.microsoft.com/office/drawing/2014/main" id="{94D3D120-B3E8-4C96-861D-7A4F12F49B3A}"/>
               </a:ext>
             </a:extLst>
           </p:cNvPr>
@@ -3383,7 +3385,7 @@
           <p:cNvPr id="4" name="Espaço Reservado para Número de Slide 3">
             <a:extLst>
               <a:ext uri="{FF2B5EF4-FFF2-40B4-BE49-F238E27FC236}">
-                <a16:creationId xmlns:a16="http://schemas.microsoft.com/office/drawing/2014/main" xmlns="" id="{42E49B68-FA1B-468B-9F17-D5C09243D454}"/>
+                <a16:creationId xmlns="" xmlns:a16="http://schemas.microsoft.com/office/drawing/2014/main" id="{42E49B68-FA1B-468B-9F17-D5C09243D454}"/>
               </a:ext>
             </a:extLst>
           </p:cNvPr>
@@ -3442,7 +3444,7 @@
           <p:cNvPr id="2" name="Título 1">
             <a:extLst>
               <a:ext uri="{FF2B5EF4-FFF2-40B4-BE49-F238E27FC236}">
-                <a16:creationId xmlns:a16="http://schemas.microsoft.com/office/drawing/2014/main" xmlns="" id="{1C17BCBE-A897-4319-85EC-D87909C24980}"/>
+                <a16:creationId xmlns="" xmlns:a16="http://schemas.microsoft.com/office/drawing/2014/main" id="{1C17BCBE-A897-4319-85EC-D87909C24980}"/>
               </a:ext>
             </a:extLst>
           </p:cNvPr>
@@ -3479,7 +3481,7 @@
           <p:cNvPr id="3" name="Espaço Reservado para Conteúdo 2">
             <a:extLst>
               <a:ext uri="{FF2B5EF4-FFF2-40B4-BE49-F238E27FC236}">
-                <a16:creationId xmlns:a16="http://schemas.microsoft.com/office/drawing/2014/main" xmlns="" id="{4226F885-0204-4913-868B-4B8B82576F17}"/>
+                <a16:creationId xmlns="" xmlns:a16="http://schemas.microsoft.com/office/drawing/2014/main" id="{4226F885-0204-4913-868B-4B8B82576F17}"/>
               </a:ext>
             </a:extLst>
           </p:cNvPr>
@@ -3569,7 +3571,7 @@
           <p:cNvPr id="4" name="Espaço Reservado para Texto 3">
             <a:extLst>
               <a:ext uri="{FF2B5EF4-FFF2-40B4-BE49-F238E27FC236}">
-                <a16:creationId xmlns:a16="http://schemas.microsoft.com/office/drawing/2014/main" xmlns="" id="{00F9F784-A858-441B-8AB5-697098141751}"/>
+                <a16:creationId xmlns="" xmlns:a16="http://schemas.microsoft.com/office/drawing/2014/main" id="{00F9F784-A858-441B-8AB5-697098141751}"/>
               </a:ext>
             </a:extLst>
           </p:cNvPr>
@@ -3640,7 +3642,7 @@
           <p:cNvPr id="5" name="Espaço Reservado para Data 4">
             <a:extLst>
               <a:ext uri="{FF2B5EF4-FFF2-40B4-BE49-F238E27FC236}">
-                <a16:creationId xmlns:a16="http://schemas.microsoft.com/office/drawing/2014/main" xmlns="" id="{A4DC363A-5000-472E-8B17-02E7DCB8840A}"/>
+                <a16:creationId xmlns="" xmlns:a16="http://schemas.microsoft.com/office/drawing/2014/main" id="{A4DC363A-5000-472E-8B17-02E7DCB8840A}"/>
               </a:ext>
             </a:extLst>
           </p:cNvPr>
@@ -3658,7 +3660,7 @@
           <a:p>
             <a:fld id="{63289F7E-B80B-496E-81B4-D396C37C9454}" type="datetimeFigureOut">
               <a:rPr lang="pt-BR" smtClean="0"/>
-              <a:t>14/08/2025</a:t>
+              <a:t>28/02/2026</a:t>
             </a:fld>
             <a:endParaRPr lang="pt-BR"/>
           </a:p>
@@ -3669,7 +3671,7 @@
           <p:cNvPr id="6" name="Espaço Reservado para Rodapé 5">
             <a:extLst>
               <a:ext uri="{FF2B5EF4-FFF2-40B4-BE49-F238E27FC236}">
-                <a16:creationId xmlns:a16="http://schemas.microsoft.com/office/drawing/2014/main" xmlns="" id="{5548425D-2C21-4C56-BAD4-662978775C28}"/>
+                <a16:creationId xmlns="" xmlns:a16="http://schemas.microsoft.com/office/drawing/2014/main" id="{5548425D-2C21-4C56-BAD4-662978775C28}"/>
               </a:ext>
             </a:extLst>
           </p:cNvPr>
@@ -3694,7 +3696,7 @@
           <p:cNvPr id="7" name="Espaço Reservado para Número de Slide 6">
             <a:extLst>
               <a:ext uri="{FF2B5EF4-FFF2-40B4-BE49-F238E27FC236}">
-                <a16:creationId xmlns:a16="http://schemas.microsoft.com/office/drawing/2014/main" xmlns="" id="{C63E9726-E64C-42B2-AE8A-8C235A956B48}"/>
+                <a16:creationId xmlns="" xmlns:a16="http://schemas.microsoft.com/office/drawing/2014/main" id="{C63E9726-E64C-42B2-AE8A-8C235A956B48}"/>
               </a:ext>
             </a:extLst>
           </p:cNvPr>
@@ -3753,7 +3755,7 @@
           <p:cNvPr id="2" name="Título 1">
             <a:extLst>
               <a:ext uri="{FF2B5EF4-FFF2-40B4-BE49-F238E27FC236}">
-                <a16:creationId xmlns:a16="http://schemas.microsoft.com/office/drawing/2014/main" xmlns="" id="{11086A78-3E74-450C-96A6-CA8AC37AF772}"/>
+                <a16:creationId xmlns="" xmlns:a16="http://schemas.microsoft.com/office/drawing/2014/main" id="{11086A78-3E74-450C-96A6-CA8AC37AF772}"/>
               </a:ext>
             </a:extLst>
           </p:cNvPr>
@@ -3790,7 +3792,7 @@
           <p:cNvPr id="3" name="Espaço Reservado para Imagem 2">
             <a:extLst>
               <a:ext uri="{FF2B5EF4-FFF2-40B4-BE49-F238E27FC236}">
-                <a16:creationId xmlns:a16="http://schemas.microsoft.com/office/drawing/2014/main" xmlns="" id="{5F5B7312-975A-4DBC-9B2F-3652ADA006FD}"/>
+                <a16:creationId xmlns="" xmlns:a16="http://schemas.microsoft.com/office/drawing/2014/main" id="{5F5B7312-975A-4DBC-9B2F-3652ADA006FD}"/>
               </a:ext>
             </a:extLst>
           </p:cNvPr>
@@ -3857,7 +3859,7 @@
           <p:cNvPr id="4" name="Espaço Reservado para Texto 3">
             <a:extLst>
               <a:ext uri="{FF2B5EF4-FFF2-40B4-BE49-F238E27FC236}">
-                <a16:creationId xmlns:a16="http://schemas.microsoft.com/office/drawing/2014/main" xmlns="" id="{AAF805F5-1DFF-41C6-944C-7D79FE0D0963}"/>
+                <a16:creationId xmlns="" xmlns:a16="http://schemas.microsoft.com/office/drawing/2014/main" id="{AAF805F5-1DFF-41C6-944C-7D79FE0D0963}"/>
               </a:ext>
             </a:extLst>
           </p:cNvPr>
@@ -3928,7 +3930,7 @@
           <p:cNvPr id="5" name="Espaço Reservado para Data 4">
             <a:extLst>
               <a:ext uri="{FF2B5EF4-FFF2-40B4-BE49-F238E27FC236}">
-                <a16:creationId xmlns:a16="http://schemas.microsoft.com/office/drawing/2014/main" xmlns="" id="{02113D81-8665-4516-BD81-C6A1F254EECD}"/>
+                <a16:creationId xmlns="" xmlns:a16="http://schemas.microsoft.com/office/drawing/2014/main" id="{02113D81-8665-4516-BD81-C6A1F254EECD}"/>
               </a:ext>
             </a:extLst>
           </p:cNvPr>
@@ -3946,7 +3948,7 @@
           <a:p>
             <a:fld id="{63289F7E-B80B-496E-81B4-D396C37C9454}" type="datetimeFigureOut">
               <a:rPr lang="pt-BR" smtClean="0"/>
-              <a:t>14/08/2025</a:t>
+              <a:t>28/02/2026</a:t>
             </a:fld>
             <a:endParaRPr lang="pt-BR"/>
           </a:p>
@@ -3957,7 +3959,7 @@
           <p:cNvPr id="6" name="Espaço Reservado para Rodapé 5">
             <a:extLst>
               <a:ext uri="{FF2B5EF4-FFF2-40B4-BE49-F238E27FC236}">
-                <a16:creationId xmlns:a16="http://schemas.microsoft.com/office/drawing/2014/main" xmlns="" id="{2B00C88B-FF32-40AA-A187-727D96FD7862}"/>
+                <a16:creationId xmlns="" xmlns:a16="http://schemas.microsoft.com/office/drawing/2014/main" id="{2B00C88B-FF32-40AA-A187-727D96FD7862}"/>
               </a:ext>
             </a:extLst>
           </p:cNvPr>
@@ -3982,7 +3984,7 @@
           <p:cNvPr id="7" name="Espaço Reservado para Número de Slide 6">
             <a:extLst>
               <a:ext uri="{FF2B5EF4-FFF2-40B4-BE49-F238E27FC236}">
-                <a16:creationId xmlns:a16="http://schemas.microsoft.com/office/drawing/2014/main" xmlns="" id="{A04D1A2D-69F7-4B8F-A730-BC26DC340BA6}"/>
+                <a16:creationId xmlns="" xmlns:a16="http://schemas.microsoft.com/office/drawing/2014/main" id="{A04D1A2D-69F7-4B8F-A730-BC26DC340BA6}"/>
               </a:ext>
             </a:extLst>
           </p:cNvPr>
@@ -4046,7 +4048,7 @@
           <p:cNvPr id="2" name="Espaço Reservado para Título 1">
             <a:extLst>
               <a:ext uri="{FF2B5EF4-FFF2-40B4-BE49-F238E27FC236}">
-                <a16:creationId xmlns:a16="http://schemas.microsoft.com/office/drawing/2014/main" xmlns="" id="{E69A0273-1966-4A1B-9370-4C1CE5036371}"/>
+                <a16:creationId xmlns="" xmlns:a16="http://schemas.microsoft.com/office/drawing/2014/main" id="{E69A0273-1966-4A1B-9370-4C1CE5036371}"/>
               </a:ext>
             </a:extLst>
           </p:cNvPr>
@@ -4084,7 +4086,7 @@
           <p:cNvPr id="3" name="Espaço Reservado para Texto 2">
             <a:extLst>
               <a:ext uri="{FF2B5EF4-FFF2-40B4-BE49-F238E27FC236}">
-                <a16:creationId xmlns:a16="http://schemas.microsoft.com/office/drawing/2014/main" xmlns="" id="{3B9CF87A-0448-49A7-AB25-EBC1D56A40EF}"/>
+                <a16:creationId xmlns="" xmlns:a16="http://schemas.microsoft.com/office/drawing/2014/main" id="{3B9CF87A-0448-49A7-AB25-EBC1D56A40EF}"/>
               </a:ext>
             </a:extLst>
           </p:cNvPr>
@@ -4151,7 +4153,7 @@
           <p:cNvPr id="4" name="Espaço Reservado para Data 3">
             <a:extLst>
               <a:ext uri="{FF2B5EF4-FFF2-40B4-BE49-F238E27FC236}">
-                <a16:creationId xmlns:a16="http://schemas.microsoft.com/office/drawing/2014/main" xmlns="" id="{2EF7B1F2-BB5A-44D0-816D-16AD2C71430E}"/>
+                <a16:creationId xmlns="" xmlns:a16="http://schemas.microsoft.com/office/drawing/2014/main" id="{2EF7B1F2-BB5A-44D0-816D-16AD2C71430E}"/>
               </a:ext>
             </a:extLst>
           </p:cNvPr>
@@ -4187,7 +4189,7 @@
           <a:p>
             <a:fld id="{63289F7E-B80B-496E-81B4-D396C37C9454}" type="datetimeFigureOut">
               <a:rPr lang="pt-BR" smtClean="0"/>
-              <a:t>14/08/2025</a:t>
+              <a:t>28/02/2026</a:t>
             </a:fld>
             <a:endParaRPr lang="pt-BR"/>
           </a:p>
@@ -4198,7 +4200,7 @@
           <p:cNvPr id="5" name="Espaço Reservado para Rodapé 4">
             <a:extLst>
               <a:ext uri="{FF2B5EF4-FFF2-40B4-BE49-F238E27FC236}">
-                <a16:creationId xmlns:a16="http://schemas.microsoft.com/office/drawing/2014/main" xmlns="" id="{C703F94C-2CC8-4DAA-BC35-14FC3E841DCD}"/>
+                <a16:creationId xmlns="" xmlns:a16="http://schemas.microsoft.com/office/drawing/2014/main" id="{C703F94C-2CC8-4DAA-BC35-14FC3E841DCD}"/>
               </a:ext>
             </a:extLst>
           </p:cNvPr>
@@ -4241,7 +4243,7 @@
           <p:cNvPr id="6" name="Espaço Reservado para Número de Slide 5">
             <a:extLst>
               <a:ext uri="{FF2B5EF4-FFF2-40B4-BE49-F238E27FC236}">
-                <a16:creationId xmlns:a16="http://schemas.microsoft.com/office/drawing/2014/main" xmlns="" id="{64051336-7048-457A-8B61-D94291D71648}"/>
+                <a16:creationId xmlns="" xmlns:a16="http://schemas.microsoft.com/office/drawing/2014/main" id="{64051336-7048-457A-8B61-D94291D71648}"/>
               </a:ext>
             </a:extLst>
           </p:cNvPr>
@@ -4609,7 +4611,7 @@
           <p:cNvPr id="2" name="Título 1">
             <a:extLst>
               <a:ext uri="{FF2B5EF4-FFF2-40B4-BE49-F238E27FC236}">
-                <a16:creationId xmlns:a16="http://schemas.microsoft.com/office/drawing/2014/main" xmlns="" id="{32666AC8-2E17-4DB4-B0F5-60C640CCFD2E}"/>
+                <a16:creationId xmlns="" xmlns:a16="http://schemas.microsoft.com/office/drawing/2014/main" id="{32666AC8-2E17-4DB4-B0F5-60C640CCFD2E}"/>
               </a:ext>
             </a:extLst>
           </p:cNvPr>
@@ -4655,7 +4657,7 @@
           <p:cNvPr id="4" name="CaixaDeTexto 3">
             <a:extLst>
               <a:ext uri="{FF2B5EF4-FFF2-40B4-BE49-F238E27FC236}">
-                <a16:creationId xmlns:a16="http://schemas.microsoft.com/office/drawing/2014/main" xmlns="" id="{430EB894-B7D4-434C-9D1A-A14094D9BEEC}"/>
+                <a16:creationId xmlns="" xmlns:a16="http://schemas.microsoft.com/office/drawing/2014/main" id="{430EB894-B7D4-434C-9D1A-A14094D9BEEC}"/>
               </a:ext>
             </a:extLst>
           </p:cNvPr>
@@ -4696,7 +4698,7 @@
           <p:cNvPr id="1026" name="Picture 2" descr="Logo">
             <a:extLst>
               <a:ext uri="{FF2B5EF4-FFF2-40B4-BE49-F238E27FC236}">
-                <a16:creationId xmlns:a16="http://schemas.microsoft.com/office/drawing/2014/main" xmlns="" id="{3F2642E0-4F6A-4196-8F58-E77D36E9A33F}"/>
+                <a16:creationId xmlns="" xmlns:a16="http://schemas.microsoft.com/office/drawing/2014/main" id="{3F2642E0-4F6A-4196-8F58-E77D36E9A33F}"/>
               </a:ext>
             </a:extLst>
           </p:cNvPr>
@@ -4741,7 +4743,7 @@
           <p:cNvPr id="5122" name="Picture 2" descr="Image result for machine learning">
             <a:extLst>
               <a:ext uri="{FF2B5EF4-FFF2-40B4-BE49-F238E27FC236}">
-                <a16:creationId xmlns:a16="http://schemas.microsoft.com/office/drawing/2014/main" xmlns="" id="{810CE0A2-4102-44A6-A370-175E7896CDCB}"/>
+                <a16:creationId xmlns="" xmlns:a16="http://schemas.microsoft.com/office/drawing/2014/main" id="{810CE0A2-4102-44A6-A370-175E7896CDCB}"/>
               </a:ext>
             </a:extLst>
           </p:cNvPr>
@@ -4799,13 +4801,7 @@
   <p:cSld>
     <p:spTree>
       <p:nvGrpSpPr>
-        <p:cNvPr id="1" name="">
-          <a:extLst>
-            <a:ext uri="{FF2B5EF4-FFF2-40B4-BE49-F238E27FC236}">
-              <a16:creationId xmlns:a16="http://schemas.microsoft.com/office/drawing/2014/main" xmlns="" id="{7617B87B-9451-26E5-143E-DFEF71434E9F}"/>
-            </a:ext>
-          </a:extLst>
-        </p:cNvPr>
+        <p:cNvPr id="1" name=""/>
         <p:cNvGrpSpPr/>
         <p:nvPr/>
       </p:nvGrpSpPr>
@@ -4822,7 +4818,7 @@
           <p:cNvPr id="2" name="Título 1">
             <a:extLst>
               <a:ext uri="{FF2B5EF4-FFF2-40B4-BE49-F238E27FC236}">
-                <a16:creationId xmlns:a16="http://schemas.microsoft.com/office/drawing/2014/main" xmlns="" id="{530D8C5D-85CB-1EC5-46EE-3E9C5D6E11D6}"/>
+                <a16:creationId xmlns="" xmlns:a16="http://schemas.microsoft.com/office/drawing/2014/main" id="{A2A4684C-1159-4F88-A2B1-6BABEDE38C4D}"/>
               </a:ext>
             </a:extLst>
           </p:cNvPr>
@@ -4840,7 +4836,7 @@
           <a:p>
             <a:r>
               <a:rPr lang="pt-BR" dirty="0"/>
-              <a:t>Temas dos seminários</a:t>
+              <a:t>Referências</a:t>
             </a:r>
           </a:p>
         </p:txBody>
@@ -4850,7 +4846,7 @@
           <p:cNvPr id="3" name="Espaço Reservado para Conteúdo 2">
             <a:extLst>
               <a:ext uri="{FF2B5EF4-FFF2-40B4-BE49-F238E27FC236}">
-                <a16:creationId xmlns:a16="http://schemas.microsoft.com/office/drawing/2014/main" xmlns="" id="{4C11FF3E-C7A6-AE98-273A-28F266ADBFC3}"/>
+                <a16:creationId xmlns="" xmlns:a16="http://schemas.microsoft.com/office/drawing/2014/main" id="{EC432B31-D382-41FF-BB6B-2ABDD322424B}"/>
               </a:ext>
             </a:extLst>
           </p:cNvPr>
@@ -4863,225 +4859,786 @@
         </p:nvSpPr>
         <p:spPr>
           <a:xfrm>
-            <a:off x="838200" y="1825624"/>
-            <a:ext cx="11201400" cy="5032375"/>
+            <a:off x="838199" y="1648915"/>
+            <a:ext cx="11157155" cy="5209085"/>
           </a:xfrm>
         </p:spPr>
         <p:txBody>
-          <a:bodyPr/>
+          <a:bodyPr>
+            <a:noAutofit/>
+          </a:bodyPr>
           <a:lstStyle/>
           <a:p>
-            <a:r>
-              <a:rPr lang="pt-BR" dirty="0"/>
-              <a:t>Computer Vision: </a:t>
-            </a:r>
-            <a:r>
-              <a:rPr lang="pt-BR" dirty="0" err="1"/>
-              <a:t>Image</a:t>
-            </a:r>
-            <a:r>
-              <a:rPr lang="pt-BR" dirty="0"/>
+            <a:pPr marL="0" indent="0">
+              <a:spcBef>
+                <a:spcPts val="0"/>
+              </a:spcBef>
+              <a:buNone/>
+            </a:pPr>
+            <a:r>
+              <a:rPr lang="pt-BR" sz="2400" b="0" i="0" u="none" strike="noStrike" dirty="0">
+                <a:solidFill>
+                  <a:srgbClr val="000000"/>
+                </a:solidFill>
+                <a:effectLst/>
+              </a:rPr>
+              <a:t>[1] </a:t>
+            </a:r>
+            <a:r>
+              <a:rPr lang="pt-BR" sz="2400" dirty="0">
+                <a:solidFill>
+                  <a:srgbClr val="000000"/>
+                </a:solidFill>
+              </a:rPr>
+              <a:t>“Tensorflow </a:t>
+            </a:r>
+            <a:r>
+              <a:rPr lang="pt-BR" sz="2400" dirty="0" err="1">
+                <a:solidFill>
+                  <a:srgbClr val="000000"/>
+                </a:solidFill>
+              </a:rPr>
+              <a:t>c</a:t>
+            </a:r>
+            <a:r>
+              <a:rPr lang="pt-BR" sz="2400" b="0" i="0" u="none" strike="noStrike" dirty="0" err="1">
+                <a:solidFill>
+                  <a:srgbClr val="000000"/>
+                </a:solidFill>
+                <a:effectLst/>
+              </a:rPr>
+              <a:t>ode</a:t>
+            </a:r>
+            <a:r>
+              <a:rPr lang="pt-BR" sz="2400" b="0" i="0" u="none" strike="noStrike" dirty="0">
+                <a:solidFill>
+                  <a:srgbClr val="000000"/>
+                </a:solidFill>
+                <a:effectLst/>
+              </a:rPr>
               <a:t> </a:t>
             </a:r>
             <a:r>
-              <a:rPr lang="pt-BR" dirty="0" err="1"/>
-              <a:t>classification</a:t>
-            </a:r>
-            <a:endParaRPr lang="pt-BR" dirty="0"/>
-          </a:p>
-          <a:p>
-            <a:pPr lvl="1">
-              <a:buFont typeface="Wingdings" panose="05000000000000000000" pitchFamily="2" charset="2"/>
-              <a:buChar char="§"/>
-            </a:pPr>
-            <a:r>
-              <a:rPr lang="pt-BR" dirty="0"/>
-              <a:t>Vision </a:t>
-            </a:r>
-            <a:r>
-              <a:rPr lang="pt-BR" dirty="0" err="1"/>
-              <a:t>Transformer</a:t>
-            </a:r>
-            <a:endParaRPr lang="pt-BR" dirty="0"/>
-          </a:p>
-          <a:p>
-            <a:pPr lvl="2">
-              <a:buFont typeface="Wingdings" panose="05000000000000000000" pitchFamily="2" charset="2"/>
-              <a:buChar char="ü"/>
-            </a:pPr>
-            <a:r>
-              <a:rPr lang="pt-BR" dirty="0">
-                <a:hlinkClick r:id="rId2"/>
-              </a:rPr>
-              <a:t>https://arxiv.org/abs/2010.11929</a:t>
-            </a:r>
-            <a:endParaRPr lang="pt-BR" dirty="0"/>
-          </a:p>
-          <a:p>
-            <a:pPr lvl="2">
-              <a:buFont typeface="Wingdings" panose="05000000000000000000" pitchFamily="2" charset="2"/>
-              <a:buChar char="ü"/>
-            </a:pPr>
-            <a:r>
-              <a:rPr lang="pt-BR" dirty="0">
+              <a:rPr lang="pt-BR" sz="2400" b="0" i="0" u="none" strike="noStrike" dirty="0" err="1">
+                <a:solidFill>
+                  <a:srgbClr val="000000"/>
+                </a:solidFill>
+                <a:effectLst/>
+              </a:rPr>
+              <a:t>examples</a:t>
+            </a:r>
+            <a:r>
+              <a:rPr lang="pt-BR" sz="2400" b="0" i="0" u="none" strike="noStrike" dirty="0">
+                <a:solidFill>
+                  <a:srgbClr val="000000"/>
+                </a:solidFill>
+                <a:effectLst/>
+              </a:rPr>
+              <a:t>”, </a:t>
+            </a:r>
+            <a:r>
+              <a:rPr lang="pt-BR" sz="2400" b="0" i="0" u="none" strike="noStrike" dirty="0">
+                <a:solidFill>
+                  <a:srgbClr val="000000"/>
+                </a:solidFill>
+                <a:effectLst/>
                 <a:hlinkClick r:id="rId3"/>
               </a:rPr>
-              <a:t>https://keras.io/examples/vision/image_classification_with_vision_transformer/</a:t>
-            </a:r>
-            <a:endParaRPr lang="pt-BR" dirty="0"/>
-          </a:p>
-          <a:p>
-            <a:pPr lvl="1">
-              <a:buFont typeface="Wingdings" panose="05000000000000000000" pitchFamily="2" charset="2"/>
-              <a:buChar char="§"/>
-            </a:pPr>
-            <a:r>
-              <a:rPr lang="pt-BR" dirty="0" err="1"/>
-              <a:t>Swin</a:t>
-            </a:r>
-            <a:r>
-              <a:rPr lang="pt-BR" dirty="0"/>
-              <a:t> </a:t>
-            </a:r>
-            <a:r>
-              <a:rPr lang="pt-BR" dirty="0" err="1"/>
-              <a:t>Transformer</a:t>
-            </a:r>
-            <a:endParaRPr lang="pt-BR" dirty="0"/>
-          </a:p>
-          <a:p>
-            <a:pPr lvl="2">
-              <a:buFont typeface="Wingdings" panose="05000000000000000000" pitchFamily="2" charset="2"/>
-              <a:buChar char="ü"/>
-            </a:pPr>
-            <a:r>
-              <a:rPr lang="pt-BR" dirty="0">
-                <a:hlinkClick r:id="rId4"/>
-              </a:rPr>
-              <a:t>https://arxiv.org/abs/2103.14030</a:t>
-            </a:r>
-            <a:endParaRPr lang="pt-BR" dirty="0"/>
-          </a:p>
-          <a:p>
-            <a:pPr lvl="2">
-              <a:buFont typeface="Wingdings" panose="05000000000000000000" pitchFamily="2" charset="2"/>
-              <a:buChar char="ü"/>
-            </a:pPr>
-            <a:r>
-              <a:rPr lang="pt-BR" dirty="0">
-                <a:hlinkClick r:id="rId5"/>
-              </a:rPr>
-              <a:t>https://keras.io/examples/vision/swin_transformers/</a:t>
-            </a:r>
-            <a:endParaRPr lang="pt-BR" dirty="0"/>
-          </a:p>
-          <a:p>
-            <a:pPr lvl="1">
-              <a:buFont typeface="Wingdings" panose="05000000000000000000" pitchFamily="2" charset="2"/>
-              <a:buChar char="§"/>
-            </a:pPr>
-            <a:r>
-              <a:rPr lang="pt-BR" i="0" dirty="0" err="1">
-                <a:solidFill>
-                  <a:srgbClr val="212529"/>
-                </a:solidFill>
-                <a:effectLst/>
-              </a:rPr>
-              <a:t>Reptile</a:t>
-            </a:r>
-            <a:endParaRPr lang="pt-BR" i="0" dirty="0">
+              <a:t>https://keras.io/examples/</a:t>
+            </a:r>
+            <a:endParaRPr lang="pt-BR" sz="2400" b="0" i="0" u="none" strike="noStrike" dirty="0">
               <a:solidFill>
-                <a:srgbClr val="212529"/>
+                <a:srgbClr val="000000"/>
               </a:solidFill>
               <a:effectLst/>
             </a:endParaRPr>
           </a:p>
           <a:p>
-            <a:pPr lvl="2">
-              <a:buFont typeface="Wingdings" panose="05000000000000000000" pitchFamily="2" charset="2"/>
-              <a:buChar char="ü"/>
-            </a:pPr>
-            <a:r>
-              <a:rPr lang="pt-BR" dirty="0">
-                <a:hlinkClick r:id="rId6"/>
-              </a:rPr>
-              <a:t>https://arxiv.org/abs/1803.02999</a:t>
-            </a:r>
-            <a:endParaRPr lang="pt-BR" dirty="0"/>
-          </a:p>
-          <a:p>
-            <a:pPr lvl="2">
-              <a:buFont typeface="Wingdings" panose="05000000000000000000" pitchFamily="2" charset="2"/>
-              <a:buChar char="ü"/>
-            </a:pPr>
-            <a:r>
-              <a:rPr lang="pt-BR" dirty="0">
-                <a:hlinkClick r:id="rId7"/>
-              </a:rPr>
-              <a:t>https://keras.io/examples/vision/reptile/</a:t>
-            </a:r>
-            <a:endParaRPr lang="pt-BR" dirty="0"/>
-          </a:p>
-          <a:p>
-            <a:pPr lvl="1">
-              <a:buFont typeface="Wingdings" panose="05000000000000000000" pitchFamily="2" charset="2"/>
-              <a:buChar char="§"/>
-            </a:pPr>
-            <a:r>
-              <a:rPr lang="en-US" b="0" i="0" dirty="0" err="1">
-                <a:solidFill>
-                  <a:srgbClr val="000000"/>
-                </a:solidFill>
-                <a:effectLst/>
-              </a:rPr>
-              <a:t>RegNet</a:t>
-            </a:r>
-            <a:r>
-              <a:rPr lang="en-US" b="0" i="0" dirty="0">
-                <a:solidFill>
-                  <a:srgbClr val="000000"/>
-                </a:solidFill>
-                <a:effectLst/>
-              </a:rPr>
-              <a:t>: Self-Regulated Network for Image Classification</a:t>
-            </a:r>
-          </a:p>
-          <a:p>
-            <a:pPr lvl="2">
-              <a:buFont typeface="Wingdings" panose="05000000000000000000" pitchFamily="2" charset="2"/>
-              <a:buChar char="ü"/>
-            </a:pPr>
-            <a:r>
-              <a:rPr lang="pt-BR" dirty="0">
-                <a:hlinkClick r:id="rId8"/>
-              </a:rPr>
-              <a:t>https://arxiv.org/abs/2101.00590</a:t>
-            </a:r>
-            <a:endParaRPr lang="en-US" dirty="0">
+            <a:pPr marL="0" indent="0">
+              <a:spcBef>
+                <a:spcPts val="0"/>
+              </a:spcBef>
+              <a:buNone/>
+            </a:pPr>
+            <a:r>
+              <a:rPr lang="pt-BR" sz="2400" dirty="0">
+                <a:solidFill>
+                  <a:srgbClr val="000000"/>
+                </a:solidFill>
+              </a:rPr>
+              <a:t>[2] “</a:t>
+            </a:r>
+            <a:r>
+              <a:rPr lang="pt-BR" sz="2400" dirty="0" err="1">
+                <a:solidFill>
+                  <a:srgbClr val="000000"/>
+                </a:solidFill>
+              </a:rPr>
+              <a:t>Pytorch</a:t>
+            </a:r>
+            <a:r>
+              <a:rPr lang="pt-BR" sz="2400" dirty="0">
+                <a:solidFill>
+                  <a:srgbClr val="000000"/>
+                </a:solidFill>
+              </a:rPr>
+              <a:t> </a:t>
+            </a:r>
+            <a:r>
+              <a:rPr lang="pt-BR" sz="2400" dirty="0" err="1">
+                <a:solidFill>
+                  <a:srgbClr val="000000"/>
+                </a:solidFill>
+              </a:rPr>
+              <a:t>code</a:t>
+            </a:r>
+            <a:r>
+              <a:rPr lang="pt-BR" sz="2400" dirty="0">
+                <a:solidFill>
+                  <a:srgbClr val="000000"/>
+                </a:solidFill>
+              </a:rPr>
+              <a:t> </a:t>
+            </a:r>
+            <a:r>
+              <a:rPr lang="pt-BR" sz="2400" dirty="0" err="1">
+                <a:solidFill>
+                  <a:srgbClr val="000000"/>
+                </a:solidFill>
+              </a:rPr>
+              <a:t>examples</a:t>
+            </a:r>
+            <a:r>
+              <a:rPr lang="pt-BR" sz="2400" dirty="0">
+                <a:solidFill>
+                  <a:srgbClr val="000000"/>
+                </a:solidFill>
+              </a:rPr>
+              <a:t>”, </a:t>
+            </a:r>
+            <a:r>
+              <a:rPr lang="pt-BR" sz="2400" dirty="0">
+                <a:solidFill>
+                  <a:srgbClr val="000000"/>
+                </a:solidFill>
+                <a:hlinkClick r:id="rId4"/>
+              </a:rPr>
+              <a:t>https://pytorch.org/examples/</a:t>
+            </a:r>
+            <a:endParaRPr lang="pt-BR" sz="2400" dirty="0">
               <a:solidFill>
                 <a:srgbClr val="000000"/>
               </a:solidFill>
             </a:endParaRPr>
           </a:p>
           <a:p>
-            <a:pPr lvl="2">
-              <a:buFont typeface="Wingdings" panose="05000000000000000000" pitchFamily="2" charset="2"/>
-              <a:buChar char="ü"/>
-            </a:pPr>
-            <a:r>
-              <a:rPr lang="pt-BR" dirty="0">
-                <a:hlinkClick r:id="rId9"/>
-              </a:rPr>
-              <a:t>https://paperswithcode.com/paper/regnet-self-regulated-network-for-image</a:t>
-            </a:r>
-            <a:endParaRPr lang="pt-BR" dirty="0"/>
+            <a:pPr marL="0" indent="0">
+              <a:spcBef>
+                <a:spcPts val="0"/>
+              </a:spcBef>
+              <a:buNone/>
+            </a:pPr>
+            <a:r>
+              <a:rPr lang="pt-BR" sz="2400" dirty="0" smtClean="0">
+                <a:solidFill>
+                  <a:srgbClr val="000000"/>
+                </a:solidFill>
+              </a:rPr>
+              <a:t>[</a:t>
+            </a:r>
+            <a:r>
+              <a:rPr lang="pt-BR" sz="2400" dirty="0">
+                <a:solidFill>
+                  <a:srgbClr val="000000"/>
+                </a:solidFill>
+              </a:rPr>
+              <a:t>3</a:t>
+            </a:r>
+            <a:r>
+              <a:rPr lang="pt-BR" sz="2400" dirty="0" smtClean="0">
+                <a:solidFill>
+                  <a:srgbClr val="000000"/>
+                </a:solidFill>
+              </a:rPr>
+              <a:t>] </a:t>
+            </a:r>
+            <a:r>
+              <a:rPr lang="pt-BR" sz="2400" dirty="0">
+                <a:solidFill>
+                  <a:srgbClr val="000000"/>
+                </a:solidFill>
+              </a:rPr>
+              <a:t>Sebastian </a:t>
+            </a:r>
+            <a:r>
+              <a:rPr lang="pt-BR" sz="2400" dirty="0" err="1">
+                <a:solidFill>
+                  <a:srgbClr val="000000"/>
+                </a:solidFill>
+              </a:rPr>
+              <a:t>Raschka</a:t>
+            </a:r>
+            <a:r>
+              <a:rPr lang="pt-BR" sz="2400" dirty="0">
+                <a:solidFill>
+                  <a:srgbClr val="000000"/>
+                </a:solidFill>
+              </a:rPr>
+              <a:t> </a:t>
+            </a:r>
+            <a:r>
+              <a:rPr lang="pt-BR" sz="2400" dirty="0" err="1">
+                <a:solidFill>
+                  <a:srgbClr val="000000"/>
+                </a:solidFill>
+              </a:rPr>
+              <a:t>and</a:t>
+            </a:r>
+            <a:r>
+              <a:rPr lang="pt-BR" sz="2400" dirty="0">
+                <a:solidFill>
+                  <a:srgbClr val="000000"/>
+                </a:solidFill>
+              </a:rPr>
+              <a:t> </a:t>
+            </a:r>
+            <a:r>
+              <a:rPr lang="pt-BR" sz="2400" dirty="0" err="1">
+                <a:solidFill>
+                  <a:srgbClr val="000000"/>
+                </a:solidFill>
+              </a:rPr>
+              <a:t>Vahid</a:t>
+            </a:r>
+            <a:r>
+              <a:rPr lang="pt-BR" sz="2400" dirty="0">
+                <a:solidFill>
+                  <a:srgbClr val="000000"/>
+                </a:solidFill>
+              </a:rPr>
+              <a:t> </a:t>
+            </a:r>
+            <a:r>
+              <a:rPr lang="pt-BR" sz="2400" dirty="0" err="1">
+                <a:solidFill>
+                  <a:srgbClr val="000000"/>
+                </a:solidFill>
+              </a:rPr>
+              <a:t>Mirjalili</a:t>
+            </a:r>
+            <a:r>
+              <a:rPr lang="pt-BR" sz="2400" dirty="0">
+                <a:solidFill>
+                  <a:srgbClr val="000000"/>
+                </a:solidFill>
+              </a:rPr>
+              <a:t>, “</a:t>
+            </a:r>
+            <a:r>
+              <a:rPr lang="en-US" sz="2400" dirty="0">
+                <a:solidFill>
+                  <a:srgbClr val="000000"/>
+                </a:solidFill>
+              </a:rPr>
+              <a:t>Python Machine Learning: Machine Learning and Deep Learning with Python, scikit-learn, and TensorFlow 2”, </a:t>
+            </a:r>
+            <a:r>
+              <a:rPr lang="pt-BR" sz="2400" dirty="0" err="1">
+                <a:solidFill>
+                  <a:srgbClr val="000000"/>
+                </a:solidFill>
+              </a:rPr>
+              <a:t>Packt</a:t>
+            </a:r>
+            <a:r>
+              <a:rPr lang="pt-BR" sz="2400" dirty="0">
+                <a:solidFill>
+                  <a:srgbClr val="000000"/>
+                </a:solidFill>
+              </a:rPr>
+              <a:t> </a:t>
+            </a:r>
+            <a:r>
+              <a:rPr lang="pt-BR" sz="2400" dirty="0" err="1">
+                <a:solidFill>
+                  <a:srgbClr val="000000"/>
+                </a:solidFill>
+              </a:rPr>
+              <a:t>Publishing</a:t>
+            </a:r>
+            <a:r>
+              <a:rPr lang="pt-BR" sz="2400" dirty="0">
+                <a:solidFill>
+                  <a:srgbClr val="000000"/>
+                </a:solidFill>
+              </a:rPr>
+              <a:t>, 2019.</a:t>
+            </a:r>
+            <a:r>
+              <a:rPr lang="en-US" sz="2400" dirty="0">
+                <a:solidFill>
+                  <a:srgbClr val="000000"/>
+                </a:solidFill>
+              </a:rPr>
+              <a:t/>
+            </a:r>
+            <a:br>
+              <a:rPr lang="en-US" sz="2400" dirty="0">
+                <a:solidFill>
+                  <a:srgbClr val="000000"/>
+                </a:solidFill>
+              </a:rPr>
+            </a:br>
+            <a:r>
+              <a:rPr lang="en-US" sz="2400" dirty="0" smtClean="0">
+                <a:solidFill>
+                  <a:srgbClr val="000000"/>
+                </a:solidFill>
+              </a:rPr>
+              <a:t>[4] </a:t>
+            </a:r>
+            <a:r>
+              <a:rPr lang="pt-BR" sz="2400" dirty="0">
+                <a:solidFill>
+                  <a:srgbClr val="000000"/>
+                </a:solidFill>
+              </a:rPr>
+              <a:t>Ivan </a:t>
+            </a:r>
+            <a:r>
+              <a:rPr lang="pt-BR" sz="2400" dirty="0" err="1">
+                <a:solidFill>
+                  <a:srgbClr val="000000"/>
+                </a:solidFill>
+              </a:rPr>
+              <a:t>Vasilev</a:t>
+            </a:r>
+            <a:r>
+              <a:rPr lang="pt-BR" sz="2400" dirty="0">
+                <a:solidFill>
+                  <a:srgbClr val="000000"/>
+                </a:solidFill>
+              </a:rPr>
+              <a:t>, </a:t>
+            </a:r>
+            <a:r>
+              <a:rPr lang="en-US" sz="2400" dirty="0">
+                <a:solidFill>
+                  <a:srgbClr val="000000"/>
+                </a:solidFill>
+              </a:rPr>
+              <a:t>“Advanced Deep Learning with Python: Design and implement advanced next-generation AI solutions using TensorFlow and </a:t>
+            </a:r>
+            <a:r>
+              <a:rPr lang="en-US" sz="2400" dirty="0" err="1">
+                <a:solidFill>
+                  <a:srgbClr val="000000"/>
+                </a:solidFill>
+              </a:rPr>
+              <a:t>PyTorch</a:t>
+            </a:r>
+            <a:r>
+              <a:rPr lang="en-US" sz="2400" dirty="0">
+                <a:solidFill>
+                  <a:srgbClr val="000000"/>
+                </a:solidFill>
+              </a:rPr>
+              <a:t>”, </a:t>
+            </a:r>
+            <a:r>
+              <a:rPr lang="pt-BR" sz="2400" dirty="0" err="1">
+                <a:solidFill>
+                  <a:srgbClr val="000000"/>
+                </a:solidFill>
+              </a:rPr>
+              <a:t>Packt</a:t>
+            </a:r>
+            <a:r>
+              <a:rPr lang="pt-BR" sz="2400" dirty="0">
+                <a:solidFill>
+                  <a:srgbClr val="000000"/>
+                </a:solidFill>
+              </a:rPr>
+              <a:t> </a:t>
+            </a:r>
+            <a:r>
+              <a:rPr lang="pt-BR" sz="2400" dirty="0" err="1">
+                <a:solidFill>
+                  <a:srgbClr val="000000"/>
+                </a:solidFill>
+              </a:rPr>
+              <a:t>Publishing</a:t>
+            </a:r>
+            <a:r>
+              <a:rPr lang="pt-BR" sz="2400" dirty="0">
+                <a:solidFill>
+                  <a:srgbClr val="000000"/>
+                </a:solidFill>
+              </a:rPr>
+              <a:t>, 2019.</a:t>
+            </a:r>
+          </a:p>
+          <a:p>
+            <a:pPr marL="0" indent="0">
+              <a:spcBef>
+                <a:spcPts val="0"/>
+              </a:spcBef>
+              <a:buNone/>
+            </a:pPr>
+            <a:r>
+              <a:rPr lang="pt-BR" sz="2400" dirty="0" smtClean="0">
+                <a:solidFill>
+                  <a:srgbClr val="000000"/>
+                </a:solidFill>
+              </a:rPr>
+              <a:t>[5] </a:t>
+            </a:r>
+            <a:r>
+              <a:rPr lang="pt-BR" sz="2400" dirty="0" err="1">
+                <a:solidFill>
+                  <a:srgbClr val="000000"/>
+                </a:solidFill>
+              </a:rPr>
+              <a:t>Aurélien</a:t>
+            </a:r>
+            <a:r>
+              <a:rPr lang="pt-BR" sz="2400" dirty="0">
+                <a:solidFill>
+                  <a:srgbClr val="000000"/>
+                </a:solidFill>
+              </a:rPr>
+              <a:t> </a:t>
+            </a:r>
+            <a:r>
+              <a:rPr lang="pt-BR" sz="2400" dirty="0" err="1">
+                <a:solidFill>
+                  <a:srgbClr val="000000"/>
+                </a:solidFill>
+              </a:rPr>
+              <a:t>Géron</a:t>
+            </a:r>
+            <a:r>
+              <a:rPr lang="pt-BR" sz="2400" dirty="0">
+                <a:solidFill>
+                  <a:srgbClr val="000000"/>
+                </a:solidFill>
+              </a:rPr>
+              <a:t>, "Hands-On Machine Learning </a:t>
+            </a:r>
+            <a:r>
+              <a:rPr lang="pt-BR" sz="2400" dirty="0" err="1">
+                <a:solidFill>
+                  <a:srgbClr val="000000"/>
+                </a:solidFill>
+              </a:rPr>
+              <a:t>with</a:t>
+            </a:r>
+            <a:r>
+              <a:rPr lang="pt-BR" sz="2400" dirty="0">
+                <a:solidFill>
+                  <a:srgbClr val="000000"/>
+                </a:solidFill>
+              </a:rPr>
+              <a:t> </a:t>
+            </a:r>
+            <a:r>
+              <a:rPr lang="pt-BR" sz="2400" dirty="0" err="1">
+                <a:solidFill>
+                  <a:srgbClr val="000000"/>
+                </a:solidFill>
+              </a:rPr>
+              <a:t>Scikit-Learn</a:t>
+            </a:r>
+            <a:r>
+              <a:rPr lang="pt-BR" sz="2400" dirty="0">
+                <a:solidFill>
+                  <a:srgbClr val="000000"/>
+                </a:solidFill>
+              </a:rPr>
+              <a:t> </a:t>
+            </a:r>
+            <a:r>
+              <a:rPr lang="pt-BR" sz="2400" dirty="0" err="1">
+                <a:solidFill>
+                  <a:srgbClr val="000000"/>
+                </a:solidFill>
+              </a:rPr>
+              <a:t>and</a:t>
+            </a:r>
+            <a:r>
+              <a:rPr lang="pt-BR" sz="2400" dirty="0">
+                <a:solidFill>
+                  <a:srgbClr val="000000"/>
+                </a:solidFill>
+              </a:rPr>
+              <a:t> TensorFlow: </a:t>
+            </a:r>
+            <a:r>
+              <a:rPr lang="pt-BR" sz="2400" dirty="0" err="1">
+                <a:solidFill>
+                  <a:srgbClr val="000000"/>
+                </a:solidFill>
+              </a:rPr>
+              <a:t>Concepts</a:t>
+            </a:r>
+            <a:r>
+              <a:rPr lang="pt-BR" sz="2400" dirty="0">
+                <a:solidFill>
+                  <a:srgbClr val="000000"/>
+                </a:solidFill>
+              </a:rPr>
+              <a:t>, Tools, </a:t>
+            </a:r>
+            <a:r>
+              <a:rPr lang="pt-BR" sz="2400" dirty="0" err="1">
+                <a:solidFill>
+                  <a:srgbClr val="000000"/>
+                </a:solidFill>
+              </a:rPr>
+              <a:t>and</a:t>
+            </a:r>
+            <a:r>
+              <a:rPr lang="pt-BR" sz="2400" dirty="0">
+                <a:solidFill>
+                  <a:srgbClr val="000000"/>
+                </a:solidFill>
+              </a:rPr>
+              <a:t> </a:t>
+            </a:r>
+            <a:r>
+              <a:rPr lang="pt-BR" sz="2400" dirty="0" err="1">
+                <a:solidFill>
+                  <a:srgbClr val="000000"/>
+                </a:solidFill>
+              </a:rPr>
+              <a:t>Techniques</a:t>
+            </a:r>
+            <a:r>
+              <a:rPr lang="pt-BR" sz="2400" dirty="0">
+                <a:solidFill>
+                  <a:srgbClr val="000000"/>
+                </a:solidFill>
+              </a:rPr>
+              <a:t> </a:t>
+            </a:r>
+            <a:r>
+              <a:rPr lang="pt-BR" sz="2400" dirty="0" err="1">
+                <a:solidFill>
+                  <a:srgbClr val="000000"/>
+                </a:solidFill>
+              </a:rPr>
+              <a:t>to</a:t>
+            </a:r>
+            <a:r>
+              <a:rPr lang="pt-BR" sz="2400" dirty="0">
+                <a:solidFill>
+                  <a:srgbClr val="000000"/>
+                </a:solidFill>
+              </a:rPr>
+              <a:t> Build </a:t>
+            </a:r>
+            <a:r>
+              <a:rPr lang="pt-BR" sz="2400" dirty="0" err="1">
+                <a:solidFill>
+                  <a:srgbClr val="000000"/>
+                </a:solidFill>
+              </a:rPr>
+              <a:t>Intelligent</a:t>
+            </a:r>
+            <a:r>
+              <a:rPr lang="pt-BR" sz="2400" dirty="0">
+                <a:solidFill>
+                  <a:srgbClr val="000000"/>
+                </a:solidFill>
+              </a:rPr>
+              <a:t> Systems", 3rd ed., O'Reilly Media, 2022.</a:t>
+            </a:r>
+          </a:p>
+          <a:p>
+            <a:pPr marL="0" indent="0">
+              <a:spcBef>
+                <a:spcPts val="0"/>
+              </a:spcBef>
+              <a:buNone/>
+            </a:pPr>
+            <a:r>
+              <a:rPr lang="en-US" sz="2400" dirty="0" smtClean="0">
+                <a:solidFill>
+                  <a:srgbClr val="000000"/>
+                </a:solidFill>
+              </a:rPr>
+              <a:t>[6] </a:t>
+            </a:r>
+            <a:r>
+              <a:rPr lang="en-US" sz="2400" dirty="0" err="1">
+                <a:solidFill>
+                  <a:srgbClr val="000000"/>
+                </a:solidFill>
+              </a:rPr>
+              <a:t>Raschka</a:t>
+            </a:r>
+            <a:r>
+              <a:rPr lang="en-US" sz="2400" dirty="0">
+                <a:solidFill>
+                  <a:srgbClr val="000000"/>
+                </a:solidFill>
+              </a:rPr>
+              <a:t>, Sebastian, et al., “Machine Learning with </a:t>
+            </a:r>
+            <a:r>
+              <a:rPr lang="en-US" sz="2400" dirty="0" err="1">
+                <a:solidFill>
+                  <a:srgbClr val="000000"/>
+                </a:solidFill>
+              </a:rPr>
+              <a:t>PyTorch</a:t>
+            </a:r>
+            <a:r>
+              <a:rPr lang="en-US" sz="2400" dirty="0">
+                <a:solidFill>
+                  <a:srgbClr val="000000"/>
+                </a:solidFill>
+              </a:rPr>
+              <a:t> and Scikit-Learn: Develop machine learning and deep learning models with Python”, </a:t>
+            </a:r>
+            <a:r>
+              <a:rPr lang="en-US" sz="2400" dirty="0" err="1">
+                <a:solidFill>
+                  <a:srgbClr val="000000"/>
+                </a:solidFill>
+              </a:rPr>
+              <a:t>Packt</a:t>
+            </a:r>
+            <a:r>
+              <a:rPr lang="en-US" sz="2400" dirty="0">
+                <a:solidFill>
+                  <a:srgbClr val="000000"/>
+                </a:solidFill>
+              </a:rPr>
+              <a:t> Publishing Ltd, 2022.</a:t>
+            </a:r>
+            <a:endParaRPr lang="pt-BR" sz="2400" dirty="0">
+              <a:solidFill>
+                <a:srgbClr val="000000"/>
+              </a:solidFill>
+            </a:endParaRPr>
+          </a:p>
+          <a:p>
+            <a:pPr marL="0" indent="0">
+              <a:spcBef>
+                <a:spcPts val="0"/>
+              </a:spcBef>
+              <a:buNone/>
+            </a:pPr>
+            <a:r>
+              <a:rPr lang="pt-BR" sz="2400" dirty="0" smtClean="0">
+                <a:solidFill>
+                  <a:srgbClr val="000000"/>
+                </a:solidFill>
+              </a:rPr>
+              <a:t>[7] </a:t>
+            </a:r>
+            <a:r>
+              <a:rPr lang="pt-BR" sz="2400" dirty="0">
+                <a:solidFill>
+                  <a:srgbClr val="000000"/>
+                </a:solidFill>
+              </a:rPr>
+              <a:t>C. M. Bishop, "</a:t>
+            </a:r>
+            <a:r>
+              <a:rPr lang="pt-BR" sz="2400" dirty="0" err="1">
+                <a:solidFill>
+                  <a:srgbClr val="000000"/>
+                </a:solidFill>
+              </a:rPr>
+              <a:t>Pattern</a:t>
+            </a:r>
+            <a:r>
+              <a:rPr lang="pt-BR" sz="2400" dirty="0">
+                <a:solidFill>
+                  <a:srgbClr val="000000"/>
+                </a:solidFill>
+              </a:rPr>
+              <a:t> </a:t>
+            </a:r>
+            <a:r>
+              <a:rPr lang="pt-BR" sz="2400" dirty="0" err="1">
+                <a:solidFill>
+                  <a:srgbClr val="000000"/>
+                </a:solidFill>
+              </a:rPr>
+              <a:t>Recognition</a:t>
+            </a:r>
+            <a:r>
+              <a:rPr lang="pt-BR" sz="2400" dirty="0">
+                <a:solidFill>
+                  <a:srgbClr val="000000"/>
+                </a:solidFill>
+              </a:rPr>
+              <a:t> </a:t>
+            </a:r>
+            <a:r>
+              <a:rPr lang="pt-BR" sz="2400" dirty="0" err="1">
+                <a:solidFill>
+                  <a:srgbClr val="000000"/>
+                </a:solidFill>
+              </a:rPr>
+              <a:t>and</a:t>
+            </a:r>
+            <a:r>
+              <a:rPr lang="pt-BR" sz="2400" dirty="0">
+                <a:solidFill>
+                  <a:srgbClr val="000000"/>
+                </a:solidFill>
+              </a:rPr>
+              <a:t> Machine Learning", Springer, 2006.</a:t>
+            </a:r>
+          </a:p>
+          <a:p>
+            <a:pPr marL="0" indent="0">
+              <a:spcBef>
+                <a:spcPts val="0"/>
+              </a:spcBef>
+              <a:buNone/>
+            </a:pPr>
+            <a:r>
+              <a:rPr lang="pt-BR" sz="2400" dirty="0" smtClean="0">
+                <a:solidFill>
+                  <a:srgbClr val="000000"/>
+                </a:solidFill>
+              </a:rPr>
+              <a:t>[8] </a:t>
+            </a:r>
+            <a:r>
+              <a:rPr lang="pt-BR" sz="2400" dirty="0">
+                <a:solidFill>
+                  <a:srgbClr val="000000"/>
+                </a:solidFill>
+              </a:rPr>
+              <a:t>“Livros”, </a:t>
+            </a:r>
+            <a:r>
+              <a:rPr lang="pt-BR" sz="2400" dirty="0">
+                <a:solidFill>
+                  <a:srgbClr val="000000"/>
+                </a:solidFill>
+                <a:hlinkClick r:id="rId5"/>
+              </a:rPr>
+              <a:t>http://tinyurl.com/tp558-books</a:t>
+            </a:r>
+            <a:endParaRPr lang="pt-BR" sz="2400" dirty="0">
+              <a:solidFill>
+                <a:srgbClr val="000000"/>
+              </a:solidFill>
+            </a:endParaRPr>
           </a:p>
         </p:txBody>
       </p:sp>
     </p:spTree>
     <p:extLst>
       <p:ext uri="{BB962C8B-B14F-4D97-AF65-F5344CB8AC3E}">
-        <p14:creationId xmlns:p14="http://schemas.microsoft.com/office/powerpoint/2010/main" val="1451750616"/>
+        <p14:creationId xmlns:p14="http://schemas.microsoft.com/office/powerpoint/2010/main" val="2247946137"/>
       </p:ext>
     </p:extLst>
   </p:cSld>
@@ -5096,13 +5653,7 @@
   <p:cSld>
     <p:spTree>
       <p:nvGrpSpPr>
-        <p:cNvPr id="1" name="">
-          <a:extLst>
-            <a:ext uri="{FF2B5EF4-FFF2-40B4-BE49-F238E27FC236}">
-              <a16:creationId xmlns:a16="http://schemas.microsoft.com/office/drawing/2014/main" xmlns="" id="{C27B3849-BF4B-F30A-23EA-9FE30E20CBCA}"/>
-            </a:ext>
-          </a:extLst>
-        </p:cNvPr>
+        <p:cNvPr id="1" name=""/>
         <p:cNvGrpSpPr/>
         <p:nvPr/>
       </p:nvGrpSpPr>
@@ -5116,13 +5667,7 @@
       </p:grpSpPr>
       <p:sp>
         <p:nvSpPr>
-          <p:cNvPr id="2" name="Título 1">
-            <a:extLst>
-              <a:ext uri="{FF2B5EF4-FFF2-40B4-BE49-F238E27FC236}">
-                <a16:creationId xmlns:a16="http://schemas.microsoft.com/office/drawing/2014/main" xmlns="" id="{249A0E92-603C-2FF8-F119-2A802B939AA2}"/>
-              </a:ext>
-            </a:extLst>
-          </p:cNvPr>
+          <p:cNvPr id="2" name="Title 1"/>
           <p:cNvSpPr>
             <a:spLocks noGrp="1"/>
           </p:cNvSpPr>
@@ -5136,21 +5681,16 @@
           <a:lstStyle/>
           <a:p>
             <a:r>
-              <a:rPr lang="pt-BR" dirty="0"/>
-              <a:t>Temas dos seminários</a:t>
-            </a:r>
-          </a:p>
-        </p:txBody>
-      </p:sp>
-      <p:sp>
-        <p:nvSpPr>
-          <p:cNvPr id="3" name="Espaço Reservado para Conteúdo 2">
-            <a:extLst>
-              <a:ext uri="{FF2B5EF4-FFF2-40B4-BE49-F238E27FC236}">
-                <a16:creationId xmlns:a16="http://schemas.microsoft.com/office/drawing/2014/main" xmlns="" id="{09015E3D-F27D-5C4C-AFAE-8A3141CD4684}"/>
-              </a:ext>
-            </a:extLst>
-          </p:cNvPr>
+              <a:rPr lang="en-US" dirty="0" err="1"/>
+              <a:t>Avisos</a:t>
+            </a:r>
+            <a:endParaRPr lang="nl-BE" dirty="0"/>
+          </a:p>
+        </p:txBody>
+      </p:sp>
+      <p:sp>
+        <p:nvSpPr>
+          <p:cNvPr id="3" name="Content Placeholder 2"/>
           <p:cNvSpPr>
             <a:spLocks noGrp="1"/>
           </p:cNvSpPr>
@@ -5158,7 +5698,12 @@
             <p:ph idx="1"/>
           </p:nvPr>
         </p:nvSpPr>
-        <p:spPr/>
+        <p:spPr>
+          <a:xfrm>
+            <a:off x="838199" y="1825624"/>
+            <a:ext cx="11104419" cy="5032376"/>
+          </a:xfrm>
+        </p:spPr>
         <p:txBody>
           <a:bodyPr>
             <a:normAutofit/>
@@ -5167,136 +5712,152 @@
           <a:p>
             <a:r>
               <a:rPr lang="pt-BR" dirty="0"/>
-              <a:t>Computer Vision: </a:t>
-            </a:r>
-            <a:r>
-              <a:rPr lang="pt-BR" dirty="0" err="1"/>
-              <a:t>Image</a:t>
-            </a:r>
-            <a:r>
-              <a:rPr lang="pt-BR" dirty="0"/>
-              <a:t> </a:t>
-            </a:r>
-            <a:r>
-              <a:rPr lang="pt-BR" dirty="0" err="1"/>
-              <a:t>Segmentation</a:t>
-            </a:r>
-            <a:endParaRPr lang="pt-BR" dirty="0"/>
+              <a:t>Todo material do curso está disponível no GitHub:</a:t>
+            </a:r>
           </a:p>
           <a:p>
             <a:pPr lvl="1">
               <a:buFont typeface="Wingdings" panose="05000000000000000000" pitchFamily="2" charset="2"/>
               <a:buChar char="§"/>
-            </a:pPr>
-            <a:r>
-              <a:rPr lang="pt-BR" dirty="0" err="1"/>
-              <a:t>U-Net</a:t>
-            </a:r>
-            <a:endParaRPr lang="pt-BR" dirty="0"/>
-          </a:p>
-          <a:p>
-            <a:pPr lvl="2">
-              <a:buFont typeface="Wingdings" panose="05000000000000000000" pitchFamily="2" charset="2"/>
-              <a:buChar char="ü"/>
             </a:pPr>
             <a:r>
               <a:rPr lang="pt-BR" dirty="0">
                 <a:hlinkClick r:id="rId2"/>
               </a:rPr>
-              <a:t>https://link.springer.com/chapter/10.1007/978-3-319-24574-4_28</a:t>
+              <a:t>https://github.com/zz4fap/tp558-adv-ml</a:t>
             </a:r>
             <a:endParaRPr lang="pt-BR" dirty="0"/>
           </a:p>
           <a:p>
-            <a:pPr lvl="2">
-              <a:buFont typeface="Wingdings" panose="05000000000000000000" pitchFamily="2" charset="2"/>
-              <a:buChar char="ü"/>
+            <a:r>
+              <a:rPr lang="pt-BR" dirty="0"/>
+              <a:t>Como usar o Google </a:t>
+            </a:r>
+            <a:r>
+              <a:rPr lang="pt-BR" dirty="0" err="1"/>
+              <a:t>Colab</a:t>
+            </a:r>
+            <a:endParaRPr lang="pt-BR" dirty="0"/>
+          </a:p>
+          <a:p>
+            <a:pPr lvl="1">
+              <a:buFont typeface="Wingdings" panose="05000000000000000000" pitchFamily="2" charset="2"/>
+              <a:buChar char="§"/>
             </a:pPr>
             <a:r>
               <a:rPr lang="pt-BR" dirty="0">
                 <a:hlinkClick r:id="rId3"/>
               </a:rPr>
-              <a:t>https://www.tensorflow.org/tutorials/images/segmentation?hl=pt-br</a:t>
+              <a:t>https://www.youtube.com/watch?v=inN8seMm7UI&amp;ab_channel=TensorFlow</a:t>
+            </a:r>
+          </a:p>
+          <a:p>
+            <a:pPr lvl="1">
+              <a:buFont typeface="Wingdings" panose="05000000000000000000" pitchFamily="2" charset="2"/>
+              <a:buChar char="§"/>
+            </a:pPr>
+            <a:r>
+              <a:rPr lang="pt-BR" b="0" i="0" dirty="0">
+                <a:solidFill>
+                  <a:srgbClr val="222222"/>
+                </a:solidFill>
+                <a:effectLst/>
+                <a:latin typeface="Arial" panose="020B0604020202020204" pitchFamily="34" charset="0"/>
+                <a:hlinkClick r:id="rId4"/>
+              </a:rPr>
+              <a:t>https://www.youtube.com/watch?v=inN8seMm7UI</a:t>
+            </a:r>
+            <a:endParaRPr lang="pt-BR" b="0" i="0" dirty="0">
+              <a:solidFill>
+                <a:srgbClr val="222222"/>
+              </a:solidFill>
+              <a:effectLst/>
+              <a:latin typeface="Arial" panose="020B0604020202020204" pitchFamily="34" charset="0"/>
+            </a:endParaRPr>
+          </a:p>
+          <a:p>
+            <a:r>
+              <a:rPr lang="pt-BR" dirty="0"/>
+              <a:t>Python Crash </a:t>
+            </a:r>
+            <a:r>
+              <a:rPr lang="pt-BR" dirty="0" err="1"/>
+              <a:t>Course</a:t>
+            </a:r>
+            <a:endParaRPr lang="pt-BR" dirty="0">
+              <a:hlinkClick r:id="rId3"/>
+            </a:endParaRPr>
+          </a:p>
+          <a:p>
+            <a:pPr lvl="1">
+              <a:buFont typeface="Wingdings" panose="05000000000000000000" pitchFamily="2" charset="2"/>
+              <a:buChar char="§"/>
+            </a:pPr>
+            <a:r>
+              <a:rPr lang="pt-BR" dirty="0">
+                <a:hlinkClick r:id="rId3"/>
+              </a:rPr>
+              <a:t>https://www.youtube.com/watch?v=pq4NNIYar9o&amp;list=PLRc6ZYt68prVXAhwY1JD6DFc3BJGmJriq&amp;pp=gAQBiAQB</a:t>
             </a:r>
             <a:endParaRPr lang="pt-BR" dirty="0"/>
           </a:p>
           <a:p>
+            <a:r>
+              <a:rPr lang="pt-BR" dirty="0"/>
+              <a:t>Horário de Atendimento</a:t>
+            </a:r>
+          </a:p>
+          <a:p>
             <a:pPr lvl="1">
               <a:buFont typeface="Wingdings" panose="05000000000000000000" pitchFamily="2" charset="2"/>
               <a:buChar char="§"/>
             </a:pPr>
             <a:r>
-              <a:rPr lang="pt-BR" dirty="0" err="1"/>
-              <a:t>Boundary-Aware</a:t>
-            </a:r>
-            <a:r>
-              <a:rPr lang="pt-BR" dirty="0"/>
-              <a:t> </a:t>
-            </a:r>
-            <a:r>
-              <a:rPr lang="pt-BR" dirty="0" err="1"/>
-              <a:t>Segmentation</a:t>
-            </a:r>
-            <a:r>
-              <a:rPr lang="pt-BR" dirty="0"/>
-              <a:t> Network (</a:t>
-            </a:r>
-            <a:r>
-              <a:rPr lang="pt-BR" dirty="0" err="1"/>
-              <a:t>BASNet</a:t>
-            </a:r>
-            <a:r>
-              <a:rPr lang="pt-BR" dirty="0"/>
-              <a:t>)</a:t>
-            </a:r>
-          </a:p>
-          <a:p>
-            <a:pPr lvl="2">
-              <a:buFont typeface="Wingdings" panose="05000000000000000000" pitchFamily="2" charset="2"/>
-              <a:buChar char="ü"/>
-            </a:pPr>
-            <a:r>
-              <a:rPr lang="pt-BR" dirty="0">
-                <a:hlinkClick r:id="rId4"/>
-              </a:rPr>
-              <a:t>https://arxiv.org/abs/2101.04704</a:t>
-            </a:r>
-            <a:endParaRPr lang="pt-BR" dirty="0"/>
-          </a:p>
-          <a:p>
-            <a:pPr lvl="2">
-              <a:buFont typeface="Wingdings" panose="05000000000000000000" pitchFamily="2" charset="2"/>
-              <a:buChar char="ü"/>
-            </a:pPr>
-            <a:r>
-              <a:rPr lang="pt-BR" dirty="0">
-                <a:hlinkClick r:id="rId5"/>
-              </a:rPr>
-              <a:t>https://keras.io/examples/vision/basnet_segmentation/</a:t>
-            </a:r>
-            <a:endParaRPr lang="pt-BR" dirty="0"/>
-          </a:p>
-          <a:p>
-            <a:pPr lvl="2">
-              <a:buFont typeface="Wingdings" panose="05000000000000000000" pitchFamily="2" charset="2"/>
-              <a:buChar char="ü"/>
-            </a:pPr>
-            <a:endParaRPr lang="pt-BR" dirty="0"/>
-          </a:p>
-          <a:p>
-            <a:pPr marL="914400" lvl="2" indent="0">
-              <a:buNone/>
-            </a:pPr>
-            <a:endParaRPr lang="pt-BR" dirty="0"/>
-          </a:p>
-          <a:p>
-            <a:pPr marL="914400" lvl="2" indent="0">
-              <a:buNone/>
-            </a:pPr>
-            <a:endParaRPr lang="pt-BR" dirty="0"/>
-          </a:p>
-          <a:p>
-            <a:pPr lvl="1"/>
+              <a:rPr lang="pt-BR" dirty="0"/>
+              <a:t>Todas as </a:t>
+            </a:r>
+            <a:r>
+              <a:rPr lang="pt-BR" dirty="0" smtClean="0"/>
+              <a:t>terças</a:t>
+            </a:r>
+            <a:r>
+              <a:rPr lang="pt-BR" dirty="0" smtClean="0"/>
+              <a:t>-feiras </a:t>
+            </a:r>
+            <a:r>
+              <a:rPr lang="pt-BR" dirty="0"/>
+              <a:t>das </a:t>
+            </a:r>
+            <a:r>
+              <a:rPr lang="pt-BR" dirty="0" smtClean="0"/>
+              <a:t>10</a:t>
+            </a:r>
+            <a:r>
+              <a:rPr lang="pt-BR" dirty="0" smtClean="0"/>
+              <a:t>:00 </a:t>
+            </a:r>
+            <a:r>
+              <a:rPr lang="pt-BR" dirty="0"/>
+              <a:t>às </a:t>
+            </a:r>
+            <a:r>
+              <a:rPr lang="pt-BR" dirty="0" smtClean="0"/>
+              <a:t>11:00</a:t>
+            </a:r>
+            <a:r>
+              <a:rPr lang="pt-BR" dirty="0"/>
+              <a:t>.</a:t>
+            </a:r>
+          </a:p>
+          <a:p>
+            <a:pPr lvl="1">
+              <a:buFont typeface="Wingdings" panose="05000000000000000000" pitchFamily="2" charset="2"/>
+              <a:buChar char="§"/>
+            </a:pPr>
+            <a:r>
+              <a:rPr lang="pt-BR" dirty="0" smtClean="0"/>
+              <a:t>Presencialmente.</a:t>
+            </a:r>
             <a:endParaRPr lang="pt-BR" dirty="0"/>
           </a:p>
         </p:txBody>
@@ -5304,7 +5865,7 @@
     </p:spTree>
     <p:extLst>
       <p:ext uri="{BB962C8B-B14F-4D97-AF65-F5344CB8AC3E}">
-        <p14:creationId xmlns:p14="http://schemas.microsoft.com/office/powerpoint/2010/main" val="2048825345"/>
+        <p14:creationId xmlns:p14="http://schemas.microsoft.com/office/powerpoint/2010/main" val="1412900488"/>
       </p:ext>
     </p:extLst>
   </p:cSld>
@@ -5319,13 +5880,7 @@
   <p:cSld>
     <p:spTree>
       <p:nvGrpSpPr>
-        <p:cNvPr id="1" name="">
-          <a:extLst>
-            <a:ext uri="{FF2B5EF4-FFF2-40B4-BE49-F238E27FC236}">
-              <a16:creationId xmlns:a16="http://schemas.microsoft.com/office/drawing/2014/main" xmlns="" id="{6E3AB78C-4A70-ED33-6088-7D978AFBD15F}"/>
-            </a:ext>
-          </a:extLst>
-        </p:cNvPr>
+        <p:cNvPr id="1" name=""/>
         <p:cNvGrpSpPr/>
         <p:nvPr/>
       </p:nvGrpSpPr>
@@ -5339,257 +5894,64 @@
       </p:grpSpPr>
       <p:sp>
         <p:nvSpPr>
-          <p:cNvPr id="2" name="Título 1">
+          <p:cNvPr id="4" name="Título 1">
             <a:extLst>
               <a:ext uri="{FF2B5EF4-FFF2-40B4-BE49-F238E27FC236}">
-                <a16:creationId xmlns:a16="http://schemas.microsoft.com/office/drawing/2014/main" xmlns="" id="{20C0DDF2-0E52-0740-004B-2209C15740BF}"/>
+                <a16:creationId xmlns="" xmlns:a16="http://schemas.microsoft.com/office/drawing/2014/main" id="{32666AC8-2E17-4DB4-B0F5-60C640CCFD2E}"/>
               </a:ext>
             </a:extLst>
           </p:cNvPr>
-          <p:cNvSpPr>
-            <a:spLocks noGrp="1"/>
-          </p:cNvSpPr>
-          <p:nvPr>
-            <p:ph type="title"/>
-          </p:nvPr>
-        </p:nvSpPr>
-        <p:spPr/>
-        <p:txBody>
-          <a:bodyPr/>
-          <a:lstStyle/>
-          <a:p>
-            <a:r>
-              <a:rPr lang="pt-BR" dirty="0"/>
-              <a:t>Temas dos seminários</a:t>
-            </a:r>
-          </a:p>
-        </p:txBody>
-      </p:sp>
-      <p:sp>
-        <p:nvSpPr>
-          <p:cNvPr id="3" name="Espaço Reservado para Conteúdo 2">
-            <a:extLst>
-              <a:ext uri="{FF2B5EF4-FFF2-40B4-BE49-F238E27FC236}">
-                <a16:creationId xmlns:a16="http://schemas.microsoft.com/office/drawing/2014/main" xmlns="" id="{CAA14ED1-BBC4-3217-0C26-BBA0501ACF3D}"/>
-              </a:ext>
-            </a:extLst>
-          </p:cNvPr>
-          <p:cNvSpPr>
-            <a:spLocks noGrp="1"/>
-          </p:cNvSpPr>
-          <p:nvPr>
-            <p:ph idx="1"/>
-          </p:nvPr>
+          <p:cNvSpPr txBox="1">
+            <a:spLocks/>
+          </p:cNvSpPr>
+          <p:nvPr/>
         </p:nvSpPr>
         <p:spPr>
           <a:xfrm>
-            <a:off x="838199" y="1825624"/>
-            <a:ext cx="11092543" cy="5032376"/>
+            <a:off x="1431533" y="2720526"/>
+            <a:ext cx="9144000" cy="1029541"/>
           </a:xfrm>
+          <a:prstGeom prst="rect">
+            <a:avLst/>
+          </a:prstGeom>
         </p:spPr>
         <p:txBody>
-          <a:bodyPr>
+          <a:bodyPr vert="horz" lIns="91440" tIns="45720" rIns="91440" bIns="45720" rtlCol="0" anchor="ctr">
             <a:normAutofit/>
           </a:bodyPr>
-          <a:lstStyle/>
-          <a:p>
-            <a:r>
-              <a:rPr lang="pt-BR" dirty="0"/>
-              <a:t>Computer Vision: </a:t>
-            </a:r>
-            <a:r>
-              <a:rPr lang="pt-BR" dirty="0" err="1"/>
-              <a:t>Object</a:t>
-            </a:r>
-            <a:r>
-              <a:rPr lang="pt-BR" dirty="0"/>
-              <a:t> </a:t>
-            </a:r>
-            <a:r>
-              <a:rPr lang="pt-BR" dirty="0" err="1"/>
-              <a:t>Detection</a:t>
-            </a:r>
-            <a:endParaRPr lang="pt-BR" dirty="0"/>
-          </a:p>
-          <a:p>
-            <a:pPr lvl="1">
-              <a:buFont typeface="Wingdings" panose="05000000000000000000" pitchFamily="2" charset="2"/>
-              <a:buChar char="§"/>
-            </a:pPr>
-            <a:r>
-              <a:rPr lang="pt-BR" dirty="0"/>
-              <a:t>YOLOv8</a:t>
-            </a:r>
-          </a:p>
-          <a:p>
-            <a:pPr lvl="2">
-              <a:buFont typeface="Wingdings" panose="05000000000000000000" pitchFamily="2" charset="2"/>
-              <a:buChar char="ü"/>
-            </a:pPr>
-            <a:r>
-              <a:rPr lang="pt-BR" dirty="0">
-                <a:hlinkClick r:id="rId2"/>
-              </a:rPr>
-              <a:t>https://blog.roboflow.com/whats-new-in-yolov8/</a:t>
-            </a:r>
-          </a:p>
-          <a:p>
-            <a:pPr lvl="2">
-              <a:buFont typeface="Wingdings" panose="05000000000000000000" pitchFamily="2" charset="2"/>
-              <a:buChar char="ü"/>
-            </a:pPr>
-            <a:r>
-              <a:rPr lang="pt-BR" dirty="0">
-                <a:hlinkClick r:id="rId3"/>
-              </a:rPr>
-              <a:t>https://keras.io/examples/vision/yolov8/</a:t>
-            </a:r>
-            <a:endParaRPr lang="pt-BR" dirty="0"/>
-          </a:p>
-          <a:p>
-            <a:pPr lvl="1">
-              <a:buFont typeface="Wingdings" panose="05000000000000000000" pitchFamily="2" charset="2"/>
-              <a:buChar char="§"/>
-            </a:pPr>
-            <a:r>
-              <a:rPr lang="pt-BR" dirty="0"/>
-              <a:t>YOLOv9</a:t>
-            </a:r>
-          </a:p>
-          <a:p>
-            <a:pPr lvl="2">
-              <a:buFont typeface="Wingdings" panose="05000000000000000000" pitchFamily="2" charset="2"/>
-              <a:buChar char="ü"/>
-            </a:pPr>
-            <a:r>
-              <a:rPr lang="pt-BR" dirty="0">
-                <a:hlinkClick r:id="rId4"/>
-              </a:rPr>
-              <a:t>https://arxiv.org/abs/2402.13616</a:t>
-            </a:r>
-            <a:endParaRPr lang="pt-BR" dirty="0"/>
-          </a:p>
-          <a:p>
-            <a:pPr lvl="2">
-              <a:buFont typeface="Wingdings" panose="05000000000000000000" pitchFamily="2" charset="2"/>
-              <a:buChar char="ü"/>
-            </a:pPr>
-            <a:r>
-              <a:rPr lang="pt-BR" dirty="0">
-                <a:hlinkClick r:id="rId2"/>
-              </a:rPr>
-              <a:t>https://docs.ultralytics.com/pt/models/yolov9/#generalized-efficient-layer-aggregation-network-gelan</a:t>
-            </a:r>
-          </a:p>
-          <a:p>
-            <a:pPr lvl="2">
-              <a:buFont typeface="Wingdings" panose="05000000000000000000" pitchFamily="2" charset="2"/>
-              <a:buChar char="ü"/>
-            </a:pPr>
-            <a:r>
-              <a:rPr lang="pt-BR" dirty="0">
-                <a:hlinkClick r:id="rId2"/>
-              </a:rPr>
-              <a:t>https://github.com/WongKinYiu/yolov9?tab=readme-ov-file</a:t>
-            </a:r>
-          </a:p>
-          <a:p>
-            <a:pPr lvl="1">
-              <a:buFont typeface="Wingdings" panose="05000000000000000000" pitchFamily="2" charset="2"/>
-              <a:buChar char="§"/>
-            </a:pPr>
-            <a:r>
-              <a:rPr lang="en-US" b="0" i="0" dirty="0">
-                <a:solidFill>
-                  <a:srgbClr val="000000"/>
-                </a:solidFill>
-                <a:effectLst/>
-                <a:highlight>
-                  <a:srgbClr val="FFFFFF"/>
-                </a:highlight>
-              </a:rPr>
-              <a:t>YOLO-World: Real-Time Open-Vocabulary Object Detection</a:t>
-            </a:r>
-          </a:p>
-          <a:p>
-            <a:pPr lvl="2">
-              <a:buFont typeface="Wingdings" panose="05000000000000000000" pitchFamily="2" charset="2"/>
-              <a:buChar char="ü"/>
-            </a:pPr>
-            <a:r>
-              <a:rPr lang="pt-BR" dirty="0">
-                <a:hlinkClick r:id="rId2"/>
-              </a:rPr>
-              <a:t>https://arxiv.org/abs/2401.17270</a:t>
-            </a:r>
-            <a:endParaRPr lang="en-US" dirty="0">
-              <a:solidFill>
-                <a:srgbClr val="000000"/>
-              </a:solidFill>
-              <a:highlight>
-                <a:srgbClr val="FFFFFF"/>
-              </a:highlight>
-              <a:latin typeface="Arial" panose="020B0604020202020204" pitchFamily="34" charset="0"/>
-              <a:hlinkClick r:id="rId2"/>
-            </a:endParaRPr>
-          </a:p>
-          <a:p>
-            <a:pPr lvl="2">
-              <a:buFont typeface="Wingdings" panose="05000000000000000000" pitchFamily="2" charset="2"/>
-              <a:buChar char="ü"/>
-            </a:pPr>
-            <a:r>
-              <a:rPr lang="pt-BR" dirty="0">
-                <a:hlinkClick r:id="rId2"/>
-              </a:rPr>
-              <a:t>https://colab.research.google.com/github/roboflow-ai/notebooks/blob/main/notebooks/zero-shot-object-detection-with-yolo-world.ipynb</a:t>
-            </a:r>
-            <a:endParaRPr lang="en-US" dirty="0">
-              <a:solidFill>
-                <a:srgbClr val="000000"/>
-              </a:solidFill>
-              <a:highlight>
-                <a:srgbClr val="FFFFFF"/>
-              </a:highlight>
-              <a:latin typeface="Arial" panose="020B0604020202020204" pitchFamily="34" charset="0"/>
-              <a:hlinkClick r:id="rId2"/>
-            </a:endParaRPr>
-          </a:p>
-          <a:p>
-            <a:pPr lvl="2">
-              <a:buFont typeface="Wingdings" panose="05000000000000000000" pitchFamily="2" charset="2"/>
-              <a:buChar char="ü"/>
-            </a:pPr>
-            <a:r>
-              <a:rPr lang="pt-BR" dirty="0">
-                <a:hlinkClick r:id="rId2"/>
-              </a:rPr>
-              <a:t>https://www.youtube.com/watch?v=X7gKBGVz4vs&amp;feature=youtu.be</a:t>
-            </a:r>
-          </a:p>
-          <a:p>
-            <a:pPr lvl="2">
-              <a:buFont typeface="Wingdings" panose="05000000000000000000" pitchFamily="2" charset="2"/>
-              <a:buChar char="ü"/>
-            </a:pPr>
-            <a:endParaRPr lang="pt-BR" dirty="0"/>
-          </a:p>
-          <a:p>
-            <a:pPr marL="914400" lvl="2" indent="0">
+          <a:lstStyle>
+            <a:lvl1pPr algn="l" defTabSz="914400" rtl="0" eaLnBrk="1" latinLnBrk="0" hangingPunct="1">
+              <a:lnSpc>
+                <a:spcPct val="90000"/>
+              </a:lnSpc>
+              <a:spcBef>
+                <a:spcPct val="0"/>
+              </a:spcBef>
               <a:buNone/>
-            </a:pPr>
-            <a:endParaRPr lang="pt-BR" dirty="0"/>
-          </a:p>
-          <a:p>
-            <a:pPr lvl="1"/>
-            <a:endParaRPr lang="pt-BR" dirty="0"/>
+              <a:defRPr sz="4400" kern="1200">
+                <a:solidFill>
+                  <a:schemeClr val="tx1"/>
+                </a:solidFill>
+                <a:latin typeface="+mj-lt"/>
+                <a:ea typeface="+mj-ea"/>
+                <a:cs typeface="+mj-cs"/>
+              </a:defRPr>
+            </a:lvl1pPr>
+          </a:lstStyle>
+          <a:p>
+            <a:pPr algn="ctr"/>
+            <a:r>
+              <a:rPr lang="pt-BR" sz="6600" dirty="0"/>
+              <a:t>Perguntas?</a:t>
+            </a:r>
+            <a:endParaRPr lang="pt-BR" sz="6600" b="1" i="1" dirty="0"/>
           </a:p>
         </p:txBody>
       </p:sp>
     </p:spTree>
     <p:extLst>
       <p:ext uri="{BB962C8B-B14F-4D97-AF65-F5344CB8AC3E}">
-        <p14:creationId xmlns:p14="http://schemas.microsoft.com/office/powerpoint/2010/main" val="4049232955"/>
+        <p14:creationId xmlns:p14="http://schemas.microsoft.com/office/powerpoint/2010/main" val="3773005660"/>
       </p:ext>
     </p:extLst>
   </p:cSld>
@@ -5604,13 +5966,7 @@
   <p:cSld>
     <p:spTree>
       <p:nvGrpSpPr>
-        <p:cNvPr id="1" name="">
-          <a:extLst>
-            <a:ext uri="{FF2B5EF4-FFF2-40B4-BE49-F238E27FC236}">
-              <a16:creationId xmlns:a16="http://schemas.microsoft.com/office/drawing/2014/main" xmlns="" id="{6E3AB78C-4A70-ED33-6088-7D978AFBD15F}"/>
-            </a:ext>
-          </a:extLst>
-        </p:cNvPr>
+        <p:cNvPr id="1" name=""/>
         <p:cNvGrpSpPr/>
         <p:nvPr/>
       </p:nvGrpSpPr>
@@ -5624,244 +5980,64 @@
       </p:grpSpPr>
       <p:sp>
         <p:nvSpPr>
-          <p:cNvPr id="2" name="Título 1">
+          <p:cNvPr id="4" name="Título 1">
             <a:extLst>
               <a:ext uri="{FF2B5EF4-FFF2-40B4-BE49-F238E27FC236}">
-                <a16:creationId xmlns:a16="http://schemas.microsoft.com/office/drawing/2014/main" xmlns="" id="{20C0DDF2-0E52-0740-004B-2209C15740BF}"/>
+                <a16:creationId xmlns="" xmlns:a16="http://schemas.microsoft.com/office/drawing/2014/main" id="{32666AC8-2E17-4DB4-B0F5-60C640CCFD2E}"/>
               </a:ext>
             </a:extLst>
           </p:cNvPr>
-          <p:cNvSpPr>
-            <a:spLocks noGrp="1"/>
-          </p:cNvSpPr>
-          <p:nvPr>
-            <p:ph type="title"/>
-          </p:nvPr>
-        </p:nvSpPr>
-        <p:spPr/>
-        <p:txBody>
-          <a:bodyPr/>
-          <a:lstStyle/>
-          <a:p>
-            <a:r>
-              <a:rPr lang="pt-BR" dirty="0"/>
-              <a:t>Temas dos seminários</a:t>
-            </a:r>
-          </a:p>
-        </p:txBody>
-      </p:sp>
-      <p:sp>
-        <p:nvSpPr>
-          <p:cNvPr id="3" name="Espaço Reservado para Conteúdo 2">
-            <a:extLst>
-              <a:ext uri="{FF2B5EF4-FFF2-40B4-BE49-F238E27FC236}">
-                <a16:creationId xmlns:a16="http://schemas.microsoft.com/office/drawing/2014/main" xmlns="" id="{CAA14ED1-BBC4-3217-0C26-BBA0501ACF3D}"/>
-              </a:ext>
-            </a:extLst>
-          </p:cNvPr>
-          <p:cNvSpPr>
-            <a:spLocks noGrp="1"/>
-          </p:cNvSpPr>
-          <p:nvPr>
-            <p:ph idx="1"/>
-          </p:nvPr>
+          <p:cNvSpPr txBox="1">
+            <a:spLocks/>
+          </p:cNvSpPr>
+          <p:nvPr/>
         </p:nvSpPr>
         <p:spPr>
           <a:xfrm>
-            <a:off x="838199" y="1825624"/>
-            <a:ext cx="11092543" cy="5032376"/>
+            <a:off x="1431533" y="2720526"/>
+            <a:ext cx="9144000" cy="1029541"/>
           </a:xfrm>
+          <a:prstGeom prst="rect">
+            <a:avLst/>
+          </a:prstGeom>
         </p:spPr>
         <p:txBody>
-          <a:bodyPr>
+          <a:bodyPr vert="horz" lIns="91440" tIns="45720" rIns="91440" bIns="45720" rtlCol="0" anchor="ctr">
             <a:normAutofit/>
           </a:bodyPr>
-          <a:lstStyle/>
-          <a:p>
-            <a:r>
-              <a:rPr lang="pt-BR" dirty="0"/>
-              <a:t>Computer Vision: </a:t>
-            </a:r>
-            <a:r>
-              <a:rPr lang="pt-BR" dirty="0" err="1"/>
-              <a:t>Object</a:t>
-            </a:r>
-            <a:r>
-              <a:rPr lang="pt-BR" dirty="0"/>
-              <a:t> </a:t>
-            </a:r>
-            <a:r>
-              <a:rPr lang="pt-BR" dirty="0" err="1"/>
-              <a:t>Detection</a:t>
-            </a:r>
-            <a:endParaRPr lang="pt-BR" dirty="0"/>
-          </a:p>
-          <a:p>
-            <a:pPr lvl="1">
-              <a:buFont typeface="Wingdings" panose="05000000000000000000" pitchFamily="2" charset="2"/>
-              <a:buChar char="§"/>
-            </a:pPr>
-            <a:r>
-              <a:rPr lang="pt-BR" dirty="0" err="1"/>
-              <a:t>RetinaNet</a:t>
-            </a:r>
-            <a:endParaRPr lang="pt-BR" dirty="0"/>
-          </a:p>
-          <a:p>
-            <a:pPr lvl="2">
-              <a:buFont typeface="Wingdings" panose="05000000000000000000" pitchFamily="2" charset="2"/>
-              <a:buChar char="ü"/>
-            </a:pPr>
-            <a:r>
-              <a:rPr lang="pt-BR" dirty="0">
-                <a:hlinkClick r:id="rId2"/>
-              </a:rPr>
-              <a:t>https://arxiv.org/abs/1708.02002</a:t>
-            </a:r>
-          </a:p>
-          <a:p>
-            <a:pPr lvl="2">
-              <a:buFont typeface="Wingdings" panose="05000000000000000000" pitchFamily="2" charset="2"/>
-              <a:buChar char="ü"/>
-            </a:pPr>
-            <a:r>
-              <a:rPr lang="pt-BR" dirty="0">
-                <a:hlinkClick r:id="rId3"/>
-              </a:rPr>
-              <a:t>https://keras.io/examples/vision/retinanet/</a:t>
-            </a:r>
-            <a:endParaRPr lang="pt-BR" dirty="0"/>
-          </a:p>
-          <a:p>
-            <a:pPr lvl="1">
-              <a:buFont typeface="Wingdings" panose="05000000000000000000" pitchFamily="2" charset="2"/>
-              <a:buChar char="§"/>
-            </a:pPr>
-            <a:r>
-              <a:rPr lang="pt-BR" dirty="0" err="1">
-                <a:effectLst/>
-              </a:rPr>
-              <a:t>Faster</a:t>
-            </a:r>
-            <a:r>
-              <a:rPr lang="pt-BR" dirty="0">
-                <a:effectLst/>
-              </a:rPr>
-              <a:t> </a:t>
-            </a:r>
-            <a:r>
-              <a:rPr lang="pt-BR" dirty="0" err="1">
-                <a:effectLst/>
-              </a:rPr>
-              <a:t>Objects</a:t>
-            </a:r>
-            <a:r>
-              <a:rPr lang="pt-BR" dirty="0">
-                <a:effectLst/>
-              </a:rPr>
-              <a:t>, More </a:t>
-            </a:r>
-            <a:r>
-              <a:rPr lang="pt-BR" dirty="0" err="1">
-                <a:effectLst/>
-              </a:rPr>
-              <a:t>Objects</a:t>
-            </a:r>
-            <a:r>
-              <a:rPr lang="pt-BR" dirty="0">
-                <a:effectLst/>
-              </a:rPr>
-              <a:t> (</a:t>
-            </a:r>
-            <a:r>
-              <a:rPr lang="pt-BR" dirty="0"/>
-              <a:t>FOMO)</a:t>
-            </a:r>
-          </a:p>
-          <a:p>
-            <a:pPr lvl="2">
-              <a:buFont typeface="Wingdings" panose="05000000000000000000" pitchFamily="2" charset="2"/>
-              <a:buChar char="ü"/>
-            </a:pPr>
-            <a:r>
-              <a:rPr lang="pt-BR" dirty="0">
-                <a:hlinkClick r:id="rId4"/>
-              </a:rPr>
-              <a:t>https://docs.edgeimpulse.com/docs/edge-impulse-studio/learning-blocks/object-detection/fomo-object-detection-for-constrained-devices</a:t>
-            </a:r>
-            <a:endParaRPr lang="pt-BR" dirty="0"/>
-          </a:p>
-          <a:p>
-            <a:pPr lvl="2">
-              <a:buFont typeface="Wingdings" panose="05000000000000000000" pitchFamily="2" charset="2"/>
-              <a:buChar char="ü"/>
-            </a:pPr>
-            <a:r>
-              <a:rPr lang="pt-BR" dirty="0">
-                <a:hlinkClick r:id="rId5"/>
-              </a:rPr>
-              <a:t>https://docs.edgeimpulse.com/docs/tutorials/end-to-end-tutorials/object-detection/detect-objects-using-fomo</a:t>
-            </a:r>
-            <a:endParaRPr lang="pt-BR" dirty="0"/>
-          </a:p>
-          <a:p>
-            <a:pPr lvl="1">
-              <a:buFont typeface="Wingdings" panose="05000000000000000000" pitchFamily="2" charset="2"/>
-              <a:buChar char="§"/>
-            </a:pPr>
-            <a:r>
-              <a:rPr lang="en-US" dirty="0"/>
-              <a:t>DETRs Beat YOLOs on Real-time Object Detection</a:t>
-            </a:r>
-          </a:p>
-          <a:p>
-            <a:pPr lvl="2">
-              <a:buFont typeface="Wingdings" panose="05000000000000000000" pitchFamily="2" charset="2"/>
-              <a:buChar char="ü"/>
-            </a:pPr>
-            <a:r>
-              <a:rPr lang="pt-BR" dirty="0">
-                <a:hlinkClick r:id="rId6"/>
-              </a:rPr>
-              <a:t>https://arxiv.org/abs/2304.08069</a:t>
-            </a:r>
-            <a:endParaRPr lang="en-US" dirty="0"/>
-          </a:p>
-          <a:p>
-            <a:pPr lvl="2">
-              <a:buFont typeface="Wingdings" panose="05000000000000000000" pitchFamily="2" charset="2"/>
-              <a:buChar char="ü"/>
-            </a:pPr>
-            <a:r>
-              <a:rPr lang="pt-BR" dirty="0">
-                <a:hlinkClick r:id="rId7"/>
-              </a:rPr>
-              <a:t>https://github.com/lyuwenyu</a:t>
-            </a:r>
-            <a:r>
-              <a:rPr lang="pt-BR">
-                <a:hlinkClick r:id="rId7"/>
-              </a:rPr>
-              <a:t>/RT-DETR</a:t>
-            </a:r>
-            <a:endParaRPr lang="pt-BR" dirty="0"/>
-          </a:p>
-          <a:p>
-            <a:pPr marL="914400" lvl="2" indent="0">
+          <a:lstStyle>
+            <a:lvl1pPr algn="l" defTabSz="914400" rtl="0" eaLnBrk="1" latinLnBrk="0" hangingPunct="1">
+              <a:lnSpc>
+                <a:spcPct val="90000"/>
+              </a:lnSpc>
+              <a:spcBef>
+                <a:spcPct val="0"/>
+              </a:spcBef>
               <a:buNone/>
-            </a:pPr>
-            <a:endParaRPr lang="pt-BR" dirty="0"/>
-          </a:p>
-          <a:p>
-            <a:pPr lvl="1"/>
-            <a:endParaRPr lang="pt-BR" dirty="0"/>
+              <a:defRPr sz="4400" kern="1200">
+                <a:solidFill>
+                  <a:schemeClr val="tx1"/>
+                </a:solidFill>
+                <a:latin typeface="+mj-lt"/>
+                <a:ea typeface="+mj-ea"/>
+                <a:cs typeface="+mj-cs"/>
+              </a:defRPr>
+            </a:lvl1pPr>
+          </a:lstStyle>
+          <a:p>
+            <a:pPr algn="ctr"/>
+            <a:r>
+              <a:rPr lang="pt-BR" sz="6600" dirty="0"/>
+              <a:t>Obrigado!</a:t>
+            </a:r>
+            <a:endParaRPr lang="pt-BR" sz="6600" b="1" i="1" dirty="0"/>
           </a:p>
         </p:txBody>
       </p:sp>
     </p:spTree>
     <p:extLst>
       <p:ext uri="{BB962C8B-B14F-4D97-AF65-F5344CB8AC3E}">
-        <p14:creationId xmlns:p14="http://schemas.microsoft.com/office/powerpoint/2010/main" val="2341490666"/>
+        <p14:creationId xmlns:p14="http://schemas.microsoft.com/office/powerpoint/2010/main" val="2655704619"/>
       </p:ext>
     </p:extLst>
   </p:cSld>
@@ -5893,7 +6069,7 @@
           <p:cNvPr id="2" name="Título 1">
             <a:extLst>
               <a:ext uri="{FF2B5EF4-FFF2-40B4-BE49-F238E27FC236}">
-                <a16:creationId xmlns:a16="http://schemas.microsoft.com/office/drawing/2014/main" xmlns="" id="{F70C7E2D-5398-4F5E-7000-BA72FF1C6228}"/>
+                <a16:creationId xmlns="" xmlns:a16="http://schemas.microsoft.com/office/drawing/2014/main" id="{11BC2EE5-C8A9-A5C4-E79F-7ACA60564BF4}"/>
               </a:ext>
             </a:extLst>
           </p:cNvPr>
@@ -5921,7 +6097,7 @@
           <p:cNvPr id="3" name="Espaço Reservado para Conteúdo 2">
             <a:extLst>
               <a:ext uri="{FF2B5EF4-FFF2-40B4-BE49-F238E27FC236}">
-                <a16:creationId xmlns:a16="http://schemas.microsoft.com/office/drawing/2014/main" xmlns="" id="{BA790209-FBBD-71F4-6F9F-502DB6462A33}"/>
+                <a16:creationId xmlns="" xmlns:a16="http://schemas.microsoft.com/office/drawing/2014/main" id="{F34E1E4B-4890-7308-FDD9-BCFBF68A4D2F}"/>
               </a:ext>
             </a:extLst>
           </p:cNvPr>
@@ -5935,7 +6111,7 @@
         <p:spPr>
           <a:xfrm>
             <a:off x="838199" y="1825624"/>
-            <a:ext cx="11146971" cy="5032375"/>
+            <a:ext cx="11038115" cy="5032375"/>
           </a:xfrm>
         </p:spPr>
         <p:txBody>
@@ -5945,8 +6121,20 @@
           <a:lstStyle/>
           <a:p>
             <a:r>
-              <a:rPr lang="pt-BR" dirty="0"/>
-              <a:t>Computer Vision: </a:t>
+              <a:rPr lang="pt-BR" dirty="0" err="1"/>
+              <a:t>Generative</a:t>
+            </a:r>
+            <a:r>
+              <a:rPr lang="pt-BR" dirty="0"/>
+              <a:t> </a:t>
+            </a:r>
+            <a:r>
+              <a:rPr lang="pt-BR" dirty="0" err="1"/>
+              <a:t>deep</a:t>
+            </a:r>
+            <a:r>
+              <a:rPr lang="pt-BR" dirty="0"/>
+              <a:t> learning: </a:t>
             </a:r>
             <a:r>
               <a:rPr lang="pt-BR" dirty="0" err="1"/>
@@ -5954,75 +6142,166 @@
             </a:r>
             <a:r>
               <a:rPr lang="pt-BR" dirty="0"/>
+              <a:t> Generation</a:t>
+            </a:r>
+          </a:p>
+          <a:p>
+            <a:pPr lvl="1">
+              <a:buFont typeface="Wingdings" panose="05000000000000000000" pitchFamily="2" charset="2"/>
+              <a:buChar char="§"/>
+            </a:pPr>
+            <a:r>
+              <a:rPr lang="en-US" dirty="0">
+                <a:solidFill>
+                  <a:srgbClr val="000000"/>
+                </a:solidFill>
+              </a:rPr>
+              <a:t>D</a:t>
+            </a:r>
+            <a:r>
+              <a:rPr lang="en-US" b="0" i="0" dirty="0">
+                <a:solidFill>
+                  <a:srgbClr val="000000"/>
+                </a:solidFill>
+                <a:effectLst/>
+              </a:rPr>
+              <a:t>eep convolutional generative adversarial network (DCGAN)</a:t>
+            </a:r>
+          </a:p>
+          <a:p>
+            <a:pPr lvl="2">
+              <a:buFont typeface="Wingdings" panose="05000000000000000000" pitchFamily="2" charset="2"/>
+              <a:buChar char="ü"/>
+            </a:pPr>
+            <a:r>
+              <a:rPr lang="en-US" b="0" i="0" dirty="0">
+                <a:solidFill>
+                  <a:srgbClr val="000000"/>
+                </a:solidFill>
+                <a:effectLst/>
+                <a:hlinkClick r:id="rId2"/>
+              </a:rPr>
+              <a:t>https://arxiv.org/abs/1511.06434</a:t>
+            </a:r>
+            <a:endParaRPr lang="en-US" b="0" i="0" dirty="0">
+              <a:solidFill>
+                <a:srgbClr val="000000"/>
+              </a:solidFill>
+              <a:effectLst/>
+            </a:endParaRPr>
+          </a:p>
+          <a:p>
+            <a:pPr lvl="2">
+              <a:buFont typeface="Wingdings" panose="05000000000000000000" pitchFamily="2" charset="2"/>
+              <a:buChar char="ü"/>
+            </a:pPr>
+            <a:r>
+              <a:rPr lang="pt-BR" dirty="0">
+                <a:hlinkClick r:id="rId3"/>
+              </a:rPr>
+              <a:t>https://keras.io/examples/generative/dcgan_overriding_train_step/</a:t>
+            </a:r>
+            <a:endParaRPr lang="pt-BR" dirty="0"/>
+          </a:p>
+          <a:p>
+            <a:pPr lvl="1">
+              <a:buFont typeface="Wingdings" panose="05000000000000000000" pitchFamily="2" charset="2"/>
+              <a:buChar char="§"/>
+            </a:pPr>
+            <a:r>
+              <a:rPr lang="pt-BR" dirty="0" err="1">
+                <a:solidFill>
+                  <a:srgbClr val="202124"/>
+                </a:solidFill>
+              </a:rPr>
+              <a:t>Conditional</a:t>
+            </a:r>
+            <a:r>
+              <a:rPr lang="pt-BR" dirty="0">
+                <a:solidFill>
+                  <a:srgbClr val="202124"/>
+                </a:solidFill>
+              </a:rPr>
+              <a:t> GAN (CGAN)</a:t>
+            </a:r>
+          </a:p>
+          <a:p>
+            <a:pPr lvl="2">
+              <a:buFont typeface="Wingdings" panose="05000000000000000000" pitchFamily="2" charset="2"/>
+              <a:buChar char="ü"/>
+            </a:pPr>
+            <a:r>
+              <a:rPr lang="pt-BR" dirty="0">
+                <a:solidFill>
+                  <a:srgbClr val="202124"/>
+                </a:solidFill>
+                <a:hlinkClick r:id="rId4"/>
+              </a:rPr>
+              <a:t>https://arxiv.org/abs/1411.1784</a:t>
+            </a:r>
+            <a:endParaRPr lang="pt-BR" dirty="0">
+              <a:solidFill>
+                <a:srgbClr val="202124"/>
+              </a:solidFill>
+            </a:endParaRPr>
+          </a:p>
+          <a:p>
+            <a:pPr lvl="2">
+              <a:buFont typeface="Wingdings" panose="05000000000000000000" pitchFamily="2" charset="2"/>
+              <a:buChar char="ü"/>
+            </a:pPr>
+            <a:r>
+              <a:rPr lang="pt-BR" dirty="0">
+                <a:solidFill>
+                  <a:srgbClr val="202124"/>
+                </a:solidFill>
+                <a:hlinkClick r:id="rId5"/>
+              </a:rPr>
+              <a:t>https://keras.io/examples/generative/conditional_gan/</a:t>
+            </a:r>
+            <a:endParaRPr lang="pt-BR" dirty="0"/>
+          </a:p>
+          <a:p>
+            <a:pPr lvl="1">
+              <a:buFont typeface="Wingdings" panose="05000000000000000000" pitchFamily="2" charset="2"/>
+              <a:buChar char="§"/>
+            </a:pPr>
+            <a:r>
+              <a:rPr lang="pt-BR" b="0" i="0" dirty="0" err="1">
+                <a:solidFill>
+                  <a:srgbClr val="202124"/>
+                </a:solidFill>
+                <a:effectLst/>
+              </a:rPr>
+              <a:t>Variational</a:t>
+            </a:r>
+            <a:r>
+              <a:rPr lang="pt-BR" b="0" i="0" dirty="0">
+                <a:solidFill>
+                  <a:srgbClr val="202124"/>
+                </a:solidFill>
+                <a:effectLst/>
+              </a:rPr>
               <a:t> </a:t>
             </a:r>
             <a:r>
-              <a:rPr lang="pt-BR" dirty="0" err="1"/>
-              <a:t>Enhancement</a:t>
-            </a:r>
-            <a:endParaRPr lang="pt-BR" dirty="0"/>
-          </a:p>
-          <a:p>
-            <a:pPr lvl="1">
-              <a:buFont typeface="Wingdings" panose="05000000000000000000" pitchFamily="2" charset="2"/>
-              <a:buChar char="§"/>
-            </a:pPr>
-            <a:r>
-              <a:rPr lang="pt-BR" dirty="0" err="1"/>
-              <a:t>MIRNet</a:t>
-            </a:r>
-            <a:endParaRPr lang="pt-BR" dirty="0"/>
-          </a:p>
-          <a:p>
-            <a:pPr lvl="2">
-              <a:buFont typeface="Wingdings" panose="05000000000000000000" pitchFamily="2" charset="2"/>
-              <a:buChar char="ü"/>
-            </a:pPr>
-            <a:r>
-              <a:rPr lang="pt-BR" dirty="0">
-                <a:hlinkClick r:id="rId2"/>
-              </a:rPr>
-              <a:t>https://arxiv.org/abs/2003.06792</a:t>
-            </a:r>
-            <a:endParaRPr lang="pt-BR" dirty="0">
-              <a:hlinkClick r:id="rId3"/>
-            </a:endParaRPr>
-          </a:p>
-          <a:p>
-            <a:pPr lvl="2">
-              <a:buFont typeface="Wingdings" panose="05000000000000000000" pitchFamily="2" charset="2"/>
-              <a:buChar char="ü"/>
-            </a:pPr>
-            <a:r>
-              <a:rPr lang="pt-BR" dirty="0">
-                <a:hlinkClick r:id="rId4"/>
-              </a:rPr>
-              <a:t>https://keras.io/examples/vision/mirnet/</a:t>
-            </a:r>
-            <a:endParaRPr lang="pt-BR" dirty="0"/>
-          </a:p>
-          <a:p>
-            <a:pPr lvl="1">
-              <a:buFont typeface="Wingdings" panose="05000000000000000000" pitchFamily="2" charset="2"/>
-              <a:buChar char="§"/>
-            </a:pPr>
-            <a:r>
-              <a:rPr lang="en-US" dirty="0"/>
-              <a:t>Enhanced Deep Residual Networks for Single Image Super-Resolution (EDSR)</a:t>
-            </a:r>
-          </a:p>
-          <a:p>
-            <a:pPr lvl="2">
-              <a:buFont typeface="Wingdings" panose="05000000000000000000" pitchFamily="2" charset="2"/>
-              <a:buChar char="ü"/>
-            </a:pPr>
-            <a:r>
-              <a:rPr lang="pt-BR" dirty="0">
-                <a:hlinkClick r:id="rId5"/>
-              </a:rPr>
-              <a:t>https://arxiv.org/abs/1707.02921</a:t>
-            </a:r>
-            <a:endParaRPr lang="pt-BR" dirty="0"/>
+              <a:rPr lang="pt-BR" b="0" i="0" dirty="0" err="1">
+                <a:solidFill>
+                  <a:srgbClr val="202124"/>
+                </a:solidFill>
+                <a:effectLst/>
+              </a:rPr>
+              <a:t>Autoencoder</a:t>
+            </a:r>
+            <a:r>
+              <a:rPr lang="pt-BR" b="0" i="0" dirty="0">
+                <a:solidFill>
+                  <a:srgbClr val="202124"/>
+                </a:solidFill>
+                <a:effectLst/>
+              </a:rPr>
+              <a:t> (VAE)</a:t>
+            </a:r>
           </a:p>
           <a:p>
             <a:pPr lvl="2">
@@ -6033,30 +6312,13 @@
               <a:rPr lang="pt-BR" dirty="0">
                 <a:hlinkClick r:id="rId6"/>
               </a:rPr>
-              <a:t>https://keras.io/examples/vision/edsr/</a:t>
-            </a:r>
-            <a:endParaRPr lang="pt-BR" dirty="0"/>
-          </a:p>
-          <a:p>
-            <a:r>
-              <a:rPr lang="pt-BR" dirty="0"/>
-              <a:t>Computer Vision: Performance </a:t>
-            </a:r>
-            <a:r>
-              <a:rPr lang="pt-BR" dirty="0" err="1"/>
-              <a:t>recipes</a:t>
-            </a:r>
-            <a:endParaRPr lang="pt-BR" sz="2400" dirty="0"/>
-          </a:p>
-          <a:p>
-            <a:pPr lvl="1">
-              <a:buFont typeface="Wingdings" panose="05000000000000000000" pitchFamily="2" charset="2"/>
-              <a:buChar char="§"/>
-            </a:pPr>
-            <a:r>
-              <a:rPr lang="en-US" dirty="0"/>
-              <a:t>Learning to Resize in Computer Vision</a:t>
-            </a:r>
+              <a:t>https://arxiv.org/abs/1312.6114</a:t>
+            </a:r>
+            <a:endParaRPr lang="pt-BR" dirty="0">
+              <a:solidFill>
+                <a:srgbClr val="202124"/>
+              </a:solidFill>
+            </a:endParaRPr>
           </a:p>
           <a:p>
             <a:pPr lvl="2">
@@ -6064,27 +6326,11 @@
               <a:buChar char="ü"/>
             </a:pPr>
             <a:r>
-              <a:rPr lang="en-US" dirty="0">
+              <a:rPr lang="pt-BR" dirty="0">
                 <a:hlinkClick r:id="rId7"/>
               </a:rPr>
-              <a:t>https://arxiv.org/abs/2103.09950v1</a:t>
-            </a:r>
-            <a:endParaRPr lang="en-US" dirty="0"/>
-          </a:p>
-          <a:p>
-            <a:pPr lvl="2">
-              <a:buFont typeface="Wingdings" panose="05000000000000000000" pitchFamily="2" charset="2"/>
-              <a:buChar char="ü"/>
-            </a:pPr>
-            <a:r>
-              <a:rPr lang="pt-BR" dirty="0">
-                <a:hlinkClick r:id="rId8"/>
-              </a:rPr>
-              <a:t>https://keras.io/examples/vision/learnable_resizer/</a:t>
-            </a:r>
-            <a:endParaRPr lang="pt-BR" dirty="0"/>
-          </a:p>
-          <a:p>
+              <a:t>https://www.tensorflow.org/tutorials/generative/cvae?hl=en</a:t>
+            </a:r>
             <a:endParaRPr lang="pt-BR" dirty="0"/>
           </a:p>
         </p:txBody>
@@ -6092,7 +6338,7 @@
     </p:spTree>
     <p:extLst>
       <p:ext uri="{BB962C8B-B14F-4D97-AF65-F5344CB8AC3E}">
-        <p14:creationId xmlns:p14="http://schemas.microsoft.com/office/powerpoint/2010/main" val="4111675567"/>
+        <p14:creationId xmlns:p14="http://schemas.microsoft.com/office/powerpoint/2010/main" val="901082443"/>
       </p:ext>
     </p:extLst>
   </p:cSld>
@@ -6124,7 +6370,7 @@
           <p:cNvPr id="2" name="Título 1">
             <a:extLst>
               <a:ext uri="{FF2B5EF4-FFF2-40B4-BE49-F238E27FC236}">
-                <a16:creationId xmlns:a16="http://schemas.microsoft.com/office/drawing/2014/main" xmlns="" id="{F70C7E2D-5398-4F5E-7000-BA72FF1C6228}"/>
+                <a16:creationId xmlns="" xmlns:a16="http://schemas.microsoft.com/office/drawing/2014/main" id="{11BC2EE5-C8A9-A5C4-E79F-7ACA60564BF4}"/>
               </a:ext>
             </a:extLst>
           </p:cNvPr>
@@ -6152,7 +6398,7 @@
           <p:cNvPr id="3" name="Espaço Reservado para Conteúdo 2">
             <a:extLst>
               <a:ext uri="{FF2B5EF4-FFF2-40B4-BE49-F238E27FC236}">
-                <a16:creationId xmlns:a16="http://schemas.microsoft.com/office/drawing/2014/main" xmlns="" id="{BA790209-FBBD-71F4-6F9F-502DB6462A33}"/>
+                <a16:creationId xmlns="" xmlns:a16="http://schemas.microsoft.com/office/drawing/2014/main" id="{F34E1E4B-4890-7308-FDD9-BCFBF68A4D2F}"/>
               </a:ext>
             </a:extLst>
           </p:cNvPr>
@@ -6163,15 +6409,103 @@
             <p:ph idx="1"/>
           </p:nvPr>
         </p:nvSpPr>
-        <p:spPr/>
-        <p:txBody>
-          <a:bodyPr/>
+        <p:spPr>
+          <a:xfrm>
+            <a:off x="838200" y="1825624"/>
+            <a:ext cx="11016344" cy="5032375"/>
+          </a:xfrm>
+        </p:spPr>
+        <p:txBody>
+          <a:bodyPr>
+            <a:normAutofit/>
+          </a:bodyPr>
           <a:lstStyle/>
           <a:p>
             <a:r>
-              <a:rPr lang="pt-BR" dirty="0"/>
-              <a:t>Computer Vision: </a:t>
-            </a:r>
+              <a:rPr lang="pt-BR" dirty="0" err="1"/>
+              <a:t>Generative</a:t>
+            </a:r>
+            <a:r>
+              <a:rPr lang="pt-BR" dirty="0"/>
+              <a:t> </a:t>
+            </a:r>
+            <a:r>
+              <a:rPr lang="pt-BR" dirty="0" err="1"/>
+              <a:t>deep</a:t>
+            </a:r>
+            <a:r>
+              <a:rPr lang="pt-BR" dirty="0"/>
+              <a:t> learning: </a:t>
+            </a:r>
+            <a:r>
+              <a:rPr lang="pt-BR" dirty="0" err="1"/>
+              <a:t>Image</a:t>
+            </a:r>
+            <a:r>
+              <a:rPr lang="pt-BR" dirty="0"/>
+              <a:t> Generation</a:t>
+            </a:r>
+          </a:p>
+          <a:p>
+            <a:pPr lvl="1">
+              <a:buFont typeface="Wingdings" panose="05000000000000000000" pitchFamily="2" charset="2"/>
+              <a:buChar char="§"/>
+            </a:pPr>
+            <a:r>
+              <a:rPr lang="en-US" b="0" i="0" dirty="0" err="1">
+                <a:solidFill>
+                  <a:srgbClr val="000000"/>
+                </a:solidFill>
+                <a:effectLst/>
+              </a:rPr>
+              <a:t>OOTDiffusion</a:t>
+            </a:r>
+            <a:r>
+              <a:rPr lang="en-US" b="0" i="0" dirty="0">
+                <a:solidFill>
+                  <a:srgbClr val="000000"/>
+                </a:solidFill>
+                <a:effectLst/>
+              </a:rPr>
+              <a:t>: Outfitting Fusion based Latent Diffusion for Controllable Virtual Try-on</a:t>
+            </a:r>
+          </a:p>
+          <a:p>
+            <a:pPr lvl="2">
+              <a:buFont typeface="Wingdings" panose="05000000000000000000" pitchFamily="2" charset="2"/>
+              <a:buChar char="ü"/>
+            </a:pPr>
+            <a:r>
+              <a:rPr lang="pt-BR" dirty="0">
+                <a:hlinkClick r:id="rId2"/>
+              </a:rPr>
+              <a:t>https://arxiv.org/abs/2403.01779</a:t>
+            </a:r>
+            <a:endParaRPr lang="en-US" dirty="0">
+              <a:solidFill>
+                <a:srgbClr val="000000"/>
+              </a:solidFill>
+              <a:latin typeface="Lato" panose="020F0502020204030203" pitchFamily="34" charset="0"/>
+            </a:endParaRPr>
+          </a:p>
+          <a:p>
+            <a:pPr lvl="2">
+              <a:buFont typeface="Wingdings" panose="05000000000000000000" pitchFamily="2" charset="2"/>
+              <a:buChar char="ü"/>
+            </a:pPr>
+            <a:r>
+              <a:rPr lang="pt-BR" dirty="0">
+                <a:hlinkClick r:id="rId3"/>
+              </a:rPr>
+              <a:t>https://paperswithcode.com/paper/ootdiffusion-outfitting-fusion-based-latent</a:t>
+            </a:r>
+            <a:endParaRPr lang="pt-BR" dirty="0"/>
+          </a:p>
+          <a:p>
+            <a:pPr lvl="1">
+              <a:buFont typeface="Wingdings" panose="05000000000000000000" pitchFamily="2" charset="2"/>
+              <a:buChar char="§"/>
+            </a:pPr>
             <a:r>
               <a:rPr lang="pt-BR" b="0" i="0" dirty="0">
                 <a:solidFill>
@@ -6179,7 +6513,7 @@
                 </a:solidFill>
                 <a:effectLst/>
               </a:rPr>
-              <a:t>3D </a:t>
+              <a:t>V3D: </a:t>
             </a:r>
             <a:r>
               <a:rPr lang="pt-BR" b="0" i="0" dirty="0" err="1">
@@ -6188,7 +6522,7 @@
                 </a:solidFill>
                 <a:effectLst/>
               </a:rPr>
-              <a:t>Object</a:t>
+              <a:t>Video</a:t>
             </a:r>
             <a:r>
               <a:rPr lang="pt-BR" b="0" i="0" dirty="0">
@@ -6206,7 +6540,43 @@
                 </a:solidFill>
                 <a:effectLst/>
               </a:rPr>
-              <a:t>Reconstruction</a:t>
+              <a:t>Diffusion</a:t>
+            </a:r>
+            <a:r>
+              <a:rPr lang="pt-BR" b="0" i="0" dirty="0">
+                <a:solidFill>
+                  <a:srgbClr val="000000"/>
+                </a:solidFill>
+                <a:effectLst/>
+              </a:rPr>
+              <a:t> Models are </a:t>
+            </a:r>
+            <a:r>
+              <a:rPr lang="pt-BR" b="0" i="0" dirty="0" err="1">
+                <a:solidFill>
+                  <a:srgbClr val="000000"/>
+                </a:solidFill>
+                <a:effectLst/>
+              </a:rPr>
+              <a:t>Effective</a:t>
+            </a:r>
+            <a:r>
+              <a:rPr lang="pt-BR" b="0" i="0" dirty="0">
+                <a:solidFill>
+                  <a:srgbClr val="000000"/>
+                </a:solidFill>
+                <a:effectLst/>
+              </a:rPr>
+              <a:t> 3D </a:t>
+            </a:r>
+            <a:r>
+              <a:rPr lang="pt-BR" b="0" i="0" dirty="0" err="1">
+                <a:solidFill>
+                  <a:srgbClr val="000000"/>
+                </a:solidFill>
+                <a:effectLst/>
+              </a:rPr>
+              <a:t>Generators</a:t>
             </a:r>
             <a:endParaRPr lang="pt-BR" b="0" i="0" dirty="0">
               <a:solidFill>
@@ -6216,87 +6586,54 @@
             </a:endParaRPr>
           </a:p>
           <a:p>
-            <a:pPr lvl="1">
-              <a:buFont typeface="Wingdings" panose="05000000000000000000" pitchFamily="2" charset="2"/>
-              <a:buChar char="§"/>
-            </a:pPr>
-            <a:r>
-              <a:rPr lang="en-US" b="0" i="0" dirty="0" err="1">
+            <a:pPr lvl="2">
+              <a:buFont typeface="Wingdings" panose="05000000000000000000" pitchFamily="2" charset="2"/>
+              <a:buChar char="ü"/>
+            </a:pPr>
+            <a:r>
+              <a:rPr lang="pt-BR" b="0" i="0" dirty="0">
                 <a:solidFill>
                   <a:srgbClr val="000000"/>
                 </a:solidFill>
                 <a:effectLst/>
-              </a:rPr>
-              <a:t>TripoSR</a:t>
-            </a:r>
-            <a:r>
-              <a:rPr lang="en-US" b="0" i="0" dirty="0">
+                <a:hlinkClick r:id="rId4"/>
+              </a:rPr>
+              <a:t>https://arxiv.org/abs/2403.06738</a:t>
+            </a:r>
+            <a:endParaRPr lang="pt-BR" dirty="0">
+              <a:solidFill>
+                <a:srgbClr val="000000"/>
+              </a:solidFill>
+            </a:endParaRPr>
+          </a:p>
+          <a:p>
+            <a:pPr lvl="2">
+              <a:buFont typeface="Wingdings" panose="05000000000000000000" pitchFamily="2" charset="2"/>
+              <a:buChar char="ü"/>
+            </a:pPr>
+            <a:r>
+              <a:rPr lang="pt-BR" b="0" i="0" dirty="0">
                 <a:solidFill>
                   <a:srgbClr val="000000"/>
                 </a:solidFill>
                 <a:effectLst/>
-              </a:rPr>
-              <a:t>: Fast 3D Object Reconstruction from a Single Image</a:t>
-            </a:r>
-            <a:endParaRPr lang="pt-BR" dirty="0">
-              <a:hlinkClick r:id="rId2"/>
+                <a:hlinkClick r:id="rId5"/>
+              </a:rPr>
+              <a:t>https://paperswithcode.com/paper/v3d-video-diffusion-models-are-effective-3d</a:t>
+            </a:r>
+            <a:endParaRPr lang="pt-BR" b="0" i="0" dirty="0">
+              <a:solidFill>
+                <a:srgbClr val="000000"/>
+              </a:solidFill>
+              <a:effectLst/>
             </a:endParaRPr>
-          </a:p>
-          <a:p>
-            <a:pPr lvl="2">
-              <a:buFont typeface="Wingdings" panose="05000000000000000000" pitchFamily="2" charset="2"/>
-              <a:buChar char="ü"/>
-            </a:pPr>
-            <a:r>
-              <a:rPr lang="pt-BR" dirty="0">
-                <a:hlinkClick r:id="rId2"/>
-              </a:rPr>
-              <a:t>https://arxiv.org/abs/2403.02151</a:t>
-            </a:r>
-            <a:endParaRPr lang="pt-BR" dirty="0"/>
-          </a:p>
-          <a:p>
-            <a:pPr lvl="2">
-              <a:buFont typeface="Wingdings" panose="05000000000000000000" pitchFamily="2" charset="2"/>
-              <a:buChar char="ü"/>
-            </a:pPr>
-            <a:r>
-              <a:rPr lang="pt-BR" dirty="0">
-                <a:hlinkClick r:id="rId3"/>
-              </a:rPr>
-              <a:t>https://paperswithcode.com/paper/triposr-fast-3d-object-reconstruction-from-a</a:t>
-            </a:r>
-            <a:endParaRPr lang="pt-BR" dirty="0"/>
-          </a:p>
-          <a:p>
-            <a:pPr lvl="1"/>
-            <a:endParaRPr lang="pt-BR" dirty="0"/>
-          </a:p>
-          <a:p>
-            <a:pPr marL="914400" lvl="2" indent="0">
-              <a:buNone/>
-            </a:pPr>
-            <a:endParaRPr lang="pt-BR" dirty="0"/>
-          </a:p>
-          <a:p>
-            <a:pPr marL="914400" lvl="2" indent="0">
-              <a:buNone/>
-            </a:pPr>
-            <a:endParaRPr lang="pt-BR" dirty="0"/>
-          </a:p>
-          <a:p>
-            <a:pPr lvl="1"/>
-            <a:endParaRPr lang="pt-BR" dirty="0"/>
-          </a:p>
-          <a:p>
-            <a:endParaRPr lang="pt-BR" dirty="0"/>
           </a:p>
         </p:txBody>
       </p:sp>
     </p:spTree>
     <p:extLst>
       <p:ext uri="{BB962C8B-B14F-4D97-AF65-F5344CB8AC3E}">
-        <p14:creationId xmlns:p14="http://schemas.microsoft.com/office/powerpoint/2010/main" val="548121964"/>
+        <p14:creationId xmlns:p14="http://schemas.microsoft.com/office/powerpoint/2010/main" val="137910132"/>
       </p:ext>
     </p:extLst>
   </p:cSld>
@@ -6314,7 +6651,7 @@
         <p:cNvPr id="1" name="">
           <a:extLst>
             <a:ext uri="{FF2B5EF4-FFF2-40B4-BE49-F238E27FC236}">
-              <a16:creationId xmlns:a16="http://schemas.microsoft.com/office/drawing/2014/main" xmlns="" id="{F2050D32-3E32-0E68-EE2F-10DEBF5F9E34}"/>
+              <a16:creationId xmlns="" xmlns:a16="http://schemas.microsoft.com/office/drawing/2014/main" id="{7617B87B-9451-26E5-143E-DFEF71434E9F}"/>
             </a:ext>
           </a:extLst>
         </p:cNvPr>
@@ -6334,7 +6671,7 @@
           <p:cNvPr id="2" name="Título 1">
             <a:extLst>
               <a:ext uri="{FF2B5EF4-FFF2-40B4-BE49-F238E27FC236}">
-                <a16:creationId xmlns:a16="http://schemas.microsoft.com/office/drawing/2014/main" xmlns="" id="{06C9BF47-FE25-64EB-E7D8-257F36BF0637}"/>
+                <a16:creationId xmlns="" xmlns:a16="http://schemas.microsoft.com/office/drawing/2014/main" id="{530D8C5D-85CB-1EC5-46EE-3E9C5D6E11D6}"/>
               </a:ext>
             </a:extLst>
           </p:cNvPr>
@@ -6362,7 +6699,7 @@
           <p:cNvPr id="3" name="Espaço Reservado para Conteúdo 2">
             <a:extLst>
               <a:ext uri="{FF2B5EF4-FFF2-40B4-BE49-F238E27FC236}">
-                <a16:creationId xmlns:a16="http://schemas.microsoft.com/office/drawing/2014/main" xmlns="" id="{85CD2A47-67FC-5F78-FB47-48CDDDA1C93F}"/>
+                <a16:creationId xmlns="" xmlns:a16="http://schemas.microsoft.com/office/drawing/2014/main" id="{4C11FF3E-C7A6-AE98-273A-28F266ADBFC3}"/>
               </a:ext>
             </a:extLst>
           </p:cNvPr>
@@ -6375,24 +6712,31 @@
         </p:nvSpPr>
         <p:spPr>
           <a:xfrm>
-            <a:off x="838199" y="1825624"/>
-            <a:ext cx="11005457" cy="5032375"/>
+            <a:off x="838200" y="1825624"/>
+            <a:ext cx="11201400" cy="5032375"/>
           </a:xfrm>
         </p:spPr>
         <p:txBody>
-          <a:bodyPr>
-            <a:normAutofit/>
-          </a:bodyPr>
+          <a:bodyPr/>
           <a:lstStyle/>
           <a:p>
             <a:r>
+              <a:rPr lang="pt-BR" dirty="0"/>
+              <a:t>Computer Vision: </a:t>
+            </a:r>
+            <a:r>
               <a:rPr lang="pt-BR" dirty="0" err="1"/>
-              <a:t>Reinforcement</a:t>
-            </a:r>
-            <a:r>
-              <a:rPr lang="pt-BR" dirty="0"/>
-              <a:t> Learning</a:t>
-            </a:r>
+              <a:t>Image</a:t>
+            </a:r>
+            <a:r>
+              <a:rPr lang="pt-BR" dirty="0"/>
+              <a:t> </a:t>
+            </a:r>
+            <a:r>
+              <a:rPr lang="pt-BR" dirty="0" err="1"/>
+              <a:t>classification</a:t>
+            </a:r>
+            <a:endParaRPr lang="pt-BR" dirty="0"/>
           </a:p>
           <a:p>
             <a:pPr lvl="1">
@@ -6400,16 +6744,12 @@
               <a:buChar char="§"/>
             </a:pPr>
             <a:r>
+              <a:rPr lang="pt-BR" dirty="0"/>
+              <a:t>Vision </a:t>
+            </a:r>
+            <a:r>
               <a:rPr lang="pt-BR" dirty="0" err="1"/>
-              <a:t>Deep</a:t>
-            </a:r>
-            <a:r>
-              <a:rPr lang="pt-BR" dirty="0"/>
-              <a:t> </a:t>
-            </a:r>
-            <a:r>
-              <a:rPr lang="pt-BR" dirty="0" err="1"/>
-              <a:t>Q-Learning</a:t>
+              <a:t>Transformer</a:t>
             </a:r>
             <a:endParaRPr lang="pt-BR" dirty="0"/>
           </a:p>
@@ -6422,7 +6762,7 @@
               <a:rPr lang="pt-BR" dirty="0">
                 <a:hlinkClick r:id="rId2"/>
               </a:rPr>
-              <a:t>https://storage.googleapis.com/deepmind-media/dqn/DQNNaturePaper.pdf</a:t>
+              <a:t>https://arxiv.org/abs/2010.11929</a:t>
             </a:r>
             <a:endParaRPr lang="pt-BR" dirty="0"/>
           </a:p>
@@ -6435,7 +6775,26 @@
               <a:rPr lang="pt-BR" dirty="0">
                 <a:hlinkClick r:id="rId3"/>
               </a:rPr>
-              <a:t>https://keras.io/examples/rl/deep_q_network_breakout/</a:t>
+              <a:t>https://keras.io/examples/vision/image_classification_with_vision_transformer/</a:t>
+            </a:r>
+            <a:endParaRPr lang="pt-BR" dirty="0"/>
+          </a:p>
+          <a:p>
+            <a:pPr lvl="1">
+              <a:buFont typeface="Wingdings" panose="05000000000000000000" pitchFamily="2" charset="2"/>
+              <a:buChar char="§"/>
+            </a:pPr>
+            <a:r>
+              <a:rPr lang="pt-BR" dirty="0" err="1"/>
+              <a:t>Swin</a:t>
+            </a:r>
+            <a:r>
+              <a:rPr lang="pt-BR" dirty="0"/>
+              <a:t> </a:t>
+            </a:r>
+            <a:r>
+              <a:rPr lang="pt-BR" dirty="0" err="1"/>
+              <a:t>Transformer</a:t>
             </a:r>
             <a:endParaRPr lang="pt-BR" dirty="0"/>
           </a:p>
@@ -6448,19 +6807,43 @@
               <a:rPr lang="pt-BR" dirty="0">
                 <a:hlinkClick r:id="rId4"/>
               </a:rPr>
-              <a:t>https://www.tensorflow.org/agents/tutorials/0_intro_rl?hl=pt-br</a:t>
+              <a:t>https://arxiv.org/abs/2103.14030</a:t>
             </a:r>
             <a:endParaRPr lang="pt-BR" dirty="0"/>
           </a:p>
           <a:p>
+            <a:pPr lvl="2">
+              <a:buFont typeface="Wingdings" panose="05000000000000000000" pitchFamily="2" charset="2"/>
+              <a:buChar char="ü"/>
+            </a:pPr>
+            <a:r>
+              <a:rPr lang="pt-BR" dirty="0">
+                <a:hlinkClick r:id="rId5"/>
+              </a:rPr>
+              <a:t>https://keras.io/examples/vision/swin_transformers/</a:t>
+            </a:r>
+            <a:endParaRPr lang="pt-BR" dirty="0"/>
+          </a:p>
+          <a:p>
             <a:pPr lvl="1">
               <a:buFont typeface="Wingdings" panose="05000000000000000000" pitchFamily="2" charset="2"/>
               <a:buChar char="§"/>
             </a:pPr>
             <a:r>
-              <a:rPr lang="en-US" dirty="0"/>
-              <a:t>Deep Deterministic Policy Gradient (DDPG)</a:t>
-            </a:r>
+              <a:rPr lang="pt-BR" i="0" dirty="0" err="1">
+                <a:solidFill>
+                  <a:srgbClr val="212529"/>
+                </a:solidFill>
+                <a:effectLst/>
+              </a:rPr>
+              <a:t>Reptile</a:t>
+            </a:r>
+            <a:endParaRPr lang="pt-BR" i="0" dirty="0">
+              <a:solidFill>
+                <a:srgbClr val="212529"/>
+              </a:solidFill>
+              <a:effectLst/>
+            </a:endParaRPr>
           </a:p>
           <a:p>
             <a:pPr lvl="2">
@@ -6468,50 +6851,10 @@
               <a:buChar char="ü"/>
             </a:pPr>
             <a:r>
-              <a:rPr lang="en-US" dirty="0">
-                <a:hlinkClick r:id="rId5"/>
-              </a:rPr>
-              <a:t>https://arxiv.org/pdf/1509.02971.pdf</a:t>
-            </a:r>
-            <a:endParaRPr lang="en-US" dirty="0"/>
-          </a:p>
-          <a:p>
-            <a:pPr lvl="2">
-              <a:buFont typeface="Wingdings" panose="05000000000000000000" pitchFamily="2" charset="2"/>
-              <a:buChar char="ü"/>
-            </a:pPr>
-            <a:r>
-              <a:rPr lang="en-US" dirty="0">
+              <a:rPr lang="pt-BR" dirty="0">
                 <a:hlinkClick r:id="rId6"/>
               </a:rPr>
-              <a:t>https://keras.io/examples/rl/ddpg_pendulum/</a:t>
-            </a:r>
-            <a:endParaRPr lang="en-US" dirty="0"/>
-          </a:p>
-          <a:p>
-            <a:pPr lvl="1">
-              <a:buFont typeface="Wingdings" panose="05000000000000000000" pitchFamily="2" charset="2"/>
-              <a:buChar char="§"/>
-            </a:pPr>
-            <a:r>
-              <a:rPr lang="pt-BR" dirty="0" err="1"/>
-              <a:t>Actor</a:t>
-            </a:r>
-            <a:r>
-              <a:rPr lang="pt-BR" dirty="0"/>
-              <a:t> </a:t>
-            </a:r>
-            <a:r>
-              <a:rPr lang="pt-BR" dirty="0" err="1"/>
-              <a:t>Critic</a:t>
-            </a:r>
-            <a:r>
-              <a:rPr lang="pt-BR" dirty="0"/>
-              <a:t> </a:t>
-            </a:r>
-            <a:r>
-              <a:rPr lang="pt-BR" dirty="0" err="1"/>
-              <a:t>Method</a:t>
+              <a:t>https://arxiv.org/abs/1803.02999</a:t>
             </a:r>
             <a:endParaRPr lang="pt-BR" dirty="0"/>
           </a:p>
@@ -6524,9 +6867,33 @@
               <a:rPr lang="pt-BR" dirty="0">
                 <a:hlinkClick r:id="rId7"/>
               </a:rPr>
-              <a:t>https://inria.hal.science/hal-00840470/document</a:t>
+              <a:t>https://keras.io/examples/vision/reptile/</a:t>
             </a:r>
             <a:endParaRPr lang="pt-BR" dirty="0"/>
+          </a:p>
+          <a:p>
+            <a:pPr lvl="1">
+              <a:buFont typeface="Wingdings" panose="05000000000000000000" pitchFamily="2" charset="2"/>
+              <a:buChar char="§"/>
+            </a:pPr>
+            <a:r>
+              <a:rPr lang="en-US" b="0" i="0" dirty="0" err="1">
+                <a:solidFill>
+                  <a:srgbClr val="000000"/>
+                </a:solidFill>
+                <a:effectLst/>
+              </a:rPr>
+              <a:t>RegNet</a:t>
+            </a:r>
+            <a:r>
+              <a:rPr lang="en-US" b="0" i="0" dirty="0">
+                <a:solidFill>
+                  <a:srgbClr val="000000"/>
+                </a:solidFill>
+                <a:effectLst/>
+              </a:rPr>
+              <a:t>: Self-Regulated Network for Image Classification</a:t>
+            </a:r>
           </a:p>
           <a:p>
             <a:pPr lvl="2">
@@ -6537,49 +6904,25 @@
               <a:rPr lang="pt-BR" dirty="0">
                 <a:hlinkClick r:id="rId8"/>
               </a:rPr>
-              <a:t>https://keras.io/examples/rl/actor_critic_cartpole/</a:t>
-            </a:r>
-            <a:endParaRPr lang="pt-BR" dirty="0"/>
-          </a:p>
-          <a:p>
-            <a:pPr marL="914400" lvl="2" indent="0">
-              <a:buNone/>
-            </a:pPr>
-            <a:endParaRPr lang="pt-BR" sz="2400" dirty="0"/>
-          </a:p>
-          <a:p>
-            <a:pPr marL="0" indent="0">
-              <a:buNone/>
-            </a:pPr>
-            <a:endParaRPr lang="en-US" sz="2400" dirty="0"/>
-          </a:p>
-          <a:p>
-            <a:pPr marL="914400" lvl="2" indent="0">
-              <a:buNone/>
-            </a:pPr>
-            <a:endParaRPr lang="en-US" sz="2400" dirty="0"/>
+              <a:t>https://arxiv.org/abs/2101.00590</a:t>
+            </a:r>
+            <a:endParaRPr lang="en-US" dirty="0">
+              <a:solidFill>
+                <a:srgbClr val="000000"/>
+              </a:solidFill>
+            </a:endParaRPr>
           </a:p>
           <a:p>
             <a:pPr lvl="2">
               <a:buFont typeface="Wingdings" panose="05000000000000000000" pitchFamily="2" charset="2"/>
               <a:buChar char="ü"/>
             </a:pPr>
-            <a:endParaRPr lang="pt-BR" dirty="0"/>
-          </a:p>
-          <a:p>
-            <a:pPr marL="914400" lvl="2" indent="0">
-              <a:buNone/>
-            </a:pPr>
-            <a:endParaRPr lang="pt-BR" dirty="0"/>
-          </a:p>
-          <a:p>
-            <a:pPr marL="914400" lvl="2" indent="0">
-              <a:buNone/>
-            </a:pPr>
-            <a:endParaRPr lang="pt-BR" dirty="0"/>
-          </a:p>
-          <a:p>
-            <a:pPr lvl="1"/>
+            <a:r>
+              <a:rPr lang="pt-BR" dirty="0">
+                <a:hlinkClick r:id="rId9"/>
+              </a:rPr>
+              <a:t>https://paperswithcode.com/paper/regnet-self-regulated-network-for-image</a:t>
+            </a:r>
             <a:endParaRPr lang="pt-BR" dirty="0"/>
           </a:p>
         </p:txBody>
@@ -6587,20 +6930,13 @@
     </p:spTree>
     <p:extLst>
       <p:ext uri="{BB962C8B-B14F-4D97-AF65-F5344CB8AC3E}">
-        <p14:creationId xmlns:p14="http://schemas.microsoft.com/office/powerpoint/2010/main" val="204600414"/>
+        <p14:creationId xmlns:p14="http://schemas.microsoft.com/office/powerpoint/2010/main" val="1413877808"/>
       </p:ext>
     </p:extLst>
   </p:cSld>
   <p:clrMapOvr>
     <a:masterClrMapping/>
   </p:clrMapOvr>
-  <p:timing>
-    <p:tnLst>
-      <p:par>
-        <p:cTn id="1" dur="indefinite" restart="never" nodeType="tmRoot"/>
-      </p:par>
-    </p:tnLst>
-  </p:timing>
 </p:sld>
 </file>
 
@@ -6612,7 +6948,7 @@
         <p:cNvPr id="1" name="">
           <a:extLst>
             <a:ext uri="{FF2B5EF4-FFF2-40B4-BE49-F238E27FC236}">
-              <a16:creationId xmlns:a16="http://schemas.microsoft.com/office/drawing/2014/main" xmlns="" id="{4059CF8C-A5CA-D922-15C9-90E83F41C16F}"/>
+              <a16:creationId xmlns="" xmlns:a16="http://schemas.microsoft.com/office/drawing/2014/main" id="{C27B3849-BF4B-F30A-23EA-9FE30E20CBCA}"/>
             </a:ext>
           </a:extLst>
         </p:cNvPr>
@@ -6632,7 +6968,7 @@
           <p:cNvPr id="2" name="Título 1">
             <a:extLst>
               <a:ext uri="{FF2B5EF4-FFF2-40B4-BE49-F238E27FC236}">
-                <a16:creationId xmlns:a16="http://schemas.microsoft.com/office/drawing/2014/main" xmlns="" id="{F0E0D2C5-2C7F-FF98-F6E4-6A6D35AE3301}"/>
+                <a16:creationId xmlns="" xmlns:a16="http://schemas.microsoft.com/office/drawing/2014/main" id="{249A0E92-603C-2FF8-F119-2A802B939AA2}"/>
               </a:ext>
             </a:extLst>
           </p:cNvPr>
@@ -6660,7 +6996,7 @@
           <p:cNvPr id="3" name="Espaço Reservado para Conteúdo 2">
             <a:extLst>
               <a:ext uri="{FF2B5EF4-FFF2-40B4-BE49-F238E27FC236}">
-                <a16:creationId xmlns:a16="http://schemas.microsoft.com/office/drawing/2014/main" xmlns="" id="{164D262D-D1D5-2FFA-8E32-3025F99BDE7F}"/>
+                <a16:creationId xmlns="" xmlns:a16="http://schemas.microsoft.com/office/drawing/2014/main" id="{09015E3D-F27D-5C4C-AFAE-8A3141CD4684}"/>
               </a:ext>
             </a:extLst>
           </p:cNvPr>
@@ -6671,12 +7007,7 @@
             <p:ph idx="1"/>
           </p:nvPr>
         </p:nvSpPr>
-        <p:spPr>
-          <a:xfrm>
-            <a:off x="838200" y="1825624"/>
-            <a:ext cx="11114314" cy="5032375"/>
-          </a:xfrm>
-        </p:spPr>
+        <p:spPr/>
         <p:txBody>
           <a:bodyPr>
             <a:normAutofit/>
@@ -6685,11 +7016,11 @@
           <a:p>
             <a:r>
               <a:rPr lang="pt-BR" dirty="0"/>
-              <a:t>Natural </a:t>
+              <a:t>Computer Vision: </a:t>
             </a:r>
             <a:r>
               <a:rPr lang="pt-BR" dirty="0" err="1"/>
-              <a:t>Language</a:t>
+              <a:t>Image</a:t>
             </a:r>
             <a:r>
               <a:rPr lang="pt-BR" dirty="0"/>
@@ -6697,60 +7028,20 @@
             </a:r>
             <a:r>
               <a:rPr lang="pt-BR" dirty="0" err="1"/>
-              <a:t>Processing</a:t>
-            </a:r>
-            <a:r>
-              <a:rPr lang="pt-BR" dirty="0"/>
-              <a:t>: </a:t>
-            </a:r>
+              <a:t>Segmentation</a:t>
+            </a:r>
+            <a:endParaRPr lang="pt-BR" dirty="0"/>
+          </a:p>
+          <a:p>
+            <a:pPr lvl="1">
+              <a:buFont typeface="Wingdings" panose="05000000000000000000" pitchFamily="2" charset="2"/>
+              <a:buChar char="§"/>
+            </a:pPr>
             <a:r>
               <a:rPr lang="pt-BR" dirty="0" err="1"/>
-              <a:t>Text</a:t>
-            </a:r>
-            <a:r>
-              <a:rPr lang="pt-BR" dirty="0"/>
-              <a:t> </a:t>
-            </a:r>
-            <a:r>
-              <a:rPr lang="pt-BR" b="0" i="0" dirty="0" err="1">
-                <a:solidFill>
-                  <a:srgbClr val="212529"/>
-                </a:solidFill>
-                <a:effectLst/>
-              </a:rPr>
-              <a:t>summarization</a:t>
+              <a:t>U-Net</a:t>
             </a:r>
             <a:endParaRPr lang="pt-BR" dirty="0"/>
-          </a:p>
-          <a:p>
-            <a:pPr lvl="1">
-              <a:buFont typeface="Wingdings" panose="05000000000000000000" pitchFamily="2" charset="2"/>
-              <a:buChar char="§"/>
-            </a:pPr>
-            <a:r>
-              <a:rPr lang="pt-BR" dirty="0" err="1"/>
-              <a:t>Bidirectional</a:t>
-            </a:r>
-            <a:r>
-              <a:rPr lang="pt-BR" dirty="0"/>
-              <a:t> </a:t>
-            </a:r>
-            <a:r>
-              <a:rPr lang="pt-BR" dirty="0" err="1"/>
-              <a:t>Autoregressive</a:t>
-            </a:r>
-            <a:r>
-              <a:rPr lang="pt-BR" dirty="0"/>
-              <a:t> </a:t>
-            </a:r>
-            <a:r>
-              <a:rPr lang="pt-BR" dirty="0" err="1"/>
-              <a:t>Transformer</a:t>
-            </a:r>
-            <a:r>
-              <a:rPr lang="pt-BR" dirty="0"/>
-              <a:t> (BART)</a:t>
-            </a:r>
           </a:p>
           <a:p>
             <a:pPr lvl="2">
@@ -6761,7 +7052,7 @@
               <a:rPr lang="pt-BR" dirty="0">
                 <a:hlinkClick r:id="rId2"/>
               </a:rPr>
-              <a:t>https://arxiv.org/abs/1910.13461</a:t>
+              <a:t>https://link.springer.com/chapter/10.1007/978-3-319-24574-4_28</a:t>
             </a:r>
             <a:endParaRPr lang="pt-BR" dirty="0"/>
           </a:p>
@@ -6774,18 +7065,18 @@
               <a:rPr lang="pt-BR" dirty="0">
                 <a:hlinkClick r:id="rId3"/>
               </a:rPr>
-              <a:t>https://keras.io/examples/nlp/abstractive_summarization_with_bart/</a:t>
+              <a:t>https://www.tensorflow.org/tutorials/images/segmentation?hl=pt-br</a:t>
             </a:r>
             <a:endParaRPr lang="pt-BR" dirty="0"/>
           </a:p>
           <a:p>
-            <a:r>
-              <a:rPr lang="pt-BR" dirty="0"/>
-              <a:t>Natural </a:t>
-            </a:r>
+            <a:pPr lvl="1">
+              <a:buFont typeface="Wingdings" panose="05000000000000000000" pitchFamily="2" charset="2"/>
+              <a:buChar char="§"/>
+            </a:pPr>
             <a:r>
               <a:rPr lang="pt-BR" dirty="0" err="1"/>
-              <a:t>Language</a:t>
+              <a:t>Boundary-Aware</a:t>
             </a:r>
             <a:r>
               <a:rPr lang="pt-BR" dirty="0"/>
@@ -6793,39 +7084,20 @@
             </a:r>
             <a:r>
               <a:rPr lang="pt-BR" dirty="0" err="1"/>
-              <a:t>Processing</a:t>
-            </a:r>
-            <a:r>
-              <a:rPr lang="pt-BR" dirty="0"/>
-              <a:t>: </a:t>
+              <a:t>Segmentation</a:t>
+            </a:r>
+            <a:r>
+              <a:rPr lang="pt-BR" dirty="0"/>
+              <a:t> Network (</a:t>
             </a:r>
             <a:r>
               <a:rPr lang="pt-BR" dirty="0" err="1"/>
-              <a:t>Automatic</a:t>
-            </a:r>
-            <a:r>
-              <a:rPr lang="pt-BR" dirty="0"/>
-              <a:t> Speech </a:t>
-            </a:r>
-            <a:r>
-              <a:rPr lang="pt-BR" dirty="0" err="1"/>
-              <a:t>Recognition</a:t>
-            </a:r>
-            <a:r>
-              <a:rPr lang="pt-BR" dirty="0"/>
-              <a:t> (ASR)</a:t>
-            </a:r>
-          </a:p>
-          <a:p>
-            <a:pPr lvl="1">
-              <a:buFont typeface="Wingdings" panose="05000000000000000000" pitchFamily="2" charset="2"/>
-              <a:buChar char="§"/>
-            </a:pPr>
-            <a:r>
-              <a:rPr lang="en-US" dirty="0"/>
-              <a:t>Automatic Speech Recognition with Transformer</a:t>
-            </a:r>
-            <a:endParaRPr lang="pt-BR" dirty="0"/>
+              <a:t>BASNet</a:t>
+            </a:r>
+            <a:r>
+              <a:rPr lang="pt-BR" dirty="0"/>
+              <a:t>)</a:t>
+            </a:r>
           </a:p>
           <a:p>
             <a:pPr lvl="2">
@@ -6836,7 +7108,7 @@
               <a:rPr lang="pt-BR" dirty="0">
                 <a:hlinkClick r:id="rId4"/>
               </a:rPr>
-              <a:t>https://papers.nips.cc/paper/2017/file/3f5ee243547dee91fbd053c1c4a845aa-Paper.pdf</a:t>
+              <a:t>https://arxiv.org/abs/2101.04704</a:t>
             </a:r>
             <a:endParaRPr lang="pt-BR" dirty="0"/>
           </a:p>
@@ -6849,143 +7121,45 @@
               <a:rPr lang="pt-BR" dirty="0">
                 <a:hlinkClick r:id="rId5"/>
               </a:rPr>
-              <a:t>https://keras.io/examples/audio/transformer_asr/</a:t>
+              <a:t>https://keras.io/examples/vision/basnet_segmentation/</a:t>
             </a:r>
             <a:endParaRPr lang="pt-BR" dirty="0"/>
           </a:p>
           <a:p>
-            <a:pPr algn="l"/>
-            <a:r>
-              <a:rPr lang="pt-BR" dirty="0"/>
-              <a:t>Natural </a:t>
-            </a:r>
-            <a:r>
-              <a:rPr lang="pt-BR" dirty="0" err="1"/>
-              <a:t>Language</a:t>
-            </a:r>
-            <a:r>
-              <a:rPr lang="pt-BR" dirty="0"/>
-              <a:t> </a:t>
-            </a:r>
-            <a:r>
-              <a:rPr lang="pt-BR" dirty="0" err="1"/>
-              <a:t>Processing</a:t>
-            </a:r>
-            <a:r>
-              <a:rPr lang="pt-BR" dirty="0"/>
-              <a:t>: Speech </a:t>
-            </a:r>
-            <a:r>
-              <a:rPr lang="pt-BR" dirty="0" err="1"/>
-              <a:t>Synthesis</a:t>
-            </a:r>
+            <a:pPr lvl="2">
+              <a:buFont typeface="Wingdings" panose="05000000000000000000" pitchFamily="2" charset="2"/>
+              <a:buChar char="ü"/>
+            </a:pPr>
             <a:endParaRPr lang="pt-BR" dirty="0"/>
           </a:p>
           <a:p>
-            <a:pPr lvl="1">
-              <a:buFont typeface="Wingdings" panose="05000000000000000000" pitchFamily="2" charset="2"/>
-              <a:buChar char="§"/>
-            </a:pPr>
-            <a:r>
-              <a:rPr lang="pt-BR" b="0" i="0" dirty="0" err="1">
-                <a:effectLst/>
-              </a:rPr>
-              <a:t>WaveNet</a:t>
-            </a:r>
-            <a:r>
-              <a:rPr lang="pt-BR" b="0" i="0" dirty="0">
-                <a:effectLst/>
-              </a:rPr>
-              <a:t>: A </a:t>
-            </a:r>
-            <a:r>
-              <a:rPr lang="pt-BR" b="0" i="0" dirty="0" err="1">
-                <a:effectLst/>
-              </a:rPr>
-              <a:t>Generative</a:t>
-            </a:r>
-            <a:r>
-              <a:rPr lang="pt-BR" b="0" i="0" dirty="0">
-                <a:effectLst/>
-              </a:rPr>
-              <a:t> Model for </a:t>
-            </a:r>
-            <a:r>
-              <a:rPr lang="pt-BR" b="0" i="0" dirty="0" err="1">
-                <a:effectLst/>
-              </a:rPr>
-              <a:t>Raw</a:t>
-            </a:r>
-            <a:r>
-              <a:rPr lang="pt-BR" b="0" i="0" dirty="0">
-                <a:effectLst/>
-              </a:rPr>
-              <a:t> </a:t>
-            </a:r>
-            <a:r>
-              <a:rPr lang="pt-BR" b="0" i="0" dirty="0" err="1">
-                <a:effectLst/>
-              </a:rPr>
-              <a:t>Audio</a:t>
-            </a:r>
-            <a:endParaRPr lang="pt-BR" b="0" i="0" dirty="0">
-              <a:effectLst/>
-            </a:endParaRPr>
-          </a:p>
-          <a:p>
-            <a:pPr lvl="2">
-              <a:buFont typeface="Wingdings" panose="05000000000000000000" pitchFamily="2" charset="2"/>
-              <a:buChar char="ü"/>
-            </a:pPr>
-            <a:r>
-              <a:rPr lang="pt-BR" b="0" i="0" dirty="0">
-                <a:effectLst/>
-                <a:hlinkClick r:id="rId6">
-                  <a:extLst>
-                    <a:ext uri="{A12FA001-AC4F-418D-AE19-62706E023703}">
-                      <ahyp:hlinkClr xmlns:ahyp="http://schemas.microsoft.com/office/drawing/2018/hyperlinkcolor" xmlns="" val="tx"/>
-                    </a:ext>
-                  </a:extLst>
-                </a:hlinkClick>
-              </a:rPr>
-              <a:t>https://</a:t>
-            </a:r>
-            <a:r>
-              <a:rPr lang="pt-BR" b="0" i="0" dirty="0" smtClean="0">
-                <a:effectLst/>
-                <a:hlinkClick r:id="rId6">
-                  <a:extLst>
-                    <a:ext uri="{A12FA001-AC4F-418D-AE19-62706E023703}">
-                      <ahyp:hlinkClr xmlns:ahyp="http://schemas.microsoft.com/office/drawing/2018/hyperlinkcolor" xmlns="" val="tx"/>
-                    </a:ext>
-                  </a:extLst>
-                </a:hlinkClick>
-              </a:rPr>
-              <a:t>arxiv.org/abs/1609.03499</a:t>
-            </a:r>
-            <a:endParaRPr lang="pt-BR" b="0" i="0" dirty="0">
-              <a:effectLst/>
-            </a:endParaRPr>
+            <a:pPr marL="914400" lvl="2" indent="0">
+              <a:buNone/>
+            </a:pPr>
+            <a:endParaRPr lang="pt-BR" dirty="0"/>
+          </a:p>
+          <a:p>
+            <a:pPr marL="914400" lvl="2" indent="0">
+              <a:buNone/>
+            </a:pPr>
+            <a:endParaRPr lang="pt-BR" dirty="0"/>
+          </a:p>
+          <a:p>
+            <a:pPr lvl="1"/>
+            <a:endParaRPr lang="pt-BR" dirty="0"/>
           </a:p>
         </p:txBody>
       </p:sp>
     </p:spTree>
     <p:extLst>
       <p:ext uri="{BB962C8B-B14F-4D97-AF65-F5344CB8AC3E}">
-        <p14:creationId xmlns:p14="http://schemas.microsoft.com/office/powerpoint/2010/main" val="801807437"/>
+        <p14:creationId xmlns:p14="http://schemas.microsoft.com/office/powerpoint/2010/main" val="4186597759"/>
       </p:ext>
     </p:extLst>
   </p:cSld>
   <p:clrMapOvr>
     <a:masterClrMapping/>
   </p:clrMapOvr>
-  <p:timing>
-    <p:tnLst>
-      <p:par>
-        <p:cTn id="1" dur="indefinite" restart="never" nodeType="tmRoot"/>
-      </p:par>
-    </p:tnLst>
-  </p:timing>
 </p:sld>
 </file>
 
@@ -6997,7 +7171,7 @@
         <p:cNvPr id="1" name="">
           <a:extLst>
             <a:ext uri="{FF2B5EF4-FFF2-40B4-BE49-F238E27FC236}">
-              <a16:creationId xmlns:a16="http://schemas.microsoft.com/office/drawing/2014/main" xmlns="" id="{4059CF8C-A5CA-D922-15C9-90E83F41C16F}"/>
+              <a16:creationId xmlns="" xmlns:a16="http://schemas.microsoft.com/office/drawing/2014/main" id="{6E3AB78C-4A70-ED33-6088-7D978AFBD15F}"/>
             </a:ext>
           </a:extLst>
         </p:cNvPr>
@@ -7017,7 +7191,7 @@
           <p:cNvPr id="2" name="Título 1">
             <a:extLst>
               <a:ext uri="{FF2B5EF4-FFF2-40B4-BE49-F238E27FC236}">
-                <a16:creationId xmlns:a16="http://schemas.microsoft.com/office/drawing/2014/main" xmlns="" id="{F0E0D2C5-2C7F-FF98-F6E4-6A6D35AE3301}"/>
+                <a16:creationId xmlns="" xmlns:a16="http://schemas.microsoft.com/office/drawing/2014/main" id="{20C0DDF2-0E52-0740-004B-2209C15740BF}"/>
               </a:ext>
             </a:extLst>
           </p:cNvPr>
@@ -7045,7 +7219,7 @@
           <p:cNvPr id="3" name="Espaço Reservado para Conteúdo 2">
             <a:extLst>
               <a:ext uri="{FF2B5EF4-FFF2-40B4-BE49-F238E27FC236}">
-                <a16:creationId xmlns:a16="http://schemas.microsoft.com/office/drawing/2014/main" xmlns="" id="{164D262D-D1D5-2FFA-8E32-3025F99BDE7F}"/>
+                <a16:creationId xmlns="" xmlns:a16="http://schemas.microsoft.com/office/drawing/2014/main" id="{CAA14ED1-BBC4-3217-0C26-BBA0501ACF3D}"/>
               </a:ext>
             </a:extLst>
           </p:cNvPr>
@@ -7058,8 +7232,8 @@
         </p:nvSpPr>
         <p:spPr>
           <a:xfrm>
-            <a:off x="838200" y="1825625"/>
-            <a:ext cx="10907486" cy="4351338"/>
+            <a:off x="838199" y="1825624"/>
+            <a:ext cx="11092543" cy="5032376"/>
           </a:xfrm>
         </p:spPr>
         <p:txBody>
@@ -7070,19 +7244,46 @@
           <a:p>
             <a:r>
               <a:rPr lang="pt-BR" dirty="0"/>
+              <a:t>Computer Vision: </a:t>
+            </a:r>
+            <a:r>
+              <a:rPr lang="pt-BR" dirty="0" err="1"/>
+              <a:t>Object</a:t>
+            </a:r>
+            <a:r>
+              <a:rPr lang="pt-BR" dirty="0"/>
               <a:t> </a:t>
             </a:r>
             <a:r>
               <a:rPr lang="pt-BR" dirty="0" err="1"/>
-              <a:t>Graph</a:t>
-            </a:r>
-            <a:r>
-              <a:rPr lang="pt-BR" dirty="0"/>
-              <a:t> Neural Networks</a:t>
-            </a:r>
+              <a:t>Detection</a:t>
+            </a:r>
+            <a:endParaRPr lang="pt-BR" dirty="0"/>
           </a:p>
           <a:p>
             <a:pPr lvl="1">
+              <a:buFont typeface="Wingdings" panose="05000000000000000000" pitchFamily="2" charset="2"/>
+              <a:buChar char="§"/>
+            </a:pPr>
+            <a:r>
+              <a:rPr lang="pt-BR" dirty="0"/>
+              <a:t>YOLOv8</a:t>
+            </a:r>
+          </a:p>
+          <a:p>
+            <a:pPr lvl="2">
+              <a:buFont typeface="Wingdings" panose="05000000000000000000" pitchFamily="2" charset="2"/>
+              <a:buChar char="ü"/>
+            </a:pPr>
+            <a:r>
+              <a:rPr lang="pt-BR" dirty="0">
+                <a:hlinkClick r:id="rId2"/>
+              </a:rPr>
+              <a:t>https://blog.roboflow.com/whats-new-in-yolov8/</a:t>
+            </a:r>
+          </a:p>
+          <a:p>
+            <a:pPr lvl="2">
               <a:buFont typeface="Wingdings" panose="05000000000000000000" pitchFamily="2" charset="2"/>
               <a:buChar char="ü"/>
             </a:pPr>
@@ -7090,12 +7291,22 @@
               <a:rPr lang="pt-BR" dirty="0">
                 <a:hlinkClick r:id="rId3"/>
               </a:rPr>
-              <a:t>https://arxiv.org/abs/2101.11174</a:t>
+              <a:t>https://keras.io/examples/vision/yolov8/</a:t>
             </a:r>
             <a:endParaRPr lang="pt-BR" dirty="0"/>
           </a:p>
           <a:p>
             <a:pPr lvl="1">
+              <a:buFont typeface="Wingdings" panose="05000000000000000000" pitchFamily="2" charset="2"/>
+              <a:buChar char="§"/>
+            </a:pPr>
+            <a:r>
+              <a:rPr lang="pt-BR" dirty="0"/>
+              <a:t>YOLOv9</a:t>
+            </a:r>
+          </a:p>
+          <a:p>
+            <a:pPr lvl="2">
               <a:buFont typeface="Wingdings" panose="05000000000000000000" pitchFamily="2" charset="2"/>
               <a:buChar char="ü"/>
             </a:pPr>
@@ -7103,107 +7314,112 @@
               <a:rPr lang="pt-BR" dirty="0">
                 <a:hlinkClick r:id="rId4"/>
               </a:rPr>
-              <a:t>https://paperswithcode.com/paper/graph-neural-network-for-traffic-forecasting</a:t>
+              <a:t>https://arxiv.org/abs/2402.13616</a:t>
             </a:r>
             <a:endParaRPr lang="pt-BR" dirty="0"/>
           </a:p>
           <a:p>
-            <a:r>
-              <a:rPr lang="pt-BR" dirty="0" err="1"/>
-              <a:t>Spiking</a:t>
-            </a:r>
-            <a:r>
-              <a:rPr lang="pt-BR" dirty="0"/>
-              <a:t> Neural Networks</a:t>
+            <a:pPr lvl="2">
+              <a:buFont typeface="Wingdings" panose="05000000000000000000" pitchFamily="2" charset="2"/>
+              <a:buChar char="ü"/>
+            </a:pPr>
+            <a:r>
+              <a:rPr lang="pt-BR" dirty="0">
+                <a:hlinkClick r:id="rId2"/>
+              </a:rPr>
+              <a:t>https://docs.ultralytics.com/pt/models/yolov9/#generalized-efficient-layer-aggregation-network-gelan</a:t>
+            </a:r>
+          </a:p>
+          <a:p>
+            <a:pPr lvl="2">
+              <a:buFont typeface="Wingdings" panose="05000000000000000000" pitchFamily="2" charset="2"/>
+              <a:buChar char="ü"/>
+            </a:pPr>
+            <a:r>
+              <a:rPr lang="pt-BR" dirty="0">
+                <a:hlinkClick r:id="rId2"/>
+              </a:rPr>
+              <a:t>https://github.com/WongKinYiu/yolov9?tab=readme-ov-file</a:t>
             </a:r>
           </a:p>
           <a:p>
             <a:pPr lvl="1">
               <a:buFont typeface="Wingdings" panose="05000000000000000000" pitchFamily="2" charset="2"/>
+              <a:buChar char="§"/>
+            </a:pPr>
+            <a:r>
+              <a:rPr lang="en-US" b="0" i="0" dirty="0">
+                <a:solidFill>
+                  <a:srgbClr val="000000"/>
+                </a:solidFill>
+                <a:effectLst/>
+                <a:highlight>
+                  <a:srgbClr val="FFFFFF"/>
+                </a:highlight>
+              </a:rPr>
+              <a:t>YOLO-World: Real-Time Open-Vocabulary Object Detection</a:t>
+            </a:r>
+          </a:p>
+          <a:p>
+            <a:pPr lvl="2">
+              <a:buFont typeface="Wingdings" panose="05000000000000000000" pitchFamily="2" charset="2"/>
               <a:buChar char="ü"/>
             </a:pPr>
             <a:r>
               <a:rPr lang="pt-BR" dirty="0">
-                <a:hlinkClick r:id="rId5"/>
-              </a:rPr>
-              <a:t>https://arxiv.org/abs/2109.12894</a:t>
-            </a:r>
-            <a:endParaRPr lang="pt-BR" dirty="0"/>
-          </a:p>
-          <a:p>
-            <a:pPr lvl="1">
+                <a:hlinkClick r:id="rId2"/>
+              </a:rPr>
+              <a:t>https://arxiv.org/abs/2401.17270</a:t>
+            </a:r>
+            <a:endParaRPr lang="en-US" dirty="0">
+              <a:solidFill>
+                <a:srgbClr val="000000"/>
+              </a:solidFill>
+              <a:highlight>
+                <a:srgbClr val="FFFFFF"/>
+              </a:highlight>
+              <a:latin typeface="Arial" panose="020B0604020202020204" pitchFamily="34" charset="0"/>
+              <a:hlinkClick r:id="rId2"/>
+            </a:endParaRPr>
+          </a:p>
+          <a:p>
+            <a:pPr lvl="2">
               <a:buFont typeface="Wingdings" panose="05000000000000000000" pitchFamily="2" charset="2"/>
               <a:buChar char="ü"/>
             </a:pPr>
             <a:r>
               <a:rPr lang="pt-BR" dirty="0">
-                <a:hlinkClick r:id="rId6"/>
-              </a:rPr>
-              <a:t>https://analyticsindiamag.com/a-tutorial-on-spiking-neural-networks-for-beginners/</a:t>
-            </a:r>
-            <a:endParaRPr lang="pt-BR" dirty="0"/>
-          </a:p>
-          <a:p>
-            <a:pPr lvl="1">
+                <a:hlinkClick r:id="rId2"/>
+              </a:rPr>
+              <a:t>https://colab.research.google.com/github/roboflow-ai/notebooks/blob/main/notebooks/zero-shot-object-detection-with-yolo-world.ipynb</a:t>
+            </a:r>
+            <a:endParaRPr lang="en-US" dirty="0">
+              <a:solidFill>
+                <a:srgbClr val="000000"/>
+              </a:solidFill>
+              <a:highlight>
+                <a:srgbClr val="FFFFFF"/>
+              </a:highlight>
+              <a:latin typeface="Arial" panose="020B0604020202020204" pitchFamily="34" charset="0"/>
+              <a:hlinkClick r:id="rId2"/>
+            </a:endParaRPr>
+          </a:p>
+          <a:p>
+            <a:pPr lvl="2">
               <a:buFont typeface="Wingdings" panose="05000000000000000000" pitchFamily="2" charset="2"/>
               <a:buChar char="ü"/>
             </a:pPr>
             <a:r>
               <a:rPr lang="pt-BR" dirty="0">
-                <a:hlinkClick r:id="rId7"/>
-              </a:rPr>
-              <a:t>https://guillaume-chevalier.com/spiking-neural-network-snn-with-pytorch-where-backpropagation-engenders-stdp-hebbian-learning/</a:t>
-            </a:r>
-            <a:endParaRPr lang="pt-BR" dirty="0"/>
-          </a:p>
-          <a:p>
-            <a:pPr lvl="1">
+                <a:hlinkClick r:id="rId2"/>
+              </a:rPr>
+              <a:t>https://www.youtube.com/watch?v=X7gKBGVz4vs&amp;feature=youtu.be</a:t>
+            </a:r>
+          </a:p>
+          <a:p>
+            <a:pPr lvl="2">
               <a:buFont typeface="Wingdings" panose="05000000000000000000" pitchFamily="2" charset="2"/>
               <a:buChar char="ü"/>
-            </a:pPr>
-            <a:r>
-              <a:rPr lang="pt-BR" dirty="0">
-                <a:hlinkClick r:id="rId8"/>
-              </a:rPr>
-              <a:t>https://snntorch.readthedocs.io/en/latest/tutorials/index.html</a:t>
-            </a:r>
-            <a:endParaRPr lang="pt-BR" dirty="0"/>
-          </a:p>
-          <a:p>
-            <a:pPr marL="457200" lvl="1" indent="0">
-              <a:buNone/>
-            </a:pPr>
-            <a:endParaRPr lang="pt-BR" dirty="0"/>
-          </a:p>
-          <a:p>
-            <a:pPr marL="457200" lvl="1" indent="0">
-              <a:buNone/>
-            </a:pPr>
-            <a:endParaRPr lang="pt-BR" dirty="0"/>
-          </a:p>
-          <a:p>
-            <a:pPr marL="0" indent="0">
-              <a:buNone/>
-            </a:pPr>
-            <a:endParaRPr lang="pt-BR" dirty="0"/>
-          </a:p>
-          <a:p>
-            <a:pPr>
-              <a:buFont typeface="Wingdings" panose="05000000000000000000" pitchFamily="2" charset="2"/>
-              <a:buChar char="ü"/>
-            </a:pPr>
-            <a:endParaRPr lang="pt-BR" dirty="0"/>
-          </a:p>
-          <a:p>
-            <a:pPr lvl="2">
-              <a:buFont typeface="Wingdings" panose="05000000000000000000" pitchFamily="2" charset="2"/>
-              <a:buChar char="ü"/>
-            </a:pPr>
-            <a:endParaRPr lang="pt-BR" dirty="0"/>
-          </a:p>
-          <a:p>
-            <a:pPr marL="914400" lvl="2" indent="0">
-              <a:buNone/>
             </a:pPr>
             <a:endParaRPr lang="pt-BR" dirty="0"/>
           </a:p>
@@ -7222,20 +7438,13 @@
     </p:spTree>
     <p:extLst>
       <p:ext uri="{BB962C8B-B14F-4D97-AF65-F5344CB8AC3E}">
-        <p14:creationId xmlns:p14="http://schemas.microsoft.com/office/powerpoint/2010/main" val="1884010596"/>
+        <p14:creationId xmlns:p14="http://schemas.microsoft.com/office/powerpoint/2010/main" val="2918525122"/>
       </p:ext>
     </p:extLst>
   </p:cSld>
   <p:clrMapOvr>
     <a:masterClrMapping/>
   </p:clrMapOvr>
-  <p:timing>
-    <p:tnLst>
-      <p:par>
-        <p:cTn id="1" dur="indefinite" restart="never" nodeType="tmRoot"/>
-      </p:par>
-    </p:tnLst>
-  </p:timing>
 </p:sld>
 </file>
 
@@ -7247,7 +7456,7 @@
         <p:cNvPr id="1" name="">
           <a:extLst>
             <a:ext uri="{FF2B5EF4-FFF2-40B4-BE49-F238E27FC236}">
-              <a16:creationId xmlns:a16="http://schemas.microsoft.com/office/drawing/2014/main" xmlns="" id="{4059CF8C-A5CA-D922-15C9-90E83F41C16F}"/>
+              <a16:creationId xmlns="" xmlns:a16="http://schemas.microsoft.com/office/drawing/2014/main" id="{6E3AB78C-4A70-ED33-6088-7D978AFBD15F}"/>
             </a:ext>
           </a:extLst>
         </p:cNvPr>
@@ -7267,7 +7476,7 @@
           <p:cNvPr id="2" name="Título 1">
             <a:extLst>
               <a:ext uri="{FF2B5EF4-FFF2-40B4-BE49-F238E27FC236}">
-                <a16:creationId xmlns:a16="http://schemas.microsoft.com/office/drawing/2014/main" xmlns="" id="{F0E0D2C5-2C7F-FF98-F6E4-6A6D35AE3301}"/>
+                <a16:creationId xmlns="" xmlns:a16="http://schemas.microsoft.com/office/drawing/2014/main" id="{20C0DDF2-0E52-0740-004B-2209C15740BF}"/>
               </a:ext>
             </a:extLst>
           </p:cNvPr>
@@ -7295,7 +7504,7 @@
           <p:cNvPr id="3" name="Espaço Reservado para Conteúdo 2">
             <a:extLst>
               <a:ext uri="{FF2B5EF4-FFF2-40B4-BE49-F238E27FC236}">
-                <a16:creationId xmlns:a16="http://schemas.microsoft.com/office/drawing/2014/main" xmlns="" id="{164D262D-D1D5-2FFA-8E32-3025F99BDE7F}"/>
+                <a16:creationId xmlns="" xmlns:a16="http://schemas.microsoft.com/office/drawing/2014/main" id="{CAA14ED1-BBC4-3217-0C26-BBA0501ACF3D}"/>
               </a:ext>
             </a:extLst>
           </p:cNvPr>
@@ -7308,28 +7517,47 @@
         </p:nvSpPr>
         <p:spPr>
           <a:xfrm>
-            <a:off x="838200" y="1825624"/>
-            <a:ext cx="10907486" cy="5032375"/>
+            <a:off x="838199" y="1825624"/>
+            <a:ext cx="11092543" cy="5032376"/>
           </a:xfrm>
         </p:spPr>
         <p:txBody>
           <a:bodyPr>
-            <a:normAutofit lnSpcReduction="10000"/>
+            <a:normAutofit/>
           </a:bodyPr>
           <a:lstStyle/>
           <a:p>
             <a:r>
               <a:rPr lang="pt-BR" dirty="0"/>
-              <a:t> Adversarial </a:t>
+              <a:t>Computer Vision: </a:t>
             </a:r>
             <a:r>
               <a:rPr lang="pt-BR" dirty="0" err="1"/>
-              <a:t>Attacks</a:t>
+              <a:t>Object</a:t>
+            </a:r>
+            <a:r>
+              <a:rPr lang="pt-BR" dirty="0"/>
+              <a:t> </a:t>
+            </a:r>
+            <a:r>
+              <a:rPr lang="pt-BR" dirty="0" err="1"/>
+              <a:t>Detection</a:t>
             </a:r>
             <a:endParaRPr lang="pt-BR" dirty="0"/>
           </a:p>
           <a:p>
             <a:pPr lvl="1">
+              <a:buFont typeface="Wingdings" panose="05000000000000000000" pitchFamily="2" charset="2"/>
+              <a:buChar char="§"/>
+            </a:pPr>
+            <a:r>
+              <a:rPr lang="pt-BR" dirty="0" err="1"/>
+              <a:t>RetinaNet</a:t>
+            </a:r>
+            <a:endParaRPr lang="pt-BR" dirty="0"/>
+          </a:p>
+          <a:p>
+            <a:pPr lvl="2">
               <a:buFont typeface="Wingdings" panose="05000000000000000000" pitchFamily="2" charset="2"/>
               <a:buChar char="ü"/>
             </a:pPr>
@@ -7337,12 +7565,11 @@
               <a:rPr lang="pt-BR" dirty="0">
                 <a:hlinkClick r:id="rId2"/>
               </a:rPr>
-              <a:t>https://arxiv.org/abs/1706.06083</a:t>
-            </a:r>
-            <a:endParaRPr lang="pt-BR" dirty="0"/>
-          </a:p>
-          <a:p>
-            <a:pPr lvl="1">
+              <a:t>https://arxiv.org/abs/1708.02002</a:t>
+            </a:r>
+          </a:p>
+          <a:p>
+            <a:pPr lvl="2">
               <a:buFont typeface="Wingdings" panose="05000000000000000000" pitchFamily="2" charset="2"/>
               <a:buChar char="ü"/>
             </a:pPr>
@@ -7350,30 +7577,58 @@
               <a:rPr lang="pt-BR" dirty="0">
                 <a:hlinkClick r:id="rId3"/>
               </a:rPr>
-              <a:t>https://paperswithcode.com/paper/towards-deep-learning-models-resistant-to</a:t>
+              <a:t>https://keras.io/examples/vision/retinanet/</a:t>
             </a:r>
             <a:endParaRPr lang="pt-BR" dirty="0"/>
           </a:p>
           <a:p>
-            <a:r>
-              <a:rPr lang="pt-BR" dirty="0" err="1"/>
-              <a:t>Kolmogorov</a:t>
-            </a:r>
-            <a:r>
-              <a:rPr lang="pt-BR" dirty="0"/>
-              <a:t>-Arnold Networks (</a:t>
-            </a:r>
-            <a:r>
-              <a:rPr lang="pt-BR" dirty="0" err="1"/>
-              <a:t>KANs</a:t>
-            </a:r>
-            <a:r>
-              <a:rPr lang="pt-BR" dirty="0"/>
-              <a:t>)</a:t>
-            </a:r>
-          </a:p>
-          <a:p>
             <a:pPr lvl="1">
+              <a:buFont typeface="Wingdings" panose="05000000000000000000" pitchFamily="2" charset="2"/>
+              <a:buChar char="§"/>
+            </a:pPr>
+            <a:r>
+              <a:rPr lang="pt-BR" dirty="0" err="1">
+                <a:effectLst/>
+              </a:rPr>
+              <a:t>Faster</a:t>
+            </a:r>
+            <a:r>
+              <a:rPr lang="pt-BR" dirty="0">
+                <a:effectLst/>
+              </a:rPr>
+              <a:t> </a:t>
+            </a:r>
+            <a:r>
+              <a:rPr lang="pt-BR" dirty="0" err="1">
+                <a:effectLst/>
+              </a:rPr>
+              <a:t>Objects</a:t>
+            </a:r>
+            <a:r>
+              <a:rPr lang="pt-BR" dirty="0">
+                <a:effectLst/>
+              </a:rPr>
+              <a:t>, More </a:t>
+            </a:r>
+            <a:r>
+              <a:rPr lang="pt-BR" dirty="0" err="1">
+                <a:effectLst/>
+              </a:rPr>
+              <a:t>Objects</a:t>
+            </a:r>
+            <a:r>
+              <a:rPr lang="pt-BR" dirty="0">
+                <a:effectLst/>
+              </a:rPr>
+              <a:t> (</a:t>
+            </a:r>
+            <a:r>
+              <a:rPr lang="pt-BR" dirty="0"/>
+              <a:t>FOMO)</a:t>
+            </a:r>
+          </a:p>
+          <a:p>
+            <a:pPr lvl="2">
               <a:buFont typeface="Wingdings" panose="05000000000000000000" pitchFamily="2" charset="2"/>
               <a:buChar char="ü"/>
             </a:pPr>
@@ -7381,12 +7636,12 @@
               <a:rPr lang="pt-BR" dirty="0">
                 <a:hlinkClick r:id="rId4"/>
               </a:rPr>
-              <a:t>https://arxiv.org/abs/2404.19756</a:t>
+              <a:t>https://docs.edgeimpulse.com/docs/edge-impulse-studio/learning-blocks/object-detection/fomo-object-detection-for-constrained-devices</a:t>
             </a:r>
             <a:endParaRPr lang="pt-BR" dirty="0"/>
           </a:p>
           <a:p>
-            <a:pPr lvl="1">
+            <a:pPr lvl="2">
               <a:buFont typeface="Wingdings" panose="05000000000000000000" pitchFamily="2" charset="2"/>
               <a:buChar char="ü"/>
             </a:pPr>
@@ -7394,22 +7649,22 @@
               <a:rPr lang="pt-BR" dirty="0">
                 <a:hlinkClick r:id="rId5"/>
               </a:rPr>
-              <a:t>https://github.com/KindXiaoming/pykan?tab=readme-ov-file</a:t>
+              <a:t>https://docs.edgeimpulse.com/docs/tutorials/end-to-end-tutorials/object-detection/detect-objects-using-fomo</a:t>
             </a:r>
             <a:endParaRPr lang="pt-BR" dirty="0"/>
           </a:p>
           <a:p>
-            <a:r>
-              <a:rPr lang="en-US" dirty="0" err="1"/>
-              <a:t>DiffMOT</a:t>
-            </a:r>
+            <a:pPr lvl="1">
+              <a:buFont typeface="Wingdings" panose="05000000000000000000" pitchFamily="2" charset="2"/>
+              <a:buChar char="§"/>
+            </a:pPr>
             <a:r>
               <a:rPr lang="en-US" dirty="0"/>
-              <a:t>: A Real-time Diffusion-based Multiple Object Tracker with Non-linear Prediction</a:t>
-            </a:r>
-          </a:p>
-          <a:p>
-            <a:pPr lvl="1">
+              <a:t>DETRs Beat YOLOs on Real-time Object Detection</a:t>
+            </a:r>
+          </a:p>
+          <a:p>
+            <a:pPr lvl="2">
               <a:buFont typeface="Wingdings" panose="05000000000000000000" pitchFamily="2" charset="2"/>
               <a:buChar char="ü"/>
             </a:pPr>
@@ -7417,12 +7672,12 @@
               <a:rPr lang="pt-BR" dirty="0">
                 <a:hlinkClick r:id="rId6"/>
               </a:rPr>
-              <a:t>https://arxiv.org/abs/2403.02075</a:t>
-            </a:r>
-            <a:endParaRPr lang="pt-BR" dirty="0"/>
-          </a:p>
-          <a:p>
-            <a:pPr lvl="1">
+              <a:t>https://arxiv.org/abs/2304.08069</a:t>
+            </a:r>
+            <a:endParaRPr lang="en-US" dirty="0"/>
+          </a:p>
+          <a:p>
+            <a:pPr lvl="2">
               <a:buFont typeface="Wingdings" panose="05000000000000000000" pitchFamily="2" charset="2"/>
               <a:buChar char="ü"/>
             </a:pPr>
@@ -7430,56 +7685,20 @@
               <a:rPr lang="pt-BR" dirty="0">
                 <a:hlinkClick r:id="rId7"/>
               </a:rPr>
-              <a:t>https://github.com/Kroery/DiffMOT</a:t>
+              <a:t>https://github.com/lyuwenyu</a:t>
+            </a:r>
+            <a:r>
+              <a:rPr lang="pt-BR">
+                <a:hlinkClick r:id="rId7"/>
+              </a:rPr>
+              <a:t>/RT-DETR</a:t>
             </a:r>
             <a:endParaRPr lang="pt-BR" dirty="0"/>
           </a:p>
           <a:p>
-            <a:pPr algn="l"/>
-            <a:r>
-              <a:rPr lang="pt-BR" dirty="0" err="1"/>
-              <a:t>Liquid</a:t>
-            </a:r>
-            <a:r>
-              <a:rPr lang="pt-BR" dirty="0"/>
-              <a:t> Time-</a:t>
-            </a:r>
-            <a:r>
-              <a:rPr lang="pt-BR" dirty="0" err="1"/>
-              <a:t>constant</a:t>
-            </a:r>
-            <a:r>
-              <a:rPr lang="pt-BR" dirty="0"/>
-              <a:t> Networks</a:t>
-            </a:r>
-            <a:endParaRPr lang="pt-BR" dirty="0">
-              <a:hlinkClick r:id="rId8"/>
-            </a:endParaRPr>
-          </a:p>
-          <a:p>
-            <a:pPr lvl="1">
-              <a:buFont typeface="Wingdings" panose="05000000000000000000" pitchFamily="2" charset="2"/>
-              <a:buChar char="ü"/>
-            </a:pPr>
-            <a:r>
-              <a:rPr lang="pt-BR" dirty="0">
-                <a:hlinkClick r:id="rId8"/>
-              </a:rPr>
-              <a:t>https://arxiv.org/abs/2006.04439</a:t>
-            </a:r>
-            <a:endParaRPr lang="pt-BR" dirty="0"/>
-          </a:p>
-          <a:p>
-            <a:pPr lvl="1">
-              <a:buFont typeface="Wingdings" panose="05000000000000000000" pitchFamily="2" charset="2"/>
-              <a:buChar char="ü"/>
-            </a:pPr>
-            <a:r>
-              <a:rPr lang="pt-BR" dirty="0">
-                <a:hlinkClick r:id="rId9"/>
-              </a:rPr>
-              <a:t>https://github.com/raminmh/liquid_time_constant_networks</a:t>
-            </a:r>
+            <a:pPr marL="914400" lvl="2" indent="0">
+              <a:buNone/>
+            </a:pPr>
             <a:endParaRPr lang="pt-BR" dirty="0"/>
           </a:p>
           <a:p>
@@ -7491,7 +7710,7 @@
     </p:spTree>
     <p:extLst>
       <p:ext uri="{BB962C8B-B14F-4D97-AF65-F5344CB8AC3E}">
-        <p14:creationId xmlns:p14="http://schemas.microsoft.com/office/powerpoint/2010/main" val="2018168253"/>
+        <p14:creationId xmlns:p14="http://schemas.microsoft.com/office/powerpoint/2010/main" val="3455801333"/>
       </p:ext>
     </p:extLst>
   </p:cSld>
@@ -7523,7 +7742,7 @@
           <p:cNvPr id="2" name="Título 1">
             <a:extLst>
               <a:ext uri="{FF2B5EF4-FFF2-40B4-BE49-F238E27FC236}">
-                <a16:creationId xmlns:a16="http://schemas.microsoft.com/office/drawing/2014/main" xmlns="" id="{59E7398B-A900-61B5-8621-DCCF26C6973A}"/>
+                <a16:creationId xmlns="" xmlns:a16="http://schemas.microsoft.com/office/drawing/2014/main" id="{59E7398B-A900-61B5-8621-DCCF26C6973A}"/>
               </a:ext>
             </a:extLst>
           </p:cNvPr>
@@ -7551,7 +7770,7 @@
           <p:cNvPr id="3" name="Espaço Reservado para Conteúdo 2">
             <a:extLst>
               <a:ext uri="{FF2B5EF4-FFF2-40B4-BE49-F238E27FC236}">
-                <a16:creationId xmlns:a16="http://schemas.microsoft.com/office/drawing/2014/main" xmlns="" id="{5954F27A-CDF9-6E72-139C-41301C4C48BE}"/>
+                <a16:creationId xmlns="" xmlns:a16="http://schemas.microsoft.com/office/drawing/2014/main" id="{5954F27A-CDF9-6E72-139C-41301C4C48BE}"/>
               </a:ext>
             </a:extLst>
           </p:cNvPr>
@@ -7581,7 +7800,61 @@
                 </a:solidFill>
                 <a:effectLst/>
               </a:rPr>
-              <a:t>Curso prático que oferecerá uma visão ampla e detalhada sobre diferentes algoritmos avançados de aprendizado de máquina (ML) e suas aplicações em diferentes áreas do conhecimento.</a:t>
+              <a:t>Curso </a:t>
+            </a:r>
+            <a:r>
+              <a:rPr lang="pt-BR" b="0" i="0" u="none" strike="noStrike" dirty="0" smtClean="0">
+                <a:solidFill>
+                  <a:srgbClr val="000000"/>
+                </a:solidFill>
+                <a:effectLst/>
+              </a:rPr>
+              <a:t>que </a:t>
+            </a:r>
+            <a:r>
+              <a:rPr lang="pt-BR" b="0" i="0" u="none" strike="noStrike" dirty="0">
+                <a:solidFill>
+                  <a:srgbClr val="000000"/>
+                </a:solidFill>
+                <a:effectLst/>
+              </a:rPr>
+              <a:t>oferecerá uma visão </a:t>
+            </a:r>
+            <a:r>
+              <a:rPr lang="pt-BR" b="0" i="0" u="none" strike="noStrike" dirty="0" smtClean="0">
+                <a:solidFill>
+                  <a:srgbClr val="000000"/>
+                </a:solidFill>
+                <a:effectLst/>
+              </a:rPr>
+              <a:t>sobre </a:t>
+            </a:r>
+            <a:r>
+              <a:rPr lang="pt-BR" b="0" i="0" u="none" strike="noStrike" dirty="0">
+                <a:solidFill>
+                  <a:srgbClr val="000000"/>
+                </a:solidFill>
+                <a:effectLst/>
+              </a:rPr>
+              <a:t>diferentes algoritmos </a:t>
+            </a:r>
+            <a:r>
+              <a:rPr lang="pt-BR" b="0" i="0" u="none" strike="noStrike" dirty="0" smtClean="0">
+                <a:solidFill>
+                  <a:srgbClr val="000000"/>
+                </a:solidFill>
+                <a:effectLst/>
+              </a:rPr>
+              <a:t>de </a:t>
+            </a:r>
+            <a:r>
+              <a:rPr lang="pt-BR" b="0" i="0" u="none" strike="noStrike" dirty="0">
+                <a:solidFill>
+                  <a:srgbClr val="000000"/>
+                </a:solidFill>
+                <a:effectLst/>
+              </a:rPr>
+              <a:t>aprendizado de máquina (ML) e suas aplicações em diferentes áreas do conhecimento.</a:t>
             </a:r>
           </a:p>
           <a:p>
@@ -7700,13 +7973,7 @@
   <p:cSld>
     <p:spTree>
       <p:nvGrpSpPr>
-        <p:cNvPr id="1" name="">
-          <a:extLst>
-            <a:ext uri="{FF2B5EF4-FFF2-40B4-BE49-F238E27FC236}">
-              <a16:creationId xmlns:a16="http://schemas.microsoft.com/office/drawing/2014/main" xmlns="" id="{4059CF8C-A5CA-D922-15C9-90E83F41C16F}"/>
-            </a:ext>
-          </a:extLst>
-        </p:cNvPr>
+        <p:cNvPr id="1" name=""/>
         <p:cNvGrpSpPr/>
         <p:nvPr/>
       </p:nvGrpSpPr>
@@ -7723,7 +7990,7 @@
           <p:cNvPr id="2" name="Título 1">
             <a:extLst>
               <a:ext uri="{FF2B5EF4-FFF2-40B4-BE49-F238E27FC236}">
-                <a16:creationId xmlns:a16="http://schemas.microsoft.com/office/drawing/2014/main" xmlns="" id="{F0E0D2C5-2C7F-FF98-F6E4-6A6D35AE3301}"/>
+                <a16:creationId xmlns="" xmlns:a16="http://schemas.microsoft.com/office/drawing/2014/main" id="{F70C7E2D-5398-4F5E-7000-BA72FF1C6228}"/>
               </a:ext>
             </a:extLst>
           </p:cNvPr>
@@ -7751,7 +8018,7 @@
           <p:cNvPr id="3" name="Espaço Reservado para Conteúdo 2">
             <a:extLst>
               <a:ext uri="{FF2B5EF4-FFF2-40B4-BE49-F238E27FC236}">
-                <a16:creationId xmlns:a16="http://schemas.microsoft.com/office/drawing/2014/main" xmlns="" id="{164D262D-D1D5-2FFA-8E32-3025F99BDE7F}"/>
+                <a16:creationId xmlns="" xmlns:a16="http://schemas.microsoft.com/office/drawing/2014/main" id="{BA790209-FBBD-71F4-6F9F-502DB6462A33}"/>
               </a:ext>
             </a:extLst>
           </p:cNvPr>
@@ -7764,8 +8031,8 @@
         </p:nvSpPr>
         <p:spPr>
           <a:xfrm>
-            <a:off x="838200" y="1825625"/>
-            <a:ext cx="10907486" cy="4351338"/>
+            <a:off x="838199" y="1825624"/>
+            <a:ext cx="11146971" cy="5032375"/>
           </a:xfrm>
         </p:spPr>
         <p:txBody>
@@ -7776,8 +8043,21 @@
           <a:p>
             <a:r>
               <a:rPr lang="pt-BR" dirty="0"/>
-              <a:t>Receitas para melhoria do desempenho de modelos</a:t>
-            </a:r>
+              <a:t>Computer Vision: </a:t>
+            </a:r>
+            <a:r>
+              <a:rPr lang="pt-BR" dirty="0" err="1"/>
+              <a:t>Image</a:t>
+            </a:r>
+            <a:r>
+              <a:rPr lang="pt-BR" dirty="0"/>
+              <a:t> </a:t>
+            </a:r>
+            <a:r>
+              <a:rPr lang="pt-BR" dirty="0" err="1"/>
+              <a:t>Enhancement</a:t>
+            </a:r>
+            <a:endParaRPr lang="pt-BR" dirty="0"/>
           </a:p>
           <a:p>
             <a:pPr lvl="1">
@@ -7785,37 +8065,24 @@
               <a:buChar char="§"/>
             </a:pPr>
             <a:r>
-              <a:rPr lang="pt-BR" i="0" dirty="0" err="1">
-                <a:solidFill>
-                  <a:srgbClr val="212529"/>
-                </a:solidFill>
-                <a:effectLst/>
-              </a:rPr>
-              <a:t>Knowledge</a:t>
-            </a:r>
-            <a:r>
-              <a:rPr lang="pt-BR" i="0" dirty="0">
-                <a:solidFill>
-                  <a:srgbClr val="212529"/>
-                </a:solidFill>
-                <a:effectLst/>
-              </a:rPr>
-              <a:t> </a:t>
-            </a:r>
-            <a:r>
-              <a:rPr lang="pt-BR" i="0" dirty="0" err="1">
-                <a:solidFill>
-                  <a:srgbClr val="212529"/>
-                </a:solidFill>
-                <a:effectLst/>
-              </a:rPr>
-              <a:t>Distillation</a:t>
-            </a:r>
-            <a:endParaRPr lang="pt-BR" i="0" dirty="0">
-              <a:solidFill>
-                <a:srgbClr val="212529"/>
-              </a:solidFill>
-              <a:effectLst/>
+              <a:rPr lang="pt-BR" dirty="0" err="1"/>
+              <a:t>MIRNet</a:t>
+            </a:r>
+            <a:endParaRPr lang="pt-BR" dirty="0"/>
+          </a:p>
+          <a:p>
+            <a:pPr lvl="2">
+              <a:buFont typeface="Wingdings" panose="05000000000000000000" pitchFamily="2" charset="2"/>
+              <a:buChar char="ü"/>
+            </a:pPr>
+            <a:r>
+              <a:rPr lang="pt-BR" dirty="0">
+                <a:hlinkClick r:id="rId2"/>
+              </a:rPr>
+              <a:t>https://arxiv.org/abs/2003.06792</a:t>
+            </a:r>
+            <a:endParaRPr lang="pt-BR" dirty="0">
+              <a:hlinkClick r:id="rId3"/>
             </a:endParaRPr>
           </a:p>
           <a:p>
@@ -7824,42 +8091,12 @@
               <a:buChar char="ü"/>
             </a:pPr>
             <a:r>
-              <a:rPr lang="pt-BR" i="0" dirty="0">
-                <a:solidFill>
-                  <a:srgbClr val="212529"/>
-                </a:solidFill>
-                <a:effectLst/>
-                <a:hlinkClick r:id="rId3"/>
-              </a:rPr>
-              <a:t>https://arxiv.org/abs/1503.02531</a:t>
-            </a:r>
-            <a:endParaRPr lang="pt-BR" dirty="0">
-              <a:solidFill>
-                <a:srgbClr val="212529"/>
-              </a:solidFill>
-            </a:endParaRPr>
-          </a:p>
-          <a:p>
-            <a:pPr lvl="2">
-              <a:buFont typeface="Wingdings" panose="05000000000000000000" pitchFamily="2" charset="2"/>
-              <a:buChar char="ü"/>
-            </a:pPr>
-            <a:r>
-              <a:rPr lang="pt-BR" i="0" dirty="0">
-                <a:solidFill>
-                  <a:srgbClr val="212529"/>
-                </a:solidFill>
-                <a:effectLst/>
+              <a:rPr lang="pt-BR" dirty="0">
                 <a:hlinkClick r:id="rId4"/>
               </a:rPr>
-              <a:t>https://keras.io/examples/vision/knowledge_distillation/</a:t>
-            </a:r>
-            <a:endParaRPr lang="pt-BR" i="0" dirty="0">
-              <a:solidFill>
-                <a:srgbClr val="212529"/>
-              </a:solidFill>
-              <a:effectLst/>
-            </a:endParaRPr>
+              <a:t>https://keras.io/examples/vision/mirnet/</a:t>
+            </a:r>
+            <a:endParaRPr lang="pt-BR" dirty="0"/>
           </a:p>
           <a:p>
             <a:pPr lvl="1">
@@ -7867,18 +8104,9 @@
               <a:buChar char="§"/>
             </a:pPr>
             <a:r>
-              <a:rPr lang="pt-BR" dirty="0" err="1"/>
-              <a:t>Gradient</a:t>
-            </a:r>
-            <a:r>
-              <a:rPr lang="pt-BR" dirty="0"/>
-              <a:t> </a:t>
-            </a:r>
-            <a:r>
-              <a:rPr lang="pt-BR" dirty="0" err="1"/>
-              <a:t>Centralization</a:t>
-            </a:r>
-            <a:endParaRPr lang="pt-BR" dirty="0"/>
+              <a:rPr lang="en-US" dirty="0"/>
+              <a:t>Enhanced Deep Residual Networks for Single Image Super-Resolution (EDSR)</a:t>
+            </a:r>
           </a:p>
           <a:p>
             <a:pPr lvl="2">
@@ -7889,7 +8117,7 @@
               <a:rPr lang="pt-BR" dirty="0">
                 <a:hlinkClick r:id="rId5"/>
               </a:rPr>
-              <a:t>https://arxiv.org/abs/2004.01461</a:t>
+              <a:t>https://arxiv.org/abs/1707.02921</a:t>
             </a:r>
             <a:endParaRPr lang="pt-BR" dirty="0"/>
           </a:p>
@@ -7902,40 +8130,43 @@
               <a:rPr lang="pt-BR" dirty="0">
                 <a:hlinkClick r:id="rId6"/>
               </a:rPr>
-              <a:t>https://keras.io/examples/vision/gradient_centralization/</a:t>
+              <a:t>https://keras.io/examples/vision/edsr/</a:t>
             </a:r>
             <a:endParaRPr lang="pt-BR" dirty="0"/>
           </a:p>
           <a:p>
+            <a:r>
+              <a:rPr lang="pt-BR" dirty="0"/>
+              <a:t>Computer Vision: Performance </a:t>
+            </a:r>
+            <a:r>
+              <a:rPr lang="pt-BR" dirty="0" err="1"/>
+              <a:t>recipes</a:t>
+            </a:r>
+            <a:endParaRPr lang="pt-BR" sz="2400" dirty="0"/>
+          </a:p>
+          <a:p>
             <a:pPr lvl="1">
               <a:buFont typeface="Wingdings" panose="05000000000000000000" pitchFamily="2" charset="2"/>
               <a:buChar char="§"/>
             </a:pPr>
             <a:r>
-              <a:rPr lang="en-US" dirty="0" err="1">
-                <a:effectLst/>
-              </a:rPr>
-              <a:t>VeLO</a:t>
-            </a:r>
+              <a:rPr lang="en-US" dirty="0"/>
+              <a:t>Learning to Resize in Computer Vision</a:t>
+            </a:r>
+          </a:p>
+          <a:p>
+            <a:pPr lvl="2">
+              <a:buFont typeface="Wingdings" panose="05000000000000000000" pitchFamily="2" charset="2"/>
+              <a:buChar char="ü"/>
+            </a:pPr>
             <a:r>
               <a:rPr lang="en-US" dirty="0">
-                <a:effectLst/>
-              </a:rPr>
-              <a:t>: Training Versatile Learned Optimizers by Scaling Up</a:t>
-            </a:r>
-          </a:p>
-          <a:p>
-            <a:pPr lvl="2">
-              <a:buFont typeface="Wingdings" panose="05000000000000000000" pitchFamily="2" charset="2"/>
-              <a:buChar char="ü"/>
-            </a:pPr>
-            <a:r>
-              <a:rPr lang="pt-BR" dirty="0">
                 <a:hlinkClick r:id="rId7"/>
               </a:rPr>
-              <a:t>https://arxiv.org/pdf/2211.09760</a:t>
-            </a:r>
-            <a:endParaRPr lang="pt-BR" dirty="0"/>
+              <a:t>https://arxiv.org/abs/2103.09950v1</a:t>
+            </a:r>
+            <a:endParaRPr lang="en-US" dirty="0"/>
           </a:p>
           <a:p>
             <a:pPr lvl="2">
@@ -7946,21 +8177,8 @@
               <a:rPr lang="pt-BR" dirty="0">
                 <a:hlinkClick r:id="rId8"/>
               </a:rPr>
-              <a:t>https://velo-code.github.io/</a:t>
-            </a:r>
-            <a:endParaRPr lang="pt-BR" dirty="0"/>
-          </a:p>
-          <a:p>
-            <a:pPr marL="914400" lvl="2" indent="0">
-              <a:buNone/>
-            </a:pPr>
-            <a:r>
-              <a:rPr lang="pt-BR" dirty="0"/>
-              <a:t/>
-            </a:r>
-            <a:br>
-              <a:rPr lang="pt-BR" dirty="0"/>
-            </a:br>
+              <a:t>https://keras.io/examples/vision/learnable_resizer/</a:t>
+            </a:r>
             <a:endParaRPr lang="pt-BR" dirty="0"/>
           </a:p>
           <a:p>
@@ -7971,7 +8189,7 @@
     </p:spTree>
     <p:extLst>
       <p:ext uri="{BB962C8B-B14F-4D97-AF65-F5344CB8AC3E}">
-        <p14:creationId xmlns:p14="http://schemas.microsoft.com/office/powerpoint/2010/main" val="3709901621"/>
+        <p14:creationId xmlns:p14="http://schemas.microsoft.com/office/powerpoint/2010/main" val="2621045386"/>
       </p:ext>
     </p:extLst>
   </p:cSld>
@@ -8003,7 +8221,7 @@
           <p:cNvPr id="2" name="Título 1">
             <a:extLst>
               <a:ext uri="{FF2B5EF4-FFF2-40B4-BE49-F238E27FC236}">
-                <a16:creationId xmlns:a16="http://schemas.microsoft.com/office/drawing/2014/main" xmlns="" id="{A2A4684C-1159-4F88-A2B1-6BABEDE38C4D}"/>
+                <a16:creationId xmlns="" xmlns:a16="http://schemas.microsoft.com/office/drawing/2014/main" id="{F70C7E2D-5398-4F5E-7000-BA72FF1C6228}"/>
               </a:ext>
             </a:extLst>
           </p:cNvPr>
@@ -8021,7 +8239,7 @@
           <a:p>
             <a:r>
               <a:rPr lang="pt-BR" dirty="0"/>
-              <a:t>Referências</a:t>
+              <a:t>Temas dos seminários</a:t>
             </a:r>
           </a:p>
         </p:txBody>
@@ -8031,7 +8249,7 @@
           <p:cNvPr id="3" name="Espaço Reservado para Conteúdo 2">
             <a:extLst>
               <a:ext uri="{FF2B5EF4-FFF2-40B4-BE49-F238E27FC236}">
-                <a16:creationId xmlns:a16="http://schemas.microsoft.com/office/drawing/2014/main" xmlns="" id="{EC432B31-D382-41FF-BB6B-2ABDD322424B}"/>
+                <a16:creationId xmlns="" xmlns:a16="http://schemas.microsoft.com/office/drawing/2014/main" id="{BA790209-FBBD-71F4-6F9F-502DB6462A33}"/>
               </a:ext>
             </a:extLst>
           </p:cNvPr>
@@ -8042,60 +8260,35 @@
             <p:ph idx="1"/>
           </p:nvPr>
         </p:nvSpPr>
-        <p:spPr>
-          <a:xfrm>
-            <a:off x="838199" y="1648915"/>
-            <a:ext cx="11157155" cy="5209085"/>
-          </a:xfrm>
-        </p:spPr>
-        <p:txBody>
-          <a:bodyPr>
-            <a:noAutofit/>
-          </a:bodyPr>
+        <p:spPr/>
+        <p:txBody>
+          <a:bodyPr/>
           <a:lstStyle/>
           <a:p>
-            <a:pPr marL="0" indent="0">
-              <a:spcBef>
-                <a:spcPts val="0"/>
-              </a:spcBef>
-              <a:buNone/>
-            </a:pPr>
-            <a:r>
-              <a:rPr lang="pt-BR" sz="2400" b="0" i="0" u="none" strike="noStrike" dirty="0">
+            <a:r>
+              <a:rPr lang="pt-BR" dirty="0"/>
+              <a:t>Computer Vision: </a:t>
+            </a:r>
+            <a:r>
+              <a:rPr lang="pt-BR" b="0" i="0" dirty="0">
                 <a:solidFill>
                   <a:srgbClr val="000000"/>
                 </a:solidFill>
                 <a:effectLst/>
               </a:rPr>
-              <a:t>[1] </a:t>
-            </a:r>
-            <a:r>
-              <a:rPr lang="pt-BR" sz="2400" dirty="0">
-                <a:solidFill>
-                  <a:srgbClr val="000000"/>
-                </a:solidFill>
-              </a:rPr>
-              <a:t>“Tensorflow </a:t>
-            </a:r>
-            <a:r>
-              <a:rPr lang="pt-BR" sz="2400" dirty="0" err="1">
-                <a:solidFill>
-                  <a:srgbClr val="000000"/>
-                </a:solidFill>
-              </a:rPr>
-              <a:t>c</a:t>
-            </a:r>
-            <a:r>
-              <a:rPr lang="pt-BR" sz="2400" b="0" i="0" u="none" strike="noStrike" dirty="0" err="1">
+              <a:t>3D </a:t>
+            </a:r>
+            <a:r>
+              <a:rPr lang="pt-BR" b="0" i="0" dirty="0" err="1">
                 <a:solidFill>
                   <a:srgbClr val="000000"/>
                 </a:solidFill>
                 <a:effectLst/>
               </a:rPr>
-              <a:t>ode</a:t>
-            </a:r>
-            <a:r>
-              <a:rPr lang="pt-BR" sz="2400" b="0" i="0" u="none" strike="noStrike" dirty="0">
+              <a:t>Object</a:t>
+            </a:r>
+            <a:r>
+              <a:rPr lang="pt-BR" b="0" i="0" dirty="0">
                 <a:solidFill>
                   <a:srgbClr val="000000"/>
                 </a:solidFill>
@@ -8104,34 +8297,15 @@
               <a:t> </a:t>
             </a:r>
             <a:r>
-              <a:rPr lang="pt-BR" sz="2400" b="0" i="0" u="none" strike="noStrike" dirty="0" err="1">
+              <a:rPr lang="pt-BR" b="0" i="0" dirty="0" err="1">
                 <a:solidFill>
                   <a:srgbClr val="000000"/>
                 </a:solidFill>
                 <a:effectLst/>
               </a:rPr>
-              <a:t>examples</a:t>
-            </a:r>
-            <a:r>
-              <a:rPr lang="pt-BR" sz="2400" b="0" i="0" u="none" strike="noStrike" dirty="0">
-                <a:solidFill>
-                  <a:srgbClr val="000000"/>
-                </a:solidFill>
-                <a:effectLst/>
-              </a:rPr>
-              <a:t>”, </a:t>
-            </a:r>
-            <a:r>
-              <a:rPr lang="pt-BR" sz="2400" b="0" i="0" u="none" strike="noStrike" dirty="0">
-                <a:solidFill>
-                  <a:srgbClr val="000000"/>
-                </a:solidFill>
-                <a:effectLst/>
-                <a:hlinkClick r:id="rId3"/>
-              </a:rPr>
-              <a:t>https://keras.io/examples/</a:t>
-            </a:r>
-            <a:endParaRPr lang="pt-BR" sz="2400" b="0" i="0" u="none" strike="noStrike" dirty="0">
+              <a:t>Reconstruction</a:t>
+            </a:r>
+            <a:endParaRPr lang="pt-BR" b="0" i="0" dirty="0">
               <a:solidFill>
                 <a:srgbClr val="000000"/>
               </a:solidFill>
@@ -8139,735 +8313,87 @@
             </a:endParaRPr>
           </a:p>
           <a:p>
-            <a:pPr marL="0" indent="0">
-              <a:spcBef>
-                <a:spcPts val="0"/>
-              </a:spcBef>
+            <a:pPr lvl="1">
+              <a:buFont typeface="Wingdings" panose="05000000000000000000" pitchFamily="2" charset="2"/>
+              <a:buChar char="§"/>
+            </a:pPr>
+            <a:r>
+              <a:rPr lang="en-US" b="0" i="0" dirty="0" err="1">
+                <a:solidFill>
+                  <a:srgbClr val="000000"/>
+                </a:solidFill>
+                <a:effectLst/>
+              </a:rPr>
+              <a:t>TripoSR</a:t>
+            </a:r>
+            <a:r>
+              <a:rPr lang="en-US" b="0" i="0" dirty="0">
+                <a:solidFill>
+                  <a:srgbClr val="000000"/>
+                </a:solidFill>
+                <a:effectLst/>
+              </a:rPr>
+              <a:t>: Fast 3D Object Reconstruction from a Single Image</a:t>
+            </a:r>
+            <a:endParaRPr lang="pt-BR" dirty="0">
+              <a:hlinkClick r:id="rId2"/>
+            </a:endParaRPr>
+          </a:p>
+          <a:p>
+            <a:pPr lvl="2">
+              <a:buFont typeface="Wingdings" panose="05000000000000000000" pitchFamily="2" charset="2"/>
+              <a:buChar char="ü"/>
+            </a:pPr>
+            <a:r>
+              <a:rPr lang="pt-BR" dirty="0">
+                <a:hlinkClick r:id="rId2"/>
+              </a:rPr>
+              <a:t>https://arxiv.org/abs/2403.02151</a:t>
+            </a:r>
+            <a:endParaRPr lang="pt-BR" dirty="0"/>
+          </a:p>
+          <a:p>
+            <a:pPr lvl="2">
+              <a:buFont typeface="Wingdings" panose="05000000000000000000" pitchFamily="2" charset="2"/>
+              <a:buChar char="ü"/>
+            </a:pPr>
+            <a:r>
+              <a:rPr lang="pt-BR" dirty="0">
+                <a:hlinkClick r:id="rId3"/>
+              </a:rPr>
+              <a:t>https://paperswithcode.com/paper/triposr-fast-3d-object-reconstruction-from-a</a:t>
+            </a:r>
+            <a:endParaRPr lang="pt-BR" dirty="0"/>
+          </a:p>
+          <a:p>
+            <a:pPr lvl="1"/>
+            <a:endParaRPr lang="pt-BR" dirty="0"/>
+          </a:p>
+          <a:p>
+            <a:pPr marL="914400" lvl="2" indent="0">
               <a:buNone/>
             </a:pPr>
-            <a:r>
-              <a:rPr lang="pt-BR" sz="2400" dirty="0">
-                <a:solidFill>
-                  <a:srgbClr val="000000"/>
-                </a:solidFill>
-              </a:rPr>
-              <a:t>[2] “</a:t>
-            </a:r>
-            <a:r>
-              <a:rPr lang="pt-BR" sz="2400" dirty="0" err="1">
-                <a:solidFill>
-                  <a:srgbClr val="000000"/>
-                </a:solidFill>
-              </a:rPr>
-              <a:t>Pytorch</a:t>
-            </a:r>
-            <a:r>
-              <a:rPr lang="pt-BR" sz="2400" dirty="0">
-                <a:solidFill>
-                  <a:srgbClr val="000000"/>
-                </a:solidFill>
-              </a:rPr>
-              <a:t> </a:t>
-            </a:r>
-            <a:r>
-              <a:rPr lang="pt-BR" sz="2400" dirty="0" err="1">
-                <a:solidFill>
-                  <a:srgbClr val="000000"/>
-                </a:solidFill>
-              </a:rPr>
-              <a:t>code</a:t>
-            </a:r>
-            <a:r>
-              <a:rPr lang="pt-BR" sz="2400" dirty="0">
-                <a:solidFill>
-                  <a:srgbClr val="000000"/>
-                </a:solidFill>
-              </a:rPr>
-              <a:t> </a:t>
-            </a:r>
-            <a:r>
-              <a:rPr lang="pt-BR" sz="2400" dirty="0" err="1">
-                <a:solidFill>
-                  <a:srgbClr val="000000"/>
-                </a:solidFill>
-              </a:rPr>
-              <a:t>examples</a:t>
-            </a:r>
-            <a:r>
-              <a:rPr lang="pt-BR" sz="2400" dirty="0">
-                <a:solidFill>
-                  <a:srgbClr val="000000"/>
-                </a:solidFill>
-              </a:rPr>
-              <a:t>”, </a:t>
-            </a:r>
-            <a:r>
-              <a:rPr lang="pt-BR" sz="2400" dirty="0">
-                <a:solidFill>
-                  <a:srgbClr val="000000"/>
-                </a:solidFill>
-                <a:hlinkClick r:id="rId4"/>
-              </a:rPr>
-              <a:t>https://pytorch.org/examples/</a:t>
-            </a:r>
-            <a:endParaRPr lang="pt-BR" sz="2400" dirty="0">
-              <a:solidFill>
-                <a:srgbClr val="000000"/>
-              </a:solidFill>
-            </a:endParaRPr>
-          </a:p>
-          <a:p>
-            <a:pPr marL="0" indent="0">
-              <a:spcBef>
-                <a:spcPts val="0"/>
-              </a:spcBef>
+            <a:endParaRPr lang="pt-BR" dirty="0"/>
+          </a:p>
+          <a:p>
+            <a:pPr marL="914400" lvl="2" indent="0">
               <a:buNone/>
             </a:pPr>
-            <a:r>
-              <a:rPr lang="pt-BR" sz="2400" b="0" i="0" u="none" strike="noStrike" dirty="0">
-                <a:solidFill>
-                  <a:srgbClr val="000000"/>
-                </a:solidFill>
-                <a:effectLst/>
-              </a:rPr>
-              <a:t>[3] “Papers </a:t>
-            </a:r>
-            <a:r>
-              <a:rPr lang="pt-BR" sz="2400" b="0" i="0" u="none" strike="noStrike" dirty="0" err="1">
-                <a:solidFill>
-                  <a:srgbClr val="000000"/>
-                </a:solidFill>
-                <a:effectLst/>
-              </a:rPr>
-              <a:t>with</a:t>
-            </a:r>
-            <a:r>
-              <a:rPr lang="pt-BR" sz="2400" b="0" i="0" u="none" strike="noStrike" dirty="0">
-                <a:solidFill>
-                  <a:srgbClr val="000000"/>
-                </a:solidFill>
-                <a:effectLst/>
-              </a:rPr>
-              <a:t> </a:t>
-            </a:r>
-            <a:r>
-              <a:rPr lang="pt-BR" sz="2400" b="0" i="0" u="none" strike="noStrike" dirty="0" err="1">
-                <a:solidFill>
-                  <a:srgbClr val="000000"/>
-                </a:solidFill>
-                <a:effectLst/>
-              </a:rPr>
-              <a:t>code</a:t>
-            </a:r>
-            <a:r>
-              <a:rPr lang="pt-BR" sz="2400" b="0" i="0" u="none" strike="noStrike" dirty="0">
-                <a:solidFill>
-                  <a:srgbClr val="000000"/>
-                </a:solidFill>
-                <a:effectLst/>
-              </a:rPr>
-              <a:t>”</a:t>
-            </a:r>
-            <a:r>
-              <a:rPr lang="pt-BR" sz="2400" dirty="0">
-                <a:solidFill>
-                  <a:srgbClr val="000000"/>
-                </a:solidFill>
-              </a:rPr>
-              <a:t>, </a:t>
-            </a:r>
-            <a:r>
-              <a:rPr lang="pt-BR" sz="2400" dirty="0">
-                <a:solidFill>
-                  <a:srgbClr val="000000"/>
-                </a:solidFill>
-                <a:hlinkClick r:id="rId5"/>
-              </a:rPr>
-              <a:t>https://paperswithcode.com/</a:t>
-            </a:r>
-            <a:endParaRPr lang="pt-BR" sz="2400" b="0" i="0" u="none" strike="noStrike" dirty="0">
-              <a:solidFill>
-                <a:srgbClr val="000000"/>
-              </a:solidFill>
-              <a:effectLst/>
-            </a:endParaRPr>
-          </a:p>
-          <a:p>
-            <a:pPr marL="0" indent="0">
-              <a:spcBef>
-                <a:spcPts val="0"/>
-              </a:spcBef>
-              <a:buNone/>
-            </a:pPr>
-            <a:r>
-              <a:rPr lang="pt-BR" sz="2400" dirty="0">
-                <a:solidFill>
-                  <a:srgbClr val="000000"/>
-                </a:solidFill>
-              </a:rPr>
-              <a:t>[4] Sebastian </a:t>
-            </a:r>
-            <a:r>
-              <a:rPr lang="pt-BR" sz="2400" dirty="0" err="1">
-                <a:solidFill>
-                  <a:srgbClr val="000000"/>
-                </a:solidFill>
-              </a:rPr>
-              <a:t>Raschka</a:t>
-            </a:r>
-            <a:r>
-              <a:rPr lang="pt-BR" sz="2400" dirty="0">
-                <a:solidFill>
-                  <a:srgbClr val="000000"/>
-                </a:solidFill>
-              </a:rPr>
-              <a:t> </a:t>
-            </a:r>
-            <a:r>
-              <a:rPr lang="pt-BR" sz="2400" dirty="0" err="1">
-                <a:solidFill>
-                  <a:srgbClr val="000000"/>
-                </a:solidFill>
-              </a:rPr>
-              <a:t>and</a:t>
-            </a:r>
-            <a:r>
-              <a:rPr lang="pt-BR" sz="2400" dirty="0">
-                <a:solidFill>
-                  <a:srgbClr val="000000"/>
-                </a:solidFill>
-              </a:rPr>
-              <a:t> </a:t>
-            </a:r>
-            <a:r>
-              <a:rPr lang="pt-BR" sz="2400" dirty="0" err="1">
-                <a:solidFill>
-                  <a:srgbClr val="000000"/>
-                </a:solidFill>
-              </a:rPr>
-              <a:t>Vahid</a:t>
-            </a:r>
-            <a:r>
-              <a:rPr lang="pt-BR" sz="2400" dirty="0">
-                <a:solidFill>
-                  <a:srgbClr val="000000"/>
-                </a:solidFill>
-              </a:rPr>
-              <a:t> </a:t>
-            </a:r>
-            <a:r>
-              <a:rPr lang="pt-BR" sz="2400" dirty="0" err="1">
-                <a:solidFill>
-                  <a:srgbClr val="000000"/>
-                </a:solidFill>
-              </a:rPr>
-              <a:t>Mirjalili</a:t>
-            </a:r>
-            <a:r>
-              <a:rPr lang="pt-BR" sz="2400" dirty="0">
-                <a:solidFill>
-                  <a:srgbClr val="000000"/>
-                </a:solidFill>
-              </a:rPr>
-              <a:t>, “</a:t>
-            </a:r>
-            <a:r>
-              <a:rPr lang="en-US" sz="2400" dirty="0">
-                <a:solidFill>
-                  <a:srgbClr val="000000"/>
-                </a:solidFill>
-              </a:rPr>
-              <a:t>Python Machine Learning: Machine Learning and Deep Learning with Python, scikit-learn, and TensorFlow 2”, </a:t>
-            </a:r>
-            <a:r>
-              <a:rPr lang="pt-BR" sz="2400" dirty="0" err="1">
-                <a:solidFill>
-                  <a:srgbClr val="000000"/>
-                </a:solidFill>
-              </a:rPr>
-              <a:t>Packt</a:t>
-            </a:r>
-            <a:r>
-              <a:rPr lang="pt-BR" sz="2400" dirty="0">
-                <a:solidFill>
-                  <a:srgbClr val="000000"/>
-                </a:solidFill>
-              </a:rPr>
-              <a:t> </a:t>
-            </a:r>
-            <a:r>
-              <a:rPr lang="pt-BR" sz="2400" dirty="0" err="1">
-                <a:solidFill>
-                  <a:srgbClr val="000000"/>
-                </a:solidFill>
-              </a:rPr>
-              <a:t>Publishing</a:t>
-            </a:r>
-            <a:r>
-              <a:rPr lang="pt-BR" sz="2400" dirty="0">
-                <a:solidFill>
-                  <a:srgbClr val="000000"/>
-                </a:solidFill>
-              </a:rPr>
-              <a:t>, 2019.</a:t>
-            </a:r>
-            <a:r>
-              <a:rPr lang="en-US" sz="2400" dirty="0">
-                <a:solidFill>
-                  <a:srgbClr val="000000"/>
-                </a:solidFill>
-              </a:rPr>
-              <a:t/>
-            </a:r>
-            <a:br>
-              <a:rPr lang="en-US" sz="2400" dirty="0">
-                <a:solidFill>
-                  <a:srgbClr val="000000"/>
-                </a:solidFill>
-              </a:rPr>
-            </a:br>
-            <a:r>
-              <a:rPr lang="en-US" sz="2400" dirty="0">
-                <a:solidFill>
-                  <a:srgbClr val="000000"/>
-                </a:solidFill>
-              </a:rPr>
-              <a:t>[5] </a:t>
-            </a:r>
-            <a:r>
-              <a:rPr lang="pt-BR" sz="2400" dirty="0">
-                <a:solidFill>
-                  <a:srgbClr val="000000"/>
-                </a:solidFill>
-              </a:rPr>
-              <a:t>Ivan </a:t>
-            </a:r>
-            <a:r>
-              <a:rPr lang="pt-BR" sz="2400" dirty="0" err="1">
-                <a:solidFill>
-                  <a:srgbClr val="000000"/>
-                </a:solidFill>
-              </a:rPr>
-              <a:t>Vasilev</a:t>
-            </a:r>
-            <a:r>
-              <a:rPr lang="pt-BR" sz="2400" dirty="0">
-                <a:solidFill>
-                  <a:srgbClr val="000000"/>
-                </a:solidFill>
-              </a:rPr>
-              <a:t>, </a:t>
-            </a:r>
-            <a:r>
-              <a:rPr lang="en-US" sz="2400" dirty="0">
-                <a:solidFill>
-                  <a:srgbClr val="000000"/>
-                </a:solidFill>
-              </a:rPr>
-              <a:t>“Advanced Deep Learning with Python: Design and implement advanced next-generation AI solutions using TensorFlow and </a:t>
-            </a:r>
-            <a:r>
-              <a:rPr lang="en-US" sz="2400" dirty="0" err="1">
-                <a:solidFill>
-                  <a:srgbClr val="000000"/>
-                </a:solidFill>
-              </a:rPr>
-              <a:t>PyTorch</a:t>
-            </a:r>
-            <a:r>
-              <a:rPr lang="en-US" sz="2400" dirty="0">
-                <a:solidFill>
-                  <a:srgbClr val="000000"/>
-                </a:solidFill>
-              </a:rPr>
-              <a:t>”, </a:t>
-            </a:r>
-            <a:r>
-              <a:rPr lang="pt-BR" sz="2400" dirty="0" err="1">
-                <a:solidFill>
-                  <a:srgbClr val="000000"/>
-                </a:solidFill>
-              </a:rPr>
-              <a:t>Packt</a:t>
-            </a:r>
-            <a:r>
-              <a:rPr lang="pt-BR" sz="2400" dirty="0">
-                <a:solidFill>
-                  <a:srgbClr val="000000"/>
-                </a:solidFill>
-              </a:rPr>
-              <a:t> </a:t>
-            </a:r>
-            <a:r>
-              <a:rPr lang="pt-BR" sz="2400" dirty="0" err="1">
-                <a:solidFill>
-                  <a:srgbClr val="000000"/>
-                </a:solidFill>
-              </a:rPr>
-              <a:t>Publishing</a:t>
-            </a:r>
-            <a:r>
-              <a:rPr lang="pt-BR" sz="2400" dirty="0">
-                <a:solidFill>
-                  <a:srgbClr val="000000"/>
-                </a:solidFill>
-              </a:rPr>
-              <a:t>, 2019.</a:t>
-            </a:r>
-          </a:p>
-          <a:p>
-            <a:pPr marL="0" indent="0">
-              <a:spcBef>
-                <a:spcPts val="0"/>
-              </a:spcBef>
-              <a:buNone/>
-            </a:pPr>
-            <a:r>
-              <a:rPr lang="pt-BR" sz="2400" dirty="0">
-                <a:solidFill>
-                  <a:srgbClr val="000000"/>
-                </a:solidFill>
-              </a:rPr>
-              <a:t>[6] </a:t>
-            </a:r>
-            <a:r>
-              <a:rPr lang="pt-BR" sz="2400" dirty="0" err="1">
-                <a:solidFill>
-                  <a:srgbClr val="000000"/>
-                </a:solidFill>
-              </a:rPr>
-              <a:t>Aurélien</a:t>
-            </a:r>
-            <a:r>
-              <a:rPr lang="pt-BR" sz="2400" dirty="0">
-                <a:solidFill>
-                  <a:srgbClr val="000000"/>
-                </a:solidFill>
-              </a:rPr>
-              <a:t> </a:t>
-            </a:r>
-            <a:r>
-              <a:rPr lang="pt-BR" sz="2400" dirty="0" err="1">
-                <a:solidFill>
-                  <a:srgbClr val="000000"/>
-                </a:solidFill>
-              </a:rPr>
-              <a:t>Géron</a:t>
-            </a:r>
-            <a:r>
-              <a:rPr lang="pt-BR" sz="2400" dirty="0">
-                <a:solidFill>
-                  <a:srgbClr val="000000"/>
-                </a:solidFill>
-              </a:rPr>
-              <a:t>, "Hands-On Machine Learning </a:t>
-            </a:r>
-            <a:r>
-              <a:rPr lang="pt-BR" sz="2400" dirty="0" err="1">
-                <a:solidFill>
-                  <a:srgbClr val="000000"/>
-                </a:solidFill>
-              </a:rPr>
-              <a:t>with</a:t>
-            </a:r>
-            <a:r>
-              <a:rPr lang="pt-BR" sz="2400" dirty="0">
-                <a:solidFill>
-                  <a:srgbClr val="000000"/>
-                </a:solidFill>
-              </a:rPr>
-              <a:t> </a:t>
-            </a:r>
-            <a:r>
-              <a:rPr lang="pt-BR" sz="2400" dirty="0" err="1">
-                <a:solidFill>
-                  <a:srgbClr val="000000"/>
-                </a:solidFill>
-              </a:rPr>
-              <a:t>Scikit-Learn</a:t>
-            </a:r>
-            <a:r>
-              <a:rPr lang="pt-BR" sz="2400" dirty="0">
-                <a:solidFill>
-                  <a:srgbClr val="000000"/>
-                </a:solidFill>
-              </a:rPr>
-              <a:t> </a:t>
-            </a:r>
-            <a:r>
-              <a:rPr lang="pt-BR" sz="2400" dirty="0" err="1">
-                <a:solidFill>
-                  <a:srgbClr val="000000"/>
-                </a:solidFill>
-              </a:rPr>
-              <a:t>and</a:t>
-            </a:r>
-            <a:r>
-              <a:rPr lang="pt-BR" sz="2400" dirty="0">
-                <a:solidFill>
-                  <a:srgbClr val="000000"/>
-                </a:solidFill>
-              </a:rPr>
-              <a:t> TensorFlow: </a:t>
-            </a:r>
-            <a:r>
-              <a:rPr lang="pt-BR" sz="2400" dirty="0" err="1">
-                <a:solidFill>
-                  <a:srgbClr val="000000"/>
-                </a:solidFill>
-              </a:rPr>
-              <a:t>Concepts</a:t>
-            </a:r>
-            <a:r>
-              <a:rPr lang="pt-BR" sz="2400" dirty="0">
-                <a:solidFill>
-                  <a:srgbClr val="000000"/>
-                </a:solidFill>
-              </a:rPr>
-              <a:t>, Tools, </a:t>
-            </a:r>
-            <a:r>
-              <a:rPr lang="pt-BR" sz="2400" dirty="0" err="1">
-                <a:solidFill>
-                  <a:srgbClr val="000000"/>
-                </a:solidFill>
-              </a:rPr>
-              <a:t>and</a:t>
-            </a:r>
-            <a:r>
-              <a:rPr lang="pt-BR" sz="2400" dirty="0">
-                <a:solidFill>
-                  <a:srgbClr val="000000"/>
-                </a:solidFill>
-              </a:rPr>
-              <a:t> </a:t>
-            </a:r>
-            <a:r>
-              <a:rPr lang="pt-BR" sz="2400" dirty="0" err="1">
-                <a:solidFill>
-                  <a:srgbClr val="000000"/>
-                </a:solidFill>
-              </a:rPr>
-              <a:t>Techniques</a:t>
-            </a:r>
-            <a:r>
-              <a:rPr lang="pt-BR" sz="2400" dirty="0">
-                <a:solidFill>
-                  <a:srgbClr val="000000"/>
-                </a:solidFill>
-              </a:rPr>
-              <a:t> </a:t>
-            </a:r>
-            <a:r>
-              <a:rPr lang="pt-BR" sz="2400" dirty="0" err="1">
-                <a:solidFill>
-                  <a:srgbClr val="000000"/>
-                </a:solidFill>
-              </a:rPr>
-              <a:t>to</a:t>
-            </a:r>
-            <a:r>
-              <a:rPr lang="pt-BR" sz="2400" dirty="0">
-                <a:solidFill>
-                  <a:srgbClr val="000000"/>
-                </a:solidFill>
-              </a:rPr>
-              <a:t> Build </a:t>
-            </a:r>
-            <a:r>
-              <a:rPr lang="pt-BR" sz="2400" dirty="0" err="1">
-                <a:solidFill>
-                  <a:srgbClr val="000000"/>
-                </a:solidFill>
-              </a:rPr>
-              <a:t>Intelligent</a:t>
-            </a:r>
-            <a:r>
-              <a:rPr lang="pt-BR" sz="2400" dirty="0">
-                <a:solidFill>
-                  <a:srgbClr val="000000"/>
-                </a:solidFill>
-              </a:rPr>
-              <a:t> Systems", 3rd ed., O'Reilly Media, 2022.</a:t>
-            </a:r>
-          </a:p>
-          <a:p>
-            <a:pPr marL="0" indent="0">
-              <a:spcBef>
-                <a:spcPts val="0"/>
-              </a:spcBef>
-              <a:buNone/>
-            </a:pPr>
-            <a:r>
-              <a:rPr lang="en-US" sz="2400" dirty="0">
-                <a:solidFill>
-                  <a:srgbClr val="000000"/>
-                </a:solidFill>
-              </a:rPr>
-              <a:t>[7] </a:t>
-            </a:r>
-            <a:r>
-              <a:rPr lang="en-US" sz="2400" dirty="0" err="1">
-                <a:solidFill>
-                  <a:srgbClr val="000000"/>
-                </a:solidFill>
-              </a:rPr>
-              <a:t>Raschka</a:t>
-            </a:r>
-            <a:r>
-              <a:rPr lang="en-US" sz="2400" dirty="0">
-                <a:solidFill>
-                  <a:srgbClr val="000000"/>
-                </a:solidFill>
-              </a:rPr>
-              <a:t>, Sebastian, et al., “Machine Learning with </a:t>
-            </a:r>
-            <a:r>
-              <a:rPr lang="en-US" sz="2400" dirty="0" err="1">
-                <a:solidFill>
-                  <a:srgbClr val="000000"/>
-                </a:solidFill>
-              </a:rPr>
-              <a:t>PyTorch</a:t>
-            </a:r>
-            <a:r>
-              <a:rPr lang="en-US" sz="2400" dirty="0">
-                <a:solidFill>
-                  <a:srgbClr val="000000"/>
-                </a:solidFill>
-              </a:rPr>
-              <a:t> and Scikit-Learn: Develop machine learning and deep learning models with Python”, </a:t>
-            </a:r>
-            <a:r>
-              <a:rPr lang="en-US" sz="2400" dirty="0" err="1">
-                <a:solidFill>
-                  <a:srgbClr val="000000"/>
-                </a:solidFill>
-              </a:rPr>
-              <a:t>Packt</a:t>
-            </a:r>
-            <a:r>
-              <a:rPr lang="en-US" sz="2400" dirty="0">
-                <a:solidFill>
-                  <a:srgbClr val="000000"/>
-                </a:solidFill>
-              </a:rPr>
-              <a:t> Publishing Ltd, 2022.</a:t>
-            </a:r>
-            <a:endParaRPr lang="pt-BR" sz="2400" dirty="0">
-              <a:solidFill>
-                <a:srgbClr val="000000"/>
-              </a:solidFill>
-            </a:endParaRPr>
-          </a:p>
-          <a:p>
-            <a:pPr marL="0" indent="0">
-              <a:spcBef>
-                <a:spcPts val="0"/>
-              </a:spcBef>
-              <a:buNone/>
-            </a:pPr>
-            <a:r>
-              <a:rPr lang="pt-BR" sz="2400" dirty="0">
-                <a:solidFill>
-                  <a:srgbClr val="000000"/>
-                </a:solidFill>
-              </a:rPr>
-              <a:t>[8] C. M. Bishop, "</a:t>
-            </a:r>
-            <a:r>
-              <a:rPr lang="pt-BR" sz="2400" dirty="0" err="1">
-                <a:solidFill>
-                  <a:srgbClr val="000000"/>
-                </a:solidFill>
-              </a:rPr>
-              <a:t>Pattern</a:t>
-            </a:r>
-            <a:r>
-              <a:rPr lang="pt-BR" sz="2400" dirty="0">
-                <a:solidFill>
-                  <a:srgbClr val="000000"/>
-                </a:solidFill>
-              </a:rPr>
-              <a:t> </a:t>
-            </a:r>
-            <a:r>
-              <a:rPr lang="pt-BR" sz="2400" dirty="0" err="1">
-                <a:solidFill>
-                  <a:srgbClr val="000000"/>
-                </a:solidFill>
-              </a:rPr>
-              <a:t>Recognition</a:t>
-            </a:r>
-            <a:r>
-              <a:rPr lang="pt-BR" sz="2400" dirty="0">
-                <a:solidFill>
-                  <a:srgbClr val="000000"/>
-                </a:solidFill>
-              </a:rPr>
-              <a:t> </a:t>
-            </a:r>
-            <a:r>
-              <a:rPr lang="pt-BR" sz="2400" dirty="0" err="1">
-                <a:solidFill>
-                  <a:srgbClr val="000000"/>
-                </a:solidFill>
-              </a:rPr>
-              <a:t>and</a:t>
-            </a:r>
-            <a:r>
-              <a:rPr lang="pt-BR" sz="2400" dirty="0">
-                <a:solidFill>
-                  <a:srgbClr val="000000"/>
-                </a:solidFill>
-              </a:rPr>
-              <a:t> Machine Learning", Springer, 2006.</a:t>
-            </a:r>
-          </a:p>
-          <a:p>
-            <a:pPr marL="0" indent="0">
-              <a:spcBef>
-                <a:spcPts val="0"/>
-              </a:spcBef>
-              <a:buNone/>
-            </a:pPr>
-            <a:r>
-              <a:rPr lang="pt-BR" sz="2400">
-                <a:solidFill>
-                  <a:srgbClr val="000000"/>
-                </a:solidFill>
-              </a:rPr>
-              <a:t>[9] </a:t>
-            </a:r>
-            <a:r>
-              <a:rPr lang="pt-BR" sz="2400" dirty="0">
-                <a:solidFill>
-                  <a:srgbClr val="000000"/>
-                </a:solidFill>
-              </a:rPr>
-              <a:t>“Livros”, </a:t>
-            </a:r>
-            <a:r>
-              <a:rPr lang="pt-BR" sz="2400" dirty="0">
-                <a:solidFill>
-                  <a:srgbClr val="000000"/>
-                </a:solidFill>
-                <a:hlinkClick r:id="rId6"/>
-              </a:rPr>
-              <a:t>http://tinyurl.com/tp558-books</a:t>
-            </a:r>
-            <a:endParaRPr lang="pt-BR" sz="2400" dirty="0">
-              <a:solidFill>
-                <a:srgbClr val="000000"/>
-              </a:solidFill>
-            </a:endParaRPr>
+            <a:endParaRPr lang="pt-BR" dirty="0"/>
+          </a:p>
+          <a:p>
+            <a:pPr lvl="1"/>
+            <a:endParaRPr lang="pt-BR" dirty="0"/>
+          </a:p>
+          <a:p>
+            <a:endParaRPr lang="pt-BR" dirty="0"/>
           </a:p>
         </p:txBody>
       </p:sp>
     </p:spTree>
     <p:extLst>
       <p:ext uri="{BB962C8B-B14F-4D97-AF65-F5344CB8AC3E}">
-        <p14:creationId xmlns:p14="http://schemas.microsoft.com/office/powerpoint/2010/main" val="2247946137"/>
+        <p14:creationId xmlns:p14="http://schemas.microsoft.com/office/powerpoint/2010/main" val="1737853871"/>
       </p:ext>
     </p:extLst>
   </p:cSld>
@@ -8882,7 +8408,13 @@
   <p:cSld>
     <p:spTree>
       <p:nvGrpSpPr>
-        <p:cNvPr id="1" name=""/>
+        <p:cNvPr id="1" name="">
+          <a:extLst>
+            <a:ext uri="{FF2B5EF4-FFF2-40B4-BE49-F238E27FC236}">
+              <a16:creationId xmlns="" xmlns:a16="http://schemas.microsoft.com/office/drawing/2014/main" id="{F2050D32-3E32-0E68-EE2F-10DEBF5F9E34}"/>
+            </a:ext>
+          </a:extLst>
+        </p:cNvPr>
         <p:cNvGrpSpPr/>
         <p:nvPr/>
       </p:nvGrpSpPr>
@@ -8896,7 +8428,13 @@
       </p:grpSpPr>
       <p:sp>
         <p:nvSpPr>
-          <p:cNvPr id="2" name="Title 1"/>
+          <p:cNvPr id="2" name="Título 1">
+            <a:extLst>
+              <a:ext uri="{FF2B5EF4-FFF2-40B4-BE49-F238E27FC236}">
+                <a16:creationId xmlns="" xmlns:a16="http://schemas.microsoft.com/office/drawing/2014/main" id="{06C9BF47-FE25-64EB-E7D8-257F36BF0637}"/>
+              </a:ext>
+            </a:extLst>
+          </p:cNvPr>
           <p:cNvSpPr>
             <a:spLocks noGrp="1"/>
           </p:cNvSpPr>
@@ -8910,16 +8448,21 @@
           <a:lstStyle/>
           <a:p>
             <a:r>
-              <a:rPr lang="en-US" dirty="0" err="1"/>
-              <a:t>Avisos</a:t>
-            </a:r>
-            <a:endParaRPr lang="nl-BE" dirty="0"/>
-          </a:p>
-        </p:txBody>
-      </p:sp>
-      <p:sp>
-        <p:nvSpPr>
-          <p:cNvPr id="3" name="Content Placeholder 2"/>
+              <a:rPr lang="pt-BR" dirty="0"/>
+              <a:t>Temas dos seminários</a:t>
+            </a:r>
+          </a:p>
+        </p:txBody>
+      </p:sp>
+      <p:sp>
+        <p:nvSpPr>
+          <p:cNvPr id="3" name="Espaço Reservado para Conteúdo 2">
+            <a:extLst>
+              <a:ext uri="{FF2B5EF4-FFF2-40B4-BE49-F238E27FC236}">
+                <a16:creationId xmlns="" xmlns:a16="http://schemas.microsoft.com/office/drawing/2014/main" id="{85CD2A47-67FC-5F78-FB47-48CDDDA1C93F}"/>
+              </a:ext>
+            </a:extLst>
+          </p:cNvPr>
           <p:cNvSpPr>
             <a:spLocks noGrp="1"/>
           </p:cNvSpPr>
@@ -8930,7 +8473,7 @@
         <p:spPr>
           <a:xfrm>
             <a:off x="838199" y="1825624"/>
-            <a:ext cx="11104419" cy="5032376"/>
+            <a:ext cx="11005457" cy="5032375"/>
           </a:xfrm>
         </p:spPr>
         <p:txBody>
@@ -8940,45 +8483,71 @@
           <a:lstStyle/>
           <a:p>
             <a:r>
-              <a:rPr lang="pt-BR" dirty="0"/>
-              <a:t>Todo material do curso está disponível no GitHub:</a:t>
+              <a:rPr lang="pt-BR" dirty="0" err="1"/>
+              <a:t>Reinforcement</a:t>
+            </a:r>
+            <a:r>
+              <a:rPr lang="pt-BR" dirty="0"/>
+              <a:t> Learning</a:t>
             </a:r>
           </a:p>
           <a:p>
             <a:pPr lvl="1">
               <a:buFont typeface="Wingdings" panose="05000000000000000000" pitchFamily="2" charset="2"/>
               <a:buChar char="§"/>
+            </a:pPr>
+            <a:r>
+              <a:rPr lang="pt-BR" dirty="0" err="1"/>
+              <a:t>Deep</a:t>
+            </a:r>
+            <a:r>
+              <a:rPr lang="pt-BR" dirty="0"/>
+              <a:t> </a:t>
+            </a:r>
+            <a:r>
+              <a:rPr lang="pt-BR" dirty="0" err="1"/>
+              <a:t>Q-Learning</a:t>
+            </a:r>
+            <a:endParaRPr lang="pt-BR" dirty="0"/>
+          </a:p>
+          <a:p>
+            <a:pPr lvl="2">
+              <a:buFont typeface="Wingdings" panose="05000000000000000000" pitchFamily="2" charset="2"/>
+              <a:buChar char="ü"/>
             </a:pPr>
             <a:r>
               <a:rPr lang="pt-BR" dirty="0">
                 <a:hlinkClick r:id="rId2"/>
               </a:rPr>
-              <a:t>https://github.com/zz4fap/tp558-adv-ml</a:t>
+              <a:t>https://storage.googleapis.com/deepmind-media/dqn/DQNNaturePaper.pdf</a:t>
             </a:r>
             <a:endParaRPr lang="pt-BR" dirty="0"/>
           </a:p>
           <a:p>
-            <a:r>
-              <a:rPr lang="pt-BR" dirty="0"/>
-              <a:t>Como usar o Google </a:t>
-            </a:r>
-            <a:r>
-              <a:rPr lang="pt-BR" dirty="0" err="1"/>
-              <a:t>Colab</a:t>
-            </a:r>
-            <a:endParaRPr lang="pt-BR" dirty="0"/>
-          </a:p>
-          <a:p>
-            <a:pPr lvl="1">
-              <a:buFont typeface="Wingdings" panose="05000000000000000000" pitchFamily="2" charset="2"/>
-              <a:buChar char="§"/>
+            <a:pPr lvl="2">
+              <a:buFont typeface="Wingdings" panose="05000000000000000000" pitchFamily="2" charset="2"/>
+              <a:buChar char="ü"/>
             </a:pPr>
             <a:r>
               <a:rPr lang="pt-BR" dirty="0">
                 <a:hlinkClick r:id="rId3"/>
               </a:rPr>
-              <a:t>https://www.youtube.com/watch?v=inN8seMm7UI&amp;ab_channel=TensorFlow</a:t>
-            </a:r>
+              <a:t>https://keras.io/examples/rl/deep_q_network_breakout/</a:t>
+            </a:r>
+            <a:endParaRPr lang="pt-BR" dirty="0"/>
+          </a:p>
+          <a:p>
+            <a:pPr lvl="2">
+              <a:buFont typeface="Wingdings" panose="05000000000000000000" pitchFamily="2" charset="2"/>
+              <a:buChar char="ü"/>
+            </a:pPr>
+            <a:r>
+              <a:rPr lang="pt-BR" dirty="0">
+                <a:hlinkClick r:id="rId4"/>
+              </a:rPr>
+              <a:t>https://www.tensorflow.org/agents/tutorials/0_intro_rl?hl=pt-br</a:t>
+            </a:r>
+            <a:endParaRPr lang="pt-BR" dirty="0"/>
           </a:p>
           <a:p>
             <a:pPr lvl="1">
@@ -8986,88 +8555,149 @@
               <a:buChar char="§"/>
             </a:pPr>
             <a:r>
-              <a:rPr lang="pt-BR" b="0" i="0" dirty="0">
-                <a:solidFill>
-                  <a:srgbClr val="222222"/>
-                </a:solidFill>
-                <a:effectLst/>
-                <a:latin typeface="Arial" panose="020B0604020202020204" pitchFamily="34" charset="0"/>
-                <a:hlinkClick r:id="rId4"/>
-              </a:rPr>
-              <a:t>https://www.youtube.com/watch?v=inN8seMm7UI</a:t>
-            </a:r>
-            <a:endParaRPr lang="pt-BR" b="0" i="0" dirty="0">
-              <a:solidFill>
-                <a:srgbClr val="222222"/>
-              </a:solidFill>
-              <a:effectLst/>
-              <a:latin typeface="Arial" panose="020B0604020202020204" pitchFamily="34" charset="0"/>
-            </a:endParaRPr>
-          </a:p>
-          <a:p>
-            <a:r>
-              <a:rPr lang="pt-BR" dirty="0"/>
-              <a:t>Python Crash </a:t>
-            </a:r>
+              <a:rPr lang="en-US" dirty="0"/>
+              <a:t>Deep Deterministic Policy Gradient (DDPG)</a:t>
+            </a:r>
+          </a:p>
+          <a:p>
+            <a:pPr lvl="2">
+              <a:buFont typeface="Wingdings" panose="05000000000000000000" pitchFamily="2" charset="2"/>
+              <a:buChar char="ü"/>
+            </a:pPr>
+            <a:r>
+              <a:rPr lang="en-US" dirty="0">
+                <a:hlinkClick r:id="rId5"/>
+              </a:rPr>
+              <a:t>https://arxiv.org/pdf/1509.02971.pdf</a:t>
+            </a:r>
+            <a:endParaRPr lang="en-US" dirty="0"/>
+          </a:p>
+          <a:p>
+            <a:pPr lvl="2">
+              <a:buFont typeface="Wingdings" panose="05000000000000000000" pitchFamily="2" charset="2"/>
+              <a:buChar char="ü"/>
+            </a:pPr>
+            <a:r>
+              <a:rPr lang="en-US" dirty="0">
+                <a:hlinkClick r:id="rId6"/>
+              </a:rPr>
+              <a:t>https://keras.io/examples/rl/ddpg_pendulum/</a:t>
+            </a:r>
+            <a:endParaRPr lang="en-US" dirty="0"/>
+          </a:p>
+          <a:p>
+            <a:pPr lvl="1">
+              <a:buFont typeface="Wingdings" panose="05000000000000000000" pitchFamily="2" charset="2"/>
+              <a:buChar char="§"/>
+            </a:pPr>
             <a:r>
               <a:rPr lang="pt-BR" dirty="0" err="1"/>
-              <a:t>Course</a:t>
-            </a:r>
-            <a:endParaRPr lang="pt-BR" dirty="0">
-              <a:hlinkClick r:id="rId3"/>
-            </a:endParaRPr>
-          </a:p>
-          <a:p>
-            <a:pPr lvl="1">
-              <a:buFont typeface="Wingdings" panose="05000000000000000000" pitchFamily="2" charset="2"/>
-              <a:buChar char="§"/>
+              <a:t>Actor</a:t>
+            </a:r>
+            <a:r>
+              <a:rPr lang="pt-BR" dirty="0"/>
+              <a:t> </a:t>
+            </a:r>
+            <a:r>
+              <a:rPr lang="pt-BR" dirty="0" err="1"/>
+              <a:t>Critic</a:t>
+            </a:r>
+            <a:r>
+              <a:rPr lang="pt-BR" dirty="0"/>
+              <a:t> </a:t>
+            </a:r>
+            <a:r>
+              <a:rPr lang="pt-BR" dirty="0" err="1"/>
+              <a:t>Method</a:t>
+            </a:r>
+            <a:endParaRPr lang="pt-BR" dirty="0"/>
+          </a:p>
+          <a:p>
+            <a:pPr lvl="2">
+              <a:buFont typeface="Wingdings" panose="05000000000000000000" pitchFamily="2" charset="2"/>
+              <a:buChar char="ü"/>
             </a:pPr>
             <a:r>
               <a:rPr lang="pt-BR" dirty="0">
-                <a:hlinkClick r:id="rId3"/>
-              </a:rPr>
-              <a:t>https://www.youtube.com/watch?v=pq4NNIYar9o&amp;list=PLRc6ZYt68prVXAhwY1JD6DFc3BJGmJriq&amp;pp=gAQBiAQB</a:t>
+                <a:hlinkClick r:id="rId7"/>
+              </a:rPr>
+              <a:t>https://inria.hal.science/hal-00840470/document</a:t>
             </a:r>
             <a:endParaRPr lang="pt-BR" dirty="0"/>
           </a:p>
           <a:p>
-            <a:r>
-              <a:rPr lang="pt-BR" dirty="0"/>
-              <a:t>Horário de Atendimento</a:t>
-            </a:r>
-          </a:p>
-          <a:p>
-            <a:pPr lvl="1">
-              <a:buFont typeface="Wingdings" panose="05000000000000000000" pitchFamily="2" charset="2"/>
-              <a:buChar char="§"/>
-            </a:pPr>
-            <a:r>
-              <a:rPr lang="pt-BR" dirty="0"/>
-              <a:t>Todas as quartas-feiras das 17:30 às 18:30.</a:t>
-            </a:r>
-          </a:p>
-          <a:p>
-            <a:pPr lvl="1">
-              <a:buFont typeface="Wingdings" panose="05000000000000000000" pitchFamily="2" charset="2"/>
-              <a:buChar char="§"/>
-            </a:pPr>
-            <a:r>
-              <a:rPr lang="pt-BR" dirty="0"/>
-              <a:t>Presencialmente ou remotamente.</a:t>
-            </a:r>
+            <a:pPr lvl="2">
+              <a:buFont typeface="Wingdings" panose="05000000000000000000" pitchFamily="2" charset="2"/>
+              <a:buChar char="ü"/>
+            </a:pPr>
+            <a:r>
+              <a:rPr lang="pt-BR" dirty="0">
+                <a:hlinkClick r:id="rId8"/>
+              </a:rPr>
+              <a:t>https://keras.io/examples/rl/actor_critic_cartpole/</a:t>
+            </a:r>
+            <a:endParaRPr lang="pt-BR" dirty="0"/>
+          </a:p>
+          <a:p>
+            <a:pPr marL="914400" lvl="2" indent="0">
+              <a:buNone/>
+            </a:pPr>
+            <a:endParaRPr lang="pt-BR" sz="2400" dirty="0"/>
+          </a:p>
+          <a:p>
+            <a:pPr marL="0" indent="0">
+              <a:buNone/>
+            </a:pPr>
+            <a:endParaRPr lang="en-US" sz="2400" dirty="0"/>
+          </a:p>
+          <a:p>
+            <a:pPr marL="914400" lvl="2" indent="0">
+              <a:buNone/>
+            </a:pPr>
+            <a:endParaRPr lang="en-US" sz="2400" dirty="0"/>
+          </a:p>
+          <a:p>
+            <a:pPr lvl="2">
+              <a:buFont typeface="Wingdings" panose="05000000000000000000" pitchFamily="2" charset="2"/>
+              <a:buChar char="ü"/>
+            </a:pPr>
+            <a:endParaRPr lang="pt-BR" dirty="0"/>
+          </a:p>
+          <a:p>
+            <a:pPr marL="914400" lvl="2" indent="0">
+              <a:buNone/>
+            </a:pPr>
+            <a:endParaRPr lang="pt-BR" dirty="0"/>
+          </a:p>
+          <a:p>
+            <a:pPr marL="914400" lvl="2" indent="0">
+              <a:buNone/>
+            </a:pPr>
+            <a:endParaRPr lang="pt-BR" dirty="0"/>
+          </a:p>
+          <a:p>
+            <a:pPr lvl="1"/>
+            <a:endParaRPr lang="pt-BR" dirty="0"/>
           </a:p>
         </p:txBody>
       </p:sp>
     </p:spTree>
     <p:extLst>
       <p:ext uri="{BB962C8B-B14F-4D97-AF65-F5344CB8AC3E}">
-        <p14:creationId xmlns:p14="http://schemas.microsoft.com/office/powerpoint/2010/main" val="1412900488"/>
+        <p14:creationId xmlns:p14="http://schemas.microsoft.com/office/powerpoint/2010/main" val="4061495622"/>
       </p:ext>
     </p:extLst>
   </p:cSld>
   <p:clrMapOvr>
     <a:masterClrMapping/>
   </p:clrMapOvr>
+  <p:timing>
+    <p:tnLst>
+      <p:par>
+        <p:cTn id="1" dur="indefinite" restart="never" nodeType="tmRoot"/>
+      </p:par>
+    </p:tnLst>
+  </p:timing>
 </p:sld>
 </file>
 
@@ -9076,7 +8706,13 @@
   <p:cSld>
     <p:spTree>
       <p:nvGrpSpPr>
-        <p:cNvPr id="1" name=""/>
+        <p:cNvPr id="1" name="">
+          <a:extLst>
+            <a:ext uri="{FF2B5EF4-FFF2-40B4-BE49-F238E27FC236}">
+              <a16:creationId xmlns="" xmlns:a16="http://schemas.microsoft.com/office/drawing/2014/main" id="{4059CF8C-A5CA-D922-15C9-90E83F41C16F}"/>
+            </a:ext>
+          </a:extLst>
+        </p:cNvPr>
         <p:cNvGrpSpPr/>
         <p:nvPr/>
       </p:nvGrpSpPr>
@@ -9090,70 +8726,363 @@
       </p:grpSpPr>
       <p:sp>
         <p:nvSpPr>
-          <p:cNvPr id="4" name="Título 1">
+          <p:cNvPr id="2" name="Título 1">
             <a:extLst>
               <a:ext uri="{FF2B5EF4-FFF2-40B4-BE49-F238E27FC236}">
-                <a16:creationId xmlns:a16="http://schemas.microsoft.com/office/drawing/2014/main" xmlns="" id="{32666AC8-2E17-4DB4-B0F5-60C640CCFD2E}"/>
+                <a16:creationId xmlns="" xmlns:a16="http://schemas.microsoft.com/office/drawing/2014/main" id="{F0E0D2C5-2C7F-FF98-F6E4-6A6D35AE3301}"/>
               </a:ext>
             </a:extLst>
           </p:cNvPr>
-          <p:cNvSpPr txBox="1">
-            <a:spLocks/>
-          </p:cNvSpPr>
-          <p:nvPr/>
+          <p:cNvSpPr>
+            <a:spLocks noGrp="1"/>
+          </p:cNvSpPr>
+          <p:nvPr>
+            <p:ph type="title"/>
+          </p:nvPr>
+        </p:nvSpPr>
+        <p:spPr/>
+        <p:txBody>
+          <a:bodyPr/>
+          <a:lstStyle/>
+          <a:p>
+            <a:r>
+              <a:rPr lang="pt-BR" dirty="0"/>
+              <a:t>Temas dos seminários</a:t>
+            </a:r>
+          </a:p>
+        </p:txBody>
+      </p:sp>
+      <p:sp>
+        <p:nvSpPr>
+          <p:cNvPr id="3" name="Espaço Reservado para Conteúdo 2">
+            <a:extLst>
+              <a:ext uri="{FF2B5EF4-FFF2-40B4-BE49-F238E27FC236}">
+                <a16:creationId xmlns="" xmlns:a16="http://schemas.microsoft.com/office/drawing/2014/main" id="{164D262D-D1D5-2FFA-8E32-3025F99BDE7F}"/>
+              </a:ext>
+            </a:extLst>
+          </p:cNvPr>
+          <p:cNvSpPr>
+            <a:spLocks noGrp="1"/>
+          </p:cNvSpPr>
+          <p:nvPr>
+            <p:ph idx="1"/>
+          </p:nvPr>
         </p:nvSpPr>
         <p:spPr>
           <a:xfrm>
-            <a:off x="1431533" y="2720526"/>
-            <a:ext cx="9144000" cy="1029541"/>
+            <a:off x="838200" y="1825624"/>
+            <a:ext cx="11114314" cy="5032375"/>
           </a:xfrm>
-          <a:prstGeom prst="rect">
-            <a:avLst/>
-          </a:prstGeom>
         </p:spPr>
         <p:txBody>
-          <a:bodyPr vert="horz" lIns="91440" tIns="45720" rIns="91440" bIns="45720" rtlCol="0" anchor="ctr">
+          <a:bodyPr>
             <a:normAutofit/>
           </a:bodyPr>
-          <a:lstStyle>
-            <a:lvl1pPr algn="l" defTabSz="914400" rtl="0" eaLnBrk="1" latinLnBrk="0" hangingPunct="1">
-              <a:lnSpc>
-                <a:spcPct val="90000"/>
-              </a:lnSpc>
-              <a:spcBef>
-                <a:spcPct val="0"/>
-              </a:spcBef>
-              <a:buNone/>
-              <a:defRPr sz="4400" kern="1200">
-                <a:solidFill>
-                  <a:schemeClr val="tx1"/>
-                </a:solidFill>
-                <a:latin typeface="+mj-lt"/>
-                <a:ea typeface="+mj-ea"/>
-                <a:cs typeface="+mj-cs"/>
-              </a:defRPr>
-            </a:lvl1pPr>
-          </a:lstStyle>
-          <a:p>
-            <a:pPr algn="ctr"/>
-            <a:r>
-              <a:rPr lang="pt-BR" sz="6600" dirty="0"/>
-              <a:t>Perguntas?</a:t>
-            </a:r>
-            <a:endParaRPr lang="pt-BR" sz="6600" b="1" i="1" dirty="0"/>
+          <a:lstStyle/>
+          <a:p>
+            <a:r>
+              <a:rPr lang="pt-BR" dirty="0"/>
+              <a:t>Natural </a:t>
+            </a:r>
+            <a:r>
+              <a:rPr lang="pt-BR" dirty="0" err="1"/>
+              <a:t>Language</a:t>
+            </a:r>
+            <a:r>
+              <a:rPr lang="pt-BR" dirty="0"/>
+              <a:t> </a:t>
+            </a:r>
+            <a:r>
+              <a:rPr lang="pt-BR" dirty="0" err="1"/>
+              <a:t>Processing</a:t>
+            </a:r>
+            <a:r>
+              <a:rPr lang="pt-BR" dirty="0"/>
+              <a:t>: </a:t>
+            </a:r>
+            <a:r>
+              <a:rPr lang="pt-BR" dirty="0" err="1"/>
+              <a:t>Text</a:t>
+            </a:r>
+            <a:r>
+              <a:rPr lang="pt-BR" dirty="0"/>
+              <a:t> </a:t>
+            </a:r>
+            <a:r>
+              <a:rPr lang="pt-BR" b="0" i="0" dirty="0" err="1">
+                <a:solidFill>
+                  <a:srgbClr val="212529"/>
+                </a:solidFill>
+                <a:effectLst/>
+              </a:rPr>
+              <a:t>summarization</a:t>
+            </a:r>
+            <a:endParaRPr lang="pt-BR" dirty="0"/>
+          </a:p>
+          <a:p>
+            <a:pPr lvl="1">
+              <a:buFont typeface="Wingdings" panose="05000000000000000000" pitchFamily="2" charset="2"/>
+              <a:buChar char="§"/>
+            </a:pPr>
+            <a:r>
+              <a:rPr lang="pt-BR" dirty="0" err="1"/>
+              <a:t>Bidirectional</a:t>
+            </a:r>
+            <a:r>
+              <a:rPr lang="pt-BR" dirty="0"/>
+              <a:t> </a:t>
+            </a:r>
+            <a:r>
+              <a:rPr lang="pt-BR" dirty="0" err="1"/>
+              <a:t>Autoregressive</a:t>
+            </a:r>
+            <a:r>
+              <a:rPr lang="pt-BR" dirty="0"/>
+              <a:t> </a:t>
+            </a:r>
+            <a:r>
+              <a:rPr lang="pt-BR" dirty="0" err="1"/>
+              <a:t>Transformer</a:t>
+            </a:r>
+            <a:r>
+              <a:rPr lang="pt-BR" dirty="0"/>
+              <a:t> (BART)</a:t>
+            </a:r>
+          </a:p>
+          <a:p>
+            <a:pPr lvl="2">
+              <a:buFont typeface="Wingdings" panose="05000000000000000000" pitchFamily="2" charset="2"/>
+              <a:buChar char="ü"/>
+            </a:pPr>
+            <a:r>
+              <a:rPr lang="pt-BR" dirty="0">
+                <a:hlinkClick r:id="rId2"/>
+              </a:rPr>
+              <a:t>https://arxiv.org/abs/1910.13461</a:t>
+            </a:r>
+            <a:endParaRPr lang="pt-BR" dirty="0"/>
+          </a:p>
+          <a:p>
+            <a:pPr lvl="2">
+              <a:buFont typeface="Wingdings" panose="05000000000000000000" pitchFamily="2" charset="2"/>
+              <a:buChar char="ü"/>
+            </a:pPr>
+            <a:r>
+              <a:rPr lang="pt-BR" dirty="0">
+                <a:hlinkClick r:id="rId3"/>
+              </a:rPr>
+              <a:t>https://keras.io/examples/nlp/abstractive_summarization_with_bart/</a:t>
+            </a:r>
+            <a:endParaRPr lang="pt-BR" dirty="0"/>
+          </a:p>
+          <a:p>
+            <a:r>
+              <a:rPr lang="pt-BR" dirty="0"/>
+              <a:t>Natural </a:t>
+            </a:r>
+            <a:r>
+              <a:rPr lang="pt-BR" dirty="0" err="1"/>
+              <a:t>Language</a:t>
+            </a:r>
+            <a:r>
+              <a:rPr lang="pt-BR" dirty="0"/>
+              <a:t> </a:t>
+            </a:r>
+            <a:r>
+              <a:rPr lang="pt-BR" dirty="0" err="1"/>
+              <a:t>Processing</a:t>
+            </a:r>
+            <a:r>
+              <a:rPr lang="pt-BR" dirty="0"/>
+              <a:t>: </a:t>
+            </a:r>
+            <a:r>
+              <a:rPr lang="pt-BR" dirty="0" err="1"/>
+              <a:t>Automatic</a:t>
+            </a:r>
+            <a:r>
+              <a:rPr lang="pt-BR" dirty="0"/>
+              <a:t> Speech </a:t>
+            </a:r>
+            <a:r>
+              <a:rPr lang="pt-BR" dirty="0" err="1"/>
+              <a:t>Recognition</a:t>
+            </a:r>
+            <a:r>
+              <a:rPr lang="pt-BR" dirty="0"/>
+              <a:t> (ASR)</a:t>
+            </a:r>
+          </a:p>
+          <a:p>
+            <a:pPr lvl="1">
+              <a:buFont typeface="Wingdings" panose="05000000000000000000" pitchFamily="2" charset="2"/>
+              <a:buChar char="§"/>
+            </a:pPr>
+            <a:r>
+              <a:rPr lang="en-US" dirty="0"/>
+              <a:t>Automatic Speech Recognition with Transformer</a:t>
+            </a:r>
+            <a:endParaRPr lang="pt-BR" dirty="0"/>
+          </a:p>
+          <a:p>
+            <a:pPr lvl="2">
+              <a:buFont typeface="Wingdings" panose="05000000000000000000" pitchFamily="2" charset="2"/>
+              <a:buChar char="ü"/>
+            </a:pPr>
+            <a:r>
+              <a:rPr lang="pt-BR" dirty="0">
+                <a:hlinkClick r:id="rId4"/>
+              </a:rPr>
+              <a:t>https://papers.nips.cc/paper/2017/file/3f5ee243547dee91fbd053c1c4a845aa-Paper.pdf</a:t>
+            </a:r>
+            <a:endParaRPr lang="pt-BR" dirty="0"/>
+          </a:p>
+          <a:p>
+            <a:pPr lvl="2">
+              <a:buFont typeface="Wingdings" panose="05000000000000000000" pitchFamily="2" charset="2"/>
+              <a:buChar char="ü"/>
+            </a:pPr>
+            <a:r>
+              <a:rPr lang="pt-BR" dirty="0">
+                <a:hlinkClick r:id="rId5"/>
+              </a:rPr>
+              <a:t>https://keras.io/examples/audio/transformer_asr/</a:t>
+            </a:r>
+            <a:endParaRPr lang="pt-BR" dirty="0"/>
+          </a:p>
+          <a:p>
+            <a:pPr algn="l"/>
+            <a:r>
+              <a:rPr lang="pt-BR" dirty="0"/>
+              <a:t>Natural </a:t>
+            </a:r>
+            <a:r>
+              <a:rPr lang="pt-BR" dirty="0" err="1"/>
+              <a:t>Language</a:t>
+            </a:r>
+            <a:r>
+              <a:rPr lang="pt-BR" dirty="0"/>
+              <a:t> </a:t>
+            </a:r>
+            <a:r>
+              <a:rPr lang="pt-BR" dirty="0" err="1"/>
+              <a:t>Processing</a:t>
+            </a:r>
+            <a:r>
+              <a:rPr lang="pt-BR" dirty="0"/>
+              <a:t>: Speech </a:t>
+            </a:r>
+            <a:r>
+              <a:rPr lang="pt-BR" dirty="0" err="1"/>
+              <a:t>Synthesis</a:t>
+            </a:r>
+            <a:endParaRPr lang="pt-BR" dirty="0"/>
+          </a:p>
+          <a:p>
+            <a:pPr lvl="1">
+              <a:buFont typeface="Wingdings" panose="05000000000000000000" pitchFamily="2" charset="2"/>
+              <a:buChar char="§"/>
+            </a:pPr>
+            <a:r>
+              <a:rPr lang="pt-BR" b="0" i="0" dirty="0" err="1">
+                <a:effectLst/>
+              </a:rPr>
+              <a:t>WaveNet</a:t>
+            </a:r>
+            <a:r>
+              <a:rPr lang="pt-BR" b="0" i="0" dirty="0">
+                <a:effectLst/>
+              </a:rPr>
+              <a:t>: A </a:t>
+            </a:r>
+            <a:r>
+              <a:rPr lang="pt-BR" b="0" i="0" dirty="0" err="1">
+                <a:effectLst/>
+              </a:rPr>
+              <a:t>Generative</a:t>
+            </a:r>
+            <a:r>
+              <a:rPr lang="pt-BR" b="0" i="0" dirty="0">
+                <a:effectLst/>
+              </a:rPr>
+              <a:t> Model for </a:t>
+            </a:r>
+            <a:r>
+              <a:rPr lang="pt-BR" b="0" i="0" dirty="0" err="1">
+                <a:effectLst/>
+              </a:rPr>
+              <a:t>Raw</a:t>
+            </a:r>
+            <a:r>
+              <a:rPr lang="pt-BR" b="0" i="0" dirty="0">
+                <a:effectLst/>
+              </a:rPr>
+              <a:t> </a:t>
+            </a:r>
+            <a:r>
+              <a:rPr lang="pt-BR" b="0" i="0" dirty="0" err="1">
+                <a:effectLst/>
+              </a:rPr>
+              <a:t>Audio</a:t>
+            </a:r>
+            <a:endParaRPr lang="pt-BR" b="0" i="0" dirty="0">
+              <a:effectLst/>
+            </a:endParaRPr>
+          </a:p>
+          <a:p>
+            <a:pPr lvl="2">
+              <a:buFont typeface="Wingdings" panose="05000000000000000000" pitchFamily="2" charset="2"/>
+              <a:buChar char="ü"/>
+            </a:pPr>
+            <a:r>
+              <a:rPr lang="pt-BR" b="0" i="0" dirty="0">
+                <a:effectLst/>
+                <a:hlinkClick r:id="rId6">
+                  <a:extLst>
+                    <a:ext uri="{A12FA001-AC4F-418D-AE19-62706E023703}">
+                      <ahyp:hlinkClr xmlns="" xmlns:ahyp="http://schemas.microsoft.com/office/drawing/2018/hyperlinkcolor" val="tx"/>
+                    </a:ext>
+                  </a:extLst>
+                </a:hlinkClick>
+              </a:rPr>
+              <a:t>https://</a:t>
+            </a:r>
+            <a:r>
+              <a:rPr lang="pt-BR" b="0" i="0" dirty="0" smtClean="0">
+                <a:effectLst/>
+                <a:hlinkClick r:id="rId6">
+                  <a:extLst>
+                    <a:ext uri="{A12FA001-AC4F-418D-AE19-62706E023703}">
+                      <ahyp:hlinkClr xmlns="" xmlns:ahyp="http://schemas.microsoft.com/office/drawing/2018/hyperlinkcolor" val="tx"/>
+                    </a:ext>
+                  </a:extLst>
+                </a:hlinkClick>
+              </a:rPr>
+              <a:t>arxiv.org/abs/1609.03499</a:t>
+            </a:r>
+            <a:endParaRPr lang="pt-BR" b="0" i="0" dirty="0">
+              <a:effectLst/>
+            </a:endParaRPr>
           </a:p>
         </p:txBody>
       </p:sp>
     </p:spTree>
     <p:extLst>
       <p:ext uri="{BB962C8B-B14F-4D97-AF65-F5344CB8AC3E}">
-        <p14:creationId xmlns:p14="http://schemas.microsoft.com/office/powerpoint/2010/main" val="3773005660"/>
+        <p14:creationId xmlns:p14="http://schemas.microsoft.com/office/powerpoint/2010/main" val="1361149583"/>
       </p:ext>
     </p:extLst>
   </p:cSld>
   <p:clrMapOvr>
     <a:masterClrMapping/>
   </p:clrMapOvr>
+  <p:timing>
+    <p:tnLst>
+      <p:par>
+        <p:cTn id="1" dur="indefinite" restart="never" nodeType="tmRoot"/>
+      </p:par>
+    </p:tnLst>
+  </p:timing>
 </p:sld>
 </file>
 
@@ -9162,7 +9091,13 @@
   <p:cSld>
     <p:spTree>
       <p:nvGrpSpPr>
-        <p:cNvPr id="1" name=""/>
+        <p:cNvPr id="1" name="">
+          <a:extLst>
+            <a:ext uri="{FF2B5EF4-FFF2-40B4-BE49-F238E27FC236}">
+              <a16:creationId xmlns="" xmlns:a16="http://schemas.microsoft.com/office/drawing/2014/main" id="{4059CF8C-A5CA-D922-15C9-90E83F41C16F}"/>
+            </a:ext>
+          </a:extLst>
+        </p:cNvPr>
         <p:cNvGrpSpPr/>
         <p:nvPr/>
       </p:nvGrpSpPr>
@@ -9176,64 +9111,770 @@
       </p:grpSpPr>
       <p:sp>
         <p:nvSpPr>
-          <p:cNvPr id="4" name="Título 1">
+          <p:cNvPr id="2" name="Título 1">
             <a:extLst>
               <a:ext uri="{FF2B5EF4-FFF2-40B4-BE49-F238E27FC236}">
-                <a16:creationId xmlns:a16="http://schemas.microsoft.com/office/drawing/2014/main" xmlns="" id="{32666AC8-2E17-4DB4-B0F5-60C640CCFD2E}"/>
+                <a16:creationId xmlns="" xmlns:a16="http://schemas.microsoft.com/office/drawing/2014/main" id="{F0E0D2C5-2C7F-FF98-F6E4-6A6D35AE3301}"/>
               </a:ext>
             </a:extLst>
           </p:cNvPr>
-          <p:cNvSpPr txBox="1">
-            <a:spLocks/>
-          </p:cNvSpPr>
-          <p:nvPr/>
+          <p:cNvSpPr>
+            <a:spLocks noGrp="1"/>
+          </p:cNvSpPr>
+          <p:nvPr>
+            <p:ph type="title"/>
+          </p:nvPr>
+        </p:nvSpPr>
+        <p:spPr/>
+        <p:txBody>
+          <a:bodyPr/>
+          <a:lstStyle/>
+          <a:p>
+            <a:r>
+              <a:rPr lang="pt-BR" dirty="0"/>
+              <a:t>Temas dos seminários</a:t>
+            </a:r>
+          </a:p>
+        </p:txBody>
+      </p:sp>
+      <p:sp>
+        <p:nvSpPr>
+          <p:cNvPr id="3" name="Espaço Reservado para Conteúdo 2">
+            <a:extLst>
+              <a:ext uri="{FF2B5EF4-FFF2-40B4-BE49-F238E27FC236}">
+                <a16:creationId xmlns="" xmlns:a16="http://schemas.microsoft.com/office/drawing/2014/main" id="{164D262D-D1D5-2FFA-8E32-3025F99BDE7F}"/>
+              </a:ext>
+            </a:extLst>
+          </p:cNvPr>
+          <p:cNvSpPr>
+            <a:spLocks noGrp="1"/>
+          </p:cNvSpPr>
+          <p:nvPr>
+            <p:ph idx="1"/>
+          </p:nvPr>
         </p:nvSpPr>
         <p:spPr>
           <a:xfrm>
-            <a:off x="1431533" y="2720526"/>
-            <a:ext cx="9144000" cy="1029541"/>
+            <a:off x="838200" y="1825625"/>
+            <a:ext cx="10907486" cy="4351338"/>
           </a:xfrm>
-          <a:prstGeom prst="rect">
-            <a:avLst/>
-          </a:prstGeom>
         </p:spPr>
         <p:txBody>
-          <a:bodyPr vert="horz" lIns="91440" tIns="45720" rIns="91440" bIns="45720" rtlCol="0" anchor="ctr">
+          <a:bodyPr>
             <a:normAutofit/>
           </a:bodyPr>
-          <a:lstStyle>
-            <a:lvl1pPr algn="l" defTabSz="914400" rtl="0" eaLnBrk="1" latinLnBrk="0" hangingPunct="1">
-              <a:lnSpc>
-                <a:spcPct val="90000"/>
-              </a:lnSpc>
-              <a:spcBef>
-                <a:spcPct val="0"/>
-              </a:spcBef>
+          <a:lstStyle/>
+          <a:p>
+            <a:r>
+              <a:rPr lang="pt-BR" dirty="0"/>
+              <a:t> </a:t>
+            </a:r>
+            <a:r>
+              <a:rPr lang="pt-BR" dirty="0" err="1"/>
+              <a:t>Graph</a:t>
+            </a:r>
+            <a:r>
+              <a:rPr lang="pt-BR" dirty="0"/>
+              <a:t> Neural Networks</a:t>
+            </a:r>
+          </a:p>
+          <a:p>
+            <a:pPr lvl="1">
+              <a:buFont typeface="Wingdings" panose="05000000000000000000" pitchFamily="2" charset="2"/>
+              <a:buChar char="ü"/>
+            </a:pPr>
+            <a:r>
+              <a:rPr lang="pt-BR" dirty="0">
+                <a:hlinkClick r:id="rId3"/>
+              </a:rPr>
+              <a:t>https://arxiv.org/abs/2101.11174</a:t>
+            </a:r>
+            <a:endParaRPr lang="pt-BR" dirty="0"/>
+          </a:p>
+          <a:p>
+            <a:pPr lvl="1">
+              <a:buFont typeface="Wingdings" panose="05000000000000000000" pitchFamily="2" charset="2"/>
+              <a:buChar char="ü"/>
+            </a:pPr>
+            <a:r>
+              <a:rPr lang="pt-BR" dirty="0">
+                <a:hlinkClick r:id="rId4"/>
+              </a:rPr>
+              <a:t>https://paperswithcode.com/paper/graph-neural-network-for-traffic-forecasting</a:t>
+            </a:r>
+            <a:endParaRPr lang="pt-BR" dirty="0"/>
+          </a:p>
+          <a:p>
+            <a:r>
+              <a:rPr lang="pt-BR" dirty="0" err="1"/>
+              <a:t>Spiking</a:t>
+            </a:r>
+            <a:r>
+              <a:rPr lang="pt-BR" dirty="0"/>
+              <a:t> Neural Networks</a:t>
+            </a:r>
+          </a:p>
+          <a:p>
+            <a:pPr lvl="1">
+              <a:buFont typeface="Wingdings" panose="05000000000000000000" pitchFamily="2" charset="2"/>
+              <a:buChar char="ü"/>
+            </a:pPr>
+            <a:r>
+              <a:rPr lang="pt-BR" dirty="0">
+                <a:hlinkClick r:id="rId5"/>
+              </a:rPr>
+              <a:t>https://arxiv.org/abs/2109.12894</a:t>
+            </a:r>
+            <a:endParaRPr lang="pt-BR" dirty="0"/>
+          </a:p>
+          <a:p>
+            <a:pPr lvl="1">
+              <a:buFont typeface="Wingdings" panose="05000000000000000000" pitchFamily="2" charset="2"/>
+              <a:buChar char="ü"/>
+            </a:pPr>
+            <a:r>
+              <a:rPr lang="pt-BR" dirty="0">
+                <a:hlinkClick r:id="rId6"/>
+              </a:rPr>
+              <a:t>https://analyticsindiamag.com/a-tutorial-on-spiking-neural-networks-for-beginners/</a:t>
+            </a:r>
+            <a:endParaRPr lang="pt-BR" dirty="0"/>
+          </a:p>
+          <a:p>
+            <a:pPr lvl="1">
+              <a:buFont typeface="Wingdings" panose="05000000000000000000" pitchFamily="2" charset="2"/>
+              <a:buChar char="ü"/>
+            </a:pPr>
+            <a:r>
+              <a:rPr lang="pt-BR" dirty="0">
+                <a:hlinkClick r:id="rId7"/>
+              </a:rPr>
+              <a:t>https://guillaume-chevalier.com/spiking-neural-network-snn-with-pytorch-where-backpropagation-engenders-stdp-hebbian-learning/</a:t>
+            </a:r>
+            <a:endParaRPr lang="pt-BR" dirty="0"/>
+          </a:p>
+          <a:p>
+            <a:pPr lvl="1">
+              <a:buFont typeface="Wingdings" panose="05000000000000000000" pitchFamily="2" charset="2"/>
+              <a:buChar char="ü"/>
+            </a:pPr>
+            <a:r>
+              <a:rPr lang="pt-BR" dirty="0">
+                <a:hlinkClick r:id="rId8"/>
+              </a:rPr>
+              <a:t>https://snntorch.readthedocs.io/en/latest/tutorials/index.html</a:t>
+            </a:r>
+            <a:endParaRPr lang="pt-BR" dirty="0"/>
+          </a:p>
+          <a:p>
+            <a:pPr marL="457200" lvl="1" indent="0">
               <a:buNone/>
-              <a:defRPr sz="4400" kern="1200">
-                <a:solidFill>
-                  <a:schemeClr val="tx1"/>
-                </a:solidFill>
-                <a:latin typeface="+mj-lt"/>
-                <a:ea typeface="+mj-ea"/>
-                <a:cs typeface="+mj-cs"/>
-              </a:defRPr>
-            </a:lvl1pPr>
-          </a:lstStyle>
-          <a:p>
-            <a:pPr algn="ctr"/>
-            <a:r>
-              <a:rPr lang="pt-BR" sz="6600" dirty="0"/>
-              <a:t>Obrigado!</a:t>
-            </a:r>
-            <a:endParaRPr lang="pt-BR" sz="6600" b="1" i="1" dirty="0"/>
+            </a:pPr>
+            <a:endParaRPr lang="pt-BR" dirty="0"/>
+          </a:p>
+          <a:p>
+            <a:pPr marL="457200" lvl="1" indent="0">
+              <a:buNone/>
+            </a:pPr>
+            <a:endParaRPr lang="pt-BR" dirty="0"/>
+          </a:p>
+          <a:p>
+            <a:pPr marL="0" indent="0">
+              <a:buNone/>
+            </a:pPr>
+            <a:endParaRPr lang="pt-BR" dirty="0"/>
+          </a:p>
+          <a:p>
+            <a:pPr>
+              <a:buFont typeface="Wingdings" panose="05000000000000000000" pitchFamily="2" charset="2"/>
+              <a:buChar char="ü"/>
+            </a:pPr>
+            <a:endParaRPr lang="pt-BR" dirty="0"/>
+          </a:p>
+          <a:p>
+            <a:pPr lvl="2">
+              <a:buFont typeface="Wingdings" panose="05000000000000000000" pitchFamily="2" charset="2"/>
+              <a:buChar char="ü"/>
+            </a:pPr>
+            <a:endParaRPr lang="pt-BR" dirty="0"/>
+          </a:p>
+          <a:p>
+            <a:pPr marL="914400" lvl="2" indent="0">
+              <a:buNone/>
+            </a:pPr>
+            <a:endParaRPr lang="pt-BR" dirty="0"/>
+          </a:p>
+          <a:p>
+            <a:pPr marL="914400" lvl="2" indent="0">
+              <a:buNone/>
+            </a:pPr>
+            <a:endParaRPr lang="pt-BR" dirty="0"/>
+          </a:p>
+          <a:p>
+            <a:pPr lvl="1"/>
+            <a:endParaRPr lang="pt-BR" dirty="0"/>
           </a:p>
         </p:txBody>
       </p:sp>
     </p:spTree>
     <p:extLst>
       <p:ext uri="{BB962C8B-B14F-4D97-AF65-F5344CB8AC3E}">
-        <p14:creationId xmlns:p14="http://schemas.microsoft.com/office/powerpoint/2010/main" val="2655704619"/>
+        <p14:creationId xmlns:p14="http://schemas.microsoft.com/office/powerpoint/2010/main" val="1140649062"/>
+      </p:ext>
+    </p:extLst>
+  </p:cSld>
+  <p:clrMapOvr>
+    <a:masterClrMapping/>
+  </p:clrMapOvr>
+  <p:timing>
+    <p:tnLst>
+      <p:par>
+        <p:cTn id="1" dur="indefinite" restart="never" nodeType="tmRoot"/>
+      </p:par>
+    </p:tnLst>
+  </p:timing>
+</p:sld>
+</file>
+
+<file path=ppt/slides/slide25.xml><?xml version="1.0" encoding="utf-8"?>
+<p:sld xmlns:a="http://schemas.openxmlformats.org/drawingml/2006/main" xmlns:r="http://schemas.openxmlformats.org/officeDocument/2006/relationships" xmlns:p="http://schemas.openxmlformats.org/presentationml/2006/main">
+  <p:cSld>
+    <p:spTree>
+      <p:nvGrpSpPr>
+        <p:cNvPr id="1" name="">
+          <a:extLst>
+            <a:ext uri="{FF2B5EF4-FFF2-40B4-BE49-F238E27FC236}">
+              <a16:creationId xmlns="" xmlns:a16="http://schemas.microsoft.com/office/drawing/2014/main" id="{4059CF8C-A5CA-D922-15C9-90E83F41C16F}"/>
+            </a:ext>
+          </a:extLst>
+        </p:cNvPr>
+        <p:cNvGrpSpPr/>
+        <p:nvPr/>
+      </p:nvGrpSpPr>
+      <p:grpSpPr>
+        <a:xfrm>
+          <a:off x="0" y="0"/>
+          <a:ext cx="0" cy="0"/>
+          <a:chOff x="0" y="0"/>
+          <a:chExt cx="0" cy="0"/>
+        </a:xfrm>
+      </p:grpSpPr>
+      <p:sp>
+        <p:nvSpPr>
+          <p:cNvPr id="2" name="Título 1">
+            <a:extLst>
+              <a:ext uri="{FF2B5EF4-FFF2-40B4-BE49-F238E27FC236}">
+                <a16:creationId xmlns="" xmlns:a16="http://schemas.microsoft.com/office/drawing/2014/main" id="{F0E0D2C5-2C7F-FF98-F6E4-6A6D35AE3301}"/>
+              </a:ext>
+            </a:extLst>
+          </p:cNvPr>
+          <p:cNvSpPr>
+            <a:spLocks noGrp="1"/>
+          </p:cNvSpPr>
+          <p:nvPr>
+            <p:ph type="title"/>
+          </p:nvPr>
+        </p:nvSpPr>
+        <p:spPr/>
+        <p:txBody>
+          <a:bodyPr/>
+          <a:lstStyle/>
+          <a:p>
+            <a:r>
+              <a:rPr lang="pt-BR" dirty="0"/>
+              <a:t>Temas dos seminários</a:t>
+            </a:r>
+          </a:p>
+        </p:txBody>
+      </p:sp>
+      <p:sp>
+        <p:nvSpPr>
+          <p:cNvPr id="3" name="Espaço Reservado para Conteúdo 2">
+            <a:extLst>
+              <a:ext uri="{FF2B5EF4-FFF2-40B4-BE49-F238E27FC236}">
+                <a16:creationId xmlns="" xmlns:a16="http://schemas.microsoft.com/office/drawing/2014/main" id="{164D262D-D1D5-2FFA-8E32-3025F99BDE7F}"/>
+              </a:ext>
+            </a:extLst>
+          </p:cNvPr>
+          <p:cNvSpPr>
+            <a:spLocks noGrp="1"/>
+          </p:cNvSpPr>
+          <p:nvPr>
+            <p:ph idx="1"/>
+          </p:nvPr>
+        </p:nvSpPr>
+        <p:spPr>
+          <a:xfrm>
+            <a:off x="838200" y="1825624"/>
+            <a:ext cx="10907486" cy="5032375"/>
+          </a:xfrm>
+        </p:spPr>
+        <p:txBody>
+          <a:bodyPr>
+            <a:normAutofit lnSpcReduction="10000"/>
+          </a:bodyPr>
+          <a:lstStyle/>
+          <a:p>
+            <a:r>
+              <a:rPr lang="pt-BR" dirty="0"/>
+              <a:t> Adversarial </a:t>
+            </a:r>
+            <a:r>
+              <a:rPr lang="pt-BR" dirty="0" err="1"/>
+              <a:t>Attacks</a:t>
+            </a:r>
+            <a:endParaRPr lang="pt-BR" dirty="0"/>
+          </a:p>
+          <a:p>
+            <a:pPr lvl="1">
+              <a:buFont typeface="Wingdings" panose="05000000000000000000" pitchFamily="2" charset="2"/>
+              <a:buChar char="ü"/>
+            </a:pPr>
+            <a:r>
+              <a:rPr lang="pt-BR" dirty="0">
+                <a:hlinkClick r:id="rId2"/>
+              </a:rPr>
+              <a:t>https://arxiv.org/abs/1706.06083</a:t>
+            </a:r>
+            <a:endParaRPr lang="pt-BR" dirty="0"/>
+          </a:p>
+          <a:p>
+            <a:pPr lvl="1">
+              <a:buFont typeface="Wingdings" panose="05000000000000000000" pitchFamily="2" charset="2"/>
+              <a:buChar char="ü"/>
+            </a:pPr>
+            <a:r>
+              <a:rPr lang="pt-BR" dirty="0">
+                <a:hlinkClick r:id="rId3"/>
+              </a:rPr>
+              <a:t>https://paperswithcode.com/paper/towards-deep-learning-models-resistant-to</a:t>
+            </a:r>
+            <a:endParaRPr lang="pt-BR" dirty="0"/>
+          </a:p>
+          <a:p>
+            <a:r>
+              <a:rPr lang="pt-BR" dirty="0" err="1"/>
+              <a:t>Kolmogorov</a:t>
+            </a:r>
+            <a:r>
+              <a:rPr lang="pt-BR" dirty="0"/>
+              <a:t>-Arnold Networks (</a:t>
+            </a:r>
+            <a:r>
+              <a:rPr lang="pt-BR" dirty="0" err="1"/>
+              <a:t>KANs</a:t>
+            </a:r>
+            <a:r>
+              <a:rPr lang="pt-BR" dirty="0"/>
+              <a:t>)</a:t>
+            </a:r>
+          </a:p>
+          <a:p>
+            <a:pPr lvl="1">
+              <a:buFont typeface="Wingdings" panose="05000000000000000000" pitchFamily="2" charset="2"/>
+              <a:buChar char="ü"/>
+            </a:pPr>
+            <a:r>
+              <a:rPr lang="pt-BR" dirty="0">
+                <a:hlinkClick r:id="rId4"/>
+              </a:rPr>
+              <a:t>https://arxiv.org/abs/2404.19756</a:t>
+            </a:r>
+            <a:endParaRPr lang="pt-BR" dirty="0"/>
+          </a:p>
+          <a:p>
+            <a:pPr lvl="1">
+              <a:buFont typeface="Wingdings" panose="05000000000000000000" pitchFamily="2" charset="2"/>
+              <a:buChar char="ü"/>
+            </a:pPr>
+            <a:r>
+              <a:rPr lang="pt-BR" dirty="0">
+                <a:hlinkClick r:id="rId5"/>
+              </a:rPr>
+              <a:t>https://github.com/KindXiaoming/pykan?tab=readme-ov-file</a:t>
+            </a:r>
+            <a:endParaRPr lang="pt-BR" dirty="0"/>
+          </a:p>
+          <a:p>
+            <a:r>
+              <a:rPr lang="en-US" dirty="0" err="1"/>
+              <a:t>DiffMOT</a:t>
+            </a:r>
+            <a:r>
+              <a:rPr lang="en-US" dirty="0"/>
+              <a:t>: A Real-time Diffusion-based Multiple Object Tracker with Non-linear Prediction</a:t>
+            </a:r>
+          </a:p>
+          <a:p>
+            <a:pPr lvl="1">
+              <a:buFont typeface="Wingdings" panose="05000000000000000000" pitchFamily="2" charset="2"/>
+              <a:buChar char="ü"/>
+            </a:pPr>
+            <a:r>
+              <a:rPr lang="pt-BR" dirty="0">
+                <a:hlinkClick r:id="rId6"/>
+              </a:rPr>
+              <a:t>https://arxiv.org/abs/2403.02075</a:t>
+            </a:r>
+            <a:endParaRPr lang="pt-BR" dirty="0"/>
+          </a:p>
+          <a:p>
+            <a:pPr lvl="1">
+              <a:buFont typeface="Wingdings" panose="05000000000000000000" pitchFamily="2" charset="2"/>
+              <a:buChar char="ü"/>
+            </a:pPr>
+            <a:r>
+              <a:rPr lang="pt-BR" dirty="0">
+                <a:hlinkClick r:id="rId7"/>
+              </a:rPr>
+              <a:t>https://github.com/Kroery/DiffMOT</a:t>
+            </a:r>
+            <a:endParaRPr lang="pt-BR" dirty="0"/>
+          </a:p>
+          <a:p>
+            <a:pPr algn="l"/>
+            <a:r>
+              <a:rPr lang="pt-BR" dirty="0" err="1"/>
+              <a:t>Liquid</a:t>
+            </a:r>
+            <a:r>
+              <a:rPr lang="pt-BR" dirty="0"/>
+              <a:t> Time-</a:t>
+            </a:r>
+            <a:r>
+              <a:rPr lang="pt-BR" dirty="0" err="1"/>
+              <a:t>constant</a:t>
+            </a:r>
+            <a:r>
+              <a:rPr lang="pt-BR" dirty="0"/>
+              <a:t> Networks</a:t>
+            </a:r>
+            <a:endParaRPr lang="pt-BR" dirty="0">
+              <a:hlinkClick r:id="rId8"/>
+            </a:endParaRPr>
+          </a:p>
+          <a:p>
+            <a:pPr lvl="1">
+              <a:buFont typeface="Wingdings" panose="05000000000000000000" pitchFamily="2" charset="2"/>
+              <a:buChar char="ü"/>
+            </a:pPr>
+            <a:r>
+              <a:rPr lang="pt-BR" dirty="0">
+                <a:hlinkClick r:id="rId8"/>
+              </a:rPr>
+              <a:t>https://arxiv.org/abs/2006.04439</a:t>
+            </a:r>
+            <a:endParaRPr lang="pt-BR" dirty="0"/>
+          </a:p>
+          <a:p>
+            <a:pPr lvl="1">
+              <a:buFont typeface="Wingdings" panose="05000000000000000000" pitchFamily="2" charset="2"/>
+              <a:buChar char="ü"/>
+            </a:pPr>
+            <a:r>
+              <a:rPr lang="pt-BR" dirty="0">
+                <a:hlinkClick r:id="rId9"/>
+              </a:rPr>
+              <a:t>https://github.com/raminmh/liquid_time_constant_networks</a:t>
+            </a:r>
+            <a:endParaRPr lang="pt-BR" dirty="0"/>
+          </a:p>
+          <a:p>
+            <a:pPr lvl="1"/>
+            <a:endParaRPr lang="pt-BR" dirty="0"/>
+          </a:p>
+        </p:txBody>
+      </p:sp>
+    </p:spTree>
+    <p:extLst>
+      <p:ext uri="{BB962C8B-B14F-4D97-AF65-F5344CB8AC3E}">
+        <p14:creationId xmlns:p14="http://schemas.microsoft.com/office/powerpoint/2010/main" val="530577646"/>
+      </p:ext>
+    </p:extLst>
+  </p:cSld>
+  <p:clrMapOvr>
+    <a:masterClrMapping/>
+  </p:clrMapOvr>
+</p:sld>
+</file>
+
+<file path=ppt/slides/slide26.xml><?xml version="1.0" encoding="utf-8"?>
+<p:sld xmlns:a="http://schemas.openxmlformats.org/drawingml/2006/main" xmlns:r="http://schemas.openxmlformats.org/officeDocument/2006/relationships" xmlns:p="http://schemas.openxmlformats.org/presentationml/2006/main">
+  <p:cSld>
+    <p:spTree>
+      <p:nvGrpSpPr>
+        <p:cNvPr id="1" name="">
+          <a:extLst>
+            <a:ext uri="{FF2B5EF4-FFF2-40B4-BE49-F238E27FC236}">
+              <a16:creationId xmlns="" xmlns:a16="http://schemas.microsoft.com/office/drawing/2014/main" id="{4059CF8C-A5CA-D922-15C9-90E83F41C16F}"/>
+            </a:ext>
+          </a:extLst>
+        </p:cNvPr>
+        <p:cNvGrpSpPr/>
+        <p:nvPr/>
+      </p:nvGrpSpPr>
+      <p:grpSpPr>
+        <a:xfrm>
+          <a:off x="0" y="0"/>
+          <a:ext cx="0" cy="0"/>
+          <a:chOff x="0" y="0"/>
+          <a:chExt cx="0" cy="0"/>
+        </a:xfrm>
+      </p:grpSpPr>
+      <p:sp>
+        <p:nvSpPr>
+          <p:cNvPr id="2" name="Título 1">
+            <a:extLst>
+              <a:ext uri="{FF2B5EF4-FFF2-40B4-BE49-F238E27FC236}">
+                <a16:creationId xmlns="" xmlns:a16="http://schemas.microsoft.com/office/drawing/2014/main" id="{F0E0D2C5-2C7F-FF98-F6E4-6A6D35AE3301}"/>
+              </a:ext>
+            </a:extLst>
+          </p:cNvPr>
+          <p:cNvSpPr>
+            <a:spLocks noGrp="1"/>
+          </p:cNvSpPr>
+          <p:nvPr>
+            <p:ph type="title"/>
+          </p:nvPr>
+        </p:nvSpPr>
+        <p:spPr/>
+        <p:txBody>
+          <a:bodyPr/>
+          <a:lstStyle/>
+          <a:p>
+            <a:r>
+              <a:rPr lang="pt-BR" dirty="0"/>
+              <a:t>Temas dos seminários</a:t>
+            </a:r>
+          </a:p>
+        </p:txBody>
+      </p:sp>
+      <p:sp>
+        <p:nvSpPr>
+          <p:cNvPr id="3" name="Espaço Reservado para Conteúdo 2">
+            <a:extLst>
+              <a:ext uri="{FF2B5EF4-FFF2-40B4-BE49-F238E27FC236}">
+                <a16:creationId xmlns="" xmlns:a16="http://schemas.microsoft.com/office/drawing/2014/main" id="{164D262D-D1D5-2FFA-8E32-3025F99BDE7F}"/>
+              </a:ext>
+            </a:extLst>
+          </p:cNvPr>
+          <p:cNvSpPr>
+            <a:spLocks noGrp="1"/>
+          </p:cNvSpPr>
+          <p:nvPr>
+            <p:ph idx="1"/>
+          </p:nvPr>
+        </p:nvSpPr>
+        <p:spPr>
+          <a:xfrm>
+            <a:off x="838200" y="1825625"/>
+            <a:ext cx="10907486" cy="4351338"/>
+          </a:xfrm>
+        </p:spPr>
+        <p:txBody>
+          <a:bodyPr>
+            <a:normAutofit/>
+          </a:bodyPr>
+          <a:lstStyle/>
+          <a:p>
+            <a:r>
+              <a:rPr lang="pt-BR" dirty="0"/>
+              <a:t>Receitas para melhoria do desempenho de modelos</a:t>
+            </a:r>
+          </a:p>
+          <a:p>
+            <a:pPr lvl="1">
+              <a:buFont typeface="Wingdings" panose="05000000000000000000" pitchFamily="2" charset="2"/>
+              <a:buChar char="§"/>
+            </a:pPr>
+            <a:r>
+              <a:rPr lang="pt-BR" i="0" dirty="0" err="1">
+                <a:solidFill>
+                  <a:srgbClr val="212529"/>
+                </a:solidFill>
+                <a:effectLst/>
+              </a:rPr>
+              <a:t>Knowledge</a:t>
+            </a:r>
+            <a:r>
+              <a:rPr lang="pt-BR" i="0" dirty="0">
+                <a:solidFill>
+                  <a:srgbClr val="212529"/>
+                </a:solidFill>
+                <a:effectLst/>
+              </a:rPr>
+              <a:t> </a:t>
+            </a:r>
+            <a:r>
+              <a:rPr lang="pt-BR" i="0" dirty="0" err="1">
+                <a:solidFill>
+                  <a:srgbClr val="212529"/>
+                </a:solidFill>
+                <a:effectLst/>
+              </a:rPr>
+              <a:t>Distillation</a:t>
+            </a:r>
+            <a:endParaRPr lang="pt-BR" i="0" dirty="0">
+              <a:solidFill>
+                <a:srgbClr val="212529"/>
+              </a:solidFill>
+              <a:effectLst/>
+            </a:endParaRPr>
+          </a:p>
+          <a:p>
+            <a:pPr lvl="2">
+              <a:buFont typeface="Wingdings" panose="05000000000000000000" pitchFamily="2" charset="2"/>
+              <a:buChar char="ü"/>
+            </a:pPr>
+            <a:r>
+              <a:rPr lang="pt-BR" i="0" dirty="0">
+                <a:solidFill>
+                  <a:srgbClr val="212529"/>
+                </a:solidFill>
+                <a:effectLst/>
+                <a:hlinkClick r:id="rId3"/>
+              </a:rPr>
+              <a:t>https://arxiv.org/abs/1503.02531</a:t>
+            </a:r>
+            <a:endParaRPr lang="pt-BR" dirty="0">
+              <a:solidFill>
+                <a:srgbClr val="212529"/>
+              </a:solidFill>
+            </a:endParaRPr>
+          </a:p>
+          <a:p>
+            <a:pPr lvl="2">
+              <a:buFont typeface="Wingdings" panose="05000000000000000000" pitchFamily="2" charset="2"/>
+              <a:buChar char="ü"/>
+            </a:pPr>
+            <a:r>
+              <a:rPr lang="pt-BR" i="0" dirty="0">
+                <a:solidFill>
+                  <a:srgbClr val="212529"/>
+                </a:solidFill>
+                <a:effectLst/>
+                <a:hlinkClick r:id="rId4"/>
+              </a:rPr>
+              <a:t>https://keras.io/examples/vision/knowledge_distillation/</a:t>
+            </a:r>
+            <a:endParaRPr lang="pt-BR" i="0" dirty="0">
+              <a:solidFill>
+                <a:srgbClr val="212529"/>
+              </a:solidFill>
+              <a:effectLst/>
+            </a:endParaRPr>
+          </a:p>
+          <a:p>
+            <a:pPr lvl="1">
+              <a:buFont typeface="Wingdings" panose="05000000000000000000" pitchFamily="2" charset="2"/>
+              <a:buChar char="§"/>
+            </a:pPr>
+            <a:r>
+              <a:rPr lang="pt-BR" dirty="0" err="1"/>
+              <a:t>Gradient</a:t>
+            </a:r>
+            <a:r>
+              <a:rPr lang="pt-BR" dirty="0"/>
+              <a:t> </a:t>
+            </a:r>
+            <a:r>
+              <a:rPr lang="pt-BR" dirty="0" err="1"/>
+              <a:t>Centralization</a:t>
+            </a:r>
+            <a:endParaRPr lang="pt-BR" dirty="0"/>
+          </a:p>
+          <a:p>
+            <a:pPr lvl="2">
+              <a:buFont typeface="Wingdings" panose="05000000000000000000" pitchFamily="2" charset="2"/>
+              <a:buChar char="ü"/>
+            </a:pPr>
+            <a:r>
+              <a:rPr lang="pt-BR" dirty="0">
+                <a:hlinkClick r:id="rId5"/>
+              </a:rPr>
+              <a:t>https://arxiv.org/abs/2004.01461</a:t>
+            </a:r>
+            <a:endParaRPr lang="pt-BR" dirty="0"/>
+          </a:p>
+          <a:p>
+            <a:pPr lvl="2">
+              <a:buFont typeface="Wingdings" panose="05000000000000000000" pitchFamily="2" charset="2"/>
+              <a:buChar char="ü"/>
+            </a:pPr>
+            <a:r>
+              <a:rPr lang="pt-BR" dirty="0">
+                <a:hlinkClick r:id="rId6"/>
+              </a:rPr>
+              <a:t>https://keras.io/examples/vision/gradient_centralization/</a:t>
+            </a:r>
+            <a:endParaRPr lang="pt-BR" dirty="0"/>
+          </a:p>
+          <a:p>
+            <a:pPr lvl="1">
+              <a:buFont typeface="Wingdings" panose="05000000000000000000" pitchFamily="2" charset="2"/>
+              <a:buChar char="§"/>
+            </a:pPr>
+            <a:r>
+              <a:rPr lang="en-US" dirty="0" err="1">
+                <a:effectLst/>
+              </a:rPr>
+              <a:t>VeLO</a:t>
+            </a:r>
+            <a:r>
+              <a:rPr lang="en-US" dirty="0">
+                <a:effectLst/>
+              </a:rPr>
+              <a:t>: Training Versatile Learned Optimizers by Scaling Up</a:t>
+            </a:r>
+          </a:p>
+          <a:p>
+            <a:pPr lvl="2">
+              <a:buFont typeface="Wingdings" panose="05000000000000000000" pitchFamily="2" charset="2"/>
+              <a:buChar char="ü"/>
+            </a:pPr>
+            <a:r>
+              <a:rPr lang="pt-BR" dirty="0">
+                <a:hlinkClick r:id="rId7"/>
+              </a:rPr>
+              <a:t>https://arxiv.org/pdf/2211.09760</a:t>
+            </a:r>
+            <a:endParaRPr lang="pt-BR" dirty="0"/>
+          </a:p>
+          <a:p>
+            <a:pPr lvl="2">
+              <a:buFont typeface="Wingdings" panose="05000000000000000000" pitchFamily="2" charset="2"/>
+              <a:buChar char="ü"/>
+            </a:pPr>
+            <a:r>
+              <a:rPr lang="pt-BR" dirty="0">
+                <a:hlinkClick r:id="rId8"/>
+              </a:rPr>
+              <a:t>https://velo-code.github.io/</a:t>
+            </a:r>
+            <a:endParaRPr lang="pt-BR" dirty="0"/>
+          </a:p>
+          <a:p>
+            <a:pPr marL="914400" lvl="2" indent="0">
+              <a:buNone/>
+            </a:pPr>
+            <a:r>
+              <a:rPr lang="pt-BR" dirty="0"/>
+              <a:t/>
+            </a:r>
+            <a:br>
+              <a:rPr lang="pt-BR" dirty="0"/>
+            </a:br>
+            <a:endParaRPr lang="pt-BR" dirty="0"/>
+          </a:p>
+          <a:p>
+            <a:endParaRPr lang="pt-BR" dirty="0"/>
+          </a:p>
+        </p:txBody>
+      </p:sp>
+    </p:spTree>
+    <p:extLst>
+      <p:ext uri="{BB962C8B-B14F-4D97-AF65-F5344CB8AC3E}">
+        <p14:creationId xmlns:p14="http://schemas.microsoft.com/office/powerpoint/2010/main" val="709232205"/>
       </p:ext>
     </p:extLst>
   </p:cSld>
@@ -9265,7 +9906,7 @@
           <p:cNvPr id="2" name="Título 1">
             <a:extLst>
               <a:ext uri="{FF2B5EF4-FFF2-40B4-BE49-F238E27FC236}">
-                <a16:creationId xmlns:a16="http://schemas.microsoft.com/office/drawing/2014/main" xmlns="" id="{9BB4C24F-F8C2-513B-ABC6-F41F972D298C}"/>
+                <a16:creationId xmlns="" xmlns:a16="http://schemas.microsoft.com/office/drawing/2014/main" id="{9BB4C24F-F8C2-513B-ABC6-F41F972D298C}"/>
               </a:ext>
             </a:extLst>
           </p:cNvPr>
@@ -9283,8 +9924,9 @@
           <a:p>
             <a:r>
               <a:rPr lang="pt-BR" dirty="0"/>
-              <a:t>Sobre o curso</a:t>
-            </a:r>
+              <a:t>Dinâmica do curso</a:t>
+            </a:r>
+            <a:endParaRPr lang="pt-BR" dirty="0"/>
           </a:p>
         </p:txBody>
       </p:sp>
@@ -9293,7 +9935,7 @@
           <p:cNvPr id="3" name="Espaço Reservado para Conteúdo 2">
             <a:extLst>
               <a:ext uri="{FF2B5EF4-FFF2-40B4-BE49-F238E27FC236}">
-                <a16:creationId xmlns:a16="http://schemas.microsoft.com/office/drawing/2014/main" xmlns="" id="{39EC605B-82E1-C664-EB15-E7D9A6DF0D17}"/>
+                <a16:creationId xmlns="" xmlns:a16="http://schemas.microsoft.com/office/drawing/2014/main" id="{39EC605B-82E1-C664-EB15-E7D9A6DF0D17}"/>
               </a:ext>
             </a:extLst>
           </p:cNvPr>
@@ -9315,15 +9957,14 @@
           <a:lstStyle/>
           <a:p>
             <a:r>
-              <a:rPr lang="pt-BR" b="1" dirty="0"/>
-              <a:t>Dinâmica do curso</a:t>
-            </a:r>
-          </a:p>
-          <a:p>
-            <a:pPr lvl="1">
-              <a:buFont typeface="Wingdings" panose="05000000000000000000" pitchFamily="2" charset="2"/>
-              <a:buChar char="§"/>
-            </a:pPr>
+              <a:rPr lang="pt-BR" b="0" i="0" u="none" strike="noStrike" dirty="0" smtClean="0">
+                <a:solidFill>
+                  <a:srgbClr val="000000"/>
+                </a:solidFill>
+                <a:effectLst/>
+              </a:rPr>
+              <a:t>O </a:t>
+            </a:r>
             <a:r>
               <a:rPr lang="pt-BR" b="0" i="0" u="none" strike="noStrike" dirty="0">
                 <a:solidFill>
@@ -9331,7 +9972,7 @@
                 </a:solidFill>
                 <a:effectLst/>
               </a:rPr>
-              <a:t>O curso será </a:t>
+              <a:t>curso será </a:t>
             </a:r>
             <a:r>
               <a:rPr lang="pt-BR" b="1" i="1" u="none" strike="noStrike" dirty="0">
@@ -9353,10 +9994,6 @@
             </a:r>
           </a:p>
           <a:p>
-            <a:pPr lvl="1">
-              <a:buFont typeface="Wingdings" panose="05000000000000000000" pitchFamily="2" charset="2"/>
-              <a:buChar char="§"/>
-            </a:pPr>
             <a:r>
               <a:rPr lang="pt-BR" dirty="0">
                 <a:solidFill>
@@ -9371,7 +10008,23 @@
                   <a:srgbClr val="00B050"/>
                 </a:solidFill>
               </a:rPr>
-              <a:t>alunos deverão responder a um quiz</a:t>
+              <a:t>demais </a:t>
+            </a:r>
+            <a:r>
+              <a:rPr lang="pt-BR" b="1" i="1" dirty="0" smtClean="0">
+                <a:solidFill>
+                  <a:srgbClr val="00B050"/>
+                </a:solidFill>
+              </a:rPr>
+              <a:t>alunos </a:t>
+            </a:r>
+            <a:r>
+              <a:rPr lang="pt-BR" b="1" i="1" dirty="0">
+                <a:solidFill>
+                  <a:srgbClr val="00B050"/>
+                </a:solidFill>
+              </a:rPr>
+              <a:t>deverão responder a um quiz</a:t>
             </a:r>
             <a:r>
               <a:rPr lang="pt-BR" dirty="0">
@@ -9379,20 +10032,32 @@
                   <a:srgbClr val="000000"/>
                 </a:solidFill>
               </a:rPr>
-              <a:t>, preparado pelo apresentador, sobre o algoritmo apresentado.</a:t>
-            </a:r>
-          </a:p>
-          <a:p>
-            <a:pPr lvl="1">
-              <a:buFont typeface="Wingdings" panose="05000000000000000000" pitchFamily="2" charset="2"/>
-              <a:buChar char="§"/>
-            </a:pPr>
+              <a:t>, preparado pelo apresentador, sobre o </a:t>
+            </a:r>
+            <a:r>
+              <a:rPr lang="pt-BR" dirty="0" smtClean="0">
+                <a:solidFill>
+                  <a:srgbClr val="000000"/>
+                </a:solidFill>
+              </a:rPr>
+              <a:t>artigo apresentado</a:t>
+            </a:r>
             <a:r>
               <a:rPr lang="pt-BR" dirty="0">
                 <a:solidFill>
                   <a:srgbClr val="000000"/>
                 </a:solidFill>
               </a:rPr>
+              <a:t>.</a:t>
+            </a:r>
+          </a:p>
+          <a:p>
+            <a:r>
+              <a:rPr lang="pt-BR" dirty="0">
+                <a:solidFill>
+                  <a:srgbClr val="000000"/>
+                </a:solidFill>
+              </a:rPr>
               <a:t>Ao final do curso, os </a:t>
             </a:r>
             <a:r>
@@ -9425,7 +10090,23 @@
                   <a:srgbClr val="000000"/>
                 </a:solidFill>
               </a:rPr>
-              <a:t>, envolvendo a aplicação de um algoritmo avançado de ML a um problema de sua escolha (</a:t>
+              <a:t>, envolvendo a aplicação de um algoritmo </a:t>
+            </a:r>
+            <a:r>
+              <a:rPr lang="pt-BR" dirty="0" smtClean="0">
+                <a:solidFill>
+                  <a:srgbClr val="000000"/>
+                </a:solidFill>
+              </a:rPr>
+              <a:t>de </a:t>
+            </a:r>
+            <a:r>
+              <a:rPr lang="pt-BR" dirty="0">
+                <a:solidFill>
+                  <a:srgbClr val="000000"/>
+                </a:solidFill>
+              </a:rPr>
+              <a:t>ML a um problema de sua escolha (</a:t>
             </a:r>
             <a:r>
               <a:rPr lang="pt-BR" b="1" i="1" dirty="0">
@@ -9493,7 +10174,7 @@
           <p:cNvPr id="2" name="Título 1">
             <a:extLst>
               <a:ext uri="{FF2B5EF4-FFF2-40B4-BE49-F238E27FC236}">
-                <a16:creationId xmlns:a16="http://schemas.microsoft.com/office/drawing/2014/main" xmlns="" id="{9A265F83-0504-EFF3-ACD5-719CAEB5BA41}"/>
+                <a16:creationId xmlns="" xmlns:a16="http://schemas.microsoft.com/office/drawing/2014/main" id="{9A265F83-0504-EFF3-ACD5-719CAEB5BA41}"/>
               </a:ext>
             </a:extLst>
           </p:cNvPr>
@@ -9510,9 +10191,10 @@
           <a:lstStyle/>
           <a:p>
             <a:r>
-              <a:rPr lang="pt-BR" dirty="0"/>
-              <a:t>Sobre o curso</a:t>
-            </a:r>
+              <a:rPr lang="pt-BR" dirty="0" smtClean="0"/>
+              <a:t>Objetivos do curso</a:t>
+            </a:r>
+            <a:endParaRPr lang="pt-BR" dirty="0"/>
           </a:p>
         </p:txBody>
       </p:sp>
@@ -9521,7 +10203,7 @@
           <p:cNvPr id="3" name="Espaço Reservado para Conteúdo 2">
             <a:extLst>
               <a:ext uri="{FF2B5EF4-FFF2-40B4-BE49-F238E27FC236}">
-                <a16:creationId xmlns:a16="http://schemas.microsoft.com/office/drawing/2014/main" xmlns="" id="{7E37BEAB-D924-8E11-EA13-C019C32409D7}"/>
+                <a16:creationId xmlns="" xmlns:a16="http://schemas.microsoft.com/office/drawing/2014/main" id="{7E37BEAB-D924-8E11-EA13-C019C32409D7}"/>
               </a:ext>
             </a:extLst>
           </p:cNvPr>
@@ -9550,13 +10232,67 @@
               </a:spcBef>
             </a:pPr>
             <a:r>
-              <a:rPr lang="pt-BR" b="1" i="0" u="none" strike="noStrike" dirty="0">
+              <a:rPr lang="pt-BR" b="0" i="0" u="none" strike="noStrike" dirty="0" smtClean="0">
                 <a:solidFill>
                   <a:srgbClr val="000000"/>
                 </a:solidFill>
                 <a:effectLst/>
               </a:rPr>
-              <a:t>Objetivo principal do curso</a:t>
+              <a:t>Tornar os alunos capazes de </a:t>
+            </a:r>
+            <a:r>
+              <a:rPr lang="pt-BR" b="0" i="0" u="none" strike="noStrike" dirty="0">
+                <a:solidFill>
+                  <a:srgbClr val="000000"/>
+                </a:solidFill>
+                <a:effectLst/>
+              </a:rPr>
+              <a:t>entender e aplicar na prática os diferentes algoritmos estudados</a:t>
+            </a:r>
+            <a:r>
+              <a:rPr lang="pt-BR" b="0" i="0" u="none" strike="noStrike" dirty="0" smtClean="0">
+                <a:solidFill>
+                  <a:srgbClr val="000000"/>
+                </a:solidFill>
+                <a:effectLst/>
+              </a:rPr>
+              <a:t>.</a:t>
+            </a:r>
+          </a:p>
+          <a:p>
+            <a:pPr algn="just">
+              <a:spcBef>
+                <a:spcPts val="0"/>
+              </a:spcBef>
+            </a:pPr>
+            <a:r>
+              <a:rPr lang="pt-BR" dirty="0" smtClean="0">
+                <a:solidFill>
+                  <a:srgbClr val="000000"/>
+                </a:solidFill>
+              </a:rPr>
+              <a:t>Ambientar os alunos com a leitura de artigos científicos</a:t>
+            </a:r>
+            <a:endParaRPr lang="pt-BR" b="0" i="0" u="none" strike="noStrike" dirty="0" smtClean="0">
+              <a:solidFill>
+                <a:srgbClr val="000000"/>
+              </a:solidFill>
+              <a:effectLst/>
+            </a:endParaRPr>
+          </a:p>
+          <a:p>
+            <a:pPr algn="just">
+              <a:spcBef>
+                <a:spcPts val="0"/>
+              </a:spcBef>
+            </a:pPr>
+            <a:r>
+              <a:rPr lang="pt-BR" dirty="0" smtClean="0">
+                <a:solidFill>
+                  <a:srgbClr val="000000"/>
+                </a:solidFill>
+              </a:rPr>
+              <a:t>Preparar os alunos para apresentação de seus trabalhos em conferencias e para suas defesas.</a:t>
             </a:r>
             <a:endParaRPr lang="pt-BR" b="0" i="0" u="none" strike="noStrike" dirty="0">
               <a:solidFill>
@@ -9564,130 +10300,6 @@
               </a:solidFill>
               <a:effectLst/>
             </a:endParaRPr>
-          </a:p>
-          <a:p>
-            <a:pPr lvl="1" algn="just">
-              <a:spcBef>
-                <a:spcPts val="0"/>
-              </a:spcBef>
-              <a:buFont typeface="Wingdings" panose="05000000000000000000" pitchFamily="2" charset="2"/>
-              <a:buChar char="§"/>
-            </a:pPr>
-            <a:r>
-              <a:rPr lang="pt-BR" b="0" i="0" u="none" strike="noStrike" dirty="0">
-                <a:solidFill>
-                  <a:srgbClr val="000000"/>
-                </a:solidFill>
-                <a:effectLst/>
-              </a:rPr>
-              <a:t>Ao final do curso, os alunos devem ser capazes de entender e aplicar na prática os diferentes algoritmos estudados.</a:t>
-            </a:r>
-          </a:p>
-          <a:p>
-            <a:r>
-              <a:rPr lang="pt-BR" b="1" dirty="0"/>
-              <a:t>Pré-requisitos</a:t>
-            </a:r>
-            <a:r>
-              <a:rPr lang="pt-BR" dirty="0"/>
-              <a:t>:</a:t>
-            </a:r>
-          </a:p>
-          <a:p>
-            <a:pPr lvl="1">
-              <a:buFont typeface="Wingdings" panose="05000000000000000000" pitchFamily="2" charset="2"/>
-              <a:buChar char="§"/>
-            </a:pPr>
-            <a:r>
-              <a:rPr lang="pt-BR" dirty="0"/>
-              <a:t>Disciplinas: TP555 ou TP557;</a:t>
-            </a:r>
-          </a:p>
-          <a:p>
-            <a:pPr lvl="1">
-              <a:buFont typeface="Wingdings" panose="05000000000000000000" pitchFamily="2" charset="2"/>
-              <a:buChar char="§"/>
-            </a:pPr>
-            <a:r>
-              <a:rPr lang="pt-BR" dirty="0"/>
-              <a:t>Conceitos de </a:t>
-            </a:r>
-            <a:r>
-              <a:rPr lang="pt-BR" b="1" i="1" dirty="0"/>
-              <a:t>álgebra linear </a:t>
-            </a:r>
-            <a:r>
-              <a:rPr lang="pt-BR" dirty="0"/>
-              <a:t>(e.g., matrizes e vetores), </a:t>
-            </a:r>
-            <a:r>
-              <a:rPr lang="pt-BR" b="1" i="1" dirty="0"/>
-              <a:t>cálculo</a:t>
-            </a:r>
-            <a:r>
-              <a:rPr lang="pt-BR" dirty="0"/>
-              <a:t> (e.g., algoritmos de otimização, como o gradiente descendente), </a:t>
-            </a:r>
-            <a:r>
-              <a:rPr lang="pt-BR" b="1" i="1" dirty="0"/>
-              <a:t>probabilidade e estatística</a:t>
-            </a:r>
-            <a:r>
-              <a:rPr lang="pt-BR" dirty="0"/>
-              <a:t> (e.g., distribuições de probabilidade, média, desvio padrão, validação cruzada);</a:t>
-            </a:r>
-          </a:p>
-          <a:p>
-            <a:pPr lvl="1">
-              <a:buFont typeface="Wingdings" panose="05000000000000000000" pitchFamily="2" charset="2"/>
-              <a:buChar char="§"/>
-            </a:pPr>
-            <a:r>
-              <a:rPr lang="pt-BR" dirty="0"/>
-              <a:t>Conhecimento intermediário/avançado de programação em Python.</a:t>
-            </a:r>
-          </a:p>
-          <a:p>
-            <a:pPr lvl="1">
-              <a:buFont typeface="Wingdings" panose="05000000000000000000" pitchFamily="2" charset="2"/>
-              <a:buChar char="§"/>
-            </a:pPr>
-            <a:r>
-              <a:rPr lang="pt-BR" dirty="0"/>
-              <a:t>Bibliotecas: TensorFlow, </a:t>
-            </a:r>
-            <a:r>
-              <a:rPr lang="pt-BR" dirty="0" err="1"/>
-              <a:t>PyTorch</a:t>
-            </a:r>
-            <a:r>
-              <a:rPr lang="pt-BR" dirty="0"/>
-              <a:t>, </a:t>
-            </a:r>
-            <a:r>
-              <a:rPr lang="pt-BR" dirty="0" err="1"/>
-              <a:t>Optuna</a:t>
-            </a:r>
-            <a:r>
-              <a:rPr lang="pt-BR" dirty="0"/>
-              <a:t>/</a:t>
-            </a:r>
-            <a:r>
-              <a:rPr lang="pt-BR" dirty="0" err="1"/>
-              <a:t>KerasTuner</a:t>
-            </a:r>
-            <a:r>
-              <a:rPr lang="pt-BR" dirty="0"/>
-              <a:t>, </a:t>
-            </a:r>
-            <a:r>
-              <a:rPr lang="pt-BR" dirty="0" err="1"/>
-              <a:t>SciKit-Learn</a:t>
-            </a:r>
-            <a:r>
-              <a:rPr lang="pt-BR" dirty="0"/>
-              <a:t> e Pandas.</a:t>
-            </a:r>
           </a:p>
         </p:txBody>
       </p:sp>
@@ -9709,10 +10321,182 @@
   <p:cSld>
     <p:spTree>
       <p:nvGrpSpPr>
+        <p:cNvPr id="1" name=""/>
+        <p:cNvGrpSpPr/>
+        <p:nvPr/>
+      </p:nvGrpSpPr>
+      <p:grpSpPr>
+        <a:xfrm>
+          <a:off x="0" y="0"/>
+          <a:ext cx="0" cy="0"/>
+          <a:chOff x="0" y="0"/>
+          <a:chExt cx="0" cy="0"/>
+        </a:xfrm>
+      </p:grpSpPr>
+      <p:sp>
+        <p:nvSpPr>
+          <p:cNvPr id="2" name="Título 1">
+            <a:extLst>
+              <a:ext uri="{FF2B5EF4-FFF2-40B4-BE49-F238E27FC236}">
+                <a16:creationId xmlns="" xmlns:a16="http://schemas.microsoft.com/office/drawing/2014/main" id="{9A265F83-0504-EFF3-ACD5-719CAEB5BA41}"/>
+              </a:ext>
+            </a:extLst>
+          </p:cNvPr>
+          <p:cNvSpPr>
+            <a:spLocks noGrp="1"/>
+          </p:cNvSpPr>
+          <p:nvPr>
+            <p:ph type="title"/>
+          </p:nvPr>
+        </p:nvSpPr>
+        <p:spPr/>
+        <p:txBody>
+          <a:bodyPr/>
+          <a:lstStyle/>
+          <a:p>
+            <a:r>
+              <a:rPr lang="pt-BR" dirty="0" smtClean="0"/>
+              <a:t>Pré-requisitos</a:t>
+            </a:r>
+            <a:endParaRPr lang="pt-BR" dirty="0"/>
+          </a:p>
+        </p:txBody>
+      </p:sp>
+      <p:sp>
+        <p:nvSpPr>
+          <p:cNvPr id="3" name="Espaço Reservado para Conteúdo 2">
+            <a:extLst>
+              <a:ext uri="{FF2B5EF4-FFF2-40B4-BE49-F238E27FC236}">
+                <a16:creationId xmlns="" xmlns:a16="http://schemas.microsoft.com/office/drawing/2014/main" id="{7E37BEAB-D924-8E11-EA13-C019C32409D7}"/>
+              </a:ext>
+            </a:extLst>
+          </p:cNvPr>
+          <p:cNvSpPr>
+            <a:spLocks noGrp="1"/>
+          </p:cNvSpPr>
+          <p:nvPr>
+            <p:ph idx="1"/>
+          </p:nvPr>
+        </p:nvSpPr>
+        <p:spPr>
+          <a:xfrm>
+            <a:off x="838200" y="1825624"/>
+            <a:ext cx="11154508" cy="5032375"/>
+          </a:xfrm>
+        </p:spPr>
+        <p:txBody>
+          <a:bodyPr>
+            <a:normAutofit/>
+          </a:bodyPr>
+          <a:lstStyle/>
+          <a:p>
+            <a:r>
+              <a:rPr lang="pt-BR" dirty="0" smtClean="0"/>
+              <a:t>Disciplinas</a:t>
+            </a:r>
+            <a:r>
+              <a:rPr lang="pt-BR" dirty="0"/>
+              <a:t>: TP555 ou TP557;</a:t>
+            </a:r>
+          </a:p>
+          <a:p>
+            <a:r>
+              <a:rPr lang="pt-BR" dirty="0"/>
+              <a:t>Conceitos de </a:t>
+            </a:r>
+            <a:r>
+              <a:rPr lang="pt-BR" b="1" i="1" dirty="0"/>
+              <a:t>álgebra linear </a:t>
+            </a:r>
+            <a:r>
+              <a:rPr lang="pt-BR" dirty="0"/>
+              <a:t>(e.g., matrizes e vetores), </a:t>
+            </a:r>
+            <a:r>
+              <a:rPr lang="pt-BR" b="1" i="1" dirty="0"/>
+              <a:t>cálculo</a:t>
+            </a:r>
+            <a:r>
+              <a:rPr lang="pt-BR" dirty="0"/>
+              <a:t> (e.g., algoritmos de otimização, como o gradiente descendente), </a:t>
+            </a:r>
+            <a:r>
+              <a:rPr lang="pt-BR" b="1" i="1" dirty="0"/>
+              <a:t>probabilidade e estatística</a:t>
+            </a:r>
+            <a:r>
+              <a:rPr lang="pt-BR" dirty="0"/>
+              <a:t> (e.g., distribuições de probabilidade, média, desvio padrão, validação cruzada);</a:t>
+            </a:r>
+          </a:p>
+          <a:p>
+            <a:r>
+              <a:rPr lang="pt-BR" dirty="0"/>
+              <a:t>Conhecimento intermediário/avançado de programação em Python.</a:t>
+            </a:r>
+          </a:p>
+          <a:p>
+            <a:r>
+              <a:rPr lang="pt-BR" dirty="0"/>
+              <a:t>Bibliotecas: TensorFlow, </a:t>
+            </a:r>
+            <a:r>
+              <a:rPr lang="pt-BR" dirty="0" err="1"/>
+              <a:t>PyTorch</a:t>
+            </a:r>
+            <a:r>
+              <a:rPr lang="pt-BR" dirty="0"/>
+              <a:t>, </a:t>
+            </a:r>
+            <a:r>
+              <a:rPr lang="pt-BR" dirty="0" err="1"/>
+              <a:t>Optuna</a:t>
+            </a:r>
+            <a:r>
+              <a:rPr lang="pt-BR" dirty="0"/>
+              <a:t>/</a:t>
+            </a:r>
+            <a:r>
+              <a:rPr lang="pt-BR" dirty="0" err="1"/>
+              <a:t>KerasTuner</a:t>
+            </a:r>
+            <a:r>
+              <a:rPr lang="pt-BR" dirty="0"/>
+              <a:t>, </a:t>
+            </a:r>
+            <a:r>
+              <a:rPr lang="pt-BR" dirty="0" err="1"/>
+              <a:t>SciKit-Learn</a:t>
+            </a:r>
+            <a:r>
+              <a:rPr lang="pt-BR" dirty="0"/>
+              <a:t> e Pandas.</a:t>
+            </a:r>
+          </a:p>
+        </p:txBody>
+      </p:sp>
+    </p:spTree>
+    <p:extLst>
+      <p:ext uri="{BB962C8B-B14F-4D97-AF65-F5344CB8AC3E}">
+        <p14:creationId xmlns:p14="http://schemas.microsoft.com/office/powerpoint/2010/main" val="1906369775"/>
+      </p:ext>
+    </p:extLst>
+  </p:cSld>
+  <p:clrMapOvr>
+    <a:masterClrMapping/>
+  </p:clrMapOvr>
+</p:sld>
+</file>
+
+<file path=ppt/slides/slide6.xml><?xml version="1.0" encoding="utf-8"?>
+<p:sld xmlns:a="http://schemas.openxmlformats.org/drawingml/2006/main" xmlns:r="http://schemas.openxmlformats.org/officeDocument/2006/relationships" xmlns:p="http://schemas.openxmlformats.org/presentationml/2006/main">
+  <p:cSld>
+    <p:spTree>
+      <p:nvGrpSpPr>
         <p:cNvPr id="1" name="">
           <a:extLst>
             <a:ext uri="{FF2B5EF4-FFF2-40B4-BE49-F238E27FC236}">
-              <a16:creationId xmlns:a16="http://schemas.microsoft.com/office/drawing/2014/main" xmlns="" id="{AF4399CC-3894-D100-1945-D7D23AA96EB1}"/>
+              <a16:creationId xmlns="" xmlns:a16="http://schemas.microsoft.com/office/drawing/2014/main" id="{AF4399CC-3894-D100-1945-D7D23AA96EB1}"/>
             </a:ext>
           </a:extLst>
         </p:cNvPr>
@@ -9732,7 +10516,7 @@
           <p:cNvPr id="2" name="Título 1">
             <a:extLst>
               <a:ext uri="{FF2B5EF4-FFF2-40B4-BE49-F238E27FC236}">
-                <a16:creationId xmlns:a16="http://schemas.microsoft.com/office/drawing/2014/main" xmlns="" id="{424E490C-8C95-5D8F-8A93-456C393F644A}"/>
+                <a16:creationId xmlns="" xmlns:a16="http://schemas.microsoft.com/office/drawing/2014/main" id="{424E490C-8C95-5D8F-8A93-456C393F644A}"/>
               </a:ext>
             </a:extLst>
           </p:cNvPr>
@@ -9749,9 +10533,10 @@
           <a:lstStyle/>
           <a:p>
             <a:r>
-              <a:rPr lang="pt-BR" dirty="0"/>
-              <a:t>Sobre o curso</a:t>
-            </a:r>
+              <a:rPr lang="pt-BR" dirty="0" smtClean="0"/>
+              <a:t>Repositório</a:t>
+            </a:r>
+            <a:endParaRPr lang="pt-BR" dirty="0"/>
           </a:p>
         </p:txBody>
       </p:sp>
@@ -9760,7 +10545,7 @@
           <p:cNvPr id="3" name="Espaço Reservado para Conteúdo 2">
             <a:extLst>
               <a:ext uri="{FF2B5EF4-FFF2-40B4-BE49-F238E27FC236}">
-                <a16:creationId xmlns:a16="http://schemas.microsoft.com/office/drawing/2014/main" xmlns="" id="{D99B10BC-34CB-F110-CB4D-6CF6043930ED}"/>
+                <a16:creationId xmlns="" xmlns:a16="http://schemas.microsoft.com/office/drawing/2014/main" id="{D99B10BC-34CB-F110-CB4D-6CF6043930ED}"/>
               </a:ext>
             </a:extLst>
           </p:cNvPr>
@@ -9789,68 +10574,73 @@
               </a:spcBef>
             </a:pPr>
             <a:r>
-              <a:rPr lang="pt-BR" b="1" dirty="0"/>
-              <a:t>Repositório</a:t>
-            </a:r>
-          </a:p>
-          <a:p>
-            <a:pPr lvl="1" algn="just">
+              <a:rPr lang="pt-BR" dirty="0" smtClean="0"/>
+              <a:t>Criem </a:t>
+            </a:r>
+            <a:r>
+              <a:rPr lang="pt-BR" dirty="0"/>
+              <a:t>um repositório público no </a:t>
+            </a:r>
+            <a:r>
+              <a:rPr lang="pt-BR" dirty="0" err="1"/>
+              <a:t>github</a:t>
+            </a:r>
+            <a:r>
+              <a:rPr lang="pt-BR" dirty="0"/>
+              <a:t> para armazenar o material gerado durante todo o curso, e.g., materiais dos seminários, proposta de projeto, projeto final, etc.</a:t>
+            </a:r>
+          </a:p>
+          <a:p>
+            <a:pPr algn="just">
               <a:spcBef>
                 <a:spcPts val="0"/>
               </a:spcBef>
             </a:pPr>
             <a:r>
               <a:rPr lang="pt-BR" dirty="0"/>
-              <a:t>Criem um repositório público no </a:t>
-            </a:r>
-            <a:r>
-              <a:rPr lang="pt-BR" dirty="0" err="1"/>
-              <a:t>github</a:t>
-            </a:r>
-            <a:r>
-              <a:rPr lang="pt-BR" dirty="0"/>
-              <a:t> para armazenar o material gerado durante todo o curso, e.g., materiais dos seminários, proposta de projeto, projeto final, etc.</a:t>
-            </a:r>
-          </a:p>
-          <a:p>
-            <a:pPr lvl="1" algn="just">
+              <a:t>Criem </a:t>
+            </a:r>
+            <a:r>
+              <a:rPr lang="pt-BR" b="1" i="1" dirty="0">
+                <a:solidFill>
+                  <a:srgbClr val="7030A0"/>
+                </a:solidFill>
+              </a:rPr>
+              <a:t>pastas distintas para cada seminário</a:t>
+            </a:r>
+            <a:r>
+              <a:rPr lang="pt-BR" dirty="0"/>
+              <a:t>, para o projeto final e qualquer outro material que seja gerado durante o curso.</a:t>
+            </a:r>
+          </a:p>
+          <a:p>
+            <a:pPr algn="just">
               <a:spcBef>
                 <a:spcPts val="0"/>
               </a:spcBef>
             </a:pPr>
             <a:r>
-              <a:rPr lang="pt-BR" dirty="0"/>
-              <a:t>Criem </a:t>
-            </a:r>
-            <a:r>
-              <a:rPr lang="pt-BR" b="1" i="1" dirty="0">
-                <a:solidFill>
-                  <a:srgbClr val="7030A0"/>
-                </a:solidFill>
-              </a:rPr>
-              <a:t>pastas distintas para cada seminário</a:t>
-            </a:r>
-            <a:r>
-              <a:rPr lang="pt-BR" dirty="0"/>
-              <a:t>, para o projeto final e qualquer outro material que seja gerado durante o curso.</a:t>
-            </a:r>
-          </a:p>
-          <a:p>
-            <a:pPr lvl="1" algn="just">
-              <a:spcBef>
-                <a:spcPts val="0"/>
-              </a:spcBef>
-            </a:pPr>
-            <a:r>
-              <a:rPr lang="pt-BR" dirty="0"/>
+              <a:rPr lang="pt-BR" b="1" dirty="0">
+                <a:solidFill>
+                  <a:srgbClr val="FF0000"/>
+                </a:solidFill>
+              </a:rPr>
               <a:t>Enviem o endereço do repositório para o professor via </a:t>
             </a:r>
             <a:r>
-              <a:rPr lang="pt-BR" dirty="0" err="1"/>
+              <a:rPr lang="pt-BR" b="1" dirty="0" err="1">
+                <a:solidFill>
+                  <a:srgbClr val="FF0000"/>
+                </a:solidFill>
+              </a:rPr>
               <a:t>email</a:t>
             </a:r>
             <a:r>
-              <a:rPr lang="pt-BR" dirty="0"/>
+              <a:rPr lang="pt-BR" b="1" dirty="0">
+                <a:solidFill>
+                  <a:srgbClr val="FF0000"/>
+                </a:solidFill>
+              </a:rPr>
               <a:t>.</a:t>
             </a:r>
           </a:p>
@@ -9869,7 +10659,7 @@
 </p:sld>
 </file>
 
-<file path=ppt/slides/slide6.xml><?xml version="1.0" encoding="utf-8"?>
+<file path=ppt/slides/slide7.xml><?xml version="1.0" encoding="utf-8"?>
 <p:sld xmlns:a="http://schemas.openxmlformats.org/drawingml/2006/main" xmlns:r="http://schemas.openxmlformats.org/officeDocument/2006/relationships" xmlns:p="http://schemas.openxmlformats.org/presentationml/2006/main">
   <p:cSld>
     <p:spTree>
@@ -9891,7 +10681,7 @@
           <p:cNvPr id="2" name="Título 1">
             <a:extLst>
               <a:ext uri="{FF2B5EF4-FFF2-40B4-BE49-F238E27FC236}">
-                <a16:creationId xmlns:a16="http://schemas.microsoft.com/office/drawing/2014/main" xmlns="" id="{40B200E8-E489-1374-DAE1-A01E9DFC93EA}"/>
+                <a16:creationId xmlns="" xmlns:a16="http://schemas.microsoft.com/office/drawing/2014/main" id="{40B200E8-E489-1374-DAE1-A01E9DFC93EA}"/>
               </a:ext>
             </a:extLst>
           </p:cNvPr>
@@ -9908,9 +10698,10 @@
           <a:lstStyle/>
           <a:p>
             <a:r>
-              <a:rPr lang="pt-BR" dirty="0"/>
-              <a:t>Sobre o curso</a:t>
-            </a:r>
+              <a:rPr lang="pt-BR" dirty="0" smtClean="0"/>
+              <a:t>Avaliação</a:t>
+            </a:r>
+            <a:endParaRPr lang="pt-BR" dirty="0"/>
           </a:p>
         </p:txBody>
       </p:sp>
@@ -9919,7 +10710,7 @@
           <p:cNvPr id="3" name="Espaço Reservado para Conteúdo 2">
             <a:extLst>
               <a:ext uri="{FF2B5EF4-FFF2-40B4-BE49-F238E27FC236}">
-                <a16:creationId xmlns:a16="http://schemas.microsoft.com/office/drawing/2014/main" xmlns="" id="{AC84DA0A-C3B3-CCCB-BBDF-CF88E7D56E0D}"/>
+                <a16:creationId xmlns="" xmlns:a16="http://schemas.microsoft.com/office/drawing/2014/main" id="{AC84DA0A-C3B3-CCCB-BBDF-CF88E7D56E0D}"/>
               </a:ext>
             </a:extLst>
           </p:cNvPr>
@@ -9938,22 +10729,22 @@
         </p:spPr>
         <p:txBody>
           <a:bodyPr>
-            <a:normAutofit/>
+            <a:normAutofit lnSpcReduction="10000"/>
           </a:bodyPr>
           <a:lstStyle/>
           <a:p>
-            <a:pPr marL="0" indent="0" rtl="0" fontAlgn="base">
+            <a:pPr fontAlgn="base">
               <a:spcBef>
                 <a:spcPts val="0"/>
               </a:spcBef>
-              <a:spcAft>
-                <a:spcPts val="0"/>
-              </a:spcAft>
-              <a:buNone/>
-            </a:pPr>
-            <a:r>
-              <a:rPr lang="pt-BR" b="1" dirty="0"/>
-              <a:t>Avaliações</a:t>
+            </a:pPr>
+            <a:r>
+              <a:rPr lang="pt-BR" dirty="0" smtClean="0"/>
+              <a:t>Seminários </a:t>
+            </a:r>
+            <a:r>
+              <a:rPr lang="pt-BR" dirty="0"/>
+              <a:t>(S): 50%</a:t>
             </a:r>
           </a:p>
           <a:p>
@@ -9961,36 +10752,20 @@
               <a:spcBef>
                 <a:spcPts val="0"/>
               </a:spcBef>
-            </a:pPr>
-            <a:r>
-              <a:rPr lang="pt-BR" dirty="0"/>
-              <a:t>Seminários (S): 50%</a:t>
-            </a:r>
-          </a:p>
-          <a:p>
-            <a:pPr lvl="2" fontAlgn="base">
-              <a:spcBef>
-                <a:spcPts val="0"/>
-              </a:spcBef>
               <a:buFont typeface="Wingdings" panose="05000000000000000000" pitchFamily="2" charset="2"/>
               <a:buChar char="§"/>
             </a:pPr>
             <a:r>
               <a:rPr lang="pt-BR" dirty="0"/>
-              <a:t>Cada aluno irá estudar alguns algoritmos e apresentar aos demais.</a:t>
-            </a:r>
-          </a:p>
-          <a:p>
-            <a:pPr lvl="2" fontAlgn="base">
-              <a:spcBef>
-                <a:spcPts val="0"/>
-              </a:spcBef>
-              <a:buFont typeface="Wingdings" panose="05000000000000000000" pitchFamily="2" charset="2"/>
-              <a:buChar char="§"/>
-            </a:pPr>
-            <a:r>
-              <a:rPr lang="pt-BR" dirty="0"/>
-              <a:t>Uma a duas semanas para estudo, preparação da apresentação e quiz.</a:t>
+              <a:t>Cada aluno irá estudar alguns </a:t>
+            </a:r>
+            <a:r>
+              <a:rPr lang="pt-BR" dirty="0" smtClean="0"/>
+              <a:t>artigos e </a:t>
+            </a:r>
+            <a:r>
+              <a:rPr lang="pt-BR" dirty="0"/>
+              <a:t>apresentar aos demais.</a:t>
             </a:r>
           </a:p>
           <a:p>
@@ -9998,23 +10773,31 @@
               <a:spcBef>
                 <a:spcPts val="0"/>
               </a:spcBef>
-            </a:pPr>
-            <a:r>
-              <a:rPr lang="pt-BR" dirty="0"/>
-              <a:t>Quizzes (Q): 10%</a:t>
-            </a:r>
-          </a:p>
-          <a:p>
-            <a:pPr lvl="2" fontAlgn="base">
+              <a:buFont typeface="Wingdings" panose="05000000000000000000" pitchFamily="2" charset="2"/>
+              <a:buChar char="§"/>
+            </a:pPr>
+            <a:r>
+              <a:rPr lang="pt-BR" dirty="0"/>
+              <a:t>D</a:t>
+            </a:r>
+            <a:r>
+              <a:rPr lang="pt-BR" dirty="0" smtClean="0"/>
+              <a:t>uas </a:t>
+            </a:r>
+            <a:r>
+              <a:rPr lang="pt-BR" dirty="0"/>
+              <a:t>semanas para estudo, preparação da apresentação e quiz.</a:t>
+            </a:r>
+          </a:p>
+          <a:p>
+            <a:pPr fontAlgn="base">
               <a:spcBef>
                 <a:spcPts val="0"/>
               </a:spcBef>
-              <a:buFont typeface="Wingdings" panose="05000000000000000000" pitchFamily="2" charset="2"/>
-              <a:buChar char="§"/>
-            </a:pPr>
-            <a:r>
-              <a:rPr lang="pt-BR" dirty="0"/>
-              <a:t>Resolução dos quizzes preparados pelos alunos.</a:t>
+            </a:pPr>
+            <a:r>
+              <a:rPr lang="pt-BR" dirty="0"/>
+              <a:t>Quizzes (Q): 10%</a:t>
             </a:r>
           </a:p>
           <a:p>
@@ -10022,6 +10805,19 @@
               <a:spcBef>
                 <a:spcPts val="0"/>
               </a:spcBef>
+              <a:buFont typeface="Wingdings" panose="05000000000000000000" pitchFamily="2" charset="2"/>
+              <a:buChar char="§"/>
+            </a:pPr>
+            <a:r>
+              <a:rPr lang="pt-BR" dirty="0"/>
+              <a:t>Resolução dos quizzes preparados pelos alunos.</a:t>
+            </a:r>
+          </a:p>
+          <a:p>
+            <a:pPr fontAlgn="base">
+              <a:spcBef>
+                <a:spcPts val="0"/>
+              </a:spcBef>
             </a:pPr>
             <a:r>
               <a:rPr lang="pt-BR" dirty="0"/>
@@ -10029,7 +10825,7 @@
             </a:r>
           </a:p>
           <a:p>
-            <a:pPr lvl="2">
+            <a:pPr lvl="1">
               <a:lnSpc>
                 <a:spcPct val="100000"/>
               </a:lnSpc>
@@ -10045,7 +10841,7 @@
             </a:r>
           </a:p>
           <a:p>
-            <a:pPr lvl="2">
+            <a:pPr lvl="1">
               <a:lnSpc>
                 <a:spcPct val="100000"/>
               </a:lnSpc>
@@ -10061,7 +10857,7 @@
             </a:r>
           </a:p>
           <a:p>
-            <a:pPr lvl="2" fontAlgn="base">
+            <a:pPr lvl="1" fontAlgn="base">
               <a:lnSpc>
                 <a:spcPct val="100000"/>
               </a:lnSpc>
@@ -10073,7 +10869,11 @@
             </a:pPr>
             <a:r>
               <a:rPr lang="pt-BR" dirty="0"/>
-              <a:t>Prazo de entrega no </a:t>
+              <a:t>Prazo de entrega </a:t>
+            </a:r>
+            <a:r>
+              <a:rPr lang="pt-BR" dirty="0" smtClean="0"/>
+              <a:t>será divulgado no </a:t>
             </a:r>
             <a:r>
               <a:rPr lang="pt-BR" dirty="0" err="1"/>
@@ -10082,6 +10882,17 @@
             <a:r>
               <a:rPr lang="pt-BR" dirty="0"/>
               <a:t>.</a:t>
+            </a:r>
+          </a:p>
+          <a:p>
+            <a:pPr fontAlgn="base">
+              <a:spcBef>
+                <a:spcPts val="0"/>
+              </a:spcBef>
+            </a:pPr>
+            <a:r>
+              <a:rPr lang="pt-BR" dirty="0"/>
+              <a:t>Projeto final (PF): 30%</a:t>
             </a:r>
           </a:p>
           <a:p>
@@ -10089,17 +10900,6 @@
               <a:spcBef>
                 <a:spcPts val="0"/>
               </a:spcBef>
-            </a:pPr>
-            <a:r>
-              <a:rPr lang="pt-BR" dirty="0"/>
-              <a:t>Projeto final (PF): 30%</a:t>
-            </a:r>
-          </a:p>
-          <a:p>
-            <a:pPr lvl="2" fontAlgn="base">
-              <a:spcBef>
-                <a:spcPts val="0"/>
-              </a:spcBef>
               <a:buFont typeface="Wingdings" panose="05000000000000000000" pitchFamily="2" charset="2"/>
               <a:buChar char="§"/>
             </a:pPr>
@@ -10109,7 +10909,7 @@
             </a:r>
           </a:p>
           <a:p>
-            <a:pPr lvl="2" fontAlgn="base">
+            <a:pPr lvl="1" fontAlgn="base">
               <a:spcBef>
                 <a:spcPts val="0"/>
               </a:spcBef>
@@ -10149,7 +10949,7 @@
           <p:cNvPr id="4" name="Picture 3">
             <a:extLst>
               <a:ext uri="{FF2B5EF4-FFF2-40B4-BE49-F238E27FC236}">
-                <a16:creationId xmlns:a16="http://schemas.microsoft.com/office/drawing/2014/main" xmlns="" id="{63A98931-D4DA-A8C6-E70B-6223235637D2}"/>
+                <a16:creationId xmlns="" xmlns:a16="http://schemas.microsoft.com/office/drawing/2014/main" id="{63A98931-D4DA-A8C6-E70B-6223235637D2}"/>
               </a:ext>
             </a:extLst>
           </p:cNvPr>
@@ -10179,7 +10979,7 @@
           <p:cNvPr id="5" name="Picture 4">
             <a:extLst>
               <a:ext uri="{FF2B5EF4-FFF2-40B4-BE49-F238E27FC236}">
-                <a16:creationId xmlns:a16="http://schemas.microsoft.com/office/drawing/2014/main" xmlns="" id="{0E171FC1-ABD1-9A30-24B9-3B431D21D315}"/>
+                <a16:creationId xmlns="" xmlns:a16="http://schemas.microsoft.com/office/drawing/2014/main" id="{0E171FC1-ABD1-9A30-24B9-3B431D21D315}"/>
               </a:ext>
             </a:extLst>
           </p:cNvPr>
@@ -10196,7 +10996,7 @@
         </p:blipFill>
         <p:spPr>
           <a:xfrm>
-            <a:off x="9555560" y="2686727"/>
+            <a:off x="9539518" y="2879232"/>
             <a:ext cx="2533650" cy="1809750"/>
           </a:xfrm>
           <a:prstGeom prst="rect">
@@ -10209,7 +11009,7 @@
           <p:cNvPr id="6" name="Picture 5">
             <a:extLst>
               <a:ext uri="{FF2B5EF4-FFF2-40B4-BE49-F238E27FC236}">
-                <a16:creationId xmlns:a16="http://schemas.microsoft.com/office/drawing/2014/main" xmlns="" id="{4A00239B-9DE4-3C62-31EF-097283BCD829}"/>
+                <a16:creationId xmlns="" xmlns:a16="http://schemas.microsoft.com/office/drawing/2014/main" id="{4A00239B-9DE4-3C62-31EF-097283BCD829}"/>
               </a:ext>
             </a:extLst>
           </p:cNvPr>
@@ -10247,154 +11047,6 @@
 </p:sld>
 </file>
 
-<file path=ppt/slides/slide7.xml><?xml version="1.0" encoding="utf-8"?>
-<p:sld xmlns:a="http://schemas.openxmlformats.org/drawingml/2006/main" xmlns:r="http://schemas.openxmlformats.org/officeDocument/2006/relationships" xmlns:p="http://schemas.openxmlformats.org/presentationml/2006/main">
-  <p:cSld>
-    <p:spTree>
-      <p:nvGrpSpPr>
-        <p:cNvPr id="1" name=""/>
-        <p:cNvGrpSpPr/>
-        <p:nvPr/>
-      </p:nvGrpSpPr>
-      <p:grpSpPr>
-        <a:xfrm>
-          <a:off x="0" y="0"/>
-          <a:ext cx="0" cy="0"/>
-          <a:chOff x="0" y="0"/>
-          <a:chExt cx="0" cy="0"/>
-        </a:xfrm>
-      </p:grpSpPr>
-      <p:sp>
-        <p:nvSpPr>
-          <p:cNvPr id="2" name="Título 1">
-            <a:extLst>
-              <a:ext uri="{FF2B5EF4-FFF2-40B4-BE49-F238E27FC236}">
-                <a16:creationId xmlns:a16="http://schemas.microsoft.com/office/drawing/2014/main" xmlns="" id="{81B87840-628C-E82C-47FA-C888AB409B21}"/>
-              </a:ext>
-            </a:extLst>
-          </p:cNvPr>
-          <p:cNvSpPr>
-            <a:spLocks noGrp="1"/>
-          </p:cNvSpPr>
-          <p:nvPr>
-            <p:ph type="title"/>
-          </p:nvPr>
-        </p:nvSpPr>
-        <p:spPr/>
-        <p:txBody>
-          <a:bodyPr/>
-          <a:lstStyle/>
-          <a:p>
-            <a:r>
-              <a:rPr lang="pt-BR" dirty="0"/>
-              <a:t>Sobre o curso</a:t>
-            </a:r>
-          </a:p>
-        </p:txBody>
-      </p:sp>
-      <p:sp>
-        <p:nvSpPr>
-          <p:cNvPr id="3" name="Espaço Reservado para Conteúdo 2">
-            <a:extLst>
-              <a:ext uri="{FF2B5EF4-FFF2-40B4-BE49-F238E27FC236}">
-                <a16:creationId xmlns:a16="http://schemas.microsoft.com/office/drawing/2014/main" xmlns="" id="{60B96892-6767-8A98-62CA-E3A197F37080}"/>
-              </a:ext>
-            </a:extLst>
-          </p:cNvPr>
-          <p:cNvSpPr>
-            <a:spLocks noGrp="1"/>
-          </p:cNvSpPr>
-          <p:nvPr>
-            <p:ph idx="1"/>
-          </p:nvPr>
-        </p:nvSpPr>
-        <p:spPr>
-          <a:xfrm>
-            <a:off x="838200" y="1825624"/>
-            <a:ext cx="11190514" cy="5032375"/>
-          </a:xfrm>
-        </p:spPr>
-        <p:txBody>
-          <a:bodyPr/>
-          <a:lstStyle/>
-          <a:p>
-            <a:r>
-              <a:rPr lang="pt-BR" dirty="0"/>
-              <a:t>Instruções detalhadas sobre os seminários e projeto final.</a:t>
-            </a:r>
-          </a:p>
-          <a:p>
-            <a:pPr lvl="1">
-              <a:buFont typeface="Wingdings" panose="05000000000000000000" pitchFamily="2" charset="2"/>
-              <a:buChar char="§"/>
-            </a:pPr>
-            <a:r>
-              <a:rPr lang="pt-BR" dirty="0"/>
-              <a:t>Seminários: </a:t>
-            </a:r>
-            <a:r>
-              <a:rPr lang="pt-BR" dirty="0">
-                <a:hlinkClick r:id="rId2"/>
-              </a:rPr>
-              <a:t>http://tinyurl.com/tp558-seminars</a:t>
-            </a:r>
-            <a:endParaRPr lang="pt-BR" dirty="0"/>
-          </a:p>
-          <a:p>
-            <a:pPr lvl="1">
-              <a:buFont typeface="Wingdings" panose="05000000000000000000" pitchFamily="2" charset="2"/>
-              <a:buChar char="§"/>
-            </a:pPr>
-            <a:r>
-              <a:rPr lang="pt-BR" dirty="0"/>
-              <a:t>Projeto final: </a:t>
-            </a:r>
-            <a:r>
-              <a:rPr lang="pt-BR" dirty="0">
-                <a:hlinkClick r:id="rId3"/>
-              </a:rPr>
-              <a:t>http://tinyurl.com</a:t>
-            </a:r>
-            <a:r>
-              <a:rPr lang="pt-BR">
-                <a:hlinkClick r:id="rId3"/>
-              </a:rPr>
-              <a:t>/tp558-final-project</a:t>
-            </a:r>
-            <a:endParaRPr lang="pt-BR" dirty="0"/>
-          </a:p>
-          <a:p>
-            <a:pPr marL="457200" lvl="1" indent="0">
-              <a:buNone/>
-            </a:pPr>
-            <a:endParaRPr lang="pt-BR" dirty="0"/>
-          </a:p>
-          <a:p>
-            <a:pPr lvl="1"/>
-            <a:endParaRPr lang="pt-BR" dirty="0"/>
-          </a:p>
-          <a:p>
-            <a:pPr lvl="1">
-              <a:buFont typeface="Wingdings" panose="05000000000000000000" pitchFamily="2" charset="2"/>
-              <a:buChar char="§"/>
-            </a:pPr>
-            <a:endParaRPr lang="pt-BR" dirty="0"/>
-          </a:p>
-        </p:txBody>
-      </p:sp>
-    </p:spTree>
-    <p:extLst>
-      <p:ext uri="{BB962C8B-B14F-4D97-AF65-F5344CB8AC3E}">
-        <p14:creationId xmlns:p14="http://schemas.microsoft.com/office/powerpoint/2010/main" val="1970035448"/>
-      </p:ext>
-    </p:extLst>
-  </p:cSld>
-  <p:clrMapOvr>
-    <a:masterClrMapping/>
-  </p:clrMapOvr>
-</p:sld>
-</file>
-
 <file path=ppt/slides/slide8.xml><?xml version="1.0" encoding="utf-8"?>
 <p:sld xmlns:a="http://schemas.openxmlformats.org/drawingml/2006/main" xmlns:r="http://schemas.openxmlformats.org/officeDocument/2006/relationships" xmlns:p="http://schemas.openxmlformats.org/presentationml/2006/main">
   <p:cSld>
@@ -10417,7 +11069,7 @@
           <p:cNvPr id="2" name="Título 1">
             <a:extLst>
               <a:ext uri="{FF2B5EF4-FFF2-40B4-BE49-F238E27FC236}">
-                <a16:creationId xmlns:a16="http://schemas.microsoft.com/office/drawing/2014/main" xmlns="" id="{11BC2EE5-C8A9-A5C4-E79F-7ACA60564BF4}"/>
+                <a16:creationId xmlns="" xmlns:a16="http://schemas.microsoft.com/office/drawing/2014/main" id="{81B87840-628C-E82C-47FA-C888AB409B21}"/>
               </a:ext>
             </a:extLst>
           </p:cNvPr>
@@ -10435,8 +11087,21 @@
           <a:p>
             <a:r>
               <a:rPr lang="pt-BR" dirty="0"/>
-              <a:t>Temas dos seminários</a:t>
-            </a:r>
+              <a:t>Instruções </a:t>
+            </a:r>
+            <a:r>
+              <a:rPr lang="pt-BR" dirty="0" smtClean="0"/>
+              <a:t>sobre </a:t>
+            </a:r>
+            <a:r>
+              <a:rPr lang="pt-BR" dirty="0"/>
+              <a:t>os seminários e projeto </a:t>
+            </a:r>
+            <a:r>
+              <a:rPr lang="pt-BR" dirty="0" smtClean="0"/>
+              <a:t>final</a:t>
+            </a:r>
+            <a:endParaRPr lang="pt-BR" dirty="0"/>
           </a:p>
         </p:txBody>
       </p:sp>
@@ -10445,7 +11110,7 @@
           <p:cNvPr id="3" name="Espaço Reservado para Conteúdo 2">
             <a:extLst>
               <a:ext uri="{FF2B5EF4-FFF2-40B4-BE49-F238E27FC236}">
-                <a16:creationId xmlns:a16="http://schemas.microsoft.com/office/drawing/2014/main" xmlns="" id="{F34E1E4B-4890-7308-FDD9-BCFBF68A4D2F}"/>
+                <a16:creationId xmlns="" xmlns:a16="http://schemas.microsoft.com/office/drawing/2014/main" id="{60B96892-6767-8A98-62CA-E3A197F37080}"/>
               </a:ext>
             </a:extLst>
           </p:cNvPr>
@@ -10458,226 +11123,46 @@
         </p:nvSpPr>
         <p:spPr>
           <a:xfrm>
-            <a:off x="838199" y="1825624"/>
-            <a:ext cx="11038115" cy="5032375"/>
+            <a:off x="838200" y="1825624"/>
+            <a:ext cx="11190514" cy="5032375"/>
           </a:xfrm>
         </p:spPr>
         <p:txBody>
-          <a:bodyPr>
-            <a:normAutofit/>
-          </a:bodyPr>
+          <a:bodyPr/>
           <a:lstStyle/>
           <a:p>
             <a:r>
-              <a:rPr lang="pt-BR" dirty="0" err="1"/>
-              <a:t>Generative</a:t>
-            </a:r>
-            <a:r>
-              <a:rPr lang="pt-BR" dirty="0"/>
-              <a:t> </a:t>
-            </a:r>
-            <a:r>
-              <a:rPr lang="pt-BR" dirty="0" err="1"/>
-              <a:t>deep</a:t>
-            </a:r>
-            <a:r>
-              <a:rPr lang="pt-BR" dirty="0"/>
-              <a:t> learning: </a:t>
-            </a:r>
-            <a:r>
-              <a:rPr lang="pt-BR" dirty="0" err="1"/>
-              <a:t>Image</a:t>
-            </a:r>
-            <a:r>
-              <a:rPr lang="pt-BR" dirty="0"/>
-              <a:t> Generation</a:t>
-            </a:r>
-          </a:p>
-          <a:p>
-            <a:pPr lvl="1">
-              <a:buFont typeface="Wingdings" panose="05000000000000000000" pitchFamily="2" charset="2"/>
-              <a:buChar char="§"/>
-            </a:pPr>
-            <a:r>
-              <a:rPr lang="en-US" dirty="0">
-                <a:solidFill>
-                  <a:srgbClr val="000000"/>
-                </a:solidFill>
-              </a:rPr>
-              <a:t>D</a:t>
-            </a:r>
-            <a:r>
-              <a:rPr lang="en-US" b="0" i="0" dirty="0">
-                <a:solidFill>
-                  <a:srgbClr val="000000"/>
-                </a:solidFill>
-                <a:effectLst/>
-              </a:rPr>
-              <a:t>eep convolutional generative adversarial network (DCGAN)</a:t>
-            </a:r>
-          </a:p>
-          <a:p>
-            <a:pPr lvl="2">
-              <a:buFont typeface="Wingdings" panose="05000000000000000000" pitchFamily="2" charset="2"/>
-              <a:buChar char="ü"/>
-            </a:pPr>
-            <a:r>
-              <a:rPr lang="en-US" b="0" i="0" dirty="0">
-                <a:solidFill>
-                  <a:srgbClr val="000000"/>
-                </a:solidFill>
-                <a:effectLst/>
+              <a:rPr lang="pt-BR" dirty="0" smtClean="0"/>
+              <a:t>Seminários</a:t>
+            </a:r>
+            <a:r>
+              <a:rPr lang="pt-BR" dirty="0"/>
+              <a:t>: </a:t>
+            </a:r>
+            <a:r>
+              <a:rPr lang="pt-BR" dirty="0">
                 <a:hlinkClick r:id="rId2"/>
               </a:rPr>
-              <a:t>https://arxiv.org/abs/1511.06434</a:t>
-            </a:r>
-            <a:endParaRPr lang="en-US" b="0" i="0" dirty="0">
-              <a:solidFill>
-                <a:srgbClr val="000000"/>
-              </a:solidFill>
-              <a:effectLst/>
-            </a:endParaRPr>
-          </a:p>
-          <a:p>
-            <a:pPr lvl="2">
-              <a:buFont typeface="Wingdings" panose="05000000000000000000" pitchFamily="2" charset="2"/>
-              <a:buChar char="ü"/>
-            </a:pPr>
+              <a:t>http://tinyurl.com/tp558-seminars</a:t>
+            </a:r>
+            <a:endParaRPr lang="pt-BR" dirty="0"/>
+          </a:p>
+          <a:p>
+            <a:r>
+              <a:rPr lang="pt-BR" dirty="0"/>
+              <a:t>Projeto final: </a:t>
+            </a:r>
             <a:r>
               <a:rPr lang="pt-BR" dirty="0">
                 <a:hlinkClick r:id="rId3"/>
               </a:rPr>
-              <a:t>https://keras.io/examples/generative/dcgan_overriding_train_step/</a:t>
-            </a:r>
-            <a:endParaRPr lang="pt-BR" dirty="0"/>
-          </a:p>
-          <a:p>
-            <a:pPr lvl="1">
-              <a:buFont typeface="Wingdings" panose="05000000000000000000" pitchFamily="2" charset="2"/>
-              <a:buChar char="§"/>
-            </a:pPr>
-            <a:r>
-              <a:rPr lang="pt-BR" dirty="0" err="1">
-                <a:solidFill>
-                  <a:srgbClr val="202124"/>
-                </a:solidFill>
-              </a:rPr>
-              <a:t>Conditional</a:t>
-            </a:r>
-            <a:r>
-              <a:rPr lang="pt-BR" dirty="0">
-                <a:solidFill>
-                  <a:srgbClr val="202124"/>
-                </a:solidFill>
-              </a:rPr>
-              <a:t> GAN (CGAN)</a:t>
-            </a:r>
-          </a:p>
-          <a:p>
-            <a:pPr lvl="2">
-              <a:buFont typeface="Wingdings" panose="05000000000000000000" pitchFamily="2" charset="2"/>
-              <a:buChar char="ü"/>
-            </a:pPr>
-            <a:r>
-              <a:rPr lang="pt-BR" dirty="0">
-                <a:solidFill>
-                  <a:srgbClr val="202124"/>
-                </a:solidFill>
-                <a:hlinkClick r:id="rId4"/>
-              </a:rPr>
-              <a:t>https://arxiv.org/abs/1411.1784</a:t>
-            </a:r>
-            <a:endParaRPr lang="pt-BR" dirty="0">
-              <a:solidFill>
-                <a:srgbClr val="202124"/>
-              </a:solidFill>
-            </a:endParaRPr>
-          </a:p>
-          <a:p>
-            <a:pPr lvl="2">
-              <a:buFont typeface="Wingdings" panose="05000000000000000000" pitchFamily="2" charset="2"/>
-              <a:buChar char="ü"/>
-            </a:pPr>
-            <a:r>
-              <a:rPr lang="pt-BR" dirty="0">
-                <a:solidFill>
-                  <a:srgbClr val="202124"/>
-                </a:solidFill>
-                <a:hlinkClick r:id="rId5"/>
-              </a:rPr>
-              <a:t>https://keras.io/examples/generative/conditional_gan/</a:t>
-            </a:r>
-            <a:endParaRPr lang="pt-BR" dirty="0"/>
-          </a:p>
-          <a:p>
-            <a:pPr lvl="1">
-              <a:buFont typeface="Wingdings" panose="05000000000000000000" pitchFamily="2" charset="2"/>
-              <a:buChar char="§"/>
-            </a:pPr>
-            <a:r>
-              <a:rPr lang="pt-BR" b="0" i="0" dirty="0" err="1">
-                <a:solidFill>
-                  <a:srgbClr val="202124"/>
-                </a:solidFill>
-                <a:effectLst/>
-              </a:rPr>
-              <a:t>Variational</a:t>
-            </a:r>
-            <a:r>
-              <a:rPr lang="pt-BR" b="0" i="0" dirty="0">
-                <a:solidFill>
-                  <a:srgbClr val="202124"/>
-                </a:solidFill>
-                <a:effectLst/>
-              </a:rPr>
-              <a:t> </a:t>
-            </a:r>
-            <a:r>
-              <a:rPr lang="pt-BR" b="0" i="0" dirty="0" err="1">
-                <a:solidFill>
-                  <a:srgbClr val="202124"/>
-                </a:solidFill>
-                <a:effectLst/>
-              </a:rPr>
-              <a:t>Autoencoder</a:t>
-            </a:r>
-            <a:r>
-              <a:rPr lang="pt-BR" b="0" i="0" dirty="0">
-                <a:solidFill>
-                  <a:srgbClr val="202124"/>
-                </a:solidFill>
-                <a:effectLst/>
-              </a:rPr>
-              <a:t> (VAE)</a:t>
-            </a:r>
-          </a:p>
-          <a:p>
-            <a:pPr lvl="2">
-              <a:buFont typeface="Wingdings" panose="05000000000000000000" pitchFamily="2" charset="2"/>
-              <a:buChar char="ü"/>
-            </a:pPr>
-            <a:r>
-              <a:rPr lang="pt-BR" dirty="0">
-                <a:hlinkClick r:id="rId6"/>
-              </a:rPr>
-              <a:t>https://arxiv.org/abs/1312.6114</a:t>
-            </a:r>
-            <a:endParaRPr lang="pt-BR" dirty="0">
-              <a:solidFill>
-                <a:srgbClr val="202124"/>
-              </a:solidFill>
-            </a:endParaRPr>
-          </a:p>
-          <a:p>
-            <a:pPr lvl="2">
-              <a:buFont typeface="Wingdings" panose="05000000000000000000" pitchFamily="2" charset="2"/>
-              <a:buChar char="ü"/>
-            </a:pPr>
-            <a:r>
-              <a:rPr lang="pt-BR" dirty="0">
-                <a:hlinkClick r:id="rId7"/>
-              </a:rPr>
-              <a:t>https://www.tensorflow.org/tutorials/generative/cvae?hl=en</a:t>
+              <a:t>http://</a:t>
+            </a:r>
+            <a:r>
+              <a:rPr lang="pt-BR" dirty="0" smtClean="0">
+                <a:hlinkClick r:id="rId3"/>
+              </a:rPr>
+              <a:t>tinyurl.com/tp558-final-project</a:t>
             </a:r>
             <a:endParaRPr lang="pt-BR" dirty="0"/>
           </a:p>
@@ -10686,7 +11171,7 @@
     </p:spTree>
     <p:extLst>
       <p:ext uri="{BB962C8B-B14F-4D97-AF65-F5344CB8AC3E}">
-        <p14:creationId xmlns:p14="http://schemas.microsoft.com/office/powerpoint/2010/main" val="4217395637"/>
+        <p14:creationId xmlns:p14="http://schemas.microsoft.com/office/powerpoint/2010/main" val="1970035448"/>
       </p:ext>
     </p:extLst>
   </p:cSld>
@@ -10715,13 +11200,7 @@
       </p:grpSpPr>
       <p:sp>
         <p:nvSpPr>
-          <p:cNvPr id="2" name="Título 1">
-            <a:extLst>
-              <a:ext uri="{FF2B5EF4-FFF2-40B4-BE49-F238E27FC236}">
-                <a16:creationId xmlns:a16="http://schemas.microsoft.com/office/drawing/2014/main" xmlns="" id="{11BC2EE5-C8A9-A5C4-E79F-7ACA60564BF4}"/>
-              </a:ext>
-            </a:extLst>
-          </p:cNvPr>
+          <p:cNvPr id="2" name="Título 1"/>
           <p:cNvSpPr>
             <a:spLocks noGrp="1"/>
           </p:cNvSpPr>
@@ -10735,21 +11214,16 @@
           <a:lstStyle/>
           <a:p>
             <a:r>
-              <a:rPr lang="pt-BR" dirty="0"/>
-              <a:t>Temas dos seminários</a:t>
-            </a:r>
-          </a:p>
-        </p:txBody>
-      </p:sp>
-      <p:sp>
-        <p:nvSpPr>
-          <p:cNvPr id="3" name="Espaço Reservado para Conteúdo 2">
-            <a:extLst>
-              <a:ext uri="{FF2B5EF4-FFF2-40B4-BE49-F238E27FC236}">
-                <a16:creationId xmlns:a16="http://schemas.microsoft.com/office/drawing/2014/main" xmlns="" id="{F34E1E4B-4890-7308-FDD9-BCFBF68A4D2F}"/>
-              </a:ext>
-            </a:extLst>
-          </p:cNvPr>
+              <a:rPr lang="pt-BR" dirty="0" smtClean="0"/>
+              <a:t>Possíveis temas para os seminários</a:t>
+            </a:r>
+            <a:endParaRPr lang="pt-BR" dirty="0"/>
+          </a:p>
+        </p:txBody>
+      </p:sp>
+      <p:sp>
+        <p:nvSpPr>
+          <p:cNvPr id="3" name="Espaço Reservado para Conteúdo 2"/>
           <p:cNvSpPr>
             <a:spLocks noGrp="1"/>
           </p:cNvSpPr>
@@ -10757,231 +11231,37 @@
             <p:ph idx="1"/>
           </p:nvPr>
         </p:nvSpPr>
-        <p:spPr>
-          <a:xfrm>
-            <a:off x="838200" y="1825624"/>
-            <a:ext cx="11016344" cy="5032375"/>
-          </a:xfrm>
-        </p:spPr>
-        <p:txBody>
-          <a:bodyPr>
-            <a:normAutofit/>
-          </a:bodyPr>
+        <p:spPr/>
+        <p:txBody>
+          <a:bodyPr/>
           <a:lstStyle/>
           <a:p>
-            <a:r>
-              <a:rPr lang="pt-BR" dirty="0" err="1"/>
-              <a:t>Generative</a:t>
-            </a:r>
-            <a:r>
-              <a:rPr lang="pt-BR" dirty="0"/>
-              <a:t> </a:t>
-            </a:r>
-            <a:r>
-              <a:rPr lang="pt-BR" dirty="0" err="1"/>
-              <a:t>deep</a:t>
-            </a:r>
-            <a:r>
-              <a:rPr lang="pt-BR" dirty="0"/>
-              <a:t> learning: </a:t>
-            </a:r>
-            <a:r>
-              <a:rPr lang="pt-BR" dirty="0" err="1"/>
-              <a:t>Image</a:t>
-            </a:r>
-            <a:r>
-              <a:rPr lang="pt-BR" dirty="0"/>
-              <a:t> Generation</a:t>
-            </a:r>
-          </a:p>
-          <a:p>
-            <a:pPr lvl="1">
-              <a:buFont typeface="Wingdings" panose="05000000000000000000" pitchFamily="2" charset="2"/>
-              <a:buChar char="§"/>
-            </a:pPr>
-            <a:r>
-              <a:rPr lang="en-US" b="0" i="0" dirty="0" err="1">
-                <a:solidFill>
-                  <a:srgbClr val="000000"/>
-                </a:solidFill>
-                <a:effectLst/>
-              </a:rPr>
-              <a:t>OOTDiffusion</a:t>
-            </a:r>
-            <a:r>
-              <a:rPr lang="en-US" b="0" i="0" dirty="0">
-                <a:solidFill>
-                  <a:srgbClr val="000000"/>
-                </a:solidFill>
-                <a:effectLst/>
-              </a:rPr>
-              <a:t>: Outfitting Fusion based Latent Diffusion for Controllable Virtual Try-on</a:t>
-            </a:r>
-          </a:p>
-          <a:p>
-            <a:pPr lvl="2">
-              <a:buFont typeface="Wingdings" panose="05000000000000000000" pitchFamily="2" charset="2"/>
-              <a:buChar char="ü"/>
-            </a:pPr>
             <a:r>
               <a:rPr lang="pt-BR" dirty="0">
                 <a:hlinkClick r:id="rId2"/>
               </a:rPr>
-              <a:t>https://arxiv.org/abs/2403.01779</a:t>
-            </a:r>
-            <a:endParaRPr lang="en-US" dirty="0">
-              <a:solidFill>
-                <a:srgbClr val="000000"/>
-              </a:solidFill>
-              <a:latin typeface="Lato" panose="020F0502020204030203" pitchFamily="34" charset="0"/>
-            </a:endParaRPr>
-          </a:p>
-          <a:p>
-            <a:pPr lvl="2">
-              <a:buFont typeface="Wingdings" panose="05000000000000000000" pitchFamily="2" charset="2"/>
-              <a:buChar char="ü"/>
-            </a:pPr>
-            <a:r>
-              <a:rPr lang="pt-BR" dirty="0">
-                <a:hlinkClick r:id="rId3"/>
-              </a:rPr>
-              <a:t>https://paperswithcode.com/paper/ootdiffusion-outfitting-fusion-based-latent</a:t>
-            </a:r>
-            <a:endParaRPr lang="pt-BR" dirty="0"/>
-          </a:p>
-          <a:p>
-            <a:pPr lvl="1">
-              <a:buFont typeface="Wingdings" panose="05000000000000000000" pitchFamily="2" charset="2"/>
-              <a:buChar char="§"/>
-            </a:pPr>
-            <a:r>
-              <a:rPr lang="pt-BR" b="0" i="0" dirty="0">
-                <a:solidFill>
-                  <a:srgbClr val="000000"/>
-                </a:solidFill>
-                <a:effectLst/>
-              </a:rPr>
-              <a:t>V3D: </a:t>
-            </a:r>
-            <a:r>
-              <a:rPr lang="pt-BR" b="0" i="0" dirty="0" err="1">
-                <a:solidFill>
-                  <a:srgbClr val="000000"/>
-                </a:solidFill>
-                <a:effectLst/>
-              </a:rPr>
-              <a:t>Video</a:t>
-            </a:r>
-            <a:r>
-              <a:rPr lang="pt-BR" b="0" i="0" dirty="0">
-                <a:solidFill>
-                  <a:srgbClr val="000000"/>
-                </a:solidFill>
-                <a:effectLst/>
-              </a:rPr>
-              <a:t> </a:t>
-            </a:r>
-            <a:r>
-              <a:rPr lang="pt-BR" b="0" i="0" dirty="0" err="1">
-                <a:solidFill>
-                  <a:srgbClr val="000000"/>
-                </a:solidFill>
-                <a:effectLst/>
-              </a:rPr>
-              <a:t>Diffusion</a:t>
-            </a:r>
-            <a:r>
-              <a:rPr lang="pt-BR" b="0" i="0" dirty="0">
-                <a:solidFill>
-                  <a:srgbClr val="000000"/>
-                </a:solidFill>
-                <a:effectLst/>
-              </a:rPr>
-              <a:t> Models are </a:t>
-            </a:r>
-            <a:r>
-              <a:rPr lang="pt-BR" b="0" i="0" dirty="0" err="1">
-                <a:solidFill>
-                  <a:srgbClr val="000000"/>
-                </a:solidFill>
-                <a:effectLst/>
-              </a:rPr>
-              <a:t>Effective</a:t>
-            </a:r>
-            <a:r>
-              <a:rPr lang="pt-BR" b="0" i="0" dirty="0">
-                <a:solidFill>
-                  <a:srgbClr val="000000"/>
-                </a:solidFill>
-                <a:effectLst/>
-              </a:rPr>
-              <a:t> 3D </a:t>
-            </a:r>
-            <a:r>
-              <a:rPr lang="pt-BR" b="0" i="0" dirty="0" err="1">
-                <a:solidFill>
-                  <a:srgbClr val="000000"/>
-                </a:solidFill>
-                <a:effectLst/>
-              </a:rPr>
-              <a:t>Generators</a:t>
-            </a:r>
-            <a:endParaRPr lang="pt-BR" b="0" i="0" dirty="0">
-              <a:solidFill>
-                <a:srgbClr val="000000"/>
-              </a:solidFill>
-              <a:effectLst/>
-            </a:endParaRPr>
-          </a:p>
-          <a:p>
-            <a:pPr lvl="2">
-              <a:buFont typeface="Wingdings" panose="05000000000000000000" pitchFamily="2" charset="2"/>
-              <a:buChar char="ü"/>
-            </a:pPr>
-            <a:r>
-              <a:rPr lang="pt-BR" b="0" i="0" dirty="0">
-                <a:solidFill>
-                  <a:srgbClr val="000000"/>
-                </a:solidFill>
-                <a:effectLst/>
-                <a:hlinkClick r:id="rId4"/>
-              </a:rPr>
-              <a:t>https://arxiv.org/abs/2403.06738</a:t>
-            </a:r>
-            <a:endParaRPr lang="pt-BR" dirty="0">
-              <a:solidFill>
-                <a:srgbClr val="000000"/>
-              </a:solidFill>
-            </a:endParaRPr>
-          </a:p>
-          <a:p>
-            <a:pPr lvl="2">
-              <a:buFont typeface="Wingdings" panose="05000000000000000000" pitchFamily="2" charset="2"/>
-              <a:buChar char="ü"/>
-            </a:pPr>
-            <a:r>
-              <a:rPr lang="pt-BR" b="0" i="0" dirty="0">
-                <a:solidFill>
-                  <a:srgbClr val="000000"/>
-                </a:solidFill>
-                <a:effectLst/>
-                <a:hlinkClick r:id="rId5"/>
-              </a:rPr>
-              <a:t>https://paperswithcode.com/paper/v3d-video-diffusion-models-are-effective-3d</a:t>
-            </a:r>
-            <a:endParaRPr lang="pt-BR" b="0" i="0" dirty="0">
-              <a:solidFill>
-                <a:srgbClr val="000000"/>
-              </a:solidFill>
-              <a:effectLst/>
-            </a:endParaRPr>
+              <a:t>https://</a:t>
+            </a:r>
+            <a:r>
+              <a:rPr lang="pt-BR" dirty="0" smtClean="0">
+                <a:hlinkClick r:id="rId2"/>
+              </a:rPr>
+              <a:t>docs.google.com/spreadsheets/d/19mypFcuvkspJEsLo58qEa70MwIDpH1KOYqf0OcO_vLI/edit?usp=sharing</a:t>
+            </a:r>
+            <a:endParaRPr lang="pt-BR" dirty="0" smtClean="0"/>
+          </a:p>
+          <a:p>
+            <a:r>
+              <a:rPr lang="pt-BR" dirty="0" smtClean="0"/>
+              <a:t>Vocês podem propor outros temas, basta me enviar o artigo de interesse para avaliação.</a:t>
+            </a:r>
           </a:p>
         </p:txBody>
       </p:sp>
     </p:spTree>
     <p:extLst>
       <p:ext uri="{BB962C8B-B14F-4D97-AF65-F5344CB8AC3E}">
-        <p14:creationId xmlns:p14="http://schemas.microsoft.com/office/powerpoint/2010/main" val="310319255"/>
+        <p14:creationId xmlns:p14="http://schemas.microsoft.com/office/powerpoint/2010/main" val="3804457389"/>
       </p:ext>
     </p:extLst>
   </p:cSld>

--- a/slides/TP558_1_Introdução_ao_curso.pptx
+++ b/slides/TP558_1_Introdução_ao_curso.pptx
@@ -300,7 +300,7 @@
           <a:p>
             <a:fld id="{144F1436-6906-4D93-B7A2-786C327BFA14}" type="datetimeFigureOut">
               <a:rPr lang="nl-BE" smtClean="0"/>
-              <a:t>28/02/2026</a:t>
+              <a:t>1/03/2026</a:t>
             </a:fld>
             <a:endParaRPr lang="nl-BE"/>
           </a:p>
@@ -366,7 +366,7 @@
           <a:p>
             <a:fld id="{F7E56D9B-79AD-444A-AFED-DEC23408F8B4}" type="slidenum">
               <a:rPr lang="nl-BE" smtClean="0"/>
-              <a:t>‹nº›</a:t>
+              <a:t>‹#›</a:t>
             </a:fld>
             <a:endParaRPr lang="nl-BE"/>
           </a:p>
@@ -465,7 +465,7 @@
           <a:p>
             <a:fld id="{AA8CD09E-2914-4F47-B6C1-51B2C31814C9}" type="datetimeFigureOut">
               <a:rPr lang="pt-BR" smtClean="0"/>
-              <a:t>28/02/2026</a:t>
+              <a:t>01/03/2026</a:t>
             </a:fld>
             <a:endParaRPr lang="pt-BR"/>
           </a:p>
@@ -623,7 +623,7 @@
           <a:p>
             <a:fld id="{6FC8D850-966F-45A6-8DE7-15B891E7D40D}" type="slidenum">
               <a:rPr lang="pt-BR" smtClean="0"/>
-              <a:t>‹nº›</a:t>
+              <a:t>‹#›</a:t>
             </a:fld>
             <a:endParaRPr lang="pt-BR"/>
           </a:p>
@@ -1149,7 +1149,7 @@
           <a:lstStyle/>
           <a:p>
             <a:r>
-              <a:rPr lang="pt-BR" sz="1200" b="0" i="0" kern="1200" dirty="0" smtClean="0">
+              <a:rPr lang="pt-BR" sz="1200" b="0" i="0" kern="1200" dirty="0">
                 <a:solidFill>
                   <a:schemeClr val="tx1"/>
                 </a:solidFill>
@@ -1161,7 +1161,7 @@
               <a:t>são modelos computacionais inspirados no funcionamento do cérebro biológico. Elas processam informações usando </a:t>
             </a:r>
             <a:r>
-              <a:rPr lang="pt-BR" sz="1200" b="1" i="0" kern="1200" dirty="0" smtClean="0">
+              <a:rPr lang="pt-BR" sz="1200" b="1" i="0" kern="1200" dirty="0">
                 <a:solidFill>
                   <a:schemeClr val="tx1"/>
                 </a:solidFill>
@@ -1173,7 +1173,7 @@
               <a:t>pulsos discretos no tempo</a:t>
             </a:r>
             <a:r>
-              <a:rPr lang="pt-BR" sz="1200" b="0" i="0" kern="1200" dirty="0" smtClean="0">
+              <a:rPr lang="pt-BR" sz="1200" b="0" i="0" kern="1200" dirty="0">
                 <a:solidFill>
                   <a:schemeClr val="tx1"/>
                 </a:solidFill>
@@ -1185,7 +1185,7 @@
               <a:t> (</a:t>
             </a:r>
             <a:r>
-              <a:rPr lang="pt-BR" sz="1200" b="0" i="0" kern="1200" dirty="0" err="1" smtClean="0">
+              <a:rPr lang="pt-BR" sz="1200" b="0" i="0" kern="1200" dirty="0" err="1">
                 <a:solidFill>
                   <a:schemeClr val="tx1"/>
                 </a:solidFill>
@@ -1197,7 +1197,7 @@
               <a:t>spikes</a:t>
             </a:r>
             <a:r>
-              <a:rPr lang="pt-BR" sz="1200" b="0" i="0" kern="1200" dirty="0" smtClean="0">
+              <a:rPr lang="pt-BR" sz="1200" b="0" i="0" kern="1200" dirty="0">
                 <a:solidFill>
                   <a:schemeClr val="tx1"/>
                 </a:solidFill>
@@ -1209,7 +1209,7 @@
               <a:t>), imitando a comunicação entre neurônios reais. Sua principal utilidade está em cenários que exigem </a:t>
             </a:r>
             <a:r>
-              <a:rPr lang="pt-BR" sz="1200" b="1" i="0" kern="1200" dirty="0" smtClean="0">
+              <a:rPr lang="pt-BR" sz="1200" b="1" i="0" kern="1200" dirty="0">
                 <a:solidFill>
                   <a:schemeClr val="tx1"/>
                 </a:solidFill>
@@ -1221,7 +1221,7 @@
               <a:t>eficiência energética extrema</a:t>
             </a:r>
             <a:r>
-              <a:rPr lang="pt-BR" sz="1200" b="0" i="0" kern="1200" dirty="0" smtClean="0">
+              <a:rPr lang="pt-BR" sz="1200" b="0" i="0" kern="1200" dirty="0">
                 <a:solidFill>
                   <a:schemeClr val="tx1"/>
                 </a:solidFill>
@@ -1233,7 +1233,7 @@
               <a:t>, processamento de dados temporais e integração com hardware </a:t>
             </a:r>
             <a:r>
-              <a:rPr lang="pt-BR" sz="1200" b="0" i="0" kern="1200" dirty="0" err="1" smtClean="0">
+              <a:rPr lang="pt-BR" sz="1200" b="0" i="0" kern="1200" dirty="0" err="1">
                 <a:solidFill>
                   <a:schemeClr val="tx1"/>
                 </a:solidFill>
@@ -1245,7 +1245,7 @@
               <a:t>neuromórfico</a:t>
             </a:r>
             <a:r>
-              <a:rPr lang="pt-BR" sz="1200" b="0" i="0" kern="1200" dirty="0" smtClean="0">
+              <a:rPr lang="pt-BR" sz="1200" b="0" i="0" kern="1200" dirty="0">
                 <a:solidFill>
                   <a:schemeClr val="tx1"/>
                 </a:solidFill>
@@ -1341,7 +1341,7 @@
           <a:lstStyle/>
           <a:p>
             <a:r>
-              <a:rPr lang="en-US" sz="1200" b="0" i="0" kern="1200" dirty="0" smtClean="0">
+              <a:rPr lang="en-US" sz="1200" b="0" i="0" kern="1200" dirty="0">
                 <a:solidFill>
                   <a:schemeClr val="tx1"/>
                 </a:solidFill>
@@ -1414,7 +1414,7 @@
           <p:cNvPr id="2" name="Título 1">
             <a:extLst>
               <a:ext uri="{FF2B5EF4-FFF2-40B4-BE49-F238E27FC236}">
-                <a16:creationId xmlns="" xmlns:a16="http://schemas.microsoft.com/office/drawing/2014/main" id="{1DB9B4FF-B06E-403C-A326-BDC64D8FF94E}"/>
+                <a16:creationId xmlns:a16="http://schemas.microsoft.com/office/drawing/2014/main" id="{1DB9B4FF-B06E-403C-A326-BDC64D8FF94E}"/>
               </a:ext>
             </a:extLst>
           </p:cNvPr>
@@ -1451,7 +1451,7 @@
           <p:cNvPr id="3" name="Subtítulo 2">
             <a:extLst>
               <a:ext uri="{FF2B5EF4-FFF2-40B4-BE49-F238E27FC236}">
-                <a16:creationId xmlns="" xmlns:a16="http://schemas.microsoft.com/office/drawing/2014/main" id="{247BDFCE-746E-45BF-A319-4733D58D1632}"/>
+                <a16:creationId xmlns:a16="http://schemas.microsoft.com/office/drawing/2014/main" id="{247BDFCE-746E-45BF-A319-4733D58D1632}"/>
               </a:ext>
             </a:extLst>
           </p:cNvPr>
@@ -1521,7 +1521,7 @@
           <p:cNvPr id="4" name="Espaço Reservado para Data 3">
             <a:extLst>
               <a:ext uri="{FF2B5EF4-FFF2-40B4-BE49-F238E27FC236}">
-                <a16:creationId xmlns="" xmlns:a16="http://schemas.microsoft.com/office/drawing/2014/main" id="{9EDE2778-5372-4104-B96D-968184DA8288}"/>
+                <a16:creationId xmlns:a16="http://schemas.microsoft.com/office/drawing/2014/main" id="{9EDE2778-5372-4104-B96D-968184DA8288}"/>
               </a:ext>
             </a:extLst>
           </p:cNvPr>
@@ -1539,7 +1539,7 @@
           <a:p>
             <a:fld id="{63289F7E-B80B-496E-81B4-D396C37C9454}" type="datetimeFigureOut">
               <a:rPr lang="pt-BR" smtClean="0"/>
-              <a:t>28/02/2026</a:t>
+              <a:t>01/03/2026</a:t>
             </a:fld>
             <a:endParaRPr lang="pt-BR"/>
           </a:p>
@@ -1550,7 +1550,7 @@
           <p:cNvPr id="5" name="Espaço Reservado para Rodapé 4">
             <a:extLst>
               <a:ext uri="{FF2B5EF4-FFF2-40B4-BE49-F238E27FC236}">
-                <a16:creationId xmlns="" xmlns:a16="http://schemas.microsoft.com/office/drawing/2014/main" id="{C1DD0F41-C861-4051-988D-3024A37A4B93}"/>
+                <a16:creationId xmlns:a16="http://schemas.microsoft.com/office/drawing/2014/main" id="{C1DD0F41-C861-4051-988D-3024A37A4B93}"/>
               </a:ext>
             </a:extLst>
           </p:cNvPr>
@@ -1575,7 +1575,7 @@
           <p:cNvPr id="6" name="Espaço Reservado para Número de Slide 5">
             <a:extLst>
               <a:ext uri="{FF2B5EF4-FFF2-40B4-BE49-F238E27FC236}">
-                <a16:creationId xmlns="" xmlns:a16="http://schemas.microsoft.com/office/drawing/2014/main" id="{07E5967E-D980-431A-A5DB-3F0C5030A81E}"/>
+                <a16:creationId xmlns:a16="http://schemas.microsoft.com/office/drawing/2014/main" id="{07E5967E-D980-431A-A5DB-3F0C5030A81E}"/>
               </a:ext>
             </a:extLst>
           </p:cNvPr>
@@ -1593,7 +1593,7 @@
           <a:p>
             <a:fld id="{1A7E88B7-70CE-4035-AE73-13FA6FB985D4}" type="slidenum">
               <a:rPr lang="pt-BR" smtClean="0"/>
-              <a:t>‹nº›</a:t>
+              <a:t>‹#›</a:t>
             </a:fld>
             <a:endParaRPr lang="pt-BR"/>
           </a:p>
@@ -1634,7 +1634,7 @@
           <p:cNvPr id="2" name="Título 1">
             <a:extLst>
               <a:ext uri="{FF2B5EF4-FFF2-40B4-BE49-F238E27FC236}">
-                <a16:creationId xmlns="" xmlns:a16="http://schemas.microsoft.com/office/drawing/2014/main" id="{9036C49F-3E68-4175-81BA-3C3FEE44308A}"/>
+                <a16:creationId xmlns:a16="http://schemas.microsoft.com/office/drawing/2014/main" id="{9036C49F-3E68-4175-81BA-3C3FEE44308A}"/>
               </a:ext>
             </a:extLst>
           </p:cNvPr>
@@ -1662,7 +1662,7 @@
           <p:cNvPr id="3" name="Espaço Reservado para Texto Vertical 2">
             <a:extLst>
               <a:ext uri="{FF2B5EF4-FFF2-40B4-BE49-F238E27FC236}">
-                <a16:creationId xmlns="" xmlns:a16="http://schemas.microsoft.com/office/drawing/2014/main" id="{426FA736-3DD3-4D4E-B57B-BBE1D8F7D424}"/>
+                <a16:creationId xmlns:a16="http://schemas.microsoft.com/office/drawing/2014/main" id="{426FA736-3DD3-4D4E-B57B-BBE1D8F7D424}"/>
               </a:ext>
             </a:extLst>
           </p:cNvPr>
@@ -1719,7 +1719,7 @@
           <p:cNvPr id="4" name="Espaço Reservado para Data 3">
             <a:extLst>
               <a:ext uri="{FF2B5EF4-FFF2-40B4-BE49-F238E27FC236}">
-                <a16:creationId xmlns="" xmlns:a16="http://schemas.microsoft.com/office/drawing/2014/main" id="{99E8855C-D8FD-48F6-B14E-861E0DE4D915}"/>
+                <a16:creationId xmlns:a16="http://schemas.microsoft.com/office/drawing/2014/main" id="{99E8855C-D8FD-48F6-B14E-861E0DE4D915}"/>
               </a:ext>
             </a:extLst>
           </p:cNvPr>
@@ -1737,7 +1737,7 @@
           <a:p>
             <a:fld id="{63289F7E-B80B-496E-81B4-D396C37C9454}" type="datetimeFigureOut">
               <a:rPr lang="pt-BR" smtClean="0"/>
-              <a:t>28/02/2026</a:t>
+              <a:t>01/03/2026</a:t>
             </a:fld>
             <a:endParaRPr lang="pt-BR"/>
           </a:p>
@@ -1748,7 +1748,7 @@
           <p:cNvPr id="5" name="Espaço Reservado para Rodapé 4">
             <a:extLst>
               <a:ext uri="{FF2B5EF4-FFF2-40B4-BE49-F238E27FC236}">
-                <a16:creationId xmlns="" xmlns:a16="http://schemas.microsoft.com/office/drawing/2014/main" id="{97C0BB88-2F21-42A5-ACFF-83DA47F2D340}"/>
+                <a16:creationId xmlns:a16="http://schemas.microsoft.com/office/drawing/2014/main" id="{97C0BB88-2F21-42A5-ACFF-83DA47F2D340}"/>
               </a:ext>
             </a:extLst>
           </p:cNvPr>
@@ -1773,7 +1773,7 @@
           <p:cNvPr id="6" name="Espaço Reservado para Número de Slide 5">
             <a:extLst>
               <a:ext uri="{FF2B5EF4-FFF2-40B4-BE49-F238E27FC236}">
-                <a16:creationId xmlns="" xmlns:a16="http://schemas.microsoft.com/office/drawing/2014/main" id="{6CB462B3-1F22-4C05-B4B8-7A279FB7D5E9}"/>
+                <a16:creationId xmlns:a16="http://schemas.microsoft.com/office/drawing/2014/main" id="{6CB462B3-1F22-4C05-B4B8-7A279FB7D5E9}"/>
               </a:ext>
             </a:extLst>
           </p:cNvPr>
@@ -1791,7 +1791,7 @@
           <a:p>
             <a:fld id="{1A7E88B7-70CE-4035-AE73-13FA6FB985D4}" type="slidenum">
               <a:rPr lang="pt-BR" smtClean="0"/>
-              <a:t>‹nº›</a:t>
+              <a:t>‹#›</a:t>
             </a:fld>
             <a:endParaRPr lang="pt-BR"/>
           </a:p>
@@ -1832,7 +1832,7 @@
           <p:cNvPr id="2" name="Título Vertical 1">
             <a:extLst>
               <a:ext uri="{FF2B5EF4-FFF2-40B4-BE49-F238E27FC236}">
-                <a16:creationId xmlns="" xmlns:a16="http://schemas.microsoft.com/office/drawing/2014/main" id="{EAEAB728-701C-4207-A9D5-23FF45C60502}"/>
+                <a16:creationId xmlns:a16="http://schemas.microsoft.com/office/drawing/2014/main" id="{EAEAB728-701C-4207-A9D5-23FF45C60502}"/>
               </a:ext>
             </a:extLst>
           </p:cNvPr>
@@ -1865,7 +1865,7 @@
           <p:cNvPr id="3" name="Espaço Reservado para Texto Vertical 2">
             <a:extLst>
               <a:ext uri="{FF2B5EF4-FFF2-40B4-BE49-F238E27FC236}">
-                <a16:creationId xmlns="" xmlns:a16="http://schemas.microsoft.com/office/drawing/2014/main" id="{BA8C8CCF-7823-480A-9A19-0F664DD17E3B}"/>
+                <a16:creationId xmlns:a16="http://schemas.microsoft.com/office/drawing/2014/main" id="{BA8C8CCF-7823-480A-9A19-0F664DD17E3B}"/>
               </a:ext>
             </a:extLst>
           </p:cNvPr>
@@ -1927,7 +1927,7 @@
           <p:cNvPr id="4" name="Espaço Reservado para Data 3">
             <a:extLst>
               <a:ext uri="{FF2B5EF4-FFF2-40B4-BE49-F238E27FC236}">
-                <a16:creationId xmlns="" xmlns:a16="http://schemas.microsoft.com/office/drawing/2014/main" id="{721D5734-7B1F-425D-942F-6EB73344027C}"/>
+                <a16:creationId xmlns:a16="http://schemas.microsoft.com/office/drawing/2014/main" id="{721D5734-7B1F-425D-942F-6EB73344027C}"/>
               </a:ext>
             </a:extLst>
           </p:cNvPr>
@@ -1945,7 +1945,7 @@
           <a:p>
             <a:fld id="{63289F7E-B80B-496E-81B4-D396C37C9454}" type="datetimeFigureOut">
               <a:rPr lang="pt-BR" smtClean="0"/>
-              <a:t>28/02/2026</a:t>
+              <a:t>01/03/2026</a:t>
             </a:fld>
             <a:endParaRPr lang="pt-BR"/>
           </a:p>
@@ -1956,7 +1956,7 @@
           <p:cNvPr id="5" name="Espaço Reservado para Rodapé 4">
             <a:extLst>
               <a:ext uri="{FF2B5EF4-FFF2-40B4-BE49-F238E27FC236}">
-                <a16:creationId xmlns="" xmlns:a16="http://schemas.microsoft.com/office/drawing/2014/main" id="{1E1AAEAC-F08D-45FE-89EC-B1B349A868C9}"/>
+                <a16:creationId xmlns:a16="http://schemas.microsoft.com/office/drawing/2014/main" id="{1E1AAEAC-F08D-45FE-89EC-B1B349A868C9}"/>
               </a:ext>
             </a:extLst>
           </p:cNvPr>
@@ -1981,7 +1981,7 @@
           <p:cNvPr id="6" name="Espaço Reservado para Número de Slide 5">
             <a:extLst>
               <a:ext uri="{FF2B5EF4-FFF2-40B4-BE49-F238E27FC236}">
-                <a16:creationId xmlns="" xmlns:a16="http://schemas.microsoft.com/office/drawing/2014/main" id="{BAA44493-9911-47B2-87A6-C2141A972BC8}"/>
+                <a16:creationId xmlns:a16="http://schemas.microsoft.com/office/drawing/2014/main" id="{BAA44493-9911-47B2-87A6-C2141A972BC8}"/>
               </a:ext>
             </a:extLst>
           </p:cNvPr>
@@ -1999,7 +1999,7 @@
           <a:p>
             <a:fld id="{1A7E88B7-70CE-4035-AE73-13FA6FB985D4}" type="slidenum">
               <a:rPr lang="pt-BR" smtClean="0"/>
-              <a:t>‹nº›</a:t>
+              <a:t>‹#›</a:t>
             </a:fld>
             <a:endParaRPr lang="pt-BR"/>
           </a:p>
@@ -2040,7 +2040,7 @@
           <p:cNvPr id="2" name="Título 1">
             <a:extLst>
               <a:ext uri="{FF2B5EF4-FFF2-40B4-BE49-F238E27FC236}">
-                <a16:creationId xmlns="" xmlns:a16="http://schemas.microsoft.com/office/drawing/2014/main" id="{71BD44A5-8F21-4626-A01D-48A1C874B1D5}"/>
+                <a16:creationId xmlns:a16="http://schemas.microsoft.com/office/drawing/2014/main" id="{71BD44A5-8F21-4626-A01D-48A1C874B1D5}"/>
               </a:ext>
             </a:extLst>
           </p:cNvPr>
@@ -2068,7 +2068,7 @@
           <p:cNvPr id="3" name="Espaço Reservado para Conteúdo 2">
             <a:extLst>
               <a:ext uri="{FF2B5EF4-FFF2-40B4-BE49-F238E27FC236}">
-                <a16:creationId xmlns="" xmlns:a16="http://schemas.microsoft.com/office/drawing/2014/main" id="{B79E8085-65A9-48AA-951D-71D978BFF4ED}"/>
+                <a16:creationId xmlns:a16="http://schemas.microsoft.com/office/drawing/2014/main" id="{B79E8085-65A9-48AA-951D-71D978BFF4ED}"/>
               </a:ext>
             </a:extLst>
           </p:cNvPr>
@@ -2125,7 +2125,7 @@
           <p:cNvPr id="4" name="Espaço Reservado para Data 3">
             <a:extLst>
               <a:ext uri="{FF2B5EF4-FFF2-40B4-BE49-F238E27FC236}">
-                <a16:creationId xmlns="" xmlns:a16="http://schemas.microsoft.com/office/drawing/2014/main" id="{F05BE1AF-51EA-425D-B188-DE7BD675009F}"/>
+                <a16:creationId xmlns:a16="http://schemas.microsoft.com/office/drawing/2014/main" id="{F05BE1AF-51EA-425D-B188-DE7BD675009F}"/>
               </a:ext>
             </a:extLst>
           </p:cNvPr>
@@ -2143,7 +2143,7 @@
           <a:p>
             <a:fld id="{63289F7E-B80B-496E-81B4-D396C37C9454}" type="datetimeFigureOut">
               <a:rPr lang="pt-BR" smtClean="0"/>
-              <a:t>28/02/2026</a:t>
+              <a:t>01/03/2026</a:t>
             </a:fld>
             <a:endParaRPr lang="pt-BR"/>
           </a:p>
@@ -2154,7 +2154,7 @@
           <p:cNvPr id="5" name="Espaço Reservado para Rodapé 4">
             <a:extLst>
               <a:ext uri="{FF2B5EF4-FFF2-40B4-BE49-F238E27FC236}">
-                <a16:creationId xmlns="" xmlns:a16="http://schemas.microsoft.com/office/drawing/2014/main" id="{121BE632-29CF-4CB9-B365-C9EF38F89BE6}"/>
+                <a16:creationId xmlns:a16="http://schemas.microsoft.com/office/drawing/2014/main" id="{121BE632-29CF-4CB9-B365-C9EF38F89BE6}"/>
               </a:ext>
             </a:extLst>
           </p:cNvPr>
@@ -2179,7 +2179,7 @@
           <p:cNvPr id="6" name="Espaço Reservado para Número de Slide 5">
             <a:extLst>
               <a:ext uri="{FF2B5EF4-FFF2-40B4-BE49-F238E27FC236}">
-                <a16:creationId xmlns="" xmlns:a16="http://schemas.microsoft.com/office/drawing/2014/main" id="{60CF3DD1-9AEC-4A57-B461-4E4DD86FAC18}"/>
+                <a16:creationId xmlns:a16="http://schemas.microsoft.com/office/drawing/2014/main" id="{60CF3DD1-9AEC-4A57-B461-4E4DD86FAC18}"/>
               </a:ext>
             </a:extLst>
           </p:cNvPr>
@@ -2197,7 +2197,7 @@
           <a:p>
             <a:fld id="{1A7E88B7-70CE-4035-AE73-13FA6FB985D4}" type="slidenum">
               <a:rPr lang="pt-BR" smtClean="0"/>
-              <a:t>‹nº›</a:t>
+              <a:t>‹#›</a:t>
             </a:fld>
             <a:endParaRPr lang="pt-BR"/>
           </a:p>
@@ -2238,7 +2238,7 @@
           <p:cNvPr id="2" name="Título 1">
             <a:extLst>
               <a:ext uri="{FF2B5EF4-FFF2-40B4-BE49-F238E27FC236}">
-                <a16:creationId xmlns="" xmlns:a16="http://schemas.microsoft.com/office/drawing/2014/main" id="{34AB2FF0-A4D7-4E28-991D-FF26140D5988}"/>
+                <a16:creationId xmlns:a16="http://schemas.microsoft.com/office/drawing/2014/main" id="{34AB2FF0-A4D7-4E28-991D-FF26140D5988}"/>
               </a:ext>
             </a:extLst>
           </p:cNvPr>
@@ -2275,7 +2275,7 @@
           <p:cNvPr id="3" name="Espaço Reservado para Texto 2">
             <a:extLst>
               <a:ext uri="{FF2B5EF4-FFF2-40B4-BE49-F238E27FC236}">
-                <a16:creationId xmlns="" xmlns:a16="http://schemas.microsoft.com/office/drawing/2014/main" id="{E2AC45B0-4145-40DB-8E61-105461170604}"/>
+                <a16:creationId xmlns:a16="http://schemas.microsoft.com/office/drawing/2014/main" id="{E2AC45B0-4145-40DB-8E61-105461170604}"/>
               </a:ext>
             </a:extLst>
           </p:cNvPr>
@@ -2400,7 +2400,7 @@
           <p:cNvPr id="4" name="Espaço Reservado para Data 3">
             <a:extLst>
               <a:ext uri="{FF2B5EF4-FFF2-40B4-BE49-F238E27FC236}">
-                <a16:creationId xmlns="" xmlns:a16="http://schemas.microsoft.com/office/drawing/2014/main" id="{50F1D3FB-740A-4EBA-A309-2CE71D12ECFB}"/>
+                <a16:creationId xmlns:a16="http://schemas.microsoft.com/office/drawing/2014/main" id="{50F1D3FB-740A-4EBA-A309-2CE71D12ECFB}"/>
               </a:ext>
             </a:extLst>
           </p:cNvPr>
@@ -2418,7 +2418,7 @@
           <a:p>
             <a:fld id="{63289F7E-B80B-496E-81B4-D396C37C9454}" type="datetimeFigureOut">
               <a:rPr lang="pt-BR" smtClean="0"/>
-              <a:t>28/02/2026</a:t>
+              <a:t>01/03/2026</a:t>
             </a:fld>
             <a:endParaRPr lang="pt-BR"/>
           </a:p>
@@ -2429,7 +2429,7 @@
           <p:cNvPr id="5" name="Espaço Reservado para Rodapé 4">
             <a:extLst>
               <a:ext uri="{FF2B5EF4-FFF2-40B4-BE49-F238E27FC236}">
-                <a16:creationId xmlns="" xmlns:a16="http://schemas.microsoft.com/office/drawing/2014/main" id="{BDCAB18F-8715-4465-A940-F9C193A2ACE9}"/>
+                <a16:creationId xmlns:a16="http://schemas.microsoft.com/office/drawing/2014/main" id="{BDCAB18F-8715-4465-A940-F9C193A2ACE9}"/>
               </a:ext>
             </a:extLst>
           </p:cNvPr>
@@ -2454,7 +2454,7 @@
           <p:cNvPr id="6" name="Espaço Reservado para Número de Slide 5">
             <a:extLst>
               <a:ext uri="{FF2B5EF4-FFF2-40B4-BE49-F238E27FC236}">
-                <a16:creationId xmlns="" xmlns:a16="http://schemas.microsoft.com/office/drawing/2014/main" id="{353466C6-8248-429F-8056-FF040BF509EB}"/>
+                <a16:creationId xmlns:a16="http://schemas.microsoft.com/office/drawing/2014/main" id="{353466C6-8248-429F-8056-FF040BF509EB}"/>
               </a:ext>
             </a:extLst>
           </p:cNvPr>
@@ -2472,7 +2472,7 @@
           <a:p>
             <a:fld id="{1A7E88B7-70CE-4035-AE73-13FA6FB985D4}" type="slidenum">
               <a:rPr lang="pt-BR" smtClean="0"/>
-              <a:t>‹nº›</a:t>
+              <a:t>‹#›</a:t>
             </a:fld>
             <a:endParaRPr lang="pt-BR"/>
           </a:p>
@@ -2513,7 +2513,7 @@
           <p:cNvPr id="2" name="Título 1">
             <a:extLst>
               <a:ext uri="{FF2B5EF4-FFF2-40B4-BE49-F238E27FC236}">
-                <a16:creationId xmlns="" xmlns:a16="http://schemas.microsoft.com/office/drawing/2014/main" id="{BC7BB9F0-F14B-4A91-B2B7-35BC47FE4DE7}"/>
+                <a16:creationId xmlns:a16="http://schemas.microsoft.com/office/drawing/2014/main" id="{BC7BB9F0-F14B-4A91-B2B7-35BC47FE4DE7}"/>
               </a:ext>
             </a:extLst>
           </p:cNvPr>
@@ -2541,7 +2541,7 @@
           <p:cNvPr id="3" name="Espaço Reservado para Conteúdo 2">
             <a:extLst>
               <a:ext uri="{FF2B5EF4-FFF2-40B4-BE49-F238E27FC236}">
-                <a16:creationId xmlns="" xmlns:a16="http://schemas.microsoft.com/office/drawing/2014/main" id="{EC1FC1C4-73DA-47A6-8496-B0B457F7D39A}"/>
+                <a16:creationId xmlns:a16="http://schemas.microsoft.com/office/drawing/2014/main" id="{EC1FC1C4-73DA-47A6-8496-B0B457F7D39A}"/>
               </a:ext>
             </a:extLst>
           </p:cNvPr>
@@ -2603,7 +2603,7 @@
           <p:cNvPr id="4" name="Espaço Reservado para Conteúdo 3">
             <a:extLst>
               <a:ext uri="{FF2B5EF4-FFF2-40B4-BE49-F238E27FC236}">
-                <a16:creationId xmlns="" xmlns:a16="http://schemas.microsoft.com/office/drawing/2014/main" id="{E92F06A8-A449-4D92-9912-76873E529B38}"/>
+                <a16:creationId xmlns:a16="http://schemas.microsoft.com/office/drawing/2014/main" id="{E92F06A8-A449-4D92-9912-76873E529B38}"/>
               </a:ext>
             </a:extLst>
           </p:cNvPr>
@@ -2665,7 +2665,7 @@
           <p:cNvPr id="5" name="Espaço Reservado para Data 4">
             <a:extLst>
               <a:ext uri="{FF2B5EF4-FFF2-40B4-BE49-F238E27FC236}">
-                <a16:creationId xmlns="" xmlns:a16="http://schemas.microsoft.com/office/drawing/2014/main" id="{938070A4-BC2F-4D55-BD8D-DEAF11BB9EE9}"/>
+                <a16:creationId xmlns:a16="http://schemas.microsoft.com/office/drawing/2014/main" id="{938070A4-BC2F-4D55-BD8D-DEAF11BB9EE9}"/>
               </a:ext>
             </a:extLst>
           </p:cNvPr>
@@ -2683,7 +2683,7 @@
           <a:p>
             <a:fld id="{63289F7E-B80B-496E-81B4-D396C37C9454}" type="datetimeFigureOut">
               <a:rPr lang="pt-BR" smtClean="0"/>
-              <a:t>28/02/2026</a:t>
+              <a:t>01/03/2026</a:t>
             </a:fld>
             <a:endParaRPr lang="pt-BR"/>
           </a:p>
@@ -2694,7 +2694,7 @@
           <p:cNvPr id="6" name="Espaço Reservado para Rodapé 5">
             <a:extLst>
               <a:ext uri="{FF2B5EF4-FFF2-40B4-BE49-F238E27FC236}">
-                <a16:creationId xmlns="" xmlns:a16="http://schemas.microsoft.com/office/drawing/2014/main" id="{45CC2DB8-844A-465F-BA9A-7734C80C7F43}"/>
+                <a16:creationId xmlns:a16="http://schemas.microsoft.com/office/drawing/2014/main" id="{45CC2DB8-844A-465F-BA9A-7734C80C7F43}"/>
               </a:ext>
             </a:extLst>
           </p:cNvPr>
@@ -2719,7 +2719,7 @@
           <p:cNvPr id="7" name="Espaço Reservado para Número de Slide 6">
             <a:extLst>
               <a:ext uri="{FF2B5EF4-FFF2-40B4-BE49-F238E27FC236}">
-                <a16:creationId xmlns="" xmlns:a16="http://schemas.microsoft.com/office/drawing/2014/main" id="{4CC606A8-097B-4040-94E0-CD8C88280D8F}"/>
+                <a16:creationId xmlns:a16="http://schemas.microsoft.com/office/drawing/2014/main" id="{4CC606A8-097B-4040-94E0-CD8C88280D8F}"/>
               </a:ext>
             </a:extLst>
           </p:cNvPr>
@@ -2737,7 +2737,7 @@
           <a:p>
             <a:fld id="{1A7E88B7-70CE-4035-AE73-13FA6FB985D4}" type="slidenum">
               <a:rPr lang="pt-BR" smtClean="0"/>
-              <a:t>‹nº›</a:t>
+              <a:t>‹#›</a:t>
             </a:fld>
             <a:endParaRPr lang="pt-BR"/>
           </a:p>
@@ -2778,7 +2778,7 @@
           <p:cNvPr id="2" name="Título 1">
             <a:extLst>
               <a:ext uri="{FF2B5EF4-FFF2-40B4-BE49-F238E27FC236}">
-                <a16:creationId xmlns="" xmlns:a16="http://schemas.microsoft.com/office/drawing/2014/main" id="{76D66686-0143-4CB6-8C09-BA326F1E7ACA}"/>
+                <a16:creationId xmlns:a16="http://schemas.microsoft.com/office/drawing/2014/main" id="{76D66686-0143-4CB6-8C09-BA326F1E7ACA}"/>
               </a:ext>
             </a:extLst>
           </p:cNvPr>
@@ -2811,7 +2811,7 @@
           <p:cNvPr id="3" name="Espaço Reservado para Texto 2">
             <a:extLst>
               <a:ext uri="{FF2B5EF4-FFF2-40B4-BE49-F238E27FC236}">
-                <a16:creationId xmlns="" xmlns:a16="http://schemas.microsoft.com/office/drawing/2014/main" id="{0227AB85-F59E-4BCE-B846-4FA0992C2F23}"/>
+                <a16:creationId xmlns:a16="http://schemas.microsoft.com/office/drawing/2014/main" id="{0227AB85-F59E-4BCE-B846-4FA0992C2F23}"/>
               </a:ext>
             </a:extLst>
           </p:cNvPr>
@@ -2882,7 +2882,7 @@
           <p:cNvPr id="4" name="Espaço Reservado para Conteúdo 3">
             <a:extLst>
               <a:ext uri="{FF2B5EF4-FFF2-40B4-BE49-F238E27FC236}">
-                <a16:creationId xmlns="" xmlns:a16="http://schemas.microsoft.com/office/drawing/2014/main" id="{3373456C-7319-4D0A-827D-D29F6B083F5D}"/>
+                <a16:creationId xmlns:a16="http://schemas.microsoft.com/office/drawing/2014/main" id="{3373456C-7319-4D0A-827D-D29F6B083F5D}"/>
               </a:ext>
             </a:extLst>
           </p:cNvPr>
@@ -2944,7 +2944,7 @@
           <p:cNvPr id="5" name="Espaço Reservado para Texto 4">
             <a:extLst>
               <a:ext uri="{FF2B5EF4-FFF2-40B4-BE49-F238E27FC236}">
-                <a16:creationId xmlns="" xmlns:a16="http://schemas.microsoft.com/office/drawing/2014/main" id="{4CD109D0-2E83-4262-8029-A871CEC47406}"/>
+                <a16:creationId xmlns:a16="http://schemas.microsoft.com/office/drawing/2014/main" id="{4CD109D0-2E83-4262-8029-A871CEC47406}"/>
               </a:ext>
             </a:extLst>
           </p:cNvPr>
@@ -3015,7 +3015,7 @@
           <p:cNvPr id="6" name="Espaço Reservado para Conteúdo 5">
             <a:extLst>
               <a:ext uri="{FF2B5EF4-FFF2-40B4-BE49-F238E27FC236}">
-                <a16:creationId xmlns="" xmlns:a16="http://schemas.microsoft.com/office/drawing/2014/main" id="{AD706E3A-CFBB-4A6C-A65F-D0360A9E74FE}"/>
+                <a16:creationId xmlns:a16="http://schemas.microsoft.com/office/drawing/2014/main" id="{AD706E3A-CFBB-4A6C-A65F-D0360A9E74FE}"/>
               </a:ext>
             </a:extLst>
           </p:cNvPr>
@@ -3077,7 +3077,7 @@
           <p:cNvPr id="7" name="Espaço Reservado para Data 6">
             <a:extLst>
               <a:ext uri="{FF2B5EF4-FFF2-40B4-BE49-F238E27FC236}">
-                <a16:creationId xmlns="" xmlns:a16="http://schemas.microsoft.com/office/drawing/2014/main" id="{4172C0E5-5AF0-4805-BB51-443733CD2BD5}"/>
+                <a16:creationId xmlns:a16="http://schemas.microsoft.com/office/drawing/2014/main" id="{4172C0E5-5AF0-4805-BB51-443733CD2BD5}"/>
               </a:ext>
             </a:extLst>
           </p:cNvPr>
@@ -3095,7 +3095,7 @@
           <a:p>
             <a:fld id="{63289F7E-B80B-496E-81B4-D396C37C9454}" type="datetimeFigureOut">
               <a:rPr lang="pt-BR" smtClean="0"/>
-              <a:t>28/02/2026</a:t>
+              <a:t>01/03/2026</a:t>
             </a:fld>
             <a:endParaRPr lang="pt-BR"/>
           </a:p>
@@ -3106,7 +3106,7 @@
           <p:cNvPr id="8" name="Espaço Reservado para Rodapé 7">
             <a:extLst>
               <a:ext uri="{FF2B5EF4-FFF2-40B4-BE49-F238E27FC236}">
-                <a16:creationId xmlns="" xmlns:a16="http://schemas.microsoft.com/office/drawing/2014/main" id="{0E801648-156F-497E-99CF-797DF48051E1}"/>
+                <a16:creationId xmlns:a16="http://schemas.microsoft.com/office/drawing/2014/main" id="{0E801648-156F-497E-99CF-797DF48051E1}"/>
               </a:ext>
             </a:extLst>
           </p:cNvPr>
@@ -3131,7 +3131,7 @@
           <p:cNvPr id="9" name="Espaço Reservado para Número de Slide 8">
             <a:extLst>
               <a:ext uri="{FF2B5EF4-FFF2-40B4-BE49-F238E27FC236}">
-                <a16:creationId xmlns="" xmlns:a16="http://schemas.microsoft.com/office/drawing/2014/main" id="{EEE23D32-80E7-4796-A137-66BF842E4B53}"/>
+                <a16:creationId xmlns:a16="http://schemas.microsoft.com/office/drawing/2014/main" id="{EEE23D32-80E7-4796-A137-66BF842E4B53}"/>
               </a:ext>
             </a:extLst>
           </p:cNvPr>
@@ -3149,7 +3149,7 @@
           <a:p>
             <a:fld id="{1A7E88B7-70CE-4035-AE73-13FA6FB985D4}" type="slidenum">
               <a:rPr lang="pt-BR" smtClean="0"/>
-              <a:t>‹nº›</a:t>
+              <a:t>‹#›</a:t>
             </a:fld>
             <a:endParaRPr lang="pt-BR"/>
           </a:p>
@@ -3190,7 +3190,7 @@
           <p:cNvPr id="2" name="Título 1">
             <a:extLst>
               <a:ext uri="{FF2B5EF4-FFF2-40B4-BE49-F238E27FC236}">
-                <a16:creationId xmlns="" xmlns:a16="http://schemas.microsoft.com/office/drawing/2014/main" id="{2BCE2379-C78F-47E1-8CFC-B846E7AF148D}"/>
+                <a16:creationId xmlns:a16="http://schemas.microsoft.com/office/drawing/2014/main" id="{2BCE2379-C78F-47E1-8CFC-B846E7AF148D}"/>
               </a:ext>
             </a:extLst>
           </p:cNvPr>
@@ -3218,7 +3218,7 @@
           <p:cNvPr id="3" name="Espaço Reservado para Data 2">
             <a:extLst>
               <a:ext uri="{FF2B5EF4-FFF2-40B4-BE49-F238E27FC236}">
-                <a16:creationId xmlns="" xmlns:a16="http://schemas.microsoft.com/office/drawing/2014/main" id="{342600A9-7F92-4E22-9D94-E4717252A817}"/>
+                <a16:creationId xmlns:a16="http://schemas.microsoft.com/office/drawing/2014/main" id="{342600A9-7F92-4E22-9D94-E4717252A817}"/>
               </a:ext>
             </a:extLst>
           </p:cNvPr>
@@ -3236,7 +3236,7 @@
           <a:p>
             <a:fld id="{63289F7E-B80B-496E-81B4-D396C37C9454}" type="datetimeFigureOut">
               <a:rPr lang="pt-BR" smtClean="0"/>
-              <a:t>28/02/2026</a:t>
+              <a:t>01/03/2026</a:t>
             </a:fld>
             <a:endParaRPr lang="pt-BR"/>
           </a:p>
@@ -3247,7 +3247,7 @@
           <p:cNvPr id="4" name="Espaço Reservado para Rodapé 3">
             <a:extLst>
               <a:ext uri="{FF2B5EF4-FFF2-40B4-BE49-F238E27FC236}">
-                <a16:creationId xmlns="" xmlns:a16="http://schemas.microsoft.com/office/drawing/2014/main" id="{192E6BED-F546-40CC-A2DF-99CBA853654E}"/>
+                <a16:creationId xmlns:a16="http://schemas.microsoft.com/office/drawing/2014/main" id="{192E6BED-F546-40CC-A2DF-99CBA853654E}"/>
               </a:ext>
             </a:extLst>
           </p:cNvPr>
@@ -3272,7 +3272,7 @@
           <p:cNvPr id="5" name="Espaço Reservado para Número de Slide 4">
             <a:extLst>
               <a:ext uri="{FF2B5EF4-FFF2-40B4-BE49-F238E27FC236}">
-                <a16:creationId xmlns="" xmlns:a16="http://schemas.microsoft.com/office/drawing/2014/main" id="{6091CC40-A8C4-4063-80EB-CC5099621678}"/>
+                <a16:creationId xmlns:a16="http://schemas.microsoft.com/office/drawing/2014/main" id="{6091CC40-A8C4-4063-80EB-CC5099621678}"/>
               </a:ext>
             </a:extLst>
           </p:cNvPr>
@@ -3290,7 +3290,7 @@
           <a:p>
             <a:fld id="{1A7E88B7-70CE-4035-AE73-13FA6FB985D4}" type="slidenum">
               <a:rPr lang="pt-BR" smtClean="0"/>
-              <a:t>‹nº›</a:t>
+              <a:t>‹#›</a:t>
             </a:fld>
             <a:endParaRPr lang="pt-BR"/>
           </a:p>
@@ -3331,7 +3331,7 @@
           <p:cNvPr id="2" name="Espaço Reservado para Data 1">
             <a:extLst>
               <a:ext uri="{FF2B5EF4-FFF2-40B4-BE49-F238E27FC236}">
-                <a16:creationId xmlns="" xmlns:a16="http://schemas.microsoft.com/office/drawing/2014/main" id="{DD19515C-212C-4EAE-84A3-8FF4BC844F1B}"/>
+                <a16:creationId xmlns:a16="http://schemas.microsoft.com/office/drawing/2014/main" id="{DD19515C-212C-4EAE-84A3-8FF4BC844F1B}"/>
               </a:ext>
             </a:extLst>
           </p:cNvPr>
@@ -3349,7 +3349,7 @@
           <a:p>
             <a:fld id="{63289F7E-B80B-496E-81B4-D396C37C9454}" type="datetimeFigureOut">
               <a:rPr lang="pt-BR" smtClean="0"/>
-              <a:t>28/02/2026</a:t>
+              <a:t>01/03/2026</a:t>
             </a:fld>
             <a:endParaRPr lang="pt-BR"/>
           </a:p>
@@ -3360,7 +3360,7 @@
           <p:cNvPr id="3" name="Espaço Reservado para Rodapé 2">
             <a:extLst>
               <a:ext uri="{FF2B5EF4-FFF2-40B4-BE49-F238E27FC236}">
-                <a16:creationId xmlns="" xmlns:a16="http://schemas.microsoft.com/office/drawing/2014/main" id="{94D3D120-B3E8-4C96-861D-7A4F12F49B3A}"/>
+                <a16:creationId xmlns:a16="http://schemas.microsoft.com/office/drawing/2014/main" id="{94D3D120-B3E8-4C96-861D-7A4F12F49B3A}"/>
               </a:ext>
             </a:extLst>
           </p:cNvPr>
@@ -3385,7 +3385,7 @@
           <p:cNvPr id="4" name="Espaço Reservado para Número de Slide 3">
             <a:extLst>
               <a:ext uri="{FF2B5EF4-FFF2-40B4-BE49-F238E27FC236}">
-                <a16:creationId xmlns="" xmlns:a16="http://schemas.microsoft.com/office/drawing/2014/main" id="{42E49B68-FA1B-468B-9F17-D5C09243D454}"/>
+                <a16:creationId xmlns:a16="http://schemas.microsoft.com/office/drawing/2014/main" id="{42E49B68-FA1B-468B-9F17-D5C09243D454}"/>
               </a:ext>
             </a:extLst>
           </p:cNvPr>
@@ -3403,7 +3403,7 @@
           <a:p>
             <a:fld id="{1A7E88B7-70CE-4035-AE73-13FA6FB985D4}" type="slidenum">
               <a:rPr lang="pt-BR" smtClean="0"/>
-              <a:t>‹nº›</a:t>
+              <a:t>‹#›</a:t>
             </a:fld>
             <a:endParaRPr lang="pt-BR"/>
           </a:p>
@@ -3444,7 +3444,7 @@
           <p:cNvPr id="2" name="Título 1">
             <a:extLst>
               <a:ext uri="{FF2B5EF4-FFF2-40B4-BE49-F238E27FC236}">
-                <a16:creationId xmlns="" xmlns:a16="http://schemas.microsoft.com/office/drawing/2014/main" id="{1C17BCBE-A897-4319-85EC-D87909C24980}"/>
+                <a16:creationId xmlns:a16="http://schemas.microsoft.com/office/drawing/2014/main" id="{1C17BCBE-A897-4319-85EC-D87909C24980}"/>
               </a:ext>
             </a:extLst>
           </p:cNvPr>
@@ -3481,7 +3481,7 @@
           <p:cNvPr id="3" name="Espaço Reservado para Conteúdo 2">
             <a:extLst>
               <a:ext uri="{FF2B5EF4-FFF2-40B4-BE49-F238E27FC236}">
-                <a16:creationId xmlns="" xmlns:a16="http://schemas.microsoft.com/office/drawing/2014/main" id="{4226F885-0204-4913-868B-4B8B82576F17}"/>
+                <a16:creationId xmlns:a16="http://schemas.microsoft.com/office/drawing/2014/main" id="{4226F885-0204-4913-868B-4B8B82576F17}"/>
               </a:ext>
             </a:extLst>
           </p:cNvPr>
@@ -3571,7 +3571,7 @@
           <p:cNvPr id="4" name="Espaço Reservado para Texto 3">
             <a:extLst>
               <a:ext uri="{FF2B5EF4-FFF2-40B4-BE49-F238E27FC236}">
-                <a16:creationId xmlns="" xmlns:a16="http://schemas.microsoft.com/office/drawing/2014/main" id="{00F9F784-A858-441B-8AB5-697098141751}"/>
+                <a16:creationId xmlns:a16="http://schemas.microsoft.com/office/drawing/2014/main" id="{00F9F784-A858-441B-8AB5-697098141751}"/>
               </a:ext>
             </a:extLst>
           </p:cNvPr>
@@ -3642,7 +3642,7 @@
           <p:cNvPr id="5" name="Espaço Reservado para Data 4">
             <a:extLst>
               <a:ext uri="{FF2B5EF4-FFF2-40B4-BE49-F238E27FC236}">
-                <a16:creationId xmlns="" xmlns:a16="http://schemas.microsoft.com/office/drawing/2014/main" id="{A4DC363A-5000-472E-8B17-02E7DCB8840A}"/>
+                <a16:creationId xmlns:a16="http://schemas.microsoft.com/office/drawing/2014/main" id="{A4DC363A-5000-472E-8B17-02E7DCB8840A}"/>
               </a:ext>
             </a:extLst>
           </p:cNvPr>
@@ -3660,7 +3660,7 @@
           <a:p>
             <a:fld id="{63289F7E-B80B-496E-81B4-D396C37C9454}" type="datetimeFigureOut">
               <a:rPr lang="pt-BR" smtClean="0"/>
-              <a:t>28/02/2026</a:t>
+              <a:t>01/03/2026</a:t>
             </a:fld>
             <a:endParaRPr lang="pt-BR"/>
           </a:p>
@@ -3671,7 +3671,7 @@
           <p:cNvPr id="6" name="Espaço Reservado para Rodapé 5">
             <a:extLst>
               <a:ext uri="{FF2B5EF4-FFF2-40B4-BE49-F238E27FC236}">
-                <a16:creationId xmlns="" xmlns:a16="http://schemas.microsoft.com/office/drawing/2014/main" id="{5548425D-2C21-4C56-BAD4-662978775C28}"/>
+                <a16:creationId xmlns:a16="http://schemas.microsoft.com/office/drawing/2014/main" id="{5548425D-2C21-4C56-BAD4-662978775C28}"/>
               </a:ext>
             </a:extLst>
           </p:cNvPr>
@@ -3696,7 +3696,7 @@
           <p:cNvPr id="7" name="Espaço Reservado para Número de Slide 6">
             <a:extLst>
               <a:ext uri="{FF2B5EF4-FFF2-40B4-BE49-F238E27FC236}">
-                <a16:creationId xmlns="" xmlns:a16="http://schemas.microsoft.com/office/drawing/2014/main" id="{C63E9726-E64C-42B2-AE8A-8C235A956B48}"/>
+                <a16:creationId xmlns:a16="http://schemas.microsoft.com/office/drawing/2014/main" id="{C63E9726-E64C-42B2-AE8A-8C235A956B48}"/>
               </a:ext>
             </a:extLst>
           </p:cNvPr>
@@ -3714,7 +3714,7 @@
           <a:p>
             <a:fld id="{1A7E88B7-70CE-4035-AE73-13FA6FB985D4}" type="slidenum">
               <a:rPr lang="pt-BR" smtClean="0"/>
-              <a:t>‹nº›</a:t>
+              <a:t>‹#›</a:t>
             </a:fld>
             <a:endParaRPr lang="pt-BR"/>
           </a:p>
@@ -3755,7 +3755,7 @@
           <p:cNvPr id="2" name="Título 1">
             <a:extLst>
               <a:ext uri="{FF2B5EF4-FFF2-40B4-BE49-F238E27FC236}">
-                <a16:creationId xmlns="" xmlns:a16="http://schemas.microsoft.com/office/drawing/2014/main" id="{11086A78-3E74-450C-96A6-CA8AC37AF772}"/>
+                <a16:creationId xmlns:a16="http://schemas.microsoft.com/office/drawing/2014/main" id="{11086A78-3E74-450C-96A6-CA8AC37AF772}"/>
               </a:ext>
             </a:extLst>
           </p:cNvPr>
@@ -3792,7 +3792,7 @@
           <p:cNvPr id="3" name="Espaço Reservado para Imagem 2">
             <a:extLst>
               <a:ext uri="{FF2B5EF4-FFF2-40B4-BE49-F238E27FC236}">
-                <a16:creationId xmlns="" xmlns:a16="http://schemas.microsoft.com/office/drawing/2014/main" id="{5F5B7312-975A-4DBC-9B2F-3652ADA006FD}"/>
+                <a16:creationId xmlns:a16="http://schemas.microsoft.com/office/drawing/2014/main" id="{5F5B7312-975A-4DBC-9B2F-3652ADA006FD}"/>
               </a:ext>
             </a:extLst>
           </p:cNvPr>
@@ -3859,7 +3859,7 @@
           <p:cNvPr id="4" name="Espaço Reservado para Texto 3">
             <a:extLst>
               <a:ext uri="{FF2B5EF4-FFF2-40B4-BE49-F238E27FC236}">
-                <a16:creationId xmlns="" xmlns:a16="http://schemas.microsoft.com/office/drawing/2014/main" id="{AAF805F5-1DFF-41C6-944C-7D79FE0D0963}"/>
+                <a16:creationId xmlns:a16="http://schemas.microsoft.com/office/drawing/2014/main" id="{AAF805F5-1DFF-41C6-944C-7D79FE0D0963}"/>
               </a:ext>
             </a:extLst>
           </p:cNvPr>
@@ -3930,7 +3930,7 @@
           <p:cNvPr id="5" name="Espaço Reservado para Data 4">
             <a:extLst>
               <a:ext uri="{FF2B5EF4-FFF2-40B4-BE49-F238E27FC236}">
-                <a16:creationId xmlns="" xmlns:a16="http://schemas.microsoft.com/office/drawing/2014/main" id="{02113D81-8665-4516-BD81-C6A1F254EECD}"/>
+                <a16:creationId xmlns:a16="http://schemas.microsoft.com/office/drawing/2014/main" id="{02113D81-8665-4516-BD81-C6A1F254EECD}"/>
               </a:ext>
             </a:extLst>
           </p:cNvPr>
@@ -3948,7 +3948,7 @@
           <a:p>
             <a:fld id="{63289F7E-B80B-496E-81B4-D396C37C9454}" type="datetimeFigureOut">
               <a:rPr lang="pt-BR" smtClean="0"/>
-              <a:t>28/02/2026</a:t>
+              <a:t>01/03/2026</a:t>
             </a:fld>
             <a:endParaRPr lang="pt-BR"/>
           </a:p>
@@ -3959,7 +3959,7 @@
           <p:cNvPr id="6" name="Espaço Reservado para Rodapé 5">
             <a:extLst>
               <a:ext uri="{FF2B5EF4-FFF2-40B4-BE49-F238E27FC236}">
-                <a16:creationId xmlns="" xmlns:a16="http://schemas.microsoft.com/office/drawing/2014/main" id="{2B00C88B-FF32-40AA-A187-727D96FD7862}"/>
+                <a16:creationId xmlns:a16="http://schemas.microsoft.com/office/drawing/2014/main" id="{2B00C88B-FF32-40AA-A187-727D96FD7862}"/>
               </a:ext>
             </a:extLst>
           </p:cNvPr>
@@ -3984,7 +3984,7 @@
           <p:cNvPr id="7" name="Espaço Reservado para Número de Slide 6">
             <a:extLst>
               <a:ext uri="{FF2B5EF4-FFF2-40B4-BE49-F238E27FC236}">
-                <a16:creationId xmlns="" xmlns:a16="http://schemas.microsoft.com/office/drawing/2014/main" id="{A04D1A2D-69F7-4B8F-A730-BC26DC340BA6}"/>
+                <a16:creationId xmlns:a16="http://schemas.microsoft.com/office/drawing/2014/main" id="{A04D1A2D-69F7-4B8F-A730-BC26DC340BA6}"/>
               </a:ext>
             </a:extLst>
           </p:cNvPr>
@@ -4002,7 +4002,7 @@
           <a:p>
             <a:fld id="{1A7E88B7-70CE-4035-AE73-13FA6FB985D4}" type="slidenum">
               <a:rPr lang="pt-BR" smtClean="0"/>
-              <a:t>‹nº›</a:t>
+              <a:t>‹#›</a:t>
             </a:fld>
             <a:endParaRPr lang="pt-BR"/>
           </a:p>
@@ -4048,7 +4048,7 @@
           <p:cNvPr id="2" name="Espaço Reservado para Título 1">
             <a:extLst>
               <a:ext uri="{FF2B5EF4-FFF2-40B4-BE49-F238E27FC236}">
-                <a16:creationId xmlns="" xmlns:a16="http://schemas.microsoft.com/office/drawing/2014/main" id="{E69A0273-1966-4A1B-9370-4C1CE5036371}"/>
+                <a16:creationId xmlns:a16="http://schemas.microsoft.com/office/drawing/2014/main" id="{E69A0273-1966-4A1B-9370-4C1CE5036371}"/>
               </a:ext>
             </a:extLst>
           </p:cNvPr>
@@ -4086,7 +4086,7 @@
           <p:cNvPr id="3" name="Espaço Reservado para Texto 2">
             <a:extLst>
               <a:ext uri="{FF2B5EF4-FFF2-40B4-BE49-F238E27FC236}">
-                <a16:creationId xmlns="" xmlns:a16="http://schemas.microsoft.com/office/drawing/2014/main" id="{3B9CF87A-0448-49A7-AB25-EBC1D56A40EF}"/>
+                <a16:creationId xmlns:a16="http://schemas.microsoft.com/office/drawing/2014/main" id="{3B9CF87A-0448-49A7-AB25-EBC1D56A40EF}"/>
               </a:ext>
             </a:extLst>
           </p:cNvPr>
@@ -4153,7 +4153,7 @@
           <p:cNvPr id="4" name="Espaço Reservado para Data 3">
             <a:extLst>
               <a:ext uri="{FF2B5EF4-FFF2-40B4-BE49-F238E27FC236}">
-                <a16:creationId xmlns="" xmlns:a16="http://schemas.microsoft.com/office/drawing/2014/main" id="{2EF7B1F2-BB5A-44D0-816D-16AD2C71430E}"/>
+                <a16:creationId xmlns:a16="http://schemas.microsoft.com/office/drawing/2014/main" id="{2EF7B1F2-BB5A-44D0-816D-16AD2C71430E}"/>
               </a:ext>
             </a:extLst>
           </p:cNvPr>
@@ -4189,7 +4189,7 @@
           <a:p>
             <a:fld id="{63289F7E-B80B-496E-81B4-D396C37C9454}" type="datetimeFigureOut">
               <a:rPr lang="pt-BR" smtClean="0"/>
-              <a:t>28/02/2026</a:t>
+              <a:t>01/03/2026</a:t>
             </a:fld>
             <a:endParaRPr lang="pt-BR"/>
           </a:p>
@@ -4200,7 +4200,7 @@
           <p:cNvPr id="5" name="Espaço Reservado para Rodapé 4">
             <a:extLst>
               <a:ext uri="{FF2B5EF4-FFF2-40B4-BE49-F238E27FC236}">
-                <a16:creationId xmlns="" xmlns:a16="http://schemas.microsoft.com/office/drawing/2014/main" id="{C703F94C-2CC8-4DAA-BC35-14FC3E841DCD}"/>
+                <a16:creationId xmlns:a16="http://schemas.microsoft.com/office/drawing/2014/main" id="{C703F94C-2CC8-4DAA-BC35-14FC3E841DCD}"/>
               </a:ext>
             </a:extLst>
           </p:cNvPr>
@@ -4243,7 +4243,7 @@
           <p:cNvPr id="6" name="Espaço Reservado para Número de Slide 5">
             <a:extLst>
               <a:ext uri="{FF2B5EF4-FFF2-40B4-BE49-F238E27FC236}">
-                <a16:creationId xmlns="" xmlns:a16="http://schemas.microsoft.com/office/drawing/2014/main" id="{64051336-7048-457A-8B61-D94291D71648}"/>
+                <a16:creationId xmlns:a16="http://schemas.microsoft.com/office/drawing/2014/main" id="{64051336-7048-457A-8B61-D94291D71648}"/>
               </a:ext>
             </a:extLst>
           </p:cNvPr>
@@ -4279,7 +4279,7 @@
           <a:p>
             <a:fld id="{1A7E88B7-70CE-4035-AE73-13FA6FB985D4}" type="slidenum">
               <a:rPr lang="pt-BR" smtClean="0"/>
-              <a:t>‹nº›</a:t>
+              <a:t>‹#›</a:t>
             </a:fld>
             <a:endParaRPr lang="pt-BR"/>
           </a:p>
@@ -4611,7 +4611,7 @@
           <p:cNvPr id="2" name="Título 1">
             <a:extLst>
               <a:ext uri="{FF2B5EF4-FFF2-40B4-BE49-F238E27FC236}">
-                <a16:creationId xmlns="" xmlns:a16="http://schemas.microsoft.com/office/drawing/2014/main" id="{32666AC8-2E17-4DB4-B0F5-60C640CCFD2E}"/>
+                <a16:creationId xmlns:a16="http://schemas.microsoft.com/office/drawing/2014/main" id="{32666AC8-2E17-4DB4-B0F5-60C640CCFD2E}"/>
               </a:ext>
             </a:extLst>
           </p:cNvPr>
@@ -4638,10 +4638,6 @@
               <a:rPr lang="pt-BR" sz="5400" dirty="0"/>
               <a:t>TP558 - Tópicos avançados em Machine Learning:</a:t>
             </a:r>
-            <a:r>
-              <a:rPr lang="pt-BR" dirty="0"/>
-              <a:t/>
-            </a:r>
             <a:br>
               <a:rPr lang="pt-BR" dirty="0"/>
             </a:br>
@@ -4657,7 +4653,7 @@
           <p:cNvPr id="4" name="CaixaDeTexto 3">
             <a:extLst>
               <a:ext uri="{FF2B5EF4-FFF2-40B4-BE49-F238E27FC236}">
-                <a16:creationId xmlns="" xmlns:a16="http://schemas.microsoft.com/office/drawing/2014/main" id="{430EB894-B7D4-434C-9D1A-A14094D9BEEC}"/>
+                <a16:creationId xmlns:a16="http://schemas.microsoft.com/office/drawing/2014/main" id="{430EB894-B7D4-434C-9D1A-A14094D9BEEC}"/>
               </a:ext>
             </a:extLst>
           </p:cNvPr>
@@ -4698,7 +4694,7 @@
           <p:cNvPr id="1026" name="Picture 2" descr="Logo">
             <a:extLst>
               <a:ext uri="{FF2B5EF4-FFF2-40B4-BE49-F238E27FC236}">
-                <a16:creationId xmlns="" xmlns:a16="http://schemas.microsoft.com/office/drawing/2014/main" id="{3F2642E0-4F6A-4196-8F58-E77D36E9A33F}"/>
+                <a16:creationId xmlns:a16="http://schemas.microsoft.com/office/drawing/2014/main" id="{3F2642E0-4F6A-4196-8F58-E77D36E9A33F}"/>
               </a:ext>
             </a:extLst>
           </p:cNvPr>
@@ -4743,7 +4739,7 @@
           <p:cNvPr id="5122" name="Picture 2" descr="Image result for machine learning">
             <a:extLst>
               <a:ext uri="{FF2B5EF4-FFF2-40B4-BE49-F238E27FC236}">
-                <a16:creationId xmlns="" xmlns:a16="http://schemas.microsoft.com/office/drawing/2014/main" id="{810CE0A2-4102-44A6-A370-175E7896CDCB}"/>
+                <a16:creationId xmlns:a16="http://schemas.microsoft.com/office/drawing/2014/main" id="{810CE0A2-4102-44A6-A370-175E7896CDCB}"/>
               </a:ext>
             </a:extLst>
           </p:cNvPr>
@@ -4818,7 +4814,7 @@
           <p:cNvPr id="2" name="Título 1">
             <a:extLst>
               <a:ext uri="{FF2B5EF4-FFF2-40B4-BE49-F238E27FC236}">
-                <a16:creationId xmlns="" xmlns:a16="http://schemas.microsoft.com/office/drawing/2014/main" id="{A2A4684C-1159-4F88-A2B1-6BABEDE38C4D}"/>
+                <a16:creationId xmlns:a16="http://schemas.microsoft.com/office/drawing/2014/main" id="{A2A4684C-1159-4F88-A2B1-6BABEDE38C4D}"/>
               </a:ext>
             </a:extLst>
           </p:cNvPr>
@@ -4846,7 +4842,7 @@
           <p:cNvPr id="3" name="Espaço Reservado para Conteúdo 2">
             <a:extLst>
               <a:ext uri="{FF2B5EF4-FFF2-40B4-BE49-F238E27FC236}">
-                <a16:creationId xmlns="" xmlns:a16="http://schemas.microsoft.com/office/drawing/2014/main" id="{EC432B31-D382-41FF-BB6B-2ABDD322424B}"/>
+                <a16:creationId xmlns:a16="http://schemas.microsoft.com/office/drawing/2014/main" id="{EC432B31-D382-41FF-BB6B-2ABDD322424B}"/>
               </a:ext>
             </a:extLst>
           </p:cNvPr>
@@ -5039,12 +5035,20 @@
               <a:buNone/>
             </a:pPr>
             <a:r>
-              <a:rPr lang="pt-BR" sz="2400" dirty="0" smtClean="0">
+              <a:rPr lang="pt-BR" sz="2400" dirty="0">
                 <a:solidFill>
                   <a:srgbClr val="000000"/>
                 </a:solidFill>
               </a:rPr>
-              <a:t>[</a:t>
+              <a:t>[3] Sebastian </a:t>
+            </a:r>
+            <a:r>
+              <a:rPr lang="pt-BR" sz="2400" dirty="0" err="1">
+                <a:solidFill>
+                  <a:srgbClr val="000000"/>
+                </a:solidFill>
+              </a:rPr>
+              <a:t>Raschka</a:t>
             </a:r>
             <a:r>
               <a:rPr lang="pt-BR" sz="2400" dirty="0">
@@ -5052,15 +5056,15 @@
                   <a:srgbClr val="000000"/>
                 </a:solidFill>
               </a:rPr>
-              <a:t>3</a:t>
-            </a:r>
-            <a:r>
-              <a:rPr lang="pt-BR" sz="2400" dirty="0" smtClean="0">
+              <a:t> </a:t>
+            </a:r>
+            <a:r>
+              <a:rPr lang="pt-BR" sz="2400" dirty="0" err="1">
                 <a:solidFill>
                   <a:srgbClr val="000000"/>
                 </a:solidFill>
               </a:rPr>
-              <a:t>] </a:t>
+              <a:t>and</a:t>
             </a:r>
             <a:r>
               <a:rPr lang="pt-BR" sz="2400" dirty="0">
@@ -5068,7 +5072,7 @@
                   <a:srgbClr val="000000"/>
                 </a:solidFill>
               </a:rPr>
-              <a:t>Sebastian </a:t>
+              <a:t> </a:t>
             </a:r>
             <a:r>
               <a:rPr lang="pt-BR" sz="2400" dirty="0" err="1">
@@ -5076,7 +5080,7 @@
                   <a:srgbClr val="000000"/>
                 </a:solidFill>
               </a:rPr>
-              <a:t>Raschka</a:t>
+              <a:t>Vahid</a:t>
             </a:r>
             <a:r>
               <a:rPr lang="pt-BR" sz="2400" dirty="0">
@@ -5092,7 +5096,7 @@
                   <a:srgbClr val="000000"/>
                 </a:solidFill>
               </a:rPr>
-              <a:t>and</a:t>
+              <a:t>Mirjalili</a:t>
             </a:r>
             <a:r>
               <a:rPr lang="pt-BR" sz="2400" dirty="0">
@@ -5100,6 +5104,30 @@
                   <a:srgbClr val="000000"/>
                 </a:solidFill>
               </a:rPr>
+              <a:t>, “</a:t>
+            </a:r>
+            <a:r>
+              <a:rPr lang="en-US" sz="2400" dirty="0">
+                <a:solidFill>
+                  <a:srgbClr val="000000"/>
+                </a:solidFill>
+              </a:rPr>
+              <a:t>Python Machine Learning: Machine Learning and Deep Learning with Python, scikit-learn, and TensorFlow 2”, </a:t>
+            </a:r>
+            <a:r>
+              <a:rPr lang="pt-BR" sz="2400" dirty="0" err="1">
+                <a:solidFill>
+                  <a:srgbClr val="000000"/>
+                </a:solidFill>
+              </a:rPr>
+              <a:t>Packt</a:t>
+            </a:r>
+            <a:r>
+              <a:rPr lang="pt-BR" sz="2400" dirty="0">
+                <a:solidFill>
+                  <a:srgbClr val="000000"/>
+                </a:solidFill>
+              </a:rPr>
               <a:t> </a:t>
             </a:r>
             <a:r>
@@ -5108,7 +5136,7 @@
                   <a:srgbClr val="000000"/>
                 </a:solidFill>
               </a:rPr>
-              <a:t>Vahid</a:t>
+              <a:t>Publishing</a:t>
             </a:r>
             <a:r>
               <a:rPr lang="pt-BR" sz="2400" dirty="0">
@@ -5116,71 +5144,7 @@
                   <a:srgbClr val="000000"/>
                 </a:solidFill>
               </a:rPr>
-              <a:t> </a:t>
-            </a:r>
-            <a:r>
-              <a:rPr lang="pt-BR" sz="2400" dirty="0" err="1">
-                <a:solidFill>
-                  <a:srgbClr val="000000"/>
-                </a:solidFill>
-              </a:rPr>
-              <a:t>Mirjalili</a:t>
-            </a:r>
-            <a:r>
-              <a:rPr lang="pt-BR" sz="2400" dirty="0">
-                <a:solidFill>
-                  <a:srgbClr val="000000"/>
-                </a:solidFill>
-              </a:rPr>
-              <a:t>, “</a:t>
-            </a:r>
-            <a:r>
-              <a:rPr lang="en-US" sz="2400" dirty="0">
-                <a:solidFill>
-                  <a:srgbClr val="000000"/>
-                </a:solidFill>
-              </a:rPr>
-              <a:t>Python Machine Learning: Machine Learning and Deep Learning with Python, scikit-learn, and TensorFlow 2”, </a:t>
-            </a:r>
-            <a:r>
-              <a:rPr lang="pt-BR" sz="2400" dirty="0" err="1">
-                <a:solidFill>
-                  <a:srgbClr val="000000"/>
-                </a:solidFill>
-              </a:rPr>
-              <a:t>Packt</a:t>
-            </a:r>
-            <a:r>
-              <a:rPr lang="pt-BR" sz="2400" dirty="0">
-                <a:solidFill>
-                  <a:srgbClr val="000000"/>
-                </a:solidFill>
-              </a:rPr>
-              <a:t> </a:t>
-            </a:r>
-            <a:r>
-              <a:rPr lang="pt-BR" sz="2400" dirty="0" err="1">
-                <a:solidFill>
-                  <a:srgbClr val="000000"/>
-                </a:solidFill>
-              </a:rPr>
-              <a:t>Publishing</a:t>
-            </a:r>
-            <a:r>
-              <a:rPr lang="pt-BR" sz="2400" dirty="0">
-                <a:solidFill>
-                  <a:srgbClr val="000000"/>
-                </a:solidFill>
-              </a:rPr>
               <a:t>, 2019.</a:t>
-            </a:r>
-            <a:r>
-              <a:rPr lang="en-US" sz="2400" dirty="0">
-                <a:solidFill>
-                  <a:srgbClr val="000000"/>
-                </a:solidFill>
-              </a:rPr>
-              <a:t/>
             </a:r>
             <a:br>
               <a:rPr lang="en-US" sz="2400" dirty="0">
@@ -5190,7 +5154,7 @@
               </a:rPr>
             </a:br>
             <a:r>
-              <a:rPr lang="en-US" sz="2400" dirty="0" smtClean="0">
+              <a:rPr lang="en-US" sz="2400" dirty="0">
                 <a:solidFill>
                   <a:srgbClr val="000000"/>
                 </a:solidFill>
@@ -5286,7 +5250,7 @@
               <a:buNone/>
             </a:pPr>
             <a:r>
-              <a:rPr lang="pt-BR" sz="2400" dirty="0" smtClean="0">
+              <a:rPr lang="pt-BR" sz="2400" dirty="0">
                 <a:solidFill>
                   <a:srgbClr val="000000"/>
                 </a:solidFill>
@@ -5462,7 +5426,7 @@
               <a:buNone/>
             </a:pPr>
             <a:r>
-              <a:rPr lang="en-US" sz="2400" dirty="0" smtClean="0">
+              <a:rPr lang="en-US" sz="2400" dirty="0">
                 <a:solidFill>
                   <a:srgbClr val="000000"/>
                 </a:solidFill>
@@ -5531,20 +5495,12 @@
               <a:buNone/>
             </a:pPr>
             <a:r>
-              <a:rPr lang="pt-BR" sz="2400" dirty="0" smtClean="0">
+              <a:rPr lang="pt-BR" sz="2400" dirty="0">
                 <a:solidFill>
                   <a:srgbClr val="000000"/>
                 </a:solidFill>
               </a:rPr>
-              <a:t>[7] </a:t>
-            </a:r>
-            <a:r>
-              <a:rPr lang="pt-BR" sz="2400" dirty="0">
-                <a:solidFill>
-                  <a:srgbClr val="000000"/>
-                </a:solidFill>
-              </a:rPr>
-              <a:t>C. M. Bishop, "</a:t>
+              <a:t>[7] C. M. Bishop, "</a:t>
             </a:r>
             <a:r>
               <a:rPr lang="pt-BR" sz="2400" dirty="0" err="1">
@@ -5603,20 +5559,12 @@
               <a:buNone/>
             </a:pPr>
             <a:r>
-              <a:rPr lang="pt-BR" sz="2400" dirty="0" smtClean="0">
+              <a:rPr lang="pt-BR" sz="2400" dirty="0">
                 <a:solidFill>
                   <a:srgbClr val="000000"/>
                 </a:solidFill>
               </a:rPr>
-              <a:t>[8] </a:t>
-            </a:r>
-            <a:r>
-              <a:rPr lang="pt-BR" sz="2400" dirty="0">
-                <a:solidFill>
-                  <a:srgbClr val="000000"/>
-                </a:solidFill>
-              </a:rPr>
-              <a:t>“Livros”, </a:t>
+              <a:t>[8] “Livros”, </a:t>
             </a:r>
             <a:r>
               <a:rPr lang="pt-BR" sz="2400" dirty="0">
@@ -5814,39 +5762,7 @@
             </a:pPr>
             <a:r>
               <a:rPr lang="pt-BR" dirty="0"/>
-              <a:t>Todas as </a:t>
-            </a:r>
-            <a:r>
-              <a:rPr lang="pt-BR" dirty="0" smtClean="0"/>
-              <a:t>terças</a:t>
-            </a:r>
-            <a:r>
-              <a:rPr lang="pt-BR" dirty="0" smtClean="0"/>
-              <a:t>-feiras </a:t>
-            </a:r>
-            <a:r>
-              <a:rPr lang="pt-BR" dirty="0"/>
-              <a:t>das </a:t>
-            </a:r>
-            <a:r>
-              <a:rPr lang="pt-BR" dirty="0" smtClean="0"/>
-              <a:t>10</a:t>
-            </a:r>
-            <a:r>
-              <a:rPr lang="pt-BR" dirty="0" smtClean="0"/>
-              <a:t>:00 </a:t>
-            </a:r>
-            <a:r>
-              <a:rPr lang="pt-BR" dirty="0"/>
-              <a:t>às </a:t>
-            </a:r>
-            <a:r>
-              <a:rPr lang="pt-BR" dirty="0" smtClean="0"/>
-              <a:t>11:00</a:t>
-            </a:r>
-            <a:r>
-              <a:rPr lang="pt-BR" dirty="0"/>
-              <a:t>.</a:t>
+              <a:t>Todas as terças-feiras das 10:00 às 11:00.</a:t>
             </a:r>
           </a:p>
           <a:p>
@@ -5855,10 +5771,9 @@
               <a:buChar char="§"/>
             </a:pPr>
             <a:r>
-              <a:rPr lang="pt-BR" dirty="0" smtClean="0"/>
+              <a:rPr lang="pt-BR" dirty="0"/>
               <a:t>Presencialmente.</a:t>
             </a:r>
-            <a:endParaRPr lang="pt-BR" dirty="0"/>
           </a:p>
         </p:txBody>
       </p:sp>
@@ -5897,7 +5812,7 @@
           <p:cNvPr id="4" name="Título 1">
             <a:extLst>
               <a:ext uri="{FF2B5EF4-FFF2-40B4-BE49-F238E27FC236}">
-                <a16:creationId xmlns="" xmlns:a16="http://schemas.microsoft.com/office/drawing/2014/main" id="{32666AC8-2E17-4DB4-B0F5-60C640CCFD2E}"/>
+                <a16:creationId xmlns:a16="http://schemas.microsoft.com/office/drawing/2014/main" id="{32666AC8-2E17-4DB4-B0F5-60C640CCFD2E}"/>
               </a:ext>
             </a:extLst>
           </p:cNvPr>
@@ -5983,7 +5898,7 @@
           <p:cNvPr id="4" name="Título 1">
             <a:extLst>
               <a:ext uri="{FF2B5EF4-FFF2-40B4-BE49-F238E27FC236}">
-                <a16:creationId xmlns="" xmlns:a16="http://schemas.microsoft.com/office/drawing/2014/main" id="{32666AC8-2E17-4DB4-B0F5-60C640CCFD2E}"/>
+                <a16:creationId xmlns:a16="http://schemas.microsoft.com/office/drawing/2014/main" id="{32666AC8-2E17-4DB4-B0F5-60C640CCFD2E}"/>
               </a:ext>
             </a:extLst>
           </p:cNvPr>
@@ -6069,7 +5984,7 @@
           <p:cNvPr id="2" name="Título 1">
             <a:extLst>
               <a:ext uri="{FF2B5EF4-FFF2-40B4-BE49-F238E27FC236}">
-                <a16:creationId xmlns="" xmlns:a16="http://schemas.microsoft.com/office/drawing/2014/main" id="{11BC2EE5-C8A9-A5C4-E79F-7ACA60564BF4}"/>
+                <a16:creationId xmlns:a16="http://schemas.microsoft.com/office/drawing/2014/main" id="{11BC2EE5-C8A9-A5C4-E79F-7ACA60564BF4}"/>
               </a:ext>
             </a:extLst>
           </p:cNvPr>
@@ -6097,7 +6012,7 @@
           <p:cNvPr id="3" name="Espaço Reservado para Conteúdo 2">
             <a:extLst>
               <a:ext uri="{FF2B5EF4-FFF2-40B4-BE49-F238E27FC236}">
-                <a16:creationId xmlns="" xmlns:a16="http://schemas.microsoft.com/office/drawing/2014/main" id="{F34E1E4B-4890-7308-FDD9-BCFBF68A4D2F}"/>
+                <a16:creationId xmlns:a16="http://schemas.microsoft.com/office/drawing/2014/main" id="{F34E1E4B-4890-7308-FDD9-BCFBF68A4D2F}"/>
               </a:ext>
             </a:extLst>
           </p:cNvPr>
@@ -6370,7 +6285,7 @@
           <p:cNvPr id="2" name="Título 1">
             <a:extLst>
               <a:ext uri="{FF2B5EF4-FFF2-40B4-BE49-F238E27FC236}">
-                <a16:creationId xmlns="" xmlns:a16="http://schemas.microsoft.com/office/drawing/2014/main" id="{11BC2EE5-C8A9-A5C4-E79F-7ACA60564BF4}"/>
+                <a16:creationId xmlns:a16="http://schemas.microsoft.com/office/drawing/2014/main" id="{11BC2EE5-C8A9-A5C4-E79F-7ACA60564BF4}"/>
               </a:ext>
             </a:extLst>
           </p:cNvPr>
@@ -6398,7 +6313,7 @@
           <p:cNvPr id="3" name="Espaço Reservado para Conteúdo 2">
             <a:extLst>
               <a:ext uri="{FF2B5EF4-FFF2-40B4-BE49-F238E27FC236}">
-                <a16:creationId xmlns="" xmlns:a16="http://schemas.microsoft.com/office/drawing/2014/main" id="{F34E1E4B-4890-7308-FDD9-BCFBF68A4D2F}"/>
+                <a16:creationId xmlns:a16="http://schemas.microsoft.com/office/drawing/2014/main" id="{F34E1E4B-4890-7308-FDD9-BCFBF68A4D2F}"/>
               </a:ext>
             </a:extLst>
           </p:cNvPr>
@@ -6651,7 +6566,7 @@
         <p:cNvPr id="1" name="">
           <a:extLst>
             <a:ext uri="{FF2B5EF4-FFF2-40B4-BE49-F238E27FC236}">
-              <a16:creationId xmlns="" xmlns:a16="http://schemas.microsoft.com/office/drawing/2014/main" id="{7617B87B-9451-26E5-143E-DFEF71434E9F}"/>
+              <a16:creationId xmlns:a16="http://schemas.microsoft.com/office/drawing/2014/main" id="{7617B87B-9451-26E5-143E-DFEF71434E9F}"/>
             </a:ext>
           </a:extLst>
         </p:cNvPr>
@@ -6671,7 +6586,7 @@
           <p:cNvPr id="2" name="Título 1">
             <a:extLst>
               <a:ext uri="{FF2B5EF4-FFF2-40B4-BE49-F238E27FC236}">
-                <a16:creationId xmlns="" xmlns:a16="http://schemas.microsoft.com/office/drawing/2014/main" id="{530D8C5D-85CB-1EC5-46EE-3E9C5D6E11D6}"/>
+                <a16:creationId xmlns:a16="http://schemas.microsoft.com/office/drawing/2014/main" id="{530D8C5D-85CB-1EC5-46EE-3E9C5D6E11D6}"/>
               </a:ext>
             </a:extLst>
           </p:cNvPr>
@@ -6699,7 +6614,7 @@
           <p:cNvPr id="3" name="Espaço Reservado para Conteúdo 2">
             <a:extLst>
               <a:ext uri="{FF2B5EF4-FFF2-40B4-BE49-F238E27FC236}">
-                <a16:creationId xmlns="" xmlns:a16="http://schemas.microsoft.com/office/drawing/2014/main" id="{4C11FF3E-C7A6-AE98-273A-28F266ADBFC3}"/>
+                <a16:creationId xmlns:a16="http://schemas.microsoft.com/office/drawing/2014/main" id="{4C11FF3E-C7A6-AE98-273A-28F266ADBFC3}"/>
               </a:ext>
             </a:extLst>
           </p:cNvPr>
@@ -6948,7 +6863,7 @@
         <p:cNvPr id="1" name="">
           <a:extLst>
             <a:ext uri="{FF2B5EF4-FFF2-40B4-BE49-F238E27FC236}">
-              <a16:creationId xmlns="" xmlns:a16="http://schemas.microsoft.com/office/drawing/2014/main" id="{C27B3849-BF4B-F30A-23EA-9FE30E20CBCA}"/>
+              <a16:creationId xmlns:a16="http://schemas.microsoft.com/office/drawing/2014/main" id="{C27B3849-BF4B-F30A-23EA-9FE30E20CBCA}"/>
             </a:ext>
           </a:extLst>
         </p:cNvPr>
@@ -6968,7 +6883,7 @@
           <p:cNvPr id="2" name="Título 1">
             <a:extLst>
               <a:ext uri="{FF2B5EF4-FFF2-40B4-BE49-F238E27FC236}">
-                <a16:creationId xmlns="" xmlns:a16="http://schemas.microsoft.com/office/drawing/2014/main" id="{249A0E92-603C-2FF8-F119-2A802B939AA2}"/>
+                <a16:creationId xmlns:a16="http://schemas.microsoft.com/office/drawing/2014/main" id="{249A0E92-603C-2FF8-F119-2A802B939AA2}"/>
               </a:ext>
             </a:extLst>
           </p:cNvPr>
@@ -6996,7 +6911,7 @@
           <p:cNvPr id="3" name="Espaço Reservado para Conteúdo 2">
             <a:extLst>
               <a:ext uri="{FF2B5EF4-FFF2-40B4-BE49-F238E27FC236}">
-                <a16:creationId xmlns="" xmlns:a16="http://schemas.microsoft.com/office/drawing/2014/main" id="{09015E3D-F27D-5C4C-AFAE-8A3141CD4684}"/>
+                <a16:creationId xmlns:a16="http://schemas.microsoft.com/office/drawing/2014/main" id="{09015E3D-F27D-5C4C-AFAE-8A3141CD4684}"/>
               </a:ext>
             </a:extLst>
           </p:cNvPr>
@@ -7171,7 +7086,7 @@
         <p:cNvPr id="1" name="">
           <a:extLst>
             <a:ext uri="{FF2B5EF4-FFF2-40B4-BE49-F238E27FC236}">
-              <a16:creationId xmlns="" xmlns:a16="http://schemas.microsoft.com/office/drawing/2014/main" id="{6E3AB78C-4A70-ED33-6088-7D978AFBD15F}"/>
+              <a16:creationId xmlns:a16="http://schemas.microsoft.com/office/drawing/2014/main" id="{6E3AB78C-4A70-ED33-6088-7D978AFBD15F}"/>
             </a:ext>
           </a:extLst>
         </p:cNvPr>
@@ -7191,7 +7106,7 @@
           <p:cNvPr id="2" name="Título 1">
             <a:extLst>
               <a:ext uri="{FF2B5EF4-FFF2-40B4-BE49-F238E27FC236}">
-                <a16:creationId xmlns="" xmlns:a16="http://schemas.microsoft.com/office/drawing/2014/main" id="{20C0DDF2-0E52-0740-004B-2209C15740BF}"/>
+                <a16:creationId xmlns:a16="http://schemas.microsoft.com/office/drawing/2014/main" id="{20C0DDF2-0E52-0740-004B-2209C15740BF}"/>
               </a:ext>
             </a:extLst>
           </p:cNvPr>
@@ -7219,7 +7134,7 @@
           <p:cNvPr id="3" name="Espaço Reservado para Conteúdo 2">
             <a:extLst>
               <a:ext uri="{FF2B5EF4-FFF2-40B4-BE49-F238E27FC236}">
-                <a16:creationId xmlns="" xmlns:a16="http://schemas.microsoft.com/office/drawing/2014/main" id="{CAA14ED1-BBC4-3217-0C26-BBA0501ACF3D}"/>
+                <a16:creationId xmlns:a16="http://schemas.microsoft.com/office/drawing/2014/main" id="{CAA14ED1-BBC4-3217-0C26-BBA0501ACF3D}"/>
               </a:ext>
             </a:extLst>
           </p:cNvPr>
@@ -7456,7 +7371,7 @@
         <p:cNvPr id="1" name="">
           <a:extLst>
             <a:ext uri="{FF2B5EF4-FFF2-40B4-BE49-F238E27FC236}">
-              <a16:creationId xmlns="" xmlns:a16="http://schemas.microsoft.com/office/drawing/2014/main" id="{6E3AB78C-4A70-ED33-6088-7D978AFBD15F}"/>
+              <a16:creationId xmlns:a16="http://schemas.microsoft.com/office/drawing/2014/main" id="{6E3AB78C-4A70-ED33-6088-7D978AFBD15F}"/>
             </a:ext>
           </a:extLst>
         </p:cNvPr>
@@ -7476,7 +7391,7 @@
           <p:cNvPr id="2" name="Título 1">
             <a:extLst>
               <a:ext uri="{FF2B5EF4-FFF2-40B4-BE49-F238E27FC236}">
-                <a16:creationId xmlns="" xmlns:a16="http://schemas.microsoft.com/office/drawing/2014/main" id="{20C0DDF2-0E52-0740-004B-2209C15740BF}"/>
+                <a16:creationId xmlns:a16="http://schemas.microsoft.com/office/drawing/2014/main" id="{20C0DDF2-0E52-0740-004B-2209C15740BF}"/>
               </a:ext>
             </a:extLst>
           </p:cNvPr>
@@ -7504,7 +7419,7 @@
           <p:cNvPr id="3" name="Espaço Reservado para Conteúdo 2">
             <a:extLst>
               <a:ext uri="{FF2B5EF4-FFF2-40B4-BE49-F238E27FC236}">
-                <a16:creationId xmlns="" xmlns:a16="http://schemas.microsoft.com/office/drawing/2014/main" id="{CAA14ED1-BBC4-3217-0C26-BBA0501ACF3D}"/>
+                <a16:creationId xmlns:a16="http://schemas.microsoft.com/office/drawing/2014/main" id="{CAA14ED1-BBC4-3217-0C26-BBA0501ACF3D}"/>
               </a:ext>
             </a:extLst>
           </p:cNvPr>
@@ -7742,7 +7657,7 @@
           <p:cNvPr id="2" name="Título 1">
             <a:extLst>
               <a:ext uri="{FF2B5EF4-FFF2-40B4-BE49-F238E27FC236}">
-                <a16:creationId xmlns="" xmlns:a16="http://schemas.microsoft.com/office/drawing/2014/main" id="{59E7398B-A900-61B5-8621-DCCF26C6973A}"/>
+                <a16:creationId xmlns:a16="http://schemas.microsoft.com/office/drawing/2014/main" id="{59E7398B-A900-61B5-8621-DCCF26C6973A}"/>
               </a:ext>
             </a:extLst>
           </p:cNvPr>
@@ -7770,7 +7685,7 @@
           <p:cNvPr id="3" name="Espaço Reservado para Conteúdo 2">
             <a:extLst>
               <a:ext uri="{FF2B5EF4-FFF2-40B4-BE49-F238E27FC236}">
-                <a16:creationId xmlns="" xmlns:a16="http://schemas.microsoft.com/office/drawing/2014/main" id="{5954F27A-CDF9-6E72-139C-41301C4C48BE}"/>
+                <a16:creationId xmlns:a16="http://schemas.microsoft.com/office/drawing/2014/main" id="{5954F27A-CDF9-6E72-139C-41301C4C48BE}"/>
               </a:ext>
             </a:extLst>
           </p:cNvPr>
@@ -7789,7 +7704,7 @@
         </p:spPr>
         <p:txBody>
           <a:bodyPr>
-            <a:normAutofit lnSpcReduction="10000"/>
+            <a:normAutofit/>
           </a:bodyPr>
           <a:lstStyle/>
           <a:p>
@@ -7800,61 +7715,7 @@
                 </a:solidFill>
                 <a:effectLst/>
               </a:rPr>
-              <a:t>Curso </a:t>
-            </a:r>
-            <a:r>
-              <a:rPr lang="pt-BR" b="0" i="0" u="none" strike="noStrike" dirty="0" smtClean="0">
-                <a:solidFill>
-                  <a:srgbClr val="000000"/>
-                </a:solidFill>
-                <a:effectLst/>
-              </a:rPr>
-              <a:t>que </a:t>
-            </a:r>
-            <a:r>
-              <a:rPr lang="pt-BR" b="0" i="0" u="none" strike="noStrike" dirty="0">
-                <a:solidFill>
-                  <a:srgbClr val="000000"/>
-                </a:solidFill>
-                <a:effectLst/>
-              </a:rPr>
-              <a:t>oferecerá uma visão </a:t>
-            </a:r>
-            <a:r>
-              <a:rPr lang="pt-BR" b="0" i="0" u="none" strike="noStrike" dirty="0" smtClean="0">
-                <a:solidFill>
-                  <a:srgbClr val="000000"/>
-                </a:solidFill>
-                <a:effectLst/>
-              </a:rPr>
-              <a:t>sobre </a:t>
-            </a:r>
-            <a:r>
-              <a:rPr lang="pt-BR" b="0" i="0" u="none" strike="noStrike" dirty="0">
-                <a:solidFill>
-                  <a:srgbClr val="000000"/>
-                </a:solidFill>
-                <a:effectLst/>
-              </a:rPr>
-              <a:t>diferentes algoritmos </a:t>
-            </a:r>
-            <a:r>
-              <a:rPr lang="pt-BR" b="0" i="0" u="none" strike="noStrike" dirty="0" smtClean="0">
-                <a:solidFill>
-                  <a:srgbClr val="000000"/>
-                </a:solidFill>
-                <a:effectLst/>
-              </a:rPr>
-              <a:t>de </a:t>
-            </a:r>
-            <a:r>
-              <a:rPr lang="pt-BR" b="0" i="0" u="none" strike="noStrike" dirty="0">
-                <a:solidFill>
-                  <a:srgbClr val="000000"/>
-                </a:solidFill>
-                <a:effectLst/>
-              </a:rPr>
-              <a:t>aprendizado de máquina (ML) e suas aplicações em diferentes áreas do conhecimento.</a:t>
+              <a:t>Curso que oferecerá uma visão sobre diferentes algoritmos de aprendizado de máquina (ML) e suas aplicações em diferentes áreas do conhecimento.</a:t>
             </a:r>
           </a:p>
           <a:p>
@@ -7870,6 +7731,36 @@
             </a:pPr>
             <a:r>
               <a:rPr lang="pt-BR" dirty="0"/>
+              <a:t>Redes neurais profundas,</a:t>
+            </a:r>
+          </a:p>
+          <a:p>
+            <a:pPr lvl="1">
+              <a:buFont typeface="Wingdings" panose="05000000000000000000" pitchFamily="2" charset="2"/>
+              <a:buChar char="§"/>
+            </a:pPr>
+            <a:r>
+              <a:rPr lang="pt-BR" dirty="0"/>
+              <a:t>Aprendizado por reforço (profundo),</a:t>
+            </a:r>
+          </a:p>
+          <a:p>
+            <a:pPr lvl="1">
+              <a:buFont typeface="Wingdings" panose="05000000000000000000" pitchFamily="2" charset="2"/>
+              <a:buChar char="§"/>
+            </a:pPr>
+            <a:r>
+              <a:rPr lang="pt-BR" dirty="0"/>
+              <a:t>Detectores de objetos,</a:t>
+            </a:r>
+          </a:p>
+          <a:p>
+            <a:pPr lvl="1">
+              <a:buFont typeface="Wingdings" panose="05000000000000000000" pitchFamily="2" charset="2"/>
+              <a:buChar char="§"/>
+            </a:pPr>
+            <a:r>
+              <a:rPr lang="pt-BR" dirty="0"/>
               <a:t>Redes generativas, </a:t>
             </a:r>
           </a:p>
@@ -7890,57 +7781,7 @@
             </a:pPr>
             <a:r>
               <a:rPr lang="pt-BR" dirty="0"/>
-              <a:t>Redes de atenção, </a:t>
-            </a:r>
-          </a:p>
-          <a:p>
-            <a:pPr lvl="1">
-              <a:buFont typeface="Wingdings" panose="05000000000000000000" pitchFamily="2" charset="2"/>
-              <a:buChar char="§"/>
-            </a:pPr>
-            <a:r>
-              <a:rPr lang="pt-BR" dirty="0"/>
-              <a:t>Redes grafo neurais, </a:t>
-            </a:r>
-          </a:p>
-          <a:p>
-            <a:pPr lvl="1">
-              <a:buFont typeface="Wingdings" panose="05000000000000000000" pitchFamily="2" charset="2"/>
-              <a:buChar char="§"/>
-            </a:pPr>
-            <a:r>
-              <a:rPr lang="pt-BR" dirty="0"/>
-              <a:t>Aprendizado por reforço (profundo), </a:t>
-            </a:r>
-          </a:p>
-          <a:p>
-            <a:pPr lvl="1">
-              <a:buFont typeface="Wingdings" panose="05000000000000000000" pitchFamily="2" charset="2"/>
-              <a:buChar char="§"/>
-            </a:pPr>
-            <a:r>
-              <a:rPr lang="pt-BR" dirty="0"/>
-              <a:t>Autoencoders,</a:t>
-            </a:r>
-          </a:p>
-          <a:p>
-            <a:pPr lvl="1">
-              <a:buFont typeface="Wingdings" panose="05000000000000000000" pitchFamily="2" charset="2"/>
-              <a:buChar char="§"/>
-            </a:pPr>
-            <a:r>
-              <a:rPr lang="pt-BR" dirty="0"/>
               <a:t>Transformers,</a:t>
-            </a:r>
-          </a:p>
-          <a:p>
-            <a:pPr lvl="1">
-              <a:buFont typeface="Wingdings" panose="05000000000000000000" pitchFamily="2" charset="2"/>
-              <a:buChar char="§"/>
-            </a:pPr>
-            <a:r>
-              <a:rPr lang="pt-BR" dirty="0"/>
-              <a:t>Detectores de objetos, </a:t>
             </a:r>
           </a:p>
           <a:p>
@@ -7990,7 +7831,7 @@
           <p:cNvPr id="2" name="Título 1">
             <a:extLst>
               <a:ext uri="{FF2B5EF4-FFF2-40B4-BE49-F238E27FC236}">
-                <a16:creationId xmlns="" xmlns:a16="http://schemas.microsoft.com/office/drawing/2014/main" id="{F70C7E2D-5398-4F5E-7000-BA72FF1C6228}"/>
+                <a16:creationId xmlns:a16="http://schemas.microsoft.com/office/drawing/2014/main" id="{F70C7E2D-5398-4F5E-7000-BA72FF1C6228}"/>
               </a:ext>
             </a:extLst>
           </p:cNvPr>
@@ -8018,7 +7859,7 @@
           <p:cNvPr id="3" name="Espaço Reservado para Conteúdo 2">
             <a:extLst>
               <a:ext uri="{FF2B5EF4-FFF2-40B4-BE49-F238E27FC236}">
-                <a16:creationId xmlns="" xmlns:a16="http://schemas.microsoft.com/office/drawing/2014/main" id="{BA790209-FBBD-71F4-6F9F-502DB6462A33}"/>
+                <a16:creationId xmlns:a16="http://schemas.microsoft.com/office/drawing/2014/main" id="{BA790209-FBBD-71F4-6F9F-502DB6462A33}"/>
               </a:ext>
             </a:extLst>
           </p:cNvPr>
@@ -8221,7 +8062,7 @@
           <p:cNvPr id="2" name="Título 1">
             <a:extLst>
               <a:ext uri="{FF2B5EF4-FFF2-40B4-BE49-F238E27FC236}">
-                <a16:creationId xmlns="" xmlns:a16="http://schemas.microsoft.com/office/drawing/2014/main" id="{F70C7E2D-5398-4F5E-7000-BA72FF1C6228}"/>
+                <a16:creationId xmlns:a16="http://schemas.microsoft.com/office/drawing/2014/main" id="{F70C7E2D-5398-4F5E-7000-BA72FF1C6228}"/>
               </a:ext>
             </a:extLst>
           </p:cNvPr>
@@ -8249,7 +8090,7 @@
           <p:cNvPr id="3" name="Espaço Reservado para Conteúdo 2">
             <a:extLst>
               <a:ext uri="{FF2B5EF4-FFF2-40B4-BE49-F238E27FC236}">
-                <a16:creationId xmlns="" xmlns:a16="http://schemas.microsoft.com/office/drawing/2014/main" id="{BA790209-FBBD-71F4-6F9F-502DB6462A33}"/>
+                <a16:creationId xmlns:a16="http://schemas.microsoft.com/office/drawing/2014/main" id="{BA790209-FBBD-71F4-6F9F-502DB6462A33}"/>
               </a:ext>
             </a:extLst>
           </p:cNvPr>
@@ -8411,7 +8252,7 @@
         <p:cNvPr id="1" name="">
           <a:extLst>
             <a:ext uri="{FF2B5EF4-FFF2-40B4-BE49-F238E27FC236}">
-              <a16:creationId xmlns="" xmlns:a16="http://schemas.microsoft.com/office/drawing/2014/main" id="{F2050D32-3E32-0E68-EE2F-10DEBF5F9E34}"/>
+              <a16:creationId xmlns:a16="http://schemas.microsoft.com/office/drawing/2014/main" id="{F2050D32-3E32-0E68-EE2F-10DEBF5F9E34}"/>
             </a:ext>
           </a:extLst>
         </p:cNvPr>
@@ -8431,7 +8272,7 @@
           <p:cNvPr id="2" name="Título 1">
             <a:extLst>
               <a:ext uri="{FF2B5EF4-FFF2-40B4-BE49-F238E27FC236}">
-                <a16:creationId xmlns="" xmlns:a16="http://schemas.microsoft.com/office/drawing/2014/main" id="{06C9BF47-FE25-64EB-E7D8-257F36BF0637}"/>
+                <a16:creationId xmlns:a16="http://schemas.microsoft.com/office/drawing/2014/main" id="{06C9BF47-FE25-64EB-E7D8-257F36BF0637}"/>
               </a:ext>
             </a:extLst>
           </p:cNvPr>
@@ -8459,7 +8300,7 @@
           <p:cNvPr id="3" name="Espaço Reservado para Conteúdo 2">
             <a:extLst>
               <a:ext uri="{FF2B5EF4-FFF2-40B4-BE49-F238E27FC236}">
-                <a16:creationId xmlns="" xmlns:a16="http://schemas.microsoft.com/office/drawing/2014/main" id="{85CD2A47-67FC-5F78-FB47-48CDDDA1C93F}"/>
+                <a16:creationId xmlns:a16="http://schemas.microsoft.com/office/drawing/2014/main" id="{85CD2A47-67FC-5F78-FB47-48CDDDA1C93F}"/>
               </a:ext>
             </a:extLst>
           </p:cNvPr>
@@ -8691,13 +8532,6 @@
   <p:clrMapOvr>
     <a:masterClrMapping/>
   </p:clrMapOvr>
-  <p:timing>
-    <p:tnLst>
-      <p:par>
-        <p:cTn id="1" dur="indefinite" restart="never" nodeType="tmRoot"/>
-      </p:par>
-    </p:tnLst>
-  </p:timing>
 </p:sld>
 </file>
 
@@ -8709,7 +8543,7 @@
         <p:cNvPr id="1" name="">
           <a:extLst>
             <a:ext uri="{FF2B5EF4-FFF2-40B4-BE49-F238E27FC236}">
-              <a16:creationId xmlns="" xmlns:a16="http://schemas.microsoft.com/office/drawing/2014/main" id="{4059CF8C-A5CA-D922-15C9-90E83F41C16F}"/>
+              <a16:creationId xmlns:a16="http://schemas.microsoft.com/office/drawing/2014/main" id="{4059CF8C-A5CA-D922-15C9-90E83F41C16F}"/>
             </a:ext>
           </a:extLst>
         </p:cNvPr>
@@ -8729,7 +8563,7 @@
           <p:cNvPr id="2" name="Título 1">
             <a:extLst>
               <a:ext uri="{FF2B5EF4-FFF2-40B4-BE49-F238E27FC236}">
-                <a16:creationId xmlns="" xmlns:a16="http://schemas.microsoft.com/office/drawing/2014/main" id="{F0E0D2C5-2C7F-FF98-F6E4-6A6D35AE3301}"/>
+                <a16:creationId xmlns:a16="http://schemas.microsoft.com/office/drawing/2014/main" id="{F0E0D2C5-2C7F-FF98-F6E4-6A6D35AE3301}"/>
               </a:ext>
             </a:extLst>
           </p:cNvPr>
@@ -8757,7 +8591,7 @@
           <p:cNvPr id="3" name="Espaço Reservado para Conteúdo 2">
             <a:extLst>
               <a:ext uri="{FF2B5EF4-FFF2-40B4-BE49-F238E27FC236}">
-                <a16:creationId xmlns="" xmlns:a16="http://schemas.microsoft.com/office/drawing/2014/main" id="{164D262D-D1D5-2FFA-8E32-3025F99BDE7F}"/>
+                <a16:creationId xmlns:a16="http://schemas.microsoft.com/office/drawing/2014/main" id="{164D262D-D1D5-2FFA-8E32-3025F99BDE7F}"/>
               </a:ext>
             </a:extLst>
           </p:cNvPr>
@@ -9040,25 +8874,12 @@
                 <a:hlinkClick r:id="rId6">
                   <a:extLst>
                     <a:ext uri="{A12FA001-AC4F-418D-AE19-62706E023703}">
-                      <ahyp:hlinkClr xmlns="" xmlns:ahyp="http://schemas.microsoft.com/office/drawing/2018/hyperlinkcolor" val="tx"/>
+                      <ahyp:hlinkClr xmlns:ahyp="http://schemas.microsoft.com/office/drawing/2018/hyperlinkcolor" val="tx"/>
                     </a:ext>
                   </a:extLst>
                 </a:hlinkClick>
               </a:rPr>
-              <a:t>https://</a:t>
-            </a:r>
-            <a:r>
-              <a:rPr lang="pt-BR" b="0" i="0" dirty="0" smtClean="0">
-                <a:effectLst/>
-                <a:hlinkClick r:id="rId6">
-                  <a:extLst>
-                    <a:ext uri="{A12FA001-AC4F-418D-AE19-62706E023703}">
-                      <ahyp:hlinkClr xmlns="" xmlns:ahyp="http://schemas.microsoft.com/office/drawing/2018/hyperlinkcolor" val="tx"/>
-                    </a:ext>
-                  </a:extLst>
-                </a:hlinkClick>
-              </a:rPr>
-              <a:t>arxiv.org/abs/1609.03499</a:t>
+              <a:t>https://arxiv.org/abs/1609.03499</a:t>
             </a:r>
             <a:endParaRPr lang="pt-BR" b="0" i="0" dirty="0">
               <a:effectLst/>
@@ -9076,13 +8897,6 @@
   <p:clrMapOvr>
     <a:masterClrMapping/>
   </p:clrMapOvr>
-  <p:timing>
-    <p:tnLst>
-      <p:par>
-        <p:cTn id="1" dur="indefinite" restart="never" nodeType="tmRoot"/>
-      </p:par>
-    </p:tnLst>
-  </p:timing>
 </p:sld>
 </file>
 
@@ -9094,7 +8908,7 @@
         <p:cNvPr id="1" name="">
           <a:extLst>
             <a:ext uri="{FF2B5EF4-FFF2-40B4-BE49-F238E27FC236}">
-              <a16:creationId xmlns="" xmlns:a16="http://schemas.microsoft.com/office/drawing/2014/main" id="{4059CF8C-A5CA-D922-15C9-90E83F41C16F}"/>
+              <a16:creationId xmlns:a16="http://schemas.microsoft.com/office/drawing/2014/main" id="{4059CF8C-A5CA-D922-15C9-90E83F41C16F}"/>
             </a:ext>
           </a:extLst>
         </p:cNvPr>
@@ -9114,7 +8928,7 @@
           <p:cNvPr id="2" name="Título 1">
             <a:extLst>
               <a:ext uri="{FF2B5EF4-FFF2-40B4-BE49-F238E27FC236}">
-                <a16:creationId xmlns="" xmlns:a16="http://schemas.microsoft.com/office/drawing/2014/main" id="{F0E0D2C5-2C7F-FF98-F6E4-6A6D35AE3301}"/>
+                <a16:creationId xmlns:a16="http://schemas.microsoft.com/office/drawing/2014/main" id="{F0E0D2C5-2C7F-FF98-F6E4-6A6D35AE3301}"/>
               </a:ext>
             </a:extLst>
           </p:cNvPr>
@@ -9142,7 +8956,7 @@
           <p:cNvPr id="3" name="Espaço Reservado para Conteúdo 2">
             <a:extLst>
               <a:ext uri="{FF2B5EF4-FFF2-40B4-BE49-F238E27FC236}">
-                <a16:creationId xmlns="" xmlns:a16="http://schemas.microsoft.com/office/drawing/2014/main" id="{164D262D-D1D5-2FFA-8E32-3025F99BDE7F}"/>
+                <a16:creationId xmlns:a16="http://schemas.microsoft.com/office/drawing/2014/main" id="{164D262D-D1D5-2FFA-8E32-3025F99BDE7F}"/>
               </a:ext>
             </a:extLst>
           </p:cNvPr>
@@ -9326,13 +9140,6 @@
   <p:clrMapOvr>
     <a:masterClrMapping/>
   </p:clrMapOvr>
-  <p:timing>
-    <p:tnLst>
-      <p:par>
-        <p:cTn id="1" dur="indefinite" restart="never" nodeType="tmRoot"/>
-      </p:par>
-    </p:tnLst>
-  </p:timing>
 </p:sld>
 </file>
 
@@ -9344,7 +9151,7 @@
         <p:cNvPr id="1" name="">
           <a:extLst>
             <a:ext uri="{FF2B5EF4-FFF2-40B4-BE49-F238E27FC236}">
-              <a16:creationId xmlns="" xmlns:a16="http://schemas.microsoft.com/office/drawing/2014/main" id="{4059CF8C-A5CA-D922-15C9-90E83F41C16F}"/>
+              <a16:creationId xmlns:a16="http://schemas.microsoft.com/office/drawing/2014/main" id="{4059CF8C-A5CA-D922-15C9-90E83F41C16F}"/>
             </a:ext>
           </a:extLst>
         </p:cNvPr>
@@ -9364,7 +9171,7 @@
           <p:cNvPr id="2" name="Título 1">
             <a:extLst>
               <a:ext uri="{FF2B5EF4-FFF2-40B4-BE49-F238E27FC236}">
-                <a16:creationId xmlns="" xmlns:a16="http://schemas.microsoft.com/office/drawing/2014/main" id="{F0E0D2C5-2C7F-FF98-F6E4-6A6D35AE3301}"/>
+                <a16:creationId xmlns:a16="http://schemas.microsoft.com/office/drawing/2014/main" id="{F0E0D2C5-2C7F-FF98-F6E4-6A6D35AE3301}"/>
               </a:ext>
             </a:extLst>
           </p:cNvPr>
@@ -9392,7 +9199,7 @@
           <p:cNvPr id="3" name="Espaço Reservado para Conteúdo 2">
             <a:extLst>
               <a:ext uri="{FF2B5EF4-FFF2-40B4-BE49-F238E27FC236}">
-                <a16:creationId xmlns="" xmlns:a16="http://schemas.microsoft.com/office/drawing/2014/main" id="{164D262D-D1D5-2FFA-8E32-3025F99BDE7F}"/>
+                <a16:creationId xmlns:a16="http://schemas.microsoft.com/office/drawing/2014/main" id="{164D262D-D1D5-2FFA-8E32-3025F99BDE7F}"/>
               </a:ext>
             </a:extLst>
           </p:cNvPr>
@@ -9606,7 +9413,7 @@
         <p:cNvPr id="1" name="">
           <a:extLst>
             <a:ext uri="{FF2B5EF4-FFF2-40B4-BE49-F238E27FC236}">
-              <a16:creationId xmlns="" xmlns:a16="http://schemas.microsoft.com/office/drawing/2014/main" id="{4059CF8C-A5CA-D922-15C9-90E83F41C16F}"/>
+              <a16:creationId xmlns:a16="http://schemas.microsoft.com/office/drawing/2014/main" id="{4059CF8C-A5CA-D922-15C9-90E83F41C16F}"/>
             </a:ext>
           </a:extLst>
         </p:cNvPr>
@@ -9626,7 +9433,7 @@
           <p:cNvPr id="2" name="Título 1">
             <a:extLst>
               <a:ext uri="{FF2B5EF4-FFF2-40B4-BE49-F238E27FC236}">
-                <a16:creationId xmlns="" xmlns:a16="http://schemas.microsoft.com/office/drawing/2014/main" id="{F0E0D2C5-2C7F-FF98-F6E4-6A6D35AE3301}"/>
+                <a16:creationId xmlns:a16="http://schemas.microsoft.com/office/drawing/2014/main" id="{F0E0D2C5-2C7F-FF98-F6E4-6A6D35AE3301}"/>
               </a:ext>
             </a:extLst>
           </p:cNvPr>
@@ -9654,7 +9461,7 @@
           <p:cNvPr id="3" name="Espaço Reservado para Conteúdo 2">
             <a:extLst>
               <a:ext uri="{FF2B5EF4-FFF2-40B4-BE49-F238E27FC236}">
-                <a16:creationId xmlns="" xmlns:a16="http://schemas.microsoft.com/office/drawing/2014/main" id="{164D262D-D1D5-2FFA-8E32-3025F99BDE7F}"/>
+                <a16:creationId xmlns:a16="http://schemas.microsoft.com/office/drawing/2014/main" id="{164D262D-D1D5-2FFA-8E32-3025F99BDE7F}"/>
               </a:ext>
             </a:extLst>
           </p:cNvPr>
@@ -9857,10 +9664,6 @@
             <a:pPr marL="914400" lvl="2" indent="0">
               <a:buNone/>
             </a:pPr>
-            <a:r>
-              <a:rPr lang="pt-BR" dirty="0"/>
-              <a:t/>
-            </a:r>
             <a:br>
               <a:rPr lang="pt-BR" dirty="0"/>
             </a:br>
@@ -9906,7 +9709,7 @@
           <p:cNvPr id="2" name="Título 1">
             <a:extLst>
               <a:ext uri="{FF2B5EF4-FFF2-40B4-BE49-F238E27FC236}">
-                <a16:creationId xmlns="" xmlns:a16="http://schemas.microsoft.com/office/drawing/2014/main" id="{9BB4C24F-F8C2-513B-ABC6-F41F972D298C}"/>
+                <a16:creationId xmlns:a16="http://schemas.microsoft.com/office/drawing/2014/main" id="{9BB4C24F-F8C2-513B-ABC6-F41F972D298C}"/>
               </a:ext>
             </a:extLst>
           </p:cNvPr>
@@ -9926,7 +9729,6 @@
               <a:rPr lang="pt-BR" dirty="0"/>
               <a:t>Dinâmica do curso</a:t>
             </a:r>
-            <a:endParaRPr lang="pt-BR" dirty="0"/>
           </a:p>
         </p:txBody>
       </p:sp>
@@ -9935,7 +9737,7 @@
           <p:cNvPr id="3" name="Espaço Reservado para Conteúdo 2">
             <a:extLst>
               <a:ext uri="{FF2B5EF4-FFF2-40B4-BE49-F238E27FC236}">
-                <a16:creationId xmlns="" xmlns:a16="http://schemas.microsoft.com/office/drawing/2014/main" id="{39EC605B-82E1-C664-EB15-E7D9A6DF0D17}"/>
+                <a16:creationId xmlns:a16="http://schemas.microsoft.com/office/drawing/2014/main" id="{39EC605B-82E1-C664-EB15-E7D9A6DF0D17}"/>
               </a:ext>
             </a:extLst>
           </p:cNvPr>
@@ -9957,13 +9759,22 @@
           <a:lstStyle/>
           <a:p>
             <a:r>
-              <a:rPr lang="pt-BR" b="0" i="0" u="none" strike="noStrike" dirty="0" smtClean="0">
+              <a:rPr lang="pt-BR" b="0" i="0" u="none" strike="noStrike" dirty="0">
                 <a:solidFill>
                   <a:srgbClr val="000000"/>
                 </a:solidFill>
                 <a:effectLst/>
               </a:rPr>
-              <a:t>O </a:t>
+              <a:t>O curso será </a:t>
+            </a:r>
+            <a:r>
+              <a:rPr lang="pt-BR" b="1" i="1" u="none" strike="noStrike" dirty="0">
+                <a:solidFill>
+                  <a:srgbClr val="00B050"/>
+                </a:solidFill>
+                <a:effectLst/>
+              </a:rPr>
+              <a:t>dividido em vários seminários preparados e apresentados pelos alunos</a:t>
             </a:r>
             <a:r>
               <a:rPr lang="pt-BR" b="0" i="0" u="none" strike="noStrike" dirty="0">
@@ -9972,25 +9783,50 @@
                 </a:solidFill>
                 <a:effectLst/>
               </a:rPr>
-              <a:t>curso será </a:t>
-            </a:r>
-            <a:r>
-              <a:rPr lang="pt-BR" b="1" i="1" u="none" strike="noStrike" dirty="0">
+              <a:t>, cada um </a:t>
+            </a:r>
+            <a:r>
+              <a:rPr lang="pt-BR" dirty="0">
+                <a:solidFill>
+                  <a:srgbClr val="000000"/>
+                </a:solidFill>
+              </a:rPr>
+              <a:t>apresentando um trabalho (artigo) diferente</a:t>
+            </a:r>
+            <a:r>
+              <a:rPr lang="pt-BR" b="0" i="0" u="none" strike="noStrike" dirty="0">
+                <a:solidFill>
+                  <a:srgbClr val="000000"/>
+                </a:solidFill>
+                <a:effectLst/>
+              </a:rPr>
+              <a:t>.</a:t>
+            </a:r>
+          </a:p>
+          <a:p>
+            <a:r>
+              <a:rPr lang="pt-BR" dirty="0">
+                <a:solidFill>
+                  <a:srgbClr val="000000"/>
+                </a:solidFill>
+              </a:rPr>
+              <a:t>Ao final de cada seminário, os </a:t>
+            </a:r>
+            <a:r>
+              <a:rPr lang="pt-BR" b="1" i="1" dirty="0">
                 <a:solidFill>
                   <a:srgbClr val="00B050"/>
                 </a:solidFill>
-                <a:effectLst/>
-              </a:rPr>
-              <a:t>dividido em vários seminários preparados e apresentados pelos alunos</a:t>
-            </a:r>
-            <a:r>
-              <a:rPr lang="pt-BR" b="0" i="0" u="none" strike="noStrike" dirty="0">
+              </a:rPr>
+              <a:t>demais alunos deverão responder a um quiz</a:t>
+            </a:r>
+            <a:r>
+              <a:rPr lang="pt-BR" dirty="0">
                 <a:solidFill>
                   <a:srgbClr val="000000"/>
                 </a:solidFill>
-                <a:effectLst/>
-              </a:rPr>
-              <a:t>, cada um cobrindo um tipo diferente de algoritmo.</a:t>
+              </a:rPr>
+              <a:t>, preparado pelo apresentador, sobre o artigo apresentado.</a:t>
             </a:r>
           </a:p>
           <a:p>
@@ -10000,7 +9836,7 @@
                   <a:srgbClr val="000000"/>
                 </a:solidFill>
               </a:rPr>
-              <a:t>Ao final de cada seminário, os </a:t>
+              <a:t>Ao final do curso, os </a:t>
             </a:r>
             <a:r>
               <a:rPr lang="pt-BR" b="1" i="1" dirty="0">
@@ -10008,23 +9844,23 @@
                   <a:srgbClr val="00B050"/>
                 </a:solidFill>
               </a:rPr>
-              <a:t>demais </a:t>
-            </a:r>
-            <a:r>
-              <a:rPr lang="pt-BR" b="1" i="1" dirty="0" smtClean="0">
+              <a:t>alunos deverão apresentar um projeto final</a:t>
+            </a:r>
+            <a:r>
+              <a:rPr lang="pt-BR" dirty="0">
+                <a:solidFill>
+                  <a:srgbClr val="000000"/>
+                </a:solidFill>
+              </a:rPr>
+              <a:t>, incluindo um </a:t>
+            </a:r>
+            <a:r>
+              <a:rPr lang="pt-BR" b="1" i="1" dirty="0">
                 <a:solidFill>
                   <a:srgbClr val="00B050"/>
                 </a:solidFill>
               </a:rPr>
-              <a:t>alunos </a:t>
-            </a:r>
-            <a:r>
-              <a:rPr lang="pt-BR" b="1" i="1" dirty="0">
-                <a:solidFill>
-                  <a:srgbClr val="00B050"/>
-                </a:solidFill>
-              </a:rPr>
-              <a:t>deverão responder a um quiz</a:t>
+              <a:t>relatório em formato de artigo científico</a:t>
             </a:r>
             <a:r>
               <a:rPr lang="pt-BR" dirty="0">
@@ -10032,81 +9868,7 @@
                   <a:srgbClr val="000000"/>
                 </a:solidFill>
               </a:rPr>
-              <a:t>, preparado pelo apresentador, sobre o </a:t>
-            </a:r>
-            <a:r>
-              <a:rPr lang="pt-BR" dirty="0" smtClean="0">
-                <a:solidFill>
-                  <a:srgbClr val="000000"/>
-                </a:solidFill>
-              </a:rPr>
-              <a:t>artigo apresentado</a:t>
-            </a:r>
-            <a:r>
-              <a:rPr lang="pt-BR" dirty="0">
-                <a:solidFill>
-                  <a:srgbClr val="000000"/>
-                </a:solidFill>
-              </a:rPr>
-              <a:t>.</a:t>
-            </a:r>
-          </a:p>
-          <a:p>
-            <a:r>
-              <a:rPr lang="pt-BR" dirty="0">
-                <a:solidFill>
-                  <a:srgbClr val="000000"/>
-                </a:solidFill>
-              </a:rPr>
-              <a:t>Ao final do curso, os </a:t>
-            </a:r>
-            <a:r>
-              <a:rPr lang="pt-BR" b="1" i="1" dirty="0">
-                <a:solidFill>
-                  <a:srgbClr val="00B050"/>
-                </a:solidFill>
-              </a:rPr>
-              <a:t>alunos deverão apresentar um projeto final</a:t>
-            </a:r>
-            <a:r>
-              <a:rPr lang="pt-BR" dirty="0">
-                <a:solidFill>
-                  <a:srgbClr val="000000"/>
-                </a:solidFill>
-              </a:rPr>
-              <a:t>, incluindo um </a:t>
-            </a:r>
-            <a:r>
-              <a:rPr lang="pt-BR" b="1" i="1" dirty="0">
-                <a:solidFill>
-                  <a:srgbClr val="00B050"/>
-                </a:solidFill>
-              </a:rPr>
-              <a:t>relatório em formato de artigo científico</a:t>
-            </a:r>
-            <a:r>
-              <a:rPr lang="pt-BR" dirty="0">
-                <a:solidFill>
-                  <a:srgbClr val="000000"/>
-                </a:solidFill>
-              </a:rPr>
-              <a:t>, envolvendo a aplicação de um algoritmo </a:t>
-            </a:r>
-            <a:r>
-              <a:rPr lang="pt-BR" dirty="0" smtClean="0">
-                <a:solidFill>
-                  <a:srgbClr val="000000"/>
-                </a:solidFill>
-              </a:rPr>
-              <a:t>de </a:t>
-            </a:r>
-            <a:r>
-              <a:rPr lang="pt-BR" dirty="0">
-                <a:solidFill>
-                  <a:srgbClr val="000000"/>
-                </a:solidFill>
-              </a:rPr>
-              <a:t>ML a um problema de sua escolha (</a:t>
+              <a:t>, envolvendo a aplicação de um algoritmo de ML a um problema de sua escolha (</a:t>
             </a:r>
             <a:r>
               <a:rPr lang="pt-BR" b="1" i="1" dirty="0">
@@ -10174,7 +9936,7 @@
           <p:cNvPr id="2" name="Título 1">
             <a:extLst>
               <a:ext uri="{FF2B5EF4-FFF2-40B4-BE49-F238E27FC236}">
-                <a16:creationId xmlns="" xmlns:a16="http://schemas.microsoft.com/office/drawing/2014/main" id="{9A265F83-0504-EFF3-ACD5-719CAEB5BA41}"/>
+                <a16:creationId xmlns:a16="http://schemas.microsoft.com/office/drawing/2014/main" id="{9A265F83-0504-EFF3-ACD5-719CAEB5BA41}"/>
               </a:ext>
             </a:extLst>
           </p:cNvPr>
@@ -10191,10 +9953,9 @@
           <a:lstStyle/>
           <a:p>
             <a:r>
-              <a:rPr lang="pt-BR" dirty="0" smtClean="0"/>
+              <a:rPr lang="pt-BR" dirty="0"/>
               <a:t>Objetivos do curso</a:t>
             </a:r>
-            <a:endParaRPr lang="pt-BR" dirty="0"/>
           </a:p>
         </p:txBody>
       </p:sp>
@@ -10203,7 +9964,7 @@
           <p:cNvPr id="3" name="Espaço Reservado para Conteúdo 2">
             <a:extLst>
               <a:ext uri="{FF2B5EF4-FFF2-40B4-BE49-F238E27FC236}">
-                <a16:creationId xmlns="" xmlns:a16="http://schemas.microsoft.com/office/drawing/2014/main" id="{7E37BEAB-D924-8E11-EA13-C019C32409D7}"/>
+                <a16:creationId xmlns:a16="http://schemas.microsoft.com/office/drawing/2014/main" id="{7E37BEAB-D924-8E11-EA13-C019C32409D7}"/>
               </a:ext>
             </a:extLst>
           </p:cNvPr>
@@ -10232,31 +9993,13 @@
               </a:spcBef>
             </a:pPr>
             <a:r>
-              <a:rPr lang="pt-BR" b="0" i="0" u="none" strike="noStrike" dirty="0" smtClean="0">
+              <a:rPr lang="pt-BR" b="0" i="0" u="none" strike="noStrike" dirty="0">
                 <a:solidFill>
                   <a:srgbClr val="000000"/>
                 </a:solidFill>
                 <a:effectLst/>
               </a:rPr>
-              <a:t>Tornar os alunos capazes de </a:t>
-            </a:r>
-            <a:r>
-              <a:rPr lang="pt-BR" b="0" i="0" u="none" strike="noStrike" dirty="0">
-                <a:solidFill>
-                  <a:srgbClr val="000000"/>
-                </a:solidFill>
-                <a:effectLst/>
-              </a:rPr>
-              <a:t>entender e aplicar na prática os diferentes algoritmos estudados</a:t>
-            </a:r>
-            <a:r>
-              <a:rPr lang="pt-BR" b="0" i="0" u="none" strike="noStrike" dirty="0" smtClean="0">
-                <a:solidFill>
-                  <a:srgbClr val="000000"/>
-                </a:solidFill>
-                <a:effectLst/>
-              </a:rPr>
-              <a:t>.</a:t>
+              <a:t>Tornar os alunos capazes de entender e aplicar na prática os diferentes algoritmos estudados.</a:t>
             </a:r>
           </a:p>
           <a:p>
@@ -10266,14 +10009,14 @@
               </a:spcBef>
             </a:pPr>
             <a:r>
-              <a:rPr lang="pt-BR" dirty="0" smtClean="0">
+              <a:rPr lang="pt-BR" dirty="0">
                 <a:solidFill>
                   <a:srgbClr val="000000"/>
                 </a:solidFill>
               </a:rPr>
-              <a:t>Ambientar os alunos com a leitura de artigos científicos</a:t>
-            </a:r>
-            <a:endParaRPr lang="pt-BR" b="0" i="0" u="none" strike="noStrike" dirty="0" smtClean="0">
+              <a:t>Ambientar os alunos com a leitura de artigos científicos.</a:t>
+            </a:r>
+            <a:endParaRPr lang="pt-BR" b="0" i="0" u="none" strike="noStrike" dirty="0">
               <a:solidFill>
                 <a:srgbClr val="000000"/>
               </a:solidFill>
@@ -10287,7 +10030,7 @@
               </a:spcBef>
             </a:pPr>
             <a:r>
-              <a:rPr lang="pt-BR" dirty="0" smtClean="0">
+              <a:rPr lang="pt-BR" dirty="0">
                 <a:solidFill>
                   <a:srgbClr val="000000"/>
                 </a:solidFill>
@@ -10338,7 +10081,7 @@
           <p:cNvPr id="2" name="Título 1">
             <a:extLst>
               <a:ext uri="{FF2B5EF4-FFF2-40B4-BE49-F238E27FC236}">
-                <a16:creationId xmlns="" xmlns:a16="http://schemas.microsoft.com/office/drawing/2014/main" id="{9A265F83-0504-EFF3-ACD5-719CAEB5BA41}"/>
+                <a16:creationId xmlns:a16="http://schemas.microsoft.com/office/drawing/2014/main" id="{9A265F83-0504-EFF3-ACD5-719CAEB5BA41}"/>
               </a:ext>
             </a:extLst>
           </p:cNvPr>
@@ -10355,10 +10098,9 @@
           <a:lstStyle/>
           <a:p>
             <a:r>
-              <a:rPr lang="pt-BR" dirty="0" smtClean="0"/>
+              <a:rPr lang="pt-BR" dirty="0"/>
               <a:t>Pré-requisitos</a:t>
             </a:r>
-            <a:endParaRPr lang="pt-BR" dirty="0"/>
           </a:p>
         </p:txBody>
       </p:sp>
@@ -10367,7 +10109,7 @@
           <p:cNvPr id="3" name="Espaço Reservado para Conteúdo 2">
             <a:extLst>
               <a:ext uri="{FF2B5EF4-FFF2-40B4-BE49-F238E27FC236}">
-                <a16:creationId xmlns="" xmlns:a16="http://schemas.microsoft.com/office/drawing/2014/main" id="{7E37BEAB-D924-8E11-EA13-C019C32409D7}"/>
+                <a16:creationId xmlns:a16="http://schemas.microsoft.com/office/drawing/2014/main" id="{7E37BEAB-D924-8E11-EA13-C019C32409D7}"/>
               </a:ext>
             </a:extLst>
           </p:cNvPr>
@@ -10391,12 +10133,8 @@
           <a:lstStyle/>
           <a:p>
             <a:r>
-              <a:rPr lang="pt-BR" dirty="0" smtClean="0"/>
-              <a:t>Disciplinas</a:t>
-            </a:r>
-            <a:r>
-              <a:rPr lang="pt-BR" dirty="0"/>
-              <a:t>: TP555 ou TP557;</a:t>
+              <a:rPr lang="pt-BR" dirty="0"/>
+              <a:t>Disciplinas: TP555 ou TP557;</a:t>
             </a:r>
           </a:p>
           <a:p>
@@ -10496,7 +10234,7 @@
         <p:cNvPr id="1" name="">
           <a:extLst>
             <a:ext uri="{FF2B5EF4-FFF2-40B4-BE49-F238E27FC236}">
-              <a16:creationId xmlns="" xmlns:a16="http://schemas.microsoft.com/office/drawing/2014/main" id="{AF4399CC-3894-D100-1945-D7D23AA96EB1}"/>
+              <a16:creationId xmlns:a16="http://schemas.microsoft.com/office/drawing/2014/main" id="{AF4399CC-3894-D100-1945-D7D23AA96EB1}"/>
             </a:ext>
           </a:extLst>
         </p:cNvPr>
@@ -10516,7 +10254,7 @@
           <p:cNvPr id="2" name="Título 1">
             <a:extLst>
               <a:ext uri="{FF2B5EF4-FFF2-40B4-BE49-F238E27FC236}">
-                <a16:creationId xmlns="" xmlns:a16="http://schemas.microsoft.com/office/drawing/2014/main" id="{424E490C-8C95-5D8F-8A93-456C393F644A}"/>
+                <a16:creationId xmlns:a16="http://schemas.microsoft.com/office/drawing/2014/main" id="{424E490C-8C95-5D8F-8A93-456C393F644A}"/>
               </a:ext>
             </a:extLst>
           </p:cNvPr>
@@ -10533,10 +10271,9 @@
           <a:lstStyle/>
           <a:p>
             <a:r>
-              <a:rPr lang="pt-BR" dirty="0" smtClean="0"/>
+              <a:rPr lang="pt-BR" dirty="0"/>
               <a:t>Repositório</a:t>
             </a:r>
-            <a:endParaRPr lang="pt-BR" dirty="0"/>
           </a:p>
         </p:txBody>
       </p:sp>
@@ -10545,7 +10282,7 @@
           <p:cNvPr id="3" name="Espaço Reservado para Conteúdo 2">
             <a:extLst>
               <a:ext uri="{FF2B5EF4-FFF2-40B4-BE49-F238E27FC236}">
-                <a16:creationId xmlns="" xmlns:a16="http://schemas.microsoft.com/office/drawing/2014/main" id="{D99B10BC-34CB-F110-CB4D-6CF6043930ED}"/>
+                <a16:creationId xmlns:a16="http://schemas.microsoft.com/office/drawing/2014/main" id="{D99B10BC-34CB-F110-CB4D-6CF6043930ED}"/>
               </a:ext>
             </a:extLst>
           </p:cNvPr>
@@ -10574,15 +10311,19 @@
               </a:spcBef>
             </a:pPr>
             <a:r>
-              <a:rPr lang="pt-BR" dirty="0" smtClean="0"/>
-              <a:t>Criem </a:t>
-            </a:r>
-            <a:r>
-              <a:rPr lang="pt-BR" dirty="0"/>
-              <a:t>um repositório público no </a:t>
-            </a:r>
-            <a:r>
-              <a:rPr lang="pt-BR" dirty="0" err="1"/>
+              <a:rPr lang="pt-BR" dirty="0"/>
+              <a:t>Criem um repositório </a:t>
+            </a:r>
+            <a:r>
+              <a:rPr lang="pt-BR" b="1" i="1" dirty="0"/>
+              <a:t>público</a:t>
+            </a:r>
+            <a:r>
+              <a:rPr lang="pt-BR" dirty="0"/>
+              <a:t> no </a:t>
+            </a:r>
+            <a:r>
+              <a:rPr lang="pt-BR" i="1" dirty="0" err="1"/>
               <a:t>github</a:t>
             </a:r>
             <a:r>
@@ -10681,7 +10422,7 @@
           <p:cNvPr id="2" name="Título 1">
             <a:extLst>
               <a:ext uri="{FF2B5EF4-FFF2-40B4-BE49-F238E27FC236}">
-                <a16:creationId xmlns="" xmlns:a16="http://schemas.microsoft.com/office/drawing/2014/main" id="{40B200E8-E489-1374-DAE1-A01E9DFC93EA}"/>
+                <a16:creationId xmlns:a16="http://schemas.microsoft.com/office/drawing/2014/main" id="{40B200E8-E489-1374-DAE1-A01E9DFC93EA}"/>
               </a:ext>
             </a:extLst>
           </p:cNvPr>
@@ -10698,10 +10439,9 @@
           <a:lstStyle/>
           <a:p>
             <a:r>
-              <a:rPr lang="pt-BR" dirty="0" smtClean="0"/>
+              <a:rPr lang="pt-BR" dirty="0"/>
               <a:t>Avaliação</a:t>
             </a:r>
-            <a:endParaRPr lang="pt-BR" dirty="0"/>
           </a:p>
         </p:txBody>
       </p:sp>
@@ -10710,7 +10450,7 @@
           <p:cNvPr id="3" name="Espaço Reservado para Conteúdo 2">
             <a:extLst>
               <a:ext uri="{FF2B5EF4-FFF2-40B4-BE49-F238E27FC236}">
-                <a16:creationId xmlns="" xmlns:a16="http://schemas.microsoft.com/office/drawing/2014/main" id="{AC84DA0A-C3B3-CCCB-BBDF-CF88E7D56E0D}"/>
+                <a16:creationId xmlns:a16="http://schemas.microsoft.com/office/drawing/2014/main" id="{AC84DA0A-C3B3-CCCB-BBDF-CF88E7D56E0D}"/>
               </a:ext>
             </a:extLst>
           </p:cNvPr>
@@ -10739,12 +10479,8 @@
               </a:spcBef>
             </a:pPr>
             <a:r>
-              <a:rPr lang="pt-BR" dirty="0" smtClean="0"/>
-              <a:t>Seminários </a:t>
-            </a:r>
-            <a:r>
-              <a:rPr lang="pt-BR" dirty="0"/>
-              <a:t>(S): 50%</a:t>
+              <a:rPr lang="pt-BR" dirty="0"/>
+              <a:t>Seminários (S): 50%</a:t>
             </a:r>
           </a:p>
           <a:p>
@@ -10757,15 +10493,7 @@
             </a:pPr>
             <a:r>
               <a:rPr lang="pt-BR" dirty="0"/>
-              <a:t>Cada aluno irá estudar alguns </a:t>
-            </a:r>
-            <a:r>
-              <a:rPr lang="pt-BR" dirty="0" smtClean="0"/>
-              <a:t>artigos e </a:t>
-            </a:r>
-            <a:r>
-              <a:rPr lang="pt-BR" dirty="0"/>
-              <a:t>apresentar aos demais.</a:t>
+              <a:t>Cada aluno irá estudar artigos e apresentar aos demais.</a:t>
             </a:r>
           </a:p>
           <a:p>
@@ -10778,15 +10506,7 @@
             </a:pPr>
             <a:r>
               <a:rPr lang="pt-BR" dirty="0"/>
-              <a:t>D</a:t>
-            </a:r>
-            <a:r>
-              <a:rPr lang="pt-BR" dirty="0" smtClean="0"/>
-              <a:t>uas </a:t>
-            </a:r>
-            <a:r>
-              <a:rPr lang="pt-BR" dirty="0"/>
-              <a:t>semanas para estudo, preparação da apresentação e quiz.</a:t>
+              <a:t>Duas semanas para estudo e preparação da apresentação e quiz.</a:t>
             </a:r>
           </a:p>
           <a:p>
@@ -10797,7 +10517,7 @@
             </a:pPr>
             <a:r>
               <a:rPr lang="pt-BR" dirty="0"/>
-              <a:t>Quizzes (Q): 10%</a:t>
+              <a:t>Quizzes (Q): 5%</a:t>
             </a:r>
           </a:p>
           <a:p>
@@ -10837,7 +10557,7 @@
             </a:pPr>
             <a:r>
               <a:rPr lang="pt-BR" dirty="0"/>
-              <a:t>Projeto prático com tema escolhido pelos alunos.</a:t>
+              <a:t>Proposta de projeto prático com tema escolhido pelos alunos.</a:t>
             </a:r>
           </a:p>
           <a:p>
@@ -10869,11 +10589,7 @@
             </a:pPr>
             <a:r>
               <a:rPr lang="pt-BR" dirty="0"/>
-              <a:t>Prazo de entrega </a:t>
-            </a:r>
-            <a:r>
-              <a:rPr lang="pt-BR" dirty="0" smtClean="0"/>
-              <a:t>será divulgado no </a:t>
+              <a:t>Prazo de entrega será divulgado no </a:t>
             </a:r>
             <a:r>
               <a:rPr lang="pt-BR" dirty="0" err="1"/>
@@ -10892,7 +10608,7 @@
             </a:pPr>
             <a:r>
               <a:rPr lang="pt-BR" dirty="0"/>
-              <a:t>Projeto final (PF): 30%</a:t>
+              <a:t>Projeto final (PF): 35%</a:t>
             </a:r>
           </a:p>
           <a:p>
@@ -10905,7 +10621,7 @@
             </a:pPr>
             <a:r>
               <a:rPr lang="pt-BR" dirty="0"/>
-              <a:t>Apresentação na última semana de aula.</a:t>
+              <a:t>Entrega de relatório em formato de artigo científico.</a:t>
             </a:r>
           </a:p>
           <a:p>
@@ -10918,7 +10634,7 @@
             </a:pPr>
             <a:r>
               <a:rPr lang="pt-BR" dirty="0"/>
-              <a:t>Entrega de relatório em formato de artigo científico.</a:t>
+              <a:t>Apresentação na última semana de aula.</a:t>
             </a:r>
           </a:p>
           <a:p>
@@ -10939,7 +10655,7 @@
             </a:pPr>
             <a:r>
               <a:rPr lang="pt-BR" dirty="0"/>
-              <a:t>NF = S*50% + Q*10% + PPF*10% + PF*30%</a:t>
+              <a:t>NF = S*50% + Q*5% + PPF*10% + PF*35%</a:t>
             </a:r>
           </a:p>
         </p:txBody>
@@ -10949,7 +10665,7 @@
           <p:cNvPr id="4" name="Picture 3">
             <a:extLst>
               <a:ext uri="{FF2B5EF4-FFF2-40B4-BE49-F238E27FC236}">
-                <a16:creationId xmlns="" xmlns:a16="http://schemas.microsoft.com/office/drawing/2014/main" id="{63A98931-D4DA-A8C6-E70B-6223235637D2}"/>
+                <a16:creationId xmlns:a16="http://schemas.microsoft.com/office/drawing/2014/main" id="{63A98931-D4DA-A8C6-E70B-6223235637D2}"/>
               </a:ext>
             </a:extLst>
           </p:cNvPr>
@@ -10979,7 +10695,7 @@
           <p:cNvPr id="5" name="Picture 4">
             <a:extLst>
               <a:ext uri="{FF2B5EF4-FFF2-40B4-BE49-F238E27FC236}">
-                <a16:creationId xmlns="" xmlns:a16="http://schemas.microsoft.com/office/drawing/2014/main" id="{0E171FC1-ABD1-9A30-24B9-3B431D21D315}"/>
+                <a16:creationId xmlns:a16="http://schemas.microsoft.com/office/drawing/2014/main" id="{0E171FC1-ABD1-9A30-24B9-3B431D21D315}"/>
               </a:ext>
             </a:extLst>
           </p:cNvPr>
@@ -11009,7 +10725,7 @@
           <p:cNvPr id="6" name="Picture 5">
             <a:extLst>
               <a:ext uri="{FF2B5EF4-FFF2-40B4-BE49-F238E27FC236}">
-                <a16:creationId xmlns="" xmlns:a16="http://schemas.microsoft.com/office/drawing/2014/main" id="{4A00239B-9DE4-3C62-31EF-097283BCD829}"/>
+                <a16:creationId xmlns:a16="http://schemas.microsoft.com/office/drawing/2014/main" id="{4A00239B-9DE4-3C62-31EF-097283BCD829}"/>
               </a:ext>
             </a:extLst>
           </p:cNvPr>
@@ -11069,7 +10785,7 @@
           <p:cNvPr id="2" name="Título 1">
             <a:extLst>
               <a:ext uri="{FF2B5EF4-FFF2-40B4-BE49-F238E27FC236}">
-                <a16:creationId xmlns="" xmlns:a16="http://schemas.microsoft.com/office/drawing/2014/main" id="{81B87840-628C-E82C-47FA-C888AB409B21}"/>
+                <a16:creationId xmlns:a16="http://schemas.microsoft.com/office/drawing/2014/main" id="{81B87840-628C-E82C-47FA-C888AB409B21}"/>
               </a:ext>
             </a:extLst>
           </p:cNvPr>
@@ -11087,21 +10803,8 @@
           <a:p>
             <a:r>
               <a:rPr lang="pt-BR" dirty="0"/>
-              <a:t>Instruções </a:t>
-            </a:r>
-            <a:r>
-              <a:rPr lang="pt-BR" dirty="0" smtClean="0"/>
-              <a:t>sobre </a:t>
-            </a:r>
-            <a:r>
-              <a:rPr lang="pt-BR" dirty="0"/>
-              <a:t>os seminários e projeto </a:t>
-            </a:r>
-            <a:r>
-              <a:rPr lang="pt-BR" dirty="0" smtClean="0"/>
-              <a:t>final</a:t>
-            </a:r>
-            <a:endParaRPr lang="pt-BR" dirty="0"/>
+              <a:t>Instruções sobre os seminários e projeto final</a:t>
+            </a:r>
           </a:p>
         </p:txBody>
       </p:sp>
@@ -11110,7 +10813,7 @@
           <p:cNvPr id="3" name="Espaço Reservado para Conteúdo 2">
             <a:extLst>
               <a:ext uri="{FF2B5EF4-FFF2-40B4-BE49-F238E27FC236}">
-                <a16:creationId xmlns="" xmlns:a16="http://schemas.microsoft.com/office/drawing/2014/main" id="{60B96892-6767-8A98-62CA-E3A197F37080}"/>
+                <a16:creationId xmlns:a16="http://schemas.microsoft.com/office/drawing/2014/main" id="{60B96892-6767-8A98-62CA-E3A197F37080}"/>
               </a:ext>
             </a:extLst>
           </p:cNvPr>
@@ -11132,12 +10835,8 @@
           <a:lstStyle/>
           <a:p>
             <a:r>
-              <a:rPr lang="pt-BR" dirty="0" smtClean="0"/>
-              <a:t>Seminários</a:t>
-            </a:r>
-            <a:r>
-              <a:rPr lang="pt-BR" dirty="0"/>
-              <a:t>: </a:t>
+              <a:rPr lang="pt-BR" dirty="0"/>
+              <a:t>Seminários: </a:t>
             </a:r>
             <a:r>
               <a:rPr lang="pt-BR" dirty="0">
@@ -11156,13 +10855,7 @@
               <a:rPr lang="pt-BR" dirty="0">
                 <a:hlinkClick r:id="rId3"/>
               </a:rPr>
-              <a:t>http://</a:t>
-            </a:r>
-            <a:r>
-              <a:rPr lang="pt-BR" dirty="0" smtClean="0">
-                <a:hlinkClick r:id="rId3"/>
-              </a:rPr>
-              <a:t>tinyurl.com/tp558-final-project</a:t>
+              <a:t>http://tinyurl.com/tp558-final-project</a:t>
             </a:r>
             <a:endParaRPr lang="pt-BR" dirty="0"/>
           </a:p>
@@ -11214,10 +10907,9 @@
           <a:lstStyle/>
           <a:p>
             <a:r>
-              <a:rPr lang="pt-BR" dirty="0" smtClean="0"/>
+              <a:rPr lang="pt-BR" dirty="0"/>
               <a:t>Possíveis temas para os seminários</a:t>
             </a:r>
-            <a:endParaRPr lang="pt-BR" dirty="0"/>
           </a:p>
         </p:txBody>
       </p:sp>
@@ -11240,19 +10932,13 @@
               <a:rPr lang="pt-BR" dirty="0">
                 <a:hlinkClick r:id="rId2"/>
               </a:rPr>
-              <a:t>https://</a:t>
-            </a:r>
-            <a:r>
-              <a:rPr lang="pt-BR" dirty="0" smtClean="0">
-                <a:hlinkClick r:id="rId2"/>
-              </a:rPr>
-              <a:t>docs.google.com/spreadsheets/d/19mypFcuvkspJEsLo58qEa70MwIDpH1KOYqf0OcO_vLI/edit?usp=sharing</a:t>
-            </a:r>
-            <a:endParaRPr lang="pt-BR" dirty="0" smtClean="0"/>
-          </a:p>
-          <a:p>
-            <a:r>
-              <a:rPr lang="pt-BR" dirty="0" smtClean="0"/>
+              <a:t>https://docs.google.com/spreadsheets/d/19mypFcuvkspJEsLo58qEa70MwIDpH1KOYqf0OcO_vLI/edit?usp=sharing</a:t>
+            </a:r>
+            <a:endParaRPr lang="pt-BR" dirty="0"/>
+          </a:p>
+          <a:p>
+            <a:r>
+              <a:rPr lang="pt-BR" dirty="0"/>
               <a:t>Vocês podem propor outros temas, basta me enviar o artigo de interesse para avaliação.</a:t>
             </a:r>
           </a:p>

--- a/slides/TP558_1_Introdução_ao_curso.pptx
+++ b/slides/TP558_1_Introdução_ao_curso.pptx
@@ -300,7 +300,7 @@
           <a:p>
             <a:fld id="{144F1436-6906-4D93-B7A2-786C327BFA14}" type="datetimeFigureOut">
               <a:rPr lang="nl-BE" smtClean="0"/>
-              <a:t>1/03/2026</a:t>
+              <a:t>26/07/2026</a:t>
             </a:fld>
             <a:endParaRPr lang="nl-BE"/>
           </a:p>
@@ -366,7 +366,7 @@
           <a:p>
             <a:fld id="{F7E56D9B-79AD-444A-AFED-DEC23408F8B4}" type="slidenum">
               <a:rPr lang="nl-BE" smtClean="0"/>
-              <a:t>‹#›</a:t>
+              <a:t>‹nº›</a:t>
             </a:fld>
             <a:endParaRPr lang="nl-BE"/>
           </a:p>
@@ -465,7 +465,7 @@
           <a:p>
             <a:fld id="{AA8CD09E-2914-4F47-B6C1-51B2C31814C9}" type="datetimeFigureOut">
               <a:rPr lang="pt-BR" smtClean="0"/>
-              <a:t>01/03/2026</a:t>
+              <a:t>26/07/2026</a:t>
             </a:fld>
             <a:endParaRPr lang="pt-BR"/>
           </a:p>
@@ -623,7 +623,7 @@
           <a:p>
             <a:fld id="{6FC8D850-966F-45A6-8DE7-15B891E7D40D}" type="slidenum">
               <a:rPr lang="pt-BR" smtClean="0"/>
-              <a:t>‹#›</a:t>
+              <a:t>‹nº›</a:t>
             </a:fld>
             <a:endParaRPr lang="pt-BR"/>
           </a:p>
@@ -1539,7 +1539,7 @@
           <a:p>
             <a:fld id="{63289F7E-B80B-496E-81B4-D396C37C9454}" type="datetimeFigureOut">
               <a:rPr lang="pt-BR" smtClean="0"/>
-              <a:t>01/03/2026</a:t>
+              <a:t>26/07/2026</a:t>
             </a:fld>
             <a:endParaRPr lang="pt-BR"/>
           </a:p>
@@ -1593,7 +1593,7 @@
           <a:p>
             <a:fld id="{1A7E88B7-70CE-4035-AE73-13FA6FB985D4}" type="slidenum">
               <a:rPr lang="pt-BR" smtClean="0"/>
-              <a:t>‹#›</a:t>
+              <a:t>‹nº›</a:t>
             </a:fld>
             <a:endParaRPr lang="pt-BR"/>
           </a:p>
@@ -1737,7 +1737,7 @@
           <a:p>
             <a:fld id="{63289F7E-B80B-496E-81B4-D396C37C9454}" type="datetimeFigureOut">
               <a:rPr lang="pt-BR" smtClean="0"/>
-              <a:t>01/03/2026</a:t>
+              <a:t>26/07/2026</a:t>
             </a:fld>
             <a:endParaRPr lang="pt-BR"/>
           </a:p>
@@ -1791,7 +1791,7 @@
           <a:p>
             <a:fld id="{1A7E88B7-70CE-4035-AE73-13FA6FB985D4}" type="slidenum">
               <a:rPr lang="pt-BR" smtClean="0"/>
-              <a:t>‹#›</a:t>
+              <a:t>‹nº›</a:t>
             </a:fld>
             <a:endParaRPr lang="pt-BR"/>
           </a:p>
@@ -1945,7 +1945,7 @@
           <a:p>
             <a:fld id="{63289F7E-B80B-496E-81B4-D396C37C9454}" type="datetimeFigureOut">
               <a:rPr lang="pt-BR" smtClean="0"/>
-              <a:t>01/03/2026</a:t>
+              <a:t>26/07/2026</a:t>
             </a:fld>
             <a:endParaRPr lang="pt-BR"/>
           </a:p>
@@ -1999,7 +1999,7 @@
           <a:p>
             <a:fld id="{1A7E88B7-70CE-4035-AE73-13FA6FB985D4}" type="slidenum">
               <a:rPr lang="pt-BR" smtClean="0"/>
-              <a:t>‹#›</a:t>
+              <a:t>‹nº›</a:t>
             </a:fld>
             <a:endParaRPr lang="pt-BR"/>
           </a:p>
@@ -2143,7 +2143,7 @@
           <a:p>
             <a:fld id="{63289F7E-B80B-496E-81B4-D396C37C9454}" type="datetimeFigureOut">
               <a:rPr lang="pt-BR" smtClean="0"/>
-              <a:t>01/03/2026</a:t>
+              <a:t>26/07/2026</a:t>
             </a:fld>
             <a:endParaRPr lang="pt-BR"/>
           </a:p>
@@ -2197,7 +2197,7 @@
           <a:p>
             <a:fld id="{1A7E88B7-70CE-4035-AE73-13FA6FB985D4}" type="slidenum">
               <a:rPr lang="pt-BR" smtClean="0"/>
-              <a:t>‹#›</a:t>
+              <a:t>‹nº›</a:t>
             </a:fld>
             <a:endParaRPr lang="pt-BR"/>
           </a:p>
@@ -2418,7 +2418,7 @@
           <a:p>
             <a:fld id="{63289F7E-B80B-496E-81B4-D396C37C9454}" type="datetimeFigureOut">
               <a:rPr lang="pt-BR" smtClean="0"/>
-              <a:t>01/03/2026</a:t>
+              <a:t>26/07/2026</a:t>
             </a:fld>
             <a:endParaRPr lang="pt-BR"/>
           </a:p>
@@ -2472,7 +2472,7 @@
           <a:p>
             <a:fld id="{1A7E88B7-70CE-4035-AE73-13FA6FB985D4}" type="slidenum">
               <a:rPr lang="pt-BR" smtClean="0"/>
-              <a:t>‹#›</a:t>
+              <a:t>‹nº›</a:t>
             </a:fld>
             <a:endParaRPr lang="pt-BR"/>
           </a:p>
@@ -2683,7 +2683,7 @@
           <a:p>
             <a:fld id="{63289F7E-B80B-496E-81B4-D396C37C9454}" type="datetimeFigureOut">
               <a:rPr lang="pt-BR" smtClean="0"/>
-              <a:t>01/03/2026</a:t>
+              <a:t>26/07/2026</a:t>
             </a:fld>
             <a:endParaRPr lang="pt-BR"/>
           </a:p>
@@ -2737,7 +2737,7 @@
           <a:p>
             <a:fld id="{1A7E88B7-70CE-4035-AE73-13FA6FB985D4}" type="slidenum">
               <a:rPr lang="pt-BR" smtClean="0"/>
-              <a:t>‹#›</a:t>
+              <a:t>‹nº›</a:t>
             </a:fld>
             <a:endParaRPr lang="pt-BR"/>
           </a:p>
@@ -3095,7 +3095,7 @@
           <a:p>
             <a:fld id="{63289F7E-B80B-496E-81B4-D396C37C9454}" type="datetimeFigureOut">
               <a:rPr lang="pt-BR" smtClean="0"/>
-              <a:t>01/03/2026</a:t>
+              <a:t>26/07/2026</a:t>
             </a:fld>
             <a:endParaRPr lang="pt-BR"/>
           </a:p>
@@ -3149,7 +3149,7 @@
           <a:p>
             <a:fld id="{1A7E88B7-70CE-4035-AE73-13FA6FB985D4}" type="slidenum">
               <a:rPr lang="pt-BR" smtClean="0"/>
-              <a:t>‹#›</a:t>
+              <a:t>‹nº›</a:t>
             </a:fld>
             <a:endParaRPr lang="pt-BR"/>
           </a:p>
@@ -3236,7 +3236,7 @@
           <a:p>
             <a:fld id="{63289F7E-B80B-496E-81B4-D396C37C9454}" type="datetimeFigureOut">
               <a:rPr lang="pt-BR" smtClean="0"/>
-              <a:t>01/03/2026</a:t>
+              <a:t>26/07/2026</a:t>
             </a:fld>
             <a:endParaRPr lang="pt-BR"/>
           </a:p>
@@ -3290,7 +3290,7 @@
           <a:p>
             <a:fld id="{1A7E88B7-70CE-4035-AE73-13FA6FB985D4}" type="slidenum">
               <a:rPr lang="pt-BR" smtClean="0"/>
-              <a:t>‹#›</a:t>
+              <a:t>‹nº›</a:t>
             </a:fld>
             <a:endParaRPr lang="pt-BR"/>
           </a:p>
@@ -3349,7 +3349,7 @@
           <a:p>
             <a:fld id="{63289F7E-B80B-496E-81B4-D396C37C9454}" type="datetimeFigureOut">
               <a:rPr lang="pt-BR" smtClean="0"/>
-              <a:t>01/03/2026</a:t>
+              <a:t>26/07/2026</a:t>
             </a:fld>
             <a:endParaRPr lang="pt-BR"/>
           </a:p>
@@ -3403,7 +3403,7 @@
           <a:p>
             <a:fld id="{1A7E88B7-70CE-4035-AE73-13FA6FB985D4}" type="slidenum">
               <a:rPr lang="pt-BR" smtClean="0"/>
-              <a:t>‹#›</a:t>
+              <a:t>‹nº›</a:t>
             </a:fld>
             <a:endParaRPr lang="pt-BR"/>
           </a:p>
@@ -3660,7 +3660,7 @@
           <a:p>
             <a:fld id="{63289F7E-B80B-496E-81B4-D396C37C9454}" type="datetimeFigureOut">
               <a:rPr lang="pt-BR" smtClean="0"/>
-              <a:t>01/03/2026</a:t>
+              <a:t>26/07/2026</a:t>
             </a:fld>
             <a:endParaRPr lang="pt-BR"/>
           </a:p>
@@ -3714,7 +3714,7 @@
           <a:p>
             <a:fld id="{1A7E88B7-70CE-4035-AE73-13FA6FB985D4}" type="slidenum">
               <a:rPr lang="pt-BR" smtClean="0"/>
-              <a:t>‹#›</a:t>
+              <a:t>‹nº›</a:t>
             </a:fld>
             <a:endParaRPr lang="pt-BR"/>
           </a:p>
@@ -3948,7 +3948,7 @@
           <a:p>
             <a:fld id="{63289F7E-B80B-496E-81B4-D396C37C9454}" type="datetimeFigureOut">
               <a:rPr lang="pt-BR" smtClean="0"/>
-              <a:t>01/03/2026</a:t>
+              <a:t>26/07/2026</a:t>
             </a:fld>
             <a:endParaRPr lang="pt-BR"/>
           </a:p>
@@ -4002,7 +4002,7 @@
           <a:p>
             <a:fld id="{1A7E88B7-70CE-4035-AE73-13FA6FB985D4}" type="slidenum">
               <a:rPr lang="pt-BR" smtClean="0"/>
-              <a:t>‹#›</a:t>
+              <a:t>‹nº›</a:t>
             </a:fld>
             <a:endParaRPr lang="pt-BR"/>
           </a:p>
@@ -4189,7 +4189,7 @@
           <a:p>
             <a:fld id="{63289F7E-B80B-496E-81B4-D396C37C9454}" type="datetimeFigureOut">
               <a:rPr lang="pt-BR" smtClean="0"/>
-              <a:t>01/03/2026</a:t>
+              <a:t>26/07/2026</a:t>
             </a:fld>
             <a:endParaRPr lang="pt-BR"/>
           </a:p>
@@ -4279,7 +4279,7 @@
           <a:p>
             <a:fld id="{1A7E88B7-70CE-4035-AE73-13FA6FB985D4}" type="slidenum">
               <a:rPr lang="pt-BR" smtClean="0"/>
-              <a:t>‹#›</a:t>
+              <a:t>‹nº›</a:t>
             </a:fld>
             <a:endParaRPr lang="pt-BR"/>
           </a:p>

--- a/slides/TP558_1_Introdução_ao_curso.pptx
+++ b/slides/TP558_1_Introdução_ao_curso.pptx
@@ -300,7 +300,7 @@
           <a:p>
             <a:fld id="{144F1436-6906-4D93-B7A2-786C327BFA14}" type="datetimeFigureOut">
               <a:rPr lang="nl-BE" smtClean="0"/>
-              <a:t>26/07/2026</a:t>
+              <a:t>2/08/2026</a:t>
             </a:fld>
             <a:endParaRPr lang="nl-BE"/>
           </a:p>
@@ -465,7 +465,7 @@
           <a:p>
             <a:fld id="{AA8CD09E-2914-4F47-B6C1-51B2C31814C9}" type="datetimeFigureOut">
               <a:rPr lang="pt-BR" smtClean="0"/>
-              <a:t>26/07/2026</a:t>
+              <a:t>02/08/2026</a:t>
             </a:fld>
             <a:endParaRPr lang="pt-BR"/>
           </a:p>
@@ -1539,7 +1539,7 @@
           <a:p>
             <a:fld id="{63289F7E-B80B-496E-81B4-D396C37C9454}" type="datetimeFigureOut">
               <a:rPr lang="pt-BR" smtClean="0"/>
-              <a:t>26/07/2026</a:t>
+              <a:t>02/08/2026</a:t>
             </a:fld>
             <a:endParaRPr lang="pt-BR"/>
           </a:p>
@@ -1737,7 +1737,7 @@
           <a:p>
             <a:fld id="{63289F7E-B80B-496E-81B4-D396C37C9454}" type="datetimeFigureOut">
               <a:rPr lang="pt-BR" smtClean="0"/>
-              <a:t>26/07/2026</a:t>
+              <a:t>02/08/2026</a:t>
             </a:fld>
             <a:endParaRPr lang="pt-BR"/>
           </a:p>
@@ -1945,7 +1945,7 @@
           <a:p>
             <a:fld id="{63289F7E-B80B-496E-81B4-D396C37C9454}" type="datetimeFigureOut">
               <a:rPr lang="pt-BR" smtClean="0"/>
-              <a:t>26/07/2026</a:t>
+              <a:t>02/08/2026</a:t>
             </a:fld>
             <a:endParaRPr lang="pt-BR"/>
           </a:p>
@@ -2143,7 +2143,7 @@
           <a:p>
             <a:fld id="{63289F7E-B80B-496E-81B4-D396C37C9454}" type="datetimeFigureOut">
               <a:rPr lang="pt-BR" smtClean="0"/>
-              <a:t>26/07/2026</a:t>
+              <a:t>02/08/2026</a:t>
             </a:fld>
             <a:endParaRPr lang="pt-BR"/>
           </a:p>
@@ -2418,7 +2418,7 @@
           <a:p>
             <a:fld id="{63289F7E-B80B-496E-81B4-D396C37C9454}" type="datetimeFigureOut">
               <a:rPr lang="pt-BR" smtClean="0"/>
-              <a:t>26/07/2026</a:t>
+              <a:t>02/08/2026</a:t>
             </a:fld>
             <a:endParaRPr lang="pt-BR"/>
           </a:p>
@@ -2683,7 +2683,7 @@
           <a:p>
             <a:fld id="{63289F7E-B80B-496E-81B4-D396C37C9454}" type="datetimeFigureOut">
               <a:rPr lang="pt-BR" smtClean="0"/>
-              <a:t>26/07/2026</a:t>
+              <a:t>02/08/2026</a:t>
             </a:fld>
             <a:endParaRPr lang="pt-BR"/>
           </a:p>
@@ -3095,7 +3095,7 @@
           <a:p>
             <a:fld id="{63289F7E-B80B-496E-81B4-D396C37C9454}" type="datetimeFigureOut">
               <a:rPr lang="pt-BR" smtClean="0"/>
-              <a:t>26/07/2026</a:t>
+              <a:t>02/08/2026</a:t>
             </a:fld>
             <a:endParaRPr lang="pt-BR"/>
           </a:p>
@@ -3236,7 +3236,7 @@
           <a:p>
             <a:fld id="{63289F7E-B80B-496E-81B4-D396C37C9454}" type="datetimeFigureOut">
               <a:rPr lang="pt-BR" smtClean="0"/>
-              <a:t>26/07/2026</a:t>
+              <a:t>02/08/2026</a:t>
             </a:fld>
             <a:endParaRPr lang="pt-BR"/>
           </a:p>
@@ -3349,7 +3349,7 @@
           <a:p>
             <a:fld id="{63289F7E-B80B-496E-81B4-D396C37C9454}" type="datetimeFigureOut">
               <a:rPr lang="pt-BR" smtClean="0"/>
-              <a:t>26/07/2026</a:t>
+              <a:t>02/08/2026</a:t>
             </a:fld>
             <a:endParaRPr lang="pt-BR"/>
           </a:p>
@@ -3660,7 +3660,7 @@
           <a:p>
             <a:fld id="{63289F7E-B80B-496E-81B4-D396C37C9454}" type="datetimeFigureOut">
               <a:rPr lang="pt-BR" smtClean="0"/>
-              <a:t>26/07/2026</a:t>
+              <a:t>02/08/2026</a:t>
             </a:fld>
             <a:endParaRPr lang="pt-BR"/>
           </a:p>
@@ -3948,7 +3948,7 @@
           <a:p>
             <a:fld id="{63289F7E-B80B-496E-81B4-D396C37C9454}" type="datetimeFigureOut">
               <a:rPr lang="pt-BR" smtClean="0"/>
-              <a:t>26/07/2026</a:t>
+              <a:t>02/08/2026</a:t>
             </a:fld>
             <a:endParaRPr lang="pt-BR"/>
           </a:p>
@@ -4189,7 +4189,7 @@
           <a:p>
             <a:fld id="{63289F7E-B80B-496E-81B4-D396C37C9454}" type="datetimeFigureOut">
               <a:rPr lang="pt-BR" smtClean="0"/>
-              <a:t>26/07/2026</a:t>
+              <a:t>02/08/2026</a:t>
             </a:fld>
             <a:endParaRPr lang="pt-BR"/>
           </a:p>
@@ -7715,7 +7715,95 @@
                 </a:solidFill>
                 <a:effectLst/>
               </a:rPr>
-              <a:t>Curso que oferecerá uma visão sobre diferentes algoritmos de aprendizado de máquina (ML) e suas aplicações em diferentes áreas do conhecimento.</a:t>
+              <a:t>Curso que oferecerá uma </a:t>
+            </a:r>
+            <a:r>
+              <a:rPr lang="pt-BR" b="1" i="0" u="none" strike="noStrike" dirty="0">
+                <a:solidFill>
+                  <a:srgbClr val="000000"/>
+                </a:solidFill>
+                <a:effectLst/>
+              </a:rPr>
+              <a:t>visão sobre diferentes algoritmos de aprendizado de máquina</a:t>
+            </a:r>
+            <a:r>
+              <a:rPr lang="pt-BR" b="0" i="0" u="none" strike="noStrike" dirty="0">
+                <a:solidFill>
+                  <a:srgbClr val="000000"/>
+                </a:solidFill>
+                <a:effectLst/>
+              </a:rPr>
+              <a:t> (i.e., </a:t>
+            </a:r>
+            <a:r>
+              <a:rPr lang="pt-BR" i="1" dirty="0">
+                <a:solidFill>
+                  <a:srgbClr val="000000"/>
+                </a:solidFill>
+              </a:rPr>
+              <a:t>m</a:t>
+            </a:r>
+            <a:r>
+              <a:rPr lang="pt-BR" b="0" i="1" u="none" strike="noStrike" dirty="0">
+                <a:solidFill>
+                  <a:srgbClr val="000000"/>
+                </a:solidFill>
+                <a:effectLst/>
+              </a:rPr>
+              <a:t>achin</a:t>
+            </a:r>
+            <a:r>
+              <a:rPr lang="pt-BR" i="1" dirty="0">
+                <a:solidFill>
+                  <a:srgbClr val="000000"/>
+                </a:solidFill>
+              </a:rPr>
+              <a:t>e l</a:t>
+            </a:r>
+            <a:r>
+              <a:rPr lang="pt-BR" b="0" i="1" u="none" strike="noStrike" dirty="0">
+                <a:solidFill>
+                  <a:srgbClr val="000000"/>
+                </a:solidFill>
+                <a:effectLst/>
+              </a:rPr>
+              <a:t>earning</a:t>
+            </a:r>
+            <a:r>
+              <a:rPr lang="pt-BR" b="0" u="none" strike="noStrike" dirty="0">
+                <a:solidFill>
+                  <a:srgbClr val="000000"/>
+                </a:solidFill>
+                <a:effectLst/>
+              </a:rPr>
+              <a:t> - ML</a:t>
+            </a:r>
+            <a:r>
+              <a:rPr lang="pt-BR" b="0" i="0" u="none" strike="noStrike" dirty="0">
+                <a:solidFill>
+                  <a:srgbClr val="000000"/>
+                </a:solidFill>
+                <a:effectLst/>
+              </a:rPr>
+              <a:t>) e suas </a:t>
+            </a:r>
+            <a:r>
+              <a:rPr lang="pt-BR" b="1" i="0" u="none" strike="noStrike" dirty="0">
+                <a:solidFill>
+                  <a:srgbClr val="000000"/>
+                </a:solidFill>
+                <a:effectLst/>
+              </a:rPr>
+              <a:t>aplicações em diferentes áreas </a:t>
+            </a:r>
+            <a:r>
+              <a:rPr lang="pt-BR" b="0" i="0" u="none" strike="noStrike" dirty="0">
+                <a:solidFill>
+                  <a:srgbClr val="000000"/>
+                </a:solidFill>
+                <a:effectLst/>
+              </a:rPr>
+              <a:t>do conhecimento.</a:t>
             </a:r>
           </a:p>
           <a:p>
@@ -7782,6 +7870,24 @@
             <a:r>
               <a:rPr lang="pt-BR" dirty="0"/>
               <a:t>Transformers,</a:t>
+            </a:r>
+          </a:p>
+          <a:p>
+            <a:pPr lvl="1">
+              <a:buFont typeface="Wingdings" panose="05000000000000000000" pitchFamily="2" charset="2"/>
+              <a:buChar char="§"/>
+            </a:pPr>
+            <a:r>
+              <a:rPr lang="pt-BR" dirty="0"/>
+              <a:t>Bibliotecas auxiliares (otimização, </a:t>
+            </a:r>
+            <a:r>
+              <a:rPr lang="pt-BR" dirty="0" err="1"/>
+              <a:t>AutoML</a:t>
+            </a:r>
+            <a:r>
+              <a:rPr lang="pt-BR" dirty="0"/>
+              <a:t>, data augmentation, etc.)</a:t>
             </a:r>
           </a:p>
           <a:p>
@@ -9774,7 +9880,16 @@
                 </a:solidFill>
                 <a:effectLst/>
               </a:rPr>
-              <a:t>dividido em vários seminários preparados e apresentados pelos alunos</a:t>
+              <a:t>dividido em vários seminários </a:t>
+            </a:r>
+            <a:r>
+              <a:rPr lang="pt-BR" b="1" i="1" u="none" strike="noStrike" dirty="0">
+                <a:solidFill>
+                  <a:schemeClr val="accent2"/>
+                </a:solidFill>
+                <a:effectLst/>
+              </a:rPr>
+              <a:t>preparados e apresentados pelos alunos</a:t>
             </a:r>
             <a:r>
               <a:rPr lang="pt-BR" b="0" i="0" u="none" strike="noStrike" dirty="0">
@@ -9791,7 +9906,7 @@
                   <a:srgbClr val="000000"/>
                 </a:solidFill>
               </a:rPr>
-              <a:t>apresentando um trabalho (artigo) diferente</a:t>
+              <a:t>apresentando um trabalho (e.g., um artigo) diferente</a:t>
             </a:r>
             <a:r>
               <a:rPr lang="pt-BR" b="0" i="0" u="none" strike="noStrike" dirty="0">
@@ -9818,7 +9933,15 @@
                   <a:srgbClr val="00B050"/>
                 </a:solidFill>
               </a:rPr>
-              <a:t>demais alunos deverão responder a um quiz</a:t>
+              <a:t>demais alunos deverão responder a um </a:t>
+            </a:r>
+            <a:r>
+              <a:rPr lang="pt-BR" b="1" i="1" dirty="0">
+                <a:solidFill>
+                  <a:schemeClr val="accent2"/>
+                </a:solidFill>
+              </a:rPr>
+              <a:t>quiz</a:t>
             </a:r>
             <a:r>
               <a:rPr lang="pt-BR" dirty="0">
@@ -9844,7 +9967,15 @@
                   <a:srgbClr val="00B050"/>
                 </a:solidFill>
               </a:rPr>
-              <a:t>alunos deverão apresentar um projeto final</a:t>
+              <a:t>alunos deverão apresentar um </a:t>
+            </a:r>
+            <a:r>
+              <a:rPr lang="pt-BR" b="1" i="1" dirty="0">
+                <a:solidFill>
+                  <a:schemeClr val="accent2"/>
+                </a:solidFill>
+              </a:rPr>
+              <a:t>projeto final</a:t>
             </a:r>
             <a:r>
               <a:rPr lang="pt-BR" dirty="0">
@@ -9860,7 +9991,15 @@
                   <a:srgbClr val="00B050"/>
                 </a:solidFill>
               </a:rPr>
-              <a:t>relatório em formato de artigo científico</a:t>
+              <a:t>relatório em formato de </a:t>
+            </a:r>
+            <a:r>
+              <a:rPr lang="pt-BR" b="1" i="1" dirty="0">
+                <a:solidFill>
+                  <a:schemeClr val="accent2"/>
+                </a:solidFill>
+              </a:rPr>
+              <a:t>artigo científico</a:t>
             </a:r>
             <a:r>
               <a:rPr lang="pt-BR" dirty="0">
@@ -9876,7 +10015,7 @@
                   <a:srgbClr val="00B050"/>
                 </a:solidFill>
               </a:rPr>
-              <a:t>de preferência, alinhado com sua pesquisa</a:t>
+              <a:t>de preferência, alinhado à sua pesquisa</a:t>
             </a:r>
             <a:r>
               <a:rPr lang="pt-BR" dirty="0">
@@ -9999,7 +10138,25 @@
                 </a:solidFill>
                 <a:effectLst/>
               </a:rPr>
-              <a:t>Tornar os alunos capazes de entender e aplicar na prática os diferentes algoritmos estudados.</a:t>
+              <a:t>Tornar os alunos capazes de </a:t>
+            </a:r>
+            <a:r>
+              <a:rPr lang="pt-BR" b="1" i="1" u="none" strike="noStrike" dirty="0">
+                <a:solidFill>
+                  <a:schemeClr val="accent2"/>
+                </a:solidFill>
+                <a:effectLst/>
+              </a:rPr>
+              <a:t>entender e aplicar na prática </a:t>
+            </a:r>
+            <a:r>
+              <a:rPr lang="pt-BR" b="0" i="0" u="none" strike="noStrike" dirty="0">
+                <a:solidFill>
+                  <a:srgbClr val="000000"/>
+                </a:solidFill>
+                <a:effectLst/>
+              </a:rPr>
+              <a:t>os diferentes algoritmos estudados.</a:t>
             </a:r>
           </a:p>
           <a:p>
@@ -10014,7 +10171,23 @@
                   <a:srgbClr val="000000"/>
                 </a:solidFill>
               </a:rPr>
-              <a:t>Ambientar os alunos com a leitura de artigos científicos.</a:t>
+              <a:t>Ambientar os alunos com a </a:t>
+            </a:r>
+            <a:r>
+              <a:rPr lang="pt-BR" b="1" i="1" dirty="0">
+                <a:solidFill>
+                  <a:schemeClr val="accent2"/>
+                </a:solidFill>
+              </a:rPr>
+              <a:t>leitura de artigos científicos</a:t>
+            </a:r>
+            <a:r>
+              <a:rPr lang="pt-BR" dirty="0">
+                <a:solidFill>
+                  <a:srgbClr val="000000"/>
+                </a:solidFill>
+              </a:rPr>
+              <a:t>.</a:t>
             </a:r>
             <a:endParaRPr lang="pt-BR" b="0" i="0" u="none" strike="noStrike" dirty="0">
               <a:solidFill>
@@ -10035,7 +10208,23 @@
                   <a:srgbClr val="000000"/>
                 </a:solidFill>
               </a:rPr>
-              <a:t>Preparar os alunos para apresentação de seus trabalhos em conferencias e para suas defesas.</a:t>
+              <a:t>Preparar os alunos para </a:t>
+            </a:r>
+            <a:r>
+              <a:rPr lang="pt-BR" b="1" i="1" dirty="0">
+                <a:solidFill>
+                  <a:schemeClr val="accent2"/>
+                </a:solidFill>
+              </a:rPr>
+              <a:t>apresentação de seus trabalhos </a:t>
+            </a:r>
+            <a:r>
+              <a:rPr lang="pt-BR" dirty="0">
+                <a:solidFill>
+                  <a:srgbClr val="000000"/>
+                </a:solidFill>
+              </a:rPr>
+              <a:t>em conferencias e para suas defesas.</a:t>
             </a:r>
             <a:endParaRPr lang="pt-BR" b="0" i="0" u="none" strike="noStrike" dirty="0">
               <a:solidFill>
@@ -10164,7 +10353,7 @@
             </a:r>
             <a:r>
               <a:rPr lang="pt-BR" dirty="0"/>
-              <a:t> (e.g., distribuições de probabilidade, média, desvio padrão, validação cruzada);</a:t>
+              <a:t> (e.g., distribuições de probabilidade, média, desvio padrão, validação cruzada, testes estatísticos);</a:t>
             </a:r>
           </a:p>
           <a:p>
@@ -10347,11 +10536,58 @@
                   <a:srgbClr val="7030A0"/>
                 </a:solidFill>
               </a:rPr>
-              <a:t>pastas distintas para cada seminário</a:t>
-            </a:r>
-            <a:r>
-              <a:rPr lang="pt-BR" dirty="0"/>
-              <a:t>, para o projeto final e qualquer outro material que seja gerado durante o curso.</a:t>
+              <a:t>pastas </a:t>
+            </a:r>
+            <a:r>
+              <a:rPr lang="pt-BR" b="1" i="1" dirty="0">
+                <a:solidFill>
+                  <a:schemeClr val="accent2"/>
+                </a:solidFill>
+              </a:rPr>
+              <a:t>distintas</a:t>
+            </a:r>
+            <a:r>
+              <a:rPr lang="pt-BR" dirty="0"/>
+              <a:t> para </a:t>
+            </a:r>
+          </a:p>
+          <a:p>
+            <a:pPr lvl="1" algn="just">
+              <a:spcBef>
+                <a:spcPts val="0"/>
+              </a:spcBef>
+              <a:buFont typeface="Wingdings" panose="05000000000000000000" pitchFamily="2" charset="2"/>
+              <a:buChar char="§"/>
+            </a:pPr>
+            <a:r>
+              <a:rPr lang="pt-BR" dirty="0"/>
+              <a:t>cada seminário, </a:t>
+            </a:r>
+          </a:p>
+          <a:p>
+            <a:pPr lvl="1" algn="just">
+              <a:spcBef>
+                <a:spcPts val="0"/>
+              </a:spcBef>
+              <a:buFont typeface="Wingdings" panose="05000000000000000000" pitchFamily="2" charset="2"/>
+              <a:buChar char="§"/>
+            </a:pPr>
+            <a:r>
+              <a:rPr lang="pt-BR" dirty="0"/>
+              <a:t>para o projeto final </a:t>
+            </a:r>
+          </a:p>
+          <a:p>
+            <a:pPr lvl="1" algn="just">
+              <a:spcBef>
+                <a:spcPts val="0"/>
+              </a:spcBef>
+              <a:buFont typeface="Wingdings" panose="05000000000000000000" pitchFamily="2" charset="2"/>
+              <a:buChar char="§"/>
+            </a:pPr>
+            <a:r>
+              <a:rPr lang="pt-BR" dirty="0"/>
+              <a:t>e qualquer outro material que seja gerado durante o curso.</a:t>
             </a:r>
           </a:p>
           <a:p>
@@ -10463,8 +10699,8 @@
         </p:nvSpPr>
         <p:spPr>
           <a:xfrm>
-            <a:off x="838200" y="1825624"/>
-            <a:ext cx="9672484" cy="5032376"/>
+            <a:off x="838199" y="1825624"/>
+            <a:ext cx="10038907" cy="5032376"/>
           </a:xfrm>
         </p:spPr>
         <p:txBody>
@@ -10493,7 +10729,7 @@
             </a:pPr>
             <a:r>
               <a:rPr lang="pt-BR" dirty="0"/>
-              <a:t>Cada aluno irá estudar artigos e apresentar aos demais.</a:t>
+              <a:t>Cada aluno irá estudar alguns artigos e apresentar aos demais.</a:t>
             </a:r>
           </a:p>
           <a:p>
@@ -10506,7 +10742,7 @@
             </a:pPr>
             <a:r>
               <a:rPr lang="pt-BR" dirty="0"/>
-              <a:t>Duas semanas para estudo e preparação da apresentação e quiz.</a:t>
+              <a:t>Duas semanas para o estudo e a preparação da apresentação e do quiz.</a:t>
             </a:r>
           </a:p>
           <a:p>
@@ -10742,7 +10978,7 @@
         </p:blipFill>
         <p:spPr>
           <a:xfrm>
-            <a:off x="8956795" y="5084433"/>
+            <a:off x="9084386" y="5074404"/>
             <a:ext cx="2868291" cy="1606243"/>
           </a:xfrm>
           <a:prstGeom prst="rect">
@@ -10939,7 +11175,19 @@
           <a:p>
             <a:r>
               <a:rPr lang="pt-BR" dirty="0"/>
-              <a:t>Vocês podem propor outros temas, basta me enviar o artigo de interesse para avaliação.</a:t>
+              <a:t>Vocês podem propor outros temas, basta me enviar o artigo de interesse </a:t>
+            </a:r>
+            <a:r>
+              <a:rPr lang="pt-BR" b="1" i="1" dirty="0">
+                <a:solidFill>
+                  <a:schemeClr val="accent2"/>
+                </a:solidFill>
+              </a:rPr>
+              <a:t>para avaliação</a:t>
+            </a:r>
+            <a:r>
+              <a:rPr lang="pt-BR" dirty="0"/>
+              <a:t>.</a:t>
             </a:r>
           </a:p>
         </p:txBody>

--- a/slides/TP558_1_Introdução_ao_curso.pptx
+++ b/slides/TP558_1_Introdução_ao_curso.pptx
@@ -1058,13 +1058,7 @@
           <a:bodyPr/>
           <a:lstStyle/>
           <a:p>
-            <a:r>
-              <a:rPr lang="pt-BR" dirty="0">
-                <a:hlinkClick r:id="rId3"/>
-              </a:rPr>
-              <a:t>books</a:t>
-            </a:r>
-            <a:endParaRPr lang="pt-BR" dirty="0"/>
+            <a:endParaRPr lang="en-US" dirty="0"/>
           </a:p>
         </p:txBody>
       </p:sp>
@@ -1085,7 +1079,7 @@
           <a:p>
             <a:fld id="{6FC8D850-966F-45A6-8DE7-15B891E7D40D}" type="slidenum">
               <a:rPr lang="pt-BR" smtClean="0"/>
-              <a:t>10</a:t>
+              <a:t>8</a:t>
             </a:fld>
             <a:endParaRPr lang="pt-BR"/>
           </a:p>
@@ -1094,7 +1088,7 @@
     </p:spTree>
     <p:extLst>
       <p:ext uri="{BB962C8B-B14F-4D97-AF65-F5344CB8AC3E}">
-        <p14:creationId xmlns:p14="http://schemas.microsoft.com/office/powerpoint/2010/main" val="928934584"/>
+        <p14:creationId xmlns:p14="http://schemas.microsoft.com/office/powerpoint/2010/main" val="3394459583"/>
       </p:ext>
     </p:extLst>
   </p:cSld>
@@ -1149,6 +1143,96 @@
           <a:lstStyle/>
           <a:p>
             <a:r>
+              <a:rPr lang="pt-BR" dirty="0">
+                <a:hlinkClick r:id="rId3"/>
+              </a:rPr>
+              <a:t>books</a:t>
+            </a:r>
+            <a:endParaRPr lang="pt-BR" dirty="0"/>
+          </a:p>
+        </p:txBody>
+      </p:sp>
+      <p:sp>
+        <p:nvSpPr>
+          <p:cNvPr id="4" name="Espaço Reservado para Número de Slide 3"/>
+          <p:cNvSpPr>
+            <a:spLocks noGrp="1"/>
+          </p:cNvSpPr>
+          <p:nvPr>
+            <p:ph type="sldNum" sz="quarter" idx="5"/>
+          </p:nvPr>
+        </p:nvSpPr>
+        <p:spPr/>
+        <p:txBody>
+          <a:bodyPr/>
+          <a:lstStyle/>
+          <a:p>
+            <a:fld id="{6FC8D850-966F-45A6-8DE7-15B891E7D40D}" type="slidenum">
+              <a:rPr lang="pt-BR" smtClean="0"/>
+              <a:t>10</a:t>
+            </a:fld>
+            <a:endParaRPr lang="pt-BR"/>
+          </a:p>
+        </p:txBody>
+      </p:sp>
+    </p:spTree>
+    <p:extLst>
+      <p:ext uri="{BB962C8B-B14F-4D97-AF65-F5344CB8AC3E}">
+        <p14:creationId xmlns:p14="http://schemas.microsoft.com/office/powerpoint/2010/main" val="928934584"/>
+      </p:ext>
+    </p:extLst>
+  </p:cSld>
+  <p:clrMapOvr>
+    <a:masterClrMapping/>
+  </p:clrMapOvr>
+</p:notes>
+</file>
+
+<file path=ppt/notesSlides/notesSlide6.xml><?xml version="1.0" encoding="utf-8"?>
+<p:notes xmlns:a="http://schemas.openxmlformats.org/drawingml/2006/main" xmlns:r="http://schemas.openxmlformats.org/officeDocument/2006/relationships" xmlns:p="http://schemas.openxmlformats.org/presentationml/2006/main">
+  <p:cSld>
+    <p:spTree>
+      <p:nvGrpSpPr>
+        <p:cNvPr id="1" name=""/>
+        <p:cNvGrpSpPr/>
+        <p:nvPr/>
+      </p:nvGrpSpPr>
+      <p:grpSpPr>
+        <a:xfrm>
+          <a:off x="0" y="0"/>
+          <a:ext cx="0" cy="0"/>
+          <a:chOff x="0" y="0"/>
+          <a:chExt cx="0" cy="0"/>
+        </a:xfrm>
+      </p:grpSpPr>
+      <p:sp>
+        <p:nvSpPr>
+          <p:cNvPr id="2" name="Espaço Reservado para Imagem de Slide 1"/>
+          <p:cNvSpPr>
+            <a:spLocks noGrp="1" noRot="1" noChangeAspect="1"/>
+          </p:cNvSpPr>
+          <p:nvPr>
+            <p:ph type="sldImg"/>
+          </p:nvPr>
+        </p:nvSpPr>
+        <p:spPr/>
+      </p:sp>
+      <p:sp>
+        <p:nvSpPr>
+          <p:cNvPr id="3" name="Espaço Reservado para Anotações 2"/>
+          <p:cNvSpPr>
+            <a:spLocks noGrp="1"/>
+          </p:cNvSpPr>
+          <p:nvPr>
+            <p:ph type="body" idx="1"/>
+          </p:nvPr>
+        </p:nvSpPr>
+        <p:spPr/>
+        <p:txBody>
+          <a:bodyPr/>
+          <a:lstStyle/>
+          <a:p>
+            <a:r>
               <a:rPr lang="pt-BR" sz="1200" b="0" i="0" kern="1200" dirty="0">
                 <a:solidFill>
                   <a:schemeClr val="tx1"/>
@@ -1296,7 +1380,7 @@
 </p:notes>
 </file>
 
-<file path=ppt/notesSlides/notesSlide6.xml><?xml version="1.0" encoding="utf-8"?>
+<file path=ppt/notesSlides/notesSlide7.xml><?xml version="1.0" encoding="utf-8"?>
 <p:notes xmlns:a="http://schemas.openxmlformats.org/drawingml/2006/main" xmlns:r="http://schemas.openxmlformats.org/officeDocument/2006/relationships" xmlns:p="http://schemas.openxmlformats.org/presentationml/2006/main">
   <p:cSld>
     <p:spTree>
@@ -11076,7 +11160,7 @@
             </a:r>
             <a:r>
               <a:rPr lang="pt-BR" dirty="0">
-                <a:hlinkClick r:id="rId2"/>
+                <a:hlinkClick r:id="rId3"/>
               </a:rPr>
               <a:t>http://tinyurl.com/tp558-seminars</a:t>
             </a:r>
@@ -11089,7 +11173,7 @@
             </a:r>
             <a:r>
               <a:rPr lang="pt-BR" dirty="0">
-                <a:hlinkClick r:id="rId3"/>
+                <a:hlinkClick r:id="rId4"/>
               </a:rPr>
               <a:t>http://tinyurl.com/tp558-final-project</a:t>
             </a:r>
